--- a/docs/기술설명서_초안.pptx
+++ b/docs/기술설명서_초안.pptx
@@ -19,6 +19,9 @@
     <p:sldId id="267" r:id="rId18"/>
     <p:sldId id="268" r:id="rId19"/>
     <p:sldId id="269" r:id="rId20"/>
+    <p:sldId id="270" r:id="rId21"/>
+    <p:sldId id="271" r:id="rId22"/>
+    <p:sldId id="272" r:id="rId23"/>
   </p:sldIdLst>
   <p:sldSz cx="12191695" cy="6858000" type="screen4x3"/>
   <p:notesSz cx="6858000" cy="9144000"/>
@@ -3365,6 +3368,2229 @@
                 </a:solidFill>
                 <a:latin typeface="맑은 고딕"/>
               </a:rPr>
+              <a:t>검사 항목 8종과 근거 조문</a:t>
+            </a:r>
+          </a:p>
+          <a:p>
+            <a:pPr algn="l">
+              <a:spcAft>
+                <a:spcPts val="600"/>
+              </a:spcAft>
+            </a:pPr>
+            <a:r>
+              <a:rPr sz="1400" b="0">
+                <a:solidFill>
+                  <a:srgbClr val="6B6B6B"/>
+                </a:solidFill>
+                <a:latin typeface="맑은 고딕"/>
+              </a:rPr>
+              <a:t>무엇을 검사하는지, 그리고 무엇을 검사하지 않는지 밝힌다</a:t>
+            </a:r>
+          </a:p>
+        </p:txBody>
+      </p:sp>
+      <p:sp>
+        <p:nvSpPr>
+          <p:cNvPr id="4" name="Rounded Rectangle 3"/>
+          <p:cNvSpPr/>
+          <p:nvPr/>
+        </p:nvSpPr>
+        <p:spPr>
+          <a:xfrm>
+            <a:off x="9646920" y="329184"/>
+            <a:ext cx="1965960" cy="384048"/>
+          </a:xfrm>
+          <a:prstGeom prst="roundRect">
+            <a:avLst/>
+          </a:prstGeom>
+          <a:solidFill>
+            <a:srgbClr val="FFF8DF"/>
+          </a:solidFill>
+          <a:ln>
+            <a:solidFill>
+              <a:srgbClr val="FCAF17"/>
+            </a:solidFill>
+          </a:ln>
+        </p:spPr>
+        <p:style>
+          <a:lnRef idx="1">
+            <a:schemeClr val="accent1"/>
+          </a:lnRef>
+          <a:fillRef idx="3">
+            <a:schemeClr val="accent1"/>
+          </a:fillRef>
+          <a:effectRef idx="2">
+            <a:schemeClr val="accent1"/>
+          </a:effectRef>
+          <a:fontRef idx="minor">
+            <a:schemeClr val="lt1"/>
+          </a:fontRef>
+        </p:style>
+        <p:txBody>
+          <a:bodyPr rtlCol="0" anchor="ctr" wrap="square"/>
+          <a:lstStyle/>
+          <a:p>
+            <a:pPr algn="ctr">
+              <a:spcAft>
+                <a:spcPts val="0"/>
+              </a:spcAft>
+            </a:pPr>
+            <a:r>
+              <a:rPr sz="1100" b="1">
+                <a:solidFill>
+                  <a:srgbClr val="645B4C"/>
+                </a:solidFill>
+                <a:latin typeface="맑은 고딕"/>
+              </a:rPr>
+              <a:t>기술 적정성</a:t>
+            </a:r>
+          </a:p>
+        </p:txBody>
+      </p:sp>
+      <p:graphicFrame>
+        <p:nvGraphicFramePr>
+          <p:cNvPr id="5" name="Table 4"/>
+          <p:cNvGraphicFramePr>
+            <a:graphicFrameLocks noGrp="1"/>
+          </p:cNvGraphicFramePr>
+          <p:nvPr/>
+        </p:nvGraphicFramePr>
+        <p:xfrm>
+          <a:off x="566928" y="1371600"/>
+          <a:ext cx="11064240" cy="2962656"/>
+        </p:xfrm>
+        <a:graphic>
+          <a:graphicData uri="http://schemas.openxmlformats.org/drawingml/2006/table">
+            <a:tbl>
+              <a:tblPr firstRow="1" bandRow="1">
+                <a:tableStyleId>{5C22544A-7EE6-4342-B048-85BDC9FD1C3A}</a:tableStyleId>
+              </a:tblPr>
+              <a:tblGrid>
+                <a:gridCol w="1280160"/>
+                <a:gridCol w="5486400"/>
+                <a:gridCol w="2103120"/>
+                <a:gridCol w="2194560"/>
+              </a:tblGrid>
+              <a:tr h="329184">
+                <a:tc>
+                  <a:txBody>
+                    <a:bodyPr wrap="square"/>
+                    <a:lstStyle/>
+                    <a:p>
+                      <a:pPr algn="l">
+                        <a:spcAft>
+                          <a:spcPts val="0"/>
+                        </a:spcAft>
+                      </a:pPr>
+                      <a:r>
+                        <a:rPr sz="1200" b="1">
+                          <a:solidFill>
+                            <a:srgbClr val="645B4C"/>
+                          </a:solidFill>
+                          <a:latin typeface="맑은 고딕"/>
+                        </a:rPr>
+                        <a:t>규칙</a:t>
+                      </a:r>
+                    </a:p>
+                  </a:txBody>
+                  <a:tcPr>
+                    <a:solidFill>
+                      <a:srgbClr val="FFF8DF"/>
+                    </a:solidFill>
+                  </a:tcPr>
+                </a:tc>
+                <a:tc>
+                  <a:txBody>
+                    <a:bodyPr wrap="square"/>
+                    <a:lstStyle/>
+                    <a:p>
+                      <a:pPr algn="l">
+                        <a:spcAft>
+                          <a:spcPts val="0"/>
+                        </a:spcAft>
+                      </a:pPr>
+                      <a:r>
+                        <a:rPr sz="1200" b="1">
+                          <a:solidFill>
+                            <a:srgbClr val="645B4C"/>
+                          </a:solidFill>
+                          <a:latin typeface="맑은 고딕"/>
+                        </a:rPr>
+                        <a:t>검사 내용</a:t>
+                      </a:r>
+                    </a:p>
+                  </a:txBody>
+                  <a:tcPr>
+                    <a:solidFill>
+                      <a:srgbClr val="FFF8DF"/>
+                    </a:solidFill>
+                  </a:tcPr>
+                </a:tc>
+                <a:tc>
+                  <a:txBody>
+                    <a:bodyPr wrap="square"/>
+                    <a:lstStyle/>
+                    <a:p>
+                      <a:pPr algn="l">
+                        <a:spcAft>
+                          <a:spcPts val="0"/>
+                        </a:spcAft>
+                      </a:pPr>
+                      <a:r>
+                        <a:rPr sz="1200" b="1">
+                          <a:solidFill>
+                            <a:srgbClr val="645B4C"/>
+                          </a:solidFill>
+                          <a:latin typeface="맑은 고딕"/>
+                        </a:rPr>
+                        <a:t>근거</a:t>
+                      </a:r>
+                    </a:p>
+                  </a:txBody>
+                  <a:tcPr>
+                    <a:solidFill>
+                      <a:srgbClr val="FFF8DF"/>
+                    </a:solidFill>
+                  </a:tcPr>
+                </a:tc>
+                <a:tc>
+                  <a:txBody>
+                    <a:bodyPr wrap="square"/>
+                    <a:lstStyle/>
+                    <a:p>
+                      <a:pPr algn="l">
+                        <a:spcAft>
+                          <a:spcPts val="0"/>
+                        </a:spcAft>
+                      </a:pPr>
+                      <a:r>
+                        <a:rPr sz="1200" b="1">
+                          <a:solidFill>
+                            <a:srgbClr val="645B4C"/>
+                          </a:solidFill>
+                          <a:latin typeface="맑은 고딕"/>
+                        </a:rPr>
+                        <a:t>한 문서로 가능?</a:t>
+                      </a:r>
+                    </a:p>
+                  </a:txBody>
+                  <a:tcPr>
+                    <a:solidFill>
+                      <a:srgbClr val="FFF8DF"/>
+                    </a:solidFill>
+                  </a:tcPr>
+                </a:tc>
+              </a:tr>
+              <a:tr h="329184">
+                <a:tc>
+                  <a:txBody>
+                    <a:bodyPr wrap="square"/>
+                    <a:lstStyle/>
+                    <a:p>
+                      <a:pPr algn="l">
+                        <a:spcAft>
+                          <a:spcPts val="0"/>
+                        </a:spcAft>
+                      </a:pPr>
+                      <a:r>
+                        <a:rPr sz="1000" b="0">
+                          <a:solidFill>
+                            <a:srgbClr val="2B2B2B"/>
+                          </a:solidFill>
+                          <a:latin typeface="맑은 고딕"/>
+                        </a:rPr>
+                        <a:t>FIT-001</a:t>
+                      </a:r>
+                    </a:p>
+                  </a:txBody>
+                  <a:tcPr>
+                    <a:solidFill>
+                      <a:srgbClr val="FFFFFF"/>
+                    </a:solidFill>
+                  </a:tcPr>
+                </a:tc>
+                <a:tc>
+                  <a:txBody>
+                    <a:bodyPr wrap="square"/>
+                    <a:lstStyle/>
+                    <a:p>
+                      <a:pPr algn="l">
+                        <a:spcAft>
+                          <a:spcPts val="0"/>
+                        </a:spcAft>
+                      </a:pPr>
+                      <a:r>
+                        <a:rPr sz="1000" b="0">
+                          <a:solidFill>
+                            <a:srgbClr val="2B2B2B"/>
+                          </a:solidFill>
+                          <a:latin typeface="맑은 고딕"/>
+                        </a:rPr>
+                        <a:t>고객 투자성향 ↔ 상품 위험등급 적합성</a:t>
+                      </a:r>
+                    </a:p>
+                  </a:txBody>
+                  <a:tcPr>
+                    <a:solidFill>
+                      <a:srgbClr val="FFFFFF"/>
+                    </a:solidFill>
+                  </a:tcPr>
+                </a:tc>
+                <a:tc>
+                  <a:txBody>
+                    <a:bodyPr wrap="square"/>
+                    <a:lstStyle/>
+                    <a:p>
+                      <a:pPr algn="l">
+                        <a:spcAft>
+                          <a:spcPts val="0"/>
+                        </a:spcAft>
+                      </a:pPr>
+                      <a:r>
+                        <a:rPr sz="1000" b="0">
+                          <a:solidFill>
+                            <a:srgbClr val="2B2B2B"/>
+                          </a:solidFill>
+                          <a:latin typeface="맑은 고딕"/>
+                        </a:rPr>
+                        <a:t>금소법 17조</a:t>
+                      </a:r>
+                    </a:p>
+                  </a:txBody>
+                  <a:tcPr>
+                    <a:solidFill>
+                      <a:srgbClr val="FFFFFF"/>
+                    </a:solidFill>
+                  </a:tcPr>
+                </a:tc>
+                <a:tc>
+                  <a:txBody>
+                    <a:bodyPr wrap="square"/>
+                    <a:lstStyle/>
+                    <a:p>
+                      <a:pPr algn="l">
+                        <a:spcAft>
+                          <a:spcPts val="0"/>
+                        </a:spcAft>
+                      </a:pPr>
+                      <a:r>
+                        <a:rPr sz="1000" b="0">
+                          <a:solidFill>
+                            <a:srgbClr val="2B2B2B"/>
+                          </a:solidFill>
+                          <a:latin typeface="맑은 고딕"/>
+                        </a:rPr>
+                        <a:t>불가 (교차)</a:t>
+                      </a:r>
+                    </a:p>
+                  </a:txBody>
+                  <a:tcPr>
+                    <a:solidFill>
+                      <a:srgbClr val="FFFFFF"/>
+                    </a:solidFill>
+                  </a:tcPr>
+                </a:tc>
+              </a:tr>
+              <a:tr h="329184">
+                <a:tc>
+                  <a:txBody>
+                    <a:bodyPr wrap="square"/>
+                    <a:lstStyle/>
+                    <a:p>
+                      <a:pPr algn="l">
+                        <a:spcAft>
+                          <a:spcPts val="0"/>
+                        </a:spcAft>
+                      </a:pPr>
+                      <a:r>
+                        <a:rPr sz="1000" b="0">
+                          <a:solidFill>
+                            <a:srgbClr val="2B2B2B"/>
+                          </a:solidFill>
+                          <a:latin typeface="맑은 고딕"/>
+                        </a:rPr>
+                        <a:t>EXP-001</a:t>
+                      </a:r>
+                    </a:p>
+                  </a:txBody>
+                  <a:tcPr>
+                    <a:solidFill>
+                      <a:srgbClr val="FFFFFF"/>
+                    </a:solidFill>
+                  </a:tcPr>
+                </a:tc>
+                <a:tc>
+                  <a:txBody>
+                    <a:bodyPr wrap="square"/>
+                    <a:lstStyle/>
+                    <a:p>
+                      <a:pPr algn="l">
+                        <a:spcAft>
+                          <a:spcPts val="0"/>
+                        </a:spcAft>
+                      </a:pPr>
+                      <a:r>
+                        <a:rPr sz="1000" b="0">
+                          <a:solidFill>
+                            <a:srgbClr val="2B2B2B"/>
+                          </a:solidFill>
+                          <a:latin typeface="맑은 고딕"/>
+                        </a:rPr>
+                        <a:t>원금손실·위험등급·수수료 설명 존재</a:t>
+                      </a:r>
+                    </a:p>
+                  </a:txBody>
+                  <a:tcPr>
+                    <a:solidFill>
+                      <a:srgbClr val="FFFFFF"/>
+                    </a:solidFill>
+                  </a:tcPr>
+                </a:tc>
+                <a:tc>
+                  <a:txBody>
+                    <a:bodyPr wrap="square"/>
+                    <a:lstStyle/>
+                    <a:p>
+                      <a:pPr algn="l">
+                        <a:spcAft>
+                          <a:spcPts val="0"/>
+                        </a:spcAft>
+                      </a:pPr>
+                      <a:r>
+                        <a:rPr sz="1000" b="0">
+                          <a:solidFill>
+                            <a:srgbClr val="2B2B2B"/>
+                          </a:solidFill>
+                          <a:latin typeface="맑은 고딕"/>
+                        </a:rPr>
+                        <a:t>금소법 19조</a:t>
+                      </a:r>
+                    </a:p>
+                  </a:txBody>
+                  <a:tcPr>
+                    <a:solidFill>
+                      <a:srgbClr val="FFFFFF"/>
+                    </a:solidFill>
+                  </a:tcPr>
+                </a:tc>
+                <a:tc>
+                  <a:txBody>
+                    <a:bodyPr wrap="square"/>
+                    <a:lstStyle/>
+                    <a:p>
+                      <a:pPr algn="l">
+                        <a:spcAft>
+                          <a:spcPts val="0"/>
+                        </a:spcAft>
+                      </a:pPr>
+                      <a:r>
+                        <a:rPr sz="1000" b="0">
+                          <a:solidFill>
+                            <a:srgbClr val="2B2B2B"/>
+                          </a:solidFill>
+                          <a:latin typeface="맑은 고딕"/>
+                        </a:rPr>
+                        <a:t>가능</a:t>
+                      </a:r>
+                    </a:p>
+                  </a:txBody>
+                  <a:tcPr>
+                    <a:solidFill>
+                      <a:srgbClr val="FFFFFF"/>
+                    </a:solidFill>
+                  </a:tcPr>
+                </a:tc>
+              </a:tr>
+              <a:tr h="329184">
+                <a:tc>
+                  <a:txBody>
+                    <a:bodyPr wrap="square"/>
+                    <a:lstStyle/>
+                    <a:p>
+                      <a:pPr algn="l">
+                        <a:spcAft>
+                          <a:spcPts val="0"/>
+                        </a:spcAft>
+                      </a:pPr>
+                      <a:r>
+                        <a:rPr sz="1000" b="0">
+                          <a:solidFill>
+                            <a:srgbClr val="2B2B2B"/>
+                          </a:solidFill>
+                          <a:latin typeface="맑은 고딕"/>
+                        </a:rPr>
+                        <a:t>DATE-001</a:t>
+                      </a:r>
+                    </a:p>
+                  </a:txBody>
+                  <a:tcPr>
+                    <a:solidFill>
+                      <a:srgbClr val="FFFFFF"/>
+                    </a:solidFill>
+                  </a:tcPr>
+                </a:tc>
+                <a:tc>
+                  <a:txBody>
+                    <a:bodyPr wrap="square"/>
+                    <a:lstStyle/>
+                    <a:p>
+                      <a:pPr algn="l">
+                        <a:spcAft>
+                          <a:spcPts val="0"/>
+                        </a:spcAft>
+                      </a:pPr>
+                      <a:r>
+                        <a:rPr sz="1000" b="0">
+                          <a:solidFill>
+                            <a:srgbClr val="2B2B2B"/>
+                          </a:solidFill>
+                          <a:latin typeface="맑은 고딕"/>
+                        </a:rPr>
+                        <a:t>설명일이 계약일보다 선행하는지</a:t>
+                      </a:r>
+                    </a:p>
+                  </a:txBody>
+                  <a:tcPr>
+                    <a:solidFill>
+                      <a:srgbClr val="FFFFFF"/>
+                    </a:solidFill>
+                  </a:tcPr>
+                </a:tc>
+                <a:tc>
+                  <a:txBody>
+                    <a:bodyPr wrap="square"/>
+                    <a:lstStyle/>
+                    <a:p>
+                      <a:pPr algn="l">
+                        <a:spcAft>
+                          <a:spcPts val="0"/>
+                        </a:spcAft>
+                      </a:pPr>
+                      <a:r>
+                        <a:rPr sz="1000" b="0">
+                          <a:solidFill>
+                            <a:srgbClr val="2B2B2B"/>
+                          </a:solidFill>
+                          <a:latin typeface="맑은 고딕"/>
+                        </a:rPr>
+                        <a:t>금소법 19조</a:t>
+                      </a:r>
+                    </a:p>
+                  </a:txBody>
+                  <a:tcPr>
+                    <a:solidFill>
+                      <a:srgbClr val="FFFFFF"/>
+                    </a:solidFill>
+                  </a:tcPr>
+                </a:tc>
+                <a:tc>
+                  <a:txBody>
+                    <a:bodyPr wrap="square"/>
+                    <a:lstStyle/>
+                    <a:p>
+                      <a:pPr algn="l">
+                        <a:spcAft>
+                          <a:spcPts val="0"/>
+                        </a:spcAft>
+                      </a:pPr>
+                      <a:r>
+                        <a:rPr sz="1000" b="0">
+                          <a:solidFill>
+                            <a:srgbClr val="2B2B2B"/>
+                          </a:solidFill>
+                          <a:latin typeface="맑은 고딕"/>
+                        </a:rPr>
+                        <a:t>불가 (교차)</a:t>
+                      </a:r>
+                    </a:p>
+                  </a:txBody>
+                  <a:tcPr>
+                    <a:solidFill>
+                      <a:srgbClr val="FFFFFF"/>
+                    </a:solidFill>
+                  </a:tcPr>
+                </a:tc>
+              </a:tr>
+              <a:tr h="329184">
+                <a:tc>
+                  <a:txBody>
+                    <a:bodyPr wrap="square"/>
+                    <a:lstStyle/>
+                    <a:p>
+                      <a:pPr algn="l">
+                        <a:spcAft>
+                          <a:spcPts val="0"/>
+                        </a:spcAft>
+                      </a:pPr>
+                      <a:r>
+                        <a:rPr sz="1000" b="0">
+                          <a:solidFill>
+                            <a:srgbClr val="2B2B2B"/>
+                          </a:solidFill>
+                          <a:latin typeface="맑은 고딕"/>
+                        </a:rPr>
+                        <a:t>ACK-001</a:t>
+                      </a:r>
+                    </a:p>
+                  </a:txBody>
+                  <a:tcPr>
+                    <a:solidFill>
+                      <a:srgbClr val="FFFFFF"/>
+                    </a:solidFill>
+                  </a:tcPr>
+                </a:tc>
+                <a:tc>
+                  <a:txBody>
+                    <a:bodyPr wrap="square"/>
+                    <a:lstStyle/>
+                    <a:p>
+                      <a:pPr algn="l">
+                        <a:spcAft>
+                          <a:spcPts val="0"/>
+                        </a:spcAft>
+                      </a:pPr>
+                      <a:r>
+                        <a:rPr sz="1000" b="0">
+                          <a:solidFill>
+                            <a:srgbClr val="2B2B2B"/>
+                          </a:solidFill>
+                          <a:latin typeface="맑은 고딕"/>
+                        </a:rPr>
+                        <a:t>고객 설명 확인·서명 증빙</a:t>
+                      </a:r>
+                    </a:p>
+                  </a:txBody>
+                  <a:tcPr>
+                    <a:solidFill>
+                      <a:srgbClr val="FFFFFF"/>
+                    </a:solidFill>
+                  </a:tcPr>
+                </a:tc>
+                <a:tc>
+                  <a:txBody>
+                    <a:bodyPr wrap="square"/>
+                    <a:lstStyle/>
+                    <a:p>
+                      <a:pPr algn="l">
+                        <a:spcAft>
+                          <a:spcPts val="0"/>
+                        </a:spcAft>
+                      </a:pPr>
+                      <a:r>
+                        <a:rPr sz="1000" b="0">
+                          <a:solidFill>
+                            <a:srgbClr val="2B2B2B"/>
+                          </a:solidFill>
+                          <a:latin typeface="맑은 고딕"/>
+                        </a:rPr>
+                        <a:t>금소법 19조</a:t>
+                      </a:r>
+                    </a:p>
+                  </a:txBody>
+                  <a:tcPr>
+                    <a:solidFill>
+                      <a:srgbClr val="FFFFFF"/>
+                    </a:solidFill>
+                  </a:tcPr>
+                </a:tc>
+                <a:tc>
+                  <a:txBody>
+                    <a:bodyPr wrap="square"/>
+                    <a:lstStyle/>
+                    <a:p>
+                      <a:pPr algn="l">
+                        <a:spcAft>
+                          <a:spcPts val="0"/>
+                        </a:spcAft>
+                      </a:pPr>
+                      <a:r>
+                        <a:rPr sz="1000" b="0">
+                          <a:solidFill>
+                            <a:srgbClr val="2B2B2B"/>
+                          </a:solidFill>
+                          <a:latin typeface="맑은 고딕"/>
+                        </a:rPr>
+                        <a:t>가능</a:t>
+                      </a:r>
+                    </a:p>
+                  </a:txBody>
+                  <a:tcPr>
+                    <a:solidFill>
+                      <a:srgbClr val="FFFFFF"/>
+                    </a:solidFill>
+                  </a:tcPr>
+                </a:tc>
+              </a:tr>
+              <a:tr h="329184">
+                <a:tc>
+                  <a:txBody>
+                    <a:bodyPr wrap="square"/>
+                    <a:lstStyle/>
+                    <a:p>
+                      <a:pPr algn="l">
+                        <a:spcAft>
+                          <a:spcPts val="0"/>
+                        </a:spcAft>
+                      </a:pPr>
+                      <a:r>
+                        <a:rPr sz="1000" b="0">
+                          <a:solidFill>
+                            <a:srgbClr val="2B2B2B"/>
+                          </a:solidFill>
+                          <a:latin typeface="맑은 고딕"/>
+                        </a:rPr>
+                        <a:t>PKG-001</a:t>
+                      </a:r>
+                    </a:p>
+                  </a:txBody>
+                  <a:tcPr>
+                    <a:solidFill>
+                      <a:srgbClr val="FFFFFF"/>
+                    </a:solidFill>
+                  </a:tcPr>
+                </a:tc>
+                <a:tc>
+                  <a:txBody>
+                    <a:bodyPr wrap="square"/>
+                    <a:lstStyle/>
+                    <a:p>
+                      <a:pPr algn="l">
+                        <a:spcAft>
+                          <a:spcPts val="0"/>
+                        </a:spcAft>
+                      </a:pPr>
+                      <a:r>
+                        <a:rPr sz="1000" b="0">
+                          <a:solidFill>
+                            <a:srgbClr val="2B2B2B"/>
+                          </a:solidFill>
+                          <a:latin typeface="맑은 고딕"/>
+                        </a:rPr>
+                        <a:t>서류 간 상품명·상품코드 동일성</a:t>
+                      </a:r>
+                    </a:p>
+                  </a:txBody>
+                  <a:tcPr>
+                    <a:solidFill>
+                      <a:srgbClr val="FFFFFF"/>
+                    </a:solidFill>
+                  </a:tcPr>
+                </a:tc>
+                <a:tc>
+                  <a:txBody>
+                    <a:bodyPr wrap="square"/>
+                    <a:lstStyle/>
+                    <a:p>
+                      <a:pPr algn="l">
+                        <a:spcAft>
+                          <a:spcPts val="0"/>
+                        </a:spcAft>
+                      </a:pPr>
+                      <a:r>
+                        <a:rPr sz="1000" b="0">
+                          <a:solidFill>
+                            <a:srgbClr val="2B2B2B"/>
+                          </a:solidFill>
+                          <a:latin typeface="맑은 고딕"/>
+                        </a:rPr>
+                        <a:t>금소법 19조</a:t>
+                      </a:r>
+                    </a:p>
+                  </a:txBody>
+                  <a:tcPr>
+                    <a:solidFill>
+                      <a:srgbClr val="FFFFFF"/>
+                    </a:solidFill>
+                  </a:tcPr>
+                </a:tc>
+                <a:tc>
+                  <a:txBody>
+                    <a:bodyPr wrap="square"/>
+                    <a:lstStyle/>
+                    <a:p>
+                      <a:pPr algn="l">
+                        <a:spcAft>
+                          <a:spcPts val="0"/>
+                        </a:spcAft>
+                      </a:pPr>
+                      <a:r>
+                        <a:rPr sz="1000" b="0">
+                          <a:solidFill>
+                            <a:srgbClr val="2B2B2B"/>
+                          </a:solidFill>
+                          <a:latin typeface="맑은 고딕"/>
+                        </a:rPr>
+                        <a:t>불가 (교차)</a:t>
+                      </a:r>
+                    </a:p>
+                  </a:txBody>
+                  <a:tcPr>
+                    <a:solidFill>
+                      <a:srgbClr val="FFFFFF"/>
+                    </a:solidFill>
+                  </a:tcPr>
+                </a:tc>
+              </a:tr>
+              <a:tr h="329184">
+                <a:tc>
+                  <a:txBody>
+                    <a:bodyPr wrap="square"/>
+                    <a:lstStyle/>
+                    <a:p>
+                      <a:pPr algn="l">
+                        <a:spcAft>
+                          <a:spcPts val="0"/>
+                        </a:spcAft>
+                      </a:pPr>
+                      <a:r>
+                        <a:rPr sz="1000" b="0">
+                          <a:solidFill>
+                            <a:srgbClr val="2B2B2B"/>
+                          </a:solidFill>
+                          <a:latin typeface="맑은 고딕"/>
+                        </a:rPr>
+                        <a:t>ADV-001</a:t>
+                      </a:r>
+                    </a:p>
+                  </a:txBody>
+                  <a:tcPr>
+                    <a:solidFill>
+                      <a:srgbClr val="FFFFFF"/>
+                    </a:solidFill>
+                  </a:tcPr>
+                </a:tc>
+                <a:tc>
+                  <a:txBody>
+                    <a:bodyPr wrap="square"/>
+                    <a:lstStyle/>
+                    <a:p>
+                      <a:pPr algn="l">
+                        <a:spcAft>
+                          <a:spcPts val="0"/>
+                        </a:spcAft>
+                      </a:pPr>
+                      <a:r>
+                        <a:rPr sz="1000" b="0">
+                          <a:solidFill>
+                            <a:srgbClr val="2B2B2B"/>
+                          </a:solidFill>
+                          <a:latin typeface="맑은 고딕"/>
+                        </a:rPr>
+                        <a:t>원금보장·확정수익 등 부당권유 표현</a:t>
+                      </a:r>
+                    </a:p>
+                  </a:txBody>
+                  <a:tcPr>
+                    <a:solidFill>
+                      <a:srgbClr val="FFFFFF"/>
+                    </a:solidFill>
+                  </a:tcPr>
+                </a:tc>
+                <a:tc>
+                  <a:txBody>
+                    <a:bodyPr wrap="square"/>
+                    <a:lstStyle/>
+                    <a:p>
+                      <a:pPr algn="l">
+                        <a:spcAft>
+                          <a:spcPts val="0"/>
+                        </a:spcAft>
+                      </a:pPr>
+                      <a:r>
+                        <a:rPr sz="1000" b="0">
+                          <a:solidFill>
+                            <a:srgbClr val="2B2B2B"/>
+                          </a:solidFill>
+                          <a:latin typeface="맑은 고딕"/>
+                        </a:rPr>
+                        <a:t>금소법 21조</a:t>
+                      </a:r>
+                    </a:p>
+                  </a:txBody>
+                  <a:tcPr>
+                    <a:solidFill>
+                      <a:srgbClr val="FFFFFF"/>
+                    </a:solidFill>
+                  </a:tcPr>
+                </a:tc>
+                <a:tc>
+                  <a:txBody>
+                    <a:bodyPr wrap="square"/>
+                    <a:lstStyle/>
+                    <a:p>
+                      <a:pPr algn="l">
+                        <a:spcAft>
+                          <a:spcPts val="0"/>
+                        </a:spcAft>
+                      </a:pPr>
+                      <a:r>
+                        <a:rPr sz="1000" b="0">
+                          <a:solidFill>
+                            <a:srgbClr val="2B2B2B"/>
+                          </a:solidFill>
+                          <a:latin typeface="맑은 고딕"/>
+                        </a:rPr>
+                        <a:t>가능</a:t>
+                      </a:r>
+                    </a:p>
+                  </a:txBody>
+                  <a:tcPr>
+                    <a:solidFill>
+                      <a:srgbClr val="FFFFFF"/>
+                    </a:solidFill>
+                  </a:tcPr>
+                </a:tc>
+              </a:tr>
+              <a:tr h="329184">
+                <a:tc>
+                  <a:txBody>
+                    <a:bodyPr wrap="square"/>
+                    <a:lstStyle/>
+                    <a:p>
+                      <a:pPr algn="l">
+                        <a:spcAft>
+                          <a:spcPts val="0"/>
+                        </a:spcAft>
+                      </a:pPr>
+                      <a:r>
+                        <a:rPr sz="1000" b="0">
+                          <a:solidFill>
+                            <a:srgbClr val="2B2B2B"/>
+                          </a:solidFill>
+                          <a:latin typeface="맑은 고딕"/>
+                        </a:rPr>
+                        <a:t>DOC-001</a:t>
+                      </a:r>
+                    </a:p>
+                  </a:txBody>
+                  <a:tcPr>
+                    <a:solidFill>
+                      <a:srgbClr val="FFFFFF"/>
+                    </a:solidFill>
+                  </a:tcPr>
+                </a:tc>
+                <a:tc>
+                  <a:txBody>
+                    <a:bodyPr wrap="square"/>
+                    <a:lstStyle/>
+                    <a:p>
+                      <a:pPr algn="l">
+                        <a:spcAft>
+                          <a:spcPts val="0"/>
+                        </a:spcAft>
+                      </a:pPr>
+                      <a:r>
+                        <a:rPr sz="1000" b="0">
+                          <a:solidFill>
+                            <a:srgbClr val="2B2B2B"/>
+                          </a:solidFill>
+                          <a:latin typeface="맑은 고딕"/>
+                        </a:rPr>
+                        <a:t>판매서류 4종 구비 여부</a:t>
+                      </a:r>
+                    </a:p>
+                  </a:txBody>
+                  <a:tcPr>
+                    <a:solidFill>
+                      <a:srgbClr val="FFFFFF"/>
+                    </a:solidFill>
+                  </a:tcPr>
+                </a:tc>
+                <a:tc>
+                  <a:txBody>
+                    <a:bodyPr wrap="square"/>
+                    <a:lstStyle/>
+                    <a:p>
+                      <a:pPr algn="l">
+                        <a:spcAft>
+                          <a:spcPts val="0"/>
+                        </a:spcAft>
+                      </a:pPr>
+                      <a:r>
+                        <a:rPr sz="1000" b="0">
+                          <a:solidFill>
+                            <a:srgbClr val="2B2B2B"/>
+                          </a:solidFill>
+                          <a:latin typeface="맑은 고딕"/>
+                        </a:rPr>
+                        <a:t>금소법 23조</a:t>
+                      </a:r>
+                    </a:p>
+                  </a:txBody>
+                  <a:tcPr>
+                    <a:solidFill>
+                      <a:srgbClr val="FFFFFF"/>
+                    </a:solidFill>
+                  </a:tcPr>
+                </a:tc>
+                <a:tc>
+                  <a:txBody>
+                    <a:bodyPr wrap="square"/>
+                    <a:lstStyle/>
+                    <a:p>
+                      <a:pPr algn="l">
+                        <a:spcAft>
+                          <a:spcPts val="0"/>
+                        </a:spcAft>
+                      </a:pPr>
+                      <a:r>
+                        <a:rPr sz="1000" b="0">
+                          <a:solidFill>
+                            <a:srgbClr val="2B2B2B"/>
+                          </a:solidFill>
+                          <a:latin typeface="맑은 고딕"/>
+                        </a:rPr>
+                        <a:t>불가 (교차)</a:t>
+                      </a:r>
+                    </a:p>
+                  </a:txBody>
+                  <a:tcPr>
+                    <a:solidFill>
+                      <a:srgbClr val="FFFFFF"/>
+                    </a:solidFill>
+                  </a:tcPr>
+                </a:tc>
+              </a:tr>
+              <a:tr h="329184">
+                <a:tc>
+                  <a:txBody>
+                    <a:bodyPr wrap="square"/>
+                    <a:lstStyle/>
+                    <a:p>
+                      <a:pPr algn="l">
+                        <a:spcAft>
+                          <a:spcPts val="0"/>
+                        </a:spcAft>
+                      </a:pPr>
+                      <a:r>
+                        <a:rPr sz="1000" b="0">
+                          <a:solidFill>
+                            <a:srgbClr val="2B2B2B"/>
+                          </a:solidFill>
+                          <a:latin typeface="맑은 고딕"/>
+                        </a:rPr>
+                        <a:t>REC-001</a:t>
+                      </a:r>
+                    </a:p>
+                  </a:txBody>
+                  <a:tcPr>
+                    <a:solidFill>
+                      <a:srgbClr val="FFFFFF"/>
+                    </a:solidFill>
+                  </a:tcPr>
+                </a:tc>
+                <a:tc>
+                  <a:txBody>
+                    <a:bodyPr wrap="square"/>
+                    <a:lstStyle/>
+                    <a:p>
+                      <a:pPr algn="l">
+                        <a:spcAft>
+                          <a:spcPts val="0"/>
+                        </a:spcAft>
+                      </a:pPr>
+                      <a:r>
+                        <a:rPr sz="1000" b="0">
+                          <a:solidFill>
+                            <a:srgbClr val="2B2B2B"/>
+                          </a:solidFill>
+                          <a:latin typeface="맑은 고딕"/>
+                        </a:rPr>
+                        <a:t>녹취 의무 대상 여부(고위험·고령·부적합)</a:t>
+                      </a:r>
+                    </a:p>
+                  </a:txBody>
+                  <a:tcPr>
+                    <a:solidFill>
+                      <a:srgbClr val="FFFFFF"/>
+                    </a:solidFill>
+                  </a:tcPr>
+                </a:tc>
+                <a:tc>
+                  <a:txBody>
+                    <a:bodyPr wrap="square"/>
+                    <a:lstStyle/>
+                    <a:p>
+                      <a:pPr algn="l">
+                        <a:spcAft>
+                          <a:spcPts val="0"/>
+                        </a:spcAft>
+                      </a:pPr>
+                      <a:r>
+                        <a:rPr sz="1000" b="0">
+                          <a:solidFill>
+                            <a:srgbClr val="2B2B2B"/>
+                          </a:solidFill>
+                          <a:latin typeface="맑은 고딕"/>
+                        </a:rPr>
+                        <a:t>금소법 28조</a:t>
+                      </a:r>
+                    </a:p>
+                  </a:txBody>
+                  <a:tcPr>
+                    <a:solidFill>
+                      <a:srgbClr val="FFFFFF"/>
+                    </a:solidFill>
+                  </a:tcPr>
+                </a:tc>
+                <a:tc>
+                  <a:txBody>
+                    <a:bodyPr wrap="square"/>
+                    <a:lstStyle/>
+                    <a:p>
+                      <a:pPr algn="l">
+                        <a:spcAft>
+                          <a:spcPts val="0"/>
+                        </a:spcAft>
+                      </a:pPr>
+                      <a:r>
+                        <a:rPr sz="1000" b="0">
+                          <a:solidFill>
+                            <a:srgbClr val="2B2B2B"/>
+                          </a:solidFill>
+                          <a:latin typeface="맑은 고딕"/>
+                        </a:rPr>
+                        <a:t>가능</a:t>
+                      </a:r>
+                    </a:p>
+                  </a:txBody>
+                  <a:tcPr>
+                    <a:solidFill>
+                      <a:srgbClr val="FFFFFF"/>
+                    </a:solidFill>
+                  </a:tcPr>
+                </a:tc>
+              </a:tr>
+            </a:tbl>
+          </a:graphicData>
+        </a:graphic>
+      </p:graphicFrame>
+      <p:sp>
+        <p:nvSpPr>
+          <p:cNvPr id="6" name="TextBox 5"/>
+          <p:cNvSpPr txBox="1"/>
+          <p:nvPr/>
+        </p:nvSpPr>
+        <p:spPr>
+          <a:xfrm>
+            <a:off x="566928" y="5120640"/>
+            <a:ext cx="11064240" cy="1280160"/>
+          </a:xfrm>
+          <a:prstGeom prst="rect">
+            <a:avLst/>
+          </a:prstGeom>
+          <a:noFill/>
+        </p:spPr>
+        <p:txBody>
+          <a:bodyPr wrap="square">
+            <a:spAutoFit/>
+          </a:bodyPr>
+          <a:lstStyle/>
+          <a:p>
+            <a:pPr algn="l">
+              <a:spcAft>
+                <a:spcPts val="600"/>
+              </a:spcAft>
+            </a:pPr>
+            <a:r>
+              <a:rPr sz="1300" b="1">
+                <a:solidFill>
+                  <a:srgbClr val="645B4C"/>
+                </a:solidFill>
+                <a:latin typeface="맑은 고딕"/>
+              </a:rPr>
+              <a:t>검사 범위를 화면에 명시합니다 — 적정성(18조)·불공정영업(20조)·광고(22조)는 대상이 아님을 밝힙니다.</a:t>
+            </a:r>
+          </a:p>
+          <a:p>
+            <a:pPr algn="l">
+              <a:spcAft>
+                <a:spcPts val="600"/>
+              </a:spcAft>
+            </a:pPr>
+            <a:r>
+              <a:rPr sz="1200" b="0">
+                <a:solidFill>
+                  <a:srgbClr val="2B2B2B"/>
+                </a:solidFill>
+                <a:latin typeface="맑은 고딕"/>
+              </a:rPr>
+              <a:t>녹취(REC-001)는 음성을 판독하지 않고 '녹취가 필요한 판매 건인지'만 표시합니다. 검사하지 못하는 것을 검사한 척하지 않는 것이 컴플라이언스 도구의 신뢰 조건입니다.</a:t>
+            </a:r>
+          </a:p>
+        </p:txBody>
+      </p:sp>
+    </p:spTree>
+  </p:cSld>
+  <p:clrMapOvr>
+    <a:masterClrMapping/>
+  </p:clrMapOvr>
+</p:sld>
+</file>
+
+<file path=ppt/slides/slide11.xml><?xml version="1.0" encoding="utf-8"?>
+<p:sld xmlns:a="http://schemas.openxmlformats.org/drawingml/2006/main" xmlns:p="http://schemas.openxmlformats.org/presentationml/2006/main" xmlns:r="http://schemas.openxmlformats.org/officeDocument/2006/relationships">
+  <p:cSld>
+    <p:spTree>
+      <p:nvGrpSpPr>
+        <p:cNvPr id="1" name=""/>
+        <p:cNvGrpSpPr/>
+        <p:nvPr/>
+      </p:nvGrpSpPr>
+      <p:grpSpPr/>
+      <p:sp>
+        <p:nvSpPr>
+          <p:cNvPr id="2" name="Rectangle 1"/>
+          <p:cNvSpPr/>
+          <p:nvPr/>
+        </p:nvSpPr>
+        <p:spPr>
+          <a:xfrm>
+            <a:off x="0" y="0"/>
+            <a:ext cx="12191695" cy="82296"/>
+          </a:xfrm>
+          <a:prstGeom prst="rect">
+            <a:avLst/>
+          </a:prstGeom>
+          <a:solidFill>
+            <a:srgbClr val="FCAF17"/>
+          </a:solidFill>
+          <a:ln>
+            <a:noFill/>
+          </a:ln>
+        </p:spPr>
+        <p:style>
+          <a:lnRef idx="1">
+            <a:schemeClr val="accent1"/>
+          </a:lnRef>
+          <a:fillRef idx="3">
+            <a:schemeClr val="accent1"/>
+          </a:fillRef>
+          <a:effectRef idx="2">
+            <a:schemeClr val="accent1"/>
+          </a:effectRef>
+          <a:fontRef idx="minor">
+            <a:schemeClr val="lt1"/>
+          </a:fontRef>
+        </p:style>
+        <p:txBody>
+          <a:bodyPr rtlCol="0" anchor="ctr"/>
+          <a:lstStyle/>
+          <a:p>
+            <a:pPr algn="ctr"/>
+          </a:p>
+        </p:txBody>
+      </p:sp>
+      <p:sp>
+        <p:nvSpPr>
+          <p:cNvPr id="3" name="TextBox 2"/>
+          <p:cNvSpPr txBox="1"/>
+          <p:nvPr/>
+        </p:nvSpPr>
+        <p:spPr>
+          <a:xfrm>
+            <a:off x="566928" y="310896"/>
+            <a:ext cx="10424160" cy="914400"/>
+          </a:xfrm>
+          <a:prstGeom prst="rect">
+            <a:avLst/>
+          </a:prstGeom>
+          <a:noFill/>
+        </p:spPr>
+        <p:txBody>
+          <a:bodyPr wrap="square">
+            <a:spAutoFit/>
+          </a:bodyPr>
+          <a:lstStyle/>
+          <a:p>
+            <a:pPr algn="l">
+              <a:spcAft>
+                <a:spcPts val="200"/>
+              </a:spcAft>
+            </a:pPr>
+            <a:r>
+              <a:rPr sz="3000" b="1">
+                <a:solidFill>
+                  <a:srgbClr val="645B4C"/>
+                </a:solidFill>
+                <a:latin typeface="맑은 고딕"/>
+              </a:rPr>
+              <a:t>검증 결과</a:t>
+            </a:r>
+          </a:p>
+          <a:p>
+            <a:pPr algn="l">
+              <a:spcAft>
+                <a:spcPts val="600"/>
+              </a:spcAft>
+            </a:pPr>
+            <a:r>
+              <a:rPr sz="1400" b="0">
+                <a:solidFill>
+                  <a:srgbClr val="6B6B6B"/>
+                </a:solidFill>
+                <a:latin typeface="맑은 고딕"/>
+              </a:rPr>
+              <a:t>실제 금융사 서류로 검증했고, 회귀 테스트로 고정했다</a:t>
+            </a:r>
+          </a:p>
+        </p:txBody>
+      </p:sp>
+      <p:sp>
+        <p:nvSpPr>
+          <p:cNvPr id="4" name="Rounded Rectangle 3"/>
+          <p:cNvSpPr/>
+          <p:nvPr/>
+        </p:nvSpPr>
+        <p:spPr>
+          <a:xfrm>
+            <a:off x="9646920" y="329184"/>
+            <a:ext cx="1965960" cy="384048"/>
+          </a:xfrm>
+          <a:prstGeom prst="roundRect">
+            <a:avLst/>
+          </a:prstGeom>
+          <a:solidFill>
+            <a:srgbClr val="FFF8DF"/>
+          </a:solidFill>
+          <a:ln>
+            <a:solidFill>
+              <a:srgbClr val="FCAF17"/>
+            </a:solidFill>
+          </a:ln>
+        </p:spPr>
+        <p:style>
+          <a:lnRef idx="1">
+            <a:schemeClr val="accent1"/>
+          </a:lnRef>
+          <a:fillRef idx="3">
+            <a:schemeClr val="accent1"/>
+          </a:fillRef>
+          <a:effectRef idx="2">
+            <a:schemeClr val="accent1"/>
+          </a:effectRef>
+          <a:fontRef idx="minor">
+            <a:schemeClr val="lt1"/>
+          </a:fontRef>
+        </p:style>
+        <p:txBody>
+          <a:bodyPr rtlCol="0" anchor="ctr" wrap="square"/>
+          <a:lstStyle/>
+          <a:p>
+            <a:pPr algn="ctr">
+              <a:spcAft>
+                <a:spcPts val="0"/>
+              </a:spcAft>
+            </a:pPr>
+            <a:r>
+              <a:rPr sz="1100" b="1">
+                <a:solidFill>
+                  <a:srgbClr val="645B4C"/>
+                </a:solidFill>
+                <a:latin typeface="맑은 고딕"/>
+              </a:rPr>
+              <a:t>기술 실현 가능성</a:t>
+            </a:r>
+          </a:p>
+        </p:txBody>
+      </p:sp>
+      <p:sp>
+        <p:nvSpPr>
+          <p:cNvPr id="5" name="Rounded Rectangle 4"/>
+          <p:cNvSpPr/>
+          <p:nvPr/>
+        </p:nvSpPr>
+        <p:spPr>
+          <a:xfrm>
+            <a:off x="566928" y="1463040"/>
+            <a:ext cx="2615184" cy="1463040"/>
+          </a:xfrm>
+          <a:prstGeom prst="roundRect">
+            <a:avLst/>
+          </a:prstGeom>
+          <a:solidFill>
+            <a:srgbClr val="FFF8DF"/>
+          </a:solidFill>
+          <a:ln>
+            <a:solidFill>
+              <a:srgbClr val="FCAF17"/>
+            </a:solidFill>
+          </a:ln>
+        </p:spPr>
+        <p:style>
+          <a:lnRef idx="1">
+            <a:schemeClr val="accent1"/>
+          </a:lnRef>
+          <a:fillRef idx="3">
+            <a:schemeClr val="accent1"/>
+          </a:fillRef>
+          <a:effectRef idx="2">
+            <a:schemeClr val="accent1"/>
+          </a:effectRef>
+          <a:fontRef idx="minor">
+            <a:schemeClr val="lt1"/>
+          </a:fontRef>
+        </p:style>
+        <p:txBody>
+          <a:bodyPr rtlCol="0" anchor="ctr" wrap="square"/>
+          <a:lstStyle/>
+          <a:p>
+            <a:pPr algn="ctr">
+              <a:spcAft>
+                <a:spcPts val="200"/>
+              </a:spcAft>
+            </a:pPr>
+            <a:r>
+              <a:rPr sz="3000" b="1">
+                <a:solidFill>
+                  <a:srgbClr val="645B4C"/>
+                </a:solidFill>
+                <a:latin typeface="맑은 고딕"/>
+              </a:rPr>
+              <a:t>24건</a:t>
+            </a:r>
+          </a:p>
+          <a:p>
+            <a:pPr algn="ctr">
+              <a:spcAft>
+                <a:spcPts val="0"/>
+              </a:spcAft>
+            </a:pPr>
+            <a:r>
+              <a:rPr sz="1100" b="0">
+                <a:solidFill>
+                  <a:srgbClr val="2B2B2B"/>
+                </a:solidFill>
+                <a:latin typeface="맑은 고딕"/>
+              </a:rPr>
+              <a:t>실물 서류 전수 감사</a:t>
+            </a:r>
+          </a:p>
+          <a:p>
+            <a:pPr algn="ctr">
+              <a:spcAft>
+                <a:spcPts val="0"/>
+              </a:spcAft>
+            </a:pPr>
+            <a:r>
+              <a:rPr sz="1100" b="0">
+                <a:solidFill>
+                  <a:srgbClr val="2B2B2B"/>
+                </a:solidFill>
+                <a:latin typeface="맑은 고딕"/>
+              </a:rPr>
+              <a:t>이상 0건</a:t>
+            </a:r>
+          </a:p>
+        </p:txBody>
+      </p:sp>
+      <p:sp>
+        <p:nvSpPr>
+          <p:cNvPr id="6" name="Rounded Rectangle 5"/>
+          <p:cNvSpPr/>
+          <p:nvPr/>
+        </p:nvSpPr>
+        <p:spPr>
+          <a:xfrm>
+            <a:off x="3383280" y="1463040"/>
+            <a:ext cx="2615184" cy="1463040"/>
+          </a:xfrm>
+          <a:prstGeom prst="roundRect">
+            <a:avLst/>
+          </a:prstGeom>
+          <a:solidFill>
+            <a:srgbClr val="FFF8DF"/>
+          </a:solidFill>
+          <a:ln>
+            <a:solidFill>
+              <a:srgbClr val="FCAF17"/>
+            </a:solidFill>
+          </a:ln>
+        </p:spPr>
+        <p:style>
+          <a:lnRef idx="1">
+            <a:schemeClr val="accent1"/>
+          </a:lnRef>
+          <a:fillRef idx="3">
+            <a:schemeClr val="accent1"/>
+          </a:fillRef>
+          <a:effectRef idx="2">
+            <a:schemeClr val="accent1"/>
+          </a:effectRef>
+          <a:fontRef idx="minor">
+            <a:schemeClr val="lt1"/>
+          </a:fontRef>
+        </p:style>
+        <p:txBody>
+          <a:bodyPr rtlCol="0" anchor="ctr" wrap="square"/>
+          <a:lstStyle/>
+          <a:p>
+            <a:pPr algn="ctr">
+              <a:spcAft>
+                <a:spcPts val="200"/>
+              </a:spcAft>
+            </a:pPr>
+            <a:r>
+              <a:rPr sz="3000" b="1">
+                <a:solidFill>
+                  <a:srgbClr val="645B4C"/>
+                </a:solidFill>
+                <a:latin typeface="맑은 고딕"/>
+              </a:rPr>
+              <a:t>45건</a:t>
+            </a:r>
+          </a:p>
+          <a:p>
+            <a:pPr algn="ctr">
+              <a:spcAft>
+                <a:spcPts val="0"/>
+              </a:spcAft>
+            </a:pPr>
+            <a:r>
+              <a:rPr sz="1100" b="0">
+                <a:solidFill>
+                  <a:srgbClr val="2B2B2B"/>
+                </a:solidFill>
+                <a:latin typeface="맑은 고딕"/>
+              </a:rPr>
+              <a:t>자동화 회귀 테스트</a:t>
+            </a:r>
+          </a:p>
+          <a:p>
+            <a:pPr algn="ctr">
+              <a:spcAft>
+                <a:spcPts val="0"/>
+              </a:spcAft>
+            </a:pPr>
+            <a:r>
+              <a:rPr sz="1100" b="0">
+                <a:solidFill>
+                  <a:srgbClr val="2B2B2B"/>
+                </a:solidFill>
+                <a:latin typeface="맑은 고딕"/>
+              </a:rPr>
+              <a:t>전부 통과</a:t>
+            </a:r>
+          </a:p>
+        </p:txBody>
+      </p:sp>
+      <p:sp>
+        <p:nvSpPr>
+          <p:cNvPr id="7" name="Rounded Rectangle 6"/>
+          <p:cNvSpPr/>
+          <p:nvPr/>
+        </p:nvSpPr>
+        <p:spPr>
+          <a:xfrm>
+            <a:off x="6199632" y="1463040"/>
+            <a:ext cx="2615184" cy="1463040"/>
+          </a:xfrm>
+          <a:prstGeom prst="roundRect">
+            <a:avLst/>
+          </a:prstGeom>
+          <a:solidFill>
+            <a:srgbClr val="FFF8DF"/>
+          </a:solidFill>
+          <a:ln>
+            <a:solidFill>
+              <a:srgbClr val="FCAF17"/>
+            </a:solidFill>
+          </a:ln>
+        </p:spPr>
+        <p:style>
+          <a:lnRef idx="1">
+            <a:schemeClr val="accent1"/>
+          </a:lnRef>
+          <a:fillRef idx="3">
+            <a:schemeClr val="accent1"/>
+          </a:fillRef>
+          <a:effectRef idx="2">
+            <a:schemeClr val="accent1"/>
+          </a:effectRef>
+          <a:fontRef idx="minor">
+            <a:schemeClr val="lt1"/>
+          </a:fontRef>
+        </p:style>
+        <p:txBody>
+          <a:bodyPr rtlCol="0" anchor="ctr" wrap="square"/>
+          <a:lstStyle/>
+          <a:p>
+            <a:pPr algn="ctr">
+              <a:spcAft>
+                <a:spcPts val="200"/>
+              </a:spcAft>
+            </a:pPr>
+            <a:r>
+              <a:rPr sz="3000" b="1">
+                <a:solidFill>
+                  <a:srgbClr val="645B4C"/>
+                </a:solidFill>
+                <a:latin typeface="맑은 고딕"/>
+              </a:rPr>
+              <a:t>1가지</a:t>
+            </a:r>
+          </a:p>
+          <a:p>
+            <a:pPr algn="ctr">
+              <a:spcAft>
+                <a:spcPts val="0"/>
+              </a:spcAft>
+            </a:pPr>
+            <a:r>
+              <a:rPr sz="1100" b="0">
+                <a:solidFill>
+                  <a:srgbClr val="2B2B2B"/>
+                </a:solidFill>
+                <a:latin typeface="맑은 고딕"/>
+              </a:rPr>
+              <a:t>업로드 순서 24가지 →</a:t>
+            </a:r>
+          </a:p>
+          <a:p>
+            <a:pPr algn="ctr">
+              <a:spcAft>
+                <a:spcPts val="0"/>
+              </a:spcAft>
+            </a:pPr>
+            <a:r>
+              <a:rPr sz="1100" b="0">
+                <a:solidFill>
+                  <a:srgbClr val="2B2B2B"/>
+                </a:solidFill>
+                <a:latin typeface="맑은 고딕"/>
+              </a:rPr>
+              <a:t>판정 조합 1가지</a:t>
+            </a:r>
+          </a:p>
+        </p:txBody>
+      </p:sp>
+      <p:sp>
+        <p:nvSpPr>
+          <p:cNvPr id="8" name="Rounded Rectangle 7"/>
+          <p:cNvSpPr/>
+          <p:nvPr/>
+        </p:nvSpPr>
+        <p:spPr>
+          <a:xfrm>
+            <a:off x="9015984" y="1463040"/>
+            <a:ext cx="2615184" cy="1463040"/>
+          </a:xfrm>
+          <a:prstGeom prst="roundRect">
+            <a:avLst/>
+          </a:prstGeom>
+          <a:solidFill>
+            <a:srgbClr val="FFF8DF"/>
+          </a:solidFill>
+          <a:ln>
+            <a:solidFill>
+              <a:srgbClr val="FCAF17"/>
+            </a:solidFill>
+          </a:ln>
+        </p:spPr>
+        <p:style>
+          <a:lnRef idx="1">
+            <a:schemeClr val="accent1"/>
+          </a:lnRef>
+          <a:fillRef idx="3">
+            <a:schemeClr val="accent1"/>
+          </a:fillRef>
+          <a:effectRef idx="2">
+            <a:schemeClr val="accent1"/>
+          </a:effectRef>
+          <a:fontRef idx="minor">
+            <a:schemeClr val="lt1"/>
+          </a:fontRef>
+        </p:style>
+        <p:txBody>
+          <a:bodyPr rtlCol="0" anchor="ctr" wrap="square"/>
+          <a:lstStyle/>
+          <a:p>
+            <a:pPr algn="ctr">
+              <a:spcAft>
+                <a:spcPts val="200"/>
+              </a:spcAft>
+            </a:pPr>
+            <a:r>
+              <a:rPr sz="3000" b="1">
+                <a:solidFill>
+                  <a:srgbClr val="645B4C"/>
+                </a:solidFill>
+                <a:latin typeface="맑은 고딕"/>
+              </a:rPr>
+              <a:t>0건</a:t>
+            </a:r>
+          </a:p>
+          <a:p>
+            <a:pPr algn="ctr">
+              <a:spcAft>
+                <a:spcPts val="0"/>
+              </a:spcAft>
+            </a:pPr>
+            <a:r>
+              <a:rPr sz="1100" b="0">
+                <a:solidFill>
+                  <a:srgbClr val="2B2B2B"/>
+                </a:solidFill>
+                <a:latin typeface="맑은 고딕"/>
+              </a:rPr>
+              <a:t>교차 모델 판정 불일치</a:t>
+            </a:r>
+          </a:p>
+          <a:p>
+            <a:pPr algn="ctr">
+              <a:spcAft>
+                <a:spcPts val="0"/>
+              </a:spcAft>
+            </a:pPr>
+            <a:r>
+              <a:rPr sz="1100" b="0">
+                <a:solidFill>
+                  <a:srgbClr val="2B2B2B"/>
+                </a:solidFill>
+                <a:latin typeface="맑은 고딕"/>
+              </a:rPr>
+              <a:t>(haiku vs sonnet)</a:t>
+            </a:r>
+          </a:p>
+        </p:txBody>
+      </p:sp>
+      <p:graphicFrame>
+        <p:nvGraphicFramePr>
+          <p:cNvPr id="9" name="Table 8"/>
+          <p:cNvGraphicFramePr>
+            <a:graphicFrameLocks noGrp="1"/>
+          </p:cNvGraphicFramePr>
+          <p:nvPr/>
+        </p:nvGraphicFramePr>
+        <p:xfrm>
+          <a:off x="566928" y="3200400"/>
+          <a:ext cx="11064240" cy="1645920"/>
+        </p:xfrm>
+        <a:graphic>
+          <a:graphicData uri="http://schemas.openxmlformats.org/drawingml/2006/table">
+            <a:tbl>
+              <a:tblPr firstRow="1" bandRow="1">
+                <a:tableStyleId>{5C22544A-7EE6-4342-B048-85BDC9FD1C3A}</a:tableStyleId>
+              </a:tblPr>
+              <a:tblGrid>
+                <a:gridCol w="2194560"/>
+                <a:gridCol w="5760720"/>
+                <a:gridCol w="3108960"/>
+              </a:tblGrid>
+              <a:tr h="329184">
+                <a:tc>
+                  <a:txBody>
+                    <a:bodyPr wrap="square"/>
+                    <a:lstStyle/>
+                    <a:p>
+                      <a:pPr algn="l">
+                        <a:spcAft>
+                          <a:spcPts val="0"/>
+                        </a:spcAft>
+                      </a:pPr>
+                      <a:r>
+                        <a:rPr sz="1200" b="1">
+                          <a:solidFill>
+                            <a:srgbClr val="645B4C"/>
+                          </a:solidFill>
+                          <a:latin typeface="맑은 고딕"/>
+                        </a:rPr>
+                        <a:t>검증 항목</a:t>
+                      </a:r>
+                    </a:p>
+                  </a:txBody>
+                  <a:tcPr>
+                    <a:solidFill>
+                      <a:srgbClr val="FFF8DF"/>
+                    </a:solidFill>
+                  </a:tcPr>
+                </a:tc>
+                <a:tc>
+                  <a:txBody>
+                    <a:bodyPr wrap="square"/>
+                    <a:lstStyle/>
+                    <a:p>
+                      <a:pPr algn="l">
+                        <a:spcAft>
+                          <a:spcPts val="0"/>
+                        </a:spcAft>
+                      </a:pPr>
+                      <a:r>
+                        <a:rPr sz="1200" b="1">
+                          <a:solidFill>
+                            <a:srgbClr val="645B4C"/>
+                          </a:solidFill>
+                          <a:latin typeface="맑은 고딕"/>
+                        </a:rPr>
+                        <a:t>방법</a:t>
+                      </a:r>
+                    </a:p>
+                  </a:txBody>
+                  <a:tcPr>
+                    <a:solidFill>
+                      <a:srgbClr val="FFF8DF"/>
+                    </a:solidFill>
+                  </a:tcPr>
+                </a:tc>
+                <a:tc>
+                  <a:txBody>
+                    <a:bodyPr wrap="square"/>
+                    <a:lstStyle/>
+                    <a:p>
+                      <a:pPr algn="l">
+                        <a:spcAft>
+                          <a:spcPts val="0"/>
+                        </a:spcAft>
+                      </a:pPr>
+                      <a:r>
+                        <a:rPr sz="1200" b="1">
+                          <a:solidFill>
+                            <a:srgbClr val="645B4C"/>
+                          </a:solidFill>
+                          <a:latin typeface="맑은 고딕"/>
+                        </a:rPr>
+                        <a:t>결과</a:t>
+                      </a:r>
+                    </a:p>
+                  </a:txBody>
+                  <a:tcPr>
+                    <a:solidFill>
+                      <a:srgbClr val="FFF8DF"/>
+                    </a:solidFill>
+                  </a:tcPr>
+                </a:tc>
+              </a:tr>
+              <a:tr h="329184">
+                <a:tc>
+                  <a:txBody>
+                    <a:bodyPr wrap="square"/>
+                    <a:lstStyle/>
+                    <a:p>
+                      <a:pPr algn="l">
+                        <a:spcAft>
+                          <a:spcPts val="0"/>
+                        </a:spcAft>
+                      </a:pPr>
+                      <a:r>
+                        <a:rPr sz="1000" b="0">
+                          <a:solidFill>
+                            <a:srgbClr val="2B2B2B"/>
+                          </a:solidFill>
+                          <a:latin typeface="맑은 고딕"/>
+                        </a:rPr>
+                        <a:t>실물 서류 커버리지</a:t>
+                      </a:r>
+                    </a:p>
+                  </a:txBody>
+                  <a:tcPr>
+                    <a:solidFill>
+                      <a:srgbClr val="FFFFFF"/>
+                    </a:solidFill>
+                  </a:tcPr>
+                </a:tc>
+                <a:tc>
+                  <a:txBody>
+                    <a:bodyPr wrap="square"/>
+                    <a:lstStyle/>
+                    <a:p>
+                      <a:pPr algn="l">
+                        <a:spcAft>
+                          <a:spcPts val="0"/>
+                        </a:spcAft>
+                      </a:pPr>
+                      <a:r>
+                        <a:rPr sz="1000" b="0">
+                          <a:solidFill>
+                            <a:srgbClr val="2B2B2B"/>
+                          </a:solidFill>
+                          <a:latin typeface="맑은 고딕"/>
+                        </a:rPr>
+                        <a:t>5개 운용·증권사 / ETF·채권·MMF·ELS·DLS / 위험등급 1~6 / 전자·스캔·스크린샷</a:t>
+                      </a:r>
+                    </a:p>
+                  </a:txBody>
+                  <a:tcPr>
+                    <a:solidFill>
+                      <a:srgbClr val="FFFFFF"/>
+                    </a:solidFill>
+                  </a:tcPr>
+                </a:tc>
+                <a:tc>
+                  <a:txBody>
+                    <a:bodyPr wrap="square"/>
+                    <a:lstStyle/>
+                    <a:p>
+                      <a:pPr algn="l">
+                        <a:spcAft>
+                          <a:spcPts val="0"/>
+                        </a:spcAft>
+                      </a:pPr>
+                      <a:r>
+                        <a:rPr sz="1000" b="0">
+                          <a:solidFill>
+                            <a:srgbClr val="2B2B2B"/>
+                          </a:solidFill>
+                          <a:latin typeface="맑은 고딕"/>
+                        </a:rPr>
+                        <a:t>24건 전수 감사, 이상 징후 0건</a:t>
+                      </a:r>
+                    </a:p>
+                  </a:txBody>
+                  <a:tcPr>
+                    <a:solidFill>
+                      <a:srgbClr val="FFFFFF"/>
+                    </a:solidFill>
+                  </a:tcPr>
+                </a:tc>
+              </a:tr>
+              <a:tr h="329184">
+                <a:tc>
+                  <a:txBody>
+                    <a:bodyPr wrap="square"/>
+                    <a:lstStyle/>
+                    <a:p>
+                      <a:pPr algn="l">
+                        <a:spcAft>
+                          <a:spcPts val="0"/>
+                        </a:spcAft>
+                      </a:pPr>
+                      <a:r>
+                        <a:rPr sz="1000" b="0">
+                          <a:solidFill>
+                            <a:srgbClr val="2B2B2B"/>
+                          </a:solidFill>
+                          <a:latin typeface="맑은 고딕"/>
+                        </a:rPr>
+                        <a:t>판정 재현성</a:t>
+                      </a:r>
+                    </a:p>
+                  </a:txBody>
+                  <a:tcPr>
+                    <a:solidFill>
+                      <a:srgbClr val="FFFFFF"/>
+                    </a:solidFill>
+                  </a:tcPr>
+                </a:tc>
+                <a:tc>
+                  <a:txBody>
+                    <a:bodyPr wrap="square"/>
+                    <a:lstStyle/>
+                    <a:p>
+                      <a:pPr algn="l">
+                        <a:spcAft>
+                          <a:spcPts val="0"/>
+                        </a:spcAft>
+                      </a:pPr>
+                      <a:r>
+                        <a:rPr sz="1000" b="0">
+                          <a:solidFill>
+                            <a:srgbClr val="2B2B2B"/>
+                          </a:solidFill>
+                          <a:latin typeface="맑은 고딕"/>
+                        </a:rPr>
+                        <a:t>동일 패키지를 업로드 순서 24가지로 반복</a:t>
+                      </a:r>
+                    </a:p>
+                  </a:txBody>
+                  <a:tcPr>
+                    <a:solidFill>
+                      <a:srgbClr val="FFFFFF"/>
+                    </a:solidFill>
+                  </a:tcPr>
+                </a:tc>
+                <a:tc>
+                  <a:txBody>
+                    <a:bodyPr wrap="square"/>
+                    <a:lstStyle/>
+                    <a:p>
+                      <a:pPr algn="l">
+                        <a:spcAft>
+                          <a:spcPts val="0"/>
+                        </a:spcAft>
+                      </a:pPr>
+                      <a:r>
+                        <a:rPr sz="1000" b="0">
+                          <a:solidFill>
+                            <a:srgbClr val="2B2B2B"/>
+                          </a:solidFill>
+                          <a:latin typeface="맑은 고딕"/>
+                        </a:rPr>
+                        <a:t>판정 조합 1가지 (순서 무관)</a:t>
+                      </a:r>
+                    </a:p>
+                  </a:txBody>
+                  <a:tcPr>
+                    <a:solidFill>
+                      <a:srgbClr val="FFFFFF"/>
+                    </a:solidFill>
+                  </a:tcPr>
+                </a:tc>
+              </a:tr>
+              <a:tr h="329184">
+                <a:tc>
+                  <a:txBody>
+                    <a:bodyPr wrap="square"/>
+                    <a:lstStyle/>
+                    <a:p>
+                      <a:pPr algn="l">
+                        <a:spcAft>
+                          <a:spcPts val="0"/>
+                        </a:spcAft>
+                      </a:pPr>
+                      <a:r>
+                        <a:rPr sz="1000" b="0">
+                          <a:solidFill>
+                            <a:srgbClr val="2B2B2B"/>
+                          </a:solidFill>
+                          <a:latin typeface="맑은 고딕"/>
+                        </a:rPr>
+                        <a:t>모델 의존성</a:t>
+                      </a:r>
+                    </a:p>
+                  </a:txBody>
+                  <a:tcPr>
+                    <a:solidFill>
+                      <a:srgbClr val="FFFFFF"/>
+                    </a:solidFill>
+                  </a:tcPr>
+                </a:tc>
+                <a:tc>
+                  <a:txBody>
+                    <a:bodyPr wrap="square"/>
+                    <a:lstStyle/>
+                    <a:p>
+                      <a:pPr algn="l">
+                        <a:spcAft>
+                          <a:spcPts val="0"/>
+                        </a:spcAft>
+                      </a:pPr>
+                      <a:r>
+                        <a:rPr sz="1000" b="0">
+                          <a:solidFill>
+                            <a:srgbClr val="2B2B2B"/>
+                          </a:solidFill>
+                          <a:latin typeface="맑은 고딕"/>
+                        </a:rPr>
+                        <a:t>haiku · sonnet 교차 실행 후 판정 임계 필드 비교</a:t>
+                      </a:r>
+                    </a:p>
+                  </a:txBody>
+                  <a:tcPr>
+                    <a:solidFill>
+                      <a:srgbClr val="FFFFFF"/>
+                    </a:solidFill>
+                  </a:tcPr>
+                </a:tc>
+                <a:tc>
+                  <a:txBody>
+                    <a:bodyPr wrap="square"/>
+                    <a:lstStyle/>
+                    <a:p>
+                      <a:pPr algn="l">
+                        <a:spcAft>
+                          <a:spcPts val="0"/>
+                        </a:spcAft>
+                      </a:pPr>
+                      <a:r>
+                        <a:rPr sz="1000" b="0">
+                          <a:solidFill>
+                            <a:srgbClr val="2B2B2B"/>
+                          </a:solidFill>
+                          <a:latin typeface="맑은 고딕"/>
+                        </a:rPr>
+                        <a:t>불일치 0건 (저가 모델로 충분)</a:t>
+                      </a:r>
+                    </a:p>
+                  </a:txBody>
+                  <a:tcPr>
+                    <a:solidFill>
+                      <a:srgbClr val="FFFFFF"/>
+                    </a:solidFill>
+                  </a:tcPr>
+                </a:tc>
+              </a:tr>
+              <a:tr h="329184">
+                <a:tc>
+                  <a:txBody>
+                    <a:bodyPr wrap="square"/>
+                    <a:lstStyle/>
+                    <a:p>
+                      <a:pPr algn="l">
+                        <a:spcAft>
+                          <a:spcPts val="0"/>
+                        </a:spcAft>
+                      </a:pPr>
+                      <a:r>
+                        <a:rPr sz="1000" b="0">
+                          <a:solidFill>
+                            <a:srgbClr val="2B2B2B"/>
+                          </a:solidFill>
+                          <a:latin typeface="맑은 고딕"/>
+                        </a:rPr>
+                        <a:t>오탐 통제</a:t>
+                      </a:r>
+                    </a:p>
+                  </a:txBody>
+                  <a:tcPr>
+                    <a:solidFill>
+                      <a:srgbClr val="FFFFFF"/>
+                    </a:solidFill>
+                  </a:tcPr>
+                </a:tc>
+                <a:tc>
+                  <a:txBody>
+                    <a:bodyPr wrap="square"/>
+                    <a:lstStyle/>
+                    <a:p>
+                      <a:pPr algn="l">
+                        <a:spcAft>
+                          <a:spcPts val="0"/>
+                        </a:spcAft>
+                      </a:pPr>
+                      <a:r>
+                        <a:rPr sz="1000" b="0">
+                          <a:solidFill>
+                            <a:srgbClr val="2B2B2B"/>
+                          </a:solidFill>
+                          <a:latin typeface="맑은 고딕"/>
+                        </a:rPr>
+                        <a:t>부당권유 표현 스캔을 정상 서류 17건에 적용</a:t>
+                      </a:r>
+                    </a:p>
+                  </a:txBody>
+                  <a:tcPr>
+                    <a:solidFill>
+                      <a:srgbClr val="FFFFFF"/>
+                    </a:solidFill>
+                  </a:tcPr>
+                </a:tc>
+                <a:tc>
+                  <a:txBody>
+                    <a:bodyPr wrap="square"/>
+                    <a:lstStyle/>
+                    <a:p>
+                      <a:pPr algn="l">
+                        <a:spcAft>
+                          <a:spcPts val="0"/>
+                        </a:spcAft>
+                      </a:pPr>
+                      <a:r>
+                        <a:rPr sz="1000" b="0">
+                          <a:solidFill>
+                            <a:srgbClr val="2B2B2B"/>
+                          </a:solidFill>
+                          <a:latin typeface="맑은 고딕"/>
+                        </a:rPr>
+                        <a:t>오탐 0건</a:t>
+                      </a:r>
+                    </a:p>
+                  </a:txBody>
+                  <a:tcPr>
+                    <a:solidFill>
+                      <a:srgbClr val="FFFFFF"/>
+                    </a:solidFill>
+                  </a:tcPr>
+                </a:tc>
+              </a:tr>
+            </a:tbl>
+          </a:graphicData>
+        </a:graphic>
+      </p:graphicFrame>
+    </p:spTree>
+  </p:cSld>
+  <p:clrMapOvr>
+    <a:masterClrMapping/>
+  </p:clrMapOvr>
+</p:sld>
+</file>
+
+<file path=ppt/slides/slide12.xml><?xml version="1.0" encoding="utf-8"?>
+<p:sld xmlns:a="http://schemas.openxmlformats.org/drawingml/2006/main" xmlns:p="http://schemas.openxmlformats.org/presentationml/2006/main" xmlns:r="http://schemas.openxmlformats.org/officeDocument/2006/relationships">
+  <p:cSld>
+    <p:spTree>
+      <p:nvGrpSpPr>
+        <p:cNvPr id="1" name=""/>
+        <p:cNvGrpSpPr/>
+        <p:nvPr/>
+      </p:nvGrpSpPr>
+      <p:grpSpPr/>
+      <p:sp>
+        <p:nvSpPr>
+          <p:cNvPr id="2" name="Rectangle 1"/>
+          <p:cNvSpPr/>
+          <p:nvPr/>
+        </p:nvSpPr>
+        <p:spPr>
+          <a:xfrm>
+            <a:off x="0" y="0"/>
+            <a:ext cx="12191695" cy="82296"/>
+          </a:xfrm>
+          <a:prstGeom prst="rect">
+            <a:avLst/>
+          </a:prstGeom>
+          <a:solidFill>
+            <a:srgbClr val="FCAF17"/>
+          </a:solidFill>
+          <a:ln>
+            <a:noFill/>
+          </a:ln>
+        </p:spPr>
+        <p:style>
+          <a:lnRef idx="1">
+            <a:schemeClr val="accent1"/>
+          </a:lnRef>
+          <a:fillRef idx="3">
+            <a:schemeClr val="accent1"/>
+          </a:fillRef>
+          <a:effectRef idx="2">
+            <a:schemeClr val="accent1"/>
+          </a:effectRef>
+          <a:fontRef idx="minor">
+            <a:schemeClr val="lt1"/>
+          </a:fontRef>
+        </p:style>
+        <p:txBody>
+          <a:bodyPr rtlCol="0" anchor="ctr"/>
+          <a:lstStyle/>
+          <a:p>
+            <a:pPr algn="ctr"/>
+          </a:p>
+        </p:txBody>
+      </p:sp>
+      <p:sp>
+        <p:nvSpPr>
+          <p:cNvPr id="3" name="TextBox 2"/>
+          <p:cNvSpPr txBox="1"/>
+          <p:nvPr/>
+        </p:nvSpPr>
+        <p:spPr>
+          <a:xfrm>
+            <a:off x="566928" y="310896"/>
+            <a:ext cx="10424160" cy="914400"/>
+          </a:xfrm>
+          <a:prstGeom prst="rect">
+            <a:avLst/>
+          </a:prstGeom>
+          <a:noFill/>
+        </p:spPr>
+        <p:txBody>
+          <a:bodyPr wrap="square">
+            <a:spAutoFit/>
+          </a:bodyPr>
+          <a:lstStyle/>
+          <a:p>
+            <a:pPr algn="l">
+              <a:spcAft>
+                <a:spcPts val="200"/>
+              </a:spcAft>
+            </a:pPr>
+            <a:r>
+              <a:rPr sz="3000" b="1">
+                <a:solidFill>
+                  <a:srgbClr val="645B4C"/>
+                </a:solidFill>
+                <a:latin typeface="맑은 고딕"/>
+              </a:rPr>
               <a:t>정량 효과와 운영 비용</a:t>
             </a:r>
           </a:p>
@@ -4412,7 +6638,7 @@
 </p:sld>
 </file>
 
-<file path=ppt/slides/slide11.xml><?xml version="1.0" encoding="utf-8"?>
+<file path=ppt/slides/slide13.xml><?xml version="1.0" encoding="utf-8"?>
 <p:sld xmlns:a="http://schemas.openxmlformats.org/drawingml/2006/main" xmlns:p="http://schemas.openxmlformats.org/presentationml/2006/main" xmlns:r="http://schemas.openxmlformats.org/officeDocument/2006/relationships">
   <p:cSld>
     <p:spTree>
@@ -5382,7 +7608,924 @@
 </p:sld>
 </file>
 
-<file path=ppt/slides/slide12.xml><?xml version="1.0" encoding="utf-8"?>
+<file path=ppt/slides/slide14.xml><?xml version="1.0" encoding="utf-8"?>
+<p:sld xmlns:a="http://schemas.openxmlformats.org/drawingml/2006/main" xmlns:p="http://schemas.openxmlformats.org/presentationml/2006/main" xmlns:r="http://schemas.openxmlformats.org/officeDocument/2006/relationships">
+  <p:cSld>
+    <p:spTree>
+      <p:nvGrpSpPr>
+        <p:cNvPr id="1" name=""/>
+        <p:cNvGrpSpPr/>
+        <p:nvPr/>
+      </p:nvGrpSpPr>
+      <p:grpSpPr/>
+      <p:sp>
+        <p:nvSpPr>
+          <p:cNvPr id="2" name="Rectangle 1"/>
+          <p:cNvSpPr/>
+          <p:nvPr/>
+        </p:nvSpPr>
+        <p:spPr>
+          <a:xfrm>
+            <a:off x="0" y="0"/>
+            <a:ext cx="12191695" cy="82296"/>
+          </a:xfrm>
+          <a:prstGeom prst="rect">
+            <a:avLst/>
+          </a:prstGeom>
+          <a:solidFill>
+            <a:srgbClr val="FCAF17"/>
+          </a:solidFill>
+          <a:ln>
+            <a:noFill/>
+          </a:ln>
+        </p:spPr>
+        <p:style>
+          <a:lnRef idx="1">
+            <a:schemeClr val="accent1"/>
+          </a:lnRef>
+          <a:fillRef idx="3">
+            <a:schemeClr val="accent1"/>
+          </a:fillRef>
+          <a:effectRef idx="2">
+            <a:schemeClr val="accent1"/>
+          </a:effectRef>
+          <a:fontRef idx="minor">
+            <a:schemeClr val="lt1"/>
+          </a:fontRef>
+        </p:style>
+        <p:txBody>
+          <a:bodyPr rtlCol="0" anchor="ctr"/>
+          <a:lstStyle/>
+          <a:p>
+            <a:pPr algn="ctr"/>
+          </a:p>
+        </p:txBody>
+      </p:sp>
+      <p:sp>
+        <p:nvSpPr>
+          <p:cNvPr id="3" name="TextBox 2"/>
+          <p:cNvSpPr txBox="1"/>
+          <p:nvPr/>
+        </p:nvSpPr>
+        <p:spPr>
+          <a:xfrm>
+            <a:off x="566928" y="310896"/>
+            <a:ext cx="10424160" cy="914400"/>
+          </a:xfrm>
+          <a:prstGeom prst="rect">
+            <a:avLst/>
+          </a:prstGeom>
+          <a:noFill/>
+        </p:spPr>
+        <p:txBody>
+          <a:bodyPr wrap="square">
+            <a:spAutoFit/>
+          </a:bodyPr>
+          <a:lstStyle/>
+          <a:p>
+            <a:pPr algn="l">
+              <a:spcAft>
+                <a:spcPts val="200"/>
+              </a:spcAft>
+            </a:pPr>
+            <a:r>
+              <a:rPr sz="3000" b="1">
+                <a:solidFill>
+                  <a:srgbClr val="645B4C"/>
+                </a:solidFill>
+                <a:latin typeface="맑은 고딕"/>
+              </a:rPr>
+              <a:t>한계와 대응</a:t>
+            </a:r>
+          </a:p>
+          <a:p>
+            <a:pPr algn="l">
+              <a:spcAft>
+                <a:spcPts val="600"/>
+              </a:spcAft>
+            </a:pPr>
+            <a:r>
+              <a:rPr sz="1400" b="0">
+                <a:solidFill>
+                  <a:srgbClr val="6B6B6B"/>
+                </a:solidFill>
+                <a:latin typeface="맑은 고딕"/>
+              </a:rPr>
+              <a:t>검사하지 못하는 것을 검사한 척하지 않는다</a:t>
+            </a:r>
+          </a:p>
+        </p:txBody>
+      </p:sp>
+      <p:sp>
+        <p:nvSpPr>
+          <p:cNvPr id="4" name="Rounded Rectangle 3"/>
+          <p:cNvSpPr/>
+          <p:nvPr/>
+        </p:nvSpPr>
+        <p:spPr>
+          <a:xfrm>
+            <a:off x="9646920" y="329184"/>
+            <a:ext cx="1965960" cy="384048"/>
+          </a:xfrm>
+          <a:prstGeom prst="roundRect">
+            <a:avLst/>
+          </a:prstGeom>
+          <a:solidFill>
+            <a:srgbClr val="FFF8DF"/>
+          </a:solidFill>
+          <a:ln>
+            <a:solidFill>
+              <a:srgbClr val="FCAF17"/>
+            </a:solidFill>
+          </a:ln>
+        </p:spPr>
+        <p:style>
+          <a:lnRef idx="1">
+            <a:schemeClr val="accent1"/>
+          </a:lnRef>
+          <a:fillRef idx="3">
+            <a:schemeClr val="accent1"/>
+          </a:fillRef>
+          <a:effectRef idx="2">
+            <a:schemeClr val="accent1"/>
+          </a:effectRef>
+          <a:fontRef idx="minor">
+            <a:schemeClr val="lt1"/>
+          </a:fontRef>
+        </p:style>
+        <p:txBody>
+          <a:bodyPr rtlCol="0" anchor="ctr" wrap="square"/>
+          <a:lstStyle/>
+          <a:p>
+            <a:pPr algn="ctr">
+              <a:spcAft>
+                <a:spcPts val="0"/>
+              </a:spcAft>
+            </a:pPr>
+            <a:r>
+              <a:rPr sz="1100" b="1">
+                <a:solidFill>
+                  <a:srgbClr val="645B4C"/>
+                </a:solidFill>
+                <a:latin typeface="맑은 고딕"/>
+              </a:rPr>
+              <a:t>기술 실현 가능성</a:t>
+            </a:r>
+          </a:p>
+        </p:txBody>
+      </p:sp>
+      <p:graphicFrame>
+        <p:nvGraphicFramePr>
+          <p:cNvPr id="5" name="Table 4"/>
+          <p:cNvGraphicFramePr>
+            <a:graphicFrameLocks noGrp="1"/>
+          </p:cNvGraphicFramePr>
+          <p:nvPr/>
+        </p:nvGraphicFramePr>
+        <p:xfrm>
+          <a:off x="566928" y="1371600"/>
+          <a:ext cx="11064240" cy="1975104"/>
+        </p:xfrm>
+        <a:graphic>
+          <a:graphicData uri="http://schemas.openxmlformats.org/drawingml/2006/table">
+            <a:tbl>
+              <a:tblPr firstRow="1" bandRow="1">
+                <a:tableStyleId>{5C22544A-7EE6-4342-B048-85BDC9FD1C3A}</a:tableStyleId>
+              </a:tblPr>
+              <a:tblGrid>
+                <a:gridCol w="2286000"/>
+                <a:gridCol w="2560320"/>
+                <a:gridCol w="3840480"/>
+                <a:gridCol w="2377440"/>
+              </a:tblGrid>
+              <a:tr h="329184">
+                <a:tc>
+                  <a:txBody>
+                    <a:bodyPr wrap="square"/>
+                    <a:lstStyle/>
+                    <a:p>
+                      <a:pPr algn="l">
+                        <a:spcAft>
+                          <a:spcPts val="0"/>
+                        </a:spcAft>
+                      </a:pPr>
+                      <a:r>
+                        <a:rPr sz="1200" b="1">
+                          <a:solidFill>
+                            <a:srgbClr val="645B4C"/>
+                          </a:solidFill>
+                          <a:latin typeface="맑은 고딕"/>
+                        </a:rPr>
+                        <a:t>한계</a:t>
+                      </a:r>
+                    </a:p>
+                  </a:txBody>
+                  <a:tcPr>
+                    <a:solidFill>
+                      <a:srgbClr val="FFF8DF"/>
+                    </a:solidFill>
+                  </a:tcPr>
+                </a:tc>
+                <a:tc>
+                  <a:txBody>
+                    <a:bodyPr wrap="square"/>
+                    <a:lstStyle/>
+                    <a:p>
+                      <a:pPr algn="l">
+                        <a:spcAft>
+                          <a:spcPts val="0"/>
+                        </a:spcAft>
+                      </a:pPr>
+                      <a:r>
+                        <a:rPr sz="1200" b="1">
+                          <a:solidFill>
+                            <a:srgbClr val="645B4C"/>
+                          </a:solidFill>
+                          <a:latin typeface="맑은 고딕"/>
+                        </a:rPr>
+                        <a:t>왜 생기는가</a:t>
+                      </a:r>
+                    </a:p>
+                  </a:txBody>
+                  <a:tcPr>
+                    <a:solidFill>
+                      <a:srgbClr val="FFF8DF"/>
+                    </a:solidFill>
+                  </a:tcPr>
+                </a:tc>
+                <a:tc>
+                  <a:txBody>
+                    <a:bodyPr wrap="square"/>
+                    <a:lstStyle/>
+                    <a:p>
+                      <a:pPr algn="l">
+                        <a:spcAft>
+                          <a:spcPts val="0"/>
+                        </a:spcAft>
+                      </a:pPr>
+                      <a:r>
+                        <a:rPr sz="1200" b="1">
+                          <a:solidFill>
+                            <a:srgbClr val="645B4C"/>
+                          </a:solidFill>
+                          <a:latin typeface="맑은 고딕"/>
+                        </a:rPr>
+                        <a:t>현재 대응</a:t>
+                      </a:r>
+                    </a:p>
+                  </a:txBody>
+                  <a:tcPr>
+                    <a:solidFill>
+                      <a:srgbClr val="FFF8DF"/>
+                    </a:solidFill>
+                  </a:tcPr>
+                </a:tc>
+                <a:tc>
+                  <a:txBody>
+                    <a:bodyPr wrap="square"/>
+                    <a:lstStyle/>
+                    <a:p>
+                      <a:pPr algn="l">
+                        <a:spcAft>
+                          <a:spcPts val="0"/>
+                        </a:spcAft>
+                      </a:pPr>
+                      <a:r>
+                        <a:rPr sz="1200" b="1">
+                          <a:solidFill>
+                            <a:srgbClr val="645B4C"/>
+                          </a:solidFill>
+                          <a:latin typeface="맑은 고딕"/>
+                        </a:rPr>
+                        <a:t>향후</a:t>
+                      </a:r>
+                    </a:p>
+                  </a:txBody>
+                  <a:tcPr>
+                    <a:solidFill>
+                      <a:srgbClr val="FFF8DF"/>
+                    </a:solidFill>
+                  </a:tcPr>
+                </a:tc>
+              </a:tr>
+              <a:tr h="329184">
+                <a:tc>
+                  <a:txBody>
+                    <a:bodyPr wrap="square"/>
+                    <a:lstStyle/>
+                    <a:p>
+                      <a:pPr algn="l">
+                        <a:spcAft>
+                          <a:spcPts val="0"/>
+                        </a:spcAft>
+                      </a:pPr>
+                      <a:r>
+                        <a:rPr sz="1000" b="0">
+                          <a:solidFill>
+                            <a:srgbClr val="2B2B2B"/>
+                          </a:solidFill>
+                          <a:latin typeface="맑은 고딕"/>
+                        </a:rPr>
+                        <a:t>녹취 음성을 판독하지 못함</a:t>
+                      </a:r>
+                    </a:p>
+                  </a:txBody>
+                  <a:tcPr>
+                    <a:solidFill>
+                      <a:srgbClr val="FFFFFF"/>
+                    </a:solidFill>
+                  </a:tcPr>
+                </a:tc>
+                <a:tc>
+                  <a:txBody>
+                    <a:bodyPr wrap="square"/>
+                    <a:lstStyle/>
+                    <a:p>
+                      <a:pPr algn="l">
+                        <a:spcAft>
+                          <a:spcPts val="0"/>
+                        </a:spcAft>
+                      </a:pPr>
+                      <a:r>
+                        <a:rPr sz="1000" b="0">
+                          <a:solidFill>
+                            <a:srgbClr val="2B2B2B"/>
+                          </a:solidFill>
+                          <a:latin typeface="맑은 고딕"/>
+                        </a:rPr>
+                        <a:t>입력이 문서(PDF·이미지)로 한정</a:t>
+                      </a:r>
+                    </a:p>
+                  </a:txBody>
+                  <a:tcPr>
+                    <a:solidFill>
+                      <a:srgbClr val="FFFFFF"/>
+                    </a:solidFill>
+                  </a:tcPr>
+                </a:tc>
+                <a:tc>
+                  <a:txBody>
+                    <a:bodyPr wrap="square"/>
+                    <a:lstStyle/>
+                    <a:p>
+                      <a:pPr algn="l">
+                        <a:spcAft>
+                          <a:spcPts val="0"/>
+                        </a:spcAft>
+                      </a:pPr>
+                      <a:r>
+                        <a:rPr sz="1000" b="0">
+                          <a:solidFill>
+                            <a:srgbClr val="2B2B2B"/>
+                          </a:solidFill>
+                          <a:latin typeface="맑은 고딕"/>
+                        </a:rPr>
+                        <a:t>REC-001로 '녹취 의무 대상 여부'만 표시하고, 음성 미판독을 화면에 명시</a:t>
+                      </a:r>
+                    </a:p>
+                  </a:txBody>
+                  <a:tcPr>
+                    <a:solidFill>
+                      <a:srgbClr val="FFFFFF"/>
+                    </a:solidFill>
+                  </a:tcPr>
+                </a:tc>
+                <a:tc>
+                  <a:txBody>
+                    <a:bodyPr wrap="square"/>
+                    <a:lstStyle/>
+                    <a:p>
+                      <a:pPr algn="l">
+                        <a:spcAft>
+                          <a:spcPts val="0"/>
+                        </a:spcAft>
+                      </a:pPr>
+                      <a:r>
+                        <a:rPr sz="1000" b="0">
+                          <a:solidFill>
+                            <a:srgbClr val="2B2B2B"/>
+                          </a:solidFill>
+                          <a:latin typeface="맑은 고딕"/>
+                        </a:rPr>
+                        <a:t>본선: STT 연동해 낭독·동의 확인</a:t>
+                      </a:r>
+                    </a:p>
+                  </a:txBody>
+                  <a:tcPr>
+                    <a:solidFill>
+                      <a:srgbClr val="FFFFFF"/>
+                    </a:solidFill>
+                  </a:tcPr>
+                </a:tc>
+              </a:tr>
+              <a:tr h="329184">
+                <a:tc>
+                  <a:txBody>
+                    <a:bodyPr wrap="square"/>
+                    <a:lstStyle/>
+                    <a:p>
+                      <a:pPr algn="l">
+                        <a:spcAft>
+                          <a:spcPts val="0"/>
+                        </a:spcAft>
+                      </a:pPr>
+                      <a:r>
+                        <a:rPr sz="1000" b="0">
+                          <a:solidFill>
+                            <a:srgbClr val="2B2B2B"/>
+                          </a:solidFill>
+                          <a:latin typeface="맑은 고딕"/>
+                        </a:rPr>
+                        <a:t>금소법 6대 원칙 중 4개만 검사</a:t>
+                      </a:r>
+                    </a:p>
+                  </a:txBody>
+                  <a:tcPr>
+                    <a:solidFill>
+                      <a:srgbClr val="FFFFFF"/>
+                    </a:solidFill>
+                  </a:tcPr>
+                </a:tc>
+                <a:tc>
+                  <a:txBody>
+                    <a:bodyPr wrap="square"/>
+                    <a:lstStyle/>
+                    <a:p>
+                      <a:pPr algn="l">
+                        <a:spcAft>
+                          <a:spcPts val="0"/>
+                        </a:spcAft>
+                      </a:pPr>
+                      <a:r>
+                        <a:rPr sz="1000" b="0">
+                          <a:solidFill>
+                            <a:srgbClr val="2B2B2B"/>
+                          </a:solidFill>
+                          <a:latin typeface="맑은 고딕"/>
+                        </a:rPr>
+                        <a:t>규칙을 실물로 검증하며 추가해 왔음</a:t>
+                      </a:r>
+                    </a:p>
+                  </a:txBody>
+                  <a:tcPr>
+                    <a:solidFill>
+                      <a:srgbClr val="FFFFFF"/>
+                    </a:solidFill>
+                  </a:tcPr>
+                </a:tc>
+                <a:tc>
+                  <a:txBody>
+                    <a:bodyPr wrap="square"/>
+                    <a:lstStyle/>
+                    <a:p>
+                      <a:pPr algn="l">
+                        <a:spcAft>
+                          <a:spcPts val="0"/>
+                        </a:spcAft>
+                      </a:pPr>
+                      <a:r>
+                        <a:rPr sz="1000" b="0">
+                          <a:solidFill>
+                            <a:srgbClr val="2B2B2B"/>
+                          </a:solidFill>
+                          <a:latin typeface="맑은 고딕"/>
+                        </a:rPr>
+                        <a:t>검사 범위(17·19·21·23·28조)를 화면에 명시</a:t>
+                      </a:r>
+                    </a:p>
+                  </a:txBody>
+                  <a:tcPr>
+                    <a:solidFill>
+                      <a:srgbClr val="FFFFFF"/>
+                    </a:solidFill>
+                  </a:tcPr>
+                </a:tc>
+                <a:tc>
+                  <a:txBody>
+                    <a:bodyPr wrap="square"/>
+                    <a:lstStyle/>
+                    <a:p>
+                      <a:pPr algn="l">
+                        <a:spcAft>
+                          <a:spcPts val="0"/>
+                        </a:spcAft>
+                      </a:pPr>
+                      <a:r>
+                        <a:rPr sz="1000" b="0">
+                          <a:solidFill>
+                            <a:srgbClr val="2B2B2B"/>
+                          </a:solidFill>
+                          <a:latin typeface="맑은 고딕"/>
+                        </a:rPr>
+                        <a:t>18·20·22조 규칙 추가</a:t>
+                      </a:r>
+                    </a:p>
+                  </a:txBody>
+                  <a:tcPr>
+                    <a:solidFill>
+                      <a:srgbClr val="FFFFFF"/>
+                    </a:solidFill>
+                  </a:tcPr>
+                </a:tc>
+              </a:tr>
+              <a:tr h="329184">
+                <a:tc>
+                  <a:txBody>
+                    <a:bodyPr wrap="square"/>
+                    <a:lstStyle/>
+                    <a:p>
+                      <a:pPr algn="l">
+                        <a:spcAft>
+                          <a:spcPts val="0"/>
+                        </a:spcAft>
+                      </a:pPr>
+                      <a:r>
+                        <a:rPr sz="1000" b="0">
+                          <a:solidFill>
+                            <a:srgbClr val="2B2B2B"/>
+                          </a:solidFill>
+                          <a:latin typeface="맑은 고딕"/>
+                        </a:rPr>
+                        <a:t>판정 매트릭스가 MVP 예시값</a:t>
+                      </a:r>
+                    </a:p>
+                  </a:txBody>
+                  <a:tcPr>
+                    <a:solidFill>
+                      <a:srgbClr val="FFFFFF"/>
+                    </a:solidFill>
+                  </a:tcPr>
+                </a:tc>
+                <a:tc>
+                  <a:txBody>
+                    <a:bodyPr wrap="square"/>
+                    <a:lstStyle/>
+                    <a:p>
+                      <a:pPr algn="l">
+                        <a:spcAft>
+                          <a:spcPts val="0"/>
+                        </a:spcAft>
+                      </a:pPr>
+                      <a:r>
+                        <a:rPr sz="1000" b="0">
+                          <a:solidFill>
+                            <a:srgbClr val="2B2B2B"/>
+                          </a:solidFill>
+                          <a:latin typeface="맑은 고딕"/>
+                        </a:rPr>
+                        <a:t>실제 기준은 회사 내부 규정</a:t>
+                      </a:r>
+                    </a:p>
+                  </a:txBody>
+                  <a:tcPr>
+                    <a:solidFill>
+                      <a:srgbClr val="FFFFFF"/>
+                    </a:solidFill>
+                  </a:tcPr>
+                </a:tc>
+                <a:tc>
+                  <a:txBody>
+                    <a:bodyPr wrap="square"/>
+                    <a:lstStyle/>
+                    <a:p>
+                      <a:pPr algn="l">
+                        <a:spcAft>
+                          <a:spcPts val="0"/>
+                        </a:spcAft>
+                      </a:pPr>
+                      <a:r>
+                        <a:rPr sz="1000" b="0">
+                          <a:solidFill>
+                            <a:srgbClr val="2B2B2B"/>
+                          </a:solidFill>
+                          <a:latin typeface="맑은 고딕"/>
+                        </a:rPr>
+                        <a:t>정책을 코드에서 분리해 파라미터로 주입</a:t>
+                      </a:r>
+                    </a:p>
+                  </a:txBody>
+                  <a:tcPr>
+                    <a:solidFill>
+                      <a:srgbClr val="FFFFFF"/>
+                    </a:solidFill>
+                  </a:tcPr>
+                </a:tc>
+                <a:tc>
+                  <a:txBody>
+                    <a:bodyPr wrap="square"/>
+                    <a:lstStyle/>
+                    <a:p>
+                      <a:pPr algn="l">
+                        <a:spcAft>
+                          <a:spcPts val="0"/>
+                        </a:spcAft>
+                      </a:pPr>
+                      <a:r>
+                        <a:rPr sz="1000" b="0">
+                          <a:solidFill>
+                            <a:srgbClr val="2B2B2B"/>
+                          </a:solidFill>
+                          <a:latin typeface="맑은 고딕"/>
+                        </a:rPr>
+                        <a:t>KB 내부 적합성 기준으로 교체</a:t>
+                      </a:r>
+                    </a:p>
+                  </a:txBody>
+                  <a:tcPr>
+                    <a:solidFill>
+                      <a:srgbClr val="FFFFFF"/>
+                    </a:solidFill>
+                  </a:tcPr>
+                </a:tc>
+              </a:tr>
+              <a:tr h="329184">
+                <a:tc>
+                  <a:txBody>
+                    <a:bodyPr wrap="square"/>
+                    <a:lstStyle/>
+                    <a:p>
+                      <a:pPr algn="l">
+                        <a:spcAft>
+                          <a:spcPts val="0"/>
+                        </a:spcAft>
+                      </a:pPr>
+                      <a:r>
+                        <a:rPr sz="1000" b="0">
+                          <a:solidFill>
+                            <a:srgbClr val="2B2B2B"/>
+                          </a:solidFill>
+                          <a:latin typeface="맑은 고딕"/>
+                        </a:rPr>
+                        <a:t>문서유형 오분류 가능성</a:t>
+                      </a:r>
+                    </a:p>
+                  </a:txBody>
+                  <a:tcPr>
+                    <a:solidFill>
+                      <a:srgbClr val="FFFFFF"/>
+                    </a:solidFill>
+                  </a:tcPr>
+                </a:tc>
+                <a:tc>
+                  <a:txBody>
+                    <a:bodyPr wrap="square"/>
+                    <a:lstStyle/>
+                    <a:p>
+                      <a:pPr algn="l">
+                        <a:spcAft>
+                          <a:spcPts val="0"/>
+                        </a:spcAft>
+                      </a:pPr>
+                      <a:r>
+                        <a:rPr sz="1000" b="0">
+                          <a:solidFill>
+                            <a:srgbClr val="2B2B2B"/>
+                          </a:solidFill>
+                          <a:latin typeface="맑은 고딕"/>
+                        </a:rPr>
+                        <a:t>실물 서류는 어휘가 섞여 규칙 분류가 확신하지 못함</a:t>
+                      </a:r>
+                    </a:p>
+                  </a:txBody>
+                  <a:tcPr>
+                    <a:solidFill>
+                      <a:srgbClr val="FFFFFF"/>
+                    </a:solidFill>
+                  </a:tcPr>
+                </a:tc>
+                <a:tc>
+                  <a:txBody>
+                    <a:bodyPr wrap="square"/>
+                    <a:lstStyle/>
+                    <a:p>
+                      <a:pPr algn="l">
+                        <a:spcAft>
+                          <a:spcPts val="0"/>
+                        </a:spcAft>
+                      </a:pPr>
+                      <a:r>
+                        <a:rPr sz="1000" b="0">
+                          <a:solidFill>
+                            <a:srgbClr val="2B2B2B"/>
+                          </a:solidFill>
+                          <a:latin typeface="맑은 고딕"/>
+                        </a:rPr>
+                        <a:t>규칙이 확신할 때만 LLM보다 우선 + 검토자가 화면에서 수동 교정</a:t>
+                      </a:r>
+                    </a:p>
+                  </a:txBody>
+                  <a:tcPr>
+                    <a:solidFill>
+                      <a:srgbClr val="FFFFFF"/>
+                    </a:solidFill>
+                  </a:tcPr>
+                </a:tc>
+                <a:tc>
+                  <a:txBody>
+                    <a:bodyPr wrap="square"/>
+                    <a:lstStyle/>
+                    <a:p>
+                      <a:pPr algn="l">
+                        <a:spcAft>
+                          <a:spcPts val="0"/>
+                        </a:spcAft>
+                      </a:pPr>
+                      <a:r>
+                        <a:rPr sz="1000" b="0">
+                          <a:solidFill>
+                            <a:srgbClr val="2B2B2B"/>
+                          </a:solidFill>
+                          <a:latin typeface="맑은 고딕"/>
+                        </a:rPr>
+                        <a:t>유형 판별 정확도 별도 측정</a:t>
+                      </a:r>
+                    </a:p>
+                  </a:txBody>
+                  <a:tcPr>
+                    <a:solidFill>
+                      <a:srgbClr val="FFFFFF"/>
+                    </a:solidFill>
+                  </a:tcPr>
+                </a:tc>
+              </a:tr>
+              <a:tr h="329184">
+                <a:tc>
+                  <a:txBody>
+                    <a:bodyPr wrap="square"/>
+                    <a:lstStyle/>
+                    <a:p>
+                      <a:pPr algn="l">
+                        <a:spcAft>
+                          <a:spcPts val="0"/>
+                        </a:spcAft>
+                      </a:pPr>
+                      <a:r>
+                        <a:rPr sz="1000" b="0">
+                          <a:solidFill>
+                            <a:srgbClr val="2B2B2B"/>
+                          </a:solidFill>
+                          <a:latin typeface="맑은 고딕"/>
+                        </a:rPr>
+                        <a:t>외부 LLM API에 서류를 전송</a:t>
+                      </a:r>
+                    </a:p>
+                  </a:txBody>
+                  <a:tcPr>
+                    <a:solidFill>
+                      <a:srgbClr val="FFFFFF"/>
+                    </a:solidFill>
+                  </a:tcPr>
+                </a:tc>
+                <a:tc>
+                  <a:txBody>
+                    <a:bodyPr wrap="square"/>
+                    <a:lstStyle/>
+                    <a:p>
+                      <a:pPr algn="l">
+                        <a:spcAft>
+                          <a:spcPts val="0"/>
+                        </a:spcAft>
+                      </a:pPr>
+                      <a:r>
+                        <a:rPr sz="1000" b="0">
+                          <a:solidFill>
+                            <a:srgbClr val="2B2B2B"/>
+                          </a:solidFill>
+                          <a:latin typeface="맑은 고딕"/>
+                        </a:rPr>
+                        <a:t>비정형 판독에 필요</a:t>
+                      </a:r>
+                    </a:p>
+                  </a:txBody>
+                  <a:tcPr>
+                    <a:solidFill>
+                      <a:srgbClr val="FFFFFF"/>
+                    </a:solidFill>
+                  </a:tcPr>
+                </a:tc>
+                <a:tc>
+                  <a:txBody>
+                    <a:bodyPr wrap="square"/>
+                    <a:lstStyle/>
+                    <a:p>
+                      <a:pPr algn="l">
+                        <a:spcAft>
+                          <a:spcPts val="0"/>
+                        </a:spcAft>
+                      </a:pPr>
+                      <a:r>
+                        <a:rPr sz="1000" b="0">
+                          <a:solidFill>
+                            <a:srgbClr val="2B2B2B"/>
+                          </a:solidFill>
+                          <a:latin typeface="맑은 고딕"/>
+                        </a:rPr>
+                        <a:t>개인정보 미추출·마스킹 프롬프트·판독 캐시 즉시 삭제</a:t>
+                      </a:r>
+                    </a:p>
+                  </a:txBody>
+                  <a:tcPr>
+                    <a:solidFill>
+                      <a:srgbClr val="FFFFFF"/>
+                    </a:solidFill>
+                  </a:tcPr>
+                </a:tc>
+                <a:tc>
+                  <a:txBody>
+                    <a:bodyPr wrap="square"/>
+                    <a:lstStyle/>
+                    <a:p>
+                      <a:pPr algn="l">
+                        <a:spcAft>
+                          <a:spcPts val="0"/>
+                        </a:spcAft>
+                      </a:pPr>
+                      <a:r>
+                        <a:rPr sz="1000" b="0">
+                          <a:solidFill>
+                            <a:srgbClr val="2B2B2B"/>
+                          </a:solidFill>
+                          <a:latin typeface="맑은 고딕"/>
+                        </a:rPr>
+                        <a:t>사내망 LLM으로 대체 가능한 구조</a:t>
+                      </a:r>
+                    </a:p>
+                  </a:txBody>
+                  <a:tcPr>
+                    <a:solidFill>
+                      <a:srgbClr val="FFFFFF"/>
+                    </a:solidFill>
+                  </a:tcPr>
+                </a:tc>
+              </a:tr>
+            </a:tbl>
+          </a:graphicData>
+        </a:graphic>
+      </p:graphicFrame>
+      <p:sp>
+        <p:nvSpPr>
+          <p:cNvPr id="6" name="TextBox 5"/>
+          <p:cNvSpPr txBox="1"/>
+          <p:nvPr/>
+        </p:nvSpPr>
+        <p:spPr>
+          <a:xfrm>
+            <a:off x="566928" y="5257800"/>
+            <a:ext cx="11064240" cy="1005840"/>
+          </a:xfrm>
+          <a:prstGeom prst="rect">
+            <a:avLst/>
+          </a:prstGeom>
+          <a:noFill/>
+        </p:spPr>
+        <p:txBody>
+          <a:bodyPr wrap="square">
+            <a:spAutoFit/>
+          </a:bodyPr>
+          <a:lstStyle/>
+          <a:p>
+            <a:pPr algn="l">
+              <a:spcAft>
+                <a:spcPts val="700"/>
+              </a:spcAft>
+            </a:pPr>
+            <a:r>
+              <a:rPr sz="1500" b="1">
+                <a:solidFill>
+                  <a:srgbClr val="645B4C"/>
+                </a:solidFill>
+                <a:latin typeface="맑은 고딕"/>
+              </a:rPr>
+              <a:t>한계를 감추면 도구를 신뢰할 수 없습니다.</a:t>
+            </a:r>
+          </a:p>
+          <a:p>
+            <a:pPr algn="l">
+              <a:spcAft>
+                <a:spcPts val="600"/>
+              </a:spcAft>
+            </a:pPr>
+            <a:r>
+              <a:rPr sz="1300" b="0">
+                <a:solidFill>
+                  <a:srgbClr val="2B2B2B"/>
+                </a:solidFill>
+                <a:latin typeface="맑은 고딕"/>
+              </a:rPr>
+              <a:t>이 시스템은 확인하지 못한 값을 '미확인'으로 드러내고, 검사하지 않는 조항을 화면에 밝힙니다. 판정을 내리지 못하는 상황에서 그럴듯한 답을 내놓는 것이 컴플라이언스에서는 가장 위험합니다.</a:t>
+            </a:r>
+          </a:p>
+        </p:txBody>
+      </p:sp>
+    </p:spTree>
+  </p:cSld>
+  <p:clrMapOvr>
+    <a:masterClrMapping/>
+  </p:clrMapOvr>
+</p:sld>
+</file>
+
+<file path=ppt/slides/slide15.xml><?xml version="1.0" encoding="utf-8"?>
 <p:sld xmlns:a="http://schemas.openxmlformats.org/drawingml/2006/main" xmlns:p="http://schemas.openxmlformats.org/presentationml/2006/main" xmlns:r="http://schemas.openxmlformats.org/officeDocument/2006/relationships">
   <p:cSld>
     <p:spTree>
@@ -6315,7 +9458,7 @@
 </p:sld>
 </file>
 
-<file path=ppt/slides/slide13.xml><?xml version="1.0" encoding="utf-8"?>
+<file path=ppt/slides/slide16.xml><?xml version="1.0" encoding="utf-8"?>
 <p:sld xmlns:a="http://schemas.openxmlformats.org/drawingml/2006/main" xmlns:p="http://schemas.openxmlformats.org/presentationml/2006/main" xmlns:r="http://schemas.openxmlformats.org/officeDocument/2006/relationships">
   <p:cSld>
     <p:spTree>
@@ -7368,7 +10511,7 @@
 </p:sld>
 </file>
 
-<file path=ppt/slides/slide14.xml><?xml version="1.0" encoding="utf-8"?>
+<file path=ppt/slides/slide17.xml><?xml version="1.0" encoding="utf-8"?>
 <p:sld xmlns:a="http://schemas.openxmlformats.org/drawingml/2006/main" xmlns:p="http://schemas.openxmlformats.org/presentationml/2006/main" xmlns:r="http://schemas.openxmlformats.org/officeDocument/2006/relationships">
   <p:cSld>
     <p:spTree>
@@ -11128,7 +14271,7 @@
                 </a:solidFill>
                 <a:latin typeface="맑은 고딕"/>
               </a:rPr>
-              <a:t>아키텍처: LLM은 읽고, 규칙이 판정한다</a:t>
+              <a:t>업무 흐름 변화</a:t>
             </a:r>
           </a:p>
           <a:p>
@@ -11144,7 +14287,7 @@
                 </a:solidFill>
                 <a:latin typeface="맑은 고딕"/>
               </a:rPr>
-              <a:t>규제 도구가 갖춰야 할 재현성을 구조로 보장</a:t>
+              <a:t>기존 프로세스를 바꾸지 않고, 서류 작성과 마감 사이에 들어간다</a:t>
             </a:r>
           </a:p>
         </p:txBody>
@@ -11202,21 +14345,718 @@
                 </a:solidFill>
                 <a:latin typeface="맑은 고딕"/>
               </a:rPr>
-              <a:t>기술 적정성</a:t>
-            </a:r>
-          </a:p>
-        </p:txBody>
-      </p:sp>
-      <p:sp>
-        <p:nvSpPr>
-          <p:cNvPr id="5" name="Rounded Rectangle 4"/>
+              <a:t>활용 가능성</a:t>
+            </a:r>
+          </a:p>
+        </p:txBody>
+      </p:sp>
+      <p:sp>
+        <p:nvSpPr>
+          <p:cNvPr id="5" name="TextBox 4"/>
+          <p:cNvSpPr txBox="1"/>
+          <p:nvPr/>
+        </p:nvSpPr>
+        <p:spPr>
+          <a:xfrm>
+            <a:off x="566928" y="1371600"/>
+            <a:ext cx="11064240" cy="365760"/>
+          </a:xfrm>
+          <a:prstGeom prst="rect">
+            <a:avLst/>
+          </a:prstGeom>
+          <a:noFill/>
+        </p:spPr>
+        <p:txBody>
+          <a:bodyPr wrap="square">
+            <a:spAutoFit/>
+          </a:bodyPr>
+          <a:lstStyle/>
+          <a:p>
+            <a:pPr algn="l">
+              <a:spcAft>
+                <a:spcPts val="0"/>
+              </a:spcAft>
+            </a:pPr>
+            <a:r>
+              <a:rPr sz="1500" b="1">
+                <a:solidFill>
+                  <a:srgbClr val="6B6B6B"/>
+                </a:solidFill>
+                <a:latin typeface="맑은 고딕"/>
+              </a:rPr>
+              <a:t>AS-IS   현재 창구 업무</a:t>
+            </a:r>
+          </a:p>
+        </p:txBody>
+      </p:sp>
+      <p:sp>
+        <p:nvSpPr>
+          <p:cNvPr id="6" name="Rounded Rectangle 5"/>
           <p:cNvSpPr/>
           <p:nvPr/>
         </p:nvSpPr>
         <p:spPr>
           <a:xfrm>
-            <a:off x="566928" y="1463040"/>
-            <a:ext cx="5394960" cy="2286000"/>
+            <a:off x="566928" y="1783080"/>
+            <a:ext cx="2048256" cy="566928"/>
+          </a:xfrm>
+          <a:prstGeom prst="roundRect">
+            <a:avLst/>
+          </a:prstGeom>
+          <a:solidFill>
+            <a:srgbClr val="F2F0EB"/>
+          </a:solidFill>
+          <a:ln>
+            <a:solidFill>
+              <a:srgbClr val="E6E0D4"/>
+            </a:solidFill>
+          </a:ln>
+        </p:spPr>
+        <p:style>
+          <a:lnRef idx="1">
+            <a:schemeClr val="accent1"/>
+          </a:lnRef>
+          <a:fillRef idx="3">
+            <a:schemeClr val="accent1"/>
+          </a:fillRef>
+          <a:effectRef idx="2">
+            <a:schemeClr val="accent1"/>
+          </a:effectRef>
+          <a:fontRef idx="minor">
+            <a:schemeClr val="lt1"/>
+          </a:fontRef>
+        </p:style>
+        <p:txBody>
+          <a:bodyPr rtlCol="0" anchor="ctr"/>
+          <a:lstStyle/>
+          <a:p>
+            <a:pPr algn="ctr">
+              <a:spcAft>
+                <a:spcPts val="0"/>
+              </a:spcAft>
+            </a:pPr>
+            <a:r>
+              <a:rPr sz="1200" b="0">
+                <a:solidFill>
+                  <a:srgbClr val="2B2B2B"/>
+                </a:solidFill>
+                <a:latin typeface="맑은 고딕"/>
+              </a:rPr>
+              <a:t>상담·권유</a:t>
+            </a:r>
+          </a:p>
+        </p:txBody>
+      </p:sp>
+      <p:sp>
+        <p:nvSpPr>
+          <p:cNvPr id="7" name="Rounded Rectangle 6"/>
+          <p:cNvSpPr/>
+          <p:nvPr/>
+        </p:nvSpPr>
+        <p:spPr>
+          <a:xfrm>
+            <a:off x="2816352" y="1783080"/>
+            <a:ext cx="2048256" cy="566928"/>
+          </a:xfrm>
+          <a:prstGeom prst="roundRect">
+            <a:avLst/>
+          </a:prstGeom>
+          <a:solidFill>
+            <a:srgbClr val="F2F0EB"/>
+          </a:solidFill>
+          <a:ln>
+            <a:solidFill>
+              <a:srgbClr val="E6E0D4"/>
+            </a:solidFill>
+          </a:ln>
+        </p:spPr>
+        <p:style>
+          <a:lnRef idx="1">
+            <a:schemeClr val="accent1"/>
+          </a:lnRef>
+          <a:fillRef idx="3">
+            <a:schemeClr val="accent1"/>
+          </a:fillRef>
+          <a:effectRef idx="2">
+            <a:schemeClr val="accent1"/>
+          </a:effectRef>
+          <a:fontRef idx="minor">
+            <a:schemeClr val="lt1"/>
+          </a:fontRef>
+        </p:style>
+        <p:txBody>
+          <a:bodyPr rtlCol="0" anchor="ctr"/>
+          <a:lstStyle/>
+          <a:p>
+            <a:pPr algn="ctr">
+              <a:spcAft>
+                <a:spcPts val="0"/>
+              </a:spcAft>
+            </a:pPr>
+            <a:r>
+              <a:rPr sz="1200" b="0">
+                <a:solidFill>
+                  <a:srgbClr val="2B2B2B"/>
+                </a:solidFill>
+                <a:latin typeface="맑은 고딕"/>
+              </a:rPr>
+              <a:t>서류 4종 작성</a:t>
+            </a:r>
+          </a:p>
+        </p:txBody>
+      </p:sp>
+      <p:sp>
+        <p:nvSpPr>
+          <p:cNvPr id="8" name="Rounded Rectangle 7"/>
+          <p:cNvSpPr/>
+          <p:nvPr/>
+        </p:nvSpPr>
+        <p:spPr>
+          <a:xfrm>
+            <a:off x="5065776" y="1783080"/>
+            <a:ext cx="2048256" cy="566928"/>
+          </a:xfrm>
+          <a:prstGeom prst="roundRect">
+            <a:avLst/>
+          </a:prstGeom>
+          <a:solidFill>
+            <a:srgbClr val="F2F0EB"/>
+          </a:solidFill>
+          <a:ln>
+            <a:solidFill>
+              <a:srgbClr val="E6E0D4"/>
+            </a:solidFill>
+          </a:ln>
+        </p:spPr>
+        <p:style>
+          <a:lnRef idx="1">
+            <a:schemeClr val="accent1"/>
+          </a:lnRef>
+          <a:fillRef idx="3">
+            <a:schemeClr val="accent1"/>
+          </a:fillRef>
+          <a:effectRef idx="2">
+            <a:schemeClr val="accent1"/>
+          </a:effectRef>
+          <a:fontRef idx="minor">
+            <a:schemeClr val="lt1"/>
+          </a:fontRef>
+        </p:style>
+        <p:txBody>
+          <a:bodyPr rtlCol="0" anchor="ctr"/>
+          <a:lstStyle/>
+          <a:p>
+            <a:pPr algn="ctr">
+              <a:spcAft>
+                <a:spcPts val="0"/>
+              </a:spcAft>
+            </a:pPr>
+            <a:r>
+              <a:rPr sz="1200" b="0">
+                <a:solidFill>
+                  <a:srgbClr val="2B2B2B"/>
+                </a:solidFill>
+                <a:latin typeface="맑은 고딕"/>
+              </a:rPr>
+              <a:t>직원이 육안 대조</a:t>
+            </a:r>
+          </a:p>
+        </p:txBody>
+      </p:sp>
+      <p:sp>
+        <p:nvSpPr>
+          <p:cNvPr id="9" name="Rounded Rectangle 8"/>
+          <p:cNvSpPr/>
+          <p:nvPr/>
+        </p:nvSpPr>
+        <p:spPr>
+          <a:xfrm>
+            <a:off x="7315200" y="1783080"/>
+            <a:ext cx="2048256" cy="566928"/>
+          </a:xfrm>
+          <a:prstGeom prst="roundRect">
+            <a:avLst/>
+          </a:prstGeom>
+          <a:solidFill>
+            <a:srgbClr val="F2F0EB"/>
+          </a:solidFill>
+          <a:ln>
+            <a:solidFill>
+              <a:srgbClr val="E6E0D4"/>
+            </a:solidFill>
+          </a:ln>
+        </p:spPr>
+        <p:style>
+          <a:lnRef idx="1">
+            <a:schemeClr val="accent1"/>
+          </a:lnRef>
+          <a:fillRef idx="3">
+            <a:schemeClr val="accent1"/>
+          </a:fillRef>
+          <a:effectRef idx="2">
+            <a:schemeClr val="accent1"/>
+          </a:effectRef>
+          <a:fontRef idx="minor">
+            <a:schemeClr val="lt1"/>
+          </a:fontRef>
+        </p:style>
+        <p:txBody>
+          <a:bodyPr rtlCol="0" anchor="ctr"/>
+          <a:lstStyle/>
+          <a:p>
+            <a:pPr algn="ctr">
+              <a:spcAft>
+                <a:spcPts val="0"/>
+              </a:spcAft>
+            </a:pPr>
+            <a:r>
+              <a:rPr sz="1200" b="0">
+                <a:solidFill>
+                  <a:srgbClr val="2B2B2B"/>
+                </a:solidFill>
+                <a:latin typeface="맑은 고딕"/>
+              </a:rPr>
+              <a:t>마감</a:t>
+            </a:r>
+          </a:p>
+        </p:txBody>
+      </p:sp>
+      <p:sp>
+        <p:nvSpPr>
+          <p:cNvPr id="10" name="Rounded Rectangle 9"/>
+          <p:cNvSpPr/>
+          <p:nvPr/>
+        </p:nvSpPr>
+        <p:spPr>
+          <a:xfrm>
+            <a:off x="9564624" y="1783080"/>
+            <a:ext cx="2048256" cy="566928"/>
+          </a:xfrm>
+          <a:prstGeom prst="roundRect">
+            <a:avLst/>
+          </a:prstGeom>
+          <a:solidFill>
+            <a:srgbClr val="F2F0EB"/>
+          </a:solidFill>
+          <a:ln>
+            <a:solidFill>
+              <a:srgbClr val="E6E0D4"/>
+            </a:solidFill>
+          </a:ln>
+        </p:spPr>
+        <p:style>
+          <a:lnRef idx="1">
+            <a:schemeClr val="accent1"/>
+          </a:lnRef>
+          <a:fillRef idx="3">
+            <a:schemeClr val="accent1"/>
+          </a:fillRef>
+          <a:effectRef idx="2">
+            <a:schemeClr val="accent1"/>
+          </a:effectRef>
+          <a:fontRef idx="minor">
+            <a:schemeClr val="lt1"/>
+          </a:fontRef>
+        </p:style>
+        <p:txBody>
+          <a:bodyPr rtlCol="0" anchor="ctr"/>
+          <a:lstStyle/>
+          <a:p>
+            <a:pPr algn="ctr">
+              <a:spcAft>
+                <a:spcPts val="0"/>
+              </a:spcAft>
+            </a:pPr>
+            <a:r>
+              <a:rPr sz="1200" b="0">
+                <a:solidFill>
+                  <a:srgbClr val="2B2B2B"/>
+                </a:solidFill>
+                <a:latin typeface="맑은 고딕"/>
+              </a:rPr>
+              <a:t>컴플라이언스 표본 점검</a:t>
+            </a:r>
+          </a:p>
+        </p:txBody>
+      </p:sp>
+      <p:sp>
+        <p:nvSpPr>
+          <p:cNvPr id="11" name="TextBox 10"/>
+          <p:cNvSpPr txBox="1"/>
+          <p:nvPr/>
+        </p:nvSpPr>
+        <p:spPr>
+          <a:xfrm>
+            <a:off x="566928" y="2450592"/>
+            <a:ext cx="11064240" cy="822960"/>
+          </a:xfrm>
+          <a:prstGeom prst="rect">
+            <a:avLst/>
+          </a:prstGeom>
+          <a:noFill/>
+        </p:spPr>
+        <p:txBody>
+          <a:bodyPr wrap="square">
+            <a:spAutoFit/>
+          </a:bodyPr>
+          <a:lstStyle/>
+          <a:p>
+            <a:pPr algn="l">
+              <a:spcAft>
+                <a:spcPts val="0"/>
+              </a:spcAft>
+            </a:pPr>
+            <a:r>
+              <a:rPr sz="1200" b="0">
+                <a:solidFill>
+                  <a:srgbClr val="C62828"/>
+                </a:solidFill>
+                <a:latin typeface="맑은 고딕"/>
+              </a:rPr>
+              <a:t>· 건수가 쌓이면 육안 대조에서 누락이 생깁니다   · 컴플라이언스는 표본만 봅니다 — 전건 확인이 불가능합니다   · 문제를 발견해도 이미 계약이 끝난 뒤입니다</a:t>
+            </a:r>
+          </a:p>
+        </p:txBody>
+      </p:sp>
+      <p:sp>
+        <p:nvSpPr>
+          <p:cNvPr id="12" name="TextBox 11"/>
+          <p:cNvSpPr txBox="1"/>
+          <p:nvPr/>
+        </p:nvSpPr>
+        <p:spPr>
+          <a:xfrm>
+            <a:off x="566928" y="3383280"/>
+            <a:ext cx="11064240" cy="365760"/>
+          </a:xfrm>
+          <a:prstGeom prst="rect">
+            <a:avLst/>
+          </a:prstGeom>
+          <a:noFill/>
+        </p:spPr>
+        <p:txBody>
+          <a:bodyPr wrap="square">
+            <a:spAutoFit/>
+          </a:bodyPr>
+          <a:lstStyle/>
+          <a:p>
+            <a:pPr algn="l">
+              <a:spcAft>
+                <a:spcPts val="0"/>
+              </a:spcAft>
+            </a:pPr>
+            <a:r>
+              <a:rPr sz="1500" b="1">
+                <a:solidFill>
+                  <a:srgbClr val="645B4C"/>
+                </a:solidFill>
+                <a:latin typeface="맑은 고딕"/>
+              </a:rPr>
+              <a:t>TO-BE   제안 시스템 적용</a:t>
+            </a:r>
+          </a:p>
+        </p:txBody>
+      </p:sp>
+      <p:sp>
+        <p:nvSpPr>
+          <p:cNvPr id="13" name="Rounded Rectangle 12"/>
+          <p:cNvSpPr/>
+          <p:nvPr/>
+        </p:nvSpPr>
+        <p:spPr>
+          <a:xfrm>
+            <a:off x="566928" y="3794760"/>
+            <a:ext cx="2048256" cy="566928"/>
+          </a:xfrm>
+          <a:prstGeom prst="roundRect">
+            <a:avLst/>
+          </a:prstGeom>
+          <a:solidFill>
+            <a:srgbClr val="F2F0EB"/>
+          </a:solidFill>
+          <a:ln>
+            <a:solidFill>
+              <a:srgbClr val="E6E0D4"/>
+            </a:solidFill>
+          </a:ln>
+        </p:spPr>
+        <p:style>
+          <a:lnRef idx="1">
+            <a:schemeClr val="accent1"/>
+          </a:lnRef>
+          <a:fillRef idx="3">
+            <a:schemeClr val="accent1"/>
+          </a:fillRef>
+          <a:effectRef idx="2">
+            <a:schemeClr val="accent1"/>
+          </a:effectRef>
+          <a:fontRef idx="minor">
+            <a:schemeClr val="lt1"/>
+          </a:fontRef>
+        </p:style>
+        <p:txBody>
+          <a:bodyPr rtlCol="0" anchor="ctr"/>
+          <a:lstStyle/>
+          <a:p>
+            <a:pPr algn="ctr">
+              <a:spcAft>
+                <a:spcPts val="0"/>
+              </a:spcAft>
+            </a:pPr>
+            <a:r>
+              <a:rPr sz="1200" b="0">
+                <a:solidFill>
+                  <a:srgbClr val="2B2B2B"/>
+                </a:solidFill>
+                <a:latin typeface="맑은 고딕"/>
+              </a:rPr>
+              <a:t>상담·권유</a:t>
+            </a:r>
+          </a:p>
+        </p:txBody>
+      </p:sp>
+      <p:sp>
+        <p:nvSpPr>
+          <p:cNvPr id="14" name="Rounded Rectangle 13"/>
+          <p:cNvSpPr/>
+          <p:nvPr/>
+        </p:nvSpPr>
+        <p:spPr>
+          <a:xfrm>
+            <a:off x="2816352" y="3794760"/>
+            <a:ext cx="2048256" cy="566928"/>
+          </a:xfrm>
+          <a:prstGeom prst="roundRect">
+            <a:avLst/>
+          </a:prstGeom>
+          <a:solidFill>
+            <a:srgbClr val="F2F0EB"/>
+          </a:solidFill>
+          <a:ln>
+            <a:solidFill>
+              <a:srgbClr val="E6E0D4"/>
+            </a:solidFill>
+          </a:ln>
+        </p:spPr>
+        <p:style>
+          <a:lnRef idx="1">
+            <a:schemeClr val="accent1"/>
+          </a:lnRef>
+          <a:fillRef idx="3">
+            <a:schemeClr val="accent1"/>
+          </a:fillRef>
+          <a:effectRef idx="2">
+            <a:schemeClr val="accent1"/>
+          </a:effectRef>
+          <a:fontRef idx="minor">
+            <a:schemeClr val="lt1"/>
+          </a:fontRef>
+        </p:style>
+        <p:txBody>
+          <a:bodyPr rtlCol="0" anchor="ctr"/>
+          <a:lstStyle/>
+          <a:p>
+            <a:pPr algn="ctr">
+              <a:spcAft>
+                <a:spcPts val="0"/>
+              </a:spcAft>
+            </a:pPr>
+            <a:r>
+              <a:rPr sz="1200" b="0">
+                <a:solidFill>
+                  <a:srgbClr val="2B2B2B"/>
+                </a:solidFill>
+                <a:latin typeface="맑은 고딕"/>
+              </a:rPr>
+              <a:t>서류 4종 작성</a:t>
+            </a:r>
+          </a:p>
+        </p:txBody>
+      </p:sp>
+      <p:sp>
+        <p:nvSpPr>
+          <p:cNvPr id="15" name="Rounded Rectangle 14"/>
+          <p:cNvSpPr/>
+          <p:nvPr/>
+        </p:nvSpPr>
+        <p:spPr>
+          <a:xfrm>
+            <a:off x="5065776" y="3794760"/>
+            <a:ext cx="2048256" cy="566928"/>
+          </a:xfrm>
+          <a:prstGeom prst="roundRect">
+            <a:avLst/>
+          </a:prstGeom>
+          <a:solidFill>
+            <a:srgbClr val="FFF8DF"/>
+          </a:solidFill>
+          <a:ln>
+            <a:solidFill>
+              <a:srgbClr val="FCAF17"/>
+            </a:solidFill>
+          </a:ln>
+        </p:spPr>
+        <p:style>
+          <a:lnRef idx="1">
+            <a:schemeClr val="accent1"/>
+          </a:lnRef>
+          <a:fillRef idx="3">
+            <a:schemeClr val="accent1"/>
+          </a:fillRef>
+          <a:effectRef idx="2">
+            <a:schemeClr val="accent1"/>
+          </a:effectRef>
+          <a:fontRef idx="minor">
+            <a:schemeClr val="lt1"/>
+          </a:fontRef>
+        </p:style>
+        <p:txBody>
+          <a:bodyPr rtlCol="0" anchor="ctr"/>
+          <a:lstStyle/>
+          <a:p>
+            <a:pPr algn="ctr">
+              <a:spcAft>
+                <a:spcPts val="0"/>
+              </a:spcAft>
+            </a:pPr>
+            <a:r>
+              <a:rPr sz="1200" b="1">
+                <a:solidFill>
+                  <a:srgbClr val="645B4C"/>
+                </a:solidFill>
+                <a:latin typeface="맑은 고딕"/>
+              </a:rPr>
+              <a:t>자동 검증 (약 10초)</a:t>
+            </a:r>
+          </a:p>
+        </p:txBody>
+      </p:sp>
+      <p:sp>
+        <p:nvSpPr>
+          <p:cNvPr id="16" name="Rounded Rectangle 15"/>
+          <p:cNvSpPr/>
+          <p:nvPr/>
+        </p:nvSpPr>
+        <p:spPr>
+          <a:xfrm>
+            <a:off x="7315200" y="3794760"/>
+            <a:ext cx="2048256" cy="566928"/>
+          </a:xfrm>
+          <a:prstGeom prst="roundRect">
+            <a:avLst/>
+          </a:prstGeom>
+          <a:solidFill>
+            <a:srgbClr val="FFF8DF"/>
+          </a:solidFill>
+          <a:ln>
+            <a:solidFill>
+              <a:srgbClr val="FCAF17"/>
+            </a:solidFill>
+          </a:ln>
+        </p:spPr>
+        <p:style>
+          <a:lnRef idx="1">
+            <a:schemeClr val="accent1"/>
+          </a:lnRef>
+          <a:fillRef idx="3">
+            <a:schemeClr val="accent1"/>
+          </a:fillRef>
+          <a:effectRef idx="2">
+            <a:schemeClr val="accent1"/>
+          </a:effectRef>
+          <a:fontRef idx="minor">
+            <a:schemeClr val="lt1"/>
+          </a:fontRef>
+        </p:style>
+        <p:txBody>
+          <a:bodyPr rtlCol="0" anchor="ctr"/>
+          <a:lstStyle/>
+          <a:p>
+            <a:pPr algn="ctr">
+              <a:spcAft>
+                <a:spcPts val="0"/>
+              </a:spcAft>
+            </a:pPr>
+            <a:r>
+              <a:rPr sz="1200" b="1">
+                <a:solidFill>
+                  <a:srgbClr val="645B4C"/>
+                </a:solidFill>
+                <a:latin typeface="맑은 고딕"/>
+              </a:rPr>
+              <a:t>이상 시 즉시 보완</a:t>
+            </a:r>
+          </a:p>
+        </p:txBody>
+      </p:sp>
+      <p:sp>
+        <p:nvSpPr>
+          <p:cNvPr id="17" name="Rounded Rectangle 16"/>
+          <p:cNvSpPr/>
+          <p:nvPr/>
+        </p:nvSpPr>
+        <p:spPr>
+          <a:xfrm>
+            <a:off x="9564624" y="3794760"/>
+            <a:ext cx="2048256" cy="566928"/>
+          </a:xfrm>
+          <a:prstGeom prst="roundRect">
+            <a:avLst/>
+          </a:prstGeom>
+          <a:solidFill>
+            <a:srgbClr val="FFF8DF"/>
+          </a:solidFill>
+          <a:ln>
+            <a:solidFill>
+              <a:srgbClr val="FCAF17"/>
+            </a:solidFill>
+          </a:ln>
+        </p:spPr>
+        <p:style>
+          <a:lnRef idx="1">
+            <a:schemeClr val="accent1"/>
+          </a:lnRef>
+          <a:fillRef idx="3">
+            <a:schemeClr val="accent1"/>
+          </a:fillRef>
+          <a:effectRef idx="2">
+            <a:schemeClr val="accent1"/>
+          </a:effectRef>
+          <a:fontRef idx="minor">
+            <a:schemeClr val="lt1"/>
+          </a:fontRef>
+        </p:style>
+        <p:txBody>
+          <a:bodyPr rtlCol="0" anchor="ctr"/>
+          <a:lstStyle/>
+          <a:p>
+            <a:pPr algn="ctr">
+              <a:spcAft>
+                <a:spcPts val="0"/>
+              </a:spcAft>
+            </a:pPr>
+            <a:r>
+              <a:rPr sz="1200" b="1">
+                <a:solidFill>
+                  <a:srgbClr val="645B4C"/>
+                </a:solidFill>
+                <a:latin typeface="맑은 고딕"/>
+              </a:rPr>
+              <a:t>전건 기록 자동 축적</a:t>
+            </a:r>
+          </a:p>
+        </p:txBody>
+      </p:sp>
+      <p:sp>
+        <p:nvSpPr>
+          <p:cNvPr id="18" name="Rounded Rectangle 17"/>
+          <p:cNvSpPr/>
+          <p:nvPr/>
+        </p:nvSpPr>
+        <p:spPr>
+          <a:xfrm>
+            <a:off x="566928" y="4617720"/>
+            <a:ext cx="3520440" cy="1508760"/>
           </a:xfrm>
           <a:prstGeom prst="roundRect">
             <a:avLst/>
@@ -11254,14 +15094,14 @@
       </p:sp>
       <p:sp>
         <p:nvSpPr>
-          <p:cNvPr id="6" name="Rectangle 5"/>
+          <p:cNvPr id="19" name="Rectangle 18"/>
           <p:cNvSpPr/>
           <p:nvPr/>
         </p:nvSpPr>
         <p:spPr>
           <a:xfrm>
-            <a:off x="566928" y="1463040"/>
-            <a:ext cx="54864" cy="2286000"/>
+            <a:off x="566928" y="4617720"/>
+            <a:ext cx="54864" cy="1508760"/>
           </a:xfrm>
           <a:prstGeom prst="rect">
             <a:avLst/>
@@ -11297,14 +15137,14 @@
       </p:sp>
       <p:sp>
         <p:nvSpPr>
-          <p:cNvPr id="7" name="TextBox 6"/>
+          <p:cNvPr id="20" name="TextBox 19"/>
           <p:cNvSpPr txBox="1"/>
           <p:nvPr/>
         </p:nvSpPr>
         <p:spPr>
           <a:xfrm>
-            <a:off x="822960" y="1609344"/>
-            <a:ext cx="4937760" cy="2011680"/>
+            <a:off x="822960" y="4764024"/>
+            <a:ext cx="3063240" cy="1234440"/>
           </a:xfrm>
           <a:prstGeom prst="rect">
             <a:avLst/>
@@ -11329,7 +15169,7 @@
                 </a:solidFill>
                 <a:latin typeface="맑은 고딕"/>
               </a:rPr>
-              <a:t>왜 LLM에 판정을 맡기지 않는가</a:t>
+              <a:t>표본 점검 → 전건 점검</a:t>
             </a:r>
           </a:p>
           <a:p>
@@ -11345,7 +15185,7 @@
                 </a:solidFill>
                 <a:latin typeface="맑은 고딕"/>
               </a:rPr>
-              <a:t>LLM 판정은 같은 입력에도 결과가 흔들릴 수 있다</a:t>
+              <a:t>사람이 못 보던 건까지 기계가 일관되게 확인</a:t>
             </a:r>
           </a:p>
           <a:p>
@@ -11361,53 +15201,21 @@
                 </a:solidFill>
                 <a:latin typeface="맑은 고딕"/>
               </a:rPr>
-              <a:t>판정 근거를 사후에 재현·감사하기 어렵다</a:t>
-            </a:r>
-          </a:p>
-          <a:p>
-            <a:pPr algn="l">
-              <a:spcAft>
-                <a:spcPts val="500"/>
-              </a:spcAft>
-            </a:pPr>
-            <a:r>
-              <a:rPr sz="1200" b="0">
-                <a:solidFill>
-                  <a:srgbClr val="2B2B2B"/>
-                </a:solidFill>
-                <a:latin typeface="맑은 고딕"/>
-              </a:rPr>
-              <a:t>→ LLM은 비정형 서류에서 '값을 읽는' 역할만</a:t>
-            </a:r>
-          </a:p>
-          <a:p>
-            <a:pPr algn="l">
-              <a:spcAft>
-                <a:spcPts val="500"/>
-              </a:spcAft>
-            </a:pPr>
-            <a:r>
-              <a:rPr sz="1200" b="0">
-                <a:solidFill>
-                  <a:srgbClr val="2B2B2B"/>
-                </a:solidFill>
-                <a:latin typeface="맑은 고딕"/>
-              </a:rPr>
-              <a:t>→ 위반 여부는 코드로 작성된 규칙이 결정</a:t>
-            </a:r>
-          </a:p>
-        </p:txBody>
-      </p:sp>
-      <p:sp>
-        <p:nvSpPr>
-          <p:cNvPr id="8" name="Rounded Rectangle 7"/>
+              <a:t>누락 없이 모든 판매 건에 같은 기준 적용</a:t>
+            </a:r>
+          </a:p>
+        </p:txBody>
+      </p:sp>
+      <p:sp>
+        <p:nvSpPr>
+          <p:cNvPr id="21" name="Rounded Rectangle 20"/>
           <p:cNvSpPr/>
           <p:nvPr/>
         </p:nvSpPr>
         <p:spPr>
           <a:xfrm>
-            <a:off x="6172200" y="1463040"/>
-            <a:ext cx="5458968" cy="2286000"/>
+            <a:off x="4315968" y="4617720"/>
+            <a:ext cx="3520440" cy="1508760"/>
           </a:xfrm>
           <a:prstGeom prst="roundRect">
             <a:avLst/>
@@ -11445,14 +15253,305 @@
       </p:sp>
       <p:sp>
         <p:nvSpPr>
-          <p:cNvPr id="9" name="Rectangle 8"/>
+          <p:cNvPr id="22" name="Rectangle 21"/>
           <p:cNvSpPr/>
           <p:nvPr/>
         </p:nvSpPr>
         <p:spPr>
           <a:xfrm>
-            <a:off x="6172200" y="1463040"/>
-            <a:ext cx="54864" cy="2286000"/>
+            <a:off x="4315968" y="4617720"/>
+            <a:ext cx="54864" cy="1508760"/>
+          </a:xfrm>
+          <a:prstGeom prst="rect">
+            <a:avLst/>
+          </a:prstGeom>
+          <a:solidFill>
+            <a:srgbClr val="2E7D32"/>
+          </a:solidFill>
+          <a:ln>
+            <a:noFill/>
+          </a:ln>
+        </p:spPr>
+        <p:style>
+          <a:lnRef idx="1">
+            <a:schemeClr val="accent1"/>
+          </a:lnRef>
+          <a:fillRef idx="3">
+            <a:schemeClr val="accent1"/>
+          </a:fillRef>
+          <a:effectRef idx="2">
+            <a:schemeClr val="accent1"/>
+          </a:effectRef>
+          <a:fontRef idx="minor">
+            <a:schemeClr val="lt1"/>
+          </a:fontRef>
+        </p:style>
+        <p:txBody>
+          <a:bodyPr rtlCol="0" anchor="ctr"/>
+          <a:lstStyle/>
+          <a:p>
+            <a:pPr algn="ctr"/>
+          </a:p>
+        </p:txBody>
+      </p:sp>
+      <p:sp>
+        <p:nvSpPr>
+          <p:cNvPr id="23" name="TextBox 22"/>
+          <p:cNvSpPr txBox="1"/>
+          <p:nvPr/>
+        </p:nvSpPr>
+        <p:spPr>
+          <a:xfrm>
+            <a:off x="4572000" y="4764024"/>
+            <a:ext cx="3063240" cy="1234440"/>
+          </a:xfrm>
+          <a:prstGeom prst="rect">
+            <a:avLst/>
+          </a:prstGeom>
+          <a:noFill/>
+        </p:spPr>
+        <p:txBody>
+          <a:bodyPr wrap="square">
+            <a:spAutoFit/>
+          </a:bodyPr>
+          <a:lstStyle/>
+          <a:p>
+            <a:pPr algn="l">
+              <a:spcAft>
+                <a:spcPts val="700"/>
+              </a:spcAft>
+            </a:pPr>
+            <a:r>
+              <a:rPr sz="1500" b="1">
+                <a:solidFill>
+                  <a:srgbClr val="645B4C"/>
+                </a:solidFill>
+                <a:latin typeface="맑은 고딕"/>
+              </a:rPr>
+              <a:t>사후 적발 → 사전 예방</a:t>
+            </a:r>
+          </a:p>
+          <a:p>
+            <a:pPr algn="l">
+              <a:spcAft>
+                <a:spcPts val="500"/>
+              </a:spcAft>
+            </a:pPr>
+            <a:r>
+              <a:rPr sz="1200" b="0">
+                <a:solidFill>
+                  <a:srgbClr val="2B2B2B"/>
+                </a:solidFill>
+                <a:latin typeface="맑은 고딕"/>
+              </a:rPr>
+              <a:t>계약 완료 전에 보완 기회를 준다</a:t>
+            </a:r>
+          </a:p>
+          <a:p>
+            <a:pPr algn="l">
+              <a:spcAft>
+                <a:spcPts val="500"/>
+              </a:spcAft>
+            </a:pPr>
+            <a:r>
+              <a:rPr sz="1200" b="0">
+                <a:solidFill>
+                  <a:srgbClr val="2B2B2B"/>
+                </a:solidFill>
+                <a:latin typeface="맑은 고딕"/>
+              </a:rPr>
+              <a:t>분쟁·배상으로 가기 전에 차단</a:t>
+            </a:r>
+          </a:p>
+        </p:txBody>
+      </p:sp>
+      <p:sp>
+        <p:nvSpPr>
+          <p:cNvPr id="24" name="Rounded Rectangle 23"/>
+          <p:cNvSpPr/>
+          <p:nvPr/>
+        </p:nvSpPr>
+        <p:spPr>
+          <a:xfrm>
+            <a:off x="8065008" y="4617720"/>
+            <a:ext cx="3566160" cy="1508760"/>
+          </a:xfrm>
+          <a:prstGeom prst="roundRect">
+            <a:avLst/>
+          </a:prstGeom>
+          <a:solidFill>
+            <a:srgbClr val="FFFFFF"/>
+          </a:solidFill>
+          <a:ln>
+            <a:solidFill>
+              <a:srgbClr val="E6E0D4"/>
+            </a:solidFill>
+          </a:ln>
+        </p:spPr>
+        <p:style>
+          <a:lnRef idx="1">
+            <a:schemeClr val="accent1"/>
+          </a:lnRef>
+          <a:fillRef idx="3">
+            <a:schemeClr val="accent1"/>
+          </a:fillRef>
+          <a:effectRef idx="2">
+            <a:schemeClr val="accent1"/>
+          </a:effectRef>
+          <a:fontRef idx="minor">
+            <a:schemeClr val="lt1"/>
+          </a:fontRef>
+        </p:style>
+        <p:txBody>
+          <a:bodyPr rtlCol="0" anchor="ctr"/>
+          <a:lstStyle/>
+          <a:p>
+            <a:pPr algn="ctr"/>
+          </a:p>
+        </p:txBody>
+      </p:sp>
+      <p:sp>
+        <p:nvSpPr>
+          <p:cNvPr id="25" name="Rectangle 24"/>
+          <p:cNvSpPr/>
+          <p:nvPr/>
+        </p:nvSpPr>
+        <p:spPr>
+          <a:xfrm>
+            <a:off x="8065008" y="4617720"/>
+            <a:ext cx="54864" cy="1508760"/>
+          </a:xfrm>
+          <a:prstGeom prst="rect">
+            <a:avLst/>
+          </a:prstGeom>
+          <a:solidFill>
+            <a:srgbClr val="2E7D32"/>
+          </a:solidFill>
+          <a:ln>
+            <a:noFill/>
+          </a:ln>
+        </p:spPr>
+        <p:style>
+          <a:lnRef idx="1">
+            <a:schemeClr val="accent1"/>
+          </a:lnRef>
+          <a:fillRef idx="3">
+            <a:schemeClr val="accent1"/>
+          </a:fillRef>
+          <a:effectRef idx="2">
+            <a:schemeClr val="accent1"/>
+          </a:effectRef>
+          <a:fontRef idx="minor">
+            <a:schemeClr val="lt1"/>
+          </a:fontRef>
+        </p:style>
+        <p:txBody>
+          <a:bodyPr rtlCol="0" anchor="ctr"/>
+          <a:lstStyle/>
+          <a:p>
+            <a:pPr algn="ctr"/>
+          </a:p>
+        </p:txBody>
+      </p:sp>
+      <p:sp>
+        <p:nvSpPr>
+          <p:cNvPr id="26" name="TextBox 25"/>
+          <p:cNvSpPr txBox="1"/>
+          <p:nvPr/>
+        </p:nvSpPr>
+        <p:spPr>
+          <a:xfrm>
+            <a:off x="8321040" y="4764024"/>
+            <a:ext cx="3108960" cy="1234440"/>
+          </a:xfrm>
+          <a:prstGeom prst="rect">
+            <a:avLst/>
+          </a:prstGeom>
+          <a:noFill/>
+        </p:spPr>
+        <p:txBody>
+          <a:bodyPr wrap="square">
+            <a:spAutoFit/>
+          </a:bodyPr>
+          <a:lstStyle/>
+          <a:p>
+            <a:pPr algn="l">
+              <a:spcAft>
+                <a:spcPts val="700"/>
+              </a:spcAft>
+            </a:pPr>
+            <a:r>
+              <a:rPr sz="1500" b="1">
+                <a:solidFill>
+                  <a:srgbClr val="645B4C"/>
+                </a:solidFill>
+                <a:latin typeface="맑은 고딕"/>
+              </a:rPr>
+              <a:t>기록이 자동으로 남는다</a:t>
+            </a:r>
+          </a:p>
+          <a:p>
+            <a:pPr algn="l">
+              <a:spcAft>
+                <a:spcPts val="500"/>
+              </a:spcAft>
+            </a:pPr>
+            <a:r>
+              <a:rPr sz="1200" b="0">
+                <a:solidFill>
+                  <a:srgbClr val="2B2B2B"/>
+                </a:solidFill>
+                <a:latin typeface="맑은 고딕"/>
+              </a:rPr>
+              <a:t>판정 근거·조문·검증 시각을 함께 보관</a:t>
+            </a:r>
+          </a:p>
+          <a:p>
+            <a:pPr algn="l">
+              <a:spcAft>
+                <a:spcPts val="500"/>
+              </a:spcAft>
+            </a:pPr>
+            <a:r>
+              <a:rPr sz="1200" b="0">
+                <a:solidFill>
+                  <a:srgbClr val="2B2B2B"/>
+                </a:solidFill>
+                <a:latin typeface="맑은 고딕"/>
+              </a:rPr>
+              <a:t>사후 입증 자료로 그대로 사용</a:t>
+            </a:r>
+          </a:p>
+        </p:txBody>
+      </p:sp>
+    </p:spTree>
+  </p:cSld>
+  <p:clrMapOvr>
+    <a:masterClrMapping/>
+  </p:clrMapOvr>
+</p:sld>
+</file>
+
+<file path=ppt/slides/slide6.xml><?xml version="1.0" encoding="utf-8"?>
+<p:sld xmlns:a="http://schemas.openxmlformats.org/drawingml/2006/main" xmlns:p="http://schemas.openxmlformats.org/presentationml/2006/main" xmlns:r="http://schemas.openxmlformats.org/officeDocument/2006/relationships">
+  <p:cSld>
+    <p:spTree>
+      <p:nvGrpSpPr>
+        <p:cNvPr id="1" name=""/>
+        <p:cNvGrpSpPr/>
+        <p:nvPr/>
+      </p:nvGrpSpPr>
+      <p:grpSpPr/>
+      <p:sp>
+        <p:nvSpPr>
+          <p:cNvPr id="2" name="Rectangle 1"/>
+          <p:cNvSpPr/>
+          <p:nvPr/>
+        </p:nvSpPr>
+        <p:spPr>
+          <a:xfrm>
+            <a:off x="0" y="0"/>
+            <a:ext cx="12191695" cy="82296"/>
           </a:xfrm>
           <a:prstGeom prst="rect">
             <a:avLst/>
@@ -11488,14 +15587,14 @@
       </p:sp>
       <p:sp>
         <p:nvSpPr>
-          <p:cNvPr id="10" name="TextBox 9"/>
+          <p:cNvPr id="3" name="TextBox 2"/>
           <p:cNvSpPr txBox="1"/>
           <p:nvPr/>
         </p:nvSpPr>
         <p:spPr>
           <a:xfrm>
-            <a:off x="6428232" y="1609344"/>
-            <a:ext cx="5001768" cy="2011680"/>
+            <a:off x="566928" y="310896"/>
+            <a:ext cx="10424160" cy="914400"/>
           </a:xfrm>
           <a:prstGeom prst="rect">
             <a:avLst/>
@@ -11510,96 +15609,106 @@
           <a:p>
             <a:pPr algn="l">
               <a:spcAft>
-                <a:spcPts val="700"/>
-              </a:spcAft>
-            </a:pPr>
-            <a:r>
-              <a:rPr sz="1500" b="1">
+                <a:spcPts val="200"/>
+              </a:spcAft>
+            </a:pPr>
+            <a:r>
+              <a:rPr sz="3000" b="1">
                 <a:solidFill>
                   <a:srgbClr val="645B4C"/>
                 </a:solidFill>
                 <a:latin typeface="맑은 고딕"/>
               </a:rPr>
-              <a:t>그 결과 얻는 것</a:t>
+              <a:t>아키텍처: LLM은 읽고, 규칙이 판정한다</a:t>
             </a:r>
           </a:p>
           <a:p>
             <a:pPr algn="l">
               <a:spcAft>
-                <a:spcPts val="500"/>
-              </a:spcAft>
-            </a:pPr>
-            <a:r>
-              <a:rPr sz="1200" b="0">
-                <a:solidFill>
-                  <a:srgbClr val="2B2B2B"/>
-                </a:solidFill>
-                <a:latin typeface="맑은 고딕"/>
-              </a:rPr>
-              <a:t>같은 서류·같은 정책 → 항상 같은 판정</a:t>
-            </a:r>
-          </a:p>
-          <a:p>
-            <a:pPr algn="l">
-              <a:spcAft>
-                <a:spcPts val="500"/>
-              </a:spcAft>
-            </a:pPr>
-            <a:r>
-              <a:rPr sz="1200" b="0">
-                <a:solidFill>
-                  <a:srgbClr val="2B2B2B"/>
-                </a:solidFill>
-                <a:latin typeface="맑은 고딕"/>
-              </a:rPr>
-              <a:t>판정 근거를 조문·원문 위치까지 제시</a:t>
-            </a:r>
-          </a:p>
-          <a:p>
-            <a:pPr algn="l">
-              <a:spcAft>
-                <a:spcPts val="500"/>
-              </a:spcAft>
-            </a:pPr>
-            <a:r>
-              <a:rPr sz="1200" b="0">
-                <a:solidFill>
-                  <a:srgbClr val="2B2B2B"/>
-                </a:solidFill>
-                <a:latin typeface="맑은 고딕"/>
-              </a:rPr>
-              <a:t>규칙을 KB 내부 기준으로 교체해도 구조 불변</a:t>
-            </a:r>
-          </a:p>
-          <a:p>
-            <a:pPr algn="l">
-              <a:spcAft>
-                <a:spcPts val="500"/>
-              </a:spcAft>
-            </a:pPr>
-            <a:r>
-              <a:rPr sz="1200" b="0">
-                <a:solidFill>
-                  <a:srgbClr val="2B2B2B"/>
-                </a:solidFill>
-                <a:latin typeface="맑은 고딕"/>
-              </a:rPr>
-              <a:t>실측: 업로드 순서 24가지 → 판정 조합 1가지</a:t>
+                <a:spcPts val="600"/>
+              </a:spcAft>
+            </a:pPr>
+            <a:r>
+              <a:rPr sz="1400" b="0">
+                <a:solidFill>
+                  <a:srgbClr val="6B6B6B"/>
+                </a:solidFill>
+                <a:latin typeface="맑은 고딕"/>
+              </a:rPr>
+              <a:t>읽기와 판정 사이에 '검증 계층'을 둔다</a:t>
+            </a:r>
+          </a:p>
+        </p:txBody>
+      </p:sp>
+      <p:sp>
+        <p:nvSpPr>
+          <p:cNvPr id="4" name="Rounded Rectangle 3"/>
+          <p:cNvSpPr/>
+          <p:nvPr/>
+        </p:nvSpPr>
+        <p:spPr>
+          <a:xfrm>
+            <a:off x="9646920" y="329184"/>
+            <a:ext cx="1965960" cy="384048"/>
+          </a:xfrm>
+          <a:prstGeom prst="roundRect">
+            <a:avLst/>
+          </a:prstGeom>
+          <a:solidFill>
+            <a:srgbClr val="FFF8DF"/>
+          </a:solidFill>
+          <a:ln>
+            <a:solidFill>
+              <a:srgbClr val="FCAF17"/>
+            </a:solidFill>
+          </a:ln>
+        </p:spPr>
+        <p:style>
+          <a:lnRef idx="1">
+            <a:schemeClr val="accent1"/>
+          </a:lnRef>
+          <a:fillRef idx="3">
+            <a:schemeClr val="accent1"/>
+          </a:fillRef>
+          <a:effectRef idx="2">
+            <a:schemeClr val="accent1"/>
+          </a:effectRef>
+          <a:fontRef idx="minor">
+            <a:schemeClr val="lt1"/>
+          </a:fontRef>
+        </p:style>
+        <p:txBody>
+          <a:bodyPr rtlCol="0" anchor="ctr" wrap="square"/>
+          <a:lstStyle/>
+          <a:p>
+            <a:pPr algn="ctr">
+              <a:spcAft>
+                <a:spcPts val="0"/>
+              </a:spcAft>
+            </a:pPr>
+            <a:r>
+              <a:rPr sz="1100" b="1">
+                <a:solidFill>
+                  <a:srgbClr val="645B4C"/>
+                </a:solidFill>
+                <a:latin typeface="맑은 고딕"/>
+              </a:rPr>
+              <a:t>기술 적정성</a:t>
             </a:r>
           </a:p>
         </p:txBody>
       </p:sp>
       <p:graphicFrame>
         <p:nvGraphicFramePr>
-          <p:cNvPr id="11" name="Table 10"/>
+          <p:cNvPr id="5" name="Table 4"/>
           <p:cNvGraphicFramePr>
             <a:graphicFrameLocks noGrp="1"/>
           </p:cNvGraphicFramePr>
           <p:nvPr/>
         </p:nvGraphicFramePr>
         <p:xfrm>
-          <a:off x="566928" y="4023360"/>
-          <a:ext cx="11064240" cy="1645920"/>
+          <a:off x="566928" y="1371600"/>
+          <a:ext cx="11064240" cy="1975104"/>
         </p:xfrm>
         <a:graphic>
           <a:graphicData uri="http://schemas.openxmlformats.org/drawingml/2006/table">
@@ -11608,9 +15717,10 @@
                 <a:tableStyleId>{5C22544A-7EE6-4342-B048-85BDC9FD1C3A}</a:tableStyleId>
               </a:tblPr>
               <a:tblGrid>
-                <a:gridCol w="1371600"/>
-                <a:gridCol w="3931920"/>
-                <a:gridCol w="5760720"/>
+                <a:gridCol w="1188720"/>
+                <a:gridCol w="3566160"/>
+                <a:gridCol w="1463040"/>
+                <a:gridCol w="4846320"/>
               </a:tblGrid>
               <a:tr h="329184">
                 <a:tc>
@@ -11684,6 +15794,33 @@
                           </a:solidFill>
                           <a:latin typeface="맑은 고딕"/>
                         </a:rPr>
+                        <a:t>LLM 관여</a:t>
+                      </a:r>
+                    </a:p>
+                  </a:txBody>
+                  <a:tcPr>
+                    <a:solidFill>
+                      <a:srgbClr val="FFF8DF"/>
+                    </a:solidFill>
+                  </a:tcPr>
+                </a:tc>
+                <a:tc>
+                  <a:txBody>
+                    <a:bodyPr wrap="square"/>
+                    <a:lstStyle/>
+                    <a:p>
+                      <a:pPr algn="l">
+                        <a:spcAft>
+                          <a:spcPts val="0"/>
+                        </a:spcAft>
+                      </a:pPr>
+                      <a:r>
+                        <a:rPr sz="1200" b="1">
+                          <a:solidFill>
+                            <a:srgbClr val="645B4C"/>
+                          </a:solidFill>
+                          <a:latin typeface="맑은 고딕"/>
+                        </a:rPr>
                         <a:t>구성</a:t>
                       </a:r>
                     </a:p>
@@ -11713,7 +15850,7 @@
                           </a:solidFill>
                           <a:latin typeface="맑은 고딕"/>
                         </a:rPr>
-                        <a:t>판독</a:t>
+                        <a:t>① 판독</a:t>
                       </a:r>
                     </a:p>
                   </a:txBody>
@@ -11767,7 +15904,34 @@
                           </a:solidFill>
                           <a:latin typeface="맑은 고딕"/>
                         </a:rPr>
-                        <a:t>PyMuPDF · Tesseract OCR · LLM 비전(폴백)</a:t>
+                        <a:t>폴백 시에만</a:t>
+                      </a:r>
+                    </a:p>
+                  </a:txBody>
+                  <a:tcPr>
+                    <a:solidFill>
+                      <a:srgbClr val="FFFFFF"/>
+                    </a:solidFill>
+                  </a:tcPr>
+                </a:tc>
+                <a:tc>
+                  <a:txBody>
+                    <a:bodyPr wrap="square"/>
+                    <a:lstStyle/>
+                    <a:p>
+                      <a:pPr algn="l">
+                        <a:spcAft>
+                          <a:spcPts val="0"/>
+                        </a:spcAft>
+                      </a:pPr>
+                      <a:r>
+                        <a:rPr sz="1100" b="0">
+                          <a:solidFill>
+                            <a:srgbClr val="2B2B2B"/>
+                          </a:solidFill>
+                          <a:latin typeface="맑은 고딕"/>
+                        </a:rPr>
+                        <a:t>PyMuPDF · Tesseract OCR · LLM 비전</a:t>
                       </a:r>
                     </a:p>
                   </a:txBody>
@@ -11796,7 +15960,7 @@
                           </a:solidFill>
                           <a:latin typeface="맑은 고딕"/>
                         </a:rPr>
-                        <a:t>추출</a:t>
+                        <a:t>② 추출</a:t>
                       </a:r>
                     </a:p>
                   </a:txBody>
@@ -11850,7 +16014,34 @@
                           </a:solidFill>
                           <a:latin typeface="맑은 고딕"/>
                         </a:rPr>
-                        <a:t>Claude Haiku + 원문 대조 검증 + 문서유형 스키마</a:t>
+                        <a:t>있음</a:t>
+                      </a:r>
+                    </a:p>
+                  </a:txBody>
+                  <a:tcPr>
+                    <a:solidFill>
+                      <a:srgbClr val="FFFFFF"/>
+                    </a:solidFill>
+                  </a:tcPr>
+                </a:tc>
+                <a:tc>
+                  <a:txBody>
+                    <a:bodyPr wrap="square"/>
+                    <a:lstStyle/>
+                    <a:p>
+                      <a:pPr algn="l">
+                        <a:spcAft>
+                          <a:spcPts val="0"/>
+                        </a:spcAft>
+                      </a:pPr>
+                      <a:r>
+                        <a:rPr sz="1100" b="0">
+                          <a:solidFill>
+                            <a:srgbClr val="2B2B2B"/>
+                          </a:solidFill>
+                          <a:latin typeface="맑은 고딕"/>
+                        </a:rPr>
+                        <a:t>Claude Haiku</a:t>
                       </a:r>
                     </a:p>
                   </a:txBody>
@@ -11879,7 +16070,7 @@
                           </a:solidFill>
                           <a:latin typeface="맑은 고딕"/>
                         </a:rPr>
-                        <a:t>판정</a:t>
+                        <a:t>③ 검증</a:t>
                       </a:r>
                     </a:p>
                   </a:txBody>
@@ -11906,7 +16097,7 @@
                           </a:solidFill>
                           <a:latin typeface="맑은 고딕"/>
                         </a:rPr>
-                        <a:t>위반 여부 결정 (LLM 관여 없음)</a:t>
+                        <a:t>읽은 값이 원문에 실제로 있는지 대조</a:t>
                       </a:r>
                     </a:p>
                   </a:txBody>
@@ -11933,7 +16124,34 @@
                           </a:solidFill>
                           <a:latin typeface="맑은 고딕"/>
                         </a:rPr>
-                        <a:t>결정론적 규칙 8종 (Python)</a:t>
+                        <a:t>없음</a:t>
+                      </a:r>
+                    </a:p>
+                  </a:txBody>
+                  <a:tcPr>
+                    <a:solidFill>
+                      <a:srgbClr val="FFFFFF"/>
+                    </a:solidFill>
+                  </a:tcPr>
+                </a:tc>
+                <a:tc>
+                  <a:txBody>
+                    <a:bodyPr wrap="square"/>
+                    <a:lstStyle/>
+                    <a:p>
+                      <a:pPr algn="l">
+                        <a:spcAft>
+                          <a:spcPts val="0"/>
+                        </a:spcAft>
+                      </a:pPr>
+                      <a:r>
+                        <a:rPr sz="1100" b="0">
+                          <a:solidFill>
+                            <a:srgbClr val="2B2B2B"/>
+                          </a:solidFill>
+                          <a:latin typeface="맑은 고딕"/>
+                        </a:rPr>
+                        <a:t>원문 대조 · 문서유형 게이팅 · 고정 스키마</a:t>
                       </a:r>
                     </a:p>
                   </a:txBody>
@@ -11962,7 +16180,7 @@
                           </a:solidFill>
                           <a:latin typeface="맑은 고딕"/>
                         </a:rPr>
-                        <a:t>근거</a:t>
+                        <a:t>④ 판정</a:t>
                       </a:r>
                     </a:p>
                   </a:txBody>
@@ -11989,6 +16207,116 @@
                           </a:solidFill>
                           <a:latin typeface="맑은 고딕"/>
                         </a:rPr>
+                        <a:t>위반 여부 결정</a:t>
+                      </a:r>
+                    </a:p>
+                  </a:txBody>
+                  <a:tcPr>
+                    <a:solidFill>
+                      <a:srgbClr val="FFFFFF"/>
+                    </a:solidFill>
+                  </a:tcPr>
+                </a:tc>
+                <a:tc>
+                  <a:txBody>
+                    <a:bodyPr wrap="square"/>
+                    <a:lstStyle/>
+                    <a:p>
+                      <a:pPr algn="l">
+                        <a:spcAft>
+                          <a:spcPts val="0"/>
+                        </a:spcAft>
+                      </a:pPr>
+                      <a:r>
+                        <a:rPr sz="1100" b="0">
+                          <a:solidFill>
+                            <a:srgbClr val="2B2B2B"/>
+                          </a:solidFill>
+                          <a:latin typeface="맑은 고딕"/>
+                        </a:rPr>
+                        <a:t>없음</a:t>
+                      </a:r>
+                    </a:p>
+                  </a:txBody>
+                  <a:tcPr>
+                    <a:solidFill>
+                      <a:srgbClr val="FFFFFF"/>
+                    </a:solidFill>
+                  </a:tcPr>
+                </a:tc>
+                <a:tc>
+                  <a:txBody>
+                    <a:bodyPr wrap="square"/>
+                    <a:lstStyle/>
+                    <a:p>
+                      <a:pPr algn="l">
+                        <a:spcAft>
+                          <a:spcPts val="0"/>
+                        </a:spcAft>
+                      </a:pPr>
+                      <a:r>
+                        <a:rPr sz="1100" b="0">
+                          <a:solidFill>
+                            <a:srgbClr val="2B2B2B"/>
+                          </a:solidFill>
+                          <a:latin typeface="맑은 고딕"/>
+                        </a:rPr>
+                        <a:t>결정론적 규칙 8종 (Python)</a:t>
+                      </a:r>
+                    </a:p>
+                  </a:txBody>
+                  <a:tcPr>
+                    <a:solidFill>
+                      <a:srgbClr val="FFFFFF"/>
+                    </a:solidFill>
+                  </a:tcPr>
+                </a:tc>
+              </a:tr>
+              <a:tr h="329184">
+                <a:tc>
+                  <a:txBody>
+                    <a:bodyPr wrap="square"/>
+                    <a:lstStyle/>
+                    <a:p>
+                      <a:pPr algn="l">
+                        <a:spcAft>
+                          <a:spcPts val="0"/>
+                        </a:spcAft>
+                      </a:pPr>
+                      <a:r>
+                        <a:rPr sz="1100" b="0">
+                          <a:solidFill>
+                            <a:srgbClr val="2B2B2B"/>
+                          </a:solidFill>
+                          <a:latin typeface="맑은 고딕"/>
+                        </a:rPr>
+                        <a:t>⑤ 근거</a:t>
+                      </a:r>
+                    </a:p>
+                  </a:txBody>
+                  <a:tcPr>
+                    <a:solidFill>
+                      <a:srgbClr val="FFFFFF"/>
+                    </a:solidFill>
+                  </a:tcPr>
+                </a:tc>
+                <a:tc>
+                  <a:txBody>
+                    <a:bodyPr wrap="square"/>
+                    <a:lstStyle/>
+                    <a:p>
+                      <a:pPr algn="l">
+                        <a:spcAft>
+                          <a:spcPts val="0"/>
+                        </a:spcAft>
+                      </a:pPr>
+                      <a:r>
+                        <a:rPr sz="1100" b="0">
+                          <a:solidFill>
+                            <a:srgbClr val="2B2B2B"/>
+                          </a:solidFill>
+                          <a:latin typeface="맑은 고딕"/>
+                        </a:rPr>
                         <a:t>조문·원문 위치 제시</a:t>
                       </a:r>
                     </a:p>
@@ -12016,7 +16344,34 @@
                           </a:solidFill>
                           <a:latin typeface="맑은 고딕"/>
                         </a:rPr>
-                        <a:t>국가법령정보 API + BM25 조문 검색 + 좌표 하이라이트</a:t>
+                        <a:t>검색어 생성만</a:t>
+                      </a:r>
+                    </a:p>
+                  </a:txBody>
+                  <a:tcPr>
+                    <a:solidFill>
+                      <a:srgbClr val="FFFFFF"/>
+                    </a:solidFill>
+                  </a:tcPr>
+                </a:tc>
+                <a:tc>
+                  <a:txBody>
+                    <a:bodyPr wrap="square"/>
+                    <a:lstStyle/>
+                    <a:p>
+                      <a:pPr algn="l">
+                        <a:spcAft>
+                          <a:spcPts val="0"/>
+                        </a:spcAft>
+                      </a:pPr>
+                      <a:r>
+                        <a:rPr sz="1100" b="0">
+                          <a:solidFill>
+                            <a:srgbClr val="2B2B2B"/>
+                          </a:solidFill>
+                          <a:latin typeface="맑은 고딕"/>
+                        </a:rPr>
+                        <a:t>국가법령정보 API · BM25 · 좌표 하이라이트</a:t>
                       </a:r>
                     </a:p>
                   </a:txBody>
@@ -12031,6 +16386,361 @@
           </a:graphicData>
         </a:graphic>
       </p:graphicFrame>
+      <p:sp>
+        <p:nvSpPr>
+          <p:cNvPr id="6" name="Rounded Rectangle 5"/>
+          <p:cNvSpPr/>
+          <p:nvPr/>
+        </p:nvSpPr>
+        <p:spPr>
+          <a:xfrm>
+            <a:off x="566928" y="3886200"/>
+            <a:ext cx="5394960" cy="2240280"/>
+          </a:xfrm>
+          <a:prstGeom prst="roundRect">
+            <a:avLst/>
+          </a:prstGeom>
+          <a:solidFill>
+            <a:srgbClr val="FFFFFF"/>
+          </a:solidFill>
+          <a:ln>
+            <a:solidFill>
+              <a:srgbClr val="E6E0D4"/>
+            </a:solidFill>
+          </a:ln>
+        </p:spPr>
+        <p:style>
+          <a:lnRef idx="1">
+            <a:schemeClr val="accent1"/>
+          </a:lnRef>
+          <a:fillRef idx="3">
+            <a:schemeClr val="accent1"/>
+          </a:fillRef>
+          <a:effectRef idx="2">
+            <a:schemeClr val="accent1"/>
+          </a:effectRef>
+          <a:fontRef idx="minor">
+            <a:schemeClr val="lt1"/>
+          </a:fontRef>
+        </p:style>
+        <p:txBody>
+          <a:bodyPr rtlCol="0" anchor="ctr"/>
+          <a:lstStyle/>
+          <a:p>
+            <a:pPr algn="ctr"/>
+          </a:p>
+        </p:txBody>
+      </p:sp>
+      <p:sp>
+        <p:nvSpPr>
+          <p:cNvPr id="7" name="Rectangle 6"/>
+          <p:cNvSpPr/>
+          <p:nvPr/>
+        </p:nvSpPr>
+        <p:spPr>
+          <a:xfrm>
+            <a:off x="566928" y="3886200"/>
+            <a:ext cx="54864" cy="2240280"/>
+          </a:xfrm>
+          <a:prstGeom prst="rect">
+            <a:avLst/>
+          </a:prstGeom>
+          <a:solidFill>
+            <a:srgbClr val="2E7D32"/>
+          </a:solidFill>
+          <a:ln>
+            <a:noFill/>
+          </a:ln>
+        </p:spPr>
+        <p:style>
+          <a:lnRef idx="1">
+            <a:schemeClr val="accent1"/>
+          </a:lnRef>
+          <a:fillRef idx="3">
+            <a:schemeClr val="accent1"/>
+          </a:fillRef>
+          <a:effectRef idx="2">
+            <a:schemeClr val="accent1"/>
+          </a:effectRef>
+          <a:fontRef idx="minor">
+            <a:schemeClr val="lt1"/>
+          </a:fontRef>
+        </p:style>
+        <p:txBody>
+          <a:bodyPr rtlCol="0" anchor="ctr"/>
+          <a:lstStyle/>
+          <a:p>
+            <a:pPr algn="ctr"/>
+          </a:p>
+        </p:txBody>
+      </p:sp>
+      <p:sp>
+        <p:nvSpPr>
+          <p:cNvPr id="8" name="TextBox 7"/>
+          <p:cNvSpPr txBox="1"/>
+          <p:nvPr/>
+        </p:nvSpPr>
+        <p:spPr>
+          <a:xfrm>
+            <a:off x="822960" y="4032504"/>
+            <a:ext cx="4937760" cy="1965960"/>
+          </a:xfrm>
+          <a:prstGeom prst="rect">
+            <a:avLst/>
+          </a:prstGeom>
+          <a:noFill/>
+        </p:spPr>
+        <p:txBody>
+          <a:bodyPr wrap="square">
+            <a:spAutoFit/>
+          </a:bodyPr>
+          <a:lstStyle/>
+          <a:p>
+            <a:pPr algn="l">
+              <a:spcAft>
+                <a:spcPts val="700"/>
+              </a:spcAft>
+            </a:pPr>
+            <a:r>
+              <a:rPr sz="1500" b="1">
+                <a:solidFill>
+                  <a:srgbClr val="645B4C"/>
+                </a:solidFill>
+                <a:latin typeface="맑은 고딕"/>
+              </a:rPr>
+              <a:t>LLM은 판정을 바꿀 수 없다 — 구조적으로</a:t>
+            </a:r>
+          </a:p>
+          <a:p>
+            <a:pPr algn="l">
+              <a:spcAft>
+                <a:spcPts val="500"/>
+              </a:spcAft>
+            </a:pPr>
+            <a:r>
+              <a:rPr sz="1200" b="0">
+                <a:solidFill>
+                  <a:srgbClr val="2B2B2B"/>
+                </a:solidFill>
+                <a:latin typeface="맑은 고딕"/>
+              </a:rPr>
+              <a:t>판정 모듈에 LLM 관련 코드 0건 (순수 Python)</a:t>
+            </a:r>
+          </a:p>
+          <a:p>
+            <a:pPr algn="l">
+              <a:spcAft>
+                <a:spcPts val="500"/>
+              </a:spcAft>
+            </a:pPr>
+            <a:r>
+              <a:rPr sz="1200" b="0">
+                <a:solidFill>
+                  <a:srgbClr val="2B2B2B"/>
+                </a:solidFill>
+                <a:latin typeface="맑은 고딕"/>
+              </a:rPr>
+              <a:t>판정 함수에 LLM 인자 자체가 없음</a:t>
+            </a:r>
+          </a:p>
+          <a:p>
+            <a:pPr algn="l">
+              <a:spcAft>
+                <a:spcPts val="500"/>
+              </a:spcAft>
+            </a:pPr>
+            <a:r>
+              <a:rPr sz="1200" b="0">
+                <a:solidFill>
+                  <a:srgbClr val="2B2B2B"/>
+                </a:solidFill>
+                <a:latin typeface="맑은 고딕"/>
+              </a:rPr>
+              <a:t>LLM이 만드는 객체에 '판정' 필드가 없음</a:t>
+            </a:r>
+          </a:p>
+          <a:p>
+            <a:pPr algn="l">
+              <a:spcAft>
+                <a:spcPts val="500"/>
+              </a:spcAft>
+            </a:pPr>
+            <a:r>
+              <a:rPr sz="1200" b="0">
+                <a:solidFill>
+                  <a:srgbClr val="2B2B2B"/>
+                </a:solidFill>
+                <a:latin typeface="맑은 고딕"/>
+              </a:rPr>
+              <a:t>→ 바꾸고 싶어도 손댈 지점이 없다</a:t>
+            </a:r>
+          </a:p>
+        </p:txBody>
+      </p:sp>
+      <p:sp>
+        <p:nvSpPr>
+          <p:cNvPr id="9" name="Rounded Rectangle 8"/>
+          <p:cNvSpPr/>
+          <p:nvPr/>
+        </p:nvSpPr>
+        <p:spPr>
+          <a:xfrm>
+            <a:off x="6172200" y="3886200"/>
+            <a:ext cx="5458968" cy="2240280"/>
+          </a:xfrm>
+          <a:prstGeom prst="roundRect">
+            <a:avLst/>
+          </a:prstGeom>
+          <a:solidFill>
+            <a:srgbClr val="FFF8DF"/>
+          </a:solidFill>
+          <a:ln>
+            <a:solidFill>
+              <a:srgbClr val="FCAF17"/>
+            </a:solidFill>
+          </a:ln>
+        </p:spPr>
+        <p:style>
+          <a:lnRef idx="1">
+            <a:schemeClr val="accent1"/>
+          </a:lnRef>
+          <a:fillRef idx="3">
+            <a:schemeClr val="accent1"/>
+          </a:fillRef>
+          <a:effectRef idx="2">
+            <a:schemeClr val="accent1"/>
+          </a:effectRef>
+          <a:fontRef idx="minor">
+            <a:schemeClr val="lt1"/>
+          </a:fontRef>
+        </p:style>
+        <p:txBody>
+          <a:bodyPr rtlCol="0" anchor="ctr"/>
+          <a:lstStyle/>
+          <a:p>
+            <a:pPr algn="ctr"/>
+          </a:p>
+        </p:txBody>
+      </p:sp>
+      <p:sp>
+        <p:nvSpPr>
+          <p:cNvPr id="10" name="TextBox 9"/>
+          <p:cNvSpPr txBox="1"/>
+          <p:nvPr/>
+        </p:nvSpPr>
+        <p:spPr>
+          <a:xfrm>
+            <a:off x="6400800" y="4041648"/>
+            <a:ext cx="5029200" cy="1920240"/>
+          </a:xfrm>
+          <a:prstGeom prst="rect">
+            <a:avLst/>
+          </a:prstGeom>
+          <a:noFill/>
+        </p:spPr>
+        <p:txBody>
+          <a:bodyPr wrap="square">
+            <a:spAutoFit/>
+          </a:bodyPr>
+          <a:lstStyle/>
+          <a:p>
+            <a:pPr algn="l">
+              <a:spcAft>
+                <a:spcPts val="900"/>
+              </a:spcAft>
+            </a:pPr>
+            <a:r>
+              <a:rPr sz="1300" b="1">
+                <a:solidFill>
+                  <a:srgbClr val="645B4C"/>
+                </a:solidFill>
+                <a:latin typeface="맑은 고딕"/>
+              </a:rPr>
+              <a:t>실측 · 같은 서류를 2회 검증 (캐시 off, LLM 실호출 8건×2)</a:t>
+            </a:r>
+          </a:p>
+          <a:p>
+            <a:pPr algn="l">
+              <a:spcAft>
+                <a:spcPts val="200"/>
+              </a:spcAft>
+            </a:pPr>
+            <a:r>
+              <a:rPr sz="1100" b="0">
+                <a:solidFill>
+                  <a:srgbClr val="6B6B6B"/>
+                </a:solidFill>
+                <a:latin typeface="맑은 고딕"/>
+              </a:rPr>
+              <a:t>LLM이 쓴 설명 문구</a:t>
+            </a:r>
+          </a:p>
+          <a:p>
+            <a:pPr algn="l">
+              <a:spcAft>
+                <a:spcPts val="100"/>
+              </a:spcAft>
+            </a:pPr>
+            <a:r>
+              <a:rPr sz="1000" b="0">
+                <a:solidFill>
+                  <a:srgbClr val="2B2B2B"/>
+                </a:solidFill>
+                <a:latin typeface="맑은 고딕"/>
+              </a:rPr>
+              <a:t>1회차 "안정형(6등급만 가입 가능)이나 상품은 1등급…"</a:t>
+            </a:r>
+          </a:p>
+          <a:p>
+            <a:pPr algn="l">
+              <a:spcAft>
+                <a:spcPts val="600"/>
+              </a:spcAft>
+            </a:pPr>
+            <a:r>
+              <a:rPr sz="1000" b="0">
+                <a:solidFill>
+                  <a:srgbClr val="2B2B2B"/>
+                </a:solidFill>
+                <a:latin typeface="맑은 고딕"/>
+              </a:rPr>
+              <a:t>2회차 "'안정형'(위험 감내도 최저)이나 위험등급은…"</a:t>
+            </a:r>
+          </a:p>
+          <a:p>
+            <a:pPr algn="l">
+              <a:spcAft>
+                <a:spcPts val="200"/>
+              </a:spcAft>
+            </a:pPr>
+            <a:r>
+              <a:rPr sz="1100" b="0">
+                <a:solidFill>
+                  <a:srgbClr val="6B6B6B"/>
+                </a:solidFill>
+                <a:latin typeface="맑은 고딕"/>
+              </a:rPr>
+              <a:t>→ 문구는 매번 달랐으나</a:t>
+            </a:r>
+          </a:p>
+          <a:p>
+            <a:pPr algn="l">
+              <a:spcAft>
+                <a:spcPts val="0"/>
+              </a:spcAft>
+            </a:pPr>
+            <a:r>
+              <a:rPr sz="1500" b="1">
+                <a:solidFill>
+                  <a:srgbClr val="2E7D32"/>
+                </a:solidFill>
+                <a:latin typeface="맑은 고딕"/>
+              </a:rPr>
+              <a:t>판정 8개는 완전히 동일</a:t>
+            </a:r>
+          </a:p>
+        </p:txBody>
+      </p:sp>
     </p:spTree>
   </p:cSld>
   <p:clrMapOvr>
@@ -12039,7 +16749,881 @@
 </p:sld>
 </file>
 
-<file path=ppt/slides/slide6.xml><?xml version="1.0" encoding="utf-8"?>
+<file path=ppt/slides/slide7.xml><?xml version="1.0" encoding="utf-8"?>
+<p:sld xmlns:a="http://schemas.openxmlformats.org/drawingml/2006/main" xmlns:p="http://schemas.openxmlformats.org/presentationml/2006/main" xmlns:r="http://schemas.openxmlformats.org/officeDocument/2006/relationships">
+  <p:cSld>
+    <p:spTree>
+      <p:nvGrpSpPr>
+        <p:cNvPr id="1" name=""/>
+        <p:cNvGrpSpPr/>
+        <p:nvPr/>
+      </p:nvGrpSpPr>
+      <p:grpSpPr/>
+      <p:sp>
+        <p:nvSpPr>
+          <p:cNvPr id="2" name="Rectangle 1"/>
+          <p:cNvSpPr/>
+          <p:nvPr/>
+        </p:nvSpPr>
+        <p:spPr>
+          <a:xfrm>
+            <a:off x="0" y="0"/>
+            <a:ext cx="12191695" cy="82296"/>
+          </a:xfrm>
+          <a:prstGeom prst="rect">
+            <a:avLst/>
+          </a:prstGeom>
+          <a:solidFill>
+            <a:srgbClr val="FCAF17"/>
+          </a:solidFill>
+          <a:ln>
+            <a:noFill/>
+          </a:ln>
+        </p:spPr>
+        <p:style>
+          <a:lnRef idx="1">
+            <a:schemeClr val="accent1"/>
+          </a:lnRef>
+          <a:fillRef idx="3">
+            <a:schemeClr val="accent1"/>
+          </a:fillRef>
+          <a:effectRef idx="2">
+            <a:schemeClr val="accent1"/>
+          </a:effectRef>
+          <a:fontRef idx="minor">
+            <a:schemeClr val="lt1"/>
+          </a:fontRef>
+        </p:style>
+        <p:txBody>
+          <a:bodyPr rtlCol="0" anchor="ctr"/>
+          <a:lstStyle/>
+          <a:p>
+            <a:pPr algn="ctr"/>
+          </a:p>
+        </p:txBody>
+      </p:sp>
+      <p:sp>
+        <p:nvSpPr>
+          <p:cNvPr id="3" name="TextBox 2"/>
+          <p:cNvSpPr txBox="1"/>
+          <p:nvPr/>
+        </p:nvSpPr>
+        <p:spPr>
+          <a:xfrm>
+            <a:off x="566928" y="310896"/>
+            <a:ext cx="10424160" cy="914400"/>
+          </a:xfrm>
+          <a:prstGeom prst="rect">
+            <a:avLst/>
+          </a:prstGeom>
+          <a:noFill/>
+        </p:spPr>
+        <p:txBody>
+          <a:bodyPr wrap="square">
+            <a:spAutoFit/>
+          </a:bodyPr>
+          <a:lstStyle/>
+          <a:p>
+            <a:pPr algn="l">
+              <a:spcAft>
+                <a:spcPts val="200"/>
+              </a:spcAft>
+            </a:pPr>
+            <a:r>
+              <a:rPr sz="3000" b="1">
+                <a:solidFill>
+                  <a:srgbClr val="645B4C"/>
+                </a:solidFill>
+                <a:latin typeface="맑은 고딕"/>
+              </a:rPr>
+              <a:t>왜 이 구조인가</a:t>
+            </a:r>
+          </a:p>
+          <a:p>
+            <a:pPr algn="l">
+              <a:spcAft>
+                <a:spcPts val="600"/>
+              </a:spcAft>
+            </a:pPr>
+            <a:r>
+              <a:rPr sz="1400" b="0">
+                <a:solidFill>
+                  <a:srgbClr val="6B6B6B"/>
+                </a:solidFill>
+                <a:latin typeface="맑은 고딕"/>
+              </a:rPr>
+              <a:t>다른 방식을 검토하고 배제한 근거</a:t>
+            </a:r>
+          </a:p>
+        </p:txBody>
+      </p:sp>
+      <p:sp>
+        <p:nvSpPr>
+          <p:cNvPr id="4" name="Rounded Rectangle 3"/>
+          <p:cNvSpPr/>
+          <p:nvPr/>
+        </p:nvSpPr>
+        <p:spPr>
+          <a:xfrm>
+            <a:off x="9646920" y="329184"/>
+            <a:ext cx="1965960" cy="384048"/>
+          </a:xfrm>
+          <a:prstGeom prst="roundRect">
+            <a:avLst/>
+          </a:prstGeom>
+          <a:solidFill>
+            <a:srgbClr val="FFF8DF"/>
+          </a:solidFill>
+          <a:ln>
+            <a:solidFill>
+              <a:srgbClr val="FCAF17"/>
+            </a:solidFill>
+          </a:ln>
+        </p:spPr>
+        <p:style>
+          <a:lnRef idx="1">
+            <a:schemeClr val="accent1"/>
+          </a:lnRef>
+          <a:fillRef idx="3">
+            <a:schemeClr val="accent1"/>
+          </a:fillRef>
+          <a:effectRef idx="2">
+            <a:schemeClr val="accent1"/>
+          </a:effectRef>
+          <a:fontRef idx="minor">
+            <a:schemeClr val="lt1"/>
+          </a:fontRef>
+        </p:style>
+        <p:txBody>
+          <a:bodyPr rtlCol="0" anchor="ctr" wrap="square"/>
+          <a:lstStyle/>
+          <a:p>
+            <a:pPr algn="ctr">
+              <a:spcAft>
+                <a:spcPts val="0"/>
+              </a:spcAft>
+            </a:pPr>
+            <a:r>
+              <a:rPr sz="1100" b="1">
+                <a:solidFill>
+                  <a:srgbClr val="645B4C"/>
+                </a:solidFill>
+                <a:latin typeface="맑은 고딕"/>
+              </a:rPr>
+              <a:t>기술 적정성</a:t>
+            </a:r>
+          </a:p>
+        </p:txBody>
+      </p:sp>
+      <p:graphicFrame>
+        <p:nvGraphicFramePr>
+          <p:cNvPr id="5" name="Table 4"/>
+          <p:cNvGraphicFramePr>
+            <a:graphicFrameLocks noGrp="1"/>
+          </p:cNvGraphicFramePr>
+          <p:nvPr/>
+        </p:nvGraphicFramePr>
+        <p:xfrm>
+          <a:off x="566928" y="1417320"/>
+          <a:ext cx="11064240" cy="1975104"/>
+        </p:xfrm>
+        <a:graphic>
+          <a:graphicData uri="http://schemas.openxmlformats.org/drawingml/2006/table">
+            <a:tbl>
+              <a:tblPr firstRow="1" bandRow="1">
+                <a:tableStyleId>{5C22544A-7EE6-4342-B048-85BDC9FD1C3A}</a:tableStyleId>
+              </a:tblPr>
+              <a:tblGrid>
+                <a:gridCol w="2651760"/>
+                <a:gridCol w="4937760"/>
+                <a:gridCol w="3474720"/>
+              </a:tblGrid>
+              <a:tr h="329184">
+                <a:tc>
+                  <a:txBody>
+                    <a:bodyPr wrap="square"/>
+                    <a:lstStyle/>
+                    <a:p>
+                      <a:pPr algn="l">
+                        <a:spcAft>
+                          <a:spcPts val="0"/>
+                        </a:spcAft>
+                      </a:pPr>
+                      <a:r>
+                        <a:rPr sz="1200" b="1">
+                          <a:solidFill>
+                            <a:srgbClr val="645B4C"/>
+                          </a:solidFill>
+                          <a:latin typeface="맑은 고딕"/>
+                        </a:rPr>
+                        <a:t>대안</a:t>
+                      </a:r>
+                    </a:p>
+                  </a:txBody>
+                  <a:tcPr>
+                    <a:solidFill>
+                      <a:srgbClr val="FFF8DF"/>
+                    </a:solidFill>
+                  </a:tcPr>
+                </a:tc>
+                <a:tc>
+                  <a:txBody>
+                    <a:bodyPr wrap="square"/>
+                    <a:lstStyle/>
+                    <a:p>
+                      <a:pPr algn="l">
+                        <a:spcAft>
+                          <a:spcPts val="0"/>
+                        </a:spcAft>
+                      </a:pPr>
+                      <a:r>
+                        <a:rPr sz="1200" b="1">
+                          <a:solidFill>
+                            <a:srgbClr val="645B4C"/>
+                          </a:solidFill>
+                          <a:latin typeface="맑은 고딕"/>
+                        </a:rPr>
+                        <a:t>배제 이유</a:t>
+                      </a:r>
+                    </a:p>
+                  </a:txBody>
+                  <a:tcPr>
+                    <a:solidFill>
+                      <a:srgbClr val="FFF8DF"/>
+                    </a:solidFill>
+                  </a:tcPr>
+                </a:tc>
+                <a:tc>
+                  <a:txBody>
+                    <a:bodyPr wrap="square"/>
+                    <a:lstStyle/>
+                    <a:p>
+                      <a:pPr algn="l">
+                        <a:spcAft>
+                          <a:spcPts val="0"/>
+                        </a:spcAft>
+                      </a:pPr>
+                      <a:r>
+                        <a:rPr sz="1200" b="1">
+                          <a:solidFill>
+                            <a:srgbClr val="645B4C"/>
+                          </a:solidFill>
+                          <a:latin typeface="맑은 고딕"/>
+                        </a:rPr>
+                        <a:t>근거</a:t>
+                      </a:r>
+                    </a:p>
+                  </a:txBody>
+                  <a:tcPr>
+                    <a:solidFill>
+                      <a:srgbClr val="FFF8DF"/>
+                    </a:solidFill>
+                  </a:tcPr>
+                </a:tc>
+              </a:tr>
+              <a:tr h="329184">
+                <a:tc>
+                  <a:txBody>
+                    <a:bodyPr wrap="square"/>
+                    <a:lstStyle/>
+                    <a:p>
+                      <a:pPr algn="l">
+                        <a:spcAft>
+                          <a:spcPts val="0"/>
+                        </a:spcAft>
+                      </a:pPr>
+                      <a:r>
+                        <a:rPr sz="1000" b="0">
+                          <a:solidFill>
+                            <a:srgbClr val="2B2B2B"/>
+                          </a:solidFill>
+                          <a:latin typeface="맑은 고딕"/>
+                        </a:rPr>
+                        <a:t>LLM이 판정까지 수행</a:t>
+                      </a:r>
+                    </a:p>
+                  </a:txBody>
+                  <a:tcPr>
+                    <a:solidFill>
+                      <a:srgbClr val="FFFFFF"/>
+                    </a:solidFill>
+                  </a:tcPr>
+                </a:tc>
+                <a:tc>
+                  <a:txBody>
+                    <a:bodyPr wrap="square"/>
+                    <a:lstStyle/>
+                    <a:p>
+                      <a:pPr algn="l">
+                        <a:spcAft>
+                          <a:spcPts val="0"/>
+                        </a:spcAft>
+                      </a:pPr>
+                      <a:r>
+                        <a:rPr sz="1000" b="0">
+                          <a:solidFill>
+                            <a:srgbClr val="2B2B2B"/>
+                          </a:solidFill>
+                          <a:latin typeface="맑은 고딕"/>
+                        </a:rPr>
+                        <a:t>같은 입력에도 결과가 흔들려 감사·재현이 불가능</a:t>
+                      </a:r>
+                    </a:p>
+                  </a:txBody>
+                  <a:tcPr>
+                    <a:solidFill>
+                      <a:srgbClr val="FFFFFF"/>
+                    </a:solidFill>
+                  </a:tcPr>
+                </a:tc>
+                <a:tc>
+                  <a:txBody>
+                    <a:bodyPr wrap="square"/>
+                    <a:lstStyle/>
+                    <a:p>
+                      <a:pPr algn="l">
+                        <a:spcAft>
+                          <a:spcPts val="0"/>
+                        </a:spcAft>
+                      </a:pPr>
+                      <a:r>
+                        <a:rPr sz="1000" b="0">
+                          <a:solidFill>
+                            <a:srgbClr val="2B2B2B"/>
+                          </a:solidFill>
+                          <a:latin typeface="맑은 고딕"/>
+                        </a:rPr>
+                        <a:t>실측 — 같은 판정에도 설명 문구가 매번 달랐음</a:t>
+                      </a:r>
+                    </a:p>
+                  </a:txBody>
+                  <a:tcPr>
+                    <a:solidFill>
+                      <a:srgbClr val="FFFFFF"/>
+                    </a:solidFill>
+                  </a:tcPr>
+                </a:tc>
+              </a:tr>
+              <a:tr h="329184">
+                <a:tc>
+                  <a:txBody>
+                    <a:bodyPr wrap="square"/>
+                    <a:lstStyle/>
+                    <a:p>
+                      <a:pPr algn="l">
+                        <a:spcAft>
+                          <a:spcPts val="0"/>
+                        </a:spcAft>
+                      </a:pPr>
+                      <a:r>
+                        <a:rPr sz="1000" b="0">
+                          <a:solidFill>
+                            <a:srgbClr val="2B2B2B"/>
+                          </a:solidFill>
+                          <a:latin typeface="맑은 고딕"/>
+                        </a:rPr>
+                        <a:t>전용 모델 파인튜닝</a:t>
+                      </a:r>
+                    </a:p>
+                  </a:txBody>
+                  <a:tcPr>
+                    <a:solidFill>
+                      <a:srgbClr val="FFFFFF"/>
+                    </a:solidFill>
+                  </a:tcPr>
+                </a:tc>
+                <a:tc>
+                  <a:txBody>
+                    <a:bodyPr wrap="square"/>
+                    <a:lstStyle/>
+                    <a:p>
+                      <a:pPr algn="l">
+                        <a:spcAft>
+                          <a:spcPts val="0"/>
+                        </a:spcAft>
+                      </a:pPr>
+                      <a:r>
+                        <a:rPr sz="1000" b="0">
+                          <a:solidFill>
+                            <a:srgbClr val="2B2B2B"/>
+                          </a:solidFill>
+                          <a:latin typeface="맑은 고딕"/>
+                        </a:rPr>
+                        <a:t>실제 판매서류는 개인정보라 학습 데이터 확보 불가. 규정 개정 시마다 재학습 필요</a:t>
+                      </a:r>
+                    </a:p>
+                  </a:txBody>
+                  <a:tcPr>
+                    <a:solidFill>
+                      <a:srgbClr val="FFFFFF"/>
+                    </a:solidFill>
+                  </a:tcPr>
+                </a:tc>
+                <a:tc>
+                  <a:txBody>
+                    <a:bodyPr wrap="square"/>
+                    <a:lstStyle/>
+                    <a:p>
+                      <a:pPr algn="l">
+                        <a:spcAft>
+                          <a:spcPts val="0"/>
+                        </a:spcAft>
+                      </a:pPr>
+                      <a:r>
+                        <a:rPr sz="1000" b="0">
+                          <a:solidFill>
+                            <a:srgbClr val="2B2B2B"/>
+                          </a:solidFill>
+                          <a:latin typeface="맑은 고딕"/>
+                        </a:rPr>
+                        <a:t>규정은 조문 텍스트로 관리하는 편이 갱신에 유리</a:t>
+                      </a:r>
+                    </a:p>
+                  </a:txBody>
+                  <a:tcPr>
+                    <a:solidFill>
+                      <a:srgbClr val="FFFFFF"/>
+                    </a:solidFill>
+                  </a:tcPr>
+                </a:tc>
+              </a:tr>
+              <a:tr h="329184">
+                <a:tc>
+                  <a:txBody>
+                    <a:bodyPr wrap="square"/>
+                    <a:lstStyle/>
+                    <a:p>
+                      <a:pPr algn="l">
+                        <a:spcAft>
+                          <a:spcPts val="0"/>
+                        </a:spcAft>
+                      </a:pPr>
+                      <a:r>
+                        <a:rPr sz="1000" b="0">
+                          <a:solidFill>
+                            <a:srgbClr val="2B2B2B"/>
+                          </a:solidFill>
+                          <a:latin typeface="맑은 고딕"/>
+                        </a:rPr>
+                        <a:t>RAG(법령 검색)만 구성</a:t>
+                      </a:r>
+                    </a:p>
+                  </a:txBody>
+                  <a:tcPr>
+                    <a:solidFill>
+                      <a:srgbClr val="FFFFFF"/>
+                    </a:solidFill>
+                  </a:tcPr>
+                </a:tc>
+                <a:tc>
+                  <a:txBody>
+                    <a:bodyPr wrap="square"/>
+                    <a:lstStyle/>
+                    <a:p>
+                      <a:pPr algn="l">
+                        <a:spcAft>
+                          <a:spcPts val="0"/>
+                        </a:spcAft>
+                      </a:pPr>
+                      <a:r>
+                        <a:rPr sz="1000" b="0">
+                          <a:solidFill>
+                            <a:srgbClr val="2B2B2B"/>
+                          </a:solidFill>
+                          <a:latin typeface="맑은 고딕"/>
+                        </a:rPr>
+                        <a:t>조문은 찾아주지만 서류에서 값을 뽑아 문서 간 대조하지 못함</a:t>
+                      </a:r>
+                    </a:p>
+                  </a:txBody>
+                  <a:tcPr>
+                    <a:solidFill>
+                      <a:srgbClr val="FFFFFF"/>
+                    </a:solidFill>
+                  </a:tcPr>
+                </a:tc>
+                <a:tc>
+                  <a:txBody>
+                    <a:bodyPr wrap="square"/>
+                    <a:lstStyle/>
+                    <a:p>
+                      <a:pPr algn="l">
+                        <a:spcAft>
+                          <a:spcPts val="0"/>
+                        </a:spcAft>
+                      </a:pPr>
+                      <a:r>
+                        <a:rPr sz="1000" b="0">
+                          <a:solidFill>
+                            <a:srgbClr val="2B2B2B"/>
+                          </a:solidFill>
+                          <a:latin typeface="맑은 고딕"/>
+                        </a:rPr>
+                        <a:t>적합성 위반은 두 문서를 맞대야 성립</a:t>
+                      </a:r>
+                    </a:p>
+                  </a:txBody>
+                  <a:tcPr>
+                    <a:solidFill>
+                      <a:srgbClr val="FFFFFF"/>
+                    </a:solidFill>
+                  </a:tcPr>
+                </a:tc>
+              </a:tr>
+              <a:tr h="329184">
+                <a:tc>
+                  <a:txBody>
+                    <a:bodyPr wrap="square"/>
+                    <a:lstStyle/>
+                    <a:p>
+                      <a:pPr algn="l">
+                        <a:spcAft>
+                          <a:spcPts val="0"/>
+                        </a:spcAft>
+                      </a:pPr>
+                      <a:r>
+                        <a:rPr sz="1000" b="0">
+                          <a:solidFill>
+                            <a:srgbClr val="2B2B2B"/>
+                          </a:solidFill>
+                          <a:latin typeface="맑은 고딕"/>
+                        </a:rPr>
+                        <a:t>규칙만 사용 (LLM 없이)</a:t>
+                      </a:r>
+                    </a:p>
+                  </a:txBody>
+                  <a:tcPr>
+                    <a:solidFill>
+                      <a:srgbClr val="FFFFFF"/>
+                    </a:solidFill>
+                  </a:tcPr>
+                </a:tc>
+                <a:tc>
+                  <a:txBody>
+                    <a:bodyPr wrap="square"/>
+                    <a:lstStyle/>
+                    <a:p>
+                      <a:pPr algn="l">
+                        <a:spcAft>
+                          <a:spcPts val="0"/>
+                        </a:spcAft>
+                      </a:pPr>
+                      <a:r>
+                        <a:rPr sz="1000" b="0">
+                          <a:solidFill>
+                            <a:srgbClr val="2B2B2B"/>
+                          </a:solidFill>
+                          <a:latin typeface="맑은 고딕"/>
+                        </a:rPr>
+                        <a:t>비정형 서류에서 문서유형·필드를 읽지 못함</a:t>
+                      </a:r>
+                    </a:p>
+                  </a:txBody>
+                  <a:tcPr>
+                    <a:solidFill>
+                      <a:srgbClr val="FFFFFF"/>
+                    </a:solidFill>
+                  </a:tcPr>
+                </a:tc>
+                <a:tc>
+                  <a:txBody>
+                    <a:bodyPr wrap="square"/>
+                    <a:lstStyle/>
+                    <a:p>
+                      <a:pPr algn="l">
+                        <a:spcAft>
+                          <a:spcPts val="0"/>
+                        </a:spcAft>
+                      </a:pPr>
+                      <a:r>
+                        <a:rPr sz="1000" b="0">
+                          <a:solidFill>
+                            <a:srgbClr val="2B2B2B"/>
+                          </a:solidFill>
+                          <a:latin typeface="맑은 고딕"/>
+                        </a:rPr>
+                        <a:t>실측 — 실물 22건에서 규칙 분류가 전부 확신 실패</a:t>
+                      </a:r>
+                    </a:p>
+                  </a:txBody>
+                  <a:tcPr>
+                    <a:solidFill>
+                      <a:srgbClr val="FFFFFF"/>
+                    </a:solidFill>
+                  </a:tcPr>
+                </a:tc>
+              </a:tr>
+              <a:tr h="329184">
+                <a:tc>
+                  <a:txBody>
+                    <a:bodyPr wrap="square"/>
+                    <a:lstStyle/>
+                    <a:p>
+                      <a:pPr algn="l">
+                        <a:spcAft>
+                          <a:spcPts val="0"/>
+                        </a:spcAft>
+                      </a:pPr>
+                      <a:r>
+                        <a:rPr sz="1000" b="0">
+                          <a:solidFill>
+                            <a:srgbClr val="2B2B2B"/>
+                          </a:solidFill>
+                          <a:latin typeface="맑은 고딕"/>
+                        </a:rPr>
+                        <a:t>채택: LLM 판독 + 규칙 판정 + 원문 대조</a:t>
+                      </a:r>
+                    </a:p>
+                  </a:txBody>
+                  <a:tcPr>
+                    <a:solidFill>
+                      <a:srgbClr val="FFFFFF"/>
+                    </a:solidFill>
+                  </a:tcPr>
+                </a:tc>
+                <a:tc>
+                  <a:txBody>
+                    <a:bodyPr wrap="square"/>
+                    <a:lstStyle/>
+                    <a:p>
+                      <a:pPr algn="l">
+                        <a:spcAft>
+                          <a:spcPts val="0"/>
+                        </a:spcAft>
+                      </a:pPr>
+                      <a:r>
+                        <a:rPr sz="1000" b="0">
+                          <a:solidFill>
+                            <a:srgbClr val="2B2B2B"/>
+                          </a:solidFill>
+                          <a:latin typeface="맑은 고딕"/>
+                        </a:rPr>
+                        <a:t>읽기는 LLM이 잘하고, 판정은 재현 가능해야 한다 — 역할을 분리</a:t>
+                      </a:r>
+                    </a:p>
+                  </a:txBody>
+                  <a:tcPr>
+                    <a:solidFill>
+                      <a:srgbClr val="FFFFFF"/>
+                    </a:solidFill>
+                  </a:tcPr>
+                </a:tc>
+                <a:tc>
+                  <a:txBody>
+                    <a:bodyPr wrap="square"/>
+                    <a:lstStyle/>
+                    <a:p>
+                      <a:pPr algn="l">
+                        <a:spcAft>
+                          <a:spcPts val="0"/>
+                        </a:spcAft>
+                      </a:pPr>
+                      <a:r>
+                        <a:rPr sz="1000" b="0">
+                          <a:solidFill>
+                            <a:srgbClr val="2B2B2B"/>
+                          </a:solidFill>
+                          <a:latin typeface="맑은 고딕"/>
+                        </a:rPr>
+                        <a:t>실물 24건 전수 감사 이상 0건</a:t>
+                      </a:r>
+                    </a:p>
+                  </a:txBody>
+                  <a:tcPr>
+                    <a:solidFill>
+                      <a:srgbClr val="FFFFFF"/>
+                    </a:solidFill>
+                  </a:tcPr>
+                </a:tc>
+              </a:tr>
+            </a:tbl>
+          </a:graphicData>
+        </a:graphic>
+      </p:graphicFrame>
+      <p:sp>
+        <p:nvSpPr>
+          <p:cNvPr id="6" name="Rounded Rectangle 5"/>
+          <p:cNvSpPr/>
+          <p:nvPr/>
+        </p:nvSpPr>
+        <p:spPr>
+          <a:xfrm>
+            <a:off x="566928" y="4480560"/>
+            <a:ext cx="11064240" cy="1600200"/>
+          </a:xfrm>
+          <a:prstGeom prst="roundRect">
+            <a:avLst/>
+          </a:prstGeom>
+          <a:solidFill>
+            <a:srgbClr val="FFFFFF"/>
+          </a:solidFill>
+          <a:ln>
+            <a:solidFill>
+              <a:srgbClr val="E6E0D4"/>
+            </a:solidFill>
+          </a:ln>
+        </p:spPr>
+        <p:style>
+          <a:lnRef idx="1">
+            <a:schemeClr val="accent1"/>
+          </a:lnRef>
+          <a:fillRef idx="3">
+            <a:schemeClr val="accent1"/>
+          </a:fillRef>
+          <a:effectRef idx="2">
+            <a:schemeClr val="accent1"/>
+          </a:effectRef>
+          <a:fontRef idx="minor">
+            <a:schemeClr val="lt1"/>
+          </a:fontRef>
+        </p:style>
+        <p:txBody>
+          <a:bodyPr rtlCol="0" anchor="ctr"/>
+          <a:lstStyle/>
+          <a:p>
+            <a:pPr algn="ctr"/>
+          </a:p>
+        </p:txBody>
+      </p:sp>
+      <p:sp>
+        <p:nvSpPr>
+          <p:cNvPr id="7" name="Rectangle 6"/>
+          <p:cNvSpPr/>
+          <p:nvPr/>
+        </p:nvSpPr>
+        <p:spPr>
+          <a:xfrm>
+            <a:off x="566928" y="4480560"/>
+            <a:ext cx="54864" cy="1600200"/>
+          </a:xfrm>
+          <a:prstGeom prst="rect">
+            <a:avLst/>
+          </a:prstGeom>
+          <a:solidFill>
+            <a:srgbClr val="FCAF17"/>
+          </a:solidFill>
+          <a:ln>
+            <a:noFill/>
+          </a:ln>
+        </p:spPr>
+        <p:style>
+          <a:lnRef idx="1">
+            <a:schemeClr val="accent1"/>
+          </a:lnRef>
+          <a:fillRef idx="3">
+            <a:schemeClr val="accent1"/>
+          </a:fillRef>
+          <a:effectRef idx="2">
+            <a:schemeClr val="accent1"/>
+          </a:effectRef>
+          <a:fontRef idx="minor">
+            <a:schemeClr val="lt1"/>
+          </a:fontRef>
+        </p:style>
+        <p:txBody>
+          <a:bodyPr rtlCol="0" anchor="ctr"/>
+          <a:lstStyle/>
+          <a:p>
+            <a:pPr algn="ctr"/>
+          </a:p>
+        </p:txBody>
+      </p:sp>
+      <p:sp>
+        <p:nvSpPr>
+          <p:cNvPr id="8" name="TextBox 7"/>
+          <p:cNvSpPr txBox="1"/>
+          <p:nvPr/>
+        </p:nvSpPr>
+        <p:spPr>
+          <a:xfrm>
+            <a:off x="822960" y="4626864"/>
+            <a:ext cx="10607040" cy="1325880"/>
+          </a:xfrm>
+          <a:prstGeom prst="rect">
+            <a:avLst/>
+          </a:prstGeom>
+          <a:noFill/>
+        </p:spPr>
+        <p:txBody>
+          <a:bodyPr wrap="square">
+            <a:spAutoFit/>
+          </a:bodyPr>
+          <a:lstStyle/>
+          <a:p>
+            <a:pPr algn="l">
+              <a:spcAft>
+                <a:spcPts val="700"/>
+              </a:spcAft>
+            </a:pPr>
+            <a:r>
+              <a:rPr sz="1500" b="1">
+                <a:solidFill>
+                  <a:srgbClr val="645B4C"/>
+                </a:solidFill>
+                <a:latin typeface="맑은 고딕"/>
+              </a:rPr>
+              <a:t>핵심 판단</a:t>
+            </a:r>
+          </a:p>
+          <a:p>
+            <a:pPr algn="l">
+              <a:spcAft>
+                <a:spcPts val="500"/>
+              </a:spcAft>
+            </a:pPr>
+            <a:r>
+              <a:rPr sz="1200" b="0">
+                <a:solidFill>
+                  <a:srgbClr val="2B2B2B"/>
+                </a:solidFill>
+                <a:latin typeface="맑은 고딕"/>
+              </a:rPr>
+              <a:t>컴플라이언스 도구는 '정확도가 높은 모델'보다 '틀렸을 때 드러나는 구조'가 중요합니다.</a:t>
+            </a:r>
+          </a:p>
+          <a:p>
+            <a:pPr algn="l">
+              <a:spcAft>
+                <a:spcPts val="500"/>
+              </a:spcAft>
+            </a:pPr>
+            <a:r>
+              <a:rPr sz="1200" b="0">
+                <a:solidFill>
+                  <a:srgbClr val="2B2B2B"/>
+                </a:solidFill>
+                <a:latin typeface="맑은 고딕"/>
+              </a:rPr>
+              <a:t>LLM이 값을 잘못 읽으면 판정도 틀립니다 — 그래서 읽기와 판정 사이에 원문 대조 계층을 두었습니다.</a:t>
+            </a:r>
+          </a:p>
+          <a:p>
+            <a:pPr algn="l">
+              <a:spcAft>
+                <a:spcPts val="500"/>
+              </a:spcAft>
+            </a:pPr>
+            <a:r>
+              <a:rPr sz="1200" b="0">
+                <a:solidFill>
+                  <a:srgbClr val="2B2B2B"/>
+                </a:solidFill>
+                <a:latin typeface="맑은 고딕"/>
+              </a:rPr>
+              <a:t>실제로 LLM이 위험등급을 '5등급'으로 지어냈을 때(원문에는 6등급만 존재) 이 계층이 잡아냈습니다.</a:t>
+            </a:r>
+          </a:p>
+        </p:txBody>
+      </p:sp>
+    </p:spTree>
+  </p:cSld>
+  <p:clrMapOvr>
+    <a:masterClrMapping/>
+  </p:clrMapOvr>
+</p:sld>
+</file>
+
+<file path=ppt/slides/slide8.xml><?xml version="1.0" encoding="utf-8"?>
 <p:sld xmlns:a="http://schemas.openxmlformats.org/drawingml/2006/main" xmlns:p="http://schemas.openxmlformats.org/presentationml/2006/main" xmlns:r="http://schemas.openxmlformats.org/officeDocument/2006/relationships">
   <p:cSld>
     <p:spTree>
@@ -13316,7 +18900,7 @@
 </p:sld>
 </file>
 
-<file path=ppt/slides/slide7.xml><?xml version="1.0" encoding="utf-8"?>
+<file path=ppt/slides/slide9.xml><?xml version="1.0" encoding="utf-8"?>
 <p:sld xmlns:a="http://schemas.openxmlformats.org/drawingml/2006/main" xmlns:p="http://schemas.openxmlformats.org/presentationml/2006/main" xmlns:r="http://schemas.openxmlformats.org/officeDocument/2006/relationships">
   <p:cSld>
     <p:spTree>
@@ -14552,2229 +20136,6 @@
           </a:p>
         </p:txBody>
       </p:sp>
-    </p:spTree>
-  </p:cSld>
-  <p:clrMapOvr>
-    <a:masterClrMapping/>
-  </p:clrMapOvr>
-</p:sld>
-</file>
-
-<file path=ppt/slides/slide8.xml><?xml version="1.0" encoding="utf-8"?>
-<p:sld xmlns:a="http://schemas.openxmlformats.org/drawingml/2006/main" xmlns:p="http://schemas.openxmlformats.org/presentationml/2006/main" xmlns:r="http://schemas.openxmlformats.org/officeDocument/2006/relationships">
-  <p:cSld>
-    <p:spTree>
-      <p:nvGrpSpPr>
-        <p:cNvPr id="1" name=""/>
-        <p:cNvGrpSpPr/>
-        <p:nvPr/>
-      </p:nvGrpSpPr>
-      <p:grpSpPr/>
-      <p:sp>
-        <p:nvSpPr>
-          <p:cNvPr id="2" name="Rectangle 1"/>
-          <p:cNvSpPr/>
-          <p:nvPr/>
-        </p:nvSpPr>
-        <p:spPr>
-          <a:xfrm>
-            <a:off x="0" y="0"/>
-            <a:ext cx="12191695" cy="82296"/>
-          </a:xfrm>
-          <a:prstGeom prst="rect">
-            <a:avLst/>
-          </a:prstGeom>
-          <a:solidFill>
-            <a:srgbClr val="FCAF17"/>
-          </a:solidFill>
-          <a:ln>
-            <a:noFill/>
-          </a:ln>
-        </p:spPr>
-        <p:style>
-          <a:lnRef idx="1">
-            <a:schemeClr val="accent1"/>
-          </a:lnRef>
-          <a:fillRef idx="3">
-            <a:schemeClr val="accent1"/>
-          </a:fillRef>
-          <a:effectRef idx="2">
-            <a:schemeClr val="accent1"/>
-          </a:effectRef>
-          <a:fontRef idx="minor">
-            <a:schemeClr val="lt1"/>
-          </a:fontRef>
-        </p:style>
-        <p:txBody>
-          <a:bodyPr rtlCol="0" anchor="ctr"/>
-          <a:lstStyle/>
-          <a:p>
-            <a:pPr algn="ctr"/>
-          </a:p>
-        </p:txBody>
-      </p:sp>
-      <p:sp>
-        <p:nvSpPr>
-          <p:cNvPr id="3" name="TextBox 2"/>
-          <p:cNvSpPr txBox="1"/>
-          <p:nvPr/>
-        </p:nvSpPr>
-        <p:spPr>
-          <a:xfrm>
-            <a:off x="566928" y="310896"/>
-            <a:ext cx="10424160" cy="914400"/>
-          </a:xfrm>
-          <a:prstGeom prst="rect">
-            <a:avLst/>
-          </a:prstGeom>
-          <a:noFill/>
-        </p:spPr>
-        <p:txBody>
-          <a:bodyPr wrap="square">
-            <a:spAutoFit/>
-          </a:bodyPr>
-          <a:lstStyle/>
-          <a:p>
-            <a:pPr algn="l">
-              <a:spcAft>
-                <a:spcPts val="200"/>
-              </a:spcAft>
-            </a:pPr>
-            <a:r>
-              <a:rPr sz="3000" b="1">
-                <a:solidFill>
-                  <a:srgbClr val="645B4C"/>
-                </a:solidFill>
-                <a:latin typeface="맑은 고딕"/>
-              </a:rPr>
-              <a:t>검사 항목 8종과 근거 조문</a:t>
-            </a:r>
-          </a:p>
-          <a:p>
-            <a:pPr algn="l">
-              <a:spcAft>
-                <a:spcPts val="600"/>
-              </a:spcAft>
-            </a:pPr>
-            <a:r>
-              <a:rPr sz="1400" b="0">
-                <a:solidFill>
-                  <a:srgbClr val="6B6B6B"/>
-                </a:solidFill>
-                <a:latin typeface="맑은 고딕"/>
-              </a:rPr>
-              <a:t>무엇을 검사하는지, 그리고 무엇을 검사하지 않는지 밝힌다</a:t>
-            </a:r>
-          </a:p>
-        </p:txBody>
-      </p:sp>
-      <p:sp>
-        <p:nvSpPr>
-          <p:cNvPr id="4" name="Rounded Rectangle 3"/>
-          <p:cNvSpPr/>
-          <p:nvPr/>
-        </p:nvSpPr>
-        <p:spPr>
-          <a:xfrm>
-            <a:off x="9646920" y="329184"/>
-            <a:ext cx="1965960" cy="384048"/>
-          </a:xfrm>
-          <a:prstGeom prst="roundRect">
-            <a:avLst/>
-          </a:prstGeom>
-          <a:solidFill>
-            <a:srgbClr val="FFF8DF"/>
-          </a:solidFill>
-          <a:ln>
-            <a:solidFill>
-              <a:srgbClr val="FCAF17"/>
-            </a:solidFill>
-          </a:ln>
-        </p:spPr>
-        <p:style>
-          <a:lnRef idx="1">
-            <a:schemeClr val="accent1"/>
-          </a:lnRef>
-          <a:fillRef idx="3">
-            <a:schemeClr val="accent1"/>
-          </a:fillRef>
-          <a:effectRef idx="2">
-            <a:schemeClr val="accent1"/>
-          </a:effectRef>
-          <a:fontRef idx="minor">
-            <a:schemeClr val="lt1"/>
-          </a:fontRef>
-        </p:style>
-        <p:txBody>
-          <a:bodyPr rtlCol="0" anchor="ctr" wrap="square"/>
-          <a:lstStyle/>
-          <a:p>
-            <a:pPr algn="ctr">
-              <a:spcAft>
-                <a:spcPts val="0"/>
-              </a:spcAft>
-            </a:pPr>
-            <a:r>
-              <a:rPr sz="1100" b="1">
-                <a:solidFill>
-                  <a:srgbClr val="645B4C"/>
-                </a:solidFill>
-                <a:latin typeface="맑은 고딕"/>
-              </a:rPr>
-              <a:t>기술 적정성</a:t>
-            </a:r>
-          </a:p>
-        </p:txBody>
-      </p:sp>
-      <p:graphicFrame>
-        <p:nvGraphicFramePr>
-          <p:cNvPr id="5" name="Table 4"/>
-          <p:cNvGraphicFramePr>
-            <a:graphicFrameLocks noGrp="1"/>
-          </p:cNvGraphicFramePr>
-          <p:nvPr/>
-        </p:nvGraphicFramePr>
-        <p:xfrm>
-          <a:off x="566928" y="1371600"/>
-          <a:ext cx="11064240" cy="2962656"/>
-        </p:xfrm>
-        <a:graphic>
-          <a:graphicData uri="http://schemas.openxmlformats.org/drawingml/2006/table">
-            <a:tbl>
-              <a:tblPr firstRow="1" bandRow="1">
-                <a:tableStyleId>{5C22544A-7EE6-4342-B048-85BDC9FD1C3A}</a:tableStyleId>
-              </a:tblPr>
-              <a:tblGrid>
-                <a:gridCol w="1280160"/>
-                <a:gridCol w="5486400"/>
-                <a:gridCol w="2103120"/>
-                <a:gridCol w="2194560"/>
-              </a:tblGrid>
-              <a:tr h="329184">
-                <a:tc>
-                  <a:txBody>
-                    <a:bodyPr wrap="square"/>
-                    <a:lstStyle/>
-                    <a:p>
-                      <a:pPr algn="l">
-                        <a:spcAft>
-                          <a:spcPts val="0"/>
-                        </a:spcAft>
-                      </a:pPr>
-                      <a:r>
-                        <a:rPr sz="1200" b="1">
-                          <a:solidFill>
-                            <a:srgbClr val="645B4C"/>
-                          </a:solidFill>
-                          <a:latin typeface="맑은 고딕"/>
-                        </a:rPr>
-                        <a:t>규칙</a:t>
-                      </a:r>
-                    </a:p>
-                  </a:txBody>
-                  <a:tcPr>
-                    <a:solidFill>
-                      <a:srgbClr val="FFF8DF"/>
-                    </a:solidFill>
-                  </a:tcPr>
-                </a:tc>
-                <a:tc>
-                  <a:txBody>
-                    <a:bodyPr wrap="square"/>
-                    <a:lstStyle/>
-                    <a:p>
-                      <a:pPr algn="l">
-                        <a:spcAft>
-                          <a:spcPts val="0"/>
-                        </a:spcAft>
-                      </a:pPr>
-                      <a:r>
-                        <a:rPr sz="1200" b="1">
-                          <a:solidFill>
-                            <a:srgbClr val="645B4C"/>
-                          </a:solidFill>
-                          <a:latin typeface="맑은 고딕"/>
-                        </a:rPr>
-                        <a:t>검사 내용</a:t>
-                      </a:r>
-                    </a:p>
-                  </a:txBody>
-                  <a:tcPr>
-                    <a:solidFill>
-                      <a:srgbClr val="FFF8DF"/>
-                    </a:solidFill>
-                  </a:tcPr>
-                </a:tc>
-                <a:tc>
-                  <a:txBody>
-                    <a:bodyPr wrap="square"/>
-                    <a:lstStyle/>
-                    <a:p>
-                      <a:pPr algn="l">
-                        <a:spcAft>
-                          <a:spcPts val="0"/>
-                        </a:spcAft>
-                      </a:pPr>
-                      <a:r>
-                        <a:rPr sz="1200" b="1">
-                          <a:solidFill>
-                            <a:srgbClr val="645B4C"/>
-                          </a:solidFill>
-                          <a:latin typeface="맑은 고딕"/>
-                        </a:rPr>
-                        <a:t>근거</a:t>
-                      </a:r>
-                    </a:p>
-                  </a:txBody>
-                  <a:tcPr>
-                    <a:solidFill>
-                      <a:srgbClr val="FFF8DF"/>
-                    </a:solidFill>
-                  </a:tcPr>
-                </a:tc>
-                <a:tc>
-                  <a:txBody>
-                    <a:bodyPr wrap="square"/>
-                    <a:lstStyle/>
-                    <a:p>
-                      <a:pPr algn="l">
-                        <a:spcAft>
-                          <a:spcPts val="0"/>
-                        </a:spcAft>
-                      </a:pPr>
-                      <a:r>
-                        <a:rPr sz="1200" b="1">
-                          <a:solidFill>
-                            <a:srgbClr val="645B4C"/>
-                          </a:solidFill>
-                          <a:latin typeface="맑은 고딕"/>
-                        </a:rPr>
-                        <a:t>한 문서로 가능?</a:t>
-                      </a:r>
-                    </a:p>
-                  </a:txBody>
-                  <a:tcPr>
-                    <a:solidFill>
-                      <a:srgbClr val="FFF8DF"/>
-                    </a:solidFill>
-                  </a:tcPr>
-                </a:tc>
-              </a:tr>
-              <a:tr h="329184">
-                <a:tc>
-                  <a:txBody>
-                    <a:bodyPr wrap="square"/>
-                    <a:lstStyle/>
-                    <a:p>
-                      <a:pPr algn="l">
-                        <a:spcAft>
-                          <a:spcPts val="0"/>
-                        </a:spcAft>
-                      </a:pPr>
-                      <a:r>
-                        <a:rPr sz="1000" b="0">
-                          <a:solidFill>
-                            <a:srgbClr val="2B2B2B"/>
-                          </a:solidFill>
-                          <a:latin typeface="맑은 고딕"/>
-                        </a:rPr>
-                        <a:t>FIT-001</a:t>
-                      </a:r>
-                    </a:p>
-                  </a:txBody>
-                  <a:tcPr>
-                    <a:solidFill>
-                      <a:srgbClr val="FFFFFF"/>
-                    </a:solidFill>
-                  </a:tcPr>
-                </a:tc>
-                <a:tc>
-                  <a:txBody>
-                    <a:bodyPr wrap="square"/>
-                    <a:lstStyle/>
-                    <a:p>
-                      <a:pPr algn="l">
-                        <a:spcAft>
-                          <a:spcPts val="0"/>
-                        </a:spcAft>
-                      </a:pPr>
-                      <a:r>
-                        <a:rPr sz="1000" b="0">
-                          <a:solidFill>
-                            <a:srgbClr val="2B2B2B"/>
-                          </a:solidFill>
-                          <a:latin typeface="맑은 고딕"/>
-                        </a:rPr>
-                        <a:t>고객 투자성향 ↔ 상품 위험등급 적합성</a:t>
-                      </a:r>
-                    </a:p>
-                  </a:txBody>
-                  <a:tcPr>
-                    <a:solidFill>
-                      <a:srgbClr val="FFFFFF"/>
-                    </a:solidFill>
-                  </a:tcPr>
-                </a:tc>
-                <a:tc>
-                  <a:txBody>
-                    <a:bodyPr wrap="square"/>
-                    <a:lstStyle/>
-                    <a:p>
-                      <a:pPr algn="l">
-                        <a:spcAft>
-                          <a:spcPts val="0"/>
-                        </a:spcAft>
-                      </a:pPr>
-                      <a:r>
-                        <a:rPr sz="1000" b="0">
-                          <a:solidFill>
-                            <a:srgbClr val="2B2B2B"/>
-                          </a:solidFill>
-                          <a:latin typeface="맑은 고딕"/>
-                        </a:rPr>
-                        <a:t>금소법 17조</a:t>
-                      </a:r>
-                    </a:p>
-                  </a:txBody>
-                  <a:tcPr>
-                    <a:solidFill>
-                      <a:srgbClr val="FFFFFF"/>
-                    </a:solidFill>
-                  </a:tcPr>
-                </a:tc>
-                <a:tc>
-                  <a:txBody>
-                    <a:bodyPr wrap="square"/>
-                    <a:lstStyle/>
-                    <a:p>
-                      <a:pPr algn="l">
-                        <a:spcAft>
-                          <a:spcPts val="0"/>
-                        </a:spcAft>
-                      </a:pPr>
-                      <a:r>
-                        <a:rPr sz="1000" b="0">
-                          <a:solidFill>
-                            <a:srgbClr val="2B2B2B"/>
-                          </a:solidFill>
-                          <a:latin typeface="맑은 고딕"/>
-                        </a:rPr>
-                        <a:t>불가 (교차)</a:t>
-                      </a:r>
-                    </a:p>
-                  </a:txBody>
-                  <a:tcPr>
-                    <a:solidFill>
-                      <a:srgbClr val="FFFFFF"/>
-                    </a:solidFill>
-                  </a:tcPr>
-                </a:tc>
-              </a:tr>
-              <a:tr h="329184">
-                <a:tc>
-                  <a:txBody>
-                    <a:bodyPr wrap="square"/>
-                    <a:lstStyle/>
-                    <a:p>
-                      <a:pPr algn="l">
-                        <a:spcAft>
-                          <a:spcPts val="0"/>
-                        </a:spcAft>
-                      </a:pPr>
-                      <a:r>
-                        <a:rPr sz="1000" b="0">
-                          <a:solidFill>
-                            <a:srgbClr val="2B2B2B"/>
-                          </a:solidFill>
-                          <a:latin typeface="맑은 고딕"/>
-                        </a:rPr>
-                        <a:t>EXP-001</a:t>
-                      </a:r>
-                    </a:p>
-                  </a:txBody>
-                  <a:tcPr>
-                    <a:solidFill>
-                      <a:srgbClr val="FFFFFF"/>
-                    </a:solidFill>
-                  </a:tcPr>
-                </a:tc>
-                <a:tc>
-                  <a:txBody>
-                    <a:bodyPr wrap="square"/>
-                    <a:lstStyle/>
-                    <a:p>
-                      <a:pPr algn="l">
-                        <a:spcAft>
-                          <a:spcPts val="0"/>
-                        </a:spcAft>
-                      </a:pPr>
-                      <a:r>
-                        <a:rPr sz="1000" b="0">
-                          <a:solidFill>
-                            <a:srgbClr val="2B2B2B"/>
-                          </a:solidFill>
-                          <a:latin typeface="맑은 고딕"/>
-                        </a:rPr>
-                        <a:t>원금손실·위험등급·수수료 설명 존재</a:t>
-                      </a:r>
-                    </a:p>
-                  </a:txBody>
-                  <a:tcPr>
-                    <a:solidFill>
-                      <a:srgbClr val="FFFFFF"/>
-                    </a:solidFill>
-                  </a:tcPr>
-                </a:tc>
-                <a:tc>
-                  <a:txBody>
-                    <a:bodyPr wrap="square"/>
-                    <a:lstStyle/>
-                    <a:p>
-                      <a:pPr algn="l">
-                        <a:spcAft>
-                          <a:spcPts val="0"/>
-                        </a:spcAft>
-                      </a:pPr>
-                      <a:r>
-                        <a:rPr sz="1000" b="0">
-                          <a:solidFill>
-                            <a:srgbClr val="2B2B2B"/>
-                          </a:solidFill>
-                          <a:latin typeface="맑은 고딕"/>
-                        </a:rPr>
-                        <a:t>금소법 19조</a:t>
-                      </a:r>
-                    </a:p>
-                  </a:txBody>
-                  <a:tcPr>
-                    <a:solidFill>
-                      <a:srgbClr val="FFFFFF"/>
-                    </a:solidFill>
-                  </a:tcPr>
-                </a:tc>
-                <a:tc>
-                  <a:txBody>
-                    <a:bodyPr wrap="square"/>
-                    <a:lstStyle/>
-                    <a:p>
-                      <a:pPr algn="l">
-                        <a:spcAft>
-                          <a:spcPts val="0"/>
-                        </a:spcAft>
-                      </a:pPr>
-                      <a:r>
-                        <a:rPr sz="1000" b="0">
-                          <a:solidFill>
-                            <a:srgbClr val="2B2B2B"/>
-                          </a:solidFill>
-                          <a:latin typeface="맑은 고딕"/>
-                        </a:rPr>
-                        <a:t>가능</a:t>
-                      </a:r>
-                    </a:p>
-                  </a:txBody>
-                  <a:tcPr>
-                    <a:solidFill>
-                      <a:srgbClr val="FFFFFF"/>
-                    </a:solidFill>
-                  </a:tcPr>
-                </a:tc>
-              </a:tr>
-              <a:tr h="329184">
-                <a:tc>
-                  <a:txBody>
-                    <a:bodyPr wrap="square"/>
-                    <a:lstStyle/>
-                    <a:p>
-                      <a:pPr algn="l">
-                        <a:spcAft>
-                          <a:spcPts val="0"/>
-                        </a:spcAft>
-                      </a:pPr>
-                      <a:r>
-                        <a:rPr sz="1000" b="0">
-                          <a:solidFill>
-                            <a:srgbClr val="2B2B2B"/>
-                          </a:solidFill>
-                          <a:latin typeface="맑은 고딕"/>
-                        </a:rPr>
-                        <a:t>DATE-001</a:t>
-                      </a:r>
-                    </a:p>
-                  </a:txBody>
-                  <a:tcPr>
-                    <a:solidFill>
-                      <a:srgbClr val="FFFFFF"/>
-                    </a:solidFill>
-                  </a:tcPr>
-                </a:tc>
-                <a:tc>
-                  <a:txBody>
-                    <a:bodyPr wrap="square"/>
-                    <a:lstStyle/>
-                    <a:p>
-                      <a:pPr algn="l">
-                        <a:spcAft>
-                          <a:spcPts val="0"/>
-                        </a:spcAft>
-                      </a:pPr>
-                      <a:r>
-                        <a:rPr sz="1000" b="0">
-                          <a:solidFill>
-                            <a:srgbClr val="2B2B2B"/>
-                          </a:solidFill>
-                          <a:latin typeface="맑은 고딕"/>
-                        </a:rPr>
-                        <a:t>설명일이 계약일보다 선행하는지</a:t>
-                      </a:r>
-                    </a:p>
-                  </a:txBody>
-                  <a:tcPr>
-                    <a:solidFill>
-                      <a:srgbClr val="FFFFFF"/>
-                    </a:solidFill>
-                  </a:tcPr>
-                </a:tc>
-                <a:tc>
-                  <a:txBody>
-                    <a:bodyPr wrap="square"/>
-                    <a:lstStyle/>
-                    <a:p>
-                      <a:pPr algn="l">
-                        <a:spcAft>
-                          <a:spcPts val="0"/>
-                        </a:spcAft>
-                      </a:pPr>
-                      <a:r>
-                        <a:rPr sz="1000" b="0">
-                          <a:solidFill>
-                            <a:srgbClr val="2B2B2B"/>
-                          </a:solidFill>
-                          <a:latin typeface="맑은 고딕"/>
-                        </a:rPr>
-                        <a:t>금소법 19조</a:t>
-                      </a:r>
-                    </a:p>
-                  </a:txBody>
-                  <a:tcPr>
-                    <a:solidFill>
-                      <a:srgbClr val="FFFFFF"/>
-                    </a:solidFill>
-                  </a:tcPr>
-                </a:tc>
-                <a:tc>
-                  <a:txBody>
-                    <a:bodyPr wrap="square"/>
-                    <a:lstStyle/>
-                    <a:p>
-                      <a:pPr algn="l">
-                        <a:spcAft>
-                          <a:spcPts val="0"/>
-                        </a:spcAft>
-                      </a:pPr>
-                      <a:r>
-                        <a:rPr sz="1000" b="0">
-                          <a:solidFill>
-                            <a:srgbClr val="2B2B2B"/>
-                          </a:solidFill>
-                          <a:latin typeface="맑은 고딕"/>
-                        </a:rPr>
-                        <a:t>불가 (교차)</a:t>
-                      </a:r>
-                    </a:p>
-                  </a:txBody>
-                  <a:tcPr>
-                    <a:solidFill>
-                      <a:srgbClr val="FFFFFF"/>
-                    </a:solidFill>
-                  </a:tcPr>
-                </a:tc>
-              </a:tr>
-              <a:tr h="329184">
-                <a:tc>
-                  <a:txBody>
-                    <a:bodyPr wrap="square"/>
-                    <a:lstStyle/>
-                    <a:p>
-                      <a:pPr algn="l">
-                        <a:spcAft>
-                          <a:spcPts val="0"/>
-                        </a:spcAft>
-                      </a:pPr>
-                      <a:r>
-                        <a:rPr sz="1000" b="0">
-                          <a:solidFill>
-                            <a:srgbClr val="2B2B2B"/>
-                          </a:solidFill>
-                          <a:latin typeface="맑은 고딕"/>
-                        </a:rPr>
-                        <a:t>ACK-001</a:t>
-                      </a:r>
-                    </a:p>
-                  </a:txBody>
-                  <a:tcPr>
-                    <a:solidFill>
-                      <a:srgbClr val="FFFFFF"/>
-                    </a:solidFill>
-                  </a:tcPr>
-                </a:tc>
-                <a:tc>
-                  <a:txBody>
-                    <a:bodyPr wrap="square"/>
-                    <a:lstStyle/>
-                    <a:p>
-                      <a:pPr algn="l">
-                        <a:spcAft>
-                          <a:spcPts val="0"/>
-                        </a:spcAft>
-                      </a:pPr>
-                      <a:r>
-                        <a:rPr sz="1000" b="0">
-                          <a:solidFill>
-                            <a:srgbClr val="2B2B2B"/>
-                          </a:solidFill>
-                          <a:latin typeface="맑은 고딕"/>
-                        </a:rPr>
-                        <a:t>고객 설명 확인·서명 증빙</a:t>
-                      </a:r>
-                    </a:p>
-                  </a:txBody>
-                  <a:tcPr>
-                    <a:solidFill>
-                      <a:srgbClr val="FFFFFF"/>
-                    </a:solidFill>
-                  </a:tcPr>
-                </a:tc>
-                <a:tc>
-                  <a:txBody>
-                    <a:bodyPr wrap="square"/>
-                    <a:lstStyle/>
-                    <a:p>
-                      <a:pPr algn="l">
-                        <a:spcAft>
-                          <a:spcPts val="0"/>
-                        </a:spcAft>
-                      </a:pPr>
-                      <a:r>
-                        <a:rPr sz="1000" b="0">
-                          <a:solidFill>
-                            <a:srgbClr val="2B2B2B"/>
-                          </a:solidFill>
-                          <a:latin typeface="맑은 고딕"/>
-                        </a:rPr>
-                        <a:t>금소법 19조</a:t>
-                      </a:r>
-                    </a:p>
-                  </a:txBody>
-                  <a:tcPr>
-                    <a:solidFill>
-                      <a:srgbClr val="FFFFFF"/>
-                    </a:solidFill>
-                  </a:tcPr>
-                </a:tc>
-                <a:tc>
-                  <a:txBody>
-                    <a:bodyPr wrap="square"/>
-                    <a:lstStyle/>
-                    <a:p>
-                      <a:pPr algn="l">
-                        <a:spcAft>
-                          <a:spcPts val="0"/>
-                        </a:spcAft>
-                      </a:pPr>
-                      <a:r>
-                        <a:rPr sz="1000" b="0">
-                          <a:solidFill>
-                            <a:srgbClr val="2B2B2B"/>
-                          </a:solidFill>
-                          <a:latin typeface="맑은 고딕"/>
-                        </a:rPr>
-                        <a:t>가능</a:t>
-                      </a:r>
-                    </a:p>
-                  </a:txBody>
-                  <a:tcPr>
-                    <a:solidFill>
-                      <a:srgbClr val="FFFFFF"/>
-                    </a:solidFill>
-                  </a:tcPr>
-                </a:tc>
-              </a:tr>
-              <a:tr h="329184">
-                <a:tc>
-                  <a:txBody>
-                    <a:bodyPr wrap="square"/>
-                    <a:lstStyle/>
-                    <a:p>
-                      <a:pPr algn="l">
-                        <a:spcAft>
-                          <a:spcPts val="0"/>
-                        </a:spcAft>
-                      </a:pPr>
-                      <a:r>
-                        <a:rPr sz="1000" b="0">
-                          <a:solidFill>
-                            <a:srgbClr val="2B2B2B"/>
-                          </a:solidFill>
-                          <a:latin typeface="맑은 고딕"/>
-                        </a:rPr>
-                        <a:t>PKG-001</a:t>
-                      </a:r>
-                    </a:p>
-                  </a:txBody>
-                  <a:tcPr>
-                    <a:solidFill>
-                      <a:srgbClr val="FFFFFF"/>
-                    </a:solidFill>
-                  </a:tcPr>
-                </a:tc>
-                <a:tc>
-                  <a:txBody>
-                    <a:bodyPr wrap="square"/>
-                    <a:lstStyle/>
-                    <a:p>
-                      <a:pPr algn="l">
-                        <a:spcAft>
-                          <a:spcPts val="0"/>
-                        </a:spcAft>
-                      </a:pPr>
-                      <a:r>
-                        <a:rPr sz="1000" b="0">
-                          <a:solidFill>
-                            <a:srgbClr val="2B2B2B"/>
-                          </a:solidFill>
-                          <a:latin typeface="맑은 고딕"/>
-                        </a:rPr>
-                        <a:t>서류 간 상품명·상품코드 동일성</a:t>
-                      </a:r>
-                    </a:p>
-                  </a:txBody>
-                  <a:tcPr>
-                    <a:solidFill>
-                      <a:srgbClr val="FFFFFF"/>
-                    </a:solidFill>
-                  </a:tcPr>
-                </a:tc>
-                <a:tc>
-                  <a:txBody>
-                    <a:bodyPr wrap="square"/>
-                    <a:lstStyle/>
-                    <a:p>
-                      <a:pPr algn="l">
-                        <a:spcAft>
-                          <a:spcPts val="0"/>
-                        </a:spcAft>
-                      </a:pPr>
-                      <a:r>
-                        <a:rPr sz="1000" b="0">
-                          <a:solidFill>
-                            <a:srgbClr val="2B2B2B"/>
-                          </a:solidFill>
-                          <a:latin typeface="맑은 고딕"/>
-                        </a:rPr>
-                        <a:t>금소법 19조</a:t>
-                      </a:r>
-                    </a:p>
-                  </a:txBody>
-                  <a:tcPr>
-                    <a:solidFill>
-                      <a:srgbClr val="FFFFFF"/>
-                    </a:solidFill>
-                  </a:tcPr>
-                </a:tc>
-                <a:tc>
-                  <a:txBody>
-                    <a:bodyPr wrap="square"/>
-                    <a:lstStyle/>
-                    <a:p>
-                      <a:pPr algn="l">
-                        <a:spcAft>
-                          <a:spcPts val="0"/>
-                        </a:spcAft>
-                      </a:pPr>
-                      <a:r>
-                        <a:rPr sz="1000" b="0">
-                          <a:solidFill>
-                            <a:srgbClr val="2B2B2B"/>
-                          </a:solidFill>
-                          <a:latin typeface="맑은 고딕"/>
-                        </a:rPr>
-                        <a:t>불가 (교차)</a:t>
-                      </a:r>
-                    </a:p>
-                  </a:txBody>
-                  <a:tcPr>
-                    <a:solidFill>
-                      <a:srgbClr val="FFFFFF"/>
-                    </a:solidFill>
-                  </a:tcPr>
-                </a:tc>
-              </a:tr>
-              <a:tr h="329184">
-                <a:tc>
-                  <a:txBody>
-                    <a:bodyPr wrap="square"/>
-                    <a:lstStyle/>
-                    <a:p>
-                      <a:pPr algn="l">
-                        <a:spcAft>
-                          <a:spcPts val="0"/>
-                        </a:spcAft>
-                      </a:pPr>
-                      <a:r>
-                        <a:rPr sz="1000" b="0">
-                          <a:solidFill>
-                            <a:srgbClr val="2B2B2B"/>
-                          </a:solidFill>
-                          <a:latin typeface="맑은 고딕"/>
-                        </a:rPr>
-                        <a:t>ADV-001</a:t>
-                      </a:r>
-                    </a:p>
-                  </a:txBody>
-                  <a:tcPr>
-                    <a:solidFill>
-                      <a:srgbClr val="FFFFFF"/>
-                    </a:solidFill>
-                  </a:tcPr>
-                </a:tc>
-                <a:tc>
-                  <a:txBody>
-                    <a:bodyPr wrap="square"/>
-                    <a:lstStyle/>
-                    <a:p>
-                      <a:pPr algn="l">
-                        <a:spcAft>
-                          <a:spcPts val="0"/>
-                        </a:spcAft>
-                      </a:pPr>
-                      <a:r>
-                        <a:rPr sz="1000" b="0">
-                          <a:solidFill>
-                            <a:srgbClr val="2B2B2B"/>
-                          </a:solidFill>
-                          <a:latin typeface="맑은 고딕"/>
-                        </a:rPr>
-                        <a:t>원금보장·확정수익 등 부당권유 표현</a:t>
-                      </a:r>
-                    </a:p>
-                  </a:txBody>
-                  <a:tcPr>
-                    <a:solidFill>
-                      <a:srgbClr val="FFFFFF"/>
-                    </a:solidFill>
-                  </a:tcPr>
-                </a:tc>
-                <a:tc>
-                  <a:txBody>
-                    <a:bodyPr wrap="square"/>
-                    <a:lstStyle/>
-                    <a:p>
-                      <a:pPr algn="l">
-                        <a:spcAft>
-                          <a:spcPts val="0"/>
-                        </a:spcAft>
-                      </a:pPr>
-                      <a:r>
-                        <a:rPr sz="1000" b="0">
-                          <a:solidFill>
-                            <a:srgbClr val="2B2B2B"/>
-                          </a:solidFill>
-                          <a:latin typeface="맑은 고딕"/>
-                        </a:rPr>
-                        <a:t>금소법 21조</a:t>
-                      </a:r>
-                    </a:p>
-                  </a:txBody>
-                  <a:tcPr>
-                    <a:solidFill>
-                      <a:srgbClr val="FFFFFF"/>
-                    </a:solidFill>
-                  </a:tcPr>
-                </a:tc>
-                <a:tc>
-                  <a:txBody>
-                    <a:bodyPr wrap="square"/>
-                    <a:lstStyle/>
-                    <a:p>
-                      <a:pPr algn="l">
-                        <a:spcAft>
-                          <a:spcPts val="0"/>
-                        </a:spcAft>
-                      </a:pPr>
-                      <a:r>
-                        <a:rPr sz="1000" b="0">
-                          <a:solidFill>
-                            <a:srgbClr val="2B2B2B"/>
-                          </a:solidFill>
-                          <a:latin typeface="맑은 고딕"/>
-                        </a:rPr>
-                        <a:t>가능</a:t>
-                      </a:r>
-                    </a:p>
-                  </a:txBody>
-                  <a:tcPr>
-                    <a:solidFill>
-                      <a:srgbClr val="FFFFFF"/>
-                    </a:solidFill>
-                  </a:tcPr>
-                </a:tc>
-              </a:tr>
-              <a:tr h="329184">
-                <a:tc>
-                  <a:txBody>
-                    <a:bodyPr wrap="square"/>
-                    <a:lstStyle/>
-                    <a:p>
-                      <a:pPr algn="l">
-                        <a:spcAft>
-                          <a:spcPts val="0"/>
-                        </a:spcAft>
-                      </a:pPr>
-                      <a:r>
-                        <a:rPr sz="1000" b="0">
-                          <a:solidFill>
-                            <a:srgbClr val="2B2B2B"/>
-                          </a:solidFill>
-                          <a:latin typeface="맑은 고딕"/>
-                        </a:rPr>
-                        <a:t>DOC-001</a:t>
-                      </a:r>
-                    </a:p>
-                  </a:txBody>
-                  <a:tcPr>
-                    <a:solidFill>
-                      <a:srgbClr val="FFFFFF"/>
-                    </a:solidFill>
-                  </a:tcPr>
-                </a:tc>
-                <a:tc>
-                  <a:txBody>
-                    <a:bodyPr wrap="square"/>
-                    <a:lstStyle/>
-                    <a:p>
-                      <a:pPr algn="l">
-                        <a:spcAft>
-                          <a:spcPts val="0"/>
-                        </a:spcAft>
-                      </a:pPr>
-                      <a:r>
-                        <a:rPr sz="1000" b="0">
-                          <a:solidFill>
-                            <a:srgbClr val="2B2B2B"/>
-                          </a:solidFill>
-                          <a:latin typeface="맑은 고딕"/>
-                        </a:rPr>
-                        <a:t>판매서류 4종 구비 여부</a:t>
-                      </a:r>
-                    </a:p>
-                  </a:txBody>
-                  <a:tcPr>
-                    <a:solidFill>
-                      <a:srgbClr val="FFFFFF"/>
-                    </a:solidFill>
-                  </a:tcPr>
-                </a:tc>
-                <a:tc>
-                  <a:txBody>
-                    <a:bodyPr wrap="square"/>
-                    <a:lstStyle/>
-                    <a:p>
-                      <a:pPr algn="l">
-                        <a:spcAft>
-                          <a:spcPts val="0"/>
-                        </a:spcAft>
-                      </a:pPr>
-                      <a:r>
-                        <a:rPr sz="1000" b="0">
-                          <a:solidFill>
-                            <a:srgbClr val="2B2B2B"/>
-                          </a:solidFill>
-                          <a:latin typeface="맑은 고딕"/>
-                        </a:rPr>
-                        <a:t>금소법 23조</a:t>
-                      </a:r>
-                    </a:p>
-                  </a:txBody>
-                  <a:tcPr>
-                    <a:solidFill>
-                      <a:srgbClr val="FFFFFF"/>
-                    </a:solidFill>
-                  </a:tcPr>
-                </a:tc>
-                <a:tc>
-                  <a:txBody>
-                    <a:bodyPr wrap="square"/>
-                    <a:lstStyle/>
-                    <a:p>
-                      <a:pPr algn="l">
-                        <a:spcAft>
-                          <a:spcPts val="0"/>
-                        </a:spcAft>
-                      </a:pPr>
-                      <a:r>
-                        <a:rPr sz="1000" b="0">
-                          <a:solidFill>
-                            <a:srgbClr val="2B2B2B"/>
-                          </a:solidFill>
-                          <a:latin typeface="맑은 고딕"/>
-                        </a:rPr>
-                        <a:t>불가 (교차)</a:t>
-                      </a:r>
-                    </a:p>
-                  </a:txBody>
-                  <a:tcPr>
-                    <a:solidFill>
-                      <a:srgbClr val="FFFFFF"/>
-                    </a:solidFill>
-                  </a:tcPr>
-                </a:tc>
-              </a:tr>
-              <a:tr h="329184">
-                <a:tc>
-                  <a:txBody>
-                    <a:bodyPr wrap="square"/>
-                    <a:lstStyle/>
-                    <a:p>
-                      <a:pPr algn="l">
-                        <a:spcAft>
-                          <a:spcPts val="0"/>
-                        </a:spcAft>
-                      </a:pPr>
-                      <a:r>
-                        <a:rPr sz="1000" b="0">
-                          <a:solidFill>
-                            <a:srgbClr val="2B2B2B"/>
-                          </a:solidFill>
-                          <a:latin typeface="맑은 고딕"/>
-                        </a:rPr>
-                        <a:t>REC-001</a:t>
-                      </a:r>
-                    </a:p>
-                  </a:txBody>
-                  <a:tcPr>
-                    <a:solidFill>
-                      <a:srgbClr val="FFFFFF"/>
-                    </a:solidFill>
-                  </a:tcPr>
-                </a:tc>
-                <a:tc>
-                  <a:txBody>
-                    <a:bodyPr wrap="square"/>
-                    <a:lstStyle/>
-                    <a:p>
-                      <a:pPr algn="l">
-                        <a:spcAft>
-                          <a:spcPts val="0"/>
-                        </a:spcAft>
-                      </a:pPr>
-                      <a:r>
-                        <a:rPr sz="1000" b="0">
-                          <a:solidFill>
-                            <a:srgbClr val="2B2B2B"/>
-                          </a:solidFill>
-                          <a:latin typeface="맑은 고딕"/>
-                        </a:rPr>
-                        <a:t>녹취 의무 대상 여부(고위험·고령·부적합)</a:t>
-                      </a:r>
-                    </a:p>
-                  </a:txBody>
-                  <a:tcPr>
-                    <a:solidFill>
-                      <a:srgbClr val="FFFFFF"/>
-                    </a:solidFill>
-                  </a:tcPr>
-                </a:tc>
-                <a:tc>
-                  <a:txBody>
-                    <a:bodyPr wrap="square"/>
-                    <a:lstStyle/>
-                    <a:p>
-                      <a:pPr algn="l">
-                        <a:spcAft>
-                          <a:spcPts val="0"/>
-                        </a:spcAft>
-                      </a:pPr>
-                      <a:r>
-                        <a:rPr sz="1000" b="0">
-                          <a:solidFill>
-                            <a:srgbClr val="2B2B2B"/>
-                          </a:solidFill>
-                          <a:latin typeface="맑은 고딕"/>
-                        </a:rPr>
-                        <a:t>금소법 28조</a:t>
-                      </a:r>
-                    </a:p>
-                  </a:txBody>
-                  <a:tcPr>
-                    <a:solidFill>
-                      <a:srgbClr val="FFFFFF"/>
-                    </a:solidFill>
-                  </a:tcPr>
-                </a:tc>
-                <a:tc>
-                  <a:txBody>
-                    <a:bodyPr wrap="square"/>
-                    <a:lstStyle/>
-                    <a:p>
-                      <a:pPr algn="l">
-                        <a:spcAft>
-                          <a:spcPts val="0"/>
-                        </a:spcAft>
-                      </a:pPr>
-                      <a:r>
-                        <a:rPr sz="1000" b="0">
-                          <a:solidFill>
-                            <a:srgbClr val="2B2B2B"/>
-                          </a:solidFill>
-                          <a:latin typeface="맑은 고딕"/>
-                        </a:rPr>
-                        <a:t>가능</a:t>
-                      </a:r>
-                    </a:p>
-                  </a:txBody>
-                  <a:tcPr>
-                    <a:solidFill>
-                      <a:srgbClr val="FFFFFF"/>
-                    </a:solidFill>
-                  </a:tcPr>
-                </a:tc>
-              </a:tr>
-            </a:tbl>
-          </a:graphicData>
-        </a:graphic>
-      </p:graphicFrame>
-      <p:sp>
-        <p:nvSpPr>
-          <p:cNvPr id="6" name="TextBox 5"/>
-          <p:cNvSpPr txBox="1"/>
-          <p:nvPr/>
-        </p:nvSpPr>
-        <p:spPr>
-          <a:xfrm>
-            <a:off x="566928" y="5120640"/>
-            <a:ext cx="11064240" cy="1280160"/>
-          </a:xfrm>
-          <a:prstGeom prst="rect">
-            <a:avLst/>
-          </a:prstGeom>
-          <a:noFill/>
-        </p:spPr>
-        <p:txBody>
-          <a:bodyPr wrap="square">
-            <a:spAutoFit/>
-          </a:bodyPr>
-          <a:lstStyle/>
-          <a:p>
-            <a:pPr algn="l">
-              <a:spcAft>
-                <a:spcPts val="600"/>
-              </a:spcAft>
-            </a:pPr>
-            <a:r>
-              <a:rPr sz="1300" b="1">
-                <a:solidFill>
-                  <a:srgbClr val="645B4C"/>
-                </a:solidFill>
-                <a:latin typeface="맑은 고딕"/>
-              </a:rPr>
-              <a:t>검사 범위를 화면에 명시합니다 — 적정성(18조)·불공정영업(20조)·광고(22조)는 대상이 아님을 밝힙니다.</a:t>
-            </a:r>
-          </a:p>
-          <a:p>
-            <a:pPr algn="l">
-              <a:spcAft>
-                <a:spcPts val="600"/>
-              </a:spcAft>
-            </a:pPr>
-            <a:r>
-              <a:rPr sz="1200" b="0">
-                <a:solidFill>
-                  <a:srgbClr val="2B2B2B"/>
-                </a:solidFill>
-                <a:latin typeface="맑은 고딕"/>
-              </a:rPr>
-              <a:t>녹취(REC-001)는 음성을 판독하지 않고 '녹취가 필요한 판매 건인지'만 표시합니다. 검사하지 못하는 것을 검사한 척하지 않는 것이 컴플라이언스 도구의 신뢰 조건입니다.</a:t>
-            </a:r>
-          </a:p>
-        </p:txBody>
-      </p:sp>
-    </p:spTree>
-  </p:cSld>
-  <p:clrMapOvr>
-    <a:masterClrMapping/>
-  </p:clrMapOvr>
-</p:sld>
-</file>
-
-<file path=ppt/slides/slide9.xml><?xml version="1.0" encoding="utf-8"?>
-<p:sld xmlns:a="http://schemas.openxmlformats.org/drawingml/2006/main" xmlns:p="http://schemas.openxmlformats.org/presentationml/2006/main" xmlns:r="http://schemas.openxmlformats.org/officeDocument/2006/relationships">
-  <p:cSld>
-    <p:spTree>
-      <p:nvGrpSpPr>
-        <p:cNvPr id="1" name=""/>
-        <p:cNvGrpSpPr/>
-        <p:nvPr/>
-      </p:nvGrpSpPr>
-      <p:grpSpPr/>
-      <p:sp>
-        <p:nvSpPr>
-          <p:cNvPr id="2" name="Rectangle 1"/>
-          <p:cNvSpPr/>
-          <p:nvPr/>
-        </p:nvSpPr>
-        <p:spPr>
-          <a:xfrm>
-            <a:off x="0" y="0"/>
-            <a:ext cx="12191695" cy="82296"/>
-          </a:xfrm>
-          <a:prstGeom prst="rect">
-            <a:avLst/>
-          </a:prstGeom>
-          <a:solidFill>
-            <a:srgbClr val="FCAF17"/>
-          </a:solidFill>
-          <a:ln>
-            <a:noFill/>
-          </a:ln>
-        </p:spPr>
-        <p:style>
-          <a:lnRef idx="1">
-            <a:schemeClr val="accent1"/>
-          </a:lnRef>
-          <a:fillRef idx="3">
-            <a:schemeClr val="accent1"/>
-          </a:fillRef>
-          <a:effectRef idx="2">
-            <a:schemeClr val="accent1"/>
-          </a:effectRef>
-          <a:fontRef idx="minor">
-            <a:schemeClr val="lt1"/>
-          </a:fontRef>
-        </p:style>
-        <p:txBody>
-          <a:bodyPr rtlCol="0" anchor="ctr"/>
-          <a:lstStyle/>
-          <a:p>
-            <a:pPr algn="ctr"/>
-          </a:p>
-        </p:txBody>
-      </p:sp>
-      <p:sp>
-        <p:nvSpPr>
-          <p:cNvPr id="3" name="TextBox 2"/>
-          <p:cNvSpPr txBox="1"/>
-          <p:nvPr/>
-        </p:nvSpPr>
-        <p:spPr>
-          <a:xfrm>
-            <a:off x="566928" y="310896"/>
-            <a:ext cx="10424160" cy="914400"/>
-          </a:xfrm>
-          <a:prstGeom prst="rect">
-            <a:avLst/>
-          </a:prstGeom>
-          <a:noFill/>
-        </p:spPr>
-        <p:txBody>
-          <a:bodyPr wrap="square">
-            <a:spAutoFit/>
-          </a:bodyPr>
-          <a:lstStyle/>
-          <a:p>
-            <a:pPr algn="l">
-              <a:spcAft>
-                <a:spcPts val="200"/>
-              </a:spcAft>
-            </a:pPr>
-            <a:r>
-              <a:rPr sz="3000" b="1">
-                <a:solidFill>
-                  <a:srgbClr val="645B4C"/>
-                </a:solidFill>
-                <a:latin typeface="맑은 고딕"/>
-              </a:rPr>
-              <a:t>검증 결과</a:t>
-            </a:r>
-          </a:p>
-          <a:p>
-            <a:pPr algn="l">
-              <a:spcAft>
-                <a:spcPts val="600"/>
-              </a:spcAft>
-            </a:pPr>
-            <a:r>
-              <a:rPr sz="1400" b="0">
-                <a:solidFill>
-                  <a:srgbClr val="6B6B6B"/>
-                </a:solidFill>
-                <a:latin typeface="맑은 고딕"/>
-              </a:rPr>
-              <a:t>실제 금융사 서류로 검증했고, 회귀 테스트로 고정했다</a:t>
-            </a:r>
-          </a:p>
-        </p:txBody>
-      </p:sp>
-      <p:sp>
-        <p:nvSpPr>
-          <p:cNvPr id="4" name="Rounded Rectangle 3"/>
-          <p:cNvSpPr/>
-          <p:nvPr/>
-        </p:nvSpPr>
-        <p:spPr>
-          <a:xfrm>
-            <a:off x="9646920" y="329184"/>
-            <a:ext cx="1965960" cy="384048"/>
-          </a:xfrm>
-          <a:prstGeom prst="roundRect">
-            <a:avLst/>
-          </a:prstGeom>
-          <a:solidFill>
-            <a:srgbClr val="FFF8DF"/>
-          </a:solidFill>
-          <a:ln>
-            <a:solidFill>
-              <a:srgbClr val="FCAF17"/>
-            </a:solidFill>
-          </a:ln>
-        </p:spPr>
-        <p:style>
-          <a:lnRef idx="1">
-            <a:schemeClr val="accent1"/>
-          </a:lnRef>
-          <a:fillRef idx="3">
-            <a:schemeClr val="accent1"/>
-          </a:fillRef>
-          <a:effectRef idx="2">
-            <a:schemeClr val="accent1"/>
-          </a:effectRef>
-          <a:fontRef idx="minor">
-            <a:schemeClr val="lt1"/>
-          </a:fontRef>
-        </p:style>
-        <p:txBody>
-          <a:bodyPr rtlCol="0" anchor="ctr" wrap="square"/>
-          <a:lstStyle/>
-          <a:p>
-            <a:pPr algn="ctr">
-              <a:spcAft>
-                <a:spcPts val="0"/>
-              </a:spcAft>
-            </a:pPr>
-            <a:r>
-              <a:rPr sz="1100" b="1">
-                <a:solidFill>
-                  <a:srgbClr val="645B4C"/>
-                </a:solidFill>
-                <a:latin typeface="맑은 고딕"/>
-              </a:rPr>
-              <a:t>기술 실현 가능성</a:t>
-            </a:r>
-          </a:p>
-        </p:txBody>
-      </p:sp>
-      <p:sp>
-        <p:nvSpPr>
-          <p:cNvPr id="5" name="Rounded Rectangle 4"/>
-          <p:cNvSpPr/>
-          <p:nvPr/>
-        </p:nvSpPr>
-        <p:spPr>
-          <a:xfrm>
-            <a:off x="566928" y="1463040"/>
-            <a:ext cx="2615184" cy="1463040"/>
-          </a:xfrm>
-          <a:prstGeom prst="roundRect">
-            <a:avLst/>
-          </a:prstGeom>
-          <a:solidFill>
-            <a:srgbClr val="FFF8DF"/>
-          </a:solidFill>
-          <a:ln>
-            <a:solidFill>
-              <a:srgbClr val="FCAF17"/>
-            </a:solidFill>
-          </a:ln>
-        </p:spPr>
-        <p:style>
-          <a:lnRef idx="1">
-            <a:schemeClr val="accent1"/>
-          </a:lnRef>
-          <a:fillRef idx="3">
-            <a:schemeClr val="accent1"/>
-          </a:fillRef>
-          <a:effectRef idx="2">
-            <a:schemeClr val="accent1"/>
-          </a:effectRef>
-          <a:fontRef idx="minor">
-            <a:schemeClr val="lt1"/>
-          </a:fontRef>
-        </p:style>
-        <p:txBody>
-          <a:bodyPr rtlCol="0" anchor="ctr" wrap="square"/>
-          <a:lstStyle/>
-          <a:p>
-            <a:pPr algn="ctr">
-              <a:spcAft>
-                <a:spcPts val="200"/>
-              </a:spcAft>
-            </a:pPr>
-            <a:r>
-              <a:rPr sz="3000" b="1">
-                <a:solidFill>
-                  <a:srgbClr val="645B4C"/>
-                </a:solidFill>
-                <a:latin typeface="맑은 고딕"/>
-              </a:rPr>
-              <a:t>24건</a:t>
-            </a:r>
-          </a:p>
-          <a:p>
-            <a:pPr algn="ctr">
-              <a:spcAft>
-                <a:spcPts val="0"/>
-              </a:spcAft>
-            </a:pPr>
-            <a:r>
-              <a:rPr sz="1100" b="0">
-                <a:solidFill>
-                  <a:srgbClr val="2B2B2B"/>
-                </a:solidFill>
-                <a:latin typeface="맑은 고딕"/>
-              </a:rPr>
-              <a:t>실물 서류 전수 감사</a:t>
-            </a:r>
-          </a:p>
-          <a:p>
-            <a:pPr algn="ctr">
-              <a:spcAft>
-                <a:spcPts val="0"/>
-              </a:spcAft>
-            </a:pPr>
-            <a:r>
-              <a:rPr sz="1100" b="0">
-                <a:solidFill>
-                  <a:srgbClr val="2B2B2B"/>
-                </a:solidFill>
-                <a:latin typeface="맑은 고딕"/>
-              </a:rPr>
-              <a:t>이상 0건</a:t>
-            </a:r>
-          </a:p>
-        </p:txBody>
-      </p:sp>
-      <p:sp>
-        <p:nvSpPr>
-          <p:cNvPr id="6" name="Rounded Rectangle 5"/>
-          <p:cNvSpPr/>
-          <p:nvPr/>
-        </p:nvSpPr>
-        <p:spPr>
-          <a:xfrm>
-            <a:off x="3383280" y="1463040"/>
-            <a:ext cx="2615184" cy="1463040"/>
-          </a:xfrm>
-          <a:prstGeom prst="roundRect">
-            <a:avLst/>
-          </a:prstGeom>
-          <a:solidFill>
-            <a:srgbClr val="FFF8DF"/>
-          </a:solidFill>
-          <a:ln>
-            <a:solidFill>
-              <a:srgbClr val="FCAF17"/>
-            </a:solidFill>
-          </a:ln>
-        </p:spPr>
-        <p:style>
-          <a:lnRef idx="1">
-            <a:schemeClr val="accent1"/>
-          </a:lnRef>
-          <a:fillRef idx="3">
-            <a:schemeClr val="accent1"/>
-          </a:fillRef>
-          <a:effectRef idx="2">
-            <a:schemeClr val="accent1"/>
-          </a:effectRef>
-          <a:fontRef idx="minor">
-            <a:schemeClr val="lt1"/>
-          </a:fontRef>
-        </p:style>
-        <p:txBody>
-          <a:bodyPr rtlCol="0" anchor="ctr" wrap="square"/>
-          <a:lstStyle/>
-          <a:p>
-            <a:pPr algn="ctr">
-              <a:spcAft>
-                <a:spcPts val="200"/>
-              </a:spcAft>
-            </a:pPr>
-            <a:r>
-              <a:rPr sz="3000" b="1">
-                <a:solidFill>
-                  <a:srgbClr val="645B4C"/>
-                </a:solidFill>
-                <a:latin typeface="맑은 고딕"/>
-              </a:rPr>
-              <a:t>45건</a:t>
-            </a:r>
-          </a:p>
-          <a:p>
-            <a:pPr algn="ctr">
-              <a:spcAft>
-                <a:spcPts val="0"/>
-              </a:spcAft>
-            </a:pPr>
-            <a:r>
-              <a:rPr sz="1100" b="0">
-                <a:solidFill>
-                  <a:srgbClr val="2B2B2B"/>
-                </a:solidFill>
-                <a:latin typeface="맑은 고딕"/>
-              </a:rPr>
-              <a:t>자동화 회귀 테스트</a:t>
-            </a:r>
-          </a:p>
-          <a:p>
-            <a:pPr algn="ctr">
-              <a:spcAft>
-                <a:spcPts val="0"/>
-              </a:spcAft>
-            </a:pPr>
-            <a:r>
-              <a:rPr sz="1100" b="0">
-                <a:solidFill>
-                  <a:srgbClr val="2B2B2B"/>
-                </a:solidFill>
-                <a:latin typeface="맑은 고딕"/>
-              </a:rPr>
-              <a:t>전부 통과</a:t>
-            </a:r>
-          </a:p>
-        </p:txBody>
-      </p:sp>
-      <p:sp>
-        <p:nvSpPr>
-          <p:cNvPr id="7" name="Rounded Rectangle 6"/>
-          <p:cNvSpPr/>
-          <p:nvPr/>
-        </p:nvSpPr>
-        <p:spPr>
-          <a:xfrm>
-            <a:off x="6199632" y="1463040"/>
-            <a:ext cx="2615184" cy="1463040"/>
-          </a:xfrm>
-          <a:prstGeom prst="roundRect">
-            <a:avLst/>
-          </a:prstGeom>
-          <a:solidFill>
-            <a:srgbClr val="FFF8DF"/>
-          </a:solidFill>
-          <a:ln>
-            <a:solidFill>
-              <a:srgbClr val="FCAF17"/>
-            </a:solidFill>
-          </a:ln>
-        </p:spPr>
-        <p:style>
-          <a:lnRef idx="1">
-            <a:schemeClr val="accent1"/>
-          </a:lnRef>
-          <a:fillRef idx="3">
-            <a:schemeClr val="accent1"/>
-          </a:fillRef>
-          <a:effectRef idx="2">
-            <a:schemeClr val="accent1"/>
-          </a:effectRef>
-          <a:fontRef idx="minor">
-            <a:schemeClr val="lt1"/>
-          </a:fontRef>
-        </p:style>
-        <p:txBody>
-          <a:bodyPr rtlCol="0" anchor="ctr" wrap="square"/>
-          <a:lstStyle/>
-          <a:p>
-            <a:pPr algn="ctr">
-              <a:spcAft>
-                <a:spcPts val="200"/>
-              </a:spcAft>
-            </a:pPr>
-            <a:r>
-              <a:rPr sz="3000" b="1">
-                <a:solidFill>
-                  <a:srgbClr val="645B4C"/>
-                </a:solidFill>
-                <a:latin typeface="맑은 고딕"/>
-              </a:rPr>
-              <a:t>1가지</a:t>
-            </a:r>
-          </a:p>
-          <a:p>
-            <a:pPr algn="ctr">
-              <a:spcAft>
-                <a:spcPts val="0"/>
-              </a:spcAft>
-            </a:pPr>
-            <a:r>
-              <a:rPr sz="1100" b="0">
-                <a:solidFill>
-                  <a:srgbClr val="2B2B2B"/>
-                </a:solidFill>
-                <a:latin typeface="맑은 고딕"/>
-              </a:rPr>
-              <a:t>업로드 순서 24가지 →</a:t>
-            </a:r>
-          </a:p>
-          <a:p>
-            <a:pPr algn="ctr">
-              <a:spcAft>
-                <a:spcPts val="0"/>
-              </a:spcAft>
-            </a:pPr>
-            <a:r>
-              <a:rPr sz="1100" b="0">
-                <a:solidFill>
-                  <a:srgbClr val="2B2B2B"/>
-                </a:solidFill>
-                <a:latin typeface="맑은 고딕"/>
-              </a:rPr>
-              <a:t>판정 조합 1가지</a:t>
-            </a:r>
-          </a:p>
-        </p:txBody>
-      </p:sp>
-      <p:sp>
-        <p:nvSpPr>
-          <p:cNvPr id="8" name="Rounded Rectangle 7"/>
-          <p:cNvSpPr/>
-          <p:nvPr/>
-        </p:nvSpPr>
-        <p:spPr>
-          <a:xfrm>
-            <a:off x="9015984" y="1463040"/>
-            <a:ext cx="2615184" cy="1463040"/>
-          </a:xfrm>
-          <a:prstGeom prst="roundRect">
-            <a:avLst/>
-          </a:prstGeom>
-          <a:solidFill>
-            <a:srgbClr val="FFF8DF"/>
-          </a:solidFill>
-          <a:ln>
-            <a:solidFill>
-              <a:srgbClr val="FCAF17"/>
-            </a:solidFill>
-          </a:ln>
-        </p:spPr>
-        <p:style>
-          <a:lnRef idx="1">
-            <a:schemeClr val="accent1"/>
-          </a:lnRef>
-          <a:fillRef idx="3">
-            <a:schemeClr val="accent1"/>
-          </a:fillRef>
-          <a:effectRef idx="2">
-            <a:schemeClr val="accent1"/>
-          </a:effectRef>
-          <a:fontRef idx="minor">
-            <a:schemeClr val="lt1"/>
-          </a:fontRef>
-        </p:style>
-        <p:txBody>
-          <a:bodyPr rtlCol="0" anchor="ctr" wrap="square"/>
-          <a:lstStyle/>
-          <a:p>
-            <a:pPr algn="ctr">
-              <a:spcAft>
-                <a:spcPts val="200"/>
-              </a:spcAft>
-            </a:pPr>
-            <a:r>
-              <a:rPr sz="3000" b="1">
-                <a:solidFill>
-                  <a:srgbClr val="645B4C"/>
-                </a:solidFill>
-                <a:latin typeface="맑은 고딕"/>
-              </a:rPr>
-              <a:t>0건</a:t>
-            </a:r>
-          </a:p>
-          <a:p>
-            <a:pPr algn="ctr">
-              <a:spcAft>
-                <a:spcPts val="0"/>
-              </a:spcAft>
-            </a:pPr>
-            <a:r>
-              <a:rPr sz="1100" b="0">
-                <a:solidFill>
-                  <a:srgbClr val="2B2B2B"/>
-                </a:solidFill>
-                <a:latin typeface="맑은 고딕"/>
-              </a:rPr>
-              <a:t>교차 모델 판정 불일치</a:t>
-            </a:r>
-          </a:p>
-          <a:p>
-            <a:pPr algn="ctr">
-              <a:spcAft>
-                <a:spcPts val="0"/>
-              </a:spcAft>
-            </a:pPr>
-            <a:r>
-              <a:rPr sz="1100" b="0">
-                <a:solidFill>
-                  <a:srgbClr val="2B2B2B"/>
-                </a:solidFill>
-                <a:latin typeface="맑은 고딕"/>
-              </a:rPr>
-              <a:t>(haiku vs sonnet)</a:t>
-            </a:r>
-          </a:p>
-        </p:txBody>
-      </p:sp>
-      <p:graphicFrame>
-        <p:nvGraphicFramePr>
-          <p:cNvPr id="9" name="Table 8"/>
-          <p:cNvGraphicFramePr>
-            <a:graphicFrameLocks noGrp="1"/>
-          </p:cNvGraphicFramePr>
-          <p:nvPr/>
-        </p:nvGraphicFramePr>
-        <p:xfrm>
-          <a:off x="566928" y="3200400"/>
-          <a:ext cx="11064240" cy="1645920"/>
-        </p:xfrm>
-        <a:graphic>
-          <a:graphicData uri="http://schemas.openxmlformats.org/drawingml/2006/table">
-            <a:tbl>
-              <a:tblPr firstRow="1" bandRow="1">
-                <a:tableStyleId>{5C22544A-7EE6-4342-B048-85BDC9FD1C3A}</a:tableStyleId>
-              </a:tblPr>
-              <a:tblGrid>
-                <a:gridCol w="2194560"/>
-                <a:gridCol w="5760720"/>
-                <a:gridCol w="3108960"/>
-              </a:tblGrid>
-              <a:tr h="329184">
-                <a:tc>
-                  <a:txBody>
-                    <a:bodyPr wrap="square"/>
-                    <a:lstStyle/>
-                    <a:p>
-                      <a:pPr algn="l">
-                        <a:spcAft>
-                          <a:spcPts val="0"/>
-                        </a:spcAft>
-                      </a:pPr>
-                      <a:r>
-                        <a:rPr sz="1200" b="1">
-                          <a:solidFill>
-                            <a:srgbClr val="645B4C"/>
-                          </a:solidFill>
-                          <a:latin typeface="맑은 고딕"/>
-                        </a:rPr>
-                        <a:t>검증 항목</a:t>
-                      </a:r>
-                    </a:p>
-                  </a:txBody>
-                  <a:tcPr>
-                    <a:solidFill>
-                      <a:srgbClr val="FFF8DF"/>
-                    </a:solidFill>
-                  </a:tcPr>
-                </a:tc>
-                <a:tc>
-                  <a:txBody>
-                    <a:bodyPr wrap="square"/>
-                    <a:lstStyle/>
-                    <a:p>
-                      <a:pPr algn="l">
-                        <a:spcAft>
-                          <a:spcPts val="0"/>
-                        </a:spcAft>
-                      </a:pPr>
-                      <a:r>
-                        <a:rPr sz="1200" b="1">
-                          <a:solidFill>
-                            <a:srgbClr val="645B4C"/>
-                          </a:solidFill>
-                          <a:latin typeface="맑은 고딕"/>
-                        </a:rPr>
-                        <a:t>방법</a:t>
-                      </a:r>
-                    </a:p>
-                  </a:txBody>
-                  <a:tcPr>
-                    <a:solidFill>
-                      <a:srgbClr val="FFF8DF"/>
-                    </a:solidFill>
-                  </a:tcPr>
-                </a:tc>
-                <a:tc>
-                  <a:txBody>
-                    <a:bodyPr wrap="square"/>
-                    <a:lstStyle/>
-                    <a:p>
-                      <a:pPr algn="l">
-                        <a:spcAft>
-                          <a:spcPts val="0"/>
-                        </a:spcAft>
-                      </a:pPr>
-                      <a:r>
-                        <a:rPr sz="1200" b="1">
-                          <a:solidFill>
-                            <a:srgbClr val="645B4C"/>
-                          </a:solidFill>
-                          <a:latin typeface="맑은 고딕"/>
-                        </a:rPr>
-                        <a:t>결과</a:t>
-                      </a:r>
-                    </a:p>
-                  </a:txBody>
-                  <a:tcPr>
-                    <a:solidFill>
-                      <a:srgbClr val="FFF8DF"/>
-                    </a:solidFill>
-                  </a:tcPr>
-                </a:tc>
-              </a:tr>
-              <a:tr h="329184">
-                <a:tc>
-                  <a:txBody>
-                    <a:bodyPr wrap="square"/>
-                    <a:lstStyle/>
-                    <a:p>
-                      <a:pPr algn="l">
-                        <a:spcAft>
-                          <a:spcPts val="0"/>
-                        </a:spcAft>
-                      </a:pPr>
-                      <a:r>
-                        <a:rPr sz="1000" b="0">
-                          <a:solidFill>
-                            <a:srgbClr val="2B2B2B"/>
-                          </a:solidFill>
-                          <a:latin typeface="맑은 고딕"/>
-                        </a:rPr>
-                        <a:t>실물 서류 커버리지</a:t>
-                      </a:r>
-                    </a:p>
-                  </a:txBody>
-                  <a:tcPr>
-                    <a:solidFill>
-                      <a:srgbClr val="FFFFFF"/>
-                    </a:solidFill>
-                  </a:tcPr>
-                </a:tc>
-                <a:tc>
-                  <a:txBody>
-                    <a:bodyPr wrap="square"/>
-                    <a:lstStyle/>
-                    <a:p>
-                      <a:pPr algn="l">
-                        <a:spcAft>
-                          <a:spcPts val="0"/>
-                        </a:spcAft>
-                      </a:pPr>
-                      <a:r>
-                        <a:rPr sz="1000" b="0">
-                          <a:solidFill>
-                            <a:srgbClr val="2B2B2B"/>
-                          </a:solidFill>
-                          <a:latin typeface="맑은 고딕"/>
-                        </a:rPr>
-                        <a:t>5개 운용·증권사 / ETF·채권·MMF·ELS·DLS / 위험등급 1~6 / 전자·스캔·스크린샷</a:t>
-                      </a:r>
-                    </a:p>
-                  </a:txBody>
-                  <a:tcPr>
-                    <a:solidFill>
-                      <a:srgbClr val="FFFFFF"/>
-                    </a:solidFill>
-                  </a:tcPr>
-                </a:tc>
-                <a:tc>
-                  <a:txBody>
-                    <a:bodyPr wrap="square"/>
-                    <a:lstStyle/>
-                    <a:p>
-                      <a:pPr algn="l">
-                        <a:spcAft>
-                          <a:spcPts val="0"/>
-                        </a:spcAft>
-                      </a:pPr>
-                      <a:r>
-                        <a:rPr sz="1000" b="0">
-                          <a:solidFill>
-                            <a:srgbClr val="2B2B2B"/>
-                          </a:solidFill>
-                          <a:latin typeface="맑은 고딕"/>
-                        </a:rPr>
-                        <a:t>24건 전수 감사, 이상 징후 0건</a:t>
-                      </a:r>
-                    </a:p>
-                  </a:txBody>
-                  <a:tcPr>
-                    <a:solidFill>
-                      <a:srgbClr val="FFFFFF"/>
-                    </a:solidFill>
-                  </a:tcPr>
-                </a:tc>
-              </a:tr>
-              <a:tr h="329184">
-                <a:tc>
-                  <a:txBody>
-                    <a:bodyPr wrap="square"/>
-                    <a:lstStyle/>
-                    <a:p>
-                      <a:pPr algn="l">
-                        <a:spcAft>
-                          <a:spcPts val="0"/>
-                        </a:spcAft>
-                      </a:pPr>
-                      <a:r>
-                        <a:rPr sz="1000" b="0">
-                          <a:solidFill>
-                            <a:srgbClr val="2B2B2B"/>
-                          </a:solidFill>
-                          <a:latin typeface="맑은 고딕"/>
-                        </a:rPr>
-                        <a:t>판정 재현성</a:t>
-                      </a:r>
-                    </a:p>
-                  </a:txBody>
-                  <a:tcPr>
-                    <a:solidFill>
-                      <a:srgbClr val="FFFFFF"/>
-                    </a:solidFill>
-                  </a:tcPr>
-                </a:tc>
-                <a:tc>
-                  <a:txBody>
-                    <a:bodyPr wrap="square"/>
-                    <a:lstStyle/>
-                    <a:p>
-                      <a:pPr algn="l">
-                        <a:spcAft>
-                          <a:spcPts val="0"/>
-                        </a:spcAft>
-                      </a:pPr>
-                      <a:r>
-                        <a:rPr sz="1000" b="0">
-                          <a:solidFill>
-                            <a:srgbClr val="2B2B2B"/>
-                          </a:solidFill>
-                          <a:latin typeface="맑은 고딕"/>
-                        </a:rPr>
-                        <a:t>동일 패키지를 업로드 순서 24가지로 반복</a:t>
-                      </a:r>
-                    </a:p>
-                  </a:txBody>
-                  <a:tcPr>
-                    <a:solidFill>
-                      <a:srgbClr val="FFFFFF"/>
-                    </a:solidFill>
-                  </a:tcPr>
-                </a:tc>
-                <a:tc>
-                  <a:txBody>
-                    <a:bodyPr wrap="square"/>
-                    <a:lstStyle/>
-                    <a:p>
-                      <a:pPr algn="l">
-                        <a:spcAft>
-                          <a:spcPts val="0"/>
-                        </a:spcAft>
-                      </a:pPr>
-                      <a:r>
-                        <a:rPr sz="1000" b="0">
-                          <a:solidFill>
-                            <a:srgbClr val="2B2B2B"/>
-                          </a:solidFill>
-                          <a:latin typeface="맑은 고딕"/>
-                        </a:rPr>
-                        <a:t>판정 조합 1가지 (순서 무관)</a:t>
-                      </a:r>
-                    </a:p>
-                  </a:txBody>
-                  <a:tcPr>
-                    <a:solidFill>
-                      <a:srgbClr val="FFFFFF"/>
-                    </a:solidFill>
-                  </a:tcPr>
-                </a:tc>
-              </a:tr>
-              <a:tr h="329184">
-                <a:tc>
-                  <a:txBody>
-                    <a:bodyPr wrap="square"/>
-                    <a:lstStyle/>
-                    <a:p>
-                      <a:pPr algn="l">
-                        <a:spcAft>
-                          <a:spcPts val="0"/>
-                        </a:spcAft>
-                      </a:pPr>
-                      <a:r>
-                        <a:rPr sz="1000" b="0">
-                          <a:solidFill>
-                            <a:srgbClr val="2B2B2B"/>
-                          </a:solidFill>
-                          <a:latin typeface="맑은 고딕"/>
-                        </a:rPr>
-                        <a:t>모델 의존성</a:t>
-                      </a:r>
-                    </a:p>
-                  </a:txBody>
-                  <a:tcPr>
-                    <a:solidFill>
-                      <a:srgbClr val="FFFFFF"/>
-                    </a:solidFill>
-                  </a:tcPr>
-                </a:tc>
-                <a:tc>
-                  <a:txBody>
-                    <a:bodyPr wrap="square"/>
-                    <a:lstStyle/>
-                    <a:p>
-                      <a:pPr algn="l">
-                        <a:spcAft>
-                          <a:spcPts val="0"/>
-                        </a:spcAft>
-                      </a:pPr>
-                      <a:r>
-                        <a:rPr sz="1000" b="0">
-                          <a:solidFill>
-                            <a:srgbClr val="2B2B2B"/>
-                          </a:solidFill>
-                          <a:latin typeface="맑은 고딕"/>
-                        </a:rPr>
-                        <a:t>haiku · sonnet 교차 실행 후 판정 임계 필드 비교</a:t>
-                      </a:r>
-                    </a:p>
-                  </a:txBody>
-                  <a:tcPr>
-                    <a:solidFill>
-                      <a:srgbClr val="FFFFFF"/>
-                    </a:solidFill>
-                  </a:tcPr>
-                </a:tc>
-                <a:tc>
-                  <a:txBody>
-                    <a:bodyPr wrap="square"/>
-                    <a:lstStyle/>
-                    <a:p>
-                      <a:pPr algn="l">
-                        <a:spcAft>
-                          <a:spcPts val="0"/>
-                        </a:spcAft>
-                      </a:pPr>
-                      <a:r>
-                        <a:rPr sz="1000" b="0">
-                          <a:solidFill>
-                            <a:srgbClr val="2B2B2B"/>
-                          </a:solidFill>
-                          <a:latin typeface="맑은 고딕"/>
-                        </a:rPr>
-                        <a:t>불일치 0건 (저가 모델로 충분)</a:t>
-                      </a:r>
-                    </a:p>
-                  </a:txBody>
-                  <a:tcPr>
-                    <a:solidFill>
-                      <a:srgbClr val="FFFFFF"/>
-                    </a:solidFill>
-                  </a:tcPr>
-                </a:tc>
-              </a:tr>
-              <a:tr h="329184">
-                <a:tc>
-                  <a:txBody>
-                    <a:bodyPr wrap="square"/>
-                    <a:lstStyle/>
-                    <a:p>
-                      <a:pPr algn="l">
-                        <a:spcAft>
-                          <a:spcPts val="0"/>
-                        </a:spcAft>
-                      </a:pPr>
-                      <a:r>
-                        <a:rPr sz="1000" b="0">
-                          <a:solidFill>
-                            <a:srgbClr val="2B2B2B"/>
-                          </a:solidFill>
-                          <a:latin typeface="맑은 고딕"/>
-                        </a:rPr>
-                        <a:t>오탐 통제</a:t>
-                      </a:r>
-                    </a:p>
-                  </a:txBody>
-                  <a:tcPr>
-                    <a:solidFill>
-                      <a:srgbClr val="FFFFFF"/>
-                    </a:solidFill>
-                  </a:tcPr>
-                </a:tc>
-                <a:tc>
-                  <a:txBody>
-                    <a:bodyPr wrap="square"/>
-                    <a:lstStyle/>
-                    <a:p>
-                      <a:pPr algn="l">
-                        <a:spcAft>
-                          <a:spcPts val="0"/>
-                        </a:spcAft>
-                      </a:pPr>
-                      <a:r>
-                        <a:rPr sz="1000" b="0">
-                          <a:solidFill>
-                            <a:srgbClr val="2B2B2B"/>
-                          </a:solidFill>
-                          <a:latin typeface="맑은 고딕"/>
-                        </a:rPr>
-                        <a:t>부당권유 표현 스캔을 정상 서류 17건에 적용</a:t>
-                      </a:r>
-                    </a:p>
-                  </a:txBody>
-                  <a:tcPr>
-                    <a:solidFill>
-                      <a:srgbClr val="FFFFFF"/>
-                    </a:solidFill>
-                  </a:tcPr>
-                </a:tc>
-                <a:tc>
-                  <a:txBody>
-                    <a:bodyPr wrap="square"/>
-                    <a:lstStyle/>
-                    <a:p>
-                      <a:pPr algn="l">
-                        <a:spcAft>
-                          <a:spcPts val="0"/>
-                        </a:spcAft>
-                      </a:pPr>
-                      <a:r>
-                        <a:rPr sz="1000" b="0">
-                          <a:solidFill>
-                            <a:srgbClr val="2B2B2B"/>
-                          </a:solidFill>
-                          <a:latin typeface="맑은 고딕"/>
-                        </a:rPr>
-                        <a:t>오탐 0건</a:t>
-                      </a:r>
-                    </a:p>
-                  </a:txBody>
-                  <a:tcPr>
-                    <a:solidFill>
-                      <a:srgbClr val="FFFFFF"/>
-                    </a:solidFill>
-                  </a:tcPr>
-                </a:tc>
-              </a:tr>
-            </a:tbl>
-          </a:graphicData>
-        </a:graphic>
-      </p:graphicFrame>
     </p:spTree>
   </p:cSld>
   <p:clrMapOvr>

--- a/docs/기술설명서_초안.pptx
+++ b/docs/기술설명서_초안.pptx
@@ -22,6 +22,7 @@
     <p:sldId id="270" r:id="rId21"/>
     <p:sldId id="271" r:id="rId22"/>
     <p:sldId id="272" r:id="rId23"/>
+    <p:sldId id="273" r:id="rId24"/>
   </p:sldIdLst>
   <p:sldSz cx="12191695" cy="6858000" type="screen4x3"/>
   <p:notesSz cx="6858000" cy="9144000"/>
@@ -3368,6 +3369,1250 @@
                 </a:solidFill>
                 <a:latin typeface="맑은 고딕"/>
               </a:rPr>
+              <a:t>핵심 기술 ②  어떤 형태로 와도 읽는다</a:t>
+            </a:r>
+          </a:p>
+          <a:p>
+            <a:pPr algn="l">
+              <a:spcAft>
+                <a:spcPts val="600"/>
+              </a:spcAft>
+            </a:pPr>
+            <a:r>
+              <a:rPr sz="1400" b="0">
+                <a:solidFill>
+                  <a:srgbClr val="6B6B6B"/>
+                </a:solidFill>
+                <a:latin typeface="맑은 고딕"/>
+              </a:rPr>
+              <a:t>텍스트 → OCR → AI 비전 단계 폴백 (필요할 때만 호출)</a:t>
+            </a:r>
+          </a:p>
+        </p:txBody>
+      </p:sp>
+      <p:sp>
+        <p:nvSpPr>
+          <p:cNvPr id="4" name="Rounded Rectangle 3"/>
+          <p:cNvSpPr/>
+          <p:nvPr/>
+        </p:nvSpPr>
+        <p:spPr>
+          <a:xfrm>
+            <a:off x="9646920" y="329184"/>
+            <a:ext cx="1965960" cy="384048"/>
+          </a:xfrm>
+          <a:prstGeom prst="roundRect">
+            <a:avLst/>
+          </a:prstGeom>
+          <a:solidFill>
+            <a:srgbClr val="FFF8DF"/>
+          </a:solidFill>
+          <a:ln>
+            <a:solidFill>
+              <a:srgbClr val="FCAF17"/>
+            </a:solidFill>
+          </a:ln>
+        </p:spPr>
+        <p:style>
+          <a:lnRef idx="1">
+            <a:schemeClr val="accent1"/>
+          </a:lnRef>
+          <a:fillRef idx="3">
+            <a:schemeClr val="accent1"/>
+          </a:fillRef>
+          <a:effectRef idx="2">
+            <a:schemeClr val="accent1"/>
+          </a:effectRef>
+          <a:fontRef idx="minor">
+            <a:schemeClr val="lt1"/>
+          </a:fontRef>
+        </p:style>
+        <p:txBody>
+          <a:bodyPr rtlCol="0" anchor="ctr" wrap="square"/>
+          <a:lstStyle/>
+          <a:p>
+            <a:pPr algn="ctr">
+              <a:spcAft>
+                <a:spcPts val="0"/>
+              </a:spcAft>
+            </a:pPr>
+            <a:r>
+              <a:rPr sz="1100" b="1">
+                <a:solidFill>
+                  <a:srgbClr val="645B4C"/>
+                </a:solidFill>
+                <a:latin typeface="맑은 고딕"/>
+              </a:rPr>
+              <a:t>기술 실현 가능성</a:t>
+            </a:r>
+          </a:p>
+        </p:txBody>
+      </p:sp>
+      <p:graphicFrame>
+        <p:nvGraphicFramePr>
+          <p:cNvPr id="5" name="Table 4"/>
+          <p:cNvGraphicFramePr>
+            <a:graphicFrameLocks noGrp="1"/>
+          </p:cNvGraphicFramePr>
+          <p:nvPr/>
+        </p:nvGraphicFramePr>
+        <p:xfrm>
+          <a:off x="566928" y="1417320"/>
+          <a:ext cx="11064240" cy="1975104"/>
+        </p:xfrm>
+        <a:graphic>
+          <a:graphicData uri="http://schemas.openxmlformats.org/drawingml/2006/table">
+            <a:tbl>
+              <a:tblPr firstRow="1" bandRow="1">
+                <a:tableStyleId>{5C22544A-7EE6-4342-B048-85BDC9FD1C3A}</a:tableStyleId>
+              </a:tblPr>
+              <a:tblGrid>
+                <a:gridCol w="3108960"/>
+                <a:gridCol w="3108960"/>
+                <a:gridCol w="2103120"/>
+                <a:gridCol w="2743200"/>
+              </a:tblGrid>
+              <a:tr h="329184">
+                <a:tc>
+                  <a:txBody>
+                    <a:bodyPr wrap="square"/>
+                    <a:lstStyle/>
+                    <a:p>
+                      <a:pPr algn="l">
+                        <a:spcAft>
+                          <a:spcPts val="0"/>
+                        </a:spcAft>
+                      </a:pPr>
+                      <a:r>
+                        <a:rPr sz="1200" b="1">
+                          <a:solidFill>
+                            <a:srgbClr val="645B4C"/>
+                          </a:solidFill>
+                          <a:latin typeface="맑은 고딕"/>
+                        </a:rPr>
+                        <a:t>서류 형태</a:t>
+                      </a:r>
+                    </a:p>
+                  </a:txBody>
+                  <a:tcPr>
+                    <a:solidFill>
+                      <a:srgbClr val="FFF8DF"/>
+                    </a:solidFill>
+                  </a:tcPr>
+                </a:tc>
+                <a:tc>
+                  <a:txBody>
+                    <a:bodyPr wrap="square"/>
+                    <a:lstStyle/>
+                    <a:p>
+                      <a:pPr algn="l">
+                        <a:spcAft>
+                          <a:spcPts val="0"/>
+                        </a:spcAft>
+                      </a:pPr>
+                      <a:r>
+                        <a:rPr sz="1200" b="1">
+                          <a:solidFill>
+                            <a:srgbClr val="645B4C"/>
+                          </a:solidFill>
+                          <a:latin typeface="맑은 고딕"/>
+                        </a:rPr>
+                        <a:t>1차 판독</a:t>
+                      </a:r>
+                    </a:p>
+                  </a:txBody>
+                  <a:tcPr>
+                    <a:solidFill>
+                      <a:srgbClr val="FFF8DF"/>
+                    </a:solidFill>
+                  </a:tcPr>
+                </a:tc>
+                <a:tc>
+                  <a:txBody>
+                    <a:bodyPr wrap="square"/>
+                    <a:lstStyle/>
+                    <a:p>
+                      <a:pPr algn="l">
+                        <a:spcAft>
+                          <a:spcPts val="0"/>
+                        </a:spcAft>
+                      </a:pPr>
+                      <a:r>
+                        <a:rPr sz="1200" b="1">
+                          <a:solidFill>
+                            <a:srgbClr val="645B4C"/>
+                          </a:solidFill>
+                          <a:latin typeface="맑은 고딕"/>
+                        </a:rPr>
+                        <a:t>폴백</a:t>
+                      </a:r>
+                    </a:p>
+                  </a:txBody>
+                  <a:tcPr>
+                    <a:solidFill>
+                      <a:srgbClr val="FFF8DF"/>
+                    </a:solidFill>
+                  </a:tcPr>
+                </a:tc>
+                <a:tc>
+                  <a:txBody>
+                    <a:bodyPr wrap="square"/>
+                    <a:lstStyle/>
+                    <a:p>
+                      <a:pPr algn="l">
+                        <a:spcAft>
+                          <a:spcPts val="0"/>
+                        </a:spcAft>
+                      </a:pPr>
+                      <a:r>
+                        <a:rPr sz="1200" b="1">
+                          <a:solidFill>
+                            <a:srgbClr val="645B4C"/>
+                          </a:solidFill>
+                          <a:latin typeface="맑은 고딕"/>
+                        </a:rPr>
+                        <a:t>실측 결과</a:t>
+                      </a:r>
+                    </a:p>
+                  </a:txBody>
+                  <a:tcPr>
+                    <a:solidFill>
+                      <a:srgbClr val="FFF8DF"/>
+                    </a:solidFill>
+                  </a:tcPr>
+                </a:tc>
+              </a:tr>
+              <a:tr h="329184">
+                <a:tc>
+                  <a:txBody>
+                    <a:bodyPr wrap="square"/>
+                    <a:lstStyle/>
+                    <a:p>
+                      <a:pPr algn="l">
+                        <a:spcAft>
+                          <a:spcPts val="0"/>
+                        </a:spcAft>
+                      </a:pPr>
+                      <a:r>
+                        <a:rPr sz="1100" b="0">
+                          <a:solidFill>
+                            <a:srgbClr val="2B2B2B"/>
+                          </a:solidFill>
+                          <a:latin typeface="맑은 고딕"/>
+                        </a:rPr>
+                        <a:t>전자 PDF</a:t>
+                      </a:r>
+                    </a:p>
+                  </a:txBody>
+                  <a:tcPr>
+                    <a:solidFill>
+                      <a:srgbClr val="FFFFFF"/>
+                    </a:solidFill>
+                  </a:tcPr>
+                </a:tc>
+                <a:tc>
+                  <a:txBody>
+                    <a:bodyPr wrap="square"/>
+                    <a:lstStyle/>
+                    <a:p>
+                      <a:pPr algn="l">
+                        <a:spcAft>
+                          <a:spcPts val="0"/>
+                        </a:spcAft>
+                      </a:pPr>
+                      <a:r>
+                        <a:rPr sz="1100" b="0">
+                          <a:solidFill>
+                            <a:srgbClr val="2B2B2B"/>
+                          </a:solidFill>
+                          <a:latin typeface="맑은 고딕"/>
+                        </a:rPr>
+                        <a:t>텍스트 레이어</a:t>
+                      </a:r>
+                    </a:p>
+                  </a:txBody>
+                  <a:tcPr>
+                    <a:solidFill>
+                      <a:srgbClr val="FFFFFF"/>
+                    </a:solidFill>
+                  </a:tcPr>
+                </a:tc>
+                <a:tc>
+                  <a:txBody>
+                    <a:bodyPr wrap="square"/>
+                    <a:lstStyle/>
+                    <a:p>
+                      <a:pPr algn="l">
+                        <a:spcAft>
+                          <a:spcPts val="0"/>
+                        </a:spcAft>
+                      </a:pPr>
+                      <a:r>
+                        <a:rPr sz="1100" b="0">
+                          <a:solidFill>
+                            <a:srgbClr val="2B2B2B"/>
+                          </a:solidFill>
+                          <a:latin typeface="맑은 고딕"/>
+                        </a:rPr>
+                        <a:t>—</a:t>
+                      </a:r>
+                    </a:p>
+                  </a:txBody>
+                  <a:tcPr>
+                    <a:solidFill>
+                      <a:srgbClr val="FFFFFF"/>
+                    </a:solidFill>
+                  </a:tcPr>
+                </a:tc>
+                <a:tc>
+                  <a:txBody>
+                    <a:bodyPr wrap="square"/>
+                    <a:lstStyle/>
+                    <a:p>
+                      <a:pPr algn="l">
+                        <a:spcAft>
+                          <a:spcPts val="0"/>
+                        </a:spcAft>
+                      </a:pPr>
+                      <a:r>
+                        <a:rPr sz="1100" b="0">
+                          <a:solidFill>
+                            <a:srgbClr val="2B2B2B"/>
+                          </a:solidFill>
+                          <a:latin typeface="맑은 고딕"/>
+                        </a:rPr>
+                        <a:t>정상</a:t>
+                      </a:r>
+                    </a:p>
+                  </a:txBody>
+                  <a:tcPr>
+                    <a:solidFill>
+                      <a:srgbClr val="FFFFFF"/>
+                    </a:solidFill>
+                  </a:tcPr>
+                </a:tc>
+              </a:tr>
+              <a:tr h="329184">
+                <a:tc>
+                  <a:txBody>
+                    <a:bodyPr wrap="square"/>
+                    <a:lstStyle/>
+                    <a:p>
+                      <a:pPr algn="l">
+                        <a:spcAft>
+                          <a:spcPts val="0"/>
+                        </a:spcAft>
+                      </a:pPr>
+                      <a:r>
+                        <a:rPr sz="1100" b="0">
+                          <a:solidFill>
+                            <a:srgbClr val="2B2B2B"/>
+                          </a:solidFill>
+                          <a:latin typeface="맑은 고딕"/>
+                        </a:rPr>
+                        <a:t>스캔 PDF · 종이 촬영</a:t>
+                      </a:r>
+                    </a:p>
+                  </a:txBody>
+                  <a:tcPr>
+                    <a:solidFill>
+                      <a:srgbClr val="FFFFFF"/>
+                    </a:solidFill>
+                  </a:tcPr>
+                </a:tc>
+                <a:tc>
+                  <a:txBody>
+                    <a:bodyPr wrap="square"/>
+                    <a:lstStyle/>
+                    <a:p>
+                      <a:pPr algn="l">
+                        <a:spcAft>
+                          <a:spcPts val="0"/>
+                        </a:spcAft>
+                      </a:pPr>
+                      <a:r>
+                        <a:rPr sz="1100" b="0">
+                          <a:solidFill>
+                            <a:srgbClr val="2B2B2B"/>
+                          </a:solidFill>
+                          <a:latin typeface="맑은 고딕"/>
+                        </a:rPr>
+                        <a:t>Tesseract OCR(한국어)</a:t>
+                      </a:r>
+                    </a:p>
+                  </a:txBody>
+                  <a:tcPr>
+                    <a:solidFill>
+                      <a:srgbClr val="FFFFFF"/>
+                    </a:solidFill>
+                  </a:tcPr>
+                </a:tc>
+                <a:tc>
+                  <a:txBody>
+                    <a:bodyPr wrap="square"/>
+                    <a:lstStyle/>
+                    <a:p>
+                      <a:pPr algn="l">
+                        <a:spcAft>
+                          <a:spcPts val="0"/>
+                        </a:spcAft>
+                      </a:pPr>
+                      <a:r>
+                        <a:rPr sz="1100" b="0">
+                          <a:solidFill>
+                            <a:srgbClr val="2B2B2B"/>
+                          </a:solidFill>
+                          <a:latin typeface="맑은 고딕"/>
+                        </a:rPr>
+                        <a:t>AI 비전</a:t>
+                      </a:r>
+                    </a:p>
+                  </a:txBody>
+                  <a:tcPr>
+                    <a:solidFill>
+                      <a:srgbClr val="FFFFFF"/>
+                    </a:solidFill>
+                  </a:tcPr>
+                </a:tc>
+                <a:tc>
+                  <a:txBody>
+                    <a:bodyPr wrap="square"/>
+                    <a:lstStyle/>
+                    <a:p>
+                      <a:pPr algn="l">
+                        <a:spcAft>
+                          <a:spcPts val="0"/>
+                        </a:spcAft>
+                      </a:pPr>
+                      <a:r>
+                        <a:rPr sz="1100" b="0">
+                          <a:solidFill>
+                            <a:srgbClr val="2B2B2B"/>
+                          </a:solidFill>
+                          <a:latin typeface="맑은 고딕"/>
+                        </a:rPr>
+                        <a:t>분류·서명·날짜 모두 원본과 동일</a:t>
+                      </a:r>
+                    </a:p>
+                  </a:txBody>
+                  <a:tcPr>
+                    <a:solidFill>
+                      <a:srgbClr val="FFFFFF"/>
+                    </a:solidFill>
+                  </a:tcPr>
+                </a:tc>
+              </a:tr>
+              <a:tr h="329184">
+                <a:tc>
+                  <a:txBody>
+                    <a:bodyPr wrap="square"/>
+                    <a:lstStyle/>
+                    <a:p>
+                      <a:pPr algn="l">
+                        <a:spcAft>
+                          <a:spcPts val="0"/>
+                        </a:spcAft>
+                      </a:pPr>
+                      <a:r>
+                        <a:rPr sz="1100" b="0">
+                          <a:solidFill>
+                            <a:srgbClr val="2B2B2B"/>
+                          </a:solidFill>
+                          <a:latin typeface="맑은 고딕"/>
+                        </a:rPr>
+                        <a:t>모바일 다크모드 스크린샷</a:t>
+                      </a:r>
+                    </a:p>
+                  </a:txBody>
+                  <a:tcPr>
+                    <a:solidFill>
+                      <a:srgbClr val="FFFFFF"/>
+                    </a:solidFill>
+                  </a:tcPr>
+                </a:tc>
+                <a:tc>
+                  <a:txBody>
+                    <a:bodyPr wrap="square"/>
+                    <a:lstStyle/>
+                    <a:p>
+                      <a:pPr algn="l">
+                        <a:spcAft>
+                          <a:spcPts val="0"/>
+                        </a:spcAft>
+                      </a:pPr>
+                      <a:r>
+                        <a:rPr sz="1100" b="0">
+                          <a:solidFill>
+                            <a:srgbClr val="2B2B2B"/>
+                          </a:solidFill>
+                          <a:latin typeface="맑은 고딕"/>
+                        </a:rPr>
+                        <a:t>OCR 오독('투자성향'→'투자성양')</a:t>
+                      </a:r>
+                    </a:p>
+                  </a:txBody>
+                  <a:tcPr>
+                    <a:solidFill>
+                      <a:srgbClr val="FFFFFF"/>
+                    </a:solidFill>
+                  </a:tcPr>
+                </a:tc>
+                <a:tc>
+                  <a:txBody>
+                    <a:bodyPr wrap="square"/>
+                    <a:lstStyle/>
+                    <a:p>
+                      <a:pPr algn="l">
+                        <a:spcAft>
+                          <a:spcPts val="0"/>
+                        </a:spcAft>
+                      </a:pPr>
+                      <a:r>
+                        <a:rPr sz="1100" b="0">
+                          <a:solidFill>
+                            <a:srgbClr val="2B2B2B"/>
+                          </a:solidFill>
+                          <a:latin typeface="맑은 고딕"/>
+                        </a:rPr>
+                        <a:t>AI 비전</a:t>
+                      </a:r>
+                    </a:p>
+                  </a:txBody>
+                  <a:tcPr>
+                    <a:solidFill>
+                      <a:srgbClr val="FFFFFF"/>
+                    </a:solidFill>
+                  </a:tcPr>
+                </a:tc>
+                <a:tc>
+                  <a:txBody>
+                    <a:bodyPr wrap="square"/>
+                    <a:lstStyle/>
+                    <a:p>
+                      <a:pPr algn="l">
+                        <a:spcAft>
+                          <a:spcPts val="0"/>
+                        </a:spcAft>
+                      </a:pPr>
+                      <a:r>
+                        <a:rPr sz="1100" b="0">
+                          <a:solidFill>
+                            <a:srgbClr val="2B2B2B"/>
+                          </a:solidFill>
+                          <a:latin typeface="맑은 고딕"/>
+                        </a:rPr>
+                        <a:t>'적극투자형' 정확 판독</a:t>
+                      </a:r>
+                    </a:p>
+                  </a:txBody>
+                  <a:tcPr>
+                    <a:solidFill>
+                      <a:srgbClr val="FFFFFF"/>
+                    </a:solidFill>
+                  </a:tcPr>
+                </a:tc>
+              </a:tr>
+              <a:tr h="329184">
+                <a:tc>
+                  <a:txBody>
+                    <a:bodyPr wrap="square"/>
+                    <a:lstStyle/>
+                    <a:p>
+                      <a:pPr algn="l">
+                        <a:spcAft>
+                          <a:spcPts val="0"/>
+                        </a:spcAft>
+                      </a:pPr>
+                      <a:r>
+                        <a:rPr sz="1100" b="0">
+                          <a:solidFill>
+                            <a:srgbClr val="2B2B2B"/>
+                          </a:solidFill>
+                          <a:latin typeface="맑은 고딕"/>
+                        </a:rPr>
+                        <a:t>위험등급이 표 체크(✓)로만 표시</a:t>
+                      </a:r>
+                    </a:p>
+                  </a:txBody>
+                  <a:tcPr>
+                    <a:solidFill>
+                      <a:srgbClr val="FFFFFF"/>
+                    </a:solidFill>
+                  </a:tcPr>
+                </a:tc>
+                <a:tc>
+                  <a:txBody>
+                    <a:bodyPr wrap="square"/>
+                    <a:lstStyle/>
+                    <a:p>
+                      <a:pPr algn="l">
+                        <a:spcAft>
+                          <a:spcPts val="0"/>
+                        </a:spcAft>
+                      </a:pPr>
+                      <a:r>
+                        <a:rPr sz="1100" b="0">
+                          <a:solidFill>
+                            <a:srgbClr val="2B2B2B"/>
+                          </a:solidFill>
+                          <a:latin typeface="맑은 고딕"/>
+                        </a:rPr>
+                        <a:t>텍스트 공란</a:t>
+                      </a:r>
+                    </a:p>
+                  </a:txBody>
+                  <a:tcPr>
+                    <a:solidFill>
+                      <a:srgbClr val="FFFFFF"/>
+                    </a:solidFill>
+                  </a:tcPr>
+                </a:tc>
+                <a:tc>
+                  <a:txBody>
+                    <a:bodyPr wrap="square"/>
+                    <a:lstStyle/>
+                    <a:p>
+                      <a:pPr algn="l">
+                        <a:spcAft>
+                          <a:spcPts val="0"/>
+                        </a:spcAft>
+                      </a:pPr>
+                      <a:r>
+                        <a:rPr sz="1100" b="0">
+                          <a:solidFill>
+                            <a:srgbClr val="2B2B2B"/>
+                          </a:solidFill>
+                          <a:latin typeface="맑은 고딕"/>
+                        </a:rPr>
+                        <a:t>AI 비전</a:t>
+                      </a:r>
+                    </a:p>
+                  </a:txBody>
+                  <a:tcPr>
+                    <a:solidFill>
+                      <a:srgbClr val="FFFFFF"/>
+                    </a:solidFill>
+                  </a:tcPr>
+                </a:tc>
+                <a:tc>
+                  <a:txBody>
+                    <a:bodyPr wrap="square"/>
+                    <a:lstStyle/>
+                    <a:p>
+                      <a:pPr algn="l">
+                        <a:spcAft>
+                          <a:spcPts val="0"/>
+                        </a:spcAft>
+                      </a:pPr>
+                      <a:r>
+                        <a:rPr sz="1100" b="0">
+                          <a:solidFill>
+                            <a:srgbClr val="2B2B2B"/>
+                          </a:solidFill>
+                          <a:latin typeface="맑은 고딕"/>
+                        </a:rPr>
+                        <a:t>4등급·6등급 정확 판독</a:t>
+                      </a:r>
+                    </a:p>
+                  </a:txBody>
+                  <a:tcPr>
+                    <a:solidFill>
+                      <a:srgbClr val="FFFFFF"/>
+                    </a:solidFill>
+                  </a:tcPr>
+                </a:tc>
+              </a:tr>
+              <a:tr h="329184">
+                <a:tc>
+                  <a:txBody>
+                    <a:bodyPr wrap="square"/>
+                    <a:lstStyle/>
+                    <a:p>
+                      <a:pPr algn="l">
+                        <a:spcAft>
+                          <a:spcPts val="0"/>
+                        </a:spcAft>
+                      </a:pPr>
+                      <a:r>
+                        <a:rPr sz="1100" b="0">
+                          <a:solidFill>
+                            <a:srgbClr val="2B2B2B"/>
+                          </a:solidFill>
+                          <a:latin typeface="맑은 고딕"/>
+                        </a:rPr>
+                        <a:t>계약일이 표에 분리 기재</a:t>
+                      </a:r>
+                    </a:p>
+                  </a:txBody>
+                  <a:tcPr>
+                    <a:solidFill>
+                      <a:srgbClr val="FFFFFF"/>
+                    </a:solidFill>
+                  </a:tcPr>
+                </a:tc>
+                <a:tc>
+                  <a:txBody>
+                    <a:bodyPr wrap="square"/>
+                    <a:lstStyle/>
+                    <a:p>
+                      <a:pPr algn="l">
+                        <a:spcAft>
+                          <a:spcPts val="0"/>
+                        </a:spcAft>
+                      </a:pPr>
+                      <a:r>
+                        <a:rPr sz="1100" b="0">
+                          <a:solidFill>
+                            <a:srgbClr val="2B2B2B"/>
+                          </a:solidFill>
+                          <a:latin typeface="맑은 고딕"/>
+                        </a:rPr>
+                        <a:t>'년 월 일 24 07 2026'</a:t>
+                      </a:r>
+                    </a:p>
+                  </a:txBody>
+                  <a:tcPr>
+                    <a:solidFill>
+                      <a:srgbClr val="FFFFFF"/>
+                    </a:solidFill>
+                  </a:tcPr>
+                </a:tc>
+                <a:tc>
+                  <a:txBody>
+                    <a:bodyPr wrap="square"/>
+                    <a:lstStyle/>
+                    <a:p>
+                      <a:pPr algn="l">
+                        <a:spcAft>
+                          <a:spcPts val="0"/>
+                        </a:spcAft>
+                      </a:pPr>
+                      <a:r>
+                        <a:rPr sz="1100" b="0">
+                          <a:solidFill>
+                            <a:srgbClr val="2B2B2B"/>
+                          </a:solidFill>
+                          <a:latin typeface="맑은 고딕"/>
+                        </a:rPr>
+                        <a:t>AI 비전 + 원문 대조</a:t>
+                      </a:r>
+                    </a:p>
+                  </a:txBody>
+                  <a:tcPr>
+                    <a:solidFill>
+                      <a:srgbClr val="FFFFFF"/>
+                    </a:solidFill>
+                  </a:tcPr>
+                </a:tc>
+                <a:tc>
+                  <a:txBody>
+                    <a:bodyPr wrap="square"/>
+                    <a:lstStyle/>
+                    <a:p>
+                      <a:pPr algn="l">
+                        <a:spcAft>
+                          <a:spcPts val="0"/>
+                        </a:spcAft>
+                      </a:pPr>
+                      <a:r>
+                        <a:rPr sz="1100" b="0">
+                          <a:solidFill>
+                            <a:srgbClr val="2B2B2B"/>
+                          </a:solidFill>
+                          <a:latin typeface="맑은 고딕"/>
+                        </a:rPr>
+                        <a:t>2026-07-24 채택</a:t>
+                      </a:r>
+                    </a:p>
+                  </a:txBody>
+                  <a:tcPr>
+                    <a:solidFill>
+                      <a:srgbClr val="FFFFFF"/>
+                    </a:solidFill>
+                  </a:tcPr>
+                </a:tc>
+              </a:tr>
+            </a:tbl>
+          </a:graphicData>
+        </a:graphic>
+      </p:graphicFrame>
+      <p:sp>
+        <p:nvSpPr>
+          <p:cNvPr id="6" name="Rounded Rectangle 5"/>
+          <p:cNvSpPr/>
+          <p:nvPr/>
+        </p:nvSpPr>
+        <p:spPr>
+          <a:xfrm>
+            <a:off x="566928" y="4297680"/>
+            <a:ext cx="5394960" cy="1828800"/>
+          </a:xfrm>
+          <a:prstGeom prst="roundRect">
+            <a:avLst/>
+          </a:prstGeom>
+          <a:solidFill>
+            <a:srgbClr val="FFFFFF"/>
+          </a:solidFill>
+          <a:ln>
+            <a:solidFill>
+              <a:srgbClr val="E6E0D4"/>
+            </a:solidFill>
+          </a:ln>
+        </p:spPr>
+        <p:style>
+          <a:lnRef idx="1">
+            <a:schemeClr val="accent1"/>
+          </a:lnRef>
+          <a:fillRef idx="3">
+            <a:schemeClr val="accent1"/>
+          </a:fillRef>
+          <a:effectRef idx="2">
+            <a:schemeClr val="accent1"/>
+          </a:effectRef>
+          <a:fontRef idx="minor">
+            <a:schemeClr val="lt1"/>
+          </a:fontRef>
+        </p:style>
+        <p:txBody>
+          <a:bodyPr rtlCol="0" anchor="ctr"/>
+          <a:lstStyle/>
+          <a:p>
+            <a:pPr algn="ctr"/>
+          </a:p>
+        </p:txBody>
+      </p:sp>
+      <p:sp>
+        <p:nvSpPr>
+          <p:cNvPr id="7" name="Rectangle 6"/>
+          <p:cNvSpPr/>
+          <p:nvPr/>
+        </p:nvSpPr>
+        <p:spPr>
+          <a:xfrm>
+            <a:off x="566928" y="4297680"/>
+            <a:ext cx="54864" cy="1828800"/>
+          </a:xfrm>
+          <a:prstGeom prst="rect">
+            <a:avLst/>
+          </a:prstGeom>
+          <a:solidFill>
+            <a:srgbClr val="2E7D32"/>
+          </a:solidFill>
+          <a:ln>
+            <a:noFill/>
+          </a:ln>
+        </p:spPr>
+        <p:style>
+          <a:lnRef idx="1">
+            <a:schemeClr val="accent1"/>
+          </a:lnRef>
+          <a:fillRef idx="3">
+            <a:schemeClr val="accent1"/>
+          </a:fillRef>
+          <a:effectRef idx="2">
+            <a:schemeClr val="accent1"/>
+          </a:effectRef>
+          <a:fontRef idx="minor">
+            <a:schemeClr val="lt1"/>
+          </a:fontRef>
+        </p:style>
+        <p:txBody>
+          <a:bodyPr rtlCol="0" anchor="ctr"/>
+          <a:lstStyle/>
+          <a:p>
+            <a:pPr algn="ctr"/>
+          </a:p>
+        </p:txBody>
+      </p:sp>
+      <p:sp>
+        <p:nvSpPr>
+          <p:cNvPr id="8" name="TextBox 7"/>
+          <p:cNvSpPr txBox="1"/>
+          <p:nvPr/>
+        </p:nvSpPr>
+        <p:spPr>
+          <a:xfrm>
+            <a:off x="822960" y="4443984"/>
+            <a:ext cx="4937760" cy="1554480"/>
+          </a:xfrm>
+          <a:prstGeom prst="rect">
+            <a:avLst/>
+          </a:prstGeom>
+          <a:noFill/>
+        </p:spPr>
+        <p:txBody>
+          <a:bodyPr wrap="square">
+            <a:spAutoFit/>
+          </a:bodyPr>
+          <a:lstStyle/>
+          <a:p>
+            <a:pPr algn="l">
+              <a:spcAft>
+                <a:spcPts val="700"/>
+              </a:spcAft>
+            </a:pPr>
+            <a:r>
+              <a:rPr sz="1500" b="1">
+                <a:solidFill>
+                  <a:srgbClr val="645B4C"/>
+                </a:solidFill>
+                <a:latin typeface="맑은 고딕"/>
+              </a:rPr>
+              <a:t>비용을 쓰지 않는 설계</a:t>
+            </a:r>
+          </a:p>
+          <a:p>
+            <a:pPr algn="l">
+              <a:spcAft>
+                <a:spcPts val="500"/>
+              </a:spcAft>
+            </a:pPr>
+            <a:r>
+              <a:rPr sz="1200" b="0">
+                <a:solidFill>
+                  <a:srgbClr val="2B2B2B"/>
+                </a:solidFill>
+                <a:latin typeface="맑은 고딕"/>
+              </a:rPr>
+              <a:t>비전은 앞 단계가 실패했을 때만 호출</a:t>
+            </a:r>
+          </a:p>
+          <a:p>
+            <a:pPr algn="l">
+              <a:spcAft>
+                <a:spcPts val="500"/>
+              </a:spcAft>
+            </a:pPr>
+            <a:r>
+              <a:rPr sz="1200" b="0">
+                <a:solidFill>
+                  <a:srgbClr val="2B2B2B"/>
+                </a:solidFill>
+                <a:latin typeface="맑은 고딕"/>
+              </a:rPr>
+              <a:t>한 페이지에 필요한 항목을 한 번에 질문</a:t>
+            </a:r>
+          </a:p>
+          <a:p>
+            <a:pPr algn="l">
+              <a:spcAft>
+                <a:spcPts val="500"/>
+              </a:spcAft>
+            </a:pPr>
+            <a:r>
+              <a:rPr sz="1200" b="0">
+                <a:solidFill>
+                  <a:srgbClr val="2B2B2B"/>
+                </a:solidFill>
+                <a:latin typeface="맑은 고딕"/>
+              </a:rPr>
+              <a:t>결과 캐시로 같은 서류 재검증은 0원</a:t>
+            </a:r>
+          </a:p>
+          <a:p>
+            <a:pPr algn="l">
+              <a:spcAft>
+                <a:spcPts val="500"/>
+              </a:spcAft>
+            </a:pPr>
+            <a:r>
+              <a:rPr sz="1200" b="0">
+                <a:solidFill>
+                  <a:srgbClr val="2B2B2B"/>
+                </a:solidFill>
+                <a:latin typeface="맑은 고딕"/>
+              </a:rPr>
+              <a:t>실측: 패키지 1건당 약 76원 (모델 승격 0회)</a:t>
+            </a:r>
+          </a:p>
+        </p:txBody>
+      </p:sp>
+      <p:sp>
+        <p:nvSpPr>
+          <p:cNvPr id="9" name="Rounded Rectangle 8"/>
+          <p:cNvSpPr/>
+          <p:nvPr/>
+        </p:nvSpPr>
+        <p:spPr>
+          <a:xfrm>
+            <a:off x="6172200" y="4297680"/>
+            <a:ext cx="5458968" cy="1828800"/>
+          </a:xfrm>
+          <a:prstGeom prst="roundRect">
+            <a:avLst/>
+          </a:prstGeom>
+          <a:solidFill>
+            <a:srgbClr val="FFFFFF"/>
+          </a:solidFill>
+          <a:ln>
+            <a:solidFill>
+              <a:srgbClr val="E6E0D4"/>
+            </a:solidFill>
+          </a:ln>
+        </p:spPr>
+        <p:style>
+          <a:lnRef idx="1">
+            <a:schemeClr val="accent1"/>
+          </a:lnRef>
+          <a:fillRef idx="3">
+            <a:schemeClr val="accent1"/>
+          </a:fillRef>
+          <a:effectRef idx="2">
+            <a:schemeClr val="accent1"/>
+          </a:effectRef>
+          <a:fontRef idx="minor">
+            <a:schemeClr val="lt1"/>
+          </a:fontRef>
+        </p:style>
+        <p:txBody>
+          <a:bodyPr rtlCol="0" anchor="ctr"/>
+          <a:lstStyle/>
+          <a:p>
+            <a:pPr algn="ctr"/>
+          </a:p>
+        </p:txBody>
+      </p:sp>
+      <p:sp>
+        <p:nvSpPr>
+          <p:cNvPr id="10" name="Rectangle 9"/>
+          <p:cNvSpPr/>
+          <p:nvPr/>
+        </p:nvSpPr>
+        <p:spPr>
+          <a:xfrm>
+            <a:off x="6172200" y="4297680"/>
+            <a:ext cx="54864" cy="1828800"/>
+          </a:xfrm>
+          <a:prstGeom prst="rect">
+            <a:avLst/>
+          </a:prstGeom>
+          <a:solidFill>
+            <a:srgbClr val="2E7D32"/>
+          </a:solidFill>
+          <a:ln>
+            <a:noFill/>
+          </a:ln>
+        </p:spPr>
+        <p:style>
+          <a:lnRef idx="1">
+            <a:schemeClr val="accent1"/>
+          </a:lnRef>
+          <a:fillRef idx="3">
+            <a:schemeClr val="accent1"/>
+          </a:fillRef>
+          <a:effectRef idx="2">
+            <a:schemeClr val="accent1"/>
+          </a:effectRef>
+          <a:fontRef idx="minor">
+            <a:schemeClr val="lt1"/>
+          </a:fontRef>
+        </p:style>
+        <p:txBody>
+          <a:bodyPr rtlCol="0" anchor="ctr"/>
+          <a:lstStyle/>
+          <a:p>
+            <a:pPr algn="ctr"/>
+          </a:p>
+        </p:txBody>
+      </p:sp>
+      <p:sp>
+        <p:nvSpPr>
+          <p:cNvPr id="11" name="TextBox 10"/>
+          <p:cNvSpPr txBox="1"/>
+          <p:nvPr/>
+        </p:nvSpPr>
+        <p:spPr>
+          <a:xfrm>
+            <a:off x="6428232" y="4443984"/>
+            <a:ext cx="5001768" cy="1554480"/>
+          </a:xfrm>
+          <a:prstGeom prst="rect">
+            <a:avLst/>
+          </a:prstGeom>
+          <a:noFill/>
+        </p:spPr>
+        <p:txBody>
+          <a:bodyPr wrap="square">
+            <a:spAutoFit/>
+          </a:bodyPr>
+          <a:lstStyle/>
+          <a:p>
+            <a:pPr algn="l">
+              <a:spcAft>
+                <a:spcPts val="700"/>
+              </a:spcAft>
+            </a:pPr>
+            <a:r>
+              <a:rPr sz="1500" b="1">
+                <a:solidFill>
+                  <a:srgbClr val="645B4C"/>
+                </a:solidFill>
+                <a:latin typeface="맑은 고딕"/>
+              </a:rPr>
+              <a:t>개인정보 최소화</a:t>
+            </a:r>
+          </a:p>
+          <a:p>
+            <a:pPr algn="l">
+              <a:spcAft>
+                <a:spcPts val="500"/>
+              </a:spcAft>
+            </a:pPr>
+            <a:r>
+              <a:rPr sz="1200" b="0">
+                <a:solidFill>
+                  <a:srgbClr val="2B2B2B"/>
+                </a:solidFill>
+                <a:latin typeface="맑은 고딕"/>
+              </a:rPr>
+              <a:t>생년월일·계좌번호는 애초에 추출하지 않음</a:t>
+            </a:r>
+          </a:p>
+          <a:p>
+            <a:pPr algn="l">
+              <a:spcAft>
+                <a:spcPts val="500"/>
+              </a:spcAft>
+            </a:pPr>
+            <a:r>
+              <a:rPr sz="1200" b="0">
+                <a:solidFill>
+                  <a:srgbClr val="2B2B2B"/>
+                </a:solidFill>
+                <a:latin typeface="맑은 고딕"/>
+              </a:rPr>
+              <a:t>비전 프롬프트에서 개인정보 출력을 금지</a:t>
+            </a:r>
+          </a:p>
+          <a:p>
+            <a:pPr algn="l">
+              <a:spcAft>
+                <a:spcPts val="500"/>
+              </a:spcAft>
+            </a:pPr>
+            <a:r>
+              <a:rPr sz="1200" b="0">
+                <a:solidFill>
+                  <a:srgbClr val="2B2B2B"/>
+                </a:solidFill>
+                <a:latin typeface="맑은 고딕"/>
+              </a:rPr>
+              <a:t>원본 파일은 디스크에 저장하지 않음</a:t>
+            </a:r>
+          </a:p>
+          <a:p>
+            <a:pPr algn="l">
+              <a:spcAft>
+                <a:spcPts val="500"/>
+              </a:spcAft>
+            </a:pPr>
+            <a:r>
+              <a:rPr sz="1200" b="0">
+                <a:solidFill>
+                  <a:srgbClr val="2B2B2B"/>
+                </a:solidFill>
+                <a:latin typeface="맑은 고딕"/>
+              </a:rPr>
+              <a:t>판독 캐시 즉시 삭제 기능 제공</a:t>
+            </a:r>
+          </a:p>
+        </p:txBody>
+      </p:sp>
+    </p:spTree>
+  </p:cSld>
+  <p:clrMapOvr>
+    <a:masterClrMapping/>
+  </p:clrMapOvr>
+</p:sld>
+</file>
+
+<file path=ppt/slides/slide11.xml><?xml version="1.0" encoding="utf-8"?>
+<p:sld xmlns:a="http://schemas.openxmlformats.org/drawingml/2006/main" xmlns:p="http://schemas.openxmlformats.org/presentationml/2006/main" xmlns:r="http://schemas.openxmlformats.org/officeDocument/2006/relationships">
+  <p:cSld>
+    <p:spTree>
+      <p:nvGrpSpPr>
+        <p:cNvPr id="1" name=""/>
+        <p:cNvGrpSpPr/>
+        <p:nvPr/>
+      </p:nvGrpSpPr>
+      <p:grpSpPr/>
+      <p:sp>
+        <p:nvSpPr>
+          <p:cNvPr id="2" name="Rectangle 1"/>
+          <p:cNvSpPr/>
+          <p:nvPr/>
+        </p:nvSpPr>
+        <p:spPr>
+          <a:xfrm>
+            <a:off x="0" y="0"/>
+            <a:ext cx="12191695" cy="82296"/>
+          </a:xfrm>
+          <a:prstGeom prst="rect">
+            <a:avLst/>
+          </a:prstGeom>
+          <a:solidFill>
+            <a:srgbClr val="FCAF17"/>
+          </a:solidFill>
+          <a:ln>
+            <a:noFill/>
+          </a:ln>
+        </p:spPr>
+        <p:style>
+          <a:lnRef idx="1">
+            <a:schemeClr val="accent1"/>
+          </a:lnRef>
+          <a:fillRef idx="3">
+            <a:schemeClr val="accent1"/>
+          </a:fillRef>
+          <a:effectRef idx="2">
+            <a:schemeClr val="accent1"/>
+          </a:effectRef>
+          <a:fontRef idx="minor">
+            <a:schemeClr val="lt1"/>
+          </a:fontRef>
+        </p:style>
+        <p:txBody>
+          <a:bodyPr rtlCol="0" anchor="ctr"/>
+          <a:lstStyle/>
+          <a:p>
+            <a:pPr algn="ctr"/>
+          </a:p>
+        </p:txBody>
+      </p:sp>
+      <p:sp>
+        <p:nvSpPr>
+          <p:cNvPr id="3" name="TextBox 2"/>
+          <p:cNvSpPr txBox="1"/>
+          <p:nvPr/>
+        </p:nvSpPr>
+        <p:spPr>
+          <a:xfrm>
+            <a:off x="566928" y="310896"/>
+            <a:ext cx="10424160" cy="914400"/>
+          </a:xfrm>
+          <a:prstGeom prst="rect">
+            <a:avLst/>
+          </a:prstGeom>
+          <a:noFill/>
+        </p:spPr>
+        <p:txBody>
+          <a:bodyPr wrap="square">
+            <a:spAutoFit/>
+          </a:bodyPr>
+          <a:lstStyle/>
+          <a:p>
+            <a:pPr algn="l">
+              <a:spcAft>
+                <a:spcPts val="200"/>
+              </a:spcAft>
+            </a:pPr>
+            <a:r>
+              <a:rPr sz="3000" b="1">
+                <a:solidFill>
+                  <a:srgbClr val="645B4C"/>
+                </a:solidFill>
+                <a:latin typeface="맑은 고딕"/>
+              </a:rPr>
               <a:t>검사 항목 8종과 근거 조문</a:t>
             </a:r>
           </a:p>
@@ -4528,7 +5773,7 @@
 </p:sld>
 </file>
 
-<file path=ppt/slides/slide11.xml><?xml version="1.0" encoding="utf-8"?>
+<file path=ppt/slides/slide12.xml><?xml version="1.0" encoding="utf-8"?>
 <p:sld xmlns:a="http://schemas.openxmlformats.org/drawingml/2006/main" xmlns:p="http://schemas.openxmlformats.org/presentationml/2006/main" xmlns:r="http://schemas.openxmlformats.org/officeDocument/2006/relationships">
   <p:cSld>
     <p:spTree>
@@ -5504,7 +6749,7 @@
 </p:sld>
 </file>
 
-<file path=ppt/slides/slide12.xml><?xml version="1.0" encoding="utf-8"?>
+<file path=ppt/slides/slide13.xml><?xml version="1.0" encoding="utf-8"?>
 <p:sld xmlns:a="http://schemas.openxmlformats.org/drawingml/2006/main" xmlns:p="http://schemas.openxmlformats.org/presentationml/2006/main" xmlns:r="http://schemas.openxmlformats.org/officeDocument/2006/relationships">
   <p:cSld>
     <p:spTree>
@@ -6638,7 +7883,7 @@
 </p:sld>
 </file>
 
-<file path=ppt/slides/slide13.xml><?xml version="1.0" encoding="utf-8"?>
+<file path=ppt/slides/slide14.xml><?xml version="1.0" encoding="utf-8"?>
 <p:sld xmlns:a="http://schemas.openxmlformats.org/drawingml/2006/main" xmlns:p="http://schemas.openxmlformats.org/presentationml/2006/main" xmlns:r="http://schemas.openxmlformats.org/officeDocument/2006/relationships">
   <p:cSld>
     <p:spTree>
@@ -7608,7 +8853,7 @@
 </p:sld>
 </file>
 
-<file path=ppt/slides/slide14.xml><?xml version="1.0" encoding="utf-8"?>
+<file path=ppt/slides/slide15.xml><?xml version="1.0" encoding="utf-8"?>
 <p:sld xmlns:a="http://schemas.openxmlformats.org/drawingml/2006/main" xmlns:p="http://schemas.openxmlformats.org/presentationml/2006/main" xmlns:r="http://schemas.openxmlformats.org/officeDocument/2006/relationships">
   <p:cSld>
     <p:spTree>
@@ -8525,7 +9770,7 @@
 </p:sld>
 </file>
 
-<file path=ppt/slides/slide15.xml><?xml version="1.0" encoding="utf-8"?>
+<file path=ppt/slides/slide16.xml><?xml version="1.0" encoding="utf-8"?>
 <p:sld xmlns:a="http://schemas.openxmlformats.org/drawingml/2006/main" xmlns:p="http://schemas.openxmlformats.org/presentationml/2006/main" xmlns:r="http://schemas.openxmlformats.org/officeDocument/2006/relationships">
   <p:cSld>
     <p:spTree>
@@ -9458,7 +10703,7 @@
 </p:sld>
 </file>
 
-<file path=ppt/slides/slide16.xml><?xml version="1.0" encoding="utf-8"?>
+<file path=ppt/slides/slide17.xml><?xml version="1.0" encoding="utf-8"?>
 <p:sld xmlns:a="http://schemas.openxmlformats.org/drawingml/2006/main" xmlns:p="http://schemas.openxmlformats.org/presentationml/2006/main" xmlns:r="http://schemas.openxmlformats.org/officeDocument/2006/relationships">
   <p:cSld>
     <p:spTree>
@@ -10511,7 +11756,7 @@
 </p:sld>
 </file>
 
-<file path=ppt/slides/slide17.xml><?xml version="1.0" encoding="utf-8"?>
+<file path=ppt/slides/slide18.xml><?xml version="1.0" encoding="utf-8"?>
 <p:sld xmlns:a="http://schemas.openxmlformats.org/drawingml/2006/main" xmlns:p="http://schemas.openxmlformats.org/presentationml/2006/main" xmlns:r="http://schemas.openxmlformats.org/officeDocument/2006/relationships">
   <p:cSld>
     <p:spTree>
@@ -12026,6 +13271,961 @@
 </file>
 
 <file path=ppt/slides/slide3.xml><?xml version="1.0" encoding="utf-8"?>
+<p:sld xmlns:a="http://schemas.openxmlformats.org/drawingml/2006/main" xmlns:p="http://schemas.openxmlformats.org/presentationml/2006/main" xmlns:r="http://schemas.openxmlformats.org/officeDocument/2006/relationships">
+  <p:cSld>
+    <p:spTree>
+      <p:nvGrpSpPr>
+        <p:cNvPr id="1" name=""/>
+        <p:cNvGrpSpPr/>
+        <p:nvPr/>
+      </p:nvGrpSpPr>
+      <p:grpSpPr/>
+      <p:sp>
+        <p:nvSpPr>
+          <p:cNvPr id="2" name="Rectangle 1"/>
+          <p:cNvSpPr/>
+          <p:nvPr/>
+        </p:nvSpPr>
+        <p:spPr>
+          <a:xfrm>
+            <a:off x="0" y="0"/>
+            <a:ext cx="12191695" cy="82296"/>
+          </a:xfrm>
+          <a:prstGeom prst="rect">
+            <a:avLst/>
+          </a:prstGeom>
+          <a:solidFill>
+            <a:srgbClr val="FCAF17"/>
+          </a:solidFill>
+          <a:ln>
+            <a:noFill/>
+          </a:ln>
+        </p:spPr>
+        <p:style>
+          <a:lnRef idx="1">
+            <a:schemeClr val="accent1"/>
+          </a:lnRef>
+          <a:fillRef idx="3">
+            <a:schemeClr val="accent1"/>
+          </a:fillRef>
+          <a:effectRef idx="2">
+            <a:schemeClr val="accent1"/>
+          </a:effectRef>
+          <a:fontRef idx="minor">
+            <a:schemeClr val="lt1"/>
+          </a:fontRef>
+        </p:style>
+        <p:txBody>
+          <a:bodyPr rtlCol="0" anchor="ctr"/>
+          <a:lstStyle/>
+          <a:p>
+            <a:pPr algn="ctr"/>
+          </a:p>
+        </p:txBody>
+      </p:sp>
+      <p:sp>
+        <p:nvSpPr>
+          <p:cNvPr id="3" name="TextBox 2"/>
+          <p:cNvSpPr txBox="1"/>
+          <p:nvPr/>
+        </p:nvSpPr>
+        <p:spPr>
+          <a:xfrm>
+            <a:off x="566928" y="310896"/>
+            <a:ext cx="10424160" cy="914400"/>
+          </a:xfrm>
+          <a:prstGeom prst="rect">
+            <a:avLst/>
+          </a:prstGeom>
+          <a:noFill/>
+        </p:spPr>
+        <p:txBody>
+          <a:bodyPr wrap="square">
+            <a:spAutoFit/>
+          </a:bodyPr>
+          <a:lstStyle/>
+          <a:p>
+            <a:pPr algn="l">
+              <a:spcAft>
+                <a:spcPts val="200"/>
+              </a:spcAft>
+            </a:pPr>
+            <a:r>
+              <a:rPr sz="3000" b="1">
+                <a:solidFill>
+                  <a:srgbClr val="645B4C"/>
+                </a:solidFill>
+                <a:latin typeface="맑은 고딕"/>
+              </a:rPr>
+              <a:t>문제의 규모</a:t>
+            </a:r>
+          </a:p>
+          <a:p>
+            <a:pPr algn="l">
+              <a:spcAft>
+                <a:spcPts val="600"/>
+              </a:spcAft>
+            </a:pPr>
+            <a:r>
+              <a:rPr sz="1400" b="0">
+                <a:solidFill>
+                  <a:srgbClr val="6B6B6B"/>
+                </a:solidFill>
+                <a:latin typeface="맑은 고딕"/>
+              </a:rPr>
+              <a:t>불완전판매 민원은 급증했고, 그 비용은 이미 판매사가 치르고 있다</a:t>
+            </a:r>
+          </a:p>
+        </p:txBody>
+      </p:sp>
+      <p:sp>
+        <p:nvSpPr>
+          <p:cNvPr id="4" name="Rounded Rectangle 3"/>
+          <p:cNvSpPr/>
+          <p:nvPr/>
+        </p:nvSpPr>
+        <p:spPr>
+          <a:xfrm>
+            <a:off x="9646920" y="329184"/>
+            <a:ext cx="1965960" cy="384048"/>
+          </a:xfrm>
+          <a:prstGeom prst="roundRect">
+            <a:avLst/>
+          </a:prstGeom>
+          <a:solidFill>
+            <a:srgbClr val="FFF8DF"/>
+          </a:solidFill>
+          <a:ln>
+            <a:solidFill>
+              <a:srgbClr val="FCAF17"/>
+            </a:solidFill>
+          </a:ln>
+        </p:spPr>
+        <p:style>
+          <a:lnRef idx="1">
+            <a:schemeClr val="accent1"/>
+          </a:lnRef>
+          <a:fillRef idx="3">
+            <a:schemeClr val="accent1"/>
+          </a:fillRef>
+          <a:effectRef idx="2">
+            <a:schemeClr val="accent1"/>
+          </a:effectRef>
+          <a:fontRef idx="minor">
+            <a:schemeClr val="lt1"/>
+          </a:fontRef>
+        </p:style>
+        <p:txBody>
+          <a:bodyPr rtlCol="0" anchor="ctr" wrap="square"/>
+          <a:lstStyle/>
+          <a:p>
+            <a:pPr algn="ctr">
+              <a:spcAft>
+                <a:spcPts val="0"/>
+              </a:spcAft>
+            </a:pPr>
+            <a:r>
+              <a:rPr sz="1100" b="1">
+                <a:solidFill>
+                  <a:srgbClr val="645B4C"/>
+                </a:solidFill>
+                <a:latin typeface="맑은 고딕"/>
+              </a:rPr>
+              <a:t>문제 정의·필요성</a:t>
+            </a:r>
+          </a:p>
+        </p:txBody>
+      </p:sp>
+      <p:sp>
+        <p:nvSpPr>
+          <p:cNvPr id="5" name="Rounded Rectangle 4"/>
+          <p:cNvSpPr/>
+          <p:nvPr/>
+        </p:nvSpPr>
+        <p:spPr>
+          <a:xfrm>
+            <a:off x="566928" y="1417320"/>
+            <a:ext cx="2615184" cy="1600200"/>
+          </a:xfrm>
+          <a:prstGeom prst="roundRect">
+            <a:avLst/>
+          </a:prstGeom>
+          <a:solidFill>
+            <a:srgbClr val="FFF8DF"/>
+          </a:solidFill>
+          <a:ln>
+            <a:solidFill>
+              <a:srgbClr val="FCAF17"/>
+            </a:solidFill>
+          </a:ln>
+        </p:spPr>
+        <p:style>
+          <a:lnRef idx="1">
+            <a:schemeClr val="accent1"/>
+          </a:lnRef>
+          <a:fillRef idx="3">
+            <a:schemeClr val="accent1"/>
+          </a:fillRef>
+          <a:effectRef idx="2">
+            <a:schemeClr val="accent1"/>
+          </a:effectRef>
+          <a:fontRef idx="minor">
+            <a:schemeClr val="lt1"/>
+          </a:fontRef>
+        </p:style>
+        <p:txBody>
+          <a:bodyPr rtlCol="0" anchor="ctr" wrap="square"/>
+          <a:lstStyle/>
+          <a:p>
+            <a:pPr algn="ctr">
+              <a:spcAft>
+                <a:spcPts val="300"/>
+              </a:spcAft>
+            </a:pPr>
+            <a:r>
+              <a:rPr sz="2400" b="1">
+                <a:solidFill>
+                  <a:srgbClr val="C62828"/>
+                </a:solidFill>
+                <a:latin typeface="맑은 고딕"/>
+              </a:rPr>
+              <a:t>11만 6,338건</a:t>
+            </a:r>
+          </a:p>
+          <a:p>
+            <a:pPr algn="ctr">
+              <a:spcAft>
+                <a:spcPts val="200"/>
+              </a:spcAft>
+            </a:pPr>
+            <a:r>
+              <a:rPr sz="1200" b="1">
+                <a:solidFill>
+                  <a:srgbClr val="645B4C"/>
+                </a:solidFill>
+                <a:latin typeface="맑은 고딕"/>
+              </a:rPr>
+              <a:t>2024년 금융민원 총계</a:t>
+            </a:r>
+          </a:p>
+          <a:p>
+            <a:pPr algn="ctr">
+              <a:spcAft>
+                <a:spcPts val="0"/>
+              </a:spcAft>
+            </a:pPr>
+            <a:r>
+              <a:rPr sz="1000" b="0">
+                <a:solidFill>
+                  <a:srgbClr val="6B6B6B"/>
+                </a:solidFill>
+                <a:latin typeface="맑은 고딕"/>
+              </a:rPr>
+              <a:t>전년 대비 +24%</a:t>
+            </a:r>
+          </a:p>
+        </p:txBody>
+      </p:sp>
+      <p:sp>
+        <p:nvSpPr>
+          <p:cNvPr id="6" name="Rounded Rectangle 5"/>
+          <p:cNvSpPr/>
+          <p:nvPr/>
+        </p:nvSpPr>
+        <p:spPr>
+          <a:xfrm>
+            <a:off x="3383280" y="1417320"/>
+            <a:ext cx="2615184" cy="1600200"/>
+          </a:xfrm>
+          <a:prstGeom prst="roundRect">
+            <a:avLst/>
+          </a:prstGeom>
+          <a:solidFill>
+            <a:srgbClr val="FFF8DF"/>
+          </a:solidFill>
+          <a:ln>
+            <a:solidFill>
+              <a:srgbClr val="FCAF17"/>
+            </a:solidFill>
+          </a:ln>
+        </p:spPr>
+        <p:style>
+          <a:lnRef idx="1">
+            <a:schemeClr val="accent1"/>
+          </a:lnRef>
+          <a:fillRef idx="3">
+            <a:schemeClr val="accent1"/>
+          </a:fillRef>
+          <a:effectRef idx="2">
+            <a:schemeClr val="accent1"/>
+          </a:effectRef>
+          <a:fontRef idx="minor">
+            <a:schemeClr val="lt1"/>
+          </a:fontRef>
+        </p:style>
+        <p:txBody>
+          <a:bodyPr rtlCol="0" anchor="ctr" wrap="square"/>
+          <a:lstStyle/>
+          <a:p>
+            <a:pPr algn="ctr">
+              <a:spcAft>
+                <a:spcPts val="300"/>
+              </a:spcAft>
+            </a:pPr>
+            <a:r>
+              <a:rPr sz="2400" b="1">
+                <a:solidFill>
+                  <a:srgbClr val="C62828"/>
+                </a:solidFill>
+                <a:latin typeface="맑은 고딕"/>
+              </a:rPr>
+              <a:t>+53.3%</a:t>
+            </a:r>
+          </a:p>
+          <a:p>
+            <a:pPr algn="ctr">
+              <a:spcAft>
+                <a:spcPts val="200"/>
+              </a:spcAft>
+            </a:pPr>
+            <a:r>
+              <a:rPr sz="1200" b="1">
+                <a:solidFill>
+                  <a:srgbClr val="645B4C"/>
+                </a:solidFill>
+                <a:latin typeface="맑은 고딕"/>
+              </a:rPr>
+              <a:t>은행 권역 민원 증가</a:t>
+            </a:r>
+          </a:p>
+          <a:p>
+            <a:pPr algn="ctr">
+              <a:spcAft>
+                <a:spcPts val="0"/>
+              </a:spcAft>
+            </a:pPr>
+            <a:r>
+              <a:rPr sz="1000" b="0">
+                <a:solidFill>
+                  <a:srgbClr val="6B6B6B"/>
+                </a:solidFill>
+                <a:latin typeface="맑은 고딕"/>
+              </a:rPr>
+              <a:t>24,043건 · ELS 불완전판매가 주원인</a:t>
+            </a:r>
+          </a:p>
+        </p:txBody>
+      </p:sp>
+      <p:sp>
+        <p:nvSpPr>
+          <p:cNvPr id="7" name="Rounded Rectangle 6"/>
+          <p:cNvSpPr/>
+          <p:nvPr/>
+        </p:nvSpPr>
+        <p:spPr>
+          <a:xfrm>
+            <a:off x="6199632" y="1417320"/>
+            <a:ext cx="2615184" cy="1600200"/>
+          </a:xfrm>
+          <a:prstGeom prst="roundRect">
+            <a:avLst/>
+          </a:prstGeom>
+          <a:solidFill>
+            <a:srgbClr val="FFF8DF"/>
+          </a:solidFill>
+          <a:ln>
+            <a:solidFill>
+              <a:srgbClr val="FCAF17"/>
+            </a:solidFill>
+          </a:ln>
+        </p:spPr>
+        <p:style>
+          <a:lnRef idx="1">
+            <a:schemeClr val="accent1"/>
+          </a:lnRef>
+          <a:fillRef idx="3">
+            <a:schemeClr val="accent1"/>
+          </a:fillRef>
+          <a:effectRef idx="2">
+            <a:schemeClr val="accent1"/>
+          </a:effectRef>
+          <a:fontRef idx="minor">
+            <a:schemeClr val="lt1"/>
+          </a:fontRef>
+        </p:style>
+        <p:txBody>
+          <a:bodyPr rtlCol="0" anchor="ctr" wrap="square"/>
+          <a:lstStyle/>
+          <a:p>
+            <a:pPr algn="ctr">
+              <a:spcAft>
+                <a:spcPts val="300"/>
+              </a:spcAft>
+            </a:pPr>
+            <a:r>
+              <a:rPr sz="2400" b="1">
+                <a:solidFill>
+                  <a:srgbClr val="C62828"/>
+                </a:solidFill>
+                <a:latin typeface="맑은 고딕"/>
+              </a:rPr>
+              <a:t>+1,048%</a:t>
+            </a:r>
+          </a:p>
+          <a:p>
+            <a:pPr algn="ctr">
+              <a:spcAft>
+                <a:spcPts val="200"/>
+              </a:spcAft>
+            </a:pPr>
+            <a:r>
+              <a:rPr sz="1200" b="1">
+                <a:solidFill>
+                  <a:srgbClr val="645B4C"/>
+                </a:solidFill>
+                <a:latin typeface="맑은 고딕"/>
+              </a:rPr>
+              <a:t>펀드·방카슈랑스 민원 증가</a:t>
+            </a:r>
+          </a:p>
+          <a:p>
+            <a:pPr algn="ctr">
+              <a:spcAft>
+                <a:spcPts val="0"/>
+              </a:spcAft>
+            </a:pPr>
+            <a:r>
+              <a:rPr sz="1000" b="0">
+                <a:solidFill>
+                  <a:srgbClr val="6B6B6B"/>
+                </a:solidFill>
+                <a:latin typeface="맑은 고딕"/>
+              </a:rPr>
+              <a:t>신탁은 +1,459%</a:t>
+            </a:r>
+          </a:p>
+        </p:txBody>
+      </p:sp>
+      <p:sp>
+        <p:nvSpPr>
+          <p:cNvPr id="8" name="Rounded Rectangle 7"/>
+          <p:cNvSpPr/>
+          <p:nvPr/>
+        </p:nvSpPr>
+        <p:spPr>
+          <a:xfrm>
+            <a:off x="9015984" y="1417320"/>
+            <a:ext cx="2615184" cy="1600200"/>
+          </a:xfrm>
+          <a:prstGeom prst="roundRect">
+            <a:avLst/>
+          </a:prstGeom>
+          <a:solidFill>
+            <a:srgbClr val="FFF8DF"/>
+          </a:solidFill>
+          <a:ln>
+            <a:solidFill>
+              <a:srgbClr val="FCAF17"/>
+            </a:solidFill>
+          </a:ln>
+        </p:spPr>
+        <p:style>
+          <a:lnRef idx="1">
+            <a:schemeClr val="accent1"/>
+          </a:lnRef>
+          <a:fillRef idx="3">
+            <a:schemeClr val="accent1"/>
+          </a:fillRef>
+          <a:effectRef idx="2">
+            <a:schemeClr val="accent1"/>
+          </a:effectRef>
+          <a:fontRef idx="minor">
+            <a:schemeClr val="lt1"/>
+          </a:fontRef>
+        </p:style>
+        <p:txBody>
+          <a:bodyPr rtlCol="0" anchor="ctr" wrap="square"/>
+          <a:lstStyle/>
+          <a:p>
+            <a:pPr algn="ctr">
+              <a:spcAft>
+                <a:spcPts val="300"/>
+              </a:spcAft>
+            </a:pPr>
+            <a:r>
+              <a:rPr sz="2400" b="1">
+                <a:solidFill>
+                  <a:srgbClr val="C62828"/>
+                </a:solidFill>
+                <a:latin typeface="맑은 고딕"/>
+              </a:rPr>
+              <a:t>약 1조 3,000억</a:t>
+            </a:r>
+          </a:p>
+          <a:p>
+            <a:pPr algn="ctr">
+              <a:spcAft>
+                <a:spcPts val="200"/>
+              </a:spcAft>
+            </a:pPr>
+            <a:r>
+              <a:rPr sz="1200" b="1">
+                <a:solidFill>
+                  <a:srgbClr val="645B4C"/>
+                </a:solidFill>
+                <a:latin typeface="맑은 고딕"/>
+              </a:rPr>
+              <a:t>홍콩 ELS 자율배상 규모</a:t>
+            </a:r>
+          </a:p>
+          <a:p>
+            <a:pPr algn="ctr">
+              <a:spcAft>
+                <a:spcPts val="0"/>
+              </a:spcAft>
+            </a:pPr>
+            <a:r>
+              <a:rPr sz="1000" b="0">
+                <a:solidFill>
+                  <a:srgbClr val="6B6B6B"/>
+                </a:solidFill>
+                <a:latin typeface="맑은 고딕"/>
+              </a:rPr>
+              <a:t>5개 은행 합계</a:t>
+            </a:r>
+          </a:p>
+        </p:txBody>
+      </p:sp>
+      <p:sp>
+        <p:nvSpPr>
+          <p:cNvPr id="9" name="Rounded Rectangle 8"/>
+          <p:cNvSpPr/>
+          <p:nvPr/>
+        </p:nvSpPr>
+        <p:spPr>
+          <a:xfrm>
+            <a:off x="566928" y="3291840"/>
+            <a:ext cx="5394960" cy="2148840"/>
+          </a:xfrm>
+          <a:prstGeom prst="roundRect">
+            <a:avLst/>
+          </a:prstGeom>
+          <a:solidFill>
+            <a:srgbClr val="FFFFFF"/>
+          </a:solidFill>
+          <a:ln>
+            <a:solidFill>
+              <a:srgbClr val="E6E0D4"/>
+            </a:solidFill>
+          </a:ln>
+        </p:spPr>
+        <p:style>
+          <a:lnRef idx="1">
+            <a:schemeClr val="accent1"/>
+          </a:lnRef>
+          <a:fillRef idx="3">
+            <a:schemeClr val="accent1"/>
+          </a:fillRef>
+          <a:effectRef idx="2">
+            <a:schemeClr val="accent1"/>
+          </a:effectRef>
+          <a:fontRef idx="minor">
+            <a:schemeClr val="lt1"/>
+          </a:fontRef>
+        </p:style>
+        <p:txBody>
+          <a:bodyPr rtlCol="0" anchor="ctr"/>
+          <a:lstStyle/>
+          <a:p>
+            <a:pPr algn="ctr"/>
+          </a:p>
+        </p:txBody>
+      </p:sp>
+      <p:sp>
+        <p:nvSpPr>
+          <p:cNvPr id="10" name="Rectangle 9"/>
+          <p:cNvSpPr/>
+          <p:nvPr/>
+        </p:nvSpPr>
+        <p:spPr>
+          <a:xfrm>
+            <a:off x="566928" y="3291840"/>
+            <a:ext cx="54864" cy="2148840"/>
+          </a:xfrm>
+          <a:prstGeom prst="rect">
+            <a:avLst/>
+          </a:prstGeom>
+          <a:solidFill>
+            <a:srgbClr val="C62828"/>
+          </a:solidFill>
+          <a:ln>
+            <a:noFill/>
+          </a:ln>
+        </p:spPr>
+        <p:style>
+          <a:lnRef idx="1">
+            <a:schemeClr val="accent1"/>
+          </a:lnRef>
+          <a:fillRef idx="3">
+            <a:schemeClr val="accent1"/>
+          </a:fillRef>
+          <a:effectRef idx="2">
+            <a:schemeClr val="accent1"/>
+          </a:effectRef>
+          <a:fontRef idx="minor">
+            <a:schemeClr val="lt1"/>
+          </a:fontRef>
+        </p:style>
+        <p:txBody>
+          <a:bodyPr rtlCol="0" anchor="ctr"/>
+          <a:lstStyle/>
+          <a:p>
+            <a:pPr algn="ctr"/>
+          </a:p>
+        </p:txBody>
+      </p:sp>
+      <p:sp>
+        <p:nvSpPr>
+          <p:cNvPr id="11" name="TextBox 10"/>
+          <p:cNvSpPr txBox="1"/>
+          <p:nvPr/>
+        </p:nvSpPr>
+        <p:spPr>
+          <a:xfrm>
+            <a:off x="822960" y="3438144"/>
+            <a:ext cx="4937760" cy="1874520"/>
+          </a:xfrm>
+          <a:prstGeom prst="rect">
+            <a:avLst/>
+          </a:prstGeom>
+          <a:noFill/>
+        </p:spPr>
+        <p:txBody>
+          <a:bodyPr wrap="square">
+            <a:spAutoFit/>
+          </a:bodyPr>
+          <a:lstStyle/>
+          <a:p>
+            <a:pPr algn="l">
+              <a:spcAft>
+                <a:spcPts val="700"/>
+              </a:spcAft>
+            </a:pPr>
+            <a:r>
+              <a:rPr sz="1500" b="1">
+                <a:solidFill>
+                  <a:srgbClr val="645B4C"/>
+                </a:solidFill>
+                <a:latin typeface="맑은 고딕"/>
+              </a:rPr>
+              <a:t>이 문제는 KB국민은행이 직접 겪었습니다</a:t>
+            </a:r>
+          </a:p>
+          <a:p>
+            <a:pPr algn="l">
+              <a:spcAft>
+                <a:spcPts val="500"/>
+              </a:spcAft>
+            </a:pPr>
+            <a:r>
+              <a:rPr sz="1200" b="0">
+                <a:solidFill>
+                  <a:srgbClr val="2B2B2B"/>
+                </a:solidFill>
+                <a:latin typeface="맑은 고딕"/>
+              </a:rPr>
+              <a:t>홍콩H지수 ELS 불완전판매로 금감원 검사 대상이 된 5개 은행:</a:t>
+            </a:r>
+          </a:p>
+          <a:p>
+            <a:pPr algn="l">
+              <a:spcAft>
+                <a:spcPts val="500"/>
+              </a:spcAft>
+            </a:pPr>
+            <a:r>
+              <a:rPr sz="1200" b="0">
+                <a:solidFill>
+                  <a:srgbClr val="2B2B2B"/>
+                </a:solidFill>
+                <a:latin typeface="맑은 고딕"/>
+              </a:rPr>
+              <a:t>KB국민 · 신한 · 하나 · NH농협 · SC제일</a:t>
+            </a:r>
+          </a:p>
+          <a:p>
+            <a:pPr algn="l">
+              <a:spcAft>
+                <a:spcPts val="500"/>
+              </a:spcAft>
+            </a:pPr>
+            <a:r>
+              <a:rPr sz="1200" b="0">
+                <a:solidFill>
+                  <a:srgbClr val="2B2B2B"/>
+                </a:solidFill>
+                <a:latin typeface="맑은 고딕"/>
+              </a:rPr>
+              <a:t>과징금은 최초 약 4조원으로 산정된 뒤 논의를 거쳐</a:t>
+            </a:r>
+          </a:p>
+          <a:p>
+            <a:pPr algn="l">
+              <a:spcAft>
+                <a:spcPts val="500"/>
+              </a:spcAft>
+            </a:pPr>
+            <a:r>
+              <a:rPr sz="1200" b="0">
+                <a:solidFill>
+                  <a:srgbClr val="2B2B2B"/>
+                </a:solidFill>
+                <a:latin typeface="맑은 고딕"/>
+              </a:rPr>
+              <a:t>6,000억원 수준으로 조정 (2026.7 기준 심의 진행)</a:t>
+            </a:r>
+          </a:p>
+        </p:txBody>
+      </p:sp>
+      <p:sp>
+        <p:nvSpPr>
+          <p:cNvPr id="12" name="Rounded Rectangle 11"/>
+          <p:cNvSpPr/>
+          <p:nvPr/>
+        </p:nvSpPr>
+        <p:spPr>
+          <a:xfrm>
+            <a:off x="6172200" y="3291840"/>
+            <a:ext cx="5458968" cy="2148840"/>
+          </a:xfrm>
+          <a:prstGeom prst="roundRect">
+            <a:avLst/>
+          </a:prstGeom>
+          <a:solidFill>
+            <a:srgbClr val="FFFFFF"/>
+          </a:solidFill>
+          <a:ln>
+            <a:solidFill>
+              <a:srgbClr val="E6E0D4"/>
+            </a:solidFill>
+          </a:ln>
+        </p:spPr>
+        <p:style>
+          <a:lnRef idx="1">
+            <a:schemeClr val="accent1"/>
+          </a:lnRef>
+          <a:fillRef idx="3">
+            <a:schemeClr val="accent1"/>
+          </a:fillRef>
+          <a:effectRef idx="2">
+            <a:schemeClr val="accent1"/>
+          </a:effectRef>
+          <a:fontRef idx="minor">
+            <a:schemeClr val="lt1"/>
+          </a:fontRef>
+        </p:style>
+        <p:txBody>
+          <a:bodyPr rtlCol="0" anchor="ctr"/>
+          <a:lstStyle/>
+          <a:p>
+            <a:pPr algn="ctr"/>
+          </a:p>
+        </p:txBody>
+      </p:sp>
+      <p:sp>
+        <p:nvSpPr>
+          <p:cNvPr id="13" name="Rectangle 12"/>
+          <p:cNvSpPr/>
+          <p:nvPr/>
+        </p:nvSpPr>
+        <p:spPr>
+          <a:xfrm>
+            <a:off x="6172200" y="3291840"/>
+            <a:ext cx="54864" cy="2148840"/>
+          </a:xfrm>
+          <a:prstGeom prst="rect">
+            <a:avLst/>
+          </a:prstGeom>
+          <a:solidFill>
+            <a:srgbClr val="FCAF17"/>
+          </a:solidFill>
+          <a:ln>
+            <a:noFill/>
+          </a:ln>
+        </p:spPr>
+        <p:style>
+          <a:lnRef idx="1">
+            <a:schemeClr val="accent1"/>
+          </a:lnRef>
+          <a:fillRef idx="3">
+            <a:schemeClr val="accent1"/>
+          </a:fillRef>
+          <a:effectRef idx="2">
+            <a:schemeClr val="accent1"/>
+          </a:effectRef>
+          <a:fontRef idx="minor">
+            <a:schemeClr val="lt1"/>
+          </a:fontRef>
+        </p:style>
+        <p:txBody>
+          <a:bodyPr rtlCol="0" anchor="ctr"/>
+          <a:lstStyle/>
+          <a:p>
+            <a:pPr algn="ctr"/>
+          </a:p>
+        </p:txBody>
+      </p:sp>
+      <p:sp>
+        <p:nvSpPr>
+          <p:cNvPr id="14" name="TextBox 13"/>
+          <p:cNvSpPr txBox="1"/>
+          <p:nvPr/>
+        </p:nvSpPr>
+        <p:spPr>
+          <a:xfrm>
+            <a:off x="6428232" y="3438144"/>
+            <a:ext cx="5001768" cy="1874520"/>
+          </a:xfrm>
+          <a:prstGeom prst="rect">
+            <a:avLst/>
+          </a:prstGeom>
+          <a:noFill/>
+        </p:spPr>
+        <p:txBody>
+          <a:bodyPr wrap="square">
+            <a:spAutoFit/>
+          </a:bodyPr>
+          <a:lstStyle/>
+          <a:p>
+            <a:pPr algn="l">
+              <a:spcAft>
+                <a:spcPts val="700"/>
+              </a:spcAft>
+            </a:pPr>
+            <a:r>
+              <a:rPr sz="1500" b="1">
+                <a:solidFill>
+                  <a:srgbClr val="645B4C"/>
+                </a:solidFill>
+                <a:latin typeface="맑은 고딕"/>
+              </a:rPr>
+              <a:t>제재 근거는 '판매 과정'입니다</a:t>
+            </a:r>
+          </a:p>
+          <a:p>
+            <a:pPr algn="l">
+              <a:spcAft>
+                <a:spcPts val="500"/>
+              </a:spcAft>
+            </a:pPr>
+            <a:r>
+              <a:rPr sz="1200" b="0">
+                <a:solidFill>
+                  <a:srgbClr val="2B2B2B"/>
+                </a:solidFill>
+                <a:latin typeface="맑은 고딕"/>
+              </a:rPr>
+              <a:t>금소법 제57조 — 위반 관련 계약으로 얻은 수입의 50% 이내 과징금</a:t>
+            </a:r>
+          </a:p>
+          <a:p>
+            <a:pPr algn="l">
+              <a:spcAft>
+                <a:spcPts val="500"/>
+              </a:spcAft>
+            </a:pPr>
+            <a:r>
+              <a:rPr sz="1200" b="0">
+                <a:solidFill>
+                  <a:srgbClr val="2B2B2B"/>
+                </a:solidFill>
+                <a:latin typeface="맑은 고딕"/>
+              </a:rPr>
+              <a:t>즉 상품이 손실을 냈다는 사실이 아니라</a:t>
+            </a:r>
+          </a:p>
+          <a:p>
+            <a:pPr algn="l">
+              <a:spcAft>
+                <a:spcPts val="500"/>
+              </a:spcAft>
+            </a:pPr>
+            <a:r>
+              <a:rPr sz="1200" b="0">
+                <a:solidFill>
+                  <a:srgbClr val="2B2B2B"/>
+                </a:solidFill>
+                <a:latin typeface="맑은 고딕"/>
+              </a:rPr>
+              <a:t>적합성·설명의무를 지켰는지가 제재를 가른다</a:t>
+            </a:r>
+          </a:p>
+          <a:p>
+            <a:pPr algn="l">
+              <a:spcAft>
+                <a:spcPts val="500"/>
+              </a:spcAft>
+            </a:pPr>
+            <a:r>
+              <a:rPr sz="1200" b="0">
+                <a:solidFill>
+                  <a:srgbClr val="2B2B2B"/>
+                </a:solidFill>
+                <a:latin typeface="맑은 고딕"/>
+              </a:rPr>
+              <a:t>→ 판매 시점의 서류가 곧 방어 근거이자 위험 지점</a:t>
+            </a:r>
+          </a:p>
+        </p:txBody>
+      </p:sp>
+      <p:sp>
+        <p:nvSpPr>
+          <p:cNvPr id="15" name="TextBox 14"/>
+          <p:cNvSpPr txBox="1"/>
+          <p:nvPr/>
+        </p:nvSpPr>
+        <p:spPr>
+          <a:xfrm>
+            <a:off x="566928" y="5577840"/>
+            <a:ext cx="11064240" cy="822960"/>
+          </a:xfrm>
+          <a:prstGeom prst="rect">
+            <a:avLst/>
+          </a:prstGeom>
+          <a:noFill/>
+        </p:spPr>
+        <p:txBody>
+          <a:bodyPr wrap="square">
+            <a:spAutoFit/>
+          </a:bodyPr>
+          <a:lstStyle/>
+          <a:p>
+            <a:pPr algn="l">
+              <a:spcAft>
+                <a:spcPts val="0"/>
+              </a:spcAft>
+            </a:pPr>
+            <a:r>
+              <a:rPr sz="1000" b="0">
+                <a:solidFill>
+                  <a:srgbClr val="6B6B6B"/>
+                </a:solidFill>
+                <a:latin typeface="맑은 고딕"/>
+              </a:rPr>
+              <a:t>출처: 금융감독원 2024년 금융민원 통계(2025.4 보도) · 홍콩 ELS 제재 관련 보도(2026.6~7). 과징금 규모는 심의 진행에 따라 변동될 수 있습니다.</a:t>
+            </a:r>
+          </a:p>
+        </p:txBody>
+      </p:sp>
+    </p:spTree>
+  </p:cSld>
+  <p:clrMapOvr>
+    <a:masterClrMapping/>
+  </p:clrMapOvr>
+</p:sld>
+</file>
+
+<file path=ppt/slides/slide4.xml><?xml version="1.0" encoding="utf-8"?>
 <p:sld xmlns:a="http://schemas.openxmlformats.org/drawingml/2006/main" xmlns:p="http://schemas.openxmlformats.org/presentationml/2006/main" xmlns:r="http://schemas.openxmlformats.org/officeDocument/2006/relationships">
   <p:cSld>
     <p:spTree>
@@ -13159,7 +15359,7 @@
 </p:sld>
 </file>
 
-<file path=ppt/slides/slide4.xml><?xml version="1.0" encoding="utf-8"?>
+<file path=ppt/slides/slide5.xml><?xml version="1.0" encoding="utf-8"?>
 <p:sld xmlns:a="http://schemas.openxmlformats.org/drawingml/2006/main" xmlns:p="http://schemas.openxmlformats.org/presentationml/2006/main" xmlns:r="http://schemas.openxmlformats.org/officeDocument/2006/relationships">
   <p:cSld>
     <p:spTree>
@@ -14184,7 +16384,7 @@
 </p:sld>
 </file>
 
-<file path=ppt/slides/slide5.xml><?xml version="1.0" encoding="utf-8"?>
+<file path=ppt/slides/slide6.xml><?xml version="1.0" encoding="utf-8"?>
 <p:sld xmlns:a="http://schemas.openxmlformats.org/drawingml/2006/main" xmlns:p="http://schemas.openxmlformats.org/presentationml/2006/main" xmlns:r="http://schemas.openxmlformats.org/officeDocument/2006/relationships">
   <p:cSld>
     <p:spTree>
@@ -15532,7 +17732,7 @@
 </p:sld>
 </file>
 
-<file path=ppt/slides/slide6.xml><?xml version="1.0" encoding="utf-8"?>
+<file path=ppt/slides/slide7.xml><?xml version="1.0" encoding="utf-8"?>
 <p:sld xmlns:a="http://schemas.openxmlformats.org/drawingml/2006/main" xmlns:p="http://schemas.openxmlformats.org/presentationml/2006/main" xmlns:r="http://schemas.openxmlformats.org/officeDocument/2006/relationships">
   <p:cSld>
     <p:spTree>
@@ -16749,7 +18949,7 @@
 </p:sld>
 </file>
 
-<file path=ppt/slides/slide7.xml><?xml version="1.0" encoding="utf-8"?>
+<file path=ppt/slides/slide8.xml><?xml version="1.0" encoding="utf-8"?>
 <p:sld xmlns:a="http://schemas.openxmlformats.org/drawingml/2006/main" xmlns:p="http://schemas.openxmlformats.org/presentationml/2006/main" xmlns:r="http://schemas.openxmlformats.org/officeDocument/2006/relationships">
   <p:cSld>
     <p:spTree>
@@ -17623,7 +19823,7 @@
 </p:sld>
 </file>
 
-<file path=ppt/slides/slide8.xml><?xml version="1.0" encoding="utf-8"?>
+<file path=ppt/slides/slide9.xml><?xml version="1.0" encoding="utf-8"?>
 <p:sld xmlns:a="http://schemas.openxmlformats.org/drawingml/2006/main" xmlns:p="http://schemas.openxmlformats.org/presentationml/2006/main" xmlns:r="http://schemas.openxmlformats.org/officeDocument/2006/relationships">
   <p:cSld>
     <p:spTree>
@@ -18888,1250 +21088,6 @@
                 <a:latin typeface="맑은 고딕"/>
               </a:rPr>
               <a:t>값의 유무가 모델 변덕에 좌우되지 않음</a:t>
-            </a:r>
-          </a:p>
-        </p:txBody>
-      </p:sp>
-    </p:spTree>
-  </p:cSld>
-  <p:clrMapOvr>
-    <a:masterClrMapping/>
-  </p:clrMapOvr>
-</p:sld>
-</file>
-
-<file path=ppt/slides/slide9.xml><?xml version="1.0" encoding="utf-8"?>
-<p:sld xmlns:a="http://schemas.openxmlformats.org/drawingml/2006/main" xmlns:p="http://schemas.openxmlformats.org/presentationml/2006/main" xmlns:r="http://schemas.openxmlformats.org/officeDocument/2006/relationships">
-  <p:cSld>
-    <p:spTree>
-      <p:nvGrpSpPr>
-        <p:cNvPr id="1" name=""/>
-        <p:cNvGrpSpPr/>
-        <p:nvPr/>
-      </p:nvGrpSpPr>
-      <p:grpSpPr/>
-      <p:sp>
-        <p:nvSpPr>
-          <p:cNvPr id="2" name="Rectangle 1"/>
-          <p:cNvSpPr/>
-          <p:nvPr/>
-        </p:nvSpPr>
-        <p:spPr>
-          <a:xfrm>
-            <a:off x="0" y="0"/>
-            <a:ext cx="12191695" cy="82296"/>
-          </a:xfrm>
-          <a:prstGeom prst="rect">
-            <a:avLst/>
-          </a:prstGeom>
-          <a:solidFill>
-            <a:srgbClr val="FCAF17"/>
-          </a:solidFill>
-          <a:ln>
-            <a:noFill/>
-          </a:ln>
-        </p:spPr>
-        <p:style>
-          <a:lnRef idx="1">
-            <a:schemeClr val="accent1"/>
-          </a:lnRef>
-          <a:fillRef idx="3">
-            <a:schemeClr val="accent1"/>
-          </a:fillRef>
-          <a:effectRef idx="2">
-            <a:schemeClr val="accent1"/>
-          </a:effectRef>
-          <a:fontRef idx="minor">
-            <a:schemeClr val="lt1"/>
-          </a:fontRef>
-        </p:style>
-        <p:txBody>
-          <a:bodyPr rtlCol="0" anchor="ctr"/>
-          <a:lstStyle/>
-          <a:p>
-            <a:pPr algn="ctr"/>
-          </a:p>
-        </p:txBody>
-      </p:sp>
-      <p:sp>
-        <p:nvSpPr>
-          <p:cNvPr id="3" name="TextBox 2"/>
-          <p:cNvSpPr txBox="1"/>
-          <p:nvPr/>
-        </p:nvSpPr>
-        <p:spPr>
-          <a:xfrm>
-            <a:off x="566928" y="310896"/>
-            <a:ext cx="10424160" cy="914400"/>
-          </a:xfrm>
-          <a:prstGeom prst="rect">
-            <a:avLst/>
-          </a:prstGeom>
-          <a:noFill/>
-        </p:spPr>
-        <p:txBody>
-          <a:bodyPr wrap="square">
-            <a:spAutoFit/>
-          </a:bodyPr>
-          <a:lstStyle/>
-          <a:p>
-            <a:pPr algn="l">
-              <a:spcAft>
-                <a:spcPts val="200"/>
-              </a:spcAft>
-            </a:pPr>
-            <a:r>
-              <a:rPr sz="3000" b="1">
-                <a:solidFill>
-                  <a:srgbClr val="645B4C"/>
-                </a:solidFill>
-                <a:latin typeface="맑은 고딕"/>
-              </a:rPr>
-              <a:t>핵심 기술 ②  어떤 형태로 와도 읽는다</a:t>
-            </a:r>
-          </a:p>
-          <a:p>
-            <a:pPr algn="l">
-              <a:spcAft>
-                <a:spcPts val="600"/>
-              </a:spcAft>
-            </a:pPr>
-            <a:r>
-              <a:rPr sz="1400" b="0">
-                <a:solidFill>
-                  <a:srgbClr val="6B6B6B"/>
-                </a:solidFill>
-                <a:latin typeface="맑은 고딕"/>
-              </a:rPr>
-              <a:t>텍스트 → OCR → AI 비전 단계 폴백 (필요할 때만 호출)</a:t>
-            </a:r>
-          </a:p>
-        </p:txBody>
-      </p:sp>
-      <p:sp>
-        <p:nvSpPr>
-          <p:cNvPr id="4" name="Rounded Rectangle 3"/>
-          <p:cNvSpPr/>
-          <p:nvPr/>
-        </p:nvSpPr>
-        <p:spPr>
-          <a:xfrm>
-            <a:off x="9646920" y="329184"/>
-            <a:ext cx="1965960" cy="384048"/>
-          </a:xfrm>
-          <a:prstGeom prst="roundRect">
-            <a:avLst/>
-          </a:prstGeom>
-          <a:solidFill>
-            <a:srgbClr val="FFF8DF"/>
-          </a:solidFill>
-          <a:ln>
-            <a:solidFill>
-              <a:srgbClr val="FCAF17"/>
-            </a:solidFill>
-          </a:ln>
-        </p:spPr>
-        <p:style>
-          <a:lnRef idx="1">
-            <a:schemeClr val="accent1"/>
-          </a:lnRef>
-          <a:fillRef idx="3">
-            <a:schemeClr val="accent1"/>
-          </a:fillRef>
-          <a:effectRef idx="2">
-            <a:schemeClr val="accent1"/>
-          </a:effectRef>
-          <a:fontRef idx="minor">
-            <a:schemeClr val="lt1"/>
-          </a:fontRef>
-        </p:style>
-        <p:txBody>
-          <a:bodyPr rtlCol="0" anchor="ctr" wrap="square"/>
-          <a:lstStyle/>
-          <a:p>
-            <a:pPr algn="ctr">
-              <a:spcAft>
-                <a:spcPts val="0"/>
-              </a:spcAft>
-            </a:pPr>
-            <a:r>
-              <a:rPr sz="1100" b="1">
-                <a:solidFill>
-                  <a:srgbClr val="645B4C"/>
-                </a:solidFill>
-                <a:latin typeface="맑은 고딕"/>
-              </a:rPr>
-              <a:t>기술 실현 가능성</a:t>
-            </a:r>
-          </a:p>
-        </p:txBody>
-      </p:sp>
-      <p:graphicFrame>
-        <p:nvGraphicFramePr>
-          <p:cNvPr id="5" name="Table 4"/>
-          <p:cNvGraphicFramePr>
-            <a:graphicFrameLocks noGrp="1"/>
-          </p:cNvGraphicFramePr>
-          <p:nvPr/>
-        </p:nvGraphicFramePr>
-        <p:xfrm>
-          <a:off x="566928" y="1417320"/>
-          <a:ext cx="11064240" cy="1975104"/>
-        </p:xfrm>
-        <a:graphic>
-          <a:graphicData uri="http://schemas.openxmlformats.org/drawingml/2006/table">
-            <a:tbl>
-              <a:tblPr firstRow="1" bandRow="1">
-                <a:tableStyleId>{5C22544A-7EE6-4342-B048-85BDC9FD1C3A}</a:tableStyleId>
-              </a:tblPr>
-              <a:tblGrid>
-                <a:gridCol w="3108960"/>
-                <a:gridCol w="3108960"/>
-                <a:gridCol w="2103120"/>
-                <a:gridCol w="2743200"/>
-              </a:tblGrid>
-              <a:tr h="329184">
-                <a:tc>
-                  <a:txBody>
-                    <a:bodyPr wrap="square"/>
-                    <a:lstStyle/>
-                    <a:p>
-                      <a:pPr algn="l">
-                        <a:spcAft>
-                          <a:spcPts val="0"/>
-                        </a:spcAft>
-                      </a:pPr>
-                      <a:r>
-                        <a:rPr sz="1200" b="1">
-                          <a:solidFill>
-                            <a:srgbClr val="645B4C"/>
-                          </a:solidFill>
-                          <a:latin typeface="맑은 고딕"/>
-                        </a:rPr>
-                        <a:t>서류 형태</a:t>
-                      </a:r>
-                    </a:p>
-                  </a:txBody>
-                  <a:tcPr>
-                    <a:solidFill>
-                      <a:srgbClr val="FFF8DF"/>
-                    </a:solidFill>
-                  </a:tcPr>
-                </a:tc>
-                <a:tc>
-                  <a:txBody>
-                    <a:bodyPr wrap="square"/>
-                    <a:lstStyle/>
-                    <a:p>
-                      <a:pPr algn="l">
-                        <a:spcAft>
-                          <a:spcPts val="0"/>
-                        </a:spcAft>
-                      </a:pPr>
-                      <a:r>
-                        <a:rPr sz="1200" b="1">
-                          <a:solidFill>
-                            <a:srgbClr val="645B4C"/>
-                          </a:solidFill>
-                          <a:latin typeface="맑은 고딕"/>
-                        </a:rPr>
-                        <a:t>1차 판독</a:t>
-                      </a:r>
-                    </a:p>
-                  </a:txBody>
-                  <a:tcPr>
-                    <a:solidFill>
-                      <a:srgbClr val="FFF8DF"/>
-                    </a:solidFill>
-                  </a:tcPr>
-                </a:tc>
-                <a:tc>
-                  <a:txBody>
-                    <a:bodyPr wrap="square"/>
-                    <a:lstStyle/>
-                    <a:p>
-                      <a:pPr algn="l">
-                        <a:spcAft>
-                          <a:spcPts val="0"/>
-                        </a:spcAft>
-                      </a:pPr>
-                      <a:r>
-                        <a:rPr sz="1200" b="1">
-                          <a:solidFill>
-                            <a:srgbClr val="645B4C"/>
-                          </a:solidFill>
-                          <a:latin typeface="맑은 고딕"/>
-                        </a:rPr>
-                        <a:t>폴백</a:t>
-                      </a:r>
-                    </a:p>
-                  </a:txBody>
-                  <a:tcPr>
-                    <a:solidFill>
-                      <a:srgbClr val="FFF8DF"/>
-                    </a:solidFill>
-                  </a:tcPr>
-                </a:tc>
-                <a:tc>
-                  <a:txBody>
-                    <a:bodyPr wrap="square"/>
-                    <a:lstStyle/>
-                    <a:p>
-                      <a:pPr algn="l">
-                        <a:spcAft>
-                          <a:spcPts val="0"/>
-                        </a:spcAft>
-                      </a:pPr>
-                      <a:r>
-                        <a:rPr sz="1200" b="1">
-                          <a:solidFill>
-                            <a:srgbClr val="645B4C"/>
-                          </a:solidFill>
-                          <a:latin typeface="맑은 고딕"/>
-                        </a:rPr>
-                        <a:t>실측 결과</a:t>
-                      </a:r>
-                    </a:p>
-                  </a:txBody>
-                  <a:tcPr>
-                    <a:solidFill>
-                      <a:srgbClr val="FFF8DF"/>
-                    </a:solidFill>
-                  </a:tcPr>
-                </a:tc>
-              </a:tr>
-              <a:tr h="329184">
-                <a:tc>
-                  <a:txBody>
-                    <a:bodyPr wrap="square"/>
-                    <a:lstStyle/>
-                    <a:p>
-                      <a:pPr algn="l">
-                        <a:spcAft>
-                          <a:spcPts val="0"/>
-                        </a:spcAft>
-                      </a:pPr>
-                      <a:r>
-                        <a:rPr sz="1100" b="0">
-                          <a:solidFill>
-                            <a:srgbClr val="2B2B2B"/>
-                          </a:solidFill>
-                          <a:latin typeface="맑은 고딕"/>
-                        </a:rPr>
-                        <a:t>전자 PDF</a:t>
-                      </a:r>
-                    </a:p>
-                  </a:txBody>
-                  <a:tcPr>
-                    <a:solidFill>
-                      <a:srgbClr val="FFFFFF"/>
-                    </a:solidFill>
-                  </a:tcPr>
-                </a:tc>
-                <a:tc>
-                  <a:txBody>
-                    <a:bodyPr wrap="square"/>
-                    <a:lstStyle/>
-                    <a:p>
-                      <a:pPr algn="l">
-                        <a:spcAft>
-                          <a:spcPts val="0"/>
-                        </a:spcAft>
-                      </a:pPr>
-                      <a:r>
-                        <a:rPr sz="1100" b="0">
-                          <a:solidFill>
-                            <a:srgbClr val="2B2B2B"/>
-                          </a:solidFill>
-                          <a:latin typeface="맑은 고딕"/>
-                        </a:rPr>
-                        <a:t>텍스트 레이어</a:t>
-                      </a:r>
-                    </a:p>
-                  </a:txBody>
-                  <a:tcPr>
-                    <a:solidFill>
-                      <a:srgbClr val="FFFFFF"/>
-                    </a:solidFill>
-                  </a:tcPr>
-                </a:tc>
-                <a:tc>
-                  <a:txBody>
-                    <a:bodyPr wrap="square"/>
-                    <a:lstStyle/>
-                    <a:p>
-                      <a:pPr algn="l">
-                        <a:spcAft>
-                          <a:spcPts val="0"/>
-                        </a:spcAft>
-                      </a:pPr>
-                      <a:r>
-                        <a:rPr sz="1100" b="0">
-                          <a:solidFill>
-                            <a:srgbClr val="2B2B2B"/>
-                          </a:solidFill>
-                          <a:latin typeface="맑은 고딕"/>
-                        </a:rPr>
-                        <a:t>—</a:t>
-                      </a:r>
-                    </a:p>
-                  </a:txBody>
-                  <a:tcPr>
-                    <a:solidFill>
-                      <a:srgbClr val="FFFFFF"/>
-                    </a:solidFill>
-                  </a:tcPr>
-                </a:tc>
-                <a:tc>
-                  <a:txBody>
-                    <a:bodyPr wrap="square"/>
-                    <a:lstStyle/>
-                    <a:p>
-                      <a:pPr algn="l">
-                        <a:spcAft>
-                          <a:spcPts val="0"/>
-                        </a:spcAft>
-                      </a:pPr>
-                      <a:r>
-                        <a:rPr sz="1100" b="0">
-                          <a:solidFill>
-                            <a:srgbClr val="2B2B2B"/>
-                          </a:solidFill>
-                          <a:latin typeface="맑은 고딕"/>
-                        </a:rPr>
-                        <a:t>정상</a:t>
-                      </a:r>
-                    </a:p>
-                  </a:txBody>
-                  <a:tcPr>
-                    <a:solidFill>
-                      <a:srgbClr val="FFFFFF"/>
-                    </a:solidFill>
-                  </a:tcPr>
-                </a:tc>
-              </a:tr>
-              <a:tr h="329184">
-                <a:tc>
-                  <a:txBody>
-                    <a:bodyPr wrap="square"/>
-                    <a:lstStyle/>
-                    <a:p>
-                      <a:pPr algn="l">
-                        <a:spcAft>
-                          <a:spcPts val="0"/>
-                        </a:spcAft>
-                      </a:pPr>
-                      <a:r>
-                        <a:rPr sz="1100" b="0">
-                          <a:solidFill>
-                            <a:srgbClr val="2B2B2B"/>
-                          </a:solidFill>
-                          <a:latin typeface="맑은 고딕"/>
-                        </a:rPr>
-                        <a:t>스캔 PDF · 종이 촬영</a:t>
-                      </a:r>
-                    </a:p>
-                  </a:txBody>
-                  <a:tcPr>
-                    <a:solidFill>
-                      <a:srgbClr val="FFFFFF"/>
-                    </a:solidFill>
-                  </a:tcPr>
-                </a:tc>
-                <a:tc>
-                  <a:txBody>
-                    <a:bodyPr wrap="square"/>
-                    <a:lstStyle/>
-                    <a:p>
-                      <a:pPr algn="l">
-                        <a:spcAft>
-                          <a:spcPts val="0"/>
-                        </a:spcAft>
-                      </a:pPr>
-                      <a:r>
-                        <a:rPr sz="1100" b="0">
-                          <a:solidFill>
-                            <a:srgbClr val="2B2B2B"/>
-                          </a:solidFill>
-                          <a:latin typeface="맑은 고딕"/>
-                        </a:rPr>
-                        <a:t>Tesseract OCR(한국어)</a:t>
-                      </a:r>
-                    </a:p>
-                  </a:txBody>
-                  <a:tcPr>
-                    <a:solidFill>
-                      <a:srgbClr val="FFFFFF"/>
-                    </a:solidFill>
-                  </a:tcPr>
-                </a:tc>
-                <a:tc>
-                  <a:txBody>
-                    <a:bodyPr wrap="square"/>
-                    <a:lstStyle/>
-                    <a:p>
-                      <a:pPr algn="l">
-                        <a:spcAft>
-                          <a:spcPts val="0"/>
-                        </a:spcAft>
-                      </a:pPr>
-                      <a:r>
-                        <a:rPr sz="1100" b="0">
-                          <a:solidFill>
-                            <a:srgbClr val="2B2B2B"/>
-                          </a:solidFill>
-                          <a:latin typeface="맑은 고딕"/>
-                        </a:rPr>
-                        <a:t>AI 비전</a:t>
-                      </a:r>
-                    </a:p>
-                  </a:txBody>
-                  <a:tcPr>
-                    <a:solidFill>
-                      <a:srgbClr val="FFFFFF"/>
-                    </a:solidFill>
-                  </a:tcPr>
-                </a:tc>
-                <a:tc>
-                  <a:txBody>
-                    <a:bodyPr wrap="square"/>
-                    <a:lstStyle/>
-                    <a:p>
-                      <a:pPr algn="l">
-                        <a:spcAft>
-                          <a:spcPts val="0"/>
-                        </a:spcAft>
-                      </a:pPr>
-                      <a:r>
-                        <a:rPr sz="1100" b="0">
-                          <a:solidFill>
-                            <a:srgbClr val="2B2B2B"/>
-                          </a:solidFill>
-                          <a:latin typeface="맑은 고딕"/>
-                        </a:rPr>
-                        <a:t>분류·서명·날짜 모두 원본과 동일</a:t>
-                      </a:r>
-                    </a:p>
-                  </a:txBody>
-                  <a:tcPr>
-                    <a:solidFill>
-                      <a:srgbClr val="FFFFFF"/>
-                    </a:solidFill>
-                  </a:tcPr>
-                </a:tc>
-              </a:tr>
-              <a:tr h="329184">
-                <a:tc>
-                  <a:txBody>
-                    <a:bodyPr wrap="square"/>
-                    <a:lstStyle/>
-                    <a:p>
-                      <a:pPr algn="l">
-                        <a:spcAft>
-                          <a:spcPts val="0"/>
-                        </a:spcAft>
-                      </a:pPr>
-                      <a:r>
-                        <a:rPr sz="1100" b="0">
-                          <a:solidFill>
-                            <a:srgbClr val="2B2B2B"/>
-                          </a:solidFill>
-                          <a:latin typeface="맑은 고딕"/>
-                        </a:rPr>
-                        <a:t>모바일 다크모드 스크린샷</a:t>
-                      </a:r>
-                    </a:p>
-                  </a:txBody>
-                  <a:tcPr>
-                    <a:solidFill>
-                      <a:srgbClr val="FFFFFF"/>
-                    </a:solidFill>
-                  </a:tcPr>
-                </a:tc>
-                <a:tc>
-                  <a:txBody>
-                    <a:bodyPr wrap="square"/>
-                    <a:lstStyle/>
-                    <a:p>
-                      <a:pPr algn="l">
-                        <a:spcAft>
-                          <a:spcPts val="0"/>
-                        </a:spcAft>
-                      </a:pPr>
-                      <a:r>
-                        <a:rPr sz="1100" b="0">
-                          <a:solidFill>
-                            <a:srgbClr val="2B2B2B"/>
-                          </a:solidFill>
-                          <a:latin typeface="맑은 고딕"/>
-                        </a:rPr>
-                        <a:t>OCR 오독('투자성향'→'투자성양')</a:t>
-                      </a:r>
-                    </a:p>
-                  </a:txBody>
-                  <a:tcPr>
-                    <a:solidFill>
-                      <a:srgbClr val="FFFFFF"/>
-                    </a:solidFill>
-                  </a:tcPr>
-                </a:tc>
-                <a:tc>
-                  <a:txBody>
-                    <a:bodyPr wrap="square"/>
-                    <a:lstStyle/>
-                    <a:p>
-                      <a:pPr algn="l">
-                        <a:spcAft>
-                          <a:spcPts val="0"/>
-                        </a:spcAft>
-                      </a:pPr>
-                      <a:r>
-                        <a:rPr sz="1100" b="0">
-                          <a:solidFill>
-                            <a:srgbClr val="2B2B2B"/>
-                          </a:solidFill>
-                          <a:latin typeface="맑은 고딕"/>
-                        </a:rPr>
-                        <a:t>AI 비전</a:t>
-                      </a:r>
-                    </a:p>
-                  </a:txBody>
-                  <a:tcPr>
-                    <a:solidFill>
-                      <a:srgbClr val="FFFFFF"/>
-                    </a:solidFill>
-                  </a:tcPr>
-                </a:tc>
-                <a:tc>
-                  <a:txBody>
-                    <a:bodyPr wrap="square"/>
-                    <a:lstStyle/>
-                    <a:p>
-                      <a:pPr algn="l">
-                        <a:spcAft>
-                          <a:spcPts val="0"/>
-                        </a:spcAft>
-                      </a:pPr>
-                      <a:r>
-                        <a:rPr sz="1100" b="0">
-                          <a:solidFill>
-                            <a:srgbClr val="2B2B2B"/>
-                          </a:solidFill>
-                          <a:latin typeface="맑은 고딕"/>
-                        </a:rPr>
-                        <a:t>'적극투자형' 정확 판독</a:t>
-                      </a:r>
-                    </a:p>
-                  </a:txBody>
-                  <a:tcPr>
-                    <a:solidFill>
-                      <a:srgbClr val="FFFFFF"/>
-                    </a:solidFill>
-                  </a:tcPr>
-                </a:tc>
-              </a:tr>
-              <a:tr h="329184">
-                <a:tc>
-                  <a:txBody>
-                    <a:bodyPr wrap="square"/>
-                    <a:lstStyle/>
-                    <a:p>
-                      <a:pPr algn="l">
-                        <a:spcAft>
-                          <a:spcPts val="0"/>
-                        </a:spcAft>
-                      </a:pPr>
-                      <a:r>
-                        <a:rPr sz="1100" b="0">
-                          <a:solidFill>
-                            <a:srgbClr val="2B2B2B"/>
-                          </a:solidFill>
-                          <a:latin typeface="맑은 고딕"/>
-                        </a:rPr>
-                        <a:t>위험등급이 표 체크(✓)로만 표시</a:t>
-                      </a:r>
-                    </a:p>
-                  </a:txBody>
-                  <a:tcPr>
-                    <a:solidFill>
-                      <a:srgbClr val="FFFFFF"/>
-                    </a:solidFill>
-                  </a:tcPr>
-                </a:tc>
-                <a:tc>
-                  <a:txBody>
-                    <a:bodyPr wrap="square"/>
-                    <a:lstStyle/>
-                    <a:p>
-                      <a:pPr algn="l">
-                        <a:spcAft>
-                          <a:spcPts val="0"/>
-                        </a:spcAft>
-                      </a:pPr>
-                      <a:r>
-                        <a:rPr sz="1100" b="0">
-                          <a:solidFill>
-                            <a:srgbClr val="2B2B2B"/>
-                          </a:solidFill>
-                          <a:latin typeface="맑은 고딕"/>
-                        </a:rPr>
-                        <a:t>텍스트 공란</a:t>
-                      </a:r>
-                    </a:p>
-                  </a:txBody>
-                  <a:tcPr>
-                    <a:solidFill>
-                      <a:srgbClr val="FFFFFF"/>
-                    </a:solidFill>
-                  </a:tcPr>
-                </a:tc>
-                <a:tc>
-                  <a:txBody>
-                    <a:bodyPr wrap="square"/>
-                    <a:lstStyle/>
-                    <a:p>
-                      <a:pPr algn="l">
-                        <a:spcAft>
-                          <a:spcPts val="0"/>
-                        </a:spcAft>
-                      </a:pPr>
-                      <a:r>
-                        <a:rPr sz="1100" b="0">
-                          <a:solidFill>
-                            <a:srgbClr val="2B2B2B"/>
-                          </a:solidFill>
-                          <a:latin typeface="맑은 고딕"/>
-                        </a:rPr>
-                        <a:t>AI 비전</a:t>
-                      </a:r>
-                    </a:p>
-                  </a:txBody>
-                  <a:tcPr>
-                    <a:solidFill>
-                      <a:srgbClr val="FFFFFF"/>
-                    </a:solidFill>
-                  </a:tcPr>
-                </a:tc>
-                <a:tc>
-                  <a:txBody>
-                    <a:bodyPr wrap="square"/>
-                    <a:lstStyle/>
-                    <a:p>
-                      <a:pPr algn="l">
-                        <a:spcAft>
-                          <a:spcPts val="0"/>
-                        </a:spcAft>
-                      </a:pPr>
-                      <a:r>
-                        <a:rPr sz="1100" b="0">
-                          <a:solidFill>
-                            <a:srgbClr val="2B2B2B"/>
-                          </a:solidFill>
-                          <a:latin typeface="맑은 고딕"/>
-                        </a:rPr>
-                        <a:t>4등급·6등급 정확 판독</a:t>
-                      </a:r>
-                    </a:p>
-                  </a:txBody>
-                  <a:tcPr>
-                    <a:solidFill>
-                      <a:srgbClr val="FFFFFF"/>
-                    </a:solidFill>
-                  </a:tcPr>
-                </a:tc>
-              </a:tr>
-              <a:tr h="329184">
-                <a:tc>
-                  <a:txBody>
-                    <a:bodyPr wrap="square"/>
-                    <a:lstStyle/>
-                    <a:p>
-                      <a:pPr algn="l">
-                        <a:spcAft>
-                          <a:spcPts val="0"/>
-                        </a:spcAft>
-                      </a:pPr>
-                      <a:r>
-                        <a:rPr sz="1100" b="0">
-                          <a:solidFill>
-                            <a:srgbClr val="2B2B2B"/>
-                          </a:solidFill>
-                          <a:latin typeface="맑은 고딕"/>
-                        </a:rPr>
-                        <a:t>계약일이 표에 분리 기재</a:t>
-                      </a:r>
-                    </a:p>
-                  </a:txBody>
-                  <a:tcPr>
-                    <a:solidFill>
-                      <a:srgbClr val="FFFFFF"/>
-                    </a:solidFill>
-                  </a:tcPr>
-                </a:tc>
-                <a:tc>
-                  <a:txBody>
-                    <a:bodyPr wrap="square"/>
-                    <a:lstStyle/>
-                    <a:p>
-                      <a:pPr algn="l">
-                        <a:spcAft>
-                          <a:spcPts val="0"/>
-                        </a:spcAft>
-                      </a:pPr>
-                      <a:r>
-                        <a:rPr sz="1100" b="0">
-                          <a:solidFill>
-                            <a:srgbClr val="2B2B2B"/>
-                          </a:solidFill>
-                          <a:latin typeface="맑은 고딕"/>
-                        </a:rPr>
-                        <a:t>'년 월 일 24 07 2026'</a:t>
-                      </a:r>
-                    </a:p>
-                  </a:txBody>
-                  <a:tcPr>
-                    <a:solidFill>
-                      <a:srgbClr val="FFFFFF"/>
-                    </a:solidFill>
-                  </a:tcPr>
-                </a:tc>
-                <a:tc>
-                  <a:txBody>
-                    <a:bodyPr wrap="square"/>
-                    <a:lstStyle/>
-                    <a:p>
-                      <a:pPr algn="l">
-                        <a:spcAft>
-                          <a:spcPts val="0"/>
-                        </a:spcAft>
-                      </a:pPr>
-                      <a:r>
-                        <a:rPr sz="1100" b="0">
-                          <a:solidFill>
-                            <a:srgbClr val="2B2B2B"/>
-                          </a:solidFill>
-                          <a:latin typeface="맑은 고딕"/>
-                        </a:rPr>
-                        <a:t>AI 비전 + 원문 대조</a:t>
-                      </a:r>
-                    </a:p>
-                  </a:txBody>
-                  <a:tcPr>
-                    <a:solidFill>
-                      <a:srgbClr val="FFFFFF"/>
-                    </a:solidFill>
-                  </a:tcPr>
-                </a:tc>
-                <a:tc>
-                  <a:txBody>
-                    <a:bodyPr wrap="square"/>
-                    <a:lstStyle/>
-                    <a:p>
-                      <a:pPr algn="l">
-                        <a:spcAft>
-                          <a:spcPts val="0"/>
-                        </a:spcAft>
-                      </a:pPr>
-                      <a:r>
-                        <a:rPr sz="1100" b="0">
-                          <a:solidFill>
-                            <a:srgbClr val="2B2B2B"/>
-                          </a:solidFill>
-                          <a:latin typeface="맑은 고딕"/>
-                        </a:rPr>
-                        <a:t>2026-07-24 채택</a:t>
-                      </a:r>
-                    </a:p>
-                  </a:txBody>
-                  <a:tcPr>
-                    <a:solidFill>
-                      <a:srgbClr val="FFFFFF"/>
-                    </a:solidFill>
-                  </a:tcPr>
-                </a:tc>
-              </a:tr>
-            </a:tbl>
-          </a:graphicData>
-        </a:graphic>
-      </p:graphicFrame>
-      <p:sp>
-        <p:nvSpPr>
-          <p:cNvPr id="6" name="Rounded Rectangle 5"/>
-          <p:cNvSpPr/>
-          <p:nvPr/>
-        </p:nvSpPr>
-        <p:spPr>
-          <a:xfrm>
-            <a:off x="566928" y="4297680"/>
-            <a:ext cx="5394960" cy="1828800"/>
-          </a:xfrm>
-          <a:prstGeom prst="roundRect">
-            <a:avLst/>
-          </a:prstGeom>
-          <a:solidFill>
-            <a:srgbClr val="FFFFFF"/>
-          </a:solidFill>
-          <a:ln>
-            <a:solidFill>
-              <a:srgbClr val="E6E0D4"/>
-            </a:solidFill>
-          </a:ln>
-        </p:spPr>
-        <p:style>
-          <a:lnRef idx="1">
-            <a:schemeClr val="accent1"/>
-          </a:lnRef>
-          <a:fillRef idx="3">
-            <a:schemeClr val="accent1"/>
-          </a:fillRef>
-          <a:effectRef idx="2">
-            <a:schemeClr val="accent1"/>
-          </a:effectRef>
-          <a:fontRef idx="minor">
-            <a:schemeClr val="lt1"/>
-          </a:fontRef>
-        </p:style>
-        <p:txBody>
-          <a:bodyPr rtlCol="0" anchor="ctr"/>
-          <a:lstStyle/>
-          <a:p>
-            <a:pPr algn="ctr"/>
-          </a:p>
-        </p:txBody>
-      </p:sp>
-      <p:sp>
-        <p:nvSpPr>
-          <p:cNvPr id="7" name="Rectangle 6"/>
-          <p:cNvSpPr/>
-          <p:nvPr/>
-        </p:nvSpPr>
-        <p:spPr>
-          <a:xfrm>
-            <a:off x="566928" y="4297680"/>
-            <a:ext cx="54864" cy="1828800"/>
-          </a:xfrm>
-          <a:prstGeom prst="rect">
-            <a:avLst/>
-          </a:prstGeom>
-          <a:solidFill>
-            <a:srgbClr val="2E7D32"/>
-          </a:solidFill>
-          <a:ln>
-            <a:noFill/>
-          </a:ln>
-        </p:spPr>
-        <p:style>
-          <a:lnRef idx="1">
-            <a:schemeClr val="accent1"/>
-          </a:lnRef>
-          <a:fillRef idx="3">
-            <a:schemeClr val="accent1"/>
-          </a:fillRef>
-          <a:effectRef idx="2">
-            <a:schemeClr val="accent1"/>
-          </a:effectRef>
-          <a:fontRef idx="minor">
-            <a:schemeClr val="lt1"/>
-          </a:fontRef>
-        </p:style>
-        <p:txBody>
-          <a:bodyPr rtlCol="0" anchor="ctr"/>
-          <a:lstStyle/>
-          <a:p>
-            <a:pPr algn="ctr"/>
-          </a:p>
-        </p:txBody>
-      </p:sp>
-      <p:sp>
-        <p:nvSpPr>
-          <p:cNvPr id="8" name="TextBox 7"/>
-          <p:cNvSpPr txBox="1"/>
-          <p:nvPr/>
-        </p:nvSpPr>
-        <p:spPr>
-          <a:xfrm>
-            <a:off x="822960" y="4443984"/>
-            <a:ext cx="4937760" cy="1554480"/>
-          </a:xfrm>
-          <a:prstGeom prst="rect">
-            <a:avLst/>
-          </a:prstGeom>
-          <a:noFill/>
-        </p:spPr>
-        <p:txBody>
-          <a:bodyPr wrap="square">
-            <a:spAutoFit/>
-          </a:bodyPr>
-          <a:lstStyle/>
-          <a:p>
-            <a:pPr algn="l">
-              <a:spcAft>
-                <a:spcPts val="700"/>
-              </a:spcAft>
-            </a:pPr>
-            <a:r>
-              <a:rPr sz="1500" b="1">
-                <a:solidFill>
-                  <a:srgbClr val="645B4C"/>
-                </a:solidFill>
-                <a:latin typeface="맑은 고딕"/>
-              </a:rPr>
-              <a:t>비용을 쓰지 않는 설계</a:t>
-            </a:r>
-          </a:p>
-          <a:p>
-            <a:pPr algn="l">
-              <a:spcAft>
-                <a:spcPts val="500"/>
-              </a:spcAft>
-            </a:pPr>
-            <a:r>
-              <a:rPr sz="1200" b="0">
-                <a:solidFill>
-                  <a:srgbClr val="2B2B2B"/>
-                </a:solidFill>
-                <a:latin typeface="맑은 고딕"/>
-              </a:rPr>
-              <a:t>비전은 앞 단계가 실패했을 때만 호출</a:t>
-            </a:r>
-          </a:p>
-          <a:p>
-            <a:pPr algn="l">
-              <a:spcAft>
-                <a:spcPts val="500"/>
-              </a:spcAft>
-            </a:pPr>
-            <a:r>
-              <a:rPr sz="1200" b="0">
-                <a:solidFill>
-                  <a:srgbClr val="2B2B2B"/>
-                </a:solidFill>
-                <a:latin typeface="맑은 고딕"/>
-              </a:rPr>
-              <a:t>한 페이지에 필요한 항목을 한 번에 질문</a:t>
-            </a:r>
-          </a:p>
-          <a:p>
-            <a:pPr algn="l">
-              <a:spcAft>
-                <a:spcPts val="500"/>
-              </a:spcAft>
-            </a:pPr>
-            <a:r>
-              <a:rPr sz="1200" b="0">
-                <a:solidFill>
-                  <a:srgbClr val="2B2B2B"/>
-                </a:solidFill>
-                <a:latin typeface="맑은 고딕"/>
-              </a:rPr>
-              <a:t>결과 캐시로 같은 서류 재검증은 0원</a:t>
-            </a:r>
-          </a:p>
-          <a:p>
-            <a:pPr algn="l">
-              <a:spcAft>
-                <a:spcPts val="500"/>
-              </a:spcAft>
-            </a:pPr>
-            <a:r>
-              <a:rPr sz="1200" b="0">
-                <a:solidFill>
-                  <a:srgbClr val="2B2B2B"/>
-                </a:solidFill>
-                <a:latin typeface="맑은 고딕"/>
-              </a:rPr>
-              <a:t>실측: 패키지 1건당 약 76원 (모델 승격 0회)</a:t>
-            </a:r>
-          </a:p>
-        </p:txBody>
-      </p:sp>
-      <p:sp>
-        <p:nvSpPr>
-          <p:cNvPr id="9" name="Rounded Rectangle 8"/>
-          <p:cNvSpPr/>
-          <p:nvPr/>
-        </p:nvSpPr>
-        <p:spPr>
-          <a:xfrm>
-            <a:off x="6172200" y="4297680"/>
-            <a:ext cx="5458968" cy="1828800"/>
-          </a:xfrm>
-          <a:prstGeom prst="roundRect">
-            <a:avLst/>
-          </a:prstGeom>
-          <a:solidFill>
-            <a:srgbClr val="FFFFFF"/>
-          </a:solidFill>
-          <a:ln>
-            <a:solidFill>
-              <a:srgbClr val="E6E0D4"/>
-            </a:solidFill>
-          </a:ln>
-        </p:spPr>
-        <p:style>
-          <a:lnRef idx="1">
-            <a:schemeClr val="accent1"/>
-          </a:lnRef>
-          <a:fillRef idx="3">
-            <a:schemeClr val="accent1"/>
-          </a:fillRef>
-          <a:effectRef idx="2">
-            <a:schemeClr val="accent1"/>
-          </a:effectRef>
-          <a:fontRef idx="minor">
-            <a:schemeClr val="lt1"/>
-          </a:fontRef>
-        </p:style>
-        <p:txBody>
-          <a:bodyPr rtlCol="0" anchor="ctr"/>
-          <a:lstStyle/>
-          <a:p>
-            <a:pPr algn="ctr"/>
-          </a:p>
-        </p:txBody>
-      </p:sp>
-      <p:sp>
-        <p:nvSpPr>
-          <p:cNvPr id="10" name="Rectangle 9"/>
-          <p:cNvSpPr/>
-          <p:nvPr/>
-        </p:nvSpPr>
-        <p:spPr>
-          <a:xfrm>
-            <a:off x="6172200" y="4297680"/>
-            <a:ext cx="54864" cy="1828800"/>
-          </a:xfrm>
-          <a:prstGeom prst="rect">
-            <a:avLst/>
-          </a:prstGeom>
-          <a:solidFill>
-            <a:srgbClr val="2E7D32"/>
-          </a:solidFill>
-          <a:ln>
-            <a:noFill/>
-          </a:ln>
-        </p:spPr>
-        <p:style>
-          <a:lnRef idx="1">
-            <a:schemeClr val="accent1"/>
-          </a:lnRef>
-          <a:fillRef idx="3">
-            <a:schemeClr val="accent1"/>
-          </a:fillRef>
-          <a:effectRef idx="2">
-            <a:schemeClr val="accent1"/>
-          </a:effectRef>
-          <a:fontRef idx="minor">
-            <a:schemeClr val="lt1"/>
-          </a:fontRef>
-        </p:style>
-        <p:txBody>
-          <a:bodyPr rtlCol="0" anchor="ctr"/>
-          <a:lstStyle/>
-          <a:p>
-            <a:pPr algn="ctr"/>
-          </a:p>
-        </p:txBody>
-      </p:sp>
-      <p:sp>
-        <p:nvSpPr>
-          <p:cNvPr id="11" name="TextBox 10"/>
-          <p:cNvSpPr txBox="1"/>
-          <p:nvPr/>
-        </p:nvSpPr>
-        <p:spPr>
-          <a:xfrm>
-            <a:off x="6428232" y="4443984"/>
-            <a:ext cx="5001768" cy="1554480"/>
-          </a:xfrm>
-          <a:prstGeom prst="rect">
-            <a:avLst/>
-          </a:prstGeom>
-          <a:noFill/>
-        </p:spPr>
-        <p:txBody>
-          <a:bodyPr wrap="square">
-            <a:spAutoFit/>
-          </a:bodyPr>
-          <a:lstStyle/>
-          <a:p>
-            <a:pPr algn="l">
-              <a:spcAft>
-                <a:spcPts val="700"/>
-              </a:spcAft>
-            </a:pPr>
-            <a:r>
-              <a:rPr sz="1500" b="1">
-                <a:solidFill>
-                  <a:srgbClr val="645B4C"/>
-                </a:solidFill>
-                <a:latin typeface="맑은 고딕"/>
-              </a:rPr>
-              <a:t>개인정보 최소화</a:t>
-            </a:r>
-          </a:p>
-          <a:p>
-            <a:pPr algn="l">
-              <a:spcAft>
-                <a:spcPts val="500"/>
-              </a:spcAft>
-            </a:pPr>
-            <a:r>
-              <a:rPr sz="1200" b="0">
-                <a:solidFill>
-                  <a:srgbClr val="2B2B2B"/>
-                </a:solidFill>
-                <a:latin typeface="맑은 고딕"/>
-              </a:rPr>
-              <a:t>생년월일·계좌번호는 애초에 추출하지 않음</a:t>
-            </a:r>
-          </a:p>
-          <a:p>
-            <a:pPr algn="l">
-              <a:spcAft>
-                <a:spcPts val="500"/>
-              </a:spcAft>
-            </a:pPr>
-            <a:r>
-              <a:rPr sz="1200" b="0">
-                <a:solidFill>
-                  <a:srgbClr val="2B2B2B"/>
-                </a:solidFill>
-                <a:latin typeface="맑은 고딕"/>
-              </a:rPr>
-              <a:t>비전 프롬프트에서 개인정보 출력을 금지</a:t>
-            </a:r>
-          </a:p>
-          <a:p>
-            <a:pPr algn="l">
-              <a:spcAft>
-                <a:spcPts val="500"/>
-              </a:spcAft>
-            </a:pPr>
-            <a:r>
-              <a:rPr sz="1200" b="0">
-                <a:solidFill>
-                  <a:srgbClr val="2B2B2B"/>
-                </a:solidFill>
-                <a:latin typeface="맑은 고딕"/>
-              </a:rPr>
-              <a:t>원본 파일은 디스크에 저장하지 않음</a:t>
-            </a:r>
-          </a:p>
-          <a:p>
-            <a:pPr algn="l">
-              <a:spcAft>
-                <a:spcPts val="500"/>
-              </a:spcAft>
-            </a:pPr>
-            <a:r>
-              <a:rPr sz="1200" b="0">
-                <a:solidFill>
-                  <a:srgbClr val="2B2B2B"/>
-                </a:solidFill>
-                <a:latin typeface="맑은 고딕"/>
-              </a:rPr>
-              <a:t>판독 캐시 즉시 삭제 기능 제공</a:t>
             </a:r>
           </a:p>
         </p:txBody>

--- a/docs/기술설명서_초안.pptx
+++ b/docs/기술설명서_초안.pptx
@@ -23,6 +23,8 @@
     <p:sldId id="271" r:id="rId22"/>
     <p:sldId id="272" r:id="rId23"/>
     <p:sldId id="273" r:id="rId24"/>
+    <p:sldId id="274" r:id="rId25"/>
+    <p:sldId id="275" r:id="rId26"/>
   </p:sldIdLst>
   <p:sldSz cx="12191695" cy="6858000" type="screen4x3"/>
   <p:notesSz cx="6858000" cy="9144000"/>
@@ -3369,6 +3371,1283 @@
                 </a:solidFill>
                 <a:latin typeface="맑은 고딕"/>
               </a:rPr>
+              <a:t>핵심 기술 ①  AI가 지어낸 값을 판정에 쓰지 않는다</a:t>
+            </a:r>
+          </a:p>
+          <a:p>
+            <a:pPr algn="l">
+              <a:spcAft>
+                <a:spcPts val="600"/>
+              </a:spcAft>
+            </a:pPr>
+            <a:r>
+              <a:rPr sz="1400" b="0">
+                <a:solidFill>
+                  <a:srgbClr val="6B6B6B"/>
+                </a:solidFill>
+                <a:latin typeface="맑은 고딕"/>
+              </a:rPr>
+              <a:t>실물 서류에서 실제로 발생한 오류와, 이를 막은 방식</a:t>
+            </a:r>
+          </a:p>
+        </p:txBody>
+      </p:sp>
+      <p:sp>
+        <p:nvSpPr>
+          <p:cNvPr id="4" name="Rounded Rectangle 3"/>
+          <p:cNvSpPr/>
+          <p:nvPr/>
+        </p:nvSpPr>
+        <p:spPr>
+          <a:xfrm>
+            <a:off x="9646920" y="329184"/>
+            <a:ext cx="1965960" cy="384048"/>
+          </a:xfrm>
+          <a:prstGeom prst="roundRect">
+            <a:avLst/>
+          </a:prstGeom>
+          <a:solidFill>
+            <a:srgbClr val="FFF8DF"/>
+          </a:solidFill>
+          <a:ln>
+            <a:solidFill>
+              <a:srgbClr val="FCAF17"/>
+            </a:solidFill>
+          </a:ln>
+        </p:spPr>
+        <p:style>
+          <a:lnRef idx="1">
+            <a:schemeClr val="accent1"/>
+          </a:lnRef>
+          <a:fillRef idx="3">
+            <a:schemeClr val="accent1"/>
+          </a:fillRef>
+          <a:effectRef idx="2">
+            <a:schemeClr val="accent1"/>
+          </a:effectRef>
+          <a:fontRef idx="minor">
+            <a:schemeClr val="lt1"/>
+          </a:fontRef>
+        </p:style>
+        <p:txBody>
+          <a:bodyPr rtlCol="0" anchor="ctr" wrap="square"/>
+          <a:lstStyle/>
+          <a:p>
+            <a:pPr algn="ctr">
+              <a:spcAft>
+                <a:spcPts val="0"/>
+              </a:spcAft>
+            </a:pPr>
+            <a:r>
+              <a:rPr sz="1100" b="1">
+                <a:solidFill>
+                  <a:srgbClr val="645B4C"/>
+                </a:solidFill>
+                <a:latin typeface="맑은 고딕"/>
+              </a:rPr>
+              <a:t>기술 적정성</a:t>
+            </a:r>
+          </a:p>
+        </p:txBody>
+      </p:sp>
+      <p:graphicFrame>
+        <p:nvGraphicFramePr>
+          <p:cNvPr id="5" name="Table 4"/>
+          <p:cNvGraphicFramePr>
+            <a:graphicFrameLocks noGrp="1"/>
+          </p:cNvGraphicFramePr>
+          <p:nvPr/>
+        </p:nvGraphicFramePr>
+        <p:xfrm>
+          <a:off x="566928" y="1417320"/>
+          <a:ext cx="11064240" cy="1645920"/>
+        </p:xfrm>
+        <a:graphic>
+          <a:graphicData uri="http://schemas.openxmlformats.org/drawingml/2006/table">
+            <a:tbl>
+              <a:tblPr firstRow="1" bandRow="1">
+                <a:tableStyleId>{5C22544A-7EE6-4342-B048-85BDC9FD1C3A}</a:tableStyleId>
+              </a:tblPr>
+              <a:tblGrid>
+                <a:gridCol w="3017520"/>
+                <a:gridCol w="2834640"/>
+                <a:gridCol w="3200400"/>
+                <a:gridCol w="2011680"/>
+              </a:tblGrid>
+              <a:tr h="329184">
+                <a:tc>
+                  <a:txBody>
+                    <a:bodyPr wrap="square"/>
+                    <a:lstStyle/>
+                    <a:p>
+                      <a:pPr algn="l">
+                        <a:spcAft>
+                          <a:spcPts val="0"/>
+                        </a:spcAft>
+                      </a:pPr>
+                      <a:r>
+                        <a:rPr sz="1200" b="1">
+                          <a:solidFill>
+                            <a:srgbClr val="645B4C"/>
+                          </a:solidFill>
+                          <a:latin typeface="맑은 고딕"/>
+                        </a:rPr>
+                        <a:t>실제 발생한 오류</a:t>
+                      </a:r>
+                    </a:p>
+                  </a:txBody>
+                  <a:tcPr>
+                    <a:solidFill>
+                      <a:srgbClr val="FFF8DF"/>
+                    </a:solidFill>
+                  </a:tcPr>
+                </a:tc>
+                <a:tc>
+                  <a:txBody>
+                    <a:bodyPr wrap="square"/>
+                    <a:lstStyle/>
+                    <a:p>
+                      <a:pPr algn="l">
+                        <a:spcAft>
+                          <a:spcPts val="0"/>
+                        </a:spcAft>
+                      </a:pPr>
+                      <a:r>
+                        <a:rPr sz="1200" b="1">
+                          <a:solidFill>
+                            <a:srgbClr val="645B4C"/>
+                          </a:solidFill>
+                          <a:latin typeface="맑은 고딕"/>
+                        </a:rPr>
+                        <a:t>원문</a:t>
+                      </a:r>
+                    </a:p>
+                  </a:txBody>
+                  <a:tcPr>
+                    <a:solidFill>
+                      <a:srgbClr val="FFF8DF"/>
+                    </a:solidFill>
+                  </a:tcPr>
+                </a:tc>
+                <a:tc>
+                  <a:txBody>
+                    <a:bodyPr wrap="square"/>
+                    <a:lstStyle/>
+                    <a:p>
+                      <a:pPr algn="l">
+                        <a:spcAft>
+                          <a:spcPts val="0"/>
+                        </a:spcAft>
+                      </a:pPr>
+                      <a:r>
+                        <a:rPr sz="1200" b="1">
+                          <a:solidFill>
+                            <a:srgbClr val="645B4C"/>
+                          </a:solidFill>
+                          <a:latin typeface="맑은 고딕"/>
+                        </a:rPr>
+                        <a:t>방어 장치</a:t>
+                      </a:r>
+                    </a:p>
+                  </a:txBody>
+                  <a:tcPr>
+                    <a:solidFill>
+                      <a:srgbClr val="FFF8DF"/>
+                    </a:solidFill>
+                  </a:tcPr>
+                </a:tc>
+                <a:tc>
+                  <a:txBody>
+                    <a:bodyPr wrap="square"/>
+                    <a:lstStyle/>
+                    <a:p>
+                      <a:pPr algn="l">
+                        <a:spcAft>
+                          <a:spcPts val="0"/>
+                        </a:spcAft>
+                      </a:pPr>
+                      <a:r>
+                        <a:rPr sz="1200" b="1">
+                          <a:solidFill>
+                            <a:srgbClr val="645B4C"/>
+                          </a:solidFill>
+                          <a:latin typeface="맑은 고딕"/>
+                        </a:rPr>
+                        <a:t>결과</a:t>
+                      </a:r>
+                    </a:p>
+                  </a:txBody>
+                  <a:tcPr>
+                    <a:solidFill>
+                      <a:srgbClr val="FFF8DF"/>
+                    </a:solidFill>
+                  </a:tcPr>
+                </a:tc>
+              </a:tr>
+              <a:tr h="329184">
+                <a:tc>
+                  <a:txBody>
+                    <a:bodyPr wrap="square"/>
+                    <a:lstStyle/>
+                    <a:p>
+                      <a:pPr algn="l">
+                        <a:spcAft>
+                          <a:spcPts val="0"/>
+                        </a:spcAft>
+                      </a:pPr>
+                      <a:r>
+                        <a:rPr sz="1100" b="0">
+                          <a:solidFill>
+                            <a:srgbClr val="2B2B2B"/>
+                          </a:solidFill>
+                          <a:latin typeface="맑은 고딕"/>
+                        </a:rPr>
+                        <a:t>LLM이 위험등급 '5등급' 생성</a:t>
+                      </a:r>
+                    </a:p>
+                  </a:txBody>
+                  <a:tcPr>
+                    <a:solidFill>
+                      <a:srgbClr val="FFFFFF"/>
+                    </a:solidFill>
+                  </a:tcPr>
+                </a:tc>
+                <a:tc>
+                  <a:txBody>
+                    <a:bodyPr wrap="square"/>
+                    <a:lstStyle/>
+                    <a:p>
+                      <a:pPr algn="l">
+                        <a:spcAft>
+                          <a:spcPts val="0"/>
+                        </a:spcAft>
+                      </a:pPr>
+                      <a:r>
+                        <a:rPr sz="1100" b="0">
+                          <a:solidFill>
+                            <a:srgbClr val="2B2B2B"/>
+                          </a:solidFill>
+                          <a:latin typeface="맑은 고딕"/>
+                        </a:rPr>
+                        <a:t>원문에는 6등급만 존재</a:t>
+                      </a:r>
+                    </a:p>
+                  </a:txBody>
+                  <a:tcPr>
+                    <a:solidFill>
+                      <a:srgbClr val="FFFFFF"/>
+                    </a:solidFill>
+                  </a:tcPr>
+                </a:tc>
+                <a:tc>
+                  <a:txBody>
+                    <a:bodyPr wrap="square"/>
+                    <a:lstStyle/>
+                    <a:p>
+                      <a:pPr algn="l">
+                        <a:spcAft>
+                          <a:spcPts val="0"/>
+                        </a:spcAft>
+                      </a:pPr>
+                      <a:r>
+                        <a:rPr sz="1100" b="0">
+                          <a:solidFill>
+                            <a:srgbClr val="2B2B2B"/>
+                          </a:solidFill>
+                          <a:latin typeface="맑은 고딕"/>
+                        </a:rPr>
+                        <a:t>원문 대조 후 미존재 값 폐기</a:t>
+                      </a:r>
+                    </a:p>
+                  </a:txBody>
+                  <a:tcPr>
+                    <a:solidFill>
+                      <a:srgbClr val="FFFFFF"/>
+                    </a:solidFill>
+                  </a:tcPr>
+                </a:tc>
+                <a:tc>
+                  <a:txBody>
+                    <a:bodyPr wrap="square"/>
+                    <a:lstStyle/>
+                    <a:p>
+                      <a:pPr algn="l">
+                        <a:spcAft>
+                          <a:spcPts val="0"/>
+                        </a:spcAft>
+                      </a:pPr>
+                      <a:r>
+                        <a:rPr sz="1100" b="0">
+                          <a:solidFill>
+                            <a:srgbClr val="2B2B2B"/>
+                          </a:solidFill>
+                          <a:latin typeface="맑은 고딕"/>
+                        </a:rPr>
+                        <a:t>6등급으로 교정</a:t>
+                      </a:r>
+                    </a:p>
+                  </a:txBody>
+                  <a:tcPr>
+                    <a:solidFill>
+                      <a:srgbClr val="FFFFFF"/>
+                    </a:solidFill>
+                  </a:tcPr>
+                </a:tc>
+              </a:tr>
+              <a:tr h="329184">
+                <a:tc>
+                  <a:txBody>
+                    <a:bodyPr wrap="square"/>
+                    <a:lstStyle/>
+                    <a:p>
+                      <a:pPr algn="l">
+                        <a:spcAft>
+                          <a:spcPts val="0"/>
+                        </a:spcAft>
+                      </a:pPr>
+                      <a:r>
+                        <a:rPr sz="1100" b="0">
+                          <a:solidFill>
+                            <a:srgbClr val="2B2B2B"/>
+                          </a:solidFill>
+                          <a:latin typeface="맑은 고딕"/>
+                        </a:rPr>
+                        <a:t>상품명에 '(주가연계증권)' 삽입</a:t>
+                      </a:r>
+                    </a:p>
+                  </a:txBody>
+                  <a:tcPr>
+                    <a:solidFill>
+                      <a:srgbClr val="FFFFFF"/>
+                    </a:solidFill>
+                  </a:tcPr>
+                </a:tc>
+                <a:tc>
+                  <a:txBody>
+                    <a:bodyPr wrap="square"/>
+                    <a:lstStyle/>
+                    <a:p>
+                      <a:pPr algn="l">
+                        <a:spcAft>
+                          <a:spcPts val="0"/>
+                        </a:spcAft>
+                      </a:pPr>
+                      <a:r>
+                        <a:rPr sz="1100" b="0">
+                          <a:solidFill>
+                            <a:srgbClr val="2B2B2B"/>
+                          </a:solidFill>
+                          <a:latin typeface="맑은 고딕"/>
+                        </a:rPr>
+                        <a:t>'제 23129호 파생결합증권(ELS)'</a:t>
+                      </a:r>
+                    </a:p>
+                  </a:txBody>
+                  <a:tcPr>
+                    <a:solidFill>
+                      <a:srgbClr val="FFFFFF"/>
+                    </a:solidFill>
+                  </a:tcPr>
+                </a:tc>
+                <a:tc>
+                  <a:txBody>
+                    <a:bodyPr wrap="square"/>
+                    <a:lstStyle/>
+                    <a:p>
+                      <a:pPr algn="l">
+                        <a:spcAft>
+                          <a:spcPts val="0"/>
+                        </a:spcAft>
+                      </a:pPr>
+                      <a:r>
+                        <a:rPr sz="1100" b="0">
+                          <a:solidFill>
+                            <a:srgbClr val="2B2B2B"/>
+                          </a:solidFill>
+                          <a:latin typeface="맑은 고딕"/>
+                        </a:rPr>
+                        <a:t>원문 표기로 복원, 겹침 부족 시 폐기</a:t>
+                      </a:r>
+                    </a:p>
+                  </a:txBody>
+                  <a:tcPr>
+                    <a:solidFill>
+                      <a:srgbClr val="FFFFFF"/>
+                    </a:solidFill>
+                  </a:tcPr>
+                </a:tc>
+                <a:tc>
+                  <a:txBody>
+                    <a:bodyPr wrap="square"/>
+                    <a:lstStyle/>
+                    <a:p>
+                      <a:pPr algn="l">
+                        <a:spcAft>
+                          <a:spcPts val="0"/>
+                        </a:spcAft>
+                      </a:pPr>
+                      <a:r>
+                        <a:rPr sz="1100" b="0">
+                          <a:solidFill>
+                            <a:srgbClr val="2B2B2B"/>
+                          </a:solidFill>
+                          <a:latin typeface="맑은 고딕"/>
+                        </a:rPr>
+                        <a:t>원문 표기 채택</a:t>
+                      </a:r>
+                    </a:p>
+                  </a:txBody>
+                  <a:tcPr>
+                    <a:solidFill>
+                      <a:srgbClr val="FFFFFF"/>
+                    </a:solidFill>
+                  </a:tcPr>
+                </a:tc>
+              </a:tr>
+              <a:tr h="329184">
+                <a:tc>
+                  <a:txBody>
+                    <a:bodyPr wrap="square"/>
+                    <a:lstStyle/>
+                    <a:p>
+                      <a:pPr algn="l">
+                        <a:spcAft>
+                          <a:spcPts val="0"/>
+                        </a:spcAft>
+                      </a:pPr>
+                      <a:r>
+                        <a:rPr sz="1100" b="0">
+                          <a:solidFill>
+                            <a:srgbClr val="2B2B2B"/>
+                          </a:solidFill>
+                          <a:latin typeface="맑은 고딕"/>
+                        </a:rPr>
+                        <a:t>설명확인서를 상품설명서로 오분류</a:t>
+                      </a:r>
+                    </a:p>
+                  </a:txBody>
+                  <a:tcPr>
+                    <a:solidFill>
+                      <a:srgbClr val="FFFFFF"/>
+                    </a:solidFill>
+                  </a:tcPr>
+                </a:tc>
+                <a:tc>
+                  <a:txBody>
+                    <a:bodyPr wrap="square"/>
+                    <a:lstStyle/>
+                    <a:p>
+                      <a:pPr algn="l">
+                        <a:spcAft>
+                          <a:spcPts val="0"/>
+                        </a:spcAft>
+                      </a:pPr>
+                      <a:r>
+                        <a:rPr sz="1100" b="0">
+                          <a:solidFill>
+                            <a:srgbClr val="2B2B2B"/>
+                          </a:solidFill>
+                          <a:latin typeface="맑은 고딕"/>
+                        </a:rPr>
+                        <a:t>제목이 '상품설명 확인서'</a:t>
+                      </a:r>
+                    </a:p>
+                  </a:txBody>
+                  <a:tcPr>
+                    <a:solidFill>
+                      <a:srgbClr val="FFFFFF"/>
+                    </a:solidFill>
+                  </a:tcPr>
+                </a:tc>
+                <a:tc>
+                  <a:txBody>
+                    <a:bodyPr wrap="square"/>
+                    <a:lstStyle/>
+                    <a:p>
+                      <a:pPr algn="l">
+                        <a:spcAft>
+                          <a:spcPts val="0"/>
+                        </a:spcAft>
+                      </a:pPr>
+                      <a:r>
+                        <a:rPr sz="1100" b="0">
+                          <a:solidFill>
+                            <a:srgbClr val="2B2B2B"/>
+                          </a:solidFill>
+                          <a:latin typeface="맑은 고딕"/>
+                        </a:rPr>
+                        <a:t>규칙 분류가 확신하면 LLM보다 우선</a:t>
+                      </a:r>
+                    </a:p>
+                  </a:txBody>
+                  <a:tcPr>
+                    <a:solidFill>
+                      <a:srgbClr val="FFFFFF"/>
+                    </a:solidFill>
+                  </a:tcPr>
+                </a:tc>
+                <a:tc>
+                  <a:txBody>
+                    <a:bodyPr wrap="square"/>
+                    <a:lstStyle/>
+                    <a:p>
+                      <a:pPr algn="l">
+                        <a:spcAft>
+                          <a:spcPts val="0"/>
+                        </a:spcAft>
+                      </a:pPr>
+                      <a:r>
+                        <a:rPr sz="1100" b="0">
+                          <a:solidFill>
+                            <a:srgbClr val="2B2B2B"/>
+                          </a:solidFill>
+                          <a:latin typeface="맑은 고딕"/>
+                        </a:rPr>
+                        <a:t>고객확인·설명일 복구</a:t>
+                      </a:r>
+                    </a:p>
+                  </a:txBody>
+                  <a:tcPr>
+                    <a:solidFill>
+                      <a:srgbClr val="FFFFFF"/>
+                    </a:solidFill>
+                  </a:tcPr>
+                </a:tc>
+              </a:tr>
+              <a:tr h="329184">
+                <a:tc>
+                  <a:txBody>
+                    <a:bodyPr wrap="square"/>
+                    <a:lstStyle/>
+                    <a:p>
+                      <a:pPr algn="l">
+                        <a:spcAft>
+                          <a:spcPts val="0"/>
+                        </a:spcAft>
+                      </a:pPr>
+                      <a:r>
+                        <a:rPr sz="1100" b="0">
+                          <a:solidFill>
+                            <a:srgbClr val="2B2B2B"/>
+                          </a:solidFill>
+                          <a:latin typeface="맑은 고딕"/>
+                        </a:rPr>
+                        <a:t>약관의 '서명' 문구를 확인으로 오인</a:t>
+                      </a:r>
+                    </a:p>
+                  </a:txBody>
+                  <a:tcPr>
+                    <a:solidFill>
+                      <a:srgbClr val="FFFFFF"/>
+                    </a:solidFill>
+                  </a:tcPr>
+                </a:tc>
+                <a:tc>
+                  <a:txBody>
+                    <a:bodyPr wrap="square"/>
+                    <a:lstStyle/>
+                    <a:p>
+                      <a:pPr algn="l">
+                        <a:spcAft>
+                          <a:spcPts val="0"/>
+                        </a:spcAft>
+                      </a:pPr>
+                      <a:r>
+                        <a:rPr sz="1100" b="0">
+                          <a:solidFill>
+                            <a:srgbClr val="2B2B2B"/>
+                          </a:solidFill>
+                          <a:latin typeface="맑은 고딕"/>
+                        </a:rPr>
+                        <a:t>서명란은 실제로 공란</a:t>
+                      </a:r>
+                    </a:p>
+                  </a:txBody>
+                  <a:tcPr>
+                    <a:solidFill>
+                      <a:srgbClr val="FFFFFF"/>
+                    </a:solidFill>
+                  </a:tcPr>
+                </a:tc>
+                <a:tc>
+                  <a:txBody>
+                    <a:bodyPr wrap="square"/>
+                    <a:lstStyle/>
+                    <a:p>
+                      <a:pPr algn="l">
+                        <a:spcAft>
+                          <a:spcPts val="0"/>
+                        </a:spcAft>
+                      </a:pPr>
+                      <a:r>
+                        <a:rPr sz="1100" b="0">
+                          <a:solidFill>
+                            <a:srgbClr val="2B2B2B"/>
+                          </a:solidFill>
+                          <a:latin typeface="맑은 고딕"/>
+                        </a:rPr>
+                        <a:t>페이지 이미지에서 서명 유무 판독</a:t>
+                      </a:r>
+                    </a:p>
+                  </a:txBody>
+                  <a:tcPr>
+                    <a:solidFill>
+                      <a:srgbClr val="FFFFFF"/>
+                    </a:solidFill>
+                  </a:tcPr>
+                </a:tc>
+                <a:tc>
+                  <a:txBody>
+                    <a:bodyPr wrap="square"/>
+                    <a:lstStyle/>
+                    <a:p>
+                      <a:pPr algn="l">
+                        <a:spcAft>
+                          <a:spcPts val="0"/>
+                        </a:spcAft>
+                      </a:pPr>
+                      <a:r>
+                        <a:rPr sz="1100" b="0">
+                          <a:solidFill>
+                            <a:srgbClr val="2B2B2B"/>
+                          </a:solidFill>
+                          <a:latin typeface="맑은 고딕"/>
+                        </a:rPr>
+                        <a:t>미서명 적발 가능</a:t>
+                      </a:r>
+                    </a:p>
+                  </a:txBody>
+                  <a:tcPr>
+                    <a:solidFill>
+                      <a:srgbClr val="FFFFFF"/>
+                    </a:solidFill>
+                  </a:tcPr>
+                </a:tc>
+              </a:tr>
+            </a:tbl>
+          </a:graphicData>
+        </a:graphic>
+      </p:graphicFrame>
+      <p:sp>
+        <p:nvSpPr>
+          <p:cNvPr id="6" name="Rounded Rectangle 5"/>
+          <p:cNvSpPr/>
+          <p:nvPr/>
+        </p:nvSpPr>
+        <p:spPr>
+          <a:xfrm>
+            <a:off x="566928" y="4114800"/>
+            <a:ext cx="3520440" cy="2011680"/>
+          </a:xfrm>
+          <a:prstGeom prst="roundRect">
+            <a:avLst/>
+          </a:prstGeom>
+          <a:solidFill>
+            <a:srgbClr val="FFFFFF"/>
+          </a:solidFill>
+          <a:ln>
+            <a:solidFill>
+              <a:srgbClr val="E6E0D4"/>
+            </a:solidFill>
+          </a:ln>
+        </p:spPr>
+        <p:style>
+          <a:lnRef idx="1">
+            <a:schemeClr val="accent1"/>
+          </a:lnRef>
+          <a:fillRef idx="3">
+            <a:schemeClr val="accent1"/>
+          </a:fillRef>
+          <a:effectRef idx="2">
+            <a:schemeClr val="accent1"/>
+          </a:effectRef>
+          <a:fontRef idx="minor">
+            <a:schemeClr val="lt1"/>
+          </a:fontRef>
+        </p:style>
+        <p:txBody>
+          <a:bodyPr rtlCol="0" anchor="ctr"/>
+          <a:lstStyle/>
+          <a:p>
+            <a:pPr algn="ctr"/>
+          </a:p>
+        </p:txBody>
+      </p:sp>
+      <p:sp>
+        <p:nvSpPr>
+          <p:cNvPr id="7" name="Rectangle 6"/>
+          <p:cNvSpPr/>
+          <p:nvPr/>
+        </p:nvSpPr>
+        <p:spPr>
+          <a:xfrm>
+            <a:off x="566928" y="4114800"/>
+            <a:ext cx="54864" cy="2011680"/>
+          </a:xfrm>
+          <a:prstGeom prst="rect">
+            <a:avLst/>
+          </a:prstGeom>
+          <a:solidFill>
+            <a:srgbClr val="FCAF17"/>
+          </a:solidFill>
+          <a:ln>
+            <a:noFill/>
+          </a:ln>
+        </p:spPr>
+        <p:style>
+          <a:lnRef idx="1">
+            <a:schemeClr val="accent1"/>
+          </a:lnRef>
+          <a:fillRef idx="3">
+            <a:schemeClr val="accent1"/>
+          </a:fillRef>
+          <a:effectRef idx="2">
+            <a:schemeClr val="accent1"/>
+          </a:effectRef>
+          <a:fontRef idx="minor">
+            <a:schemeClr val="lt1"/>
+          </a:fontRef>
+        </p:style>
+        <p:txBody>
+          <a:bodyPr rtlCol="0" anchor="ctr"/>
+          <a:lstStyle/>
+          <a:p>
+            <a:pPr algn="ctr"/>
+          </a:p>
+        </p:txBody>
+      </p:sp>
+      <p:sp>
+        <p:nvSpPr>
+          <p:cNvPr id="8" name="TextBox 7"/>
+          <p:cNvSpPr txBox="1"/>
+          <p:nvPr/>
+        </p:nvSpPr>
+        <p:spPr>
+          <a:xfrm>
+            <a:off x="822960" y="4261104"/>
+            <a:ext cx="3063240" cy="1737360"/>
+          </a:xfrm>
+          <a:prstGeom prst="rect">
+            <a:avLst/>
+          </a:prstGeom>
+          <a:noFill/>
+        </p:spPr>
+        <p:txBody>
+          <a:bodyPr wrap="square">
+            <a:spAutoFit/>
+          </a:bodyPr>
+          <a:lstStyle/>
+          <a:p>
+            <a:pPr algn="l">
+              <a:spcAft>
+                <a:spcPts val="700"/>
+              </a:spcAft>
+            </a:pPr>
+            <a:r>
+              <a:rPr sz="1500" b="1">
+                <a:solidFill>
+                  <a:srgbClr val="645B4C"/>
+                </a:solidFill>
+                <a:latin typeface="맑은 고딕"/>
+              </a:rPr>
+              <a:t>1차 · 원문 대조</a:t>
+            </a:r>
+          </a:p>
+          <a:p>
+            <a:pPr algn="l">
+              <a:spcAft>
+                <a:spcPts val="500"/>
+              </a:spcAft>
+            </a:pPr>
+            <a:r>
+              <a:rPr sz="1200" b="0">
+                <a:solidFill>
+                  <a:srgbClr val="2B2B2B"/>
+                </a:solidFill>
+                <a:latin typeface="맑은 고딕"/>
+              </a:rPr>
+              <a:t>추출값이 원문에 실제로 있는지 확인</a:t>
+            </a:r>
+          </a:p>
+          <a:p>
+            <a:pPr algn="l">
+              <a:spcAft>
+                <a:spcPts val="500"/>
+              </a:spcAft>
+            </a:pPr>
+            <a:r>
+              <a:rPr sz="1200" b="0">
+                <a:solidFill>
+                  <a:srgbClr val="2B2B2B"/>
+                </a:solidFill>
+                <a:latin typeface="맑은 고딕"/>
+              </a:rPr>
+              <a:t>없으면 채택하지 않고 '미확인'</a:t>
+            </a:r>
+          </a:p>
+          <a:p>
+            <a:pPr algn="l">
+              <a:spcAft>
+                <a:spcPts val="500"/>
+              </a:spcAft>
+            </a:pPr>
+            <a:r>
+              <a:rPr sz="1200" b="0">
+                <a:solidFill>
+                  <a:srgbClr val="2B2B2B"/>
+                </a:solidFill>
+                <a:latin typeface="맑은 고딕"/>
+              </a:rPr>
+              <a:t>오판보다 미확인이 안전하다</a:t>
+            </a:r>
+          </a:p>
+        </p:txBody>
+      </p:sp>
+      <p:sp>
+        <p:nvSpPr>
+          <p:cNvPr id="9" name="Rounded Rectangle 8"/>
+          <p:cNvSpPr/>
+          <p:nvPr/>
+        </p:nvSpPr>
+        <p:spPr>
+          <a:xfrm>
+            <a:off x="4315968" y="4114800"/>
+            <a:ext cx="3520440" cy="2011680"/>
+          </a:xfrm>
+          <a:prstGeom prst="roundRect">
+            <a:avLst/>
+          </a:prstGeom>
+          <a:solidFill>
+            <a:srgbClr val="FFFFFF"/>
+          </a:solidFill>
+          <a:ln>
+            <a:solidFill>
+              <a:srgbClr val="E6E0D4"/>
+            </a:solidFill>
+          </a:ln>
+        </p:spPr>
+        <p:style>
+          <a:lnRef idx="1">
+            <a:schemeClr val="accent1"/>
+          </a:lnRef>
+          <a:fillRef idx="3">
+            <a:schemeClr val="accent1"/>
+          </a:fillRef>
+          <a:effectRef idx="2">
+            <a:schemeClr val="accent1"/>
+          </a:effectRef>
+          <a:fontRef idx="minor">
+            <a:schemeClr val="lt1"/>
+          </a:fontRef>
+        </p:style>
+        <p:txBody>
+          <a:bodyPr rtlCol="0" anchor="ctr"/>
+          <a:lstStyle/>
+          <a:p>
+            <a:pPr algn="ctr"/>
+          </a:p>
+        </p:txBody>
+      </p:sp>
+      <p:sp>
+        <p:nvSpPr>
+          <p:cNvPr id="10" name="Rectangle 9"/>
+          <p:cNvSpPr/>
+          <p:nvPr/>
+        </p:nvSpPr>
+        <p:spPr>
+          <a:xfrm>
+            <a:off x="4315968" y="4114800"/>
+            <a:ext cx="54864" cy="2011680"/>
+          </a:xfrm>
+          <a:prstGeom prst="rect">
+            <a:avLst/>
+          </a:prstGeom>
+          <a:solidFill>
+            <a:srgbClr val="FCAF17"/>
+          </a:solidFill>
+          <a:ln>
+            <a:noFill/>
+          </a:ln>
+        </p:spPr>
+        <p:style>
+          <a:lnRef idx="1">
+            <a:schemeClr val="accent1"/>
+          </a:lnRef>
+          <a:fillRef idx="3">
+            <a:schemeClr val="accent1"/>
+          </a:fillRef>
+          <a:effectRef idx="2">
+            <a:schemeClr val="accent1"/>
+          </a:effectRef>
+          <a:fontRef idx="minor">
+            <a:schemeClr val="lt1"/>
+          </a:fontRef>
+        </p:style>
+        <p:txBody>
+          <a:bodyPr rtlCol="0" anchor="ctr"/>
+          <a:lstStyle/>
+          <a:p>
+            <a:pPr algn="ctr"/>
+          </a:p>
+        </p:txBody>
+      </p:sp>
+      <p:sp>
+        <p:nvSpPr>
+          <p:cNvPr id="11" name="TextBox 10"/>
+          <p:cNvSpPr txBox="1"/>
+          <p:nvPr/>
+        </p:nvSpPr>
+        <p:spPr>
+          <a:xfrm>
+            <a:off x="4572000" y="4261104"/>
+            <a:ext cx="3063240" cy="1737360"/>
+          </a:xfrm>
+          <a:prstGeom prst="rect">
+            <a:avLst/>
+          </a:prstGeom>
+          <a:noFill/>
+        </p:spPr>
+        <p:txBody>
+          <a:bodyPr wrap="square">
+            <a:spAutoFit/>
+          </a:bodyPr>
+          <a:lstStyle/>
+          <a:p>
+            <a:pPr algn="l">
+              <a:spcAft>
+                <a:spcPts val="700"/>
+              </a:spcAft>
+            </a:pPr>
+            <a:r>
+              <a:rPr sz="1500" b="1">
+                <a:solidFill>
+                  <a:srgbClr val="645B4C"/>
+                </a:solidFill>
+                <a:latin typeface="맑은 고딕"/>
+              </a:rPr>
+              <a:t>2차 · 문서유형 게이팅</a:t>
+            </a:r>
+          </a:p>
+          <a:p>
+            <a:pPr algn="l">
+              <a:spcAft>
+                <a:spcPts val="500"/>
+              </a:spcAft>
+            </a:pPr>
+            <a:r>
+              <a:rPr sz="1200" b="0">
+                <a:solidFill>
+                  <a:srgbClr val="2B2B2B"/>
+                </a:solidFill>
+                <a:latin typeface="맑은 고딕"/>
+              </a:rPr>
+              <a:t>상품설명서에 계약일은 없다</a:t>
+            </a:r>
+          </a:p>
+          <a:p>
+            <a:pPr algn="l">
+              <a:spcAft>
+                <a:spcPts val="500"/>
+              </a:spcAft>
+            </a:pPr>
+            <a:r>
+              <a:rPr sz="1200" b="0">
+                <a:solidFill>
+                  <a:srgbClr val="2B2B2B"/>
+                </a:solidFill>
+                <a:latin typeface="맑은 고딕"/>
+              </a:rPr>
+              <a:t>→ 발행일을 계약일로 오인 차단</a:t>
+            </a:r>
+          </a:p>
+          <a:p>
+            <a:pPr algn="l">
+              <a:spcAft>
+                <a:spcPts val="500"/>
+              </a:spcAft>
+            </a:pPr>
+            <a:r>
+              <a:rPr sz="1200" b="0">
+                <a:solidFill>
+                  <a:srgbClr val="2B2B2B"/>
+                </a:solidFill>
+                <a:latin typeface="맑은 고딕"/>
+              </a:rPr>
+              <a:t>유형별로 가능한 필드를 고정</a:t>
+            </a:r>
+          </a:p>
+        </p:txBody>
+      </p:sp>
+      <p:sp>
+        <p:nvSpPr>
+          <p:cNvPr id="12" name="Rounded Rectangle 11"/>
+          <p:cNvSpPr/>
+          <p:nvPr/>
+        </p:nvSpPr>
+        <p:spPr>
+          <a:xfrm>
+            <a:off x="8065008" y="4114800"/>
+            <a:ext cx="3566160" cy="2011680"/>
+          </a:xfrm>
+          <a:prstGeom prst="roundRect">
+            <a:avLst/>
+          </a:prstGeom>
+          <a:solidFill>
+            <a:srgbClr val="FFFFFF"/>
+          </a:solidFill>
+          <a:ln>
+            <a:solidFill>
+              <a:srgbClr val="E6E0D4"/>
+            </a:solidFill>
+          </a:ln>
+        </p:spPr>
+        <p:style>
+          <a:lnRef idx="1">
+            <a:schemeClr val="accent1"/>
+          </a:lnRef>
+          <a:fillRef idx="3">
+            <a:schemeClr val="accent1"/>
+          </a:fillRef>
+          <a:effectRef idx="2">
+            <a:schemeClr val="accent1"/>
+          </a:effectRef>
+          <a:fontRef idx="minor">
+            <a:schemeClr val="lt1"/>
+          </a:fontRef>
+        </p:style>
+        <p:txBody>
+          <a:bodyPr rtlCol="0" anchor="ctr"/>
+          <a:lstStyle/>
+          <a:p>
+            <a:pPr algn="ctr"/>
+          </a:p>
+        </p:txBody>
+      </p:sp>
+      <p:sp>
+        <p:nvSpPr>
+          <p:cNvPr id="13" name="Rectangle 12"/>
+          <p:cNvSpPr/>
+          <p:nvPr/>
+        </p:nvSpPr>
+        <p:spPr>
+          <a:xfrm>
+            <a:off x="8065008" y="4114800"/>
+            <a:ext cx="54864" cy="2011680"/>
+          </a:xfrm>
+          <a:prstGeom prst="rect">
+            <a:avLst/>
+          </a:prstGeom>
+          <a:solidFill>
+            <a:srgbClr val="FCAF17"/>
+          </a:solidFill>
+          <a:ln>
+            <a:noFill/>
+          </a:ln>
+        </p:spPr>
+        <p:style>
+          <a:lnRef idx="1">
+            <a:schemeClr val="accent1"/>
+          </a:lnRef>
+          <a:fillRef idx="3">
+            <a:schemeClr val="accent1"/>
+          </a:fillRef>
+          <a:effectRef idx="2">
+            <a:schemeClr val="accent1"/>
+          </a:effectRef>
+          <a:fontRef idx="minor">
+            <a:schemeClr val="lt1"/>
+          </a:fontRef>
+        </p:style>
+        <p:txBody>
+          <a:bodyPr rtlCol="0" anchor="ctr"/>
+          <a:lstStyle/>
+          <a:p>
+            <a:pPr algn="ctr"/>
+          </a:p>
+        </p:txBody>
+      </p:sp>
+      <p:sp>
+        <p:nvSpPr>
+          <p:cNvPr id="14" name="TextBox 13"/>
+          <p:cNvSpPr txBox="1"/>
+          <p:nvPr/>
+        </p:nvSpPr>
+        <p:spPr>
+          <a:xfrm>
+            <a:off x="8321040" y="4261104"/>
+            <a:ext cx="3108960" cy="1737360"/>
+          </a:xfrm>
+          <a:prstGeom prst="rect">
+            <a:avLst/>
+          </a:prstGeom>
+          <a:noFill/>
+        </p:spPr>
+        <p:txBody>
+          <a:bodyPr wrap="square">
+            <a:spAutoFit/>
+          </a:bodyPr>
+          <a:lstStyle/>
+          <a:p>
+            <a:pPr algn="l">
+              <a:spcAft>
+                <a:spcPts val="700"/>
+              </a:spcAft>
+            </a:pPr>
+            <a:r>
+              <a:rPr sz="1500" b="1">
+                <a:solidFill>
+                  <a:srgbClr val="645B4C"/>
+                </a:solidFill>
+                <a:latin typeface="맑은 고딕"/>
+              </a:rPr>
+              <a:t>3차 · 고정 스키마</a:t>
+            </a:r>
+          </a:p>
+          <a:p>
+            <a:pPr algn="l">
+              <a:spcAft>
+                <a:spcPts val="500"/>
+              </a:spcAft>
+            </a:pPr>
+            <a:r>
+              <a:rPr sz="1200" b="0">
+                <a:solidFill>
+                  <a:srgbClr val="2B2B2B"/>
+                </a:solidFill>
+                <a:latin typeface="맑은 고딕"/>
+              </a:rPr>
+              <a:t>같은 양식이면 항상 같은 필드 목록</a:t>
+            </a:r>
+          </a:p>
+          <a:p>
+            <a:pPr algn="l">
+              <a:spcAft>
+                <a:spcPts val="500"/>
+              </a:spcAft>
+            </a:pPr>
+            <a:r>
+              <a:rPr sz="1200" b="0">
+                <a:solidFill>
+                  <a:srgbClr val="2B2B2B"/>
+                </a:solidFill>
+                <a:latin typeface="맑은 고딕"/>
+              </a:rPr>
+              <a:t>못 찾은 값은 '미확인'으로 노출</a:t>
+            </a:r>
+          </a:p>
+          <a:p>
+            <a:pPr algn="l">
+              <a:spcAft>
+                <a:spcPts val="500"/>
+              </a:spcAft>
+            </a:pPr>
+            <a:r>
+              <a:rPr sz="1200" b="0">
+                <a:solidFill>
+                  <a:srgbClr val="2B2B2B"/>
+                </a:solidFill>
+                <a:latin typeface="맑은 고딕"/>
+              </a:rPr>
+              <a:t>값의 유무가 모델 변덕에 좌우되지 않음</a:t>
+            </a:r>
+          </a:p>
+        </p:txBody>
+      </p:sp>
+    </p:spTree>
+  </p:cSld>
+  <p:clrMapOvr>
+    <a:masterClrMapping/>
+  </p:clrMapOvr>
+</p:sld>
+</file>
+
+<file path=ppt/slides/slide11.xml><?xml version="1.0" encoding="utf-8"?>
+<p:sld xmlns:a="http://schemas.openxmlformats.org/drawingml/2006/main" xmlns:p="http://schemas.openxmlformats.org/presentationml/2006/main" xmlns:r="http://schemas.openxmlformats.org/officeDocument/2006/relationships">
+  <p:cSld>
+    <p:spTree>
+      <p:nvGrpSpPr>
+        <p:cNvPr id="1" name=""/>
+        <p:cNvGrpSpPr/>
+        <p:nvPr/>
+      </p:nvGrpSpPr>
+      <p:grpSpPr/>
+      <p:sp>
+        <p:nvSpPr>
+          <p:cNvPr id="2" name="Rectangle 1"/>
+          <p:cNvSpPr/>
+          <p:nvPr/>
+        </p:nvSpPr>
+        <p:spPr>
+          <a:xfrm>
+            <a:off x="0" y="0"/>
+            <a:ext cx="12191695" cy="82296"/>
+          </a:xfrm>
+          <a:prstGeom prst="rect">
+            <a:avLst/>
+          </a:prstGeom>
+          <a:solidFill>
+            <a:srgbClr val="FCAF17"/>
+          </a:solidFill>
+          <a:ln>
+            <a:noFill/>
+          </a:ln>
+        </p:spPr>
+        <p:style>
+          <a:lnRef idx="1">
+            <a:schemeClr val="accent1"/>
+          </a:lnRef>
+          <a:fillRef idx="3">
+            <a:schemeClr val="accent1"/>
+          </a:fillRef>
+          <a:effectRef idx="2">
+            <a:schemeClr val="accent1"/>
+          </a:effectRef>
+          <a:fontRef idx="minor">
+            <a:schemeClr val="lt1"/>
+          </a:fontRef>
+        </p:style>
+        <p:txBody>
+          <a:bodyPr rtlCol="0" anchor="ctr"/>
+          <a:lstStyle/>
+          <a:p>
+            <a:pPr algn="ctr"/>
+          </a:p>
+        </p:txBody>
+      </p:sp>
+      <p:sp>
+        <p:nvSpPr>
+          <p:cNvPr id="3" name="TextBox 2"/>
+          <p:cNvSpPr txBox="1"/>
+          <p:nvPr/>
+        </p:nvSpPr>
+        <p:spPr>
+          <a:xfrm>
+            <a:off x="566928" y="310896"/>
+            <a:ext cx="10424160" cy="914400"/>
+          </a:xfrm>
+          <a:prstGeom prst="rect">
+            <a:avLst/>
+          </a:prstGeom>
+          <a:noFill/>
+        </p:spPr>
+        <p:txBody>
+          <a:bodyPr wrap="square">
+            <a:spAutoFit/>
+          </a:bodyPr>
+          <a:lstStyle/>
+          <a:p>
+            <a:pPr algn="l">
+              <a:spcAft>
+                <a:spcPts val="200"/>
+              </a:spcAft>
+            </a:pPr>
+            <a:r>
+              <a:rPr sz="3000" b="1">
+                <a:solidFill>
+                  <a:srgbClr val="645B4C"/>
+                </a:solidFill>
+                <a:latin typeface="맑은 고딕"/>
+              </a:rPr>
               <a:t>핵심 기술 ②  어떤 형태로 와도 읽는다</a:t>
             </a:r>
           </a:p>
@@ -4526,7 +5805,7 @@
 </p:sld>
 </file>
 
-<file path=ppt/slides/slide11.xml><?xml version="1.0" encoding="utf-8"?>
+<file path=ppt/slides/slide12.xml><?xml version="1.0" encoding="utf-8"?>
 <p:sld xmlns:a="http://schemas.openxmlformats.org/drawingml/2006/main" xmlns:p="http://schemas.openxmlformats.org/presentationml/2006/main" xmlns:r="http://schemas.openxmlformats.org/officeDocument/2006/relationships">
   <p:cSld>
     <p:spTree>
@@ -5718,8 +6997,8 @@
         </p:nvSpPr>
         <p:spPr>
           <a:xfrm>
-            <a:off x="566928" y="5120640"/>
-            <a:ext cx="11064240" cy="1280160"/>
+            <a:off x="566928" y="5074920"/>
+            <a:ext cx="11064240" cy="1371600"/>
           </a:xfrm>
           <a:prstGeom prst="rect">
             <a:avLst/>
@@ -5738,18 +7017,34 @@
               </a:spcAft>
             </a:pPr>
             <a:r>
-              <a:rPr sz="1300" b="1">
+              <a:rPr sz="1400" b="1">
                 <a:solidFill>
                   <a:srgbClr val="645B4C"/>
                 </a:solidFill>
                 <a:latin typeface="맑은 고딕"/>
               </a:rPr>
-              <a:t>검사 범위를 화면에 명시합니다 — 적정성(18조)·불공정영업(20조)·광고(22조)는 대상이 아님을 밝힙니다.</a:t>
+              <a:t>판매서류로 검증할 수 있는 판매원칙은 3개이고, 그 3개를 모두 덮었습니다.</a:t>
             </a:r>
           </a:p>
           <a:p>
             <a:pPr algn="l">
               <a:spcAft>
+                <a:spcPts val="500"/>
+              </a:spcAft>
+            </a:pPr>
+            <a:r>
+              <a:rPr sz="1200" b="0">
+                <a:solidFill>
+                  <a:srgbClr val="2B2B2B"/>
+                </a:solidFill>
+                <a:latin typeface="맑은 고딕"/>
+              </a:rPr>
+              <a:t>나머지 3개는 서류 밖의 정보를 요구합니다 — 적정성(18조)은 '권유 없이 청약했는지'(판매채널 기록), 불공정영업(20조)은 '다른 상품 끼워팔기'(거래 이력), 광고(22조)는 광고물 자체가 검사 대상입니다.</a:t>
+            </a:r>
+          </a:p>
+          <a:p>
+            <a:pPr algn="l">
+              <a:spcAft>
                 <a:spcPts val="600"/>
               </a:spcAft>
             </a:pPr>
@@ -5760,7 +7055,7 @@
                 </a:solidFill>
                 <a:latin typeface="맑은 고딕"/>
               </a:rPr>
-              <a:t>녹취(REC-001)는 음성을 판독하지 않고 '녹취가 필요한 판매 건인지'만 표시합니다. 검사하지 못하는 것을 검사한 척하지 않는 것이 컴플라이언스 도구의 신뢰 조건입니다.</a:t>
+              <a:t>여기에 6대 원칙 밖의 의무인 계약서류 제공(23조)·자료 기록 유지(28조)까지 검사합니다. 녹취(REC-001)는 음성을 판독하지 않고 '녹취가 필요한 건인지'만 표시합니다.</a:t>
             </a:r>
           </a:p>
         </p:txBody>
@@ -5773,7 +7068,1399 @@
 </p:sld>
 </file>
 
-<file path=ppt/slides/slide12.xml><?xml version="1.0" encoding="utf-8"?>
+<file path=ppt/slides/slide13.xml><?xml version="1.0" encoding="utf-8"?>
+<p:sld xmlns:a="http://schemas.openxmlformats.org/drawingml/2006/main" xmlns:p="http://schemas.openxmlformats.org/presentationml/2006/main" xmlns:r="http://schemas.openxmlformats.org/officeDocument/2006/relationships">
+  <p:cSld>
+    <p:spTree>
+      <p:nvGrpSpPr>
+        <p:cNvPr id="1" name=""/>
+        <p:cNvGrpSpPr/>
+        <p:nvPr/>
+      </p:nvGrpSpPr>
+      <p:grpSpPr/>
+      <p:sp>
+        <p:nvSpPr>
+          <p:cNvPr id="2" name="Rectangle 1"/>
+          <p:cNvSpPr/>
+          <p:nvPr/>
+        </p:nvSpPr>
+        <p:spPr>
+          <a:xfrm>
+            <a:off x="0" y="0"/>
+            <a:ext cx="12191695" cy="82296"/>
+          </a:xfrm>
+          <a:prstGeom prst="rect">
+            <a:avLst/>
+          </a:prstGeom>
+          <a:solidFill>
+            <a:srgbClr val="FCAF17"/>
+          </a:solidFill>
+          <a:ln>
+            <a:noFill/>
+          </a:ln>
+        </p:spPr>
+        <p:style>
+          <a:lnRef idx="1">
+            <a:schemeClr val="accent1"/>
+          </a:lnRef>
+          <a:fillRef idx="3">
+            <a:schemeClr val="accent1"/>
+          </a:fillRef>
+          <a:effectRef idx="2">
+            <a:schemeClr val="accent1"/>
+          </a:effectRef>
+          <a:fontRef idx="minor">
+            <a:schemeClr val="lt1"/>
+          </a:fontRef>
+        </p:style>
+        <p:txBody>
+          <a:bodyPr rtlCol="0" anchor="ctr"/>
+          <a:lstStyle/>
+          <a:p>
+            <a:pPr algn="ctr"/>
+          </a:p>
+        </p:txBody>
+      </p:sp>
+      <p:sp>
+        <p:nvSpPr>
+          <p:cNvPr id="3" name="TextBox 2"/>
+          <p:cNvSpPr txBox="1"/>
+          <p:nvPr/>
+        </p:nvSpPr>
+        <p:spPr>
+          <a:xfrm>
+            <a:off x="566928" y="310896"/>
+            <a:ext cx="10424160" cy="914400"/>
+          </a:xfrm>
+          <a:prstGeom prst="rect">
+            <a:avLst/>
+          </a:prstGeom>
+          <a:noFill/>
+        </p:spPr>
+        <p:txBody>
+          <a:bodyPr wrap="square">
+            <a:spAutoFit/>
+          </a:bodyPr>
+          <a:lstStyle/>
+          <a:p>
+            <a:pPr algn="l">
+              <a:spcAft>
+                <a:spcPts val="200"/>
+              </a:spcAft>
+            </a:pPr>
+            <a:r>
+              <a:rPr sz="3000" b="1">
+                <a:solidFill>
+                  <a:srgbClr val="645B4C"/>
+                </a:solidFill>
+                <a:latin typeface="맑은 고딕"/>
+              </a:rPr>
+              <a:t>검사 범위를 어떻게 잡았나</a:t>
+            </a:r>
+          </a:p>
+          <a:p>
+            <a:pPr algn="l">
+              <a:spcAft>
+                <a:spcPts val="600"/>
+              </a:spcAft>
+            </a:pPr>
+            <a:r>
+              <a:rPr sz="1400" b="0">
+                <a:solidFill>
+                  <a:srgbClr val="6B6B6B"/>
+                </a:solidFill>
+                <a:latin typeface="맑은 고딕"/>
+              </a:rPr>
+              <a:t>금소법 73개 조문 중 '판매서류로 검증할 수 있는 것'만 남긴다</a:t>
+            </a:r>
+          </a:p>
+        </p:txBody>
+      </p:sp>
+      <p:sp>
+        <p:nvSpPr>
+          <p:cNvPr id="4" name="Rounded Rectangle 3"/>
+          <p:cNvSpPr/>
+          <p:nvPr/>
+        </p:nvSpPr>
+        <p:spPr>
+          <a:xfrm>
+            <a:off x="9646920" y="329184"/>
+            <a:ext cx="1965960" cy="384048"/>
+          </a:xfrm>
+          <a:prstGeom prst="roundRect">
+            <a:avLst/>
+          </a:prstGeom>
+          <a:solidFill>
+            <a:srgbClr val="FFF8DF"/>
+          </a:solidFill>
+          <a:ln>
+            <a:solidFill>
+              <a:srgbClr val="FCAF17"/>
+            </a:solidFill>
+          </a:ln>
+        </p:spPr>
+        <p:style>
+          <a:lnRef idx="1">
+            <a:schemeClr val="accent1"/>
+          </a:lnRef>
+          <a:fillRef idx="3">
+            <a:schemeClr val="accent1"/>
+          </a:fillRef>
+          <a:effectRef idx="2">
+            <a:schemeClr val="accent1"/>
+          </a:effectRef>
+          <a:fontRef idx="minor">
+            <a:schemeClr val="lt1"/>
+          </a:fontRef>
+        </p:style>
+        <p:txBody>
+          <a:bodyPr rtlCol="0" anchor="ctr" wrap="square"/>
+          <a:lstStyle/>
+          <a:p>
+            <a:pPr algn="ctr">
+              <a:spcAft>
+                <a:spcPts val="0"/>
+              </a:spcAft>
+            </a:pPr>
+            <a:r>
+              <a:rPr sz="1100" b="1">
+                <a:solidFill>
+                  <a:srgbClr val="645B4C"/>
+                </a:solidFill>
+                <a:latin typeface="맑은 고딕"/>
+              </a:rPr>
+              <a:t>기술 적정성</a:t>
+            </a:r>
+          </a:p>
+        </p:txBody>
+      </p:sp>
+      <p:graphicFrame>
+        <p:nvGraphicFramePr>
+          <p:cNvPr id="5" name="Table 4"/>
+          <p:cNvGraphicFramePr>
+            <a:graphicFrameLocks noGrp="1"/>
+          </p:cNvGraphicFramePr>
+          <p:nvPr/>
+        </p:nvGraphicFramePr>
+        <p:xfrm>
+          <a:off x="566928" y="1417320"/>
+          <a:ext cx="5303520" cy="2304288"/>
+        </p:xfrm>
+        <a:graphic>
+          <a:graphicData uri="http://schemas.openxmlformats.org/drawingml/2006/table">
+            <a:tbl>
+              <a:tblPr firstRow="1" bandRow="1">
+                <a:tableStyleId>{5C22544A-7EE6-4342-B048-85BDC9FD1C3A}</a:tableStyleId>
+              </a:tblPr>
+              <a:tblGrid>
+                <a:gridCol w="3840480"/>
+                <a:gridCol w="1463040"/>
+              </a:tblGrid>
+              <a:tr h="329184">
+                <a:tc>
+                  <a:txBody>
+                    <a:bodyPr wrap="square"/>
+                    <a:lstStyle/>
+                    <a:p>
+                      <a:pPr algn="l">
+                        <a:spcAft>
+                          <a:spcPts val="0"/>
+                        </a:spcAft>
+                      </a:pPr>
+                      <a:r>
+                        <a:rPr sz="1200" b="1">
+                          <a:solidFill>
+                            <a:srgbClr val="645B4C"/>
+                          </a:solidFill>
+                          <a:latin typeface="맑은 고딕"/>
+                        </a:rPr>
+                        <a:t>금소법 조문 성격</a:t>
+                      </a:r>
+                    </a:p>
+                  </a:txBody>
+                  <a:tcPr>
+                    <a:solidFill>
+                      <a:srgbClr val="FFF8DF"/>
+                    </a:solidFill>
+                  </a:tcPr>
+                </a:tc>
+                <a:tc>
+                  <a:txBody>
+                    <a:bodyPr wrap="square"/>
+                    <a:lstStyle/>
+                    <a:p>
+                      <a:pPr algn="l">
+                        <a:spcAft>
+                          <a:spcPts val="0"/>
+                        </a:spcAft>
+                      </a:pPr>
+                      <a:r>
+                        <a:rPr sz="1200" b="1">
+                          <a:solidFill>
+                            <a:srgbClr val="645B4C"/>
+                          </a:solidFill>
+                          <a:latin typeface="맑은 고딕"/>
+                        </a:rPr>
+                        <a:t>조문 수</a:t>
+                      </a:r>
+                    </a:p>
+                  </a:txBody>
+                  <a:tcPr>
+                    <a:solidFill>
+                      <a:srgbClr val="FFF8DF"/>
+                    </a:solidFill>
+                  </a:tcPr>
+                </a:tc>
+              </a:tr>
+              <a:tr h="329184">
+                <a:tc>
+                  <a:txBody>
+                    <a:bodyPr wrap="square"/>
+                    <a:lstStyle/>
+                    <a:p>
+                      <a:pPr algn="l">
+                        <a:spcAft>
+                          <a:spcPts val="0"/>
+                        </a:spcAft>
+                      </a:pPr>
+                      <a:r>
+                        <a:rPr sz="1100" b="0">
+                          <a:solidFill>
+                            <a:srgbClr val="2B2B2B"/>
+                          </a:solidFill>
+                          <a:latin typeface="맑은 고딕"/>
+                        </a:rPr>
+                        <a:t>판매행위 규제</a:t>
+                      </a:r>
+                    </a:p>
+                  </a:txBody>
+                  <a:tcPr>
+                    <a:solidFill>
+                      <a:srgbClr val="FFFFFF"/>
+                    </a:solidFill>
+                  </a:tcPr>
+                </a:tc>
+                <a:tc>
+                  <a:txBody>
+                    <a:bodyPr wrap="square"/>
+                    <a:lstStyle/>
+                    <a:p>
+                      <a:pPr algn="l">
+                        <a:spcAft>
+                          <a:spcPts val="0"/>
+                        </a:spcAft>
+                      </a:pPr>
+                      <a:r>
+                        <a:rPr sz="1100" b="0">
+                          <a:solidFill>
+                            <a:srgbClr val="2B2B2B"/>
+                          </a:solidFill>
+                          <a:latin typeface="맑은 고딕"/>
+                        </a:rPr>
+                        <a:t>10</a:t>
+                      </a:r>
+                    </a:p>
+                  </a:txBody>
+                  <a:tcPr>
+                    <a:solidFill>
+                      <a:srgbClr val="FFFFFF"/>
+                    </a:solidFill>
+                  </a:tcPr>
+                </a:tc>
+              </a:tr>
+              <a:tr h="329184">
+                <a:tc>
+                  <a:txBody>
+                    <a:bodyPr wrap="square"/>
+                    <a:lstStyle/>
+                    <a:p>
+                      <a:pPr algn="l">
+                        <a:spcAft>
+                          <a:spcPts val="0"/>
+                        </a:spcAft>
+                      </a:pPr>
+                      <a:r>
+                        <a:rPr sz="1100" b="0">
+                          <a:solidFill>
+                            <a:srgbClr val="2B2B2B"/>
+                          </a:solidFill>
+                          <a:latin typeface="맑은 고딕"/>
+                        </a:rPr>
+                        <a:t>정의 · 총칙 · 부칙</a:t>
+                      </a:r>
+                    </a:p>
+                  </a:txBody>
+                  <a:tcPr>
+                    <a:solidFill>
+                      <a:srgbClr val="FFFFFF"/>
+                    </a:solidFill>
+                  </a:tcPr>
+                </a:tc>
+                <a:tc>
+                  <a:txBody>
+                    <a:bodyPr wrap="square"/>
+                    <a:lstStyle/>
+                    <a:p>
+                      <a:pPr algn="l">
+                        <a:spcAft>
+                          <a:spcPts val="0"/>
+                        </a:spcAft>
+                      </a:pPr>
+                      <a:r>
+                        <a:rPr sz="1100" b="0">
+                          <a:solidFill>
+                            <a:srgbClr val="2B2B2B"/>
+                          </a:solidFill>
+                          <a:latin typeface="맑은 고딕"/>
+                        </a:rPr>
+                        <a:t>31</a:t>
+                      </a:r>
+                    </a:p>
+                  </a:txBody>
+                  <a:tcPr>
+                    <a:solidFill>
+                      <a:srgbClr val="FFFFFF"/>
+                    </a:solidFill>
+                  </a:tcPr>
+                </a:tc>
+              </a:tr>
+              <a:tr h="329184">
+                <a:tc>
+                  <a:txBody>
+                    <a:bodyPr wrap="square"/>
+                    <a:lstStyle/>
+                    <a:p>
+                      <a:pPr algn="l">
+                        <a:spcAft>
+                          <a:spcPts val="0"/>
+                        </a:spcAft>
+                      </a:pPr>
+                      <a:r>
+                        <a:rPr sz="1100" b="0">
+                          <a:solidFill>
+                            <a:srgbClr val="2B2B2B"/>
+                          </a:solidFill>
+                          <a:latin typeface="맑은 고딕"/>
+                        </a:rPr>
+                        <a:t>감독 · 검사 · 제재 · 과징금</a:t>
+                      </a:r>
+                    </a:p>
+                  </a:txBody>
+                  <a:tcPr>
+                    <a:solidFill>
+                      <a:srgbClr val="FFFFFF"/>
+                    </a:solidFill>
+                  </a:tcPr>
+                </a:tc>
+                <a:tc>
+                  <a:txBody>
+                    <a:bodyPr wrap="square"/>
+                    <a:lstStyle/>
+                    <a:p>
+                      <a:pPr algn="l">
+                        <a:spcAft>
+                          <a:spcPts val="0"/>
+                        </a:spcAft>
+                      </a:pPr>
+                      <a:r>
+                        <a:rPr sz="1100" b="0">
+                          <a:solidFill>
+                            <a:srgbClr val="2B2B2B"/>
+                          </a:solidFill>
+                          <a:latin typeface="맑은 고딕"/>
+                        </a:rPr>
+                        <a:t>15</a:t>
+                      </a:r>
+                    </a:p>
+                  </a:txBody>
+                  <a:tcPr>
+                    <a:solidFill>
+                      <a:srgbClr val="FFFFFF"/>
+                    </a:solidFill>
+                  </a:tcPr>
+                </a:tc>
+              </a:tr>
+              <a:tr h="329184">
+                <a:tc>
+                  <a:txBody>
+                    <a:bodyPr wrap="square"/>
+                    <a:lstStyle/>
+                    <a:p>
+                      <a:pPr algn="l">
+                        <a:spcAft>
+                          <a:spcPts val="0"/>
+                        </a:spcAft>
+                      </a:pPr>
+                      <a:r>
+                        <a:rPr sz="1100" b="0">
+                          <a:solidFill>
+                            <a:srgbClr val="2B2B2B"/>
+                          </a:solidFill>
+                          <a:latin typeface="맑은 고딕"/>
+                        </a:rPr>
+                        <a:t>분쟁조정 · 소송 · 소비자 권리</a:t>
+                      </a:r>
+                    </a:p>
+                  </a:txBody>
+                  <a:tcPr>
+                    <a:solidFill>
+                      <a:srgbClr val="FFFFFF"/>
+                    </a:solidFill>
+                  </a:tcPr>
+                </a:tc>
+                <a:tc>
+                  <a:txBody>
+                    <a:bodyPr wrap="square"/>
+                    <a:lstStyle/>
+                    <a:p>
+                      <a:pPr algn="l">
+                        <a:spcAft>
+                          <a:spcPts val="0"/>
+                        </a:spcAft>
+                      </a:pPr>
+                      <a:r>
+                        <a:rPr sz="1100" b="0">
+                          <a:solidFill>
+                            <a:srgbClr val="2B2B2B"/>
+                          </a:solidFill>
+                          <a:latin typeface="맑은 고딕"/>
+                        </a:rPr>
+                        <a:t>12</a:t>
+                      </a:r>
+                    </a:p>
+                  </a:txBody>
+                  <a:tcPr>
+                    <a:solidFill>
+                      <a:srgbClr val="FFFFFF"/>
+                    </a:solidFill>
+                  </a:tcPr>
+                </a:tc>
+              </a:tr>
+              <a:tr h="329184">
+                <a:tc>
+                  <a:txBody>
+                    <a:bodyPr wrap="square"/>
+                    <a:lstStyle/>
+                    <a:p>
+                      <a:pPr algn="l">
+                        <a:spcAft>
+                          <a:spcPts val="0"/>
+                        </a:spcAft>
+                      </a:pPr>
+                      <a:r>
+                        <a:rPr sz="1100" b="0">
+                          <a:solidFill>
+                            <a:srgbClr val="2B2B2B"/>
+                          </a:solidFill>
+                          <a:latin typeface="맑은 고딕"/>
+                        </a:rPr>
+                        <a:t>판매업자 자격 · 등록 · 조직</a:t>
+                      </a:r>
+                    </a:p>
+                  </a:txBody>
+                  <a:tcPr>
+                    <a:solidFill>
+                      <a:srgbClr val="FFFFFF"/>
+                    </a:solidFill>
+                  </a:tcPr>
+                </a:tc>
+                <a:tc>
+                  <a:txBody>
+                    <a:bodyPr wrap="square"/>
+                    <a:lstStyle/>
+                    <a:p>
+                      <a:pPr algn="l">
+                        <a:spcAft>
+                          <a:spcPts val="0"/>
+                        </a:spcAft>
+                      </a:pPr>
+                      <a:r>
+                        <a:rPr sz="1100" b="0">
+                          <a:solidFill>
+                            <a:srgbClr val="2B2B2B"/>
+                          </a:solidFill>
+                          <a:latin typeface="맑은 고딕"/>
+                        </a:rPr>
+                        <a:t>5</a:t>
+                      </a:r>
+                    </a:p>
+                  </a:txBody>
+                  <a:tcPr>
+                    <a:solidFill>
+                      <a:srgbClr val="FFFFFF"/>
+                    </a:solidFill>
+                  </a:tcPr>
+                </a:tc>
+              </a:tr>
+              <a:tr h="329184">
+                <a:tc>
+                  <a:txBody>
+                    <a:bodyPr wrap="square"/>
+                    <a:lstStyle/>
+                    <a:p>
+                      <a:pPr algn="l">
+                        <a:spcAft>
+                          <a:spcPts val="0"/>
+                        </a:spcAft>
+                      </a:pPr>
+                      <a:r>
+                        <a:rPr sz="1100" b="0">
+                          <a:solidFill>
+                            <a:srgbClr val="2B2B2B"/>
+                          </a:solidFill>
+                          <a:latin typeface="맑은 고딕"/>
+                        </a:rPr>
+                        <a:t>합계</a:t>
+                      </a:r>
+                    </a:p>
+                  </a:txBody>
+                  <a:tcPr>
+                    <a:solidFill>
+                      <a:srgbClr val="FFFFFF"/>
+                    </a:solidFill>
+                  </a:tcPr>
+                </a:tc>
+                <a:tc>
+                  <a:txBody>
+                    <a:bodyPr wrap="square"/>
+                    <a:lstStyle/>
+                    <a:p>
+                      <a:pPr algn="l">
+                        <a:spcAft>
+                          <a:spcPts val="0"/>
+                        </a:spcAft>
+                      </a:pPr>
+                      <a:r>
+                        <a:rPr sz="1100" b="0">
+                          <a:solidFill>
+                            <a:srgbClr val="2B2B2B"/>
+                          </a:solidFill>
+                          <a:latin typeface="맑은 고딕"/>
+                        </a:rPr>
+                        <a:t>73</a:t>
+                      </a:r>
+                    </a:p>
+                  </a:txBody>
+                  <a:tcPr>
+                    <a:solidFill>
+                      <a:srgbClr val="FFFFFF"/>
+                    </a:solidFill>
+                  </a:tcPr>
+                </a:tc>
+              </a:tr>
+            </a:tbl>
+          </a:graphicData>
+        </a:graphic>
+      </p:graphicFrame>
+      <p:graphicFrame>
+        <p:nvGraphicFramePr>
+          <p:cNvPr id="6" name="Table 5"/>
+          <p:cNvGraphicFramePr>
+            <a:graphicFrameLocks noGrp="1"/>
+          </p:cNvGraphicFramePr>
+          <p:nvPr/>
+        </p:nvGraphicFramePr>
+        <p:xfrm>
+          <a:off x="6080760" y="1417320"/>
+          <a:ext cx="5550408" cy="2304288"/>
+        </p:xfrm>
+        <a:graphic>
+          <a:graphicData uri="http://schemas.openxmlformats.org/drawingml/2006/table">
+            <a:tbl>
+              <a:tblPr firstRow="1" bandRow="1">
+                <a:tableStyleId>{5C22544A-7EE6-4342-B048-85BDC9FD1C3A}</a:tableStyleId>
+              </a:tblPr>
+              <a:tblGrid>
+                <a:gridCol w="4114800"/>
+                <a:gridCol w="1435608"/>
+              </a:tblGrid>
+              <a:tr h="329184">
+                <a:tc>
+                  <a:txBody>
+                    <a:bodyPr wrap="square"/>
+                    <a:lstStyle/>
+                    <a:p>
+                      <a:pPr algn="l">
+                        <a:spcAft>
+                          <a:spcPts val="0"/>
+                        </a:spcAft>
+                      </a:pPr>
+                      <a:r>
+                        <a:rPr sz="1200" b="1">
+                          <a:solidFill>
+                            <a:srgbClr val="645B4C"/>
+                          </a:solidFill>
+                          <a:latin typeface="맑은 고딕"/>
+                        </a:rPr>
+                        <a:t>판매행위 규제 10개 조문</a:t>
+                      </a:r>
+                    </a:p>
+                  </a:txBody>
+                  <a:tcPr>
+                    <a:solidFill>
+                      <a:srgbClr val="FFF8DF"/>
+                    </a:solidFill>
+                  </a:tcPr>
+                </a:tc>
+                <a:tc>
+                  <a:txBody>
+                    <a:bodyPr wrap="square"/>
+                    <a:lstStyle/>
+                    <a:p>
+                      <a:pPr algn="l">
+                        <a:spcAft>
+                          <a:spcPts val="0"/>
+                        </a:spcAft>
+                      </a:pPr>
+                      <a:r>
+                        <a:rPr sz="1200" b="1">
+                          <a:solidFill>
+                            <a:srgbClr val="645B4C"/>
+                          </a:solidFill>
+                          <a:latin typeface="맑은 고딕"/>
+                        </a:rPr>
+                        <a:t>우리 검사</a:t>
+                      </a:r>
+                    </a:p>
+                  </a:txBody>
+                  <a:tcPr>
+                    <a:solidFill>
+                      <a:srgbClr val="FFF8DF"/>
+                    </a:solidFill>
+                  </a:tcPr>
+                </a:tc>
+              </a:tr>
+              <a:tr h="329184">
+                <a:tc>
+                  <a:txBody>
+                    <a:bodyPr wrap="square"/>
+                    <a:lstStyle/>
+                    <a:p>
+                      <a:pPr algn="l">
+                        <a:spcAft>
+                          <a:spcPts val="0"/>
+                        </a:spcAft>
+                      </a:pPr>
+                      <a:r>
+                        <a:rPr sz="1100" b="0">
+                          <a:solidFill>
+                            <a:srgbClr val="2B2B2B"/>
+                          </a:solidFill>
+                          <a:latin typeface="맑은 고딕"/>
+                        </a:rPr>
+                        <a:t>17 적합성 · 19 설명의무 · 21 부당권유</a:t>
+                      </a:r>
+                    </a:p>
+                  </a:txBody>
+                  <a:tcPr>
+                    <a:solidFill>
+                      <a:srgbClr val="FFFFFF"/>
+                    </a:solidFill>
+                  </a:tcPr>
+                </a:tc>
+                <a:tc>
+                  <a:txBody>
+                    <a:bodyPr wrap="square"/>
+                    <a:lstStyle/>
+                    <a:p>
+                      <a:pPr algn="l">
+                        <a:spcAft>
+                          <a:spcPts val="0"/>
+                        </a:spcAft>
+                      </a:pPr>
+                      <a:r>
+                        <a:rPr sz="1100" b="0">
+                          <a:solidFill>
+                            <a:srgbClr val="2B2B2B"/>
+                          </a:solidFill>
+                          <a:latin typeface="맑은 고딕"/>
+                        </a:rPr>
+                        <a:t>커버</a:t>
+                      </a:r>
+                    </a:p>
+                  </a:txBody>
+                  <a:tcPr>
+                    <a:solidFill>
+                      <a:srgbClr val="FFFFFF"/>
+                    </a:solidFill>
+                  </a:tcPr>
+                </a:tc>
+              </a:tr>
+              <a:tr h="329184">
+                <a:tc>
+                  <a:txBody>
+                    <a:bodyPr wrap="square"/>
+                    <a:lstStyle/>
+                    <a:p>
+                      <a:pPr algn="l">
+                        <a:spcAft>
+                          <a:spcPts val="0"/>
+                        </a:spcAft>
+                      </a:pPr>
+                      <a:r>
+                        <a:rPr sz="1100" b="0">
+                          <a:solidFill>
+                            <a:srgbClr val="2B2B2B"/>
+                          </a:solidFill>
+                          <a:latin typeface="맑은 고딕"/>
+                        </a:rPr>
+                        <a:t>23 계약서류 제공 · 28 자료 기록 유지</a:t>
+                      </a:r>
+                    </a:p>
+                  </a:txBody>
+                  <a:tcPr>
+                    <a:solidFill>
+                      <a:srgbClr val="FFFFFF"/>
+                    </a:solidFill>
+                  </a:tcPr>
+                </a:tc>
+                <a:tc>
+                  <a:txBody>
+                    <a:bodyPr wrap="square"/>
+                    <a:lstStyle/>
+                    <a:p>
+                      <a:pPr algn="l">
+                        <a:spcAft>
+                          <a:spcPts val="0"/>
+                        </a:spcAft>
+                      </a:pPr>
+                      <a:r>
+                        <a:rPr sz="1100" b="0">
+                          <a:solidFill>
+                            <a:srgbClr val="2B2B2B"/>
+                          </a:solidFill>
+                          <a:latin typeface="맑은 고딕"/>
+                        </a:rPr>
+                        <a:t>커버</a:t>
+                      </a:r>
+                    </a:p>
+                  </a:txBody>
+                  <a:tcPr>
+                    <a:solidFill>
+                      <a:srgbClr val="FFFFFF"/>
+                    </a:solidFill>
+                  </a:tcPr>
+                </a:tc>
+              </a:tr>
+              <a:tr h="329184">
+                <a:tc>
+                  <a:txBody>
+                    <a:bodyPr wrap="square"/>
+                    <a:lstStyle/>
+                    <a:p>
+                      <a:pPr algn="l">
+                        <a:spcAft>
+                          <a:spcPts val="0"/>
+                        </a:spcAft>
+                      </a:pPr>
+                      <a:r>
+                        <a:rPr sz="1100" b="0">
+                          <a:solidFill>
+                            <a:srgbClr val="2B2B2B"/>
+                          </a:solidFill>
+                          <a:latin typeface="맑은 고딕"/>
+                        </a:rPr>
+                        <a:t>18 적정성 (권유 여부 정보 필요)</a:t>
+                      </a:r>
+                    </a:p>
+                  </a:txBody>
+                  <a:tcPr>
+                    <a:solidFill>
+                      <a:srgbClr val="FFFFFF"/>
+                    </a:solidFill>
+                  </a:tcPr>
+                </a:tc>
+                <a:tc>
+                  <a:txBody>
+                    <a:bodyPr wrap="square"/>
+                    <a:lstStyle/>
+                    <a:p>
+                      <a:pPr algn="l">
+                        <a:spcAft>
+                          <a:spcPts val="0"/>
+                        </a:spcAft>
+                      </a:pPr>
+                      <a:r>
+                        <a:rPr sz="1100" b="0">
+                          <a:solidFill>
+                            <a:srgbClr val="2B2B2B"/>
+                          </a:solidFill>
+                          <a:latin typeface="맑은 고딕"/>
+                        </a:rPr>
+                        <a:t>서류 밖</a:t>
+                      </a:r>
+                    </a:p>
+                  </a:txBody>
+                  <a:tcPr>
+                    <a:solidFill>
+                      <a:srgbClr val="FFFFFF"/>
+                    </a:solidFill>
+                  </a:tcPr>
+                </a:tc>
+              </a:tr>
+              <a:tr h="329184">
+                <a:tc>
+                  <a:txBody>
+                    <a:bodyPr wrap="square"/>
+                    <a:lstStyle/>
+                    <a:p>
+                      <a:pPr algn="l">
+                        <a:spcAft>
+                          <a:spcPts val="0"/>
+                        </a:spcAft>
+                      </a:pPr>
+                      <a:r>
+                        <a:rPr sz="1100" b="0">
+                          <a:solidFill>
+                            <a:srgbClr val="2B2B2B"/>
+                          </a:solidFill>
+                          <a:latin typeface="맑은 고딕"/>
+                        </a:rPr>
+                        <a:t>20 불공정영업 (타 상품 거래 이력 필요)</a:t>
+                      </a:r>
+                    </a:p>
+                  </a:txBody>
+                  <a:tcPr>
+                    <a:solidFill>
+                      <a:srgbClr val="FFFFFF"/>
+                    </a:solidFill>
+                  </a:tcPr>
+                </a:tc>
+                <a:tc>
+                  <a:txBody>
+                    <a:bodyPr wrap="square"/>
+                    <a:lstStyle/>
+                    <a:p>
+                      <a:pPr algn="l">
+                        <a:spcAft>
+                          <a:spcPts val="0"/>
+                        </a:spcAft>
+                      </a:pPr>
+                      <a:r>
+                        <a:rPr sz="1100" b="0">
+                          <a:solidFill>
+                            <a:srgbClr val="2B2B2B"/>
+                          </a:solidFill>
+                          <a:latin typeface="맑은 고딕"/>
+                        </a:rPr>
+                        <a:t>서류 밖</a:t>
+                      </a:r>
+                    </a:p>
+                  </a:txBody>
+                  <a:tcPr>
+                    <a:solidFill>
+                      <a:srgbClr val="FFFFFF"/>
+                    </a:solidFill>
+                  </a:tcPr>
+                </a:tc>
+              </a:tr>
+              <a:tr h="329184">
+                <a:tc>
+                  <a:txBody>
+                    <a:bodyPr wrap="square"/>
+                    <a:lstStyle/>
+                    <a:p>
+                      <a:pPr algn="l">
+                        <a:spcAft>
+                          <a:spcPts val="0"/>
+                        </a:spcAft>
+                      </a:pPr>
+                      <a:r>
+                        <a:rPr sz="1100" b="0">
+                          <a:solidFill>
+                            <a:srgbClr val="2B2B2B"/>
+                          </a:solidFill>
+                          <a:latin typeface="맑은 고딕"/>
+                        </a:rPr>
+                        <a:t>22 광고 (광고물이 검사 대상)</a:t>
+                      </a:r>
+                    </a:p>
+                  </a:txBody>
+                  <a:tcPr>
+                    <a:solidFill>
+                      <a:srgbClr val="FFFFFF"/>
+                    </a:solidFill>
+                  </a:tcPr>
+                </a:tc>
+                <a:tc>
+                  <a:txBody>
+                    <a:bodyPr wrap="square"/>
+                    <a:lstStyle/>
+                    <a:p>
+                      <a:pPr algn="l">
+                        <a:spcAft>
+                          <a:spcPts val="0"/>
+                        </a:spcAft>
+                      </a:pPr>
+                      <a:r>
+                        <a:rPr sz="1100" b="0">
+                          <a:solidFill>
+                            <a:srgbClr val="2B2B2B"/>
+                          </a:solidFill>
+                          <a:latin typeface="맑은 고딕"/>
+                        </a:rPr>
+                        <a:t>서류 밖</a:t>
+                      </a:r>
+                    </a:p>
+                  </a:txBody>
+                  <a:tcPr>
+                    <a:solidFill>
+                      <a:srgbClr val="FFFFFF"/>
+                    </a:solidFill>
+                  </a:tcPr>
+                </a:tc>
+              </a:tr>
+              <a:tr h="329184">
+                <a:tc>
+                  <a:txBody>
+                    <a:bodyPr wrap="square"/>
+                    <a:lstStyle/>
+                    <a:p>
+                      <a:pPr algn="l">
+                        <a:spcAft>
+                          <a:spcPts val="0"/>
+                        </a:spcAft>
+                      </a:pPr>
+                      <a:r>
+                        <a:rPr sz="1100" b="0">
+                          <a:solidFill>
+                            <a:srgbClr val="2B2B2B"/>
+                          </a:solidFill>
+                          <a:latin typeface="맑은 고딕"/>
+                        </a:rPr>
+                        <a:t>46 청약철회 · 47 위법계약해지</a:t>
+                      </a:r>
+                    </a:p>
+                  </a:txBody>
+                  <a:tcPr>
+                    <a:solidFill>
+                      <a:srgbClr val="FFFFFF"/>
+                    </a:solidFill>
+                  </a:tcPr>
+                </a:tc>
+                <a:tc>
+                  <a:txBody>
+                    <a:bodyPr wrap="square"/>
+                    <a:lstStyle/>
+                    <a:p>
+                      <a:pPr algn="l">
+                        <a:spcAft>
+                          <a:spcPts val="0"/>
+                        </a:spcAft>
+                      </a:pPr>
+                      <a:r>
+                        <a:rPr sz="1100" b="0">
+                          <a:solidFill>
+                            <a:srgbClr val="2B2B2B"/>
+                          </a:solidFill>
+                          <a:latin typeface="맑은 고딕"/>
+                        </a:rPr>
+                        <a:t>판매 이후</a:t>
+                      </a:r>
+                    </a:p>
+                  </a:txBody>
+                  <a:tcPr>
+                    <a:solidFill>
+                      <a:srgbClr val="FFFFFF"/>
+                    </a:solidFill>
+                  </a:tcPr>
+                </a:tc>
+              </a:tr>
+            </a:tbl>
+          </a:graphicData>
+        </a:graphic>
+      </p:graphicFrame>
+      <p:sp>
+        <p:nvSpPr>
+          <p:cNvPr id="7" name="Rounded Rectangle 6"/>
+          <p:cNvSpPr/>
+          <p:nvPr/>
+        </p:nvSpPr>
+        <p:spPr>
+          <a:xfrm>
+            <a:off x="566928" y="4160520"/>
+            <a:ext cx="5303520" cy="1920240"/>
+          </a:xfrm>
+          <a:prstGeom prst="roundRect">
+            <a:avLst/>
+          </a:prstGeom>
+          <a:solidFill>
+            <a:srgbClr val="FFFFFF"/>
+          </a:solidFill>
+          <a:ln>
+            <a:solidFill>
+              <a:srgbClr val="E6E0D4"/>
+            </a:solidFill>
+          </a:ln>
+        </p:spPr>
+        <p:style>
+          <a:lnRef idx="1">
+            <a:schemeClr val="accent1"/>
+          </a:lnRef>
+          <a:fillRef idx="3">
+            <a:schemeClr val="accent1"/>
+          </a:fillRef>
+          <a:effectRef idx="2">
+            <a:schemeClr val="accent1"/>
+          </a:effectRef>
+          <a:fontRef idx="minor">
+            <a:schemeClr val="lt1"/>
+          </a:fontRef>
+        </p:style>
+        <p:txBody>
+          <a:bodyPr rtlCol="0" anchor="ctr"/>
+          <a:lstStyle/>
+          <a:p>
+            <a:pPr algn="ctr"/>
+          </a:p>
+        </p:txBody>
+      </p:sp>
+      <p:sp>
+        <p:nvSpPr>
+          <p:cNvPr id="8" name="Rectangle 7"/>
+          <p:cNvSpPr/>
+          <p:nvPr/>
+        </p:nvSpPr>
+        <p:spPr>
+          <a:xfrm>
+            <a:off x="566928" y="4160520"/>
+            <a:ext cx="54864" cy="1920240"/>
+          </a:xfrm>
+          <a:prstGeom prst="rect">
+            <a:avLst/>
+          </a:prstGeom>
+          <a:solidFill>
+            <a:srgbClr val="FCAF17"/>
+          </a:solidFill>
+          <a:ln>
+            <a:noFill/>
+          </a:ln>
+        </p:spPr>
+        <p:style>
+          <a:lnRef idx="1">
+            <a:schemeClr val="accent1"/>
+          </a:lnRef>
+          <a:fillRef idx="3">
+            <a:schemeClr val="accent1"/>
+          </a:fillRef>
+          <a:effectRef idx="2">
+            <a:schemeClr val="accent1"/>
+          </a:effectRef>
+          <a:fontRef idx="minor">
+            <a:schemeClr val="lt1"/>
+          </a:fontRef>
+        </p:style>
+        <p:txBody>
+          <a:bodyPr rtlCol="0" anchor="ctr"/>
+          <a:lstStyle/>
+          <a:p>
+            <a:pPr algn="ctr"/>
+          </a:p>
+        </p:txBody>
+      </p:sp>
+      <p:sp>
+        <p:nvSpPr>
+          <p:cNvPr id="9" name="TextBox 8"/>
+          <p:cNvSpPr txBox="1"/>
+          <p:nvPr/>
+        </p:nvSpPr>
+        <p:spPr>
+          <a:xfrm>
+            <a:off x="822960" y="4306824"/>
+            <a:ext cx="4846320" cy="1645920"/>
+          </a:xfrm>
+          <a:prstGeom prst="rect">
+            <a:avLst/>
+          </a:prstGeom>
+          <a:noFill/>
+        </p:spPr>
+        <p:txBody>
+          <a:bodyPr wrap="square">
+            <a:spAutoFit/>
+          </a:bodyPr>
+          <a:lstStyle/>
+          <a:p>
+            <a:pPr algn="l">
+              <a:spcAft>
+                <a:spcPts val="700"/>
+              </a:spcAft>
+            </a:pPr>
+            <a:r>
+              <a:rPr sz="1500" b="1">
+                <a:solidFill>
+                  <a:srgbClr val="645B4C"/>
+                </a:solidFill>
+                <a:latin typeface="맑은 고딕"/>
+              </a:rPr>
+              <a:t>분모는 73이 아니라 10입니다</a:t>
+            </a:r>
+          </a:p>
+          <a:p>
+            <a:pPr algn="l">
+              <a:spcAft>
+                <a:spcPts val="500"/>
+              </a:spcAft>
+            </a:pPr>
+            <a:r>
+              <a:rPr sz="1200" b="0">
+                <a:solidFill>
+                  <a:srgbClr val="2B2B2B"/>
+                </a:solidFill>
+                <a:latin typeface="맑은 고딕"/>
+              </a:rPr>
+              <a:t>63개 조문은 정의·감독절차·분쟁조정 등으로,</a:t>
+            </a:r>
+          </a:p>
+          <a:p>
+            <a:pPr algn="l">
+              <a:spcAft>
+                <a:spcPts val="500"/>
+              </a:spcAft>
+            </a:pPr>
+            <a:r>
+              <a:rPr sz="1200" b="0">
+                <a:solidFill>
+                  <a:srgbClr val="2B2B2B"/>
+                </a:solidFill>
+                <a:latin typeface="맑은 고딕"/>
+              </a:rPr>
+              <a:t>판매 시점 서류로 검증할 대상이 아닙니다.</a:t>
+            </a:r>
+          </a:p>
+          <a:p>
+            <a:pPr algn="l">
+              <a:spcAft>
+                <a:spcPts val="500"/>
+              </a:spcAft>
+            </a:pPr>
+            <a:r>
+              <a:rPr sz="1200" b="0">
+                <a:solidFill>
+                  <a:srgbClr val="2B2B2B"/>
+                </a:solidFill>
+                <a:latin typeface="맑은 고딕"/>
+              </a:rPr>
+              <a:t>판매행위 규제 10개 중 '판매 시점에 서류만으로</a:t>
+            </a:r>
+          </a:p>
+          <a:p>
+            <a:pPr algn="l">
+              <a:spcAft>
+                <a:spcPts val="500"/>
+              </a:spcAft>
+            </a:pPr>
+            <a:r>
+              <a:rPr sz="1200" b="0">
+                <a:solidFill>
+                  <a:srgbClr val="2B2B2B"/>
+                </a:solidFill>
+                <a:latin typeface="맑은 고딕"/>
+              </a:rPr>
+              <a:t>확인 가능한 5개'를 모두 검사합니다.</a:t>
+            </a:r>
+          </a:p>
+        </p:txBody>
+      </p:sp>
+      <p:sp>
+        <p:nvSpPr>
+          <p:cNvPr id="10" name="Rounded Rectangle 9"/>
+          <p:cNvSpPr/>
+          <p:nvPr/>
+        </p:nvSpPr>
+        <p:spPr>
+          <a:xfrm>
+            <a:off x="6080760" y="4160520"/>
+            <a:ext cx="5550408" cy="1920240"/>
+          </a:xfrm>
+          <a:prstGeom prst="roundRect">
+            <a:avLst/>
+          </a:prstGeom>
+          <a:solidFill>
+            <a:srgbClr val="FFFFFF"/>
+          </a:solidFill>
+          <a:ln>
+            <a:solidFill>
+              <a:srgbClr val="E6E0D4"/>
+            </a:solidFill>
+          </a:ln>
+        </p:spPr>
+        <p:style>
+          <a:lnRef idx="1">
+            <a:schemeClr val="accent1"/>
+          </a:lnRef>
+          <a:fillRef idx="3">
+            <a:schemeClr val="accent1"/>
+          </a:fillRef>
+          <a:effectRef idx="2">
+            <a:schemeClr val="accent1"/>
+          </a:effectRef>
+          <a:fontRef idx="minor">
+            <a:schemeClr val="lt1"/>
+          </a:fontRef>
+        </p:style>
+        <p:txBody>
+          <a:bodyPr rtlCol="0" anchor="ctr"/>
+          <a:lstStyle/>
+          <a:p>
+            <a:pPr algn="ctr"/>
+          </a:p>
+        </p:txBody>
+      </p:sp>
+      <p:sp>
+        <p:nvSpPr>
+          <p:cNvPr id="11" name="Rectangle 10"/>
+          <p:cNvSpPr/>
+          <p:nvPr/>
+        </p:nvSpPr>
+        <p:spPr>
+          <a:xfrm>
+            <a:off x="6080760" y="4160520"/>
+            <a:ext cx="54864" cy="1920240"/>
+          </a:xfrm>
+          <a:prstGeom prst="rect">
+            <a:avLst/>
+          </a:prstGeom>
+          <a:solidFill>
+            <a:srgbClr val="2E7D32"/>
+          </a:solidFill>
+          <a:ln>
+            <a:noFill/>
+          </a:ln>
+        </p:spPr>
+        <p:style>
+          <a:lnRef idx="1">
+            <a:schemeClr val="accent1"/>
+          </a:lnRef>
+          <a:fillRef idx="3">
+            <a:schemeClr val="accent1"/>
+          </a:fillRef>
+          <a:effectRef idx="2">
+            <a:schemeClr val="accent1"/>
+          </a:effectRef>
+          <a:fontRef idx="minor">
+            <a:schemeClr val="lt1"/>
+          </a:fontRef>
+        </p:style>
+        <p:txBody>
+          <a:bodyPr rtlCol="0" anchor="ctr"/>
+          <a:lstStyle/>
+          <a:p>
+            <a:pPr algn="ctr"/>
+          </a:p>
+        </p:txBody>
+      </p:sp>
+      <p:sp>
+        <p:nvSpPr>
+          <p:cNvPr id="12" name="TextBox 11"/>
+          <p:cNvSpPr txBox="1"/>
+          <p:nvPr/>
+        </p:nvSpPr>
+        <p:spPr>
+          <a:xfrm>
+            <a:off x="6336792" y="4306824"/>
+            <a:ext cx="5093208" cy="1645920"/>
+          </a:xfrm>
+          <a:prstGeom prst="rect">
+            <a:avLst/>
+          </a:prstGeom>
+          <a:noFill/>
+        </p:spPr>
+        <p:txBody>
+          <a:bodyPr wrap="square">
+            <a:spAutoFit/>
+          </a:bodyPr>
+          <a:lstStyle/>
+          <a:p>
+            <a:pPr algn="l">
+              <a:spcAft>
+                <a:spcPts val="700"/>
+              </a:spcAft>
+            </a:pPr>
+            <a:r>
+              <a:rPr sz="1500" b="1">
+                <a:solidFill>
+                  <a:srgbClr val="645B4C"/>
+                </a:solidFill>
+                <a:latin typeface="맑은 고딕"/>
+              </a:rPr>
+              <a:t>넓게 얕게가 아니라, 좁게 깊게</a:t>
+            </a:r>
+          </a:p>
+          <a:p>
+            <a:pPr algn="l">
+              <a:spcAft>
+                <a:spcPts val="500"/>
+              </a:spcAft>
+            </a:pPr>
+            <a:r>
+              <a:rPr sz="1200" b="0">
+                <a:solidFill>
+                  <a:srgbClr val="2B2B2B"/>
+                </a:solidFill>
+                <a:latin typeface="맑은 고딕"/>
+              </a:rPr>
+              <a:t>설명의무(19조) 하나를 3개 규칙으로 나눠 봅니다</a:t>
+            </a:r>
+          </a:p>
+          <a:p>
+            <a:pPr algn="l">
+              <a:spcAft>
+                <a:spcPts val="500"/>
+              </a:spcAft>
+            </a:pPr>
+            <a:r>
+              <a:rPr sz="1200" b="0">
+                <a:solidFill>
+                  <a:srgbClr val="2B2B2B"/>
+                </a:solidFill>
+                <a:latin typeface="맑은 고딕"/>
+              </a:rPr>
+              <a:t>  EXP-001 설명 항목이 실제로 있는가</a:t>
+            </a:r>
+          </a:p>
+          <a:p>
+            <a:pPr algn="l">
+              <a:spcAft>
+                <a:spcPts val="500"/>
+              </a:spcAft>
+            </a:pPr>
+            <a:r>
+              <a:rPr sz="1200" b="0">
+                <a:solidFill>
+                  <a:srgbClr val="2B2B2B"/>
+                </a:solidFill>
+                <a:latin typeface="맑은 고딕"/>
+              </a:rPr>
+              <a:t>  DATE-001 설명이 계약보다 먼저였는가</a:t>
+            </a:r>
+          </a:p>
+          <a:p>
+            <a:pPr algn="l">
+              <a:spcAft>
+                <a:spcPts val="500"/>
+              </a:spcAft>
+            </a:pPr>
+            <a:r>
+              <a:rPr sz="1200" b="0">
+                <a:solidFill>
+                  <a:srgbClr val="2B2B2B"/>
+                </a:solidFill>
+                <a:latin typeface="맑은 고딕"/>
+              </a:rPr>
+              <a:t>  ACK-001 고객 확인·서명이 실재하는가</a:t>
+            </a:r>
+          </a:p>
+        </p:txBody>
+      </p:sp>
+    </p:spTree>
+  </p:cSld>
+  <p:clrMapOvr>
+    <a:masterClrMapping/>
+  </p:clrMapOvr>
+</p:sld>
+</file>
+
+<file path=ppt/slides/slide14.xml><?xml version="1.0" encoding="utf-8"?>
 <p:sld xmlns:a="http://schemas.openxmlformats.org/drawingml/2006/main" xmlns:p="http://schemas.openxmlformats.org/presentationml/2006/main" xmlns:r="http://schemas.openxmlformats.org/officeDocument/2006/relationships">
   <p:cSld>
     <p:spTree>
@@ -6749,7 +9436,7 @@
 </p:sld>
 </file>
 
-<file path=ppt/slides/slide13.xml><?xml version="1.0" encoding="utf-8"?>
+<file path=ppt/slides/slide15.xml><?xml version="1.0" encoding="utf-8"?>
 <p:sld xmlns:a="http://schemas.openxmlformats.org/drawingml/2006/main" xmlns:p="http://schemas.openxmlformats.org/presentationml/2006/main" xmlns:r="http://schemas.openxmlformats.org/officeDocument/2006/relationships">
   <p:cSld>
     <p:spTree>
@@ -7883,7 +10570,7 @@
 </p:sld>
 </file>
 
-<file path=ppt/slides/slide14.xml><?xml version="1.0" encoding="utf-8"?>
+<file path=ppt/slides/slide16.xml><?xml version="1.0" encoding="utf-8"?>
 <p:sld xmlns:a="http://schemas.openxmlformats.org/drawingml/2006/main" xmlns:p="http://schemas.openxmlformats.org/presentationml/2006/main" xmlns:r="http://schemas.openxmlformats.org/officeDocument/2006/relationships">
   <p:cSld>
     <p:spTree>
@@ -8853,7 +11540,7 @@
 </p:sld>
 </file>
 
-<file path=ppt/slides/slide15.xml><?xml version="1.0" encoding="utf-8"?>
+<file path=ppt/slides/slide17.xml><?xml version="1.0" encoding="utf-8"?>
 <p:sld xmlns:a="http://schemas.openxmlformats.org/drawingml/2006/main" xmlns:p="http://schemas.openxmlformats.org/presentationml/2006/main" xmlns:r="http://schemas.openxmlformats.org/officeDocument/2006/relationships">
   <p:cSld>
     <p:spTree>
@@ -9281,7 +11968,7 @@
                           </a:solidFill>
                           <a:latin typeface="맑은 고딕"/>
                         </a:rPr>
-                        <a:t>금소법 6대 원칙 중 4개만 검사</a:t>
+                        <a:t>6대 원칙 중 3개(18·20·22조)는 미검사</a:t>
                       </a:r>
                     </a:p>
                   </a:txBody>
@@ -9308,7 +11995,7 @@
                           </a:solidFill>
                           <a:latin typeface="맑은 고딕"/>
                         </a:rPr>
-                        <a:t>규칙을 실물로 검증하며 추가해 왔음</a:t>
+                        <a:t>판매서류만으로는 판단에 필요한 정보가 없음</a:t>
                       </a:r>
                     </a:p>
                   </a:txBody>
@@ -9362,7 +12049,7 @@
                           </a:solidFill>
                           <a:latin typeface="맑은 고딕"/>
                         </a:rPr>
-                        <a:t>18·20·22조 규칙 추가</a:t>
+                        <a:t>판매채널·거래이력 연계 시 확장</a:t>
                       </a:r>
                     </a:p>
                   </a:txBody>
@@ -9770,7 +12457,7 @@
 </p:sld>
 </file>
 
-<file path=ppt/slides/slide16.xml><?xml version="1.0" encoding="utf-8"?>
+<file path=ppt/slides/slide18.xml><?xml version="1.0" encoding="utf-8"?>
 <p:sld xmlns:a="http://schemas.openxmlformats.org/drawingml/2006/main" xmlns:p="http://schemas.openxmlformats.org/presentationml/2006/main" xmlns:r="http://schemas.openxmlformats.org/officeDocument/2006/relationships">
   <p:cSld>
     <p:spTree>
@@ -9873,7 +12560,7 @@
                 </a:solidFill>
                 <a:latin typeface="맑은 고딕"/>
               </a:rPr>
-              <a:t>예선 이후 본선까지의 구체적 로드맵</a:t>
+              <a:t>예선 제출본은 여기서 고정하고, 본선 진출 시 단계별로 확장합니다</a:t>
             </a:r>
           </a:p>
         </p:txBody>
@@ -10088,7 +12775,7 @@
                           </a:solidFill>
                           <a:latin typeface="맑은 고딕"/>
                         </a:rPr>
-                        <a:t>현재 (예선 제출)</a:t>
+                        <a:t>예선 제출 (완료·고정)</a:t>
                       </a:r>
                     </a:p>
                   </a:txBody>
@@ -10115,7 +12802,7 @@
                           </a:solidFill>
                           <a:latin typeface="맑은 고딕"/>
                         </a:rPr>
-                        <a:t>핵심 파이프라인 완성</a:t>
+                        <a:t>핵심 파이프라인</a:t>
                       </a:r>
                     </a:p>
                   </a:txBody>
@@ -10198,7 +12885,7 @@
                           </a:solidFill>
                           <a:latin typeface="맑은 고딕"/>
                         </a:rPr>
-                        <a:t>1주차</a:t>
+                        <a:t>본선 1단계</a:t>
                       </a:r>
                     </a:p>
                   </a:txBody>
@@ -10225,7 +12912,7 @@
                           </a:solidFill>
                           <a:latin typeface="맑은 고딕"/>
                         </a:rPr>
-                        <a:t>검사 범위 확대</a:t>
+                        <a:t>녹취 검증</a:t>
                       </a:r>
                     </a:p>
                   </a:txBody>
@@ -10252,7 +12939,7 @@
                           </a:solidFill>
                           <a:latin typeface="맑은 고딕"/>
                         </a:rPr>
-                        <a:t>적정성(18조) · 불공정영업(20조) · 광고(22조) 규칙 추가</a:t>
+                        <a:t>음성 업로드 + STT로 '원금손실 낭독 → 고객 동의' 확인 (현재 미검사 영역)</a:t>
                       </a:r>
                     </a:p>
                   </a:txBody>
@@ -10279,7 +12966,7 @@
                           </a:solidFill>
                           <a:latin typeface="맑은 고딕"/>
                         </a:rPr>
-                        <a:t>규칙별 회귀 테스트 · 정상 서류 오탐 0 유지</a:t>
+                        <a:t>샘플 녹취로 문구 검출률 측정</a:t>
                       </a:r>
                     </a:p>
                   </a:txBody>
@@ -10308,7 +12995,7 @@
                           </a:solidFill>
                           <a:latin typeface="맑은 고딕"/>
                         </a:rPr>
-                        <a:t>2주차</a:t>
+                        <a:t>본선 2단계</a:t>
                       </a:r>
                     </a:p>
                   </a:txBody>
@@ -10335,7 +13022,7 @@
                           </a:solidFill>
                           <a:latin typeface="맑은 고딕"/>
                         </a:rPr>
-                        <a:t>녹취 검증</a:t>
+                        <a:t>검사 범위 확대</a:t>
                       </a:r>
                     </a:p>
                   </a:txBody>
@@ -10362,7 +13049,7 @@
                           </a:solidFill>
                           <a:latin typeface="맑은 고딕"/>
                         </a:rPr>
-                        <a:t>음성 업로드 + STT로 '원금손실 낭독 → 고객 동의' 확인</a:t>
+                        <a:t>적정성(18조)·불공정영업(20조)은 판매채널·거래이력 연계가 전제 — 연계 가능 시 규칙 추가</a:t>
                       </a:r>
                     </a:p>
                   </a:txBody>
@@ -10389,7 +13076,7 @@
                           </a:solidFill>
                           <a:latin typeface="맑은 고딕"/>
                         </a:rPr>
-                        <a:t>샘플 녹취로 문구 검출률 측정</a:t>
+                        <a:t>규칙별 회귀 테스트 · 정상 서류 오탐 0 유지</a:t>
                       </a:r>
                     </a:p>
                   </a:txBody>
@@ -10418,7 +13105,7 @@
                           </a:solidFill>
                           <a:latin typeface="맑은 고딕"/>
                         </a:rPr>
-                        <a:t>3주차</a:t>
+                        <a:t>본선 3단계</a:t>
                       </a:r>
                     </a:p>
                   </a:txBody>
@@ -10703,7 +13390,7 @@
 </p:sld>
 </file>
 
-<file path=ppt/slides/slide17.xml><?xml version="1.0" encoding="utf-8"?>
+<file path=ppt/slides/slide19.xml><?xml version="1.0" encoding="utf-8"?>
 <p:sld xmlns:a="http://schemas.openxmlformats.org/drawingml/2006/main" xmlns:p="http://schemas.openxmlformats.org/presentationml/2006/main" xmlns:r="http://schemas.openxmlformats.org/officeDocument/2006/relationships">
   <p:cSld>
     <p:spTree>
@@ -11756,7 +14443,825 @@
 </p:sld>
 </file>
 
-<file path=ppt/slides/slide18.xml><?xml version="1.0" encoding="utf-8"?>
+<file path=ppt/slides/slide2.xml><?xml version="1.0" encoding="utf-8"?>
+<p:sld xmlns:a="http://schemas.openxmlformats.org/drawingml/2006/main" xmlns:p="http://schemas.openxmlformats.org/presentationml/2006/main" xmlns:r="http://schemas.openxmlformats.org/officeDocument/2006/relationships">
+  <p:cSld>
+    <p:spTree>
+      <p:nvGrpSpPr>
+        <p:cNvPr id="1" name=""/>
+        <p:cNvGrpSpPr/>
+        <p:nvPr/>
+      </p:nvGrpSpPr>
+      <p:grpSpPr/>
+      <p:sp>
+        <p:nvSpPr>
+          <p:cNvPr id="2" name="Rectangle 1"/>
+          <p:cNvSpPr/>
+          <p:nvPr/>
+        </p:nvSpPr>
+        <p:spPr>
+          <a:xfrm>
+            <a:off x="0" y="0"/>
+            <a:ext cx="12191695" cy="82296"/>
+          </a:xfrm>
+          <a:prstGeom prst="rect">
+            <a:avLst/>
+          </a:prstGeom>
+          <a:solidFill>
+            <a:srgbClr val="FCAF17"/>
+          </a:solidFill>
+          <a:ln>
+            <a:noFill/>
+          </a:ln>
+        </p:spPr>
+        <p:style>
+          <a:lnRef idx="1">
+            <a:schemeClr val="accent1"/>
+          </a:lnRef>
+          <a:fillRef idx="3">
+            <a:schemeClr val="accent1"/>
+          </a:fillRef>
+          <a:effectRef idx="2">
+            <a:schemeClr val="accent1"/>
+          </a:effectRef>
+          <a:fontRef idx="minor">
+            <a:schemeClr val="lt1"/>
+          </a:fontRef>
+        </p:style>
+        <p:txBody>
+          <a:bodyPr rtlCol="0" anchor="ctr"/>
+          <a:lstStyle/>
+          <a:p>
+            <a:pPr algn="ctr"/>
+          </a:p>
+        </p:txBody>
+      </p:sp>
+      <p:sp>
+        <p:nvSpPr>
+          <p:cNvPr id="3" name="TextBox 2"/>
+          <p:cNvSpPr txBox="1"/>
+          <p:nvPr/>
+        </p:nvSpPr>
+        <p:spPr>
+          <a:xfrm>
+            <a:off x="566928" y="310896"/>
+            <a:ext cx="10424160" cy="914400"/>
+          </a:xfrm>
+          <a:prstGeom prst="rect">
+            <a:avLst/>
+          </a:prstGeom>
+          <a:noFill/>
+        </p:spPr>
+        <p:txBody>
+          <a:bodyPr wrap="square">
+            <a:spAutoFit/>
+          </a:bodyPr>
+          <a:lstStyle/>
+          <a:p>
+            <a:pPr algn="l">
+              <a:spcAft>
+                <a:spcPts val="200"/>
+              </a:spcAft>
+            </a:pPr>
+            <a:r>
+              <a:rPr sz="3000" b="1">
+                <a:solidFill>
+                  <a:srgbClr val="645B4C"/>
+                </a:solidFill>
+                <a:latin typeface="맑은 고딕"/>
+              </a:rPr>
+              <a:t>문제 정의</a:t>
+            </a:r>
+          </a:p>
+          <a:p>
+            <a:pPr algn="l">
+              <a:spcAft>
+                <a:spcPts val="600"/>
+              </a:spcAft>
+            </a:pPr>
+            <a:r>
+              <a:rPr sz="1400" b="0">
+                <a:solidFill>
+                  <a:srgbClr val="6B6B6B"/>
+                </a:solidFill>
+                <a:latin typeface="맑은 고딕"/>
+              </a:rPr>
+              <a:t>서류 하나만 보면 원리적으로 잡을 수 없는 위반이 있다</a:t>
+            </a:r>
+          </a:p>
+        </p:txBody>
+      </p:sp>
+      <p:sp>
+        <p:nvSpPr>
+          <p:cNvPr id="4" name="Rounded Rectangle 3"/>
+          <p:cNvSpPr/>
+          <p:nvPr/>
+        </p:nvSpPr>
+        <p:spPr>
+          <a:xfrm>
+            <a:off x="9646920" y="329184"/>
+            <a:ext cx="1965960" cy="384048"/>
+          </a:xfrm>
+          <a:prstGeom prst="roundRect">
+            <a:avLst/>
+          </a:prstGeom>
+          <a:solidFill>
+            <a:srgbClr val="FFF8DF"/>
+          </a:solidFill>
+          <a:ln>
+            <a:solidFill>
+              <a:srgbClr val="FCAF17"/>
+            </a:solidFill>
+          </a:ln>
+        </p:spPr>
+        <p:style>
+          <a:lnRef idx="1">
+            <a:schemeClr val="accent1"/>
+          </a:lnRef>
+          <a:fillRef idx="3">
+            <a:schemeClr val="accent1"/>
+          </a:fillRef>
+          <a:effectRef idx="2">
+            <a:schemeClr val="accent1"/>
+          </a:effectRef>
+          <a:fontRef idx="minor">
+            <a:schemeClr val="lt1"/>
+          </a:fontRef>
+        </p:style>
+        <p:txBody>
+          <a:bodyPr rtlCol="0" anchor="ctr" wrap="square"/>
+          <a:lstStyle/>
+          <a:p>
+            <a:pPr algn="ctr">
+              <a:spcAft>
+                <a:spcPts val="0"/>
+              </a:spcAft>
+            </a:pPr>
+            <a:r>
+              <a:rPr sz="1100" b="1">
+                <a:solidFill>
+                  <a:srgbClr val="645B4C"/>
+                </a:solidFill>
+                <a:latin typeface="맑은 고딕"/>
+              </a:rPr>
+              <a:t>문제 정의·필요성</a:t>
+            </a:r>
+          </a:p>
+        </p:txBody>
+      </p:sp>
+      <p:sp>
+        <p:nvSpPr>
+          <p:cNvPr id="5" name="Rounded Rectangle 4"/>
+          <p:cNvSpPr/>
+          <p:nvPr/>
+        </p:nvSpPr>
+        <p:spPr>
+          <a:xfrm>
+            <a:off x="566928" y="1463040"/>
+            <a:ext cx="3520440" cy="2148840"/>
+          </a:xfrm>
+          <a:prstGeom prst="roundRect">
+            <a:avLst/>
+          </a:prstGeom>
+          <a:solidFill>
+            <a:srgbClr val="FFFFFF"/>
+          </a:solidFill>
+          <a:ln>
+            <a:solidFill>
+              <a:srgbClr val="E6E0D4"/>
+            </a:solidFill>
+          </a:ln>
+        </p:spPr>
+        <p:style>
+          <a:lnRef idx="1">
+            <a:schemeClr val="accent1"/>
+          </a:lnRef>
+          <a:fillRef idx="3">
+            <a:schemeClr val="accent1"/>
+          </a:fillRef>
+          <a:effectRef idx="2">
+            <a:schemeClr val="accent1"/>
+          </a:effectRef>
+          <a:fontRef idx="minor">
+            <a:schemeClr val="lt1"/>
+          </a:fontRef>
+        </p:style>
+        <p:txBody>
+          <a:bodyPr rtlCol="0" anchor="ctr"/>
+          <a:lstStyle/>
+          <a:p>
+            <a:pPr algn="ctr"/>
+          </a:p>
+        </p:txBody>
+      </p:sp>
+      <p:sp>
+        <p:nvSpPr>
+          <p:cNvPr id="6" name="Rectangle 5"/>
+          <p:cNvSpPr/>
+          <p:nvPr/>
+        </p:nvSpPr>
+        <p:spPr>
+          <a:xfrm>
+            <a:off x="566928" y="1463040"/>
+            <a:ext cx="54864" cy="2148840"/>
+          </a:xfrm>
+          <a:prstGeom prst="rect">
+            <a:avLst/>
+          </a:prstGeom>
+          <a:solidFill>
+            <a:srgbClr val="C62828"/>
+          </a:solidFill>
+          <a:ln>
+            <a:noFill/>
+          </a:ln>
+        </p:spPr>
+        <p:style>
+          <a:lnRef idx="1">
+            <a:schemeClr val="accent1"/>
+          </a:lnRef>
+          <a:fillRef idx="3">
+            <a:schemeClr val="accent1"/>
+          </a:fillRef>
+          <a:effectRef idx="2">
+            <a:schemeClr val="accent1"/>
+          </a:effectRef>
+          <a:fontRef idx="minor">
+            <a:schemeClr val="lt1"/>
+          </a:fontRef>
+        </p:style>
+        <p:txBody>
+          <a:bodyPr rtlCol="0" anchor="ctr"/>
+          <a:lstStyle/>
+          <a:p>
+            <a:pPr algn="ctr"/>
+          </a:p>
+        </p:txBody>
+      </p:sp>
+      <p:sp>
+        <p:nvSpPr>
+          <p:cNvPr id="7" name="TextBox 6"/>
+          <p:cNvSpPr txBox="1"/>
+          <p:nvPr/>
+        </p:nvSpPr>
+        <p:spPr>
+          <a:xfrm>
+            <a:off x="822960" y="1609344"/>
+            <a:ext cx="3063240" cy="1874520"/>
+          </a:xfrm>
+          <a:prstGeom prst="rect">
+            <a:avLst/>
+          </a:prstGeom>
+          <a:noFill/>
+        </p:spPr>
+        <p:txBody>
+          <a:bodyPr wrap="square">
+            <a:spAutoFit/>
+          </a:bodyPr>
+          <a:lstStyle/>
+          <a:p>
+            <a:pPr algn="l">
+              <a:spcAft>
+                <a:spcPts val="700"/>
+              </a:spcAft>
+            </a:pPr>
+            <a:r>
+              <a:rPr sz="1500" b="1">
+                <a:solidFill>
+                  <a:srgbClr val="645B4C"/>
+                </a:solidFill>
+                <a:latin typeface="맑은 고딕"/>
+              </a:rPr>
+              <a:t>① 위반은 서류 사이에 있다</a:t>
+            </a:r>
+          </a:p>
+          <a:p>
+            <a:pPr algn="l">
+              <a:spcAft>
+                <a:spcPts val="500"/>
+              </a:spcAft>
+            </a:pPr>
+            <a:r>
+              <a:rPr sz="1200" b="0">
+                <a:solidFill>
+                  <a:srgbClr val="2B2B2B"/>
+                </a:solidFill>
+                <a:latin typeface="맑은 고딕"/>
+              </a:rPr>
+              <a:t>진단표: 고객 투자성향 '안정형'</a:t>
+            </a:r>
+          </a:p>
+          <a:p>
+            <a:pPr algn="l">
+              <a:spcAft>
+                <a:spcPts val="500"/>
+              </a:spcAft>
+            </a:pPr>
+            <a:r>
+              <a:rPr sz="1200" b="0">
+                <a:solidFill>
+                  <a:srgbClr val="2B2B2B"/>
+                </a:solidFill>
+                <a:latin typeface="맑은 고딕"/>
+              </a:rPr>
+              <a:t>상품설명서: 위험등급 '1등급'</a:t>
+            </a:r>
+          </a:p>
+          <a:p>
+            <a:pPr algn="l">
+              <a:spcAft>
+                <a:spcPts val="500"/>
+              </a:spcAft>
+            </a:pPr>
+            <a:r>
+              <a:rPr sz="1200" b="0">
+                <a:solidFill>
+                  <a:srgbClr val="2B2B2B"/>
+                </a:solidFill>
+                <a:latin typeface="맑은 고딕"/>
+              </a:rPr>
+              <a:t>→ 각 서류는 정상. 대조해야 위반</a:t>
+            </a:r>
+          </a:p>
+          <a:p>
+            <a:pPr algn="l">
+              <a:spcAft>
+                <a:spcPts val="500"/>
+              </a:spcAft>
+            </a:pPr>
+            <a:r>
+              <a:rPr sz="1200" b="0">
+                <a:solidFill>
+                  <a:srgbClr val="2B2B2B"/>
+                </a:solidFill>
+                <a:latin typeface="맑은 고딕"/>
+              </a:rPr>
+              <a:t>금소법 17조 적합성원칙 위반 소지</a:t>
+            </a:r>
+          </a:p>
+        </p:txBody>
+      </p:sp>
+      <p:sp>
+        <p:nvSpPr>
+          <p:cNvPr id="8" name="Rounded Rectangle 7"/>
+          <p:cNvSpPr/>
+          <p:nvPr/>
+        </p:nvSpPr>
+        <p:spPr>
+          <a:xfrm>
+            <a:off x="4315968" y="1463040"/>
+            <a:ext cx="3520440" cy="2148840"/>
+          </a:xfrm>
+          <a:prstGeom prst="roundRect">
+            <a:avLst/>
+          </a:prstGeom>
+          <a:solidFill>
+            <a:srgbClr val="FFFFFF"/>
+          </a:solidFill>
+          <a:ln>
+            <a:solidFill>
+              <a:srgbClr val="E6E0D4"/>
+            </a:solidFill>
+          </a:ln>
+        </p:spPr>
+        <p:style>
+          <a:lnRef idx="1">
+            <a:schemeClr val="accent1"/>
+          </a:lnRef>
+          <a:fillRef idx="3">
+            <a:schemeClr val="accent1"/>
+          </a:fillRef>
+          <a:effectRef idx="2">
+            <a:schemeClr val="accent1"/>
+          </a:effectRef>
+          <a:fontRef idx="minor">
+            <a:schemeClr val="lt1"/>
+          </a:fontRef>
+        </p:style>
+        <p:txBody>
+          <a:bodyPr rtlCol="0" anchor="ctr"/>
+          <a:lstStyle/>
+          <a:p>
+            <a:pPr algn="ctr"/>
+          </a:p>
+        </p:txBody>
+      </p:sp>
+      <p:sp>
+        <p:nvSpPr>
+          <p:cNvPr id="9" name="Rectangle 8"/>
+          <p:cNvSpPr/>
+          <p:nvPr/>
+        </p:nvSpPr>
+        <p:spPr>
+          <a:xfrm>
+            <a:off x="4315968" y="1463040"/>
+            <a:ext cx="54864" cy="2148840"/>
+          </a:xfrm>
+          <a:prstGeom prst="rect">
+            <a:avLst/>
+          </a:prstGeom>
+          <a:solidFill>
+            <a:srgbClr val="FCAF17"/>
+          </a:solidFill>
+          <a:ln>
+            <a:noFill/>
+          </a:ln>
+        </p:spPr>
+        <p:style>
+          <a:lnRef idx="1">
+            <a:schemeClr val="accent1"/>
+          </a:lnRef>
+          <a:fillRef idx="3">
+            <a:schemeClr val="accent1"/>
+          </a:fillRef>
+          <a:effectRef idx="2">
+            <a:schemeClr val="accent1"/>
+          </a:effectRef>
+          <a:fontRef idx="minor">
+            <a:schemeClr val="lt1"/>
+          </a:fontRef>
+        </p:style>
+        <p:txBody>
+          <a:bodyPr rtlCol="0" anchor="ctr"/>
+          <a:lstStyle/>
+          <a:p>
+            <a:pPr algn="ctr"/>
+          </a:p>
+        </p:txBody>
+      </p:sp>
+      <p:sp>
+        <p:nvSpPr>
+          <p:cNvPr id="10" name="TextBox 9"/>
+          <p:cNvSpPr txBox="1"/>
+          <p:nvPr/>
+        </p:nvSpPr>
+        <p:spPr>
+          <a:xfrm>
+            <a:off x="4572000" y="1609344"/>
+            <a:ext cx="3063240" cy="1874520"/>
+          </a:xfrm>
+          <a:prstGeom prst="rect">
+            <a:avLst/>
+          </a:prstGeom>
+          <a:noFill/>
+        </p:spPr>
+        <p:txBody>
+          <a:bodyPr wrap="square">
+            <a:spAutoFit/>
+          </a:bodyPr>
+          <a:lstStyle/>
+          <a:p>
+            <a:pPr algn="l">
+              <a:spcAft>
+                <a:spcPts val="700"/>
+              </a:spcAft>
+            </a:pPr>
+            <a:r>
+              <a:rPr sz="1500" b="1">
+                <a:solidFill>
+                  <a:srgbClr val="645B4C"/>
+                </a:solidFill>
+                <a:latin typeface="맑은 고딕"/>
+              </a:rPr>
+              <a:t>② 사람이 눈으로 대조한다</a:t>
+            </a:r>
+          </a:p>
+          <a:p>
+            <a:pPr algn="l">
+              <a:spcAft>
+                <a:spcPts val="500"/>
+              </a:spcAft>
+            </a:pPr>
+            <a:r>
+              <a:rPr sz="1200" b="0">
+                <a:solidFill>
+                  <a:srgbClr val="2B2B2B"/>
+                </a:solidFill>
+                <a:latin typeface="맑은 고딕"/>
+              </a:rPr>
+              <a:t>판매 1건 = 서류 4종 교차 확인</a:t>
+            </a:r>
+          </a:p>
+          <a:p>
+            <a:pPr algn="l">
+              <a:spcAft>
+                <a:spcPts val="500"/>
+              </a:spcAft>
+            </a:pPr>
+            <a:r>
+              <a:rPr sz="1200" b="0">
+                <a:solidFill>
+                  <a:srgbClr val="2B2B2B"/>
+                </a:solidFill>
+                <a:latin typeface="맑은 고딕"/>
+              </a:rPr>
+              <a:t>고객 성향·상품 등급·설명일·계약일·서명</a:t>
+            </a:r>
+          </a:p>
+          <a:p>
+            <a:pPr algn="l">
+              <a:spcAft>
+                <a:spcPts val="500"/>
+              </a:spcAft>
+            </a:pPr>
+            <a:r>
+              <a:rPr sz="1200" b="0">
+                <a:solidFill>
+                  <a:srgbClr val="2B2B2B"/>
+                </a:solidFill>
+                <a:latin typeface="맑은 고딕"/>
+              </a:rPr>
+              <a:t>건수가 쌓이면 누락이 발생</a:t>
+            </a:r>
+          </a:p>
+          <a:p>
+            <a:pPr algn="l">
+              <a:spcAft>
+                <a:spcPts val="500"/>
+              </a:spcAft>
+            </a:pPr>
+            <a:r>
+              <a:rPr sz="1200" b="0">
+                <a:solidFill>
+                  <a:srgbClr val="2B2B2B"/>
+                </a:solidFill>
+                <a:latin typeface="맑은 고딕"/>
+              </a:rPr>
+              <a:t>사후 분쟁 시 입증 부담은 판매사</a:t>
+            </a:r>
+          </a:p>
+        </p:txBody>
+      </p:sp>
+      <p:sp>
+        <p:nvSpPr>
+          <p:cNvPr id="11" name="Rounded Rectangle 10"/>
+          <p:cNvSpPr/>
+          <p:nvPr/>
+        </p:nvSpPr>
+        <p:spPr>
+          <a:xfrm>
+            <a:off x="8065008" y="1463040"/>
+            <a:ext cx="3566160" cy="2148840"/>
+          </a:xfrm>
+          <a:prstGeom prst="roundRect">
+            <a:avLst/>
+          </a:prstGeom>
+          <a:solidFill>
+            <a:srgbClr val="FFFFFF"/>
+          </a:solidFill>
+          <a:ln>
+            <a:solidFill>
+              <a:srgbClr val="E6E0D4"/>
+            </a:solidFill>
+          </a:ln>
+        </p:spPr>
+        <p:style>
+          <a:lnRef idx="1">
+            <a:schemeClr val="accent1"/>
+          </a:lnRef>
+          <a:fillRef idx="3">
+            <a:schemeClr val="accent1"/>
+          </a:fillRef>
+          <a:effectRef idx="2">
+            <a:schemeClr val="accent1"/>
+          </a:effectRef>
+          <a:fontRef idx="minor">
+            <a:schemeClr val="lt1"/>
+          </a:fontRef>
+        </p:style>
+        <p:txBody>
+          <a:bodyPr rtlCol="0" anchor="ctr"/>
+          <a:lstStyle/>
+          <a:p>
+            <a:pPr algn="ctr"/>
+          </a:p>
+        </p:txBody>
+      </p:sp>
+      <p:sp>
+        <p:nvSpPr>
+          <p:cNvPr id="12" name="Rectangle 11"/>
+          <p:cNvSpPr/>
+          <p:nvPr/>
+        </p:nvSpPr>
+        <p:spPr>
+          <a:xfrm>
+            <a:off x="8065008" y="1463040"/>
+            <a:ext cx="54864" cy="2148840"/>
+          </a:xfrm>
+          <a:prstGeom prst="rect">
+            <a:avLst/>
+          </a:prstGeom>
+          <a:solidFill>
+            <a:srgbClr val="FCAF17"/>
+          </a:solidFill>
+          <a:ln>
+            <a:noFill/>
+          </a:ln>
+        </p:spPr>
+        <p:style>
+          <a:lnRef idx="1">
+            <a:schemeClr val="accent1"/>
+          </a:lnRef>
+          <a:fillRef idx="3">
+            <a:schemeClr val="accent1"/>
+          </a:fillRef>
+          <a:effectRef idx="2">
+            <a:schemeClr val="accent1"/>
+          </a:effectRef>
+          <a:fontRef idx="minor">
+            <a:schemeClr val="lt1"/>
+          </a:fontRef>
+        </p:style>
+        <p:txBody>
+          <a:bodyPr rtlCol="0" anchor="ctr"/>
+          <a:lstStyle/>
+          <a:p>
+            <a:pPr algn="ctr"/>
+          </a:p>
+        </p:txBody>
+      </p:sp>
+      <p:sp>
+        <p:nvSpPr>
+          <p:cNvPr id="13" name="TextBox 12"/>
+          <p:cNvSpPr txBox="1"/>
+          <p:nvPr/>
+        </p:nvSpPr>
+        <p:spPr>
+          <a:xfrm>
+            <a:off x="8321040" y="1609344"/>
+            <a:ext cx="3108960" cy="1874520"/>
+          </a:xfrm>
+          <a:prstGeom prst="rect">
+            <a:avLst/>
+          </a:prstGeom>
+          <a:noFill/>
+        </p:spPr>
+        <p:txBody>
+          <a:bodyPr wrap="square">
+            <a:spAutoFit/>
+          </a:bodyPr>
+          <a:lstStyle/>
+          <a:p>
+            <a:pPr algn="l">
+              <a:spcAft>
+                <a:spcPts val="700"/>
+              </a:spcAft>
+            </a:pPr>
+            <a:r>
+              <a:rPr sz="1500" b="1">
+                <a:solidFill>
+                  <a:srgbClr val="645B4C"/>
+                </a:solidFill>
+                <a:latin typeface="맑은 고딕"/>
+              </a:rPr>
+              <a:t>③ 서류 형태가 제각각</a:t>
+            </a:r>
+          </a:p>
+          <a:p>
+            <a:pPr algn="l">
+              <a:spcAft>
+                <a:spcPts val="500"/>
+              </a:spcAft>
+            </a:pPr>
+            <a:r>
+              <a:rPr sz="1200" b="0">
+                <a:solidFill>
+                  <a:srgbClr val="2B2B2B"/>
+                </a:solidFill>
+                <a:latin typeface="맑은 고딕"/>
+              </a:rPr>
+              <a:t>전자 PDF · 스캔본 · 모바일 스크린샷</a:t>
+            </a:r>
+          </a:p>
+          <a:p>
+            <a:pPr algn="l">
+              <a:spcAft>
+                <a:spcPts val="500"/>
+              </a:spcAft>
+            </a:pPr>
+            <a:r>
+              <a:rPr sz="1200" b="0">
+                <a:solidFill>
+                  <a:srgbClr val="2B2B2B"/>
+                </a:solidFill>
+                <a:latin typeface="맑은 고딕"/>
+              </a:rPr>
+              <a:t>비대면은 확인서가 계약서에 통합</a:t>
+            </a:r>
+          </a:p>
+          <a:p>
+            <a:pPr algn="l">
+              <a:spcAft>
+                <a:spcPts val="500"/>
+              </a:spcAft>
+            </a:pPr>
+            <a:r>
+              <a:rPr sz="1200" b="0">
+                <a:solidFill>
+                  <a:srgbClr val="2B2B2B"/>
+                </a:solidFill>
+                <a:latin typeface="맑은 고딕"/>
+              </a:rPr>
+              <a:t>위험등급이 표 안 체크(✓)로만 표시</a:t>
+            </a:r>
+          </a:p>
+          <a:p>
+            <a:pPr algn="l">
+              <a:spcAft>
+                <a:spcPts val="500"/>
+              </a:spcAft>
+            </a:pPr>
+            <a:r>
+              <a:rPr sz="1200" b="0">
+                <a:solidFill>
+                  <a:srgbClr val="2B2B2B"/>
+                </a:solidFill>
+                <a:latin typeface="맑은 고딕"/>
+              </a:rPr>
+              <a:t>→ 텍스트 추출만으로는 못 읽는다</a:t>
+            </a:r>
+          </a:p>
+        </p:txBody>
+      </p:sp>
+      <p:sp>
+        <p:nvSpPr>
+          <p:cNvPr id="14" name="TextBox 13"/>
+          <p:cNvSpPr txBox="1"/>
+          <p:nvPr/>
+        </p:nvSpPr>
+        <p:spPr>
+          <a:xfrm>
+            <a:off x="566928" y="3886200"/>
+            <a:ext cx="11064240" cy="2194560"/>
+          </a:xfrm>
+          <a:prstGeom prst="rect">
+            <a:avLst/>
+          </a:prstGeom>
+          <a:noFill/>
+        </p:spPr>
+        <p:txBody>
+          <a:bodyPr wrap="square">
+            <a:spAutoFit/>
+          </a:bodyPr>
+          <a:lstStyle/>
+          <a:p>
+            <a:pPr algn="l">
+              <a:spcAft>
+                <a:spcPts val="1000"/>
+              </a:spcAft>
+            </a:pPr>
+            <a:r>
+              <a:rPr sz="1500" b="1">
+                <a:solidFill>
+                  <a:srgbClr val="645B4C"/>
+                </a:solidFill>
+                <a:latin typeface="맑은 고딕"/>
+              </a:rPr>
+              <a:t>불완전판매가 성립하면 판매사는 배상·제재를 부담합니다. 그런데 위반의 상당수는 '서류 간 불일치'라, 서류를 한 장씩 검토하는 방식으로는 구조적으로 놓칩니다.</a:t>
+            </a:r>
+          </a:p>
+          <a:p>
+            <a:pPr algn="l">
+              <a:spcAft>
+                <a:spcPts val="600"/>
+              </a:spcAft>
+            </a:pPr>
+            <a:r>
+              <a:rPr sz="1300" b="0">
+                <a:solidFill>
+                  <a:srgbClr val="2B2B2B"/>
+                </a:solidFill>
+                <a:latin typeface="맑은 고딕"/>
+              </a:rPr>
+              <a:t>· 금융소비자보호법(2021 시행)은 적합성·설명의무 등 6대 판매원칙과 입증책임을 판매사에 부과합니다.</a:t>
+            </a:r>
+          </a:p>
+          <a:p>
+            <a:pPr algn="l">
+              <a:spcAft>
+                <a:spcPts val="600"/>
+              </a:spcAft>
+            </a:pPr>
+            <a:r>
+              <a:rPr sz="1300" b="0">
+                <a:solidFill>
+                  <a:srgbClr val="2B2B2B"/>
+                </a:solidFill>
+                <a:latin typeface="맑은 고딕"/>
+              </a:rPr>
+              <a:t>· 비대면 채널이 늘며 서류가 전자·통합 양식으로 다양해져, 사람이 형태별로 확인하는 부담이 커졌습니다.</a:t>
+            </a:r>
+          </a:p>
+        </p:txBody>
+      </p:sp>
+    </p:spTree>
+  </p:cSld>
+  <p:clrMapOvr>
+    <a:masterClrMapping/>
+  </p:clrMapOvr>
+</p:sld>
+</file>
+
+<file path=ppt/slides/slide20.xml><?xml version="1.0" encoding="utf-8"?>
 <p:sld xmlns:a="http://schemas.openxmlformats.org/drawingml/2006/main" xmlns:p="http://schemas.openxmlformats.org/presentationml/2006/main" xmlns:r="http://schemas.openxmlformats.org/officeDocument/2006/relationships">
   <p:cSld>
     <p:spTree>
@@ -12452,7 +15957,7 @@
 </p:sld>
 </file>
 
-<file path=ppt/slides/slide2.xml><?xml version="1.0" encoding="utf-8"?>
+<file path=ppt/slides/slide3.xml><?xml version="1.0" encoding="utf-8"?>
 <p:sld xmlns:a="http://schemas.openxmlformats.org/drawingml/2006/main" xmlns:p="http://schemas.openxmlformats.org/presentationml/2006/main" xmlns:r="http://schemas.openxmlformats.org/officeDocument/2006/relationships">
   <p:cSld>
     <p:spTree>
@@ -12539,7 +16044,7 @@
                 </a:solidFill>
                 <a:latin typeface="맑은 고딕"/>
               </a:rPr>
-              <a:t>문제 정의</a:t>
+              <a:t>문제의 규모</a:t>
             </a:r>
           </a:p>
           <a:p>
@@ -12555,7 +16060,7 @@
                 </a:solidFill>
                 <a:latin typeface="맑은 고딕"/>
               </a:rPr>
-              <a:t>서류 하나만 보면 원리적으로 잡을 수 없는 위반이 있다</a:t>
+              <a:t>불완전판매 민원은 급증했고, 그 비용은 이미 판매사가 치르고 있다</a:t>
             </a:r>
           </a:p>
         </p:txBody>
@@ -12626,8 +16131,368 @@
         </p:nvSpPr>
         <p:spPr>
           <a:xfrm>
-            <a:off x="566928" y="1463040"/>
-            <a:ext cx="3520440" cy="2148840"/>
+            <a:off x="566928" y="1417320"/>
+            <a:ext cx="2615184" cy="1600200"/>
+          </a:xfrm>
+          <a:prstGeom prst="roundRect">
+            <a:avLst/>
+          </a:prstGeom>
+          <a:solidFill>
+            <a:srgbClr val="FFF8DF"/>
+          </a:solidFill>
+          <a:ln>
+            <a:solidFill>
+              <a:srgbClr val="FCAF17"/>
+            </a:solidFill>
+          </a:ln>
+        </p:spPr>
+        <p:style>
+          <a:lnRef idx="1">
+            <a:schemeClr val="accent1"/>
+          </a:lnRef>
+          <a:fillRef idx="3">
+            <a:schemeClr val="accent1"/>
+          </a:fillRef>
+          <a:effectRef idx="2">
+            <a:schemeClr val="accent1"/>
+          </a:effectRef>
+          <a:fontRef idx="minor">
+            <a:schemeClr val="lt1"/>
+          </a:fontRef>
+        </p:style>
+        <p:txBody>
+          <a:bodyPr rtlCol="0" anchor="ctr" wrap="square"/>
+          <a:lstStyle/>
+          <a:p>
+            <a:pPr algn="ctr">
+              <a:spcAft>
+                <a:spcPts val="300"/>
+              </a:spcAft>
+            </a:pPr>
+            <a:r>
+              <a:rPr sz="2400" b="1">
+                <a:solidFill>
+                  <a:srgbClr val="C62828"/>
+                </a:solidFill>
+                <a:latin typeface="맑은 고딕"/>
+              </a:rPr>
+              <a:t>11만 6,338건</a:t>
+            </a:r>
+          </a:p>
+          <a:p>
+            <a:pPr algn="ctr">
+              <a:spcAft>
+                <a:spcPts val="200"/>
+              </a:spcAft>
+            </a:pPr>
+            <a:r>
+              <a:rPr sz="1200" b="1">
+                <a:solidFill>
+                  <a:srgbClr val="645B4C"/>
+                </a:solidFill>
+                <a:latin typeface="맑은 고딕"/>
+              </a:rPr>
+              <a:t>2024년 금융민원 총계</a:t>
+            </a:r>
+          </a:p>
+          <a:p>
+            <a:pPr algn="ctr">
+              <a:spcAft>
+                <a:spcPts val="0"/>
+              </a:spcAft>
+            </a:pPr>
+            <a:r>
+              <a:rPr sz="1000" b="0">
+                <a:solidFill>
+                  <a:srgbClr val="6B6B6B"/>
+                </a:solidFill>
+                <a:latin typeface="맑은 고딕"/>
+              </a:rPr>
+              <a:t>전년 대비 +24%</a:t>
+            </a:r>
+          </a:p>
+        </p:txBody>
+      </p:sp>
+      <p:sp>
+        <p:nvSpPr>
+          <p:cNvPr id="6" name="Rounded Rectangle 5"/>
+          <p:cNvSpPr/>
+          <p:nvPr/>
+        </p:nvSpPr>
+        <p:spPr>
+          <a:xfrm>
+            <a:off x="3383280" y="1417320"/>
+            <a:ext cx="2615184" cy="1600200"/>
+          </a:xfrm>
+          <a:prstGeom prst="roundRect">
+            <a:avLst/>
+          </a:prstGeom>
+          <a:solidFill>
+            <a:srgbClr val="FFF8DF"/>
+          </a:solidFill>
+          <a:ln>
+            <a:solidFill>
+              <a:srgbClr val="FCAF17"/>
+            </a:solidFill>
+          </a:ln>
+        </p:spPr>
+        <p:style>
+          <a:lnRef idx="1">
+            <a:schemeClr val="accent1"/>
+          </a:lnRef>
+          <a:fillRef idx="3">
+            <a:schemeClr val="accent1"/>
+          </a:fillRef>
+          <a:effectRef idx="2">
+            <a:schemeClr val="accent1"/>
+          </a:effectRef>
+          <a:fontRef idx="minor">
+            <a:schemeClr val="lt1"/>
+          </a:fontRef>
+        </p:style>
+        <p:txBody>
+          <a:bodyPr rtlCol="0" anchor="ctr" wrap="square"/>
+          <a:lstStyle/>
+          <a:p>
+            <a:pPr algn="ctr">
+              <a:spcAft>
+                <a:spcPts val="300"/>
+              </a:spcAft>
+            </a:pPr>
+            <a:r>
+              <a:rPr sz="2400" b="1">
+                <a:solidFill>
+                  <a:srgbClr val="C62828"/>
+                </a:solidFill>
+                <a:latin typeface="맑은 고딕"/>
+              </a:rPr>
+              <a:t>+53.3%</a:t>
+            </a:r>
+          </a:p>
+          <a:p>
+            <a:pPr algn="ctr">
+              <a:spcAft>
+                <a:spcPts val="200"/>
+              </a:spcAft>
+            </a:pPr>
+            <a:r>
+              <a:rPr sz="1200" b="1">
+                <a:solidFill>
+                  <a:srgbClr val="645B4C"/>
+                </a:solidFill>
+                <a:latin typeface="맑은 고딕"/>
+              </a:rPr>
+              <a:t>은행 권역 민원 증가</a:t>
+            </a:r>
+          </a:p>
+          <a:p>
+            <a:pPr algn="ctr">
+              <a:spcAft>
+                <a:spcPts val="0"/>
+              </a:spcAft>
+            </a:pPr>
+            <a:r>
+              <a:rPr sz="1000" b="0">
+                <a:solidFill>
+                  <a:srgbClr val="6B6B6B"/>
+                </a:solidFill>
+                <a:latin typeface="맑은 고딕"/>
+              </a:rPr>
+              <a:t>24,043건 · ELS 불완전판매가 주원인</a:t>
+            </a:r>
+          </a:p>
+        </p:txBody>
+      </p:sp>
+      <p:sp>
+        <p:nvSpPr>
+          <p:cNvPr id="7" name="Rounded Rectangle 6"/>
+          <p:cNvSpPr/>
+          <p:nvPr/>
+        </p:nvSpPr>
+        <p:spPr>
+          <a:xfrm>
+            <a:off x="6199632" y="1417320"/>
+            <a:ext cx="2615184" cy="1600200"/>
+          </a:xfrm>
+          <a:prstGeom prst="roundRect">
+            <a:avLst/>
+          </a:prstGeom>
+          <a:solidFill>
+            <a:srgbClr val="FFF8DF"/>
+          </a:solidFill>
+          <a:ln>
+            <a:solidFill>
+              <a:srgbClr val="FCAF17"/>
+            </a:solidFill>
+          </a:ln>
+        </p:spPr>
+        <p:style>
+          <a:lnRef idx="1">
+            <a:schemeClr val="accent1"/>
+          </a:lnRef>
+          <a:fillRef idx="3">
+            <a:schemeClr val="accent1"/>
+          </a:fillRef>
+          <a:effectRef idx="2">
+            <a:schemeClr val="accent1"/>
+          </a:effectRef>
+          <a:fontRef idx="minor">
+            <a:schemeClr val="lt1"/>
+          </a:fontRef>
+        </p:style>
+        <p:txBody>
+          <a:bodyPr rtlCol="0" anchor="ctr" wrap="square"/>
+          <a:lstStyle/>
+          <a:p>
+            <a:pPr algn="ctr">
+              <a:spcAft>
+                <a:spcPts val="300"/>
+              </a:spcAft>
+            </a:pPr>
+            <a:r>
+              <a:rPr sz="2400" b="1">
+                <a:solidFill>
+                  <a:srgbClr val="C62828"/>
+                </a:solidFill>
+                <a:latin typeface="맑은 고딕"/>
+              </a:rPr>
+              <a:t>+1,048%</a:t>
+            </a:r>
+          </a:p>
+          <a:p>
+            <a:pPr algn="ctr">
+              <a:spcAft>
+                <a:spcPts val="200"/>
+              </a:spcAft>
+            </a:pPr>
+            <a:r>
+              <a:rPr sz="1200" b="1">
+                <a:solidFill>
+                  <a:srgbClr val="645B4C"/>
+                </a:solidFill>
+                <a:latin typeface="맑은 고딕"/>
+              </a:rPr>
+              <a:t>펀드·방카슈랑스 민원 증가</a:t>
+            </a:r>
+          </a:p>
+          <a:p>
+            <a:pPr algn="ctr">
+              <a:spcAft>
+                <a:spcPts val="0"/>
+              </a:spcAft>
+            </a:pPr>
+            <a:r>
+              <a:rPr sz="1000" b="0">
+                <a:solidFill>
+                  <a:srgbClr val="6B6B6B"/>
+                </a:solidFill>
+                <a:latin typeface="맑은 고딕"/>
+              </a:rPr>
+              <a:t>신탁은 +1,459%</a:t>
+            </a:r>
+          </a:p>
+        </p:txBody>
+      </p:sp>
+      <p:sp>
+        <p:nvSpPr>
+          <p:cNvPr id="8" name="Rounded Rectangle 7"/>
+          <p:cNvSpPr/>
+          <p:nvPr/>
+        </p:nvSpPr>
+        <p:spPr>
+          <a:xfrm>
+            <a:off x="9015984" y="1417320"/>
+            <a:ext cx="2615184" cy="1600200"/>
+          </a:xfrm>
+          <a:prstGeom prst="roundRect">
+            <a:avLst/>
+          </a:prstGeom>
+          <a:solidFill>
+            <a:srgbClr val="FFF8DF"/>
+          </a:solidFill>
+          <a:ln>
+            <a:solidFill>
+              <a:srgbClr val="FCAF17"/>
+            </a:solidFill>
+          </a:ln>
+        </p:spPr>
+        <p:style>
+          <a:lnRef idx="1">
+            <a:schemeClr val="accent1"/>
+          </a:lnRef>
+          <a:fillRef idx="3">
+            <a:schemeClr val="accent1"/>
+          </a:fillRef>
+          <a:effectRef idx="2">
+            <a:schemeClr val="accent1"/>
+          </a:effectRef>
+          <a:fontRef idx="minor">
+            <a:schemeClr val="lt1"/>
+          </a:fontRef>
+        </p:style>
+        <p:txBody>
+          <a:bodyPr rtlCol="0" anchor="ctr" wrap="square"/>
+          <a:lstStyle/>
+          <a:p>
+            <a:pPr algn="ctr">
+              <a:spcAft>
+                <a:spcPts val="300"/>
+              </a:spcAft>
+            </a:pPr>
+            <a:r>
+              <a:rPr sz="2400" b="1">
+                <a:solidFill>
+                  <a:srgbClr val="C62828"/>
+                </a:solidFill>
+                <a:latin typeface="맑은 고딕"/>
+              </a:rPr>
+              <a:t>약 1조 3,000억</a:t>
+            </a:r>
+          </a:p>
+          <a:p>
+            <a:pPr algn="ctr">
+              <a:spcAft>
+                <a:spcPts val="200"/>
+              </a:spcAft>
+            </a:pPr>
+            <a:r>
+              <a:rPr sz="1200" b="1">
+                <a:solidFill>
+                  <a:srgbClr val="645B4C"/>
+                </a:solidFill>
+                <a:latin typeface="맑은 고딕"/>
+              </a:rPr>
+              <a:t>홍콩 ELS 자율배상 규모</a:t>
+            </a:r>
+          </a:p>
+          <a:p>
+            <a:pPr algn="ctr">
+              <a:spcAft>
+                <a:spcPts val="0"/>
+              </a:spcAft>
+            </a:pPr>
+            <a:r>
+              <a:rPr sz="1000" b="0">
+                <a:solidFill>
+                  <a:srgbClr val="6B6B6B"/>
+                </a:solidFill>
+                <a:latin typeface="맑은 고딕"/>
+              </a:rPr>
+              <a:t>5개 은행 합계</a:t>
+            </a:r>
+          </a:p>
+        </p:txBody>
+      </p:sp>
+      <p:sp>
+        <p:nvSpPr>
+          <p:cNvPr id="9" name="Rounded Rectangle 8"/>
+          <p:cNvSpPr/>
+          <p:nvPr/>
+        </p:nvSpPr>
+        <p:spPr>
+          <a:xfrm>
+            <a:off x="566928" y="3291840"/>
+            <a:ext cx="5394960" cy="2148840"/>
           </a:xfrm>
           <a:prstGeom prst="roundRect">
             <a:avLst/>
@@ -12665,13 +16530,13 @@
       </p:sp>
       <p:sp>
         <p:nvSpPr>
-          <p:cNvPr id="6" name="Rectangle 5"/>
+          <p:cNvPr id="10" name="Rectangle 9"/>
           <p:cNvSpPr/>
           <p:nvPr/>
         </p:nvSpPr>
         <p:spPr>
           <a:xfrm>
-            <a:off x="566928" y="1463040"/>
+            <a:off x="566928" y="3291840"/>
             <a:ext cx="54864" cy="2148840"/>
           </a:xfrm>
           <a:prstGeom prst="rect">
@@ -12708,14 +16573,14 @@
       </p:sp>
       <p:sp>
         <p:nvSpPr>
-          <p:cNvPr id="7" name="TextBox 6"/>
+          <p:cNvPr id="11" name="TextBox 10"/>
           <p:cNvSpPr txBox="1"/>
           <p:nvPr/>
         </p:nvSpPr>
         <p:spPr>
           <a:xfrm>
-            <a:off x="822960" y="1609344"/>
-            <a:ext cx="3063240" cy="1874520"/>
+            <a:off x="822960" y="3438144"/>
+            <a:ext cx="4937760" cy="1874520"/>
           </a:xfrm>
           <a:prstGeom prst="rect">
             <a:avLst/>
@@ -12740,7 +16605,7 @@
                 </a:solidFill>
                 <a:latin typeface="맑은 고딕"/>
               </a:rPr>
-              <a:t>① 위반은 서류 사이에 있다</a:t>
+              <a:t>이 문제는 KB국민은행이 직접 겪었습니다</a:t>
             </a:r>
           </a:p>
           <a:p>
@@ -12756,7 +16621,7 @@
                 </a:solidFill>
                 <a:latin typeface="맑은 고딕"/>
               </a:rPr>
-              <a:t>진단표: 고객 투자성향 '안정형'</a:t>
+              <a:t>홍콩H지수 ELS 불완전판매로 금감원 검사 대상이 된 5개 은행:</a:t>
             </a:r>
           </a:p>
           <a:p>
@@ -12772,7 +16637,7 @@
                 </a:solidFill>
                 <a:latin typeface="맑은 고딕"/>
               </a:rPr>
-              <a:t>상품설명서: 위험등급 '1등급'</a:t>
+              <a:t>KB국민 · 신한 · 하나 · NH농협 · SC제일</a:t>
             </a:r>
           </a:p>
           <a:p>
@@ -12788,7 +16653,7 @@
                 </a:solidFill>
                 <a:latin typeface="맑은 고딕"/>
               </a:rPr>
-              <a:t>→ 각 서류는 정상. 대조해야 위반</a:t>
+              <a:t>과징금은 최초 약 4조원으로 산정된 뒤 논의를 거쳐</a:t>
             </a:r>
           </a:p>
           <a:p>
@@ -12804,21 +16669,21 @@
                 </a:solidFill>
                 <a:latin typeface="맑은 고딕"/>
               </a:rPr>
-              <a:t>금소법 17조 적합성원칙 위반 소지</a:t>
-            </a:r>
-          </a:p>
-        </p:txBody>
-      </p:sp>
-      <p:sp>
-        <p:nvSpPr>
-          <p:cNvPr id="8" name="Rounded Rectangle 7"/>
+              <a:t>6,000억원 수준으로 조정 (2026.7 기준 심의 진행)</a:t>
+            </a:r>
+          </a:p>
+        </p:txBody>
+      </p:sp>
+      <p:sp>
+        <p:nvSpPr>
+          <p:cNvPr id="12" name="Rounded Rectangle 11"/>
           <p:cNvSpPr/>
           <p:nvPr/>
         </p:nvSpPr>
         <p:spPr>
           <a:xfrm>
-            <a:off x="4315968" y="1463040"/>
-            <a:ext cx="3520440" cy="2148840"/>
+            <a:off x="6172200" y="3291840"/>
+            <a:ext cx="5458968" cy="2148840"/>
           </a:xfrm>
           <a:prstGeom prst="roundRect">
             <a:avLst/>
@@ -12856,13 +16721,13 @@
       </p:sp>
       <p:sp>
         <p:nvSpPr>
-          <p:cNvPr id="9" name="Rectangle 8"/>
+          <p:cNvPr id="13" name="Rectangle 12"/>
           <p:cNvSpPr/>
           <p:nvPr/>
         </p:nvSpPr>
         <p:spPr>
           <a:xfrm>
-            <a:off x="4315968" y="1463040"/>
+            <a:off x="6172200" y="3291840"/>
             <a:ext cx="54864" cy="2148840"/>
           </a:xfrm>
           <a:prstGeom prst="rect">
@@ -12899,14 +16764,14 @@
       </p:sp>
       <p:sp>
         <p:nvSpPr>
-          <p:cNvPr id="10" name="TextBox 9"/>
+          <p:cNvPr id="14" name="TextBox 13"/>
           <p:cNvSpPr txBox="1"/>
           <p:nvPr/>
         </p:nvSpPr>
         <p:spPr>
           <a:xfrm>
-            <a:off x="4572000" y="1609344"/>
-            <a:ext cx="3063240" cy="1874520"/>
+            <a:off x="6428232" y="3438144"/>
+            <a:ext cx="5001768" cy="1874520"/>
           </a:xfrm>
           <a:prstGeom prst="rect">
             <a:avLst/>
@@ -12931,7 +16796,7 @@
                 </a:solidFill>
                 <a:latin typeface="맑은 고딕"/>
               </a:rPr>
-              <a:t>② 사람이 눈으로 대조한다</a:t>
+              <a:t>제재 근거는 '판매 과정'입니다</a:t>
             </a:r>
           </a:p>
           <a:p>
@@ -12947,7 +16812,7 @@
                 </a:solidFill>
                 <a:latin typeface="맑은 고딕"/>
               </a:rPr>
-              <a:t>판매 1건 = 서류 4종 교차 확인</a:t>
+              <a:t>금소법 제57조 — 위반 관련 계약으로 얻은 수입의 50% 이내 과징금</a:t>
             </a:r>
           </a:p>
           <a:p>
@@ -12963,7 +16828,7 @@
                 </a:solidFill>
                 <a:latin typeface="맑은 고딕"/>
               </a:rPr>
-              <a:t>고객 성향·상품 등급·설명일·계약일·서명</a:t>
+              <a:t>즉 상품이 손실을 냈다는 사실이 아니라</a:t>
             </a:r>
           </a:p>
           <a:p>
@@ -12979,7 +16844,7 @@
                 </a:solidFill>
                 <a:latin typeface="맑은 고딕"/>
               </a:rPr>
-              <a:t>건수가 쌓이면 누락이 발생</a:t>
+              <a:t>적합성·설명의무를 지켰는지가 제재를 가른다</a:t>
             </a:r>
           </a:p>
           <a:p>
@@ -12995,109 +16860,21 @@
                 </a:solidFill>
                 <a:latin typeface="맑은 고딕"/>
               </a:rPr>
-              <a:t>사후 분쟁 시 입증 부담은 판매사</a:t>
-            </a:r>
-          </a:p>
-        </p:txBody>
-      </p:sp>
-      <p:sp>
-        <p:nvSpPr>
-          <p:cNvPr id="11" name="Rounded Rectangle 10"/>
-          <p:cNvSpPr/>
+              <a:t>→ 판매 시점의 서류가 곧 방어 근거이자 위험 지점</a:t>
+            </a:r>
+          </a:p>
+        </p:txBody>
+      </p:sp>
+      <p:sp>
+        <p:nvSpPr>
+          <p:cNvPr id="15" name="TextBox 14"/>
+          <p:cNvSpPr txBox="1"/>
           <p:nvPr/>
         </p:nvSpPr>
         <p:spPr>
           <a:xfrm>
-            <a:off x="8065008" y="1463040"/>
-            <a:ext cx="3566160" cy="2148840"/>
-          </a:xfrm>
-          <a:prstGeom prst="roundRect">
-            <a:avLst/>
-          </a:prstGeom>
-          <a:solidFill>
-            <a:srgbClr val="FFFFFF"/>
-          </a:solidFill>
-          <a:ln>
-            <a:solidFill>
-              <a:srgbClr val="E6E0D4"/>
-            </a:solidFill>
-          </a:ln>
-        </p:spPr>
-        <p:style>
-          <a:lnRef idx="1">
-            <a:schemeClr val="accent1"/>
-          </a:lnRef>
-          <a:fillRef idx="3">
-            <a:schemeClr val="accent1"/>
-          </a:fillRef>
-          <a:effectRef idx="2">
-            <a:schemeClr val="accent1"/>
-          </a:effectRef>
-          <a:fontRef idx="minor">
-            <a:schemeClr val="lt1"/>
-          </a:fontRef>
-        </p:style>
-        <p:txBody>
-          <a:bodyPr rtlCol="0" anchor="ctr"/>
-          <a:lstStyle/>
-          <a:p>
-            <a:pPr algn="ctr"/>
-          </a:p>
-        </p:txBody>
-      </p:sp>
-      <p:sp>
-        <p:nvSpPr>
-          <p:cNvPr id="12" name="Rectangle 11"/>
-          <p:cNvSpPr/>
-          <p:nvPr/>
-        </p:nvSpPr>
-        <p:spPr>
-          <a:xfrm>
-            <a:off x="8065008" y="1463040"/>
-            <a:ext cx="54864" cy="2148840"/>
-          </a:xfrm>
-          <a:prstGeom prst="rect">
-            <a:avLst/>
-          </a:prstGeom>
-          <a:solidFill>
-            <a:srgbClr val="FCAF17"/>
-          </a:solidFill>
-          <a:ln>
-            <a:noFill/>
-          </a:ln>
-        </p:spPr>
-        <p:style>
-          <a:lnRef idx="1">
-            <a:schemeClr val="accent1"/>
-          </a:lnRef>
-          <a:fillRef idx="3">
-            <a:schemeClr val="accent1"/>
-          </a:fillRef>
-          <a:effectRef idx="2">
-            <a:schemeClr val="accent1"/>
-          </a:effectRef>
-          <a:fontRef idx="minor">
-            <a:schemeClr val="lt1"/>
-          </a:fontRef>
-        </p:style>
-        <p:txBody>
-          <a:bodyPr rtlCol="0" anchor="ctr"/>
-          <a:lstStyle/>
-          <a:p>
-            <a:pPr algn="ctr"/>
-          </a:p>
-        </p:txBody>
-      </p:sp>
-      <p:sp>
-        <p:nvSpPr>
-          <p:cNvPr id="13" name="TextBox 12"/>
-          <p:cNvSpPr txBox="1"/>
-          <p:nvPr/>
-        </p:nvSpPr>
-        <p:spPr>
-          <a:xfrm>
-            <a:off x="8321040" y="1609344"/>
-            <a:ext cx="3108960" cy="1874520"/>
+            <a:off x="566928" y="5577840"/>
+            <a:ext cx="11064240" cy="822960"/>
           </a:xfrm>
           <a:prstGeom prst="rect">
             <a:avLst/>
@@ -13112,152 +16889,17 @@
           <a:p>
             <a:pPr algn="l">
               <a:spcAft>
-                <a:spcPts val="700"/>
-              </a:spcAft>
-            </a:pPr>
-            <a:r>
-              <a:rPr sz="1500" b="1">
-                <a:solidFill>
-                  <a:srgbClr val="645B4C"/>
-                </a:solidFill>
-                <a:latin typeface="맑은 고딕"/>
-              </a:rPr>
-              <a:t>③ 서류 형태가 제각각</a:t>
-            </a:r>
-          </a:p>
-          <a:p>
-            <a:pPr algn="l">
-              <a:spcAft>
-                <a:spcPts val="500"/>
-              </a:spcAft>
-            </a:pPr>
-            <a:r>
-              <a:rPr sz="1200" b="0">
-                <a:solidFill>
-                  <a:srgbClr val="2B2B2B"/>
-                </a:solidFill>
-                <a:latin typeface="맑은 고딕"/>
-              </a:rPr>
-              <a:t>전자 PDF · 스캔본 · 모바일 스크린샷</a:t>
-            </a:r>
-          </a:p>
-          <a:p>
-            <a:pPr algn="l">
-              <a:spcAft>
-                <a:spcPts val="500"/>
-              </a:spcAft>
-            </a:pPr>
-            <a:r>
-              <a:rPr sz="1200" b="0">
-                <a:solidFill>
-                  <a:srgbClr val="2B2B2B"/>
-                </a:solidFill>
-                <a:latin typeface="맑은 고딕"/>
-              </a:rPr>
-              <a:t>비대면은 확인서가 계약서에 통합</a:t>
-            </a:r>
-          </a:p>
-          <a:p>
-            <a:pPr algn="l">
-              <a:spcAft>
-                <a:spcPts val="500"/>
-              </a:spcAft>
-            </a:pPr>
-            <a:r>
-              <a:rPr sz="1200" b="0">
-                <a:solidFill>
-                  <a:srgbClr val="2B2B2B"/>
-                </a:solidFill>
-                <a:latin typeface="맑은 고딕"/>
-              </a:rPr>
-              <a:t>위험등급이 표 안 체크(✓)로만 표시</a:t>
-            </a:r>
-          </a:p>
-          <a:p>
-            <a:pPr algn="l">
-              <a:spcAft>
-                <a:spcPts val="500"/>
-              </a:spcAft>
-            </a:pPr>
-            <a:r>
-              <a:rPr sz="1200" b="0">
-                <a:solidFill>
-                  <a:srgbClr val="2B2B2B"/>
-                </a:solidFill>
-                <a:latin typeface="맑은 고딕"/>
-              </a:rPr>
-              <a:t>→ 텍스트 추출만으로는 못 읽는다</a:t>
-            </a:r>
-          </a:p>
-        </p:txBody>
-      </p:sp>
-      <p:sp>
-        <p:nvSpPr>
-          <p:cNvPr id="14" name="TextBox 13"/>
-          <p:cNvSpPr txBox="1"/>
-          <p:nvPr/>
-        </p:nvSpPr>
-        <p:spPr>
-          <a:xfrm>
-            <a:off x="566928" y="3886200"/>
-            <a:ext cx="11064240" cy="2194560"/>
-          </a:xfrm>
-          <a:prstGeom prst="rect">
-            <a:avLst/>
-          </a:prstGeom>
-          <a:noFill/>
-        </p:spPr>
-        <p:txBody>
-          <a:bodyPr wrap="square">
-            <a:spAutoFit/>
-          </a:bodyPr>
-          <a:lstStyle/>
-          <a:p>
-            <a:pPr algn="l">
-              <a:spcAft>
-                <a:spcPts val="1000"/>
-              </a:spcAft>
-            </a:pPr>
-            <a:r>
-              <a:rPr sz="1500" b="1">
-                <a:solidFill>
-                  <a:srgbClr val="645B4C"/>
-                </a:solidFill>
-                <a:latin typeface="맑은 고딕"/>
-              </a:rPr>
-              <a:t>불완전판매가 성립하면 판매사는 배상·제재를 부담합니다. 그런데 위반의 상당수는 '서류 간 불일치'라, 서류를 한 장씩 검토하는 방식으로는 구조적으로 놓칩니다.</a:t>
-            </a:r>
-          </a:p>
-          <a:p>
-            <a:pPr algn="l">
-              <a:spcAft>
-                <a:spcPts val="600"/>
-              </a:spcAft>
-            </a:pPr>
-            <a:r>
-              <a:rPr sz="1300" b="0">
-                <a:solidFill>
-                  <a:srgbClr val="2B2B2B"/>
-                </a:solidFill>
-                <a:latin typeface="맑은 고딕"/>
-              </a:rPr>
-              <a:t>· 금융소비자보호법(2021 시행)은 적합성·설명의무 등 6대 판매원칙과 입증책임을 판매사에 부과합니다.</a:t>
-            </a:r>
-          </a:p>
-          <a:p>
-            <a:pPr algn="l">
-              <a:spcAft>
-                <a:spcPts val="600"/>
-              </a:spcAft>
-            </a:pPr>
-            <a:r>
-              <a:rPr sz="1300" b="0">
-                <a:solidFill>
-                  <a:srgbClr val="2B2B2B"/>
-                </a:solidFill>
-                <a:latin typeface="맑은 고딕"/>
-              </a:rPr>
-              <a:t>· 비대면 채널이 늘며 서류가 전자·통합 양식으로 다양해져, 사람이 형태별로 확인하는 부담이 커졌습니다.</a:t>
+                <a:spcPts val="0"/>
+              </a:spcAft>
+            </a:pPr>
+            <a:r>
+              <a:rPr sz="1000" b="0">
+                <a:solidFill>
+                  <a:srgbClr val="6B6B6B"/>
+                </a:solidFill>
+                <a:latin typeface="맑은 고딕"/>
+              </a:rPr>
+              <a:t>출처: 금융감독원 2024년 금융민원 통계(2025.4 보도) · 홍콩 ELS 제재 관련 보도(2026.6~7). 과징금 규모는 심의 진행에 따라 변동될 수 있습니다.</a:t>
             </a:r>
           </a:p>
         </p:txBody>
@@ -13270,7 +16912,7 @@
 </p:sld>
 </file>
 
-<file path=ppt/slides/slide3.xml><?xml version="1.0" encoding="utf-8"?>
+<file path=ppt/slides/slide4.xml><?xml version="1.0" encoding="utf-8"?>
 <p:sld xmlns:a="http://schemas.openxmlformats.org/drawingml/2006/main" xmlns:p="http://schemas.openxmlformats.org/presentationml/2006/main" xmlns:r="http://schemas.openxmlformats.org/officeDocument/2006/relationships">
   <p:cSld>
     <p:spTree>
@@ -13357,7 +16999,7 @@
                 </a:solidFill>
                 <a:latin typeface="맑은 고딕"/>
               </a:rPr>
-              <a:t>문제의 규모</a:t>
+              <a:t>실제 사건에 대입하면</a:t>
             </a:r>
           </a:p>
           <a:p>
@@ -13373,7 +17015,7 @@
                 </a:solidFill>
                 <a:latin typeface="맑은 고딕"/>
               </a:rPr>
-              <a:t>불완전판매 민원은 급증했고, 그 비용은 이미 판매사가 치르고 있다</a:t>
+              <a:t>홍콩 ELS 배상비율을 가른 항목이 곧 우리 검사 항목이다</a:t>
             </a:r>
           </a:p>
         </p:txBody>
@@ -13431,101 +17073,589 @@
                 </a:solidFill>
                 <a:latin typeface="맑은 고딕"/>
               </a:rPr>
-              <a:t>문제 정의·필요성</a:t>
-            </a:r>
-          </a:p>
-        </p:txBody>
-      </p:sp>
-      <p:sp>
-        <p:nvSpPr>
-          <p:cNvPr id="5" name="Rounded Rectangle 4"/>
-          <p:cNvSpPr/>
+              <a:t>활용 가능성</a:t>
+            </a:r>
+          </a:p>
+        </p:txBody>
+      </p:sp>
+      <p:graphicFrame>
+        <p:nvGraphicFramePr>
+          <p:cNvPr id="5" name="Table 4"/>
+          <p:cNvGraphicFramePr>
+            <a:graphicFrameLocks noGrp="1"/>
+          </p:cNvGraphicFramePr>
           <p:nvPr/>
-        </p:nvSpPr>
-        <p:spPr>
-          <a:xfrm>
-            <a:off x="566928" y="1417320"/>
-            <a:ext cx="2615184" cy="1600200"/>
-          </a:xfrm>
-          <a:prstGeom prst="roundRect">
-            <a:avLst/>
-          </a:prstGeom>
-          <a:solidFill>
-            <a:srgbClr val="FFF8DF"/>
-          </a:solidFill>
-          <a:ln>
-            <a:solidFill>
-              <a:srgbClr val="FCAF17"/>
-            </a:solidFill>
-          </a:ln>
-        </p:spPr>
-        <p:style>
-          <a:lnRef idx="1">
-            <a:schemeClr val="accent1"/>
-          </a:lnRef>
-          <a:fillRef idx="3">
-            <a:schemeClr val="accent1"/>
-          </a:fillRef>
-          <a:effectRef idx="2">
-            <a:schemeClr val="accent1"/>
-          </a:effectRef>
-          <a:fontRef idx="minor">
-            <a:schemeClr val="lt1"/>
-          </a:fontRef>
-        </p:style>
-        <p:txBody>
-          <a:bodyPr rtlCol="0" anchor="ctr" wrap="square"/>
-          <a:lstStyle/>
-          <a:p>
-            <a:pPr algn="ctr">
-              <a:spcAft>
-                <a:spcPts val="300"/>
-              </a:spcAft>
-            </a:pPr>
-            <a:r>
-              <a:rPr sz="2400" b="1">
-                <a:solidFill>
-                  <a:srgbClr val="C62828"/>
-                </a:solidFill>
-                <a:latin typeface="맑은 고딕"/>
-              </a:rPr>
-              <a:t>11만 6,338건</a:t>
-            </a:r>
-          </a:p>
-          <a:p>
-            <a:pPr algn="ctr">
-              <a:spcAft>
-                <a:spcPts val="200"/>
-              </a:spcAft>
-            </a:pPr>
-            <a:r>
-              <a:rPr sz="1200" b="1">
-                <a:solidFill>
-                  <a:srgbClr val="645B4C"/>
-                </a:solidFill>
-                <a:latin typeface="맑은 고딕"/>
-              </a:rPr>
-              <a:t>2024년 금융민원 총계</a:t>
-            </a:r>
-          </a:p>
-          <a:p>
-            <a:pPr algn="ctr">
-              <a:spcAft>
-                <a:spcPts val="0"/>
-              </a:spcAft>
-            </a:pPr>
-            <a:r>
-              <a:rPr sz="1000" b="0">
-                <a:solidFill>
-                  <a:srgbClr val="6B6B6B"/>
-                </a:solidFill>
-                <a:latin typeface="맑은 고딕"/>
-              </a:rPr>
-              <a:t>전년 대비 +24%</a:t>
-            </a:r>
-          </a:p>
-        </p:txBody>
-      </p:sp>
+        </p:nvGraphicFramePr>
+        <p:xfrm>
+          <a:off x="566928" y="1417320"/>
+          <a:ext cx="11064240" cy="1645920"/>
+        </p:xfrm>
+        <a:graphic>
+          <a:graphicData uri="http://schemas.openxmlformats.org/drawingml/2006/table">
+            <a:tbl>
+              <a:tblPr firstRow="1" bandRow="1">
+                <a:tableStyleId>{5C22544A-7EE6-4342-B048-85BDC9FD1C3A}</a:tableStyleId>
+              </a:tblPr>
+              <a:tblGrid>
+                <a:gridCol w="3200400"/>
+                <a:gridCol w="1371600"/>
+                <a:gridCol w="3291840"/>
+                <a:gridCol w="3200400"/>
+              </a:tblGrid>
+              <a:tr h="329184">
+                <a:tc>
+                  <a:txBody>
+                    <a:bodyPr wrap="square"/>
+                    <a:lstStyle/>
+                    <a:p>
+                      <a:pPr algn="l">
+                        <a:spcAft>
+                          <a:spcPts val="0"/>
+                        </a:spcAft>
+                      </a:pPr>
+                      <a:r>
+                        <a:rPr sz="1200" b="1">
+                          <a:solidFill>
+                            <a:srgbClr val="645B4C"/>
+                          </a:solidFill>
+                          <a:latin typeface="맑은 고딕"/>
+                        </a:rPr>
+                        <a:t>홍콩 ELS 배상비율 산정 항목</a:t>
+                      </a:r>
+                    </a:p>
+                  </a:txBody>
+                  <a:tcPr>
+                    <a:solidFill>
+                      <a:srgbClr val="FFF8DF"/>
+                    </a:solidFill>
+                  </a:tcPr>
+                </a:tc>
+                <a:tc>
+                  <a:txBody>
+                    <a:bodyPr wrap="square"/>
+                    <a:lstStyle/>
+                    <a:p>
+                      <a:pPr algn="l">
+                        <a:spcAft>
+                          <a:spcPts val="0"/>
+                        </a:spcAft>
+                      </a:pPr>
+                      <a:r>
+                        <a:rPr sz="1200" b="1">
+                          <a:solidFill>
+                            <a:srgbClr val="645B4C"/>
+                          </a:solidFill>
+                          <a:latin typeface="맑은 고딕"/>
+                        </a:rPr>
+                        <a:t>배상 가산</a:t>
+                      </a:r>
+                    </a:p>
+                  </a:txBody>
+                  <a:tcPr>
+                    <a:solidFill>
+                      <a:srgbClr val="FFF8DF"/>
+                    </a:solidFill>
+                  </a:tcPr>
+                </a:tc>
+                <a:tc>
+                  <a:txBody>
+                    <a:bodyPr wrap="square"/>
+                    <a:lstStyle/>
+                    <a:p>
+                      <a:pPr algn="l">
+                        <a:spcAft>
+                          <a:spcPts val="0"/>
+                        </a:spcAft>
+                      </a:pPr>
+                      <a:r>
+                        <a:rPr sz="1200" b="1">
+                          <a:solidFill>
+                            <a:srgbClr val="645B4C"/>
+                          </a:solidFill>
+                          <a:latin typeface="맑은 고딕"/>
+                        </a:rPr>
+                        <a:t>대응하는 우리 검사</a:t>
+                      </a:r>
+                    </a:p>
+                  </a:txBody>
+                  <a:tcPr>
+                    <a:solidFill>
+                      <a:srgbClr val="FFF8DF"/>
+                    </a:solidFill>
+                  </a:tcPr>
+                </a:tc>
+                <a:tc>
+                  <a:txBody>
+                    <a:bodyPr wrap="square"/>
+                    <a:lstStyle/>
+                    <a:p>
+                      <a:pPr algn="l">
+                        <a:spcAft>
+                          <a:spcPts val="0"/>
+                        </a:spcAft>
+                      </a:pPr>
+                      <a:r>
+                        <a:rPr sz="1200" b="1">
+                          <a:solidFill>
+                            <a:srgbClr val="645B4C"/>
+                          </a:solidFill>
+                          <a:latin typeface="맑은 고딕"/>
+                        </a:rPr>
+                        <a:t>서류로 판단 가능한가</a:t>
+                      </a:r>
+                    </a:p>
+                  </a:txBody>
+                  <a:tcPr>
+                    <a:solidFill>
+                      <a:srgbClr val="FFF8DF"/>
+                    </a:solidFill>
+                  </a:tcPr>
+                </a:tc>
+              </a:tr>
+              <a:tr h="329184">
+                <a:tc>
+                  <a:txBody>
+                    <a:bodyPr wrap="square"/>
+                    <a:lstStyle/>
+                    <a:p>
+                      <a:pPr algn="l">
+                        <a:spcAft>
+                          <a:spcPts val="0"/>
+                        </a:spcAft>
+                      </a:pPr>
+                      <a:r>
+                        <a:rPr sz="1100" b="0">
+                          <a:solidFill>
+                            <a:srgbClr val="2B2B2B"/>
+                          </a:solidFill>
+                          <a:latin typeface="맑은 고딕"/>
+                        </a:rPr>
+                        <a:t>설명의무 위반</a:t>
+                      </a:r>
+                    </a:p>
+                  </a:txBody>
+                  <a:tcPr>
+                    <a:solidFill>
+                      <a:srgbClr val="FFFFFF"/>
+                    </a:solidFill>
+                  </a:tcPr>
+                </a:tc>
+                <a:tc>
+                  <a:txBody>
+                    <a:bodyPr wrap="square"/>
+                    <a:lstStyle/>
+                    <a:p>
+                      <a:pPr algn="l">
+                        <a:spcAft>
+                          <a:spcPts val="0"/>
+                        </a:spcAft>
+                      </a:pPr>
+                      <a:r>
+                        <a:rPr sz="1100" b="0">
+                          <a:solidFill>
+                            <a:srgbClr val="2B2B2B"/>
+                          </a:solidFill>
+                          <a:latin typeface="맑은 고딕"/>
+                        </a:rPr>
+                        <a:t>기본 20%</a:t>
+                      </a:r>
+                    </a:p>
+                  </a:txBody>
+                  <a:tcPr>
+                    <a:solidFill>
+                      <a:srgbClr val="FFFFFF"/>
+                    </a:solidFill>
+                  </a:tcPr>
+                </a:tc>
+                <a:tc>
+                  <a:txBody>
+                    <a:bodyPr wrap="square"/>
+                    <a:lstStyle/>
+                    <a:p>
+                      <a:pPr algn="l">
+                        <a:spcAft>
+                          <a:spcPts val="0"/>
+                        </a:spcAft>
+                      </a:pPr>
+                      <a:r>
+                        <a:rPr sz="1100" b="0">
+                          <a:solidFill>
+                            <a:srgbClr val="2B2B2B"/>
+                          </a:solidFill>
+                          <a:latin typeface="맑은 고딕"/>
+                        </a:rPr>
+                        <a:t>EXP-001 · DATE-001 · ACK-001</a:t>
+                      </a:r>
+                    </a:p>
+                  </a:txBody>
+                  <a:tcPr>
+                    <a:solidFill>
+                      <a:srgbClr val="FFFFFF"/>
+                    </a:solidFill>
+                  </a:tcPr>
+                </a:tc>
+                <a:tc>
+                  <a:txBody>
+                    <a:bodyPr wrap="square"/>
+                    <a:lstStyle/>
+                    <a:p>
+                      <a:pPr algn="l">
+                        <a:spcAft>
+                          <a:spcPts val="0"/>
+                        </a:spcAft>
+                      </a:pPr>
+                      <a:r>
+                        <a:rPr sz="1100" b="0">
+                          <a:solidFill>
+                            <a:srgbClr val="2B2B2B"/>
+                          </a:solidFill>
+                          <a:latin typeface="맑은 고딕"/>
+                        </a:rPr>
+                        <a:t>가능 — 설명 항목·설명일·서명 확인</a:t>
+                      </a:r>
+                    </a:p>
+                  </a:txBody>
+                  <a:tcPr>
+                    <a:solidFill>
+                      <a:srgbClr val="FFFFFF"/>
+                    </a:solidFill>
+                  </a:tcPr>
+                </a:tc>
+              </a:tr>
+              <a:tr h="329184">
+                <a:tc>
+                  <a:txBody>
+                    <a:bodyPr wrap="square"/>
+                    <a:lstStyle/>
+                    <a:p>
+                      <a:pPr algn="l">
+                        <a:spcAft>
+                          <a:spcPts val="0"/>
+                        </a:spcAft>
+                      </a:pPr>
+                      <a:r>
+                        <a:rPr sz="1100" b="0">
+                          <a:solidFill>
+                            <a:srgbClr val="2B2B2B"/>
+                          </a:solidFill>
+                          <a:latin typeface="맑은 고딕"/>
+                        </a:rPr>
+                        <a:t>적합성 원칙 위반</a:t>
+                      </a:r>
+                    </a:p>
+                  </a:txBody>
+                  <a:tcPr>
+                    <a:solidFill>
+                      <a:srgbClr val="FFFFFF"/>
+                    </a:solidFill>
+                  </a:tcPr>
+                </a:tc>
+                <a:tc>
+                  <a:txBody>
+                    <a:bodyPr wrap="square"/>
+                    <a:lstStyle/>
+                    <a:p>
+                      <a:pPr algn="l">
+                        <a:spcAft>
+                          <a:spcPts val="0"/>
+                        </a:spcAft>
+                      </a:pPr>
+                      <a:r>
+                        <a:rPr sz="1100" b="0">
+                          <a:solidFill>
+                            <a:srgbClr val="2B2B2B"/>
+                          </a:solidFill>
+                          <a:latin typeface="맑은 고딕"/>
+                        </a:rPr>
+                        <a:t>+10%p</a:t>
+                      </a:r>
+                    </a:p>
+                  </a:txBody>
+                  <a:tcPr>
+                    <a:solidFill>
+                      <a:srgbClr val="FFFFFF"/>
+                    </a:solidFill>
+                  </a:tcPr>
+                </a:tc>
+                <a:tc>
+                  <a:txBody>
+                    <a:bodyPr wrap="square"/>
+                    <a:lstStyle/>
+                    <a:p>
+                      <a:pPr algn="l">
+                        <a:spcAft>
+                          <a:spcPts val="0"/>
+                        </a:spcAft>
+                      </a:pPr>
+                      <a:r>
+                        <a:rPr sz="1100" b="0">
+                          <a:solidFill>
+                            <a:srgbClr val="2B2B2B"/>
+                          </a:solidFill>
+                          <a:latin typeface="맑은 고딕"/>
+                        </a:rPr>
+                        <a:t>FIT-001</a:t>
+                      </a:r>
+                    </a:p>
+                  </a:txBody>
+                  <a:tcPr>
+                    <a:solidFill>
+                      <a:srgbClr val="FFFFFF"/>
+                    </a:solidFill>
+                  </a:tcPr>
+                </a:tc>
+                <a:tc>
+                  <a:txBody>
+                    <a:bodyPr wrap="square"/>
+                    <a:lstStyle/>
+                    <a:p>
+                      <a:pPr algn="l">
+                        <a:spcAft>
+                          <a:spcPts val="0"/>
+                        </a:spcAft>
+                      </a:pPr>
+                      <a:r>
+                        <a:rPr sz="1100" b="0">
+                          <a:solidFill>
+                            <a:srgbClr val="2B2B2B"/>
+                          </a:solidFill>
+                          <a:latin typeface="맑은 고딕"/>
+                        </a:rPr>
+                        <a:t>가능 — 진단표 성향 ↔ 설명서 등급 대조</a:t>
+                      </a:r>
+                    </a:p>
+                  </a:txBody>
+                  <a:tcPr>
+                    <a:solidFill>
+                      <a:srgbClr val="FFFFFF"/>
+                    </a:solidFill>
+                  </a:tcPr>
+                </a:tc>
+              </a:tr>
+              <a:tr h="329184">
+                <a:tc>
+                  <a:txBody>
+                    <a:bodyPr wrap="square"/>
+                    <a:lstStyle/>
+                    <a:p>
+                      <a:pPr algn="l">
+                        <a:spcAft>
+                          <a:spcPts val="0"/>
+                        </a:spcAft>
+                      </a:pPr>
+                      <a:r>
+                        <a:rPr sz="1100" b="0">
+                          <a:solidFill>
+                            <a:srgbClr val="2B2B2B"/>
+                          </a:solidFill>
+                          <a:latin typeface="맑은 고딕"/>
+                        </a:rPr>
+                        <a:t>부당권유 금지 위반</a:t>
+                      </a:r>
+                    </a:p>
+                  </a:txBody>
+                  <a:tcPr>
+                    <a:solidFill>
+                      <a:srgbClr val="FFFFFF"/>
+                    </a:solidFill>
+                  </a:tcPr>
+                </a:tc>
+                <a:tc>
+                  <a:txBody>
+                    <a:bodyPr wrap="square"/>
+                    <a:lstStyle/>
+                    <a:p>
+                      <a:pPr algn="l">
+                        <a:spcAft>
+                          <a:spcPts val="0"/>
+                        </a:spcAft>
+                      </a:pPr>
+                      <a:r>
+                        <a:rPr sz="1100" b="0">
+                          <a:solidFill>
+                            <a:srgbClr val="2B2B2B"/>
+                          </a:solidFill>
+                          <a:latin typeface="맑은 고딕"/>
+                        </a:rPr>
+                        <a:t>+10%p</a:t>
+                      </a:r>
+                    </a:p>
+                  </a:txBody>
+                  <a:tcPr>
+                    <a:solidFill>
+                      <a:srgbClr val="FFFFFF"/>
+                    </a:solidFill>
+                  </a:tcPr>
+                </a:tc>
+                <a:tc>
+                  <a:txBody>
+                    <a:bodyPr wrap="square"/>
+                    <a:lstStyle/>
+                    <a:p>
+                      <a:pPr algn="l">
+                        <a:spcAft>
+                          <a:spcPts val="0"/>
+                        </a:spcAft>
+                      </a:pPr>
+                      <a:r>
+                        <a:rPr sz="1100" b="0">
+                          <a:solidFill>
+                            <a:srgbClr val="2B2B2B"/>
+                          </a:solidFill>
+                          <a:latin typeface="맑은 고딕"/>
+                        </a:rPr>
+                        <a:t>ADV-001</a:t>
+                      </a:r>
+                    </a:p>
+                  </a:txBody>
+                  <a:tcPr>
+                    <a:solidFill>
+                      <a:srgbClr val="FFFFFF"/>
+                    </a:solidFill>
+                  </a:tcPr>
+                </a:tc>
+                <a:tc>
+                  <a:txBody>
+                    <a:bodyPr wrap="square"/>
+                    <a:lstStyle/>
+                    <a:p>
+                      <a:pPr algn="l">
+                        <a:spcAft>
+                          <a:spcPts val="0"/>
+                        </a:spcAft>
+                      </a:pPr>
+                      <a:r>
+                        <a:rPr sz="1100" b="0">
+                          <a:solidFill>
+                            <a:srgbClr val="2B2B2B"/>
+                          </a:solidFill>
+                          <a:latin typeface="맑은 고딕"/>
+                        </a:rPr>
+                        <a:t>가능 — 원금보장·확정수익 표현 검출</a:t>
+                      </a:r>
+                    </a:p>
+                  </a:txBody>
+                  <a:tcPr>
+                    <a:solidFill>
+                      <a:srgbClr val="FFFFFF"/>
+                    </a:solidFill>
+                  </a:tcPr>
+                </a:tc>
+              </a:tr>
+              <a:tr h="329184">
+                <a:tc>
+                  <a:txBody>
+                    <a:bodyPr wrap="square"/>
+                    <a:lstStyle/>
+                    <a:p>
+                      <a:pPr algn="l">
+                        <a:spcAft>
+                          <a:spcPts val="0"/>
+                        </a:spcAft>
+                      </a:pPr>
+                      <a:r>
+                        <a:rPr sz="1100" b="0">
+                          <a:solidFill>
+                            <a:srgbClr val="2B2B2B"/>
+                          </a:solidFill>
+                          <a:latin typeface="맑은 고딕"/>
+                        </a:rPr>
+                        <a:t>고령자 보호기준 미준수</a:t>
+                      </a:r>
+                    </a:p>
+                  </a:txBody>
+                  <a:tcPr>
+                    <a:solidFill>
+                      <a:srgbClr val="FFFFFF"/>
+                    </a:solidFill>
+                  </a:tcPr>
+                </a:tc>
+                <a:tc>
+                  <a:txBody>
+                    <a:bodyPr wrap="square"/>
+                    <a:lstStyle/>
+                    <a:p>
+                      <a:pPr algn="l">
+                        <a:spcAft>
+                          <a:spcPts val="0"/>
+                        </a:spcAft>
+                      </a:pPr>
+                      <a:r>
+                        <a:rPr sz="1100" b="0">
+                          <a:solidFill>
+                            <a:srgbClr val="2B2B2B"/>
+                          </a:solidFill>
+                          <a:latin typeface="맑은 고딕"/>
+                        </a:rPr>
+                        <a:t>+15%p</a:t>
+                      </a:r>
+                    </a:p>
+                  </a:txBody>
+                  <a:tcPr>
+                    <a:solidFill>
+                      <a:srgbClr val="FFFFFF"/>
+                    </a:solidFill>
+                  </a:tcPr>
+                </a:tc>
+                <a:tc>
+                  <a:txBody>
+                    <a:bodyPr wrap="square"/>
+                    <a:lstStyle/>
+                    <a:p>
+                      <a:pPr algn="l">
+                        <a:spcAft>
+                          <a:spcPts val="0"/>
+                        </a:spcAft>
+                      </a:pPr>
+                      <a:r>
+                        <a:rPr sz="1100" b="0">
+                          <a:solidFill>
+                            <a:srgbClr val="2B2B2B"/>
+                          </a:solidFill>
+                          <a:latin typeface="맑은 고딕"/>
+                        </a:rPr>
+                        <a:t>REC-001</a:t>
+                      </a:r>
+                    </a:p>
+                  </a:txBody>
+                  <a:tcPr>
+                    <a:solidFill>
+                      <a:srgbClr val="FFFFFF"/>
+                    </a:solidFill>
+                  </a:tcPr>
+                </a:tc>
+                <a:tc>
+                  <a:txBody>
+                    <a:bodyPr wrap="square"/>
+                    <a:lstStyle/>
+                    <a:p>
+                      <a:pPr algn="l">
+                        <a:spcAft>
+                          <a:spcPts val="0"/>
+                        </a:spcAft>
+                      </a:pPr>
+                      <a:r>
+                        <a:rPr sz="1100" b="0">
+                          <a:solidFill>
+                            <a:srgbClr val="2B2B2B"/>
+                          </a:solidFill>
+                          <a:latin typeface="맑은 고딕"/>
+                        </a:rPr>
+                        <a:t>가능 — 녹취 의무 대상 여부 표시</a:t>
+                      </a:r>
+                    </a:p>
+                  </a:txBody>
+                  <a:tcPr>
+                    <a:solidFill>
+                      <a:srgbClr val="FFFFFF"/>
+                    </a:solidFill>
+                  </a:tcPr>
+                </a:tc>
+              </a:tr>
+            </a:tbl>
+          </a:graphicData>
+        </a:graphic>
+      </p:graphicFrame>
       <p:sp>
         <p:nvSpPr>
           <p:cNvPr id="6" name="Rounded Rectangle 5"/>
@@ -13534,278 +17664,8 @@
         </p:nvSpPr>
         <p:spPr>
           <a:xfrm>
-            <a:off x="3383280" y="1417320"/>
-            <a:ext cx="2615184" cy="1600200"/>
-          </a:xfrm>
-          <a:prstGeom prst="roundRect">
-            <a:avLst/>
-          </a:prstGeom>
-          <a:solidFill>
-            <a:srgbClr val="FFF8DF"/>
-          </a:solidFill>
-          <a:ln>
-            <a:solidFill>
-              <a:srgbClr val="FCAF17"/>
-            </a:solidFill>
-          </a:ln>
-        </p:spPr>
-        <p:style>
-          <a:lnRef idx="1">
-            <a:schemeClr val="accent1"/>
-          </a:lnRef>
-          <a:fillRef idx="3">
-            <a:schemeClr val="accent1"/>
-          </a:fillRef>
-          <a:effectRef idx="2">
-            <a:schemeClr val="accent1"/>
-          </a:effectRef>
-          <a:fontRef idx="minor">
-            <a:schemeClr val="lt1"/>
-          </a:fontRef>
-        </p:style>
-        <p:txBody>
-          <a:bodyPr rtlCol="0" anchor="ctr" wrap="square"/>
-          <a:lstStyle/>
-          <a:p>
-            <a:pPr algn="ctr">
-              <a:spcAft>
-                <a:spcPts val="300"/>
-              </a:spcAft>
-            </a:pPr>
-            <a:r>
-              <a:rPr sz="2400" b="1">
-                <a:solidFill>
-                  <a:srgbClr val="C62828"/>
-                </a:solidFill>
-                <a:latin typeface="맑은 고딕"/>
-              </a:rPr>
-              <a:t>+53.3%</a:t>
-            </a:r>
-          </a:p>
-          <a:p>
-            <a:pPr algn="ctr">
-              <a:spcAft>
-                <a:spcPts val="200"/>
-              </a:spcAft>
-            </a:pPr>
-            <a:r>
-              <a:rPr sz="1200" b="1">
-                <a:solidFill>
-                  <a:srgbClr val="645B4C"/>
-                </a:solidFill>
-                <a:latin typeface="맑은 고딕"/>
-              </a:rPr>
-              <a:t>은행 권역 민원 증가</a:t>
-            </a:r>
-          </a:p>
-          <a:p>
-            <a:pPr algn="ctr">
-              <a:spcAft>
-                <a:spcPts val="0"/>
-              </a:spcAft>
-            </a:pPr>
-            <a:r>
-              <a:rPr sz="1000" b="0">
-                <a:solidFill>
-                  <a:srgbClr val="6B6B6B"/>
-                </a:solidFill>
-                <a:latin typeface="맑은 고딕"/>
-              </a:rPr>
-              <a:t>24,043건 · ELS 불완전판매가 주원인</a:t>
-            </a:r>
-          </a:p>
-        </p:txBody>
-      </p:sp>
-      <p:sp>
-        <p:nvSpPr>
-          <p:cNvPr id="7" name="Rounded Rectangle 6"/>
-          <p:cNvSpPr/>
-          <p:nvPr/>
-        </p:nvSpPr>
-        <p:spPr>
-          <a:xfrm>
-            <a:off x="6199632" y="1417320"/>
-            <a:ext cx="2615184" cy="1600200"/>
-          </a:xfrm>
-          <a:prstGeom prst="roundRect">
-            <a:avLst/>
-          </a:prstGeom>
-          <a:solidFill>
-            <a:srgbClr val="FFF8DF"/>
-          </a:solidFill>
-          <a:ln>
-            <a:solidFill>
-              <a:srgbClr val="FCAF17"/>
-            </a:solidFill>
-          </a:ln>
-        </p:spPr>
-        <p:style>
-          <a:lnRef idx="1">
-            <a:schemeClr val="accent1"/>
-          </a:lnRef>
-          <a:fillRef idx="3">
-            <a:schemeClr val="accent1"/>
-          </a:fillRef>
-          <a:effectRef idx="2">
-            <a:schemeClr val="accent1"/>
-          </a:effectRef>
-          <a:fontRef idx="minor">
-            <a:schemeClr val="lt1"/>
-          </a:fontRef>
-        </p:style>
-        <p:txBody>
-          <a:bodyPr rtlCol="0" anchor="ctr" wrap="square"/>
-          <a:lstStyle/>
-          <a:p>
-            <a:pPr algn="ctr">
-              <a:spcAft>
-                <a:spcPts val="300"/>
-              </a:spcAft>
-            </a:pPr>
-            <a:r>
-              <a:rPr sz="2400" b="1">
-                <a:solidFill>
-                  <a:srgbClr val="C62828"/>
-                </a:solidFill>
-                <a:latin typeface="맑은 고딕"/>
-              </a:rPr>
-              <a:t>+1,048%</a:t>
-            </a:r>
-          </a:p>
-          <a:p>
-            <a:pPr algn="ctr">
-              <a:spcAft>
-                <a:spcPts val="200"/>
-              </a:spcAft>
-            </a:pPr>
-            <a:r>
-              <a:rPr sz="1200" b="1">
-                <a:solidFill>
-                  <a:srgbClr val="645B4C"/>
-                </a:solidFill>
-                <a:latin typeface="맑은 고딕"/>
-              </a:rPr>
-              <a:t>펀드·방카슈랑스 민원 증가</a:t>
-            </a:r>
-          </a:p>
-          <a:p>
-            <a:pPr algn="ctr">
-              <a:spcAft>
-                <a:spcPts val="0"/>
-              </a:spcAft>
-            </a:pPr>
-            <a:r>
-              <a:rPr sz="1000" b="0">
-                <a:solidFill>
-                  <a:srgbClr val="6B6B6B"/>
-                </a:solidFill>
-                <a:latin typeface="맑은 고딕"/>
-              </a:rPr>
-              <a:t>신탁은 +1,459%</a:t>
-            </a:r>
-          </a:p>
-        </p:txBody>
-      </p:sp>
-      <p:sp>
-        <p:nvSpPr>
-          <p:cNvPr id="8" name="Rounded Rectangle 7"/>
-          <p:cNvSpPr/>
-          <p:nvPr/>
-        </p:nvSpPr>
-        <p:spPr>
-          <a:xfrm>
-            <a:off x="9015984" y="1417320"/>
-            <a:ext cx="2615184" cy="1600200"/>
-          </a:xfrm>
-          <a:prstGeom prst="roundRect">
-            <a:avLst/>
-          </a:prstGeom>
-          <a:solidFill>
-            <a:srgbClr val="FFF8DF"/>
-          </a:solidFill>
-          <a:ln>
-            <a:solidFill>
-              <a:srgbClr val="FCAF17"/>
-            </a:solidFill>
-          </a:ln>
-        </p:spPr>
-        <p:style>
-          <a:lnRef idx="1">
-            <a:schemeClr val="accent1"/>
-          </a:lnRef>
-          <a:fillRef idx="3">
-            <a:schemeClr val="accent1"/>
-          </a:fillRef>
-          <a:effectRef idx="2">
-            <a:schemeClr val="accent1"/>
-          </a:effectRef>
-          <a:fontRef idx="minor">
-            <a:schemeClr val="lt1"/>
-          </a:fontRef>
-        </p:style>
-        <p:txBody>
-          <a:bodyPr rtlCol="0" anchor="ctr" wrap="square"/>
-          <a:lstStyle/>
-          <a:p>
-            <a:pPr algn="ctr">
-              <a:spcAft>
-                <a:spcPts val="300"/>
-              </a:spcAft>
-            </a:pPr>
-            <a:r>
-              <a:rPr sz="2400" b="1">
-                <a:solidFill>
-                  <a:srgbClr val="C62828"/>
-                </a:solidFill>
-                <a:latin typeface="맑은 고딕"/>
-              </a:rPr>
-              <a:t>약 1조 3,000억</a:t>
-            </a:r>
-          </a:p>
-          <a:p>
-            <a:pPr algn="ctr">
-              <a:spcAft>
-                <a:spcPts val="200"/>
-              </a:spcAft>
-            </a:pPr>
-            <a:r>
-              <a:rPr sz="1200" b="1">
-                <a:solidFill>
-                  <a:srgbClr val="645B4C"/>
-                </a:solidFill>
-                <a:latin typeface="맑은 고딕"/>
-              </a:rPr>
-              <a:t>홍콩 ELS 자율배상 규모</a:t>
-            </a:r>
-          </a:p>
-          <a:p>
-            <a:pPr algn="ctr">
-              <a:spcAft>
-                <a:spcPts val="0"/>
-              </a:spcAft>
-            </a:pPr>
-            <a:r>
-              <a:rPr sz="1000" b="0">
-                <a:solidFill>
-                  <a:srgbClr val="6B6B6B"/>
-                </a:solidFill>
-                <a:latin typeface="맑은 고딕"/>
-              </a:rPr>
-              <a:t>5개 은행 합계</a:t>
-            </a:r>
-          </a:p>
-        </p:txBody>
-      </p:sp>
-      <p:sp>
-        <p:nvSpPr>
-          <p:cNvPr id="9" name="Rounded Rectangle 8"/>
-          <p:cNvSpPr/>
-          <p:nvPr/>
-        </p:nvSpPr>
-        <p:spPr>
-          <a:xfrm>
-            <a:off x="566928" y="3291840"/>
-            <a:ext cx="5394960" cy="2148840"/>
+            <a:off x="566928" y="3977639"/>
+            <a:ext cx="5394960" cy="2103120"/>
           </a:xfrm>
           <a:prstGeom prst="roundRect">
             <a:avLst/>
@@ -13843,20 +17703,20 @@
       </p:sp>
       <p:sp>
         <p:nvSpPr>
-          <p:cNvPr id="10" name="Rectangle 9"/>
+          <p:cNvPr id="7" name="Rectangle 6"/>
           <p:cNvSpPr/>
           <p:nvPr/>
         </p:nvSpPr>
         <p:spPr>
           <a:xfrm>
-            <a:off x="566928" y="3291840"/>
-            <a:ext cx="54864" cy="2148840"/>
+            <a:off x="566928" y="3977639"/>
+            <a:ext cx="54864" cy="2103120"/>
           </a:xfrm>
           <a:prstGeom prst="rect">
             <a:avLst/>
           </a:prstGeom>
           <a:solidFill>
-            <a:srgbClr val="C62828"/>
+            <a:srgbClr val="2E7D32"/>
           </a:solidFill>
           <a:ln>
             <a:noFill/>
@@ -13886,14 +17746,14 @@
       </p:sp>
       <p:sp>
         <p:nvSpPr>
-          <p:cNvPr id="11" name="TextBox 10"/>
+          <p:cNvPr id="8" name="TextBox 7"/>
           <p:cNvSpPr txBox="1"/>
           <p:nvPr/>
         </p:nvSpPr>
         <p:spPr>
           <a:xfrm>
-            <a:off x="822960" y="3438144"/>
-            <a:ext cx="4937760" cy="1874520"/>
+            <a:off x="822960" y="4123943"/>
+            <a:ext cx="4937760" cy="1828800"/>
           </a:xfrm>
           <a:prstGeom prst="rect">
             <a:avLst/>
@@ -13918,7 +17778,7 @@
                 </a:solidFill>
                 <a:latin typeface="맑은 고딕"/>
               </a:rPr>
-              <a:t>이 문제는 KB국민은행이 직접 겪었습니다</a:t>
+              <a:t>우리 규칙은 임의로 고른 것이 아닙니다</a:t>
             </a:r>
           </a:p>
           <a:p>
@@ -13934,7 +17794,7 @@
                 </a:solidFill>
                 <a:latin typeface="맑은 고딕"/>
               </a:rPr>
-              <a:t>홍콩H지수 ELS 불완전판매로 금감원 검사 대상이 된 5개 은행:</a:t>
+              <a:t>실제 분쟁에서 배상비율을 결정한 네 가지 항목이</a:t>
             </a:r>
           </a:p>
           <a:p>
@@ -13950,7 +17810,7 @@
                 </a:solidFill>
                 <a:latin typeface="맑은 고딕"/>
               </a:rPr>
-              <a:t>KB국민 · 신한 · 하나 · NH농협 · SC제일</a:t>
+              <a:t>그대로 우리 검사 항목과 대응합니다</a:t>
             </a:r>
           </a:p>
           <a:p>
@@ -13966,7 +17826,7 @@
                 </a:solidFill>
                 <a:latin typeface="맑은 고딕"/>
               </a:rPr>
-              <a:t>과징금은 최초 약 4조원으로 산정된 뒤 논의를 거쳐</a:t>
+              <a:t>즉 '실무에서 문제가 된 지점'을 검사하도록 설계했습니다</a:t>
             </a:r>
           </a:p>
           <a:p>
@@ -13982,21 +17842,21 @@
                 </a:solidFill>
                 <a:latin typeface="맑은 고딕"/>
               </a:rPr>
-              <a:t>6,000억원 수준으로 조정 (2026.7 기준 심의 진행)</a:t>
-            </a:r>
-          </a:p>
-        </p:txBody>
-      </p:sp>
-      <p:sp>
-        <p:nvSpPr>
-          <p:cNvPr id="12" name="Rounded Rectangle 11"/>
+              <a:t>설명의무는 3개 규칙으로 나눠 더 세밀하게 봅니다</a:t>
+            </a:r>
+          </a:p>
+        </p:txBody>
+      </p:sp>
+      <p:sp>
+        <p:nvSpPr>
+          <p:cNvPr id="9" name="Rounded Rectangle 8"/>
           <p:cNvSpPr/>
           <p:nvPr/>
         </p:nvSpPr>
         <p:spPr>
           <a:xfrm>
-            <a:off x="6172200" y="3291840"/>
-            <a:ext cx="5458968" cy="2148840"/>
+            <a:off x="6172200" y="3977639"/>
+            <a:ext cx="5458968" cy="2103120"/>
           </a:xfrm>
           <a:prstGeom prst="roundRect">
             <a:avLst/>
@@ -14034,14 +17894,14 @@
       </p:sp>
       <p:sp>
         <p:nvSpPr>
-          <p:cNvPr id="13" name="Rectangle 12"/>
+          <p:cNvPr id="10" name="Rectangle 9"/>
           <p:cNvSpPr/>
           <p:nvPr/>
         </p:nvSpPr>
         <p:spPr>
           <a:xfrm>
-            <a:off x="6172200" y="3291840"/>
-            <a:ext cx="54864" cy="2148840"/>
+            <a:off x="6172200" y="3977639"/>
+            <a:ext cx="54864" cy="2103120"/>
           </a:xfrm>
           <a:prstGeom prst="rect">
             <a:avLst/>
@@ -14077,14 +17937,14 @@
       </p:sp>
       <p:sp>
         <p:nvSpPr>
-          <p:cNvPr id="14" name="TextBox 13"/>
+          <p:cNvPr id="11" name="TextBox 10"/>
           <p:cNvSpPr txBox="1"/>
           <p:nvPr/>
         </p:nvSpPr>
         <p:spPr>
           <a:xfrm>
-            <a:off x="6428232" y="3438144"/>
-            <a:ext cx="5001768" cy="1874520"/>
+            <a:off x="6428232" y="4123943"/>
+            <a:ext cx="5001768" cy="1828800"/>
           </a:xfrm>
           <a:prstGeom prst="rect">
             <a:avLst/>
@@ -14109,7 +17969,7 @@
                 </a:solidFill>
                 <a:latin typeface="맑은 고딕"/>
               </a:rPr>
-              <a:t>제재 근거는 '판매 과정'입니다</a:t>
+              <a:t>판매 시점에 걸렀다면</a:t>
             </a:r>
           </a:p>
           <a:p>
@@ -14125,7 +17985,7 @@
                 </a:solidFill>
                 <a:latin typeface="맑은 고딕"/>
               </a:rPr>
-              <a:t>금소법 제57조 — 위반 관련 계약으로 얻은 수입의 50% 이내 과징금</a:t>
+              <a:t>배상비율 산정 항목 = 판매 서류에 남는 흔적</a:t>
             </a:r>
           </a:p>
           <a:p>
@@ -14141,7 +18001,7 @@
                 </a:solidFill>
                 <a:latin typeface="맑은 고딕"/>
               </a:rPr>
-              <a:t>즉 상품이 손실을 냈다는 사실이 아니라</a:t>
+              <a:t>성향과 등급의 불일치, 빠진 서명, 뒤집힌 날짜는</a:t>
             </a:r>
           </a:p>
           <a:p>
@@ -14157,7 +18017,7 @@
                 </a:solidFill>
                 <a:latin typeface="맑은 고딕"/>
               </a:rPr>
-              <a:t>적합성·설명의무를 지켰는지가 제재를 가른다</a:t>
+              <a:t>모두 계약 전에 확인할 수 있는 것들입니다</a:t>
             </a:r>
           </a:p>
           <a:p>
@@ -14173,21 +18033,21 @@
                 </a:solidFill>
                 <a:latin typeface="맑은 고딕"/>
               </a:rPr>
-              <a:t>→ 판매 시점의 서류가 곧 방어 근거이자 위험 지점</a:t>
-            </a:r>
-          </a:p>
-        </p:txBody>
-      </p:sp>
-      <p:sp>
-        <p:nvSpPr>
-          <p:cNvPr id="15" name="TextBox 14"/>
+              <a:t>사후 배상 산정이 아니라 사전 차단이 목표입니다</a:t>
+            </a:r>
+          </a:p>
+        </p:txBody>
+      </p:sp>
+      <p:sp>
+        <p:nvSpPr>
+          <p:cNvPr id="12" name="TextBox 11"/>
           <p:cNvSpPr txBox="1"/>
           <p:nvPr/>
         </p:nvSpPr>
         <p:spPr>
           <a:xfrm>
-            <a:off x="566928" y="5577840"/>
-            <a:ext cx="11064240" cy="822960"/>
+            <a:off x="566928" y="6172200"/>
+            <a:ext cx="11064240" cy="457200"/>
           </a:xfrm>
           <a:prstGeom prst="rect">
             <a:avLst/>
@@ -14212,7 +18072,7 @@
                 </a:solidFill>
                 <a:latin typeface="맑은 고딕"/>
               </a:rPr>
-              <a:t>출처: 금융감독원 2024년 금융민원 통계(2025.4 보도) · 홍콩 ELS 제재 관련 보도(2026.6~7). 과징금 규모는 심의 진행에 따라 변동될 수 있습니다.</a:t>
+              <a:t>출처: 홍콩 ELS 분쟁조정 배상비율 산정기준 관련 보도(2024~2026). 배상비율은 개별 사안별로 달라집니다.</a:t>
             </a:r>
           </a:p>
         </p:txBody>
@@ -14225,7 +18085,7 @@
 </p:sld>
 </file>
 
-<file path=ppt/slides/slide4.xml><?xml version="1.0" encoding="utf-8"?>
+<file path=ppt/slides/slide5.xml><?xml version="1.0" encoding="utf-8"?>
 <p:sld xmlns:a="http://schemas.openxmlformats.org/drawingml/2006/main" xmlns:p="http://schemas.openxmlformats.org/presentationml/2006/main" xmlns:r="http://schemas.openxmlformats.org/officeDocument/2006/relationships">
   <p:cSld>
     <p:spTree>
@@ -15359,7 +19219,7 @@
 </p:sld>
 </file>
 
-<file path=ppt/slides/slide5.xml><?xml version="1.0" encoding="utf-8"?>
+<file path=ppt/slides/slide6.xml><?xml version="1.0" encoding="utf-8"?>
 <p:sld xmlns:a="http://schemas.openxmlformats.org/drawingml/2006/main" xmlns:p="http://schemas.openxmlformats.org/presentationml/2006/main" xmlns:r="http://schemas.openxmlformats.org/officeDocument/2006/relationships">
   <p:cSld>
     <p:spTree>
@@ -16384,7 +20244,7 @@
 </p:sld>
 </file>
 
-<file path=ppt/slides/slide6.xml><?xml version="1.0" encoding="utf-8"?>
+<file path=ppt/slides/slide7.xml><?xml version="1.0" encoding="utf-8"?>
 <p:sld xmlns:a="http://schemas.openxmlformats.org/drawingml/2006/main" xmlns:p="http://schemas.openxmlformats.org/presentationml/2006/main" xmlns:r="http://schemas.openxmlformats.org/officeDocument/2006/relationships">
   <p:cSld>
     <p:spTree>
@@ -17732,7 +21592,7 @@
 </p:sld>
 </file>
 
-<file path=ppt/slides/slide7.xml><?xml version="1.0" encoding="utf-8"?>
+<file path=ppt/slides/slide8.xml><?xml version="1.0" encoding="utf-8"?>
 <p:sld xmlns:a="http://schemas.openxmlformats.org/drawingml/2006/main" xmlns:p="http://schemas.openxmlformats.org/presentationml/2006/main" xmlns:r="http://schemas.openxmlformats.org/officeDocument/2006/relationships">
   <p:cSld>
     <p:spTree>
@@ -18949,7 +22809,7 @@
 </p:sld>
 </file>
 
-<file path=ppt/slides/slide8.xml><?xml version="1.0" encoding="utf-8"?>
+<file path=ppt/slides/slide9.xml><?xml version="1.0" encoding="utf-8"?>
 <p:sld xmlns:a="http://schemas.openxmlformats.org/drawingml/2006/main" xmlns:p="http://schemas.openxmlformats.org/presentationml/2006/main" xmlns:r="http://schemas.openxmlformats.org/officeDocument/2006/relationships">
   <p:cSld>
     <p:spTree>
@@ -19811,1283 +23671,6 @@
                 <a:latin typeface="맑은 고딕"/>
               </a:rPr>
               <a:t>실제로 LLM이 위험등급을 '5등급'으로 지어냈을 때(원문에는 6등급만 존재) 이 계층이 잡아냈습니다.</a:t>
-            </a:r>
-          </a:p>
-        </p:txBody>
-      </p:sp>
-    </p:spTree>
-  </p:cSld>
-  <p:clrMapOvr>
-    <a:masterClrMapping/>
-  </p:clrMapOvr>
-</p:sld>
-</file>
-
-<file path=ppt/slides/slide9.xml><?xml version="1.0" encoding="utf-8"?>
-<p:sld xmlns:a="http://schemas.openxmlformats.org/drawingml/2006/main" xmlns:p="http://schemas.openxmlformats.org/presentationml/2006/main" xmlns:r="http://schemas.openxmlformats.org/officeDocument/2006/relationships">
-  <p:cSld>
-    <p:spTree>
-      <p:nvGrpSpPr>
-        <p:cNvPr id="1" name=""/>
-        <p:cNvGrpSpPr/>
-        <p:nvPr/>
-      </p:nvGrpSpPr>
-      <p:grpSpPr/>
-      <p:sp>
-        <p:nvSpPr>
-          <p:cNvPr id="2" name="Rectangle 1"/>
-          <p:cNvSpPr/>
-          <p:nvPr/>
-        </p:nvSpPr>
-        <p:spPr>
-          <a:xfrm>
-            <a:off x="0" y="0"/>
-            <a:ext cx="12191695" cy="82296"/>
-          </a:xfrm>
-          <a:prstGeom prst="rect">
-            <a:avLst/>
-          </a:prstGeom>
-          <a:solidFill>
-            <a:srgbClr val="FCAF17"/>
-          </a:solidFill>
-          <a:ln>
-            <a:noFill/>
-          </a:ln>
-        </p:spPr>
-        <p:style>
-          <a:lnRef idx="1">
-            <a:schemeClr val="accent1"/>
-          </a:lnRef>
-          <a:fillRef idx="3">
-            <a:schemeClr val="accent1"/>
-          </a:fillRef>
-          <a:effectRef idx="2">
-            <a:schemeClr val="accent1"/>
-          </a:effectRef>
-          <a:fontRef idx="minor">
-            <a:schemeClr val="lt1"/>
-          </a:fontRef>
-        </p:style>
-        <p:txBody>
-          <a:bodyPr rtlCol="0" anchor="ctr"/>
-          <a:lstStyle/>
-          <a:p>
-            <a:pPr algn="ctr"/>
-          </a:p>
-        </p:txBody>
-      </p:sp>
-      <p:sp>
-        <p:nvSpPr>
-          <p:cNvPr id="3" name="TextBox 2"/>
-          <p:cNvSpPr txBox="1"/>
-          <p:nvPr/>
-        </p:nvSpPr>
-        <p:spPr>
-          <a:xfrm>
-            <a:off x="566928" y="310896"/>
-            <a:ext cx="10424160" cy="914400"/>
-          </a:xfrm>
-          <a:prstGeom prst="rect">
-            <a:avLst/>
-          </a:prstGeom>
-          <a:noFill/>
-        </p:spPr>
-        <p:txBody>
-          <a:bodyPr wrap="square">
-            <a:spAutoFit/>
-          </a:bodyPr>
-          <a:lstStyle/>
-          <a:p>
-            <a:pPr algn="l">
-              <a:spcAft>
-                <a:spcPts val="200"/>
-              </a:spcAft>
-            </a:pPr>
-            <a:r>
-              <a:rPr sz="3000" b="1">
-                <a:solidFill>
-                  <a:srgbClr val="645B4C"/>
-                </a:solidFill>
-                <a:latin typeface="맑은 고딕"/>
-              </a:rPr>
-              <a:t>핵심 기술 ①  AI가 지어낸 값을 판정에 쓰지 않는다</a:t>
-            </a:r>
-          </a:p>
-          <a:p>
-            <a:pPr algn="l">
-              <a:spcAft>
-                <a:spcPts val="600"/>
-              </a:spcAft>
-            </a:pPr>
-            <a:r>
-              <a:rPr sz="1400" b="0">
-                <a:solidFill>
-                  <a:srgbClr val="6B6B6B"/>
-                </a:solidFill>
-                <a:latin typeface="맑은 고딕"/>
-              </a:rPr>
-              <a:t>실물 서류에서 실제로 발생한 오류와, 이를 막은 방식</a:t>
-            </a:r>
-          </a:p>
-        </p:txBody>
-      </p:sp>
-      <p:sp>
-        <p:nvSpPr>
-          <p:cNvPr id="4" name="Rounded Rectangle 3"/>
-          <p:cNvSpPr/>
-          <p:nvPr/>
-        </p:nvSpPr>
-        <p:spPr>
-          <a:xfrm>
-            <a:off x="9646920" y="329184"/>
-            <a:ext cx="1965960" cy="384048"/>
-          </a:xfrm>
-          <a:prstGeom prst="roundRect">
-            <a:avLst/>
-          </a:prstGeom>
-          <a:solidFill>
-            <a:srgbClr val="FFF8DF"/>
-          </a:solidFill>
-          <a:ln>
-            <a:solidFill>
-              <a:srgbClr val="FCAF17"/>
-            </a:solidFill>
-          </a:ln>
-        </p:spPr>
-        <p:style>
-          <a:lnRef idx="1">
-            <a:schemeClr val="accent1"/>
-          </a:lnRef>
-          <a:fillRef idx="3">
-            <a:schemeClr val="accent1"/>
-          </a:fillRef>
-          <a:effectRef idx="2">
-            <a:schemeClr val="accent1"/>
-          </a:effectRef>
-          <a:fontRef idx="minor">
-            <a:schemeClr val="lt1"/>
-          </a:fontRef>
-        </p:style>
-        <p:txBody>
-          <a:bodyPr rtlCol="0" anchor="ctr" wrap="square"/>
-          <a:lstStyle/>
-          <a:p>
-            <a:pPr algn="ctr">
-              <a:spcAft>
-                <a:spcPts val="0"/>
-              </a:spcAft>
-            </a:pPr>
-            <a:r>
-              <a:rPr sz="1100" b="1">
-                <a:solidFill>
-                  <a:srgbClr val="645B4C"/>
-                </a:solidFill>
-                <a:latin typeface="맑은 고딕"/>
-              </a:rPr>
-              <a:t>기술 적정성</a:t>
-            </a:r>
-          </a:p>
-        </p:txBody>
-      </p:sp>
-      <p:graphicFrame>
-        <p:nvGraphicFramePr>
-          <p:cNvPr id="5" name="Table 4"/>
-          <p:cNvGraphicFramePr>
-            <a:graphicFrameLocks noGrp="1"/>
-          </p:cNvGraphicFramePr>
-          <p:nvPr/>
-        </p:nvGraphicFramePr>
-        <p:xfrm>
-          <a:off x="566928" y="1417320"/>
-          <a:ext cx="11064240" cy="1645920"/>
-        </p:xfrm>
-        <a:graphic>
-          <a:graphicData uri="http://schemas.openxmlformats.org/drawingml/2006/table">
-            <a:tbl>
-              <a:tblPr firstRow="1" bandRow="1">
-                <a:tableStyleId>{5C22544A-7EE6-4342-B048-85BDC9FD1C3A}</a:tableStyleId>
-              </a:tblPr>
-              <a:tblGrid>
-                <a:gridCol w="3017520"/>
-                <a:gridCol w="2834640"/>
-                <a:gridCol w="3200400"/>
-                <a:gridCol w="2011680"/>
-              </a:tblGrid>
-              <a:tr h="329184">
-                <a:tc>
-                  <a:txBody>
-                    <a:bodyPr wrap="square"/>
-                    <a:lstStyle/>
-                    <a:p>
-                      <a:pPr algn="l">
-                        <a:spcAft>
-                          <a:spcPts val="0"/>
-                        </a:spcAft>
-                      </a:pPr>
-                      <a:r>
-                        <a:rPr sz="1200" b="1">
-                          <a:solidFill>
-                            <a:srgbClr val="645B4C"/>
-                          </a:solidFill>
-                          <a:latin typeface="맑은 고딕"/>
-                        </a:rPr>
-                        <a:t>실제 발생한 오류</a:t>
-                      </a:r>
-                    </a:p>
-                  </a:txBody>
-                  <a:tcPr>
-                    <a:solidFill>
-                      <a:srgbClr val="FFF8DF"/>
-                    </a:solidFill>
-                  </a:tcPr>
-                </a:tc>
-                <a:tc>
-                  <a:txBody>
-                    <a:bodyPr wrap="square"/>
-                    <a:lstStyle/>
-                    <a:p>
-                      <a:pPr algn="l">
-                        <a:spcAft>
-                          <a:spcPts val="0"/>
-                        </a:spcAft>
-                      </a:pPr>
-                      <a:r>
-                        <a:rPr sz="1200" b="1">
-                          <a:solidFill>
-                            <a:srgbClr val="645B4C"/>
-                          </a:solidFill>
-                          <a:latin typeface="맑은 고딕"/>
-                        </a:rPr>
-                        <a:t>원문</a:t>
-                      </a:r>
-                    </a:p>
-                  </a:txBody>
-                  <a:tcPr>
-                    <a:solidFill>
-                      <a:srgbClr val="FFF8DF"/>
-                    </a:solidFill>
-                  </a:tcPr>
-                </a:tc>
-                <a:tc>
-                  <a:txBody>
-                    <a:bodyPr wrap="square"/>
-                    <a:lstStyle/>
-                    <a:p>
-                      <a:pPr algn="l">
-                        <a:spcAft>
-                          <a:spcPts val="0"/>
-                        </a:spcAft>
-                      </a:pPr>
-                      <a:r>
-                        <a:rPr sz="1200" b="1">
-                          <a:solidFill>
-                            <a:srgbClr val="645B4C"/>
-                          </a:solidFill>
-                          <a:latin typeface="맑은 고딕"/>
-                        </a:rPr>
-                        <a:t>방어 장치</a:t>
-                      </a:r>
-                    </a:p>
-                  </a:txBody>
-                  <a:tcPr>
-                    <a:solidFill>
-                      <a:srgbClr val="FFF8DF"/>
-                    </a:solidFill>
-                  </a:tcPr>
-                </a:tc>
-                <a:tc>
-                  <a:txBody>
-                    <a:bodyPr wrap="square"/>
-                    <a:lstStyle/>
-                    <a:p>
-                      <a:pPr algn="l">
-                        <a:spcAft>
-                          <a:spcPts val="0"/>
-                        </a:spcAft>
-                      </a:pPr>
-                      <a:r>
-                        <a:rPr sz="1200" b="1">
-                          <a:solidFill>
-                            <a:srgbClr val="645B4C"/>
-                          </a:solidFill>
-                          <a:latin typeface="맑은 고딕"/>
-                        </a:rPr>
-                        <a:t>결과</a:t>
-                      </a:r>
-                    </a:p>
-                  </a:txBody>
-                  <a:tcPr>
-                    <a:solidFill>
-                      <a:srgbClr val="FFF8DF"/>
-                    </a:solidFill>
-                  </a:tcPr>
-                </a:tc>
-              </a:tr>
-              <a:tr h="329184">
-                <a:tc>
-                  <a:txBody>
-                    <a:bodyPr wrap="square"/>
-                    <a:lstStyle/>
-                    <a:p>
-                      <a:pPr algn="l">
-                        <a:spcAft>
-                          <a:spcPts val="0"/>
-                        </a:spcAft>
-                      </a:pPr>
-                      <a:r>
-                        <a:rPr sz="1100" b="0">
-                          <a:solidFill>
-                            <a:srgbClr val="2B2B2B"/>
-                          </a:solidFill>
-                          <a:latin typeface="맑은 고딕"/>
-                        </a:rPr>
-                        <a:t>LLM이 위험등급 '5등급' 생성</a:t>
-                      </a:r>
-                    </a:p>
-                  </a:txBody>
-                  <a:tcPr>
-                    <a:solidFill>
-                      <a:srgbClr val="FFFFFF"/>
-                    </a:solidFill>
-                  </a:tcPr>
-                </a:tc>
-                <a:tc>
-                  <a:txBody>
-                    <a:bodyPr wrap="square"/>
-                    <a:lstStyle/>
-                    <a:p>
-                      <a:pPr algn="l">
-                        <a:spcAft>
-                          <a:spcPts val="0"/>
-                        </a:spcAft>
-                      </a:pPr>
-                      <a:r>
-                        <a:rPr sz="1100" b="0">
-                          <a:solidFill>
-                            <a:srgbClr val="2B2B2B"/>
-                          </a:solidFill>
-                          <a:latin typeface="맑은 고딕"/>
-                        </a:rPr>
-                        <a:t>원문에는 6등급만 존재</a:t>
-                      </a:r>
-                    </a:p>
-                  </a:txBody>
-                  <a:tcPr>
-                    <a:solidFill>
-                      <a:srgbClr val="FFFFFF"/>
-                    </a:solidFill>
-                  </a:tcPr>
-                </a:tc>
-                <a:tc>
-                  <a:txBody>
-                    <a:bodyPr wrap="square"/>
-                    <a:lstStyle/>
-                    <a:p>
-                      <a:pPr algn="l">
-                        <a:spcAft>
-                          <a:spcPts val="0"/>
-                        </a:spcAft>
-                      </a:pPr>
-                      <a:r>
-                        <a:rPr sz="1100" b="0">
-                          <a:solidFill>
-                            <a:srgbClr val="2B2B2B"/>
-                          </a:solidFill>
-                          <a:latin typeface="맑은 고딕"/>
-                        </a:rPr>
-                        <a:t>원문 대조 후 미존재 값 폐기</a:t>
-                      </a:r>
-                    </a:p>
-                  </a:txBody>
-                  <a:tcPr>
-                    <a:solidFill>
-                      <a:srgbClr val="FFFFFF"/>
-                    </a:solidFill>
-                  </a:tcPr>
-                </a:tc>
-                <a:tc>
-                  <a:txBody>
-                    <a:bodyPr wrap="square"/>
-                    <a:lstStyle/>
-                    <a:p>
-                      <a:pPr algn="l">
-                        <a:spcAft>
-                          <a:spcPts val="0"/>
-                        </a:spcAft>
-                      </a:pPr>
-                      <a:r>
-                        <a:rPr sz="1100" b="0">
-                          <a:solidFill>
-                            <a:srgbClr val="2B2B2B"/>
-                          </a:solidFill>
-                          <a:latin typeface="맑은 고딕"/>
-                        </a:rPr>
-                        <a:t>6등급으로 교정</a:t>
-                      </a:r>
-                    </a:p>
-                  </a:txBody>
-                  <a:tcPr>
-                    <a:solidFill>
-                      <a:srgbClr val="FFFFFF"/>
-                    </a:solidFill>
-                  </a:tcPr>
-                </a:tc>
-              </a:tr>
-              <a:tr h="329184">
-                <a:tc>
-                  <a:txBody>
-                    <a:bodyPr wrap="square"/>
-                    <a:lstStyle/>
-                    <a:p>
-                      <a:pPr algn="l">
-                        <a:spcAft>
-                          <a:spcPts val="0"/>
-                        </a:spcAft>
-                      </a:pPr>
-                      <a:r>
-                        <a:rPr sz="1100" b="0">
-                          <a:solidFill>
-                            <a:srgbClr val="2B2B2B"/>
-                          </a:solidFill>
-                          <a:latin typeface="맑은 고딕"/>
-                        </a:rPr>
-                        <a:t>상품명에 '(주가연계증권)' 삽입</a:t>
-                      </a:r>
-                    </a:p>
-                  </a:txBody>
-                  <a:tcPr>
-                    <a:solidFill>
-                      <a:srgbClr val="FFFFFF"/>
-                    </a:solidFill>
-                  </a:tcPr>
-                </a:tc>
-                <a:tc>
-                  <a:txBody>
-                    <a:bodyPr wrap="square"/>
-                    <a:lstStyle/>
-                    <a:p>
-                      <a:pPr algn="l">
-                        <a:spcAft>
-                          <a:spcPts val="0"/>
-                        </a:spcAft>
-                      </a:pPr>
-                      <a:r>
-                        <a:rPr sz="1100" b="0">
-                          <a:solidFill>
-                            <a:srgbClr val="2B2B2B"/>
-                          </a:solidFill>
-                          <a:latin typeface="맑은 고딕"/>
-                        </a:rPr>
-                        <a:t>'제 23129호 파생결합증권(ELS)'</a:t>
-                      </a:r>
-                    </a:p>
-                  </a:txBody>
-                  <a:tcPr>
-                    <a:solidFill>
-                      <a:srgbClr val="FFFFFF"/>
-                    </a:solidFill>
-                  </a:tcPr>
-                </a:tc>
-                <a:tc>
-                  <a:txBody>
-                    <a:bodyPr wrap="square"/>
-                    <a:lstStyle/>
-                    <a:p>
-                      <a:pPr algn="l">
-                        <a:spcAft>
-                          <a:spcPts val="0"/>
-                        </a:spcAft>
-                      </a:pPr>
-                      <a:r>
-                        <a:rPr sz="1100" b="0">
-                          <a:solidFill>
-                            <a:srgbClr val="2B2B2B"/>
-                          </a:solidFill>
-                          <a:latin typeface="맑은 고딕"/>
-                        </a:rPr>
-                        <a:t>원문 표기로 복원, 겹침 부족 시 폐기</a:t>
-                      </a:r>
-                    </a:p>
-                  </a:txBody>
-                  <a:tcPr>
-                    <a:solidFill>
-                      <a:srgbClr val="FFFFFF"/>
-                    </a:solidFill>
-                  </a:tcPr>
-                </a:tc>
-                <a:tc>
-                  <a:txBody>
-                    <a:bodyPr wrap="square"/>
-                    <a:lstStyle/>
-                    <a:p>
-                      <a:pPr algn="l">
-                        <a:spcAft>
-                          <a:spcPts val="0"/>
-                        </a:spcAft>
-                      </a:pPr>
-                      <a:r>
-                        <a:rPr sz="1100" b="0">
-                          <a:solidFill>
-                            <a:srgbClr val="2B2B2B"/>
-                          </a:solidFill>
-                          <a:latin typeface="맑은 고딕"/>
-                        </a:rPr>
-                        <a:t>원문 표기 채택</a:t>
-                      </a:r>
-                    </a:p>
-                  </a:txBody>
-                  <a:tcPr>
-                    <a:solidFill>
-                      <a:srgbClr val="FFFFFF"/>
-                    </a:solidFill>
-                  </a:tcPr>
-                </a:tc>
-              </a:tr>
-              <a:tr h="329184">
-                <a:tc>
-                  <a:txBody>
-                    <a:bodyPr wrap="square"/>
-                    <a:lstStyle/>
-                    <a:p>
-                      <a:pPr algn="l">
-                        <a:spcAft>
-                          <a:spcPts val="0"/>
-                        </a:spcAft>
-                      </a:pPr>
-                      <a:r>
-                        <a:rPr sz="1100" b="0">
-                          <a:solidFill>
-                            <a:srgbClr val="2B2B2B"/>
-                          </a:solidFill>
-                          <a:latin typeface="맑은 고딕"/>
-                        </a:rPr>
-                        <a:t>설명확인서를 상품설명서로 오분류</a:t>
-                      </a:r>
-                    </a:p>
-                  </a:txBody>
-                  <a:tcPr>
-                    <a:solidFill>
-                      <a:srgbClr val="FFFFFF"/>
-                    </a:solidFill>
-                  </a:tcPr>
-                </a:tc>
-                <a:tc>
-                  <a:txBody>
-                    <a:bodyPr wrap="square"/>
-                    <a:lstStyle/>
-                    <a:p>
-                      <a:pPr algn="l">
-                        <a:spcAft>
-                          <a:spcPts val="0"/>
-                        </a:spcAft>
-                      </a:pPr>
-                      <a:r>
-                        <a:rPr sz="1100" b="0">
-                          <a:solidFill>
-                            <a:srgbClr val="2B2B2B"/>
-                          </a:solidFill>
-                          <a:latin typeface="맑은 고딕"/>
-                        </a:rPr>
-                        <a:t>제목이 '상품설명 확인서'</a:t>
-                      </a:r>
-                    </a:p>
-                  </a:txBody>
-                  <a:tcPr>
-                    <a:solidFill>
-                      <a:srgbClr val="FFFFFF"/>
-                    </a:solidFill>
-                  </a:tcPr>
-                </a:tc>
-                <a:tc>
-                  <a:txBody>
-                    <a:bodyPr wrap="square"/>
-                    <a:lstStyle/>
-                    <a:p>
-                      <a:pPr algn="l">
-                        <a:spcAft>
-                          <a:spcPts val="0"/>
-                        </a:spcAft>
-                      </a:pPr>
-                      <a:r>
-                        <a:rPr sz="1100" b="0">
-                          <a:solidFill>
-                            <a:srgbClr val="2B2B2B"/>
-                          </a:solidFill>
-                          <a:latin typeface="맑은 고딕"/>
-                        </a:rPr>
-                        <a:t>규칙 분류가 확신하면 LLM보다 우선</a:t>
-                      </a:r>
-                    </a:p>
-                  </a:txBody>
-                  <a:tcPr>
-                    <a:solidFill>
-                      <a:srgbClr val="FFFFFF"/>
-                    </a:solidFill>
-                  </a:tcPr>
-                </a:tc>
-                <a:tc>
-                  <a:txBody>
-                    <a:bodyPr wrap="square"/>
-                    <a:lstStyle/>
-                    <a:p>
-                      <a:pPr algn="l">
-                        <a:spcAft>
-                          <a:spcPts val="0"/>
-                        </a:spcAft>
-                      </a:pPr>
-                      <a:r>
-                        <a:rPr sz="1100" b="0">
-                          <a:solidFill>
-                            <a:srgbClr val="2B2B2B"/>
-                          </a:solidFill>
-                          <a:latin typeface="맑은 고딕"/>
-                        </a:rPr>
-                        <a:t>고객확인·설명일 복구</a:t>
-                      </a:r>
-                    </a:p>
-                  </a:txBody>
-                  <a:tcPr>
-                    <a:solidFill>
-                      <a:srgbClr val="FFFFFF"/>
-                    </a:solidFill>
-                  </a:tcPr>
-                </a:tc>
-              </a:tr>
-              <a:tr h="329184">
-                <a:tc>
-                  <a:txBody>
-                    <a:bodyPr wrap="square"/>
-                    <a:lstStyle/>
-                    <a:p>
-                      <a:pPr algn="l">
-                        <a:spcAft>
-                          <a:spcPts val="0"/>
-                        </a:spcAft>
-                      </a:pPr>
-                      <a:r>
-                        <a:rPr sz="1100" b="0">
-                          <a:solidFill>
-                            <a:srgbClr val="2B2B2B"/>
-                          </a:solidFill>
-                          <a:latin typeface="맑은 고딕"/>
-                        </a:rPr>
-                        <a:t>약관의 '서명' 문구를 확인으로 오인</a:t>
-                      </a:r>
-                    </a:p>
-                  </a:txBody>
-                  <a:tcPr>
-                    <a:solidFill>
-                      <a:srgbClr val="FFFFFF"/>
-                    </a:solidFill>
-                  </a:tcPr>
-                </a:tc>
-                <a:tc>
-                  <a:txBody>
-                    <a:bodyPr wrap="square"/>
-                    <a:lstStyle/>
-                    <a:p>
-                      <a:pPr algn="l">
-                        <a:spcAft>
-                          <a:spcPts val="0"/>
-                        </a:spcAft>
-                      </a:pPr>
-                      <a:r>
-                        <a:rPr sz="1100" b="0">
-                          <a:solidFill>
-                            <a:srgbClr val="2B2B2B"/>
-                          </a:solidFill>
-                          <a:latin typeface="맑은 고딕"/>
-                        </a:rPr>
-                        <a:t>서명란은 실제로 공란</a:t>
-                      </a:r>
-                    </a:p>
-                  </a:txBody>
-                  <a:tcPr>
-                    <a:solidFill>
-                      <a:srgbClr val="FFFFFF"/>
-                    </a:solidFill>
-                  </a:tcPr>
-                </a:tc>
-                <a:tc>
-                  <a:txBody>
-                    <a:bodyPr wrap="square"/>
-                    <a:lstStyle/>
-                    <a:p>
-                      <a:pPr algn="l">
-                        <a:spcAft>
-                          <a:spcPts val="0"/>
-                        </a:spcAft>
-                      </a:pPr>
-                      <a:r>
-                        <a:rPr sz="1100" b="0">
-                          <a:solidFill>
-                            <a:srgbClr val="2B2B2B"/>
-                          </a:solidFill>
-                          <a:latin typeface="맑은 고딕"/>
-                        </a:rPr>
-                        <a:t>페이지 이미지에서 서명 유무 판독</a:t>
-                      </a:r>
-                    </a:p>
-                  </a:txBody>
-                  <a:tcPr>
-                    <a:solidFill>
-                      <a:srgbClr val="FFFFFF"/>
-                    </a:solidFill>
-                  </a:tcPr>
-                </a:tc>
-                <a:tc>
-                  <a:txBody>
-                    <a:bodyPr wrap="square"/>
-                    <a:lstStyle/>
-                    <a:p>
-                      <a:pPr algn="l">
-                        <a:spcAft>
-                          <a:spcPts val="0"/>
-                        </a:spcAft>
-                      </a:pPr>
-                      <a:r>
-                        <a:rPr sz="1100" b="0">
-                          <a:solidFill>
-                            <a:srgbClr val="2B2B2B"/>
-                          </a:solidFill>
-                          <a:latin typeface="맑은 고딕"/>
-                        </a:rPr>
-                        <a:t>미서명 적발 가능</a:t>
-                      </a:r>
-                    </a:p>
-                  </a:txBody>
-                  <a:tcPr>
-                    <a:solidFill>
-                      <a:srgbClr val="FFFFFF"/>
-                    </a:solidFill>
-                  </a:tcPr>
-                </a:tc>
-              </a:tr>
-            </a:tbl>
-          </a:graphicData>
-        </a:graphic>
-      </p:graphicFrame>
-      <p:sp>
-        <p:nvSpPr>
-          <p:cNvPr id="6" name="Rounded Rectangle 5"/>
-          <p:cNvSpPr/>
-          <p:nvPr/>
-        </p:nvSpPr>
-        <p:spPr>
-          <a:xfrm>
-            <a:off x="566928" y="4114800"/>
-            <a:ext cx="3520440" cy="2011680"/>
-          </a:xfrm>
-          <a:prstGeom prst="roundRect">
-            <a:avLst/>
-          </a:prstGeom>
-          <a:solidFill>
-            <a:srgbClr val="FFFFFF"/>
-          </a:solidFill>
-          <a:ln>
-            <a:solidFill>
-              <a:srgbClr val="E6E0D4"/>
-            </a:solidFill>
-          </a:ln>
-        </p:spPr>
-        <p:style>
-          <a:lnRef idx="1">
-            <a:schemeClr val="accent1"/>
-          </a:lnRef>
-          <a:fillRef idx="3">
-            <a:schemeClr val="accent1"/>
-          </a:fillRef>
-          <a:effectRef idx="2">
-            <a:schemeClr val="accent1"/>
-          </a:effectRef>
-          <a:fontRef idx="minor">
-            <a:schemeClr val="lt1"/>
-          </a:fontRef>
-        </p:style>
-        <p:txBody>
-          <a:bodyPr rtlCol="0" anchor="ctr"/>
-          <a:lstStyle/>
-          <a:p>
-            <a:pPr algn="ctr"/>
-          </a:p>
-        </p:txBody>
-      </p:sp>
-      <p:sp>
-        <p:nvSpPr>
-          <p:cNvPr id="7" name="Rectangle 6"/>
-          <p:cNvSpPr/>
-          <p:nvPr/>
-        </p:nvSpPr>
-        <p:spPr>
-          <a:xfrm>
-            <a:off x="566928" y="4114800"/>
-            <a:ext cx="54864" cy="2011680"/>
-          </a:xfrm>
-          <a:prstGeom prst="rect">
-            <a:avLst/>
-          </a:prstGeom>
-          <a:solidFill>
-            <a:srgbClr val="FCAF17"/>
-          </a:solidFill>
-          <a:ln>
-            <a:noFill/>
-          </a:ln>
-        </p:spPr>
-        <p:style>
-          <a:lnRef idx="1">
-            <a:schemeClr val="accent1"/>
-          </a:lnRef>
-          <a:fillRef idx="3">
-            <a:schemeClr val="accent1"/>
-          </a:fillRef>
-          <a:effectRef idx="2">
-            <a:schemeClr val="accent1"/>
-          </a:effectRef>
-          <a:fontRef idx="minor">
-            <a:schemeClr val="lt1"/>
-          </a:fontRef>
-        </p:style>
-        <p:txBody>
-          <a:bodyPr rtlCol="0" anchor="ctr"/>
-          <a:lstStyle/>
-          <a:p>
-            <a:pPr algn="ctr"/>
-          </a:p>
-        </p:txBody>
-      </p:sp>
-      <p:sp>
-        <p:nvSpPr>
-          <p:cNvPr id="8" name="TextBox 7"/>
-          <p:cNvSpPr txBox="1"/>
-          <p:nvPr/>
-        </p:nvSpPr>
-        <p:spPr>
-          <a:xfrm>
-            <a:off x="822960" y="4261104"/>
-            <a:ext cx="3063240" cy="1737360"/>
-          </a:xfrm>
-          <a:prstGeom prst="rect">
-            <a:avLst/>
-          </a:prstGeom>
-          <a:noFill/>
-        </p:spPr>
-        <p:txBody>
-          <a:bodyPr wrap="square">
-            <a:spAutoFit/>
-          </a:bodyPr>
-          <a:lstStyle/>
-          <a:p>
-            <a:pPr algn="l">
-              <a:spcAft>
-                <a:spcPts val="700"/>
-              </a:spcAft>
-            </a:pPr>
-            <a:r>
-              <a:rPr sz="1500" b="1">
-                <a:solidFill>
-                  <a:srgbClr val="645B4C"/>
-                </a:solidFill>
-                <a:latin typeface="맑은 고딕"/>
-              </a:rPr>
-              <a:t>1차 · 원문 대조</a:t>
-            </a:r>
-          </a:p>
-          <a:p>
-            <a:pPr algn="l">
-              <a:spcAft>
-                <a:spcPts val="500"/>
-              </a:spcAft>
-            </a:pPr>
-            <a:r>
-              <a:rPr sz="1200" b="0">
-                <a:solidFill>
-                  <a:srgbClr val="2B2B2B"/>
-                </a:solidFill>
-                <a:latin typeface="맑은 고딕"/>
-              </a:rPr>
-              <a:t>추출값이 원문에 실제로 있는지 확인</a:t>
-            </a:r>
-          </a:p>
-          <a:p>
-            <a:pPr algn="l">
-              <a:spcAft>
-                <a:spcPts val="500"/>
-              </a:spcAft>
-            </a:pPr>
-            <a:r>
-              <a:rPr sz="1200" b="0">
-                <a:solidFill>
-                  <a:srgbClr val="2B2B2B"/>
-                </a:solidFill>
-                <a:latin typeface="맑은 고딕"/>
-              </a:rPr>
-              <a:t>없으면 채택하지 않고 '미확인'</a:t>
-            </a:r>
-          </a:p>
-          <a:p>
-            <a:pPr algn="l">
-              <a:spcAft>
-                <a:spcPts val="500"/>
-              </a:spcAft>
-            </a:pPr>
-            <a:r>
-              <a:rPr sz="1200" b="0">
-                <a:solidFill>
-                  <a:srgbClr val="2B2B2B"/>
-                </a:solidFill>
-                <a:latin typeface="맑은 고딕"/>
-              </a:rPr>
-              <a:t>오판보다 미확인이 안전하다</a:t>
-            </a:r>
-          </a:p>
-        </p:txBody>
-      </p:sp>
-      <p:sp>
-        <p:nvSpPr>
-          <p:cNvPr id="9" name="Rounded Rectangle 8"/>
-          <p:cNvSpPr/>
-          <p:nvPr/>
-        </p:nvSpPr>
-        <p:spPr>
-          <a:xfrm>
-            <a:off x="4315968" y="4114800"/>
-            <a:ext cx="3520440" cy="2011680"/>
-          </a:xfrm>
-          <a:prstGeom prst="roundRect">
-            <a:avLst/>
-          </a:prstGeom>
-          <a:solidFill>
-            <a:srgbClr val="FFFFFF"/>
-          </a:solidFill>
-          <a:ln>
-            <a:solidFill>
-              <a:srgbClr val="E6E0D4"/>
-            </a:solidFill>
-          </a:ln>
-        </p:spPr>
-        <p:style>
-          <a:lnRef idx="1">
-            <a:schemeClr val="accent1"/>
-          </a:lnRef>
-          <a:fillRef idx="3">
-            <a:schemeClr val="accent1"/>
-          </a:fillRef>
-          <a:effectRef idx="2">
-            <a:schemeClr val="accent1"/>
-          </a:effectRef>
-          <a:fontRef idx="minor">
-            <a:schemeClr val="lt1"/>
-          </a:fontRef>
-        </p:style>
-        <p:txBody>
-          <a:bodyPr rtlCol="0" anchor="ctr"/>
-          <a:lstStyle/>
-          <a:p>
-            <a:pPr algn="ctr"/>
-          </a:p>
-        </p:txBody>
-      </p:sp>
-      <p:sp>
-        <p:nvSpPr>
-          <p:cNvPr id="10" name="Rectangle 9"/>
-          <p:cNvSpPr/>
-          <p:nvPr/>
-        </p:nvSpPr>
-        <p:spPr>
-          <a:xfrm>
-            <a:off x="4315968" y="4114800"/>
-            <a:ext cx="54864" cy="2011680"/>
-          </a:xfrm>
-          <a:prstGeom prst="rect">
-            <a:avLst/>
-          </a:prstGeom>
-          <a:solidFill>
-            <a:srgbClr val="FCAF17"/>
-          </a:solidFill>
-          <a:ln>
-            <a:noFill/>
-          </a:ln>
-        </p:spPr>
-        <p:style>
-          <a:lnRef idx="1">
-            <a:schemeClr val="accent1"/>
-          </a:lnRef>
-          <a:fillRef idx="3">
-            <a:schemeClr val="accent1"/>
-          </a:fillRef>
-          <a:effectRef idx="2">
-            <a:schemeClr val="accent1"/>
-          </a:effectRef>
-          <a:fontRef idx="minor">
-            <a:schemeClr val="lt1"/>
-          </a:fontRef>
-        </p:style>
-        <p:txBody>
-          <a:bodyPr rtlCol="0" anchor="ctr"/>
-          <a:lstStyle/>
-          <a:p>
-            <a:pPr algn="ctr"/>
-          </a:p>
-        </p:txBody>
-      </p:sp>
-      <p:sp>
-        <p:nvSpPr>
-          <p:cNvPr id="11" name="TextBox 10"/>
-          <p:cNvSpPr txBox="1"/>
-          <p:nvPr/>
-        </p:nvSpPr>
-        <p:spPr>
-          <a:xfrm>
-            <a:off x="4572000" y="4261104"/>
-            <a:ext cx="3063240" cy="1737360"/>
-          </a:xfrm>
-          <a:prstGeom prst="rect">
-            <a:avLst/>
-          </a:prstGeom>
-          <a:noFill/>
-        </p:spPr>
-        <p:txBody>
-          <a:bodyPr wrap="square">
-            <a:spAutoFit/>
-          </a:bodyPr>
-          <a:lstStyle/>
-          <a:p>
-            <a:pPr algn="l">
-              <a:spcAft>
-                <a:spcPts val="700"/>
-              </a:spcAft>
-            </a:pPr>
-            <a:r>
-              <a:rPr sz="1500" b="1">
-                <a:solidFill>
-                  <a:srgbClr val="645B4C"/>
-                </a:solidFill>
-                <a:latin typeface="맑은 고딕"/>
-              </a:rPr>
-              <a:t>2차 · 문서유형 게이팅</a:t>
-            </a:r>
-          </a:p>
-          <a:p>
-            <a:pPr algn="l">
-              <a:spcAft>
-                <a:spcPts val="500"/>
-              </a:spcAft>
-            </a:pPr>
-            <a:r>
-              <a:rPr sz="1200" b="0">
-                <a:solidFill>
-                  <a:srgbClr val="2B2B2B"/>
-                </a:solidFill>
-                <a:latin typeface="맑은 고딕"/>
-              </a:rPr>
-              <a:t>상품설명서에 계약일은 없다</a:t>
-            </a:r>
-          </a:p>
-          <a:p>
-            <a:pPr algn="l">
-              <a:spcAft>
-                <a:spcPts val="500"/>
-              </a:spcAft>
-            </a:pPr>
-            <a:r>
-              <a:rPr sz="1200" b="0">
-                <a:solidFill>
-                  <a:srgbClr val="2B2B2B"/>
-                </a:solidFill>
-                <a:latin typeface="맑은 고딕"/>
-              </a:rPr>
-              <a:t>→ 발행일을 계약일로 오인 차단</a:t>
-            </a:r>
-          </a:p>
-          <a:p>
-            <a:pPr algn="l">
-              <a:spcAft>
-                <a:spcPts val="500"/>
-              </a:spcAft>
-            </a:pPr>
-            <a:r>
-              <a:rPr sz="1200" b="0">
-                <a:solidFill>
-                  <a:srgbClr val="2B2B2B"/>
-                </a:solidFill>
-                <a:latin typeface="맑은 고딕"/>
-              </a:rPr>
-              <a:t>유형별로 가능한 필드를 고정</a:t>
-            </a:r>
-          </a:p>
-        </p:txBody>
-      </p:sp>
-      <p:sp>
-        <p:nvSpPr>
-          <p:cNvPr id="12" name="Rounded Rectangle 11"/>
-          <p:cNvSpPr/>
-          <p:nvPr/>
-        </p:nvSpPr>
-        <p:spPr>
-          <a:xfrm>
-            <a:off x="8065008" y="4114800"/>
-            <a:ext cx="3566160" cy="2011680"/>
-          </a:xfrm>
-          <a:prstGeom prst="roundRect">
-            <a:avLst/>
-          </a:prstGeom>
-          <a:solidFill>
-            <a:srgbClr val="FFFFFF"/>
-          </a:solidFill>
-          <a:ln>
-            <a:solidFill>
-              <a:srgbClr val="E6E0D4"/>
-            </a:solidFill>
-          </a:ln>
-        </p:spPr>
-        <p:style>
-          <a:lnRef idx="1">
-            <a:schemeClr val="accent1"/>
-          </a:lnRef>
-          <a:fillRef idx="3">
-            <a:schemeClr val="accent1"/>
-          </a:fillRef>
-          <a:effectRef idx="2">
-            <a:schemeClr val="accent1"/>
-          </a:effectRef>
-          <a:fontRef idx="minor">
-            <a:schemeClr val="lt1"/>
-          </a:fontRef>
-        </p:style>
-        <p:txBody>
-          <a:bodyPr rtlCol="0" anchor="ctr"/>
-          <a:lstStyle/>
-          <a:p>
-            <a:pPr algn="ctr"/>
-          </a:p>
-        </p:txBody>
-      </p:sp>
-      <p:sp>
-        <p:nvSpPr>
-          <p:cNvPr id="13" name="Rectangle 12"/>
-          <p:cNvSpPr/>
-          <p:nvPr/>
-        </p:nvSpPr>
-        <p:spPr>
-          <a:xfrm>
-            <a:off x="8065008" y="4114800"/>
-            <a:ext cx="54864" cy="2011680"/>
-          </a:xfrm>
-          <a:prstGeom prst="rect">
-            <a:avLst/>
-          </a:prstGeom>
-          <a:solidFill>
-            <a:srgbClr val="FCAF17"/>
-          </a:solidFill>
-          <a:ln>
-            <a:noFill/>
-          </a:ln>
-        </p:spPr>
-        <p:style>
-          <a:lnRef idx="1">
-            <a:schemeClr val="accent1"/>
-          </a:lnRef>
-          <a:fillRef idx="3">
-            <a:schemeClr val="accent1"/>
-          </a:fillRef>
-          <a:effectRef idx="2">
-            <a:schemeClr val="accent1"/>
-          </a:effectRef>
-          <a:fontRef idx="minor">
-            <a:schemeClr val="lt1"/>
-          </a:fontRef>
-        </p:style>
-        <p:txBody>
-          <a:bodyPr rtlCol="0" anchor="ctr"/>
-          <a:lstStyle/>
-          <a:p>
-            <a:pPr algn="ctr"/>
-          </a:p>
-        </p:txBody>
-      </p:sp>
-      <p:sp>
-        <p:nvSpPr>
-          <p:cNvPr id="14" name="TextBox 13"/>
-          <p:cNvSpPr txBox="1"/>
-          <p:nvPr/>
-        </p:nvSpPr>
-        <p:spPr>
-          <a:xfrm>
-            <a:off x="8321040" y="4261104"/>
-            <a:ext cx="3108960" cy="1737360"/>
-          </a:xfrm>
-          <a:prstGeom prst="rect">
-            <a:avLst/>
-          </a:prstGeom>
-          <a:noFill/>
-        </p:spPr>
-        <p:txBody>
-          <a:bodyPr wrap="square">
-            <a:spAutoFit/>
-          </a:bodyPr>
-          <a:lstStyle/>
-          <a:p>
-            <a:pPr algn="l">
-              <a:spcAft>
-                <a:spcPts val="700"/>
-              </a:spcAft>
-            </a:pPr>
-            <a:r>
-              <a:rPr sz="1500" b="1">
-                <a:solidFill>
-                  <a:srgbClr val="645B4C"/>
-                </a:solidFill>
-                <a:latin typeface="맑은 고딕"/>
-              </a:rPr>
-              <a:t>3차 · 고정 스키마</a:t>
-            </a:r>
-          </a:p>
-          <a:p>
-            <a:pPr algn="l">
-              <a:spcAft>
-                <a:spcPts val="500"/>
-              </a:spcAft>
-            </a:pPr>
-            <a:r>
-              <a:rPr sz="1200" b="0">
-                <a:solidFill>
-                  <a:srgbClr val="2B2B2B"/>
-                </a:solidFill>
-                <a:latin typeface="맑은 고딕"/>
-              </a:rPr>
-              <a:t>같은 양식이면 항상 같은 필드 목록</a:t>
-            </a:r>
-          </a:p>
-          <a:p>
-            <a:pPr algn="l">
-              <a:spcAft>
-                <a:spcPts val="500"/>
-              </a:spcAft>
-            </a:pPr>
-            <a:r>
-              <a:rPr sz="1200" b="0">
-                <a:solidFill>
-                  <a:srgbClr val="2B2B2B"/>
-                </a:solidFill>
-                <a:latin typeface="맑은 고딕"/>
-              </a:rPr>
-              <a:t>못 찾은 값은 '미확인'으로 노출</a:t>
-            </a:r>
-          </a:p>
-          <a:p>
-            <a:pPr algn="l">
-              <a:spcAft>
-                <a:spcPts val="500"/>
-              </a:spcAft>
-            </a:pPr>
-            <a:r>
-              <a:rPr sz="1200" b="0">
-                <a:solidFill>
-                  <a:srgbClr val="2B2B2B"/>
-                </a:solidFill>
-                <a:latin typeface="맑은 고딕"/>
-              </a:rPr>
-              <a:t>값의 유무가 모델 변덕에 좌우되지 않음</a:t>
             </a:r>
           </a:p>
         </p:txBody>

--- a/docs/기술설명서_초안.pptx
+++ b/docs/기술설명서_초안.pptx
@@ -8679,7 +8679,7 @@
                 </a:solidFill>
                 <a:latin typeface="맑은 고딕"/>
               </a:rPr>
-              <a:t>24건</a:t>
+              <a:t>25건</a:t>
             </a:r>
           </a:p>
           <a:p>
@@ -9164,7 +9164,7 @@
                           </a:solidFill>
                           <a:latin typeface="맑은 고딕"/>
                         </a:rPr>
-                        <a:t>24건 전수 감사, 이상 징후 0건</a:t>
+                        <a:t>25건 전수 감사, 이상 징후 0건</a:t>
                       </a:r>
                     </a:p>
                   </a:txBody>
@@ -9386,7 +9386,7 @@
                           </a:solidFill>
                           <a:latin typeface="맑은 고딕"/>
                         </a:rPr>
-                        <a:t>부당권유 표현 스캔을 정상 서류 17건에 적용</a:t>
+                        <a:t>정상 서류 17건에 부당권유 검사(ADV-001) 적용</a:t>
                       </a:r>
                     </a:p>
                   </a:txBody>
@@ -12856,7 +12856,7 @@
                           </a:solidFill>
                           <a:latin typeface="맑은 고딕"/>
                         </a:rPr>
-                        <a:t>실물 24건 · 테스트 45건</a:t>
+                        <a:t>실물 25건 · 테스트 45건</a:t>
                       </a:r>
                     </a:p>
                   </a:txBody>
@@ -14252,7 +14252,7 @@
                           </a:solidFill>
                           <a:latin typeface="맑은 고딕"/>
                         </a:rPr>
-                        <a:t>완료 · 실물 24건 검증</a:t>
+                        <a:t>완료 · 실물 25건 검증</a:t>
                       </a:r>
                     </a:p>
                   </a:txBody>
@@ -15857,7 +15857,7 @@
                 </a:solidFill>
                 <a:latin typeface="맑은 고딕"/>
               </a:rPr>
-              <a:t>5개사 24건 · 전자/스캔/스크린샷</a:t>
+              <a:t>5개사 25건 · 전자/스캔/스크린샷</a:t>
             </a:r>
           </a:p>
           <a:p>
@@ -23485,7 +23485,7 @@
                           </a:solidFill>
                           <a:latin typeface="맑은 고딕"/>
                         </a:rPr>
-                        <a:t>실물 24건 전수 감사 이상 0건</a:t>
+                        <a:t>실물 25건 전수 감사 이상 0건</a:t>
                       </a:r>
                     </a:p>
                   </a:txBody>

--- a/docs/기술설명서_초안.pptx
+++ b/docs/기술설명서_초안.pptx
@@ -25,6 +25,7 @@
     <p:sldId id="273" r:id="rId24"/>
     <p:sldId id="274" r:id="rId25"/>
     <p:sldId id="275" r:id="rId26"/>
+    <p:sldId id="276" r:id="rId27"/>
   </p:sldIdLst>
   <p:sldSz cx="12191695" cy="6858000" type="screen4x3"/>
   <p:notesSz cx="6858000" cy="9144000"/>
@@ -11344,9 +11345,34 @@
           </a:graphicData>
         </a:graphic>
       </p:graphicFrame>
-      <p:sp>
-        <p:nvSpPr>
-          <p:cNvPr id="6" name="Rounded Rectangle 5"/>
+      <p:pic>
+        <p:nvPicPr>
+          <p:cNvPr id="6" name="Picture 5" descr="01_판정요약.png"/>
+          <p:cNvPicPr>
+            <a:picLocks noChangeAspect="1"/>
+          </p:cNvPicPr>
+          <p:nvPr/>
+        </p:nvPicPr>
+        <p:blipFill>
+          <a:blip r:embed="rId2"/>
+          <a:srcRect l="19000" b="51334"/>
+          <a:stretch>
+            <a:fillRect/>
+          </a:stretch>
+        </p:blipFill>
+        <p:spPr>
+          <a:xfrm>
+            <a:off x="6355080" y="1371600"/>
+            <a:ext cx="5276088" cy="2377440"/>
+          </a:xfrm>
+          <a:prstGeom prst="rect">
+            <a:avLst/>
+          </a:prstGeom>
+        </p:spPr>
+      </p:pic>
+      <p:sp>
+        <p:nvSpPr>
+          <p:cNvPr id="7" name="Rounded Rectangle 6"/>
           <p:cNvSpPr/>
           <p:nvPr/>
         </p:nvSpPr>
@@ -11358,12 +11384,10 @@
           <a:prstGeom prst="roundRect">
             <a:avLst/>
           </a:prstGeom>
-          <a:solidFill>
-            <a:srgbClr val="F5F3EE"/>
-          </a:solidFill>
+          <a:noFill/>
           <a:ln>
             <a:solidFill>
-              <a:srgbClr val="FCAF17"/>
+              <a:srgbClr val="E6E0D4"/>
             </a:solidFill>
           </a:ln>
         </p:spPr>
@@ -11382,47 +11406,56 @@
           </a:fontRef>
         </p:style>
         <p:txBody>
-          <a:bodyPr rtlCol="0" anchor="ctr" wrap="square"/>
+          <a:bodyPr rtlCol="0" anchor="ctr"/>
           <a:lstStyle/>
           <a:p>
-            <a:pPr algn="ctr">
-              <a:spcAft>
-                <a:spcPts val="600"/>
-              </a:spcAft>
-            </a:pPr>
-            <a:r>
-              <a:rPr sz="1200" b="0">
-                <a:solidFill>
-                  <a:srgbClr val="6B6B6B"/>
-                </a:solidFill>
-                <a:latin typeface="맑은 고딕"/>
-              </a:rPr>
-              <a:t>[스크린샷] 판정 요약 화면
-(위험 3건 적발 · 종합 결론 배지)</a:t>
-            </a:r>
-          </a:p>
-        </p:txBody>
-      </p:sp>
-      <p:sp>
-        <p:nvSpPr>
-          <p:cNvPr id="7" name="Rounded Rectangle 6"/>
+            <a:pPr algn="ctr"/>
+          </a:p>
+        </p:txBody>
+      </p:sp>
+      <p:pic>
+        <p:nvPicPr>
+          <p:cNvPr id="8" name="Picture 7" descr="04_하이라이트.png"/>
+          <p:cNvPicPr>
+            <a:picLocks noChangeAspect="1"/>
+          </p:cNvPicPr>
+          <p:nvPr/>
+        </p:nvPicPr>
+        <p:blipFill>
+          <a:blip r:embed="rId3"/>
+          <a:srcRect l="19000" t="4620" b="46714"/>
+          <a:stretch>
+            <a:fillRect/>
+          </a:stretch>
+        </p:blipFill>
+        <p:spPr>
+          <a:xfrm>
+            <a:off x="6355080" y="3794760"/>
+            <a:ext cx="5276088" cy="2377440"/>
+          </a:xfrm>
+          <a:prstGeom prst="rect">
+            <a:avLst/>
+          </a:prstGeom>
+        </p:spPr>
+      </p:pic>
+      <p:sp>
+        <p:nvSpPr>
+          <p:cNvPr id="9" name="Rounded Rectangle 8"/>
           <p:cNvSpPr/>
           <p:nvPr/>
         </p:nvSpPr>
         <p:spPr>
           <a:xfrm>
-            <a:off x="6355080" y="3886200"/>
-            <a:ext cx="5276088" cy="2194560"/>
+            <a:off x="6355080" y="3794760"/>
+            <a:ext cx="5276088" cy="2377440"/>
           </a:xfrm>
           <a:prstGeom prst="roundRect">
             <a:avLst/>
           </a:prstGeom>
-          <a:solidFill>
-            <a:srgbClr val="F5F3EE"/>
-          </a:solidFill>
+          <a:noFill/>
           <a:ln>
             <a:solidFill>
-              <a:srgbClr val="FCAF17"/>
+              <a:srgbClr val="E6E0D4"/>
             </a:solidFill>
           </a:ln>
         </p:spPr>
@@ -11441,29 +11474,16 @@
           </a:fontRef>
         </p:style>
         <p:txBody>
-          <a:bodyPr rtlCol="0" anchor="ctr" wrap="square"/>
+          <a:bodyPr rtlCol="0" anchor="ctr"/>
           <a:lstStyle/>
           <a:p>
-            <a:pPr algn="ctr">
-              <a:spcAft>
-                <a:spcPts val="600"/>
-              </a:spcAft>
-            </a:pPr>
-            <a:r>
-              <a:rPr sz="1200" b="0">
-                <a:solidFill>
-                  <a:srgbClr val="6B6B6B"/>
-                </a:solidFill>
-                <a:latin typeface="맑은 고딕"/>
-              </a:rPr>
-              <a:t>[스크린샷] 근거 조문 + 서류 원문 하이라이트</a:t>
-            </a:r>
-          </a:p>
-        </p:txBody>
-      </p:sp>
-      <p:sp>
-        <p:nvSpPr>
-          <p:cNvPr id="8" name="TextBox 7"/>
+            <a:pPr algn="ctr"/>
+          </a:p>
+        </p:txBody>
+      </p:sp>
+      <p:sp>
+        <p:nvSpPr>
+          <p:cNvPr id="10" name="TextBox 9"/>
           <p:cNvSpPr txBox="1"/>
           <p:nvPr/>
         </p:nvSpPr>
@@ -11541,6 +11561,478 @@
 </file>
 
 <file path=ppt/slides/slide17.xml><?xml version="1.0" encoding="utf-8"?>
+<p:sld xmlns:a="http://schemas.openxmlformats.org/drawingml/2006/main" xmlns:p="http://schemas.openxmlformats.org/presentationml/2006/main" xmlns:r="http://schemas.openxmlformats.org/officeDocument/2006/relationships">
+  <p:cSld>
+    <p:spTree>
+      <p:nvGrpSpPr>
+        <p:cNvPr id="1" name=""/>
+        <p:cNvGrpSpPr/>
+        <p:nvPr/>
+      </p:nvGrpSpPr>
+      <p:grpSpPr/>
+      <p:sp>
+        <p:nvSpPr>
+          <p:cNvPr id="2" name="Rectangle 1"/>
+          <p:cNvSpPr/>
+          <p:nvPr/>
+        </p:nvSpPr>
+        <p:spPr>
+          <a:xfrm>
+            <a:off x="0" y="0"/>
+            <a:ext cx="12191695" cy="82296"/>
+          </a:xfrm>
+          <a:prstGeom prst="rect">
+            <a:avLst/>
+          </a:prstGeom>
+          <a:solidFill>
+            <a:srgbClr val="FCAF17"/>
+          </a:solidFill>
+          <a:ln>
+            <a:noFill/>
+          </a:ln>
+        </p:spPr>
+        <p:style>
+          <a:lnRef idx="1">
+            <a:schemeClr val="accent1"/>
+          </a:lnRef>
+          <a:fillRef idx="3">
+            <a:schemeClr val="accent1"/>
+          </a:fillRef>
+          <a:effectRef idx="2">
+            <a:schemeClr val="accent1"/>
+          </a:effectRef>
+          <a:fontRef idx="minor">
+            <a:schemeClr val="lt1"/>
+          </a:fontRef>
+        </p:style>
+        <p:txBody>
+          <a:bodyPr rtlCol="0" anchor="ctr"/>
+          <a:lstStyle/>
+          <a:p>
+            <a:pPr algn="ctr"/>
+          </a:p>
+        </p:txBody>
+      </p:sp>
+      <p:sp>
+        <p:nvSpPr>
+          <p:cNvPr id="3" name="TextBox 2"/>
+          <p:cNvSpPr txBox="1"/>
+          <p:nvPr/>
+        </p:nvSpPr>
+        <p:spPr>
+          <a:xfrm>
+            <a:off x="566928" y="310896"/>
+            <a:ext cx="10424160" cy="914400"/>
+          </a:xfrm>
+          <a:prstGeom prst="rect">
+            <a:avLst/>
+          </a:prstGeom>
+          <a:noFill/>
+        </p:spPr>
+        <p:txBody>
+          <a:bodyPr wrap="square">
+            <a:spAutoFit/>
+          </a:bodyPr>
+          <a:lstStyle/>
+          <a:p>
+            <a:pPr algn="l">
+              <a:spcAft>
+                <a:spcPts val="200"/>
+              </a:spcAft>
+            </a:pPr>
+            <a:r>
+              <a:rPr sz="3000" b="1">
+                <a:solidFill>
+                  <a:srgbClr val="645B4C"/>
+                </a:solidFill>
+                <a:latin typeface="맑은 고딕"/>
+              </a:rPr>
+              <a:t>실제 화면 — 판정마다 법령 원문이 따라붙는다</a:t>
+            </a:r>
+          </a:p>
+          <a:p>
+            <a:pPr algn="l">
+              <a:spcAft>
+                <a:spcPts val="600"/>
+              </a:spcAft>
+            </a:pPr>
+            <a:r>
+              <a:rPr sz="1400" b="0">
+                <a:solidFill>
+                  <a:srgbClr val="6B6B6B"/>
+                </a:solidFill>
+                <a:latin typeface="맑은 고딕"/>
+              </a:rPr>
+              <a:t>판정만 주는 도구는 담당자가 다시 규정을 찾아봐야 한다</a:t>
+            </a:r>
+          </a:p>
+        </p:txBody>
+      </p:sp>
+      <p:sp>
+        <p:nvSpPr>
+          <p:cNvPr id="4" name="Rounded Rectangle 3"/>
+          <p:cNvSpPr/>
+          <p:nvPr/>
+        </p:nvSpPr>
+        <p:spPr>
+          <a:xfrm>
+            <a:off x="9646920" y="329184"/>
+            <a:ext cx="1965960" cy="384048"/>
+          </a:xfrm>
+          <a:prstGeom prst="roundRect">
+            <a:avLst/>
+          </a:prstGeom>
+          <a:solidFill>
+            <a:srgbClr val="FFF8DF"/>
+          </a:solidFill>
+          <a:ln>
+            <a:solidFill>
+              <a:srgbClr val="FCAF17"/>
+            </a:solidFill>
+          </a:ln>
+        </p:spPr>
+        <p:style>
+          <a:lnRef idx="1">
+            <a:schemeClr val="accent1"/>
+          </a:lnRef>
+          <a:fillRef idx="3">
+            <a:schemeClr val="accent1"/>
+          </a:fillRef>
+          <a:effectRef idx="2">
+            <a:schemeClr val="accent1"/>
+          </a:effectRef>
+          <a:fontRef idx="minor">
+            <a:schemeClr val="lt1"/>
+          </a:fontRef>
+        </p:style>
+        <p:txBody>
+          <a:bodyPr rtlCol="0" anchor="ctr" wrap="square"/>
+          <a:lstStyle/>
+          <a:p>
+            <a:pPr algn="ctr">
+              <a:spcAft>
+                <a:spcPts val="0"/>
+              </a:spcAft>
+            </a:pPr>
+            <a:r>
+              <a:rPr sz="1100" b="1">
+                <a:solidFill>
+                  <a:srgbClr val="645B4C"/>
+                </a:solidFill>
+                <a:latin typeface="맑은 고딕"/>
+              </a:rPr>
+              <a:t>창의성·효과</a:t>
+            </a:r>
+          </a:p>
+        </p:txBody>
+      </p:sp>
+      <p:pic>
+        <p:nvPicPr>
+          <p:cNvPr id="5" name="Picture 4" descr="02_근거조문.png"/>
+          <p:cNvPicPr>
+            <a:picLocks noChangeAspect="1"/>
+          </p:cNvPicPr>
+          <p:nvPr/>
+        </p:nvPicPr>
+        <p:blipFill>
+          <a:blip r:embed="rId2"/>
+          <a:srcRect l="19000" t="2137" b="40610"/>
+          <a:stretch>
+            <a:fillRect/>
+          </a:stretch>
+        </p:blipFill>
+        <p:spPr>
+          <a:xfrm>
+            <a:off x="566928" y="1371600"/>
+            <a:ext cx="7589520" cy="4023360"/>
+          </a:xfrm>
+          <a:prstGeom prst="rect">
+            <a:avLst/>
+          </a:prstGeom>
+        </p:spPr>
+      </p:pic>
+      <p:sp>
+        <p:nvSpPr>
+          <p:cNvPr id="6" name="Rounded Rectangle 5"/>
+          <p:cNvSpPr/>
+          <p:nvPr/>
+        </p:nvSpPr>
+        <p:spPr>
+          <a:xfrm>
+            <a:off x="566928" y="1371600"/>
+            <a:ext cx="7589520" cy="4023360"/>
+          </a:xfrm>
+          <a:prstGeom prst="roundRect">
+            <a:avLst/>
+          </a:prstGeom>
+          <a:noFill/>
+          <a:ln>
+            <a:solidFill>
+              <a:srgbClr val="E6E0D4"/>
+            </a:solidFill>
+          </a:ln>
+        </p:spPr>
+        <p:style>
+          <a:lnRef idx="1">
+            <a:schemeClr val="accent1"/>
+          </a:lnRef>
+          <a:fillRef idx="3">
+            <a:schemeClr val="accent1"/>
+          </a:fillRef>
+          <a:effectRef idx="2">
+            <a:schemeClr val="accent1"/>
+          </a:effectRef>
+          <a:fontRef idx="minor">
+            <a:schemeClr val="lt1"/>
+          </a:fontRef>
+        </p:style>
+        <p:txBody>
+          <a:bodyPr rtlCol="0" anchor="ctr"/>
+          <a:lstStyle/>
+          <a:p>
+            <a:pPr algn="ctr"/>
+          </a:p>
+        </p:txBody>
+      </p:sp>
+      <p:sp>
+        <p:nvSpPr>
+          <p:cNvPr id="7" name="Rounded Rectangle 6"/>
+          <p:cNvSpPr/>
+          <p:nvPr/>
+        </p:nvSpPr>
+        <p:spPr>
+          <a:xfrm>
+            <a:off x="8366760" y="1371600"/>
+            <a:ext cx="3264408" cy="4023360"/>
+          </a:xfrm>
+          <a:prstGeom prst="roundRect">
+            <a:avLst/>
+          </a:prstGeom>
+          <a:solidFill>
+            <a:srgbClr val="FFFFFF"/>
+          </a:solidFill>
+          <a:ln>
+            <a:solidFill>
+              <a:srgbClr val="E6E0D4"/>
+            </a:solidFill>
+          </a:ln>
+        </p:spPr>
+        <p:style>
+          <a:lnRef idx="1">
+            <a:schemeClr val="accent1"/>
+          </a:lnRef>
+          <a:fillRef idx="3">
+            <a:schemeClr val="accent1"/>
+          </a:fillRef>
+          <a:effectRef idx="2">
+            <a:schemeClr val="accent1"/>
+          </a:effectRef>
+          <a:fontRef idx="minor">
+            <a:schemeClr val="lt1"/>
+          </a:fontRef>
+        </p:style>
+        <p:txBody>
+          <a:bodyPr rtlCol="0" anchor="ctr"/>
+          <a:lstStyle/>
+          <a:p>
+            <a:pPr algn="ctr"/>
+          </a:p>
+        </p:txBody>
+      </p:sp>
+      <p:sp>
+        <p:nvSpPr>
+          <p:cNvPr id="8" name="Rectangle 7"/>
+          <p:cNvSpPr/>
+          <p:nvPr/>
+        </p:nvSpPr>
+        <p:spPr>
+          <a:xfrm>
+            <a:off x="8366760" y="1371600"/>
+            <a:ext cx="54864" cy="4023360"/>
+          </a:xfrm>
+          <a:prstGeom prst="rect">
+            <a:avLst/>
+          </a:prstGeom>
+          <a:solidFill>
+            <a:srgbClr val="FCAF17"/>
+          </a:solidFill>
+          <a:ln>
+            <a:noFill/>
+          </a:ln>
+        </p:spPr>
+        <p:style>
+          <a:lnRef idx="1">
+            <a:schemeClr val="accent1"/>
+          </a:lnRef>
+          <a:fillRef idx="3">
+            <a:schemeClr val="accent1"/>
+          </a:fillRef>
+          <a:effectRef idx="2">
+            <a:schemeClr val="accent1"/>
+          </a:effectRef>
+          <a:fontRef idx="minor">
+            <a:schemeClr val="lt1"/>
+          </a:fontRef>
+        </p:style>
+        <p:txBody>
+          <a:bodyPr rtlCol="0" anchor="ctr"/>
+          <a:lstStyle/>
+          <a:p>
+            <a:pPr algn="ctr"/>
+          </a:p>
+        </p:txBody>
+      </p:sp>
+      <p:sp>
+        <p:nvSpPr>
+          <p:cNvPr id="9" name="TextBox 8"/>
+          <p:cNvSpPr txBox="1"/>
+          <p:nvPr/>
+        </p:nvSpPr>
+        <p:spPr>
+          <a:xfrm>
+            <a:off x="8622792" y="1517904"/>
+            <a:ext cx="2807208" cy="3749040"/>
+          </a:xfrm>
+          <a:prstGeom prst="rect">
+            <a:avLst/>
+          </a:prstGeom>
+          <a:noFill/>
+        </p:spPr>
+        <p:txBody>
+          <a:bodyPr wrap="square">
+            <a:spAutoFit/>
+          </a:bodyPr>
+          <a:lstStyle/>
+          <a:p>
+            <a:pPr algn="l">
+              <a:spcAft>
+                <a:spcPts val="700"/>
+              </a:spcAft>
+            </a:pPr>
+            <a:r>
+              <a:rPr sz="1500" b="1">
+                <a:solidFill>
+                  <a:srgbClr val="645B4C"/>
+                </a:solidFill>
+                <a:latin typeface="맑은 고딕"/>
+              </a:rPr>
+              <a:t>이 화면이 말하는 것</a:t>
+            </a:r>
+          </a:p>
+          <a:p>
+            <a:pPr algn="l">
+              <a:spcAft>
+                <a:spcPts val="500"/>
+              </a:spcAft>
+            </a:pPr>
+            <a:r>
+              <a:rPr sz="1200" b="0">
+                <a:solidFill>
+                  <a:srgbClr val="2B2B2B"/>
+                </a:solidFill>
+                <a:latin typeface="맑은 고딕"/>
+              </a:rPr>
+              <a:t>규칙마다 근거 조문을 미리 지정 — 검색 점수가 높다고 엉뚱한 조문이 앞서지 않는다</a:t>
+            </a:r>
+          </a:p>
+          <a:p>
+            <a:pPr algn="l">
+              <a:spcAft>
+                <a:spcPts val="500"/>
+              </a:spcAft>
+            </a:pPr>
+            <a:r>
+              <a:rPr sz="1200" b="0">
+                <a:solidFill>
+                  <a:srgbClr val="2B2B2B"/>
+                </a:solidFill>
+                <a:latin typeface="맑은 고딕"/>
+              </a:rPr>
+              <a:t>조문 원문을 그 자리에서 펼쳐 확인</a:t>
+            </a:r>
+          </a:p>
+          <a:p>
+            <a:pPr algn="l">
+              <a:spcAft>
+                <a:spcPts val="500"/>
+              </a:spcAft>
+            </a:pPr>
+            <a:r>
+              <a:rPr sz="1200" b="0">
+                <a:solidFill>
+                  <a:srgbClr val="2B2B2B"/>
+                </a:solidFill>
+                <a:latin typeface="맑은 고딕"/>
+              </a:rPr>
+              <a:t>출처 표기(local · law.go.kr)로 최신 원문 보강 여부를 구분</a:t>
+            </a:r>
+          </a:p>
+          <a:p>
+            <a:pPr algn="l">
+              <a:spcAft>
+                <a:spcPts val="500"/>
+              </a:spcAft>
+            </a:pPr>
+            <a:r>
+              <a:rPr sz="1200" b="0">
+                <a:solidFill>
+                  <a:srgbClr val="2B2B2B"/>
+                </a:solidFill>
+                <a:latin typeface="맑은 고딕"/>
+              </a:rPr>
+              <a:t>이 결과가 내보내기 파일에도 같이 담긴다</a:t>
+            </a:r>
+          </a:p>
+        </p:txBody>
+      </p:sp>
+      <p:sp>
+        <p:nvSpPr>
+          <p:cNvPr id="10" name="TextBox 9"/>
+          <p:cNvSpPr txBox="1"/>
+          <p:nvPr/>
+        </p:nvSpPr>
+        <p:spPr>
+          <a:xfrm>
+            <a:off x="566928" y="5532120"/>
+            <a:ext cx="11064240" cy="822960"/>
+          </a:xfrm>
+          <a:prstGeom prst="rect">
+            <a:avLst/>
+          </a:prstGeom>
+          <a:noFill/>
+        </p:spPr>
+        <p:txBody>
+          <a:bodyPr wrap="square">
+            <a:spAutoFit/>
+          </a:bodyPr>
+          <a:lstStyle/>
+          <a:p>
+            <a:pPr algn="l">
+              <a:spcAft>
+                <a:spcPts val="600"/>
+              </a:spcAft>
+            </a:pPr>
+            <a:r>
+              <a:rPr sz="1200" b="0">
+                <a:solidFill>
+                  <a:srgbClr val="2B2B2B"/>
+                </a:solidFill>
+                <a:latin typeface="맑은 고딕"/>
+              </a:rPr>
+              <a:t>녹취 의무(REC-001) 판정에 금융소비자보호법 제28조(자료의 기록 및 유지·관리)가 최우선 근거로 붙습니다 — 담당자는 화면을 벗어나지 않고 조문을 확인합니다.</a:t>
+            </a:r>
+          </a:p>
+        </p:txBody>
+      </p:sp>
+    </p:spTree>
+  </p:cSld>
+  <p:clrMapOvr>
+    <a:masterClrMapping/>
+  </p:clrMapOvr>
+</p:sld>
+</file>
+
+<file path=ppt/slides/slide18.xml><?xml version="1.0" encoding="utf-8"?>
 <p:sld xmlns:a="http://schemas.openxmlformats.org/drawingml/2006/main" xmlns:p="http://schemas.openxmlformats.org/presentationml/2006/main" xmlns:r="http://schemas.openxmlformats.org/officeDocument/2006/relationships">
   <p:cSld>
     <p:spTree>
@@ -12457,7 +12949,7 @@
 </p:sld>
 </file>
 
-<file path=ppt/slides/slide18.xml><?xml version="1.0" encoding="utf-8"?>
+<file path=ppt/slides/slide19.xml><?xml version="1.0" encoding="utf-8"?>
 <p:sld xmlns:a="http://schemas.openxmlformats.org/drawingml/2006/main" xmlns:p="http://schemas.openxmlformats.org/presentationml/2006/main" xmlns:r="http://schemas.openxmlformats.org/officeDocument/2006/relationships">
   <p:cSld>
     <p:spTree>
@@ -13390,7 +13882,825 @@
 </p:sld>
 </file>
 
-<file path=ppt/slides/slide19.xml><?xml version="1.0" encoding="utf-8"?>
+<file path=ppt/slides/slide2.xml><?xml version="1.0" encoding="utf-8"?>
+<p:sld xmlns:a="http://schemas.openxmlformats.org/drawingml/2006/main" xmlns:p="http://schemas.openxmlformats.org/presentationml/2006/main" xmlns:r="http://schemas.openxmlformats.org/officeDocument/2006/relationships">
+  <p:cSld>
+    <p:spTree>
+      <p:nvGrpSpPr>
+        <p:cNvPr id="1" name=""/>
+        <p:cNvGrpSpPr/>
+        <p:nvPr/>
+      </p:nvGrpSpPr>
+      <p:grpSpPr/>
+      <p:sp>
+        <p:nvSpPr>
+          <p:cNvPr id="2" name="Rectangle 1"/>
+          <p:cNvSpPr/>
+          <p:nvPr/>
+        </p:nvSpPr>
+        <p:spPr>
+          <a:xfrm>
+            <a:off x="0" y="0"/>
+            <a:ext cx="12191695" cy="82296"/>
+          </a:xfrm>
+          <a:prstGeom prst="rect">
+            <a:avLst/>
+          </a:prstGeom>
+          <a:solidFill>
+            <a:srgbClr val="FCAF17"/>
+          </a:solidFill>
+          <a:ln>
+            <a:noFill/>
+          </a:ln>
+        </p:spPr>
+        <p:style>
+          <a:lnRef idx="1">
+            <a:schemeClr val="accent1"/>
+          </a:lnRef>
+          <a:fillRef idx="3">
+            <a:schemeClr val="accent1"/>
+          </a:fillRef>
+          <a:effectRef idx="2">
+            <a:schemeClr val="accent1"/>
+          </a:effectRef>
+          <a:fontRef idx="minor">
+            <a:schemeClr val="lt1"/>
+          </a:fontRef>
+        </p:style>
+        <p:txBody>
+          <a:bodyPr rtlCol="0" anchor="ctr"/>
+          <a:lstStyle/>
+          <a:p>
+            <a:pPr algn="ctr"/>
+          </a:p>
+        </p:txBody>
+      </p:sp>
+      <p:sp>
+        <p:nvSpPr>
+          <p:cNvPr id="3" name="TextBox 2"/>
+          <p:cNvSpPr txBox="1"/>
+          <p:nvPr/>
+        </p:nvSpPr>
+        <p:spPr>
+          <a:xfrm>
+            <a:off x="566928" y="310896"/>
+            <a:ext cx="10424160" cy="914400"/>
+          </a:xfrm>
+          <a:prstGeom prst="rect">
+            <a:avLst/>
+          </a:prstGeom>
+          <a:noFill/>
+        </p:spPr>
+        <p:txBody>
+          <a:bodyPr wrap="square">
+            <a:spAutoFit/>
+          </a:bodyPr>
+          <a:lstStyle/>
+          <a:p>
+            <a:pPr algn="l">
+              <a:spcAft>
+                <a:spcPts val="200"/>
+              </a:spcAft>
+            </a:pPr>
+            <a:r>
+              <a:rPr sz="3000" b="1">
+                <a:solidFill>
+                  <a:srgbClr val="645B4C"/>
+                </a:solidFill>
+                <a:latin typeface="맑은 고딕"/>
+              </a:rPr>
+              <a:t>문제 정의</a:t>
+            </a:r>
+          </a:p>
+          <a:p>
+            <a:pPr algn="l">
+              <a:spcAft>
+                <a:spcPts val="600"/>
+              </a:spcAft>
+            </a:pPr>
+            <a:r>
+              <a:rPr sz="1400" b="0">
+                <a:solidFill>
+                  <a:srgbClr val="6B6B6B"/>
+                </a:solidFill>
+                <a:latin typeface="맑은 고딕"/>
+              </a:rPr>
+              <a:t>서류 하나만 보면 원리적으로 잡을 수 없는 위반이 있다</a:t>
+            </a:r>
+          </a:p>
+        </p:txBody>
+      </p:sp>
+      <p:sp>
+        <p:nvSpPr>
+          <p:cNvPr id="4" name="Rounded Rectangle 3"/>
+          <p:cNvSpPr/>
+          <p:nvPr/>
+        </p:nvSpPr>
+        <p:spPr>
+          <a:xfrm>
+            <a:off x="9646920" y="329184"/>
+            <a:ext cx="1965960" cy="384048"/>
+          </a:xfrm>
+          <a:prstGeom prst="roundRect">
+            <a:avLst/>
+          </a:prstGeom>
+          <a:solidFill>
+            <a:srgbClr val="FFF8DF"/>
+          </a:solidFill>
+          <a:ln>
+            <a:solidFill>
+              <a:srgbClr val="FCAF17"/>
+            </a:solidFill>
+          </a:ln>
+        </p:spPr>
+        <p:style>
+          <a:lnRef idx="1">
+            <a:schemeClr val="accent1"/>
+          </a:lnRef>
+          <a:fillRef idx="3">
+            <a:schemeClr val="accent1"/>
+          </a:fillRef>
+          <a:effectRef idx="2">
+            <a:schemeClr val="accent1"/>
+          </a:effectRef>
+          <a:fontRef idx="minor">
+            <a:schemeClr val="lt1"/>
+          </a:fontRef>
+        </p:style>
+        <p:txBody>
+          <a:bodyPr rtlCol="0" anchor="ctr" wrap="square"/>
+          <a:lstStyle/>
+          <a:p>
+            <a:pPr algn="ctr">
+              <a:spcAft>
+                <a:spcPts val="0"/>
+              </a:spcAft>
+            </a:pPr>
+            <a:r>
+              <a:rPr sz="1100" b="1">
+                <a:solidFill>
+                  <a:srgbClr val="645B4C"/>
+                </a:solidFill>
+                <a:latin typeface="맑은 고딕"/>
+              </a:rPr>
+              <a:t>문제 정의·필요성</a:t>
+            </a:r>
+          </a:p>
+        </p:txBody>
+      </p:sp>
+      <p:sp>
+        <p:nvSpPr>
+          <p:cNvPr id="5" name="Rounded Rectangle 4"/>
+          <p:cNvSpPr/>
+          <p:nvPr/>
+        </p:nvSpPr>
+        <p:spPr>
+          <a:xfrm>
+            <a:off x="566928" y="1463040"/>
+            <a:ext cx="3520440" cy="2148840"/>
+          </a:xfrm>
+          <a:prstGeom prst="roundRect">
+            <a:avLst/>
+          </a:prstGeom>
+          <a:solidFill>
+            <a:srgbClr val="FFFFFF"/>
+          </a:solidFill>
+          <a:ln>
+            <a:solidFill>
+              <a:srgbClr val="E6E0D4"/>
+            </a:solidFill>
+          </a:ln>
+        </p:spPr>
+        <p:style>
+          <a:lnRef idx="1">
+            <a:schemeClr val="accent1"/>
+          </a:lnRef>
+          <a:fillRef idx="3">
+            <a:schemeClr val="accent1"/>
+          </a:fillRef>
+          <a:effectRef idx="2">
+            <a:schemeClr val="accent1"/>
+          </a:effectRef>
+          <a:fontRef idx="minor">
+            <a:schemeClr val="lt1"/>
+          </a:fontRef>
+        </p:style>
+        <p:txBody>
+          <a:bodyPr rtlCol="0" anchor="ctr"/>
+          <a:lstStyle/>
+          <a:p>
+            <a:pPr algn="ctr"/>
+          </a:p>
+        </p:txBody>
+      </p:sp>
+      <p:sp>
+        <p:nvSpPr>
+          <p:cNvPr id="6" name="Rectangle 5"/>
+          <p:cNvSpPr/>
+          <p:nvPr/>
+        </p:nvSpPr>
+        <p:spPr>
+          <a:xfrm>
+            <a:off x="566928" y="1463040"/>
+            <a:ext cx="54864" cy="2148840"/>
+          </a:xfrm>
+          <a:prstGeom prst="rect">
+            <a:avLst/>
+          </a:prstGeom>
+          <a:solidFill>
+            <a:srgbClr val="C62828"/>
+          </a:solidFill>
+          <a:ln>
+            <a:noFill/>
+          </a:ln>
+        </p:spPr>
+        <p:style>
+          <a:lnRef idx="1">
+            <a:schemeClr val="accent1"/>
+          </a:lnRef>
+          <a:fillRef idx="3">
+            <a:schemeClr val="accent1"/>
+          </a:fillRef>
+          <a:effectRef idx="2">
+            <a:schemeClr val="accent1"/>
+          </a:effectRef>
+          <a:fontRef idx="minor">
+            <a:schemeClr val="lt1"/>
+          </a:fontRef>
+        </p:style>
+        <p:txBody>
+          <a:bodyPr rtlCol="0" anchor="ctr"/>
+          <a:lstStyle/>
+          <a:p>
+            <a:pPr algn="ctr"/>
+          </a:p>
+        </p:txBody>
+      </p:sp>
+      <p:sp>
+        <p:nvSpPr>
+          <p:cNvPr id="7" name="TextBox 6"/>
+          <p:cNvSpPr txBox="1"/>
+          <p:nvPr/>
+        </p:nvSpPr>
+        <p:spPr>
+          <a:xfrm>
+            <a:off x="822960" y="1609344"/>
+            <a:ext cx="3063240" cy="1874520"/>
+          </a:xfrm>
+          <a:prstGeom prst="rect">
+            <a:avLst/>
+          </a:prstGeom>
+          <a:noFill/>
+        </p:spPr>
+        <p:txBody>
+          <a:bodyPr wrap="square">
+            <a:spAutoFit/>
+          </a:bodyPr>
+          <a:lstStyle/>
+          <a:p>
+            <a:pPr algn="l">
+              <a:spcAft>
+                <a:spcPts val="700"/>
+              </a:spcAft>
+            </a:pPr>
+            <a:r>
+              <a:rPr sz="1500" b="1">
+                <a:solidFill>
+                  <a:srgbClr val="645B4C"/>
+                </a:solidFill>
+                <a:latin typeface="맑은 고딕"/>
+              </a:rPr>
+              <a:t>① 위반은 서류 사이에 있다</a:t>
+            </a:r>
+          </a:p>
+          <a:p>
+            <a:pPr algn="l">
+              <a:spcAft>
+                <a:spcPts val="500"/>
+              </a:spcAft>
+            </a:pPr>
+            <a:r>
+              <a:rPr sz="1200" b="0">
+                <a:solidFill>
+                  <a:srgbClr val="2B2B2B"/>
+                </a:solidFill>
+                <a:latin typeface="맑은 고딕"/>
+              </a:rPr>
+              <a:t>진단표: 고객 투자성향 '안정형'</a:t>
+            </a:r>
+          </a:p>
+          <a:p>
+            <a:pPr algn="l">
+              <a:spcAft>
+                <a:spcPts val="500"/>
+              </a:spcAft>
+            </a:pPr>
+            <a:r>
+              <a:rPr sz="1200" b="0">
+                <a:solidFill>
+                  <a:srgbClr val="2B2B2B"/>
+                </a:solidFill>
+                <a:latin typeface="맑은 고딕"/>
+              </a:rPr>
+              <a:t>상품설명서: 위험등급 '1등급'</a:t>
+            </a:r>
+          </a:p>
+          <a:p>
+            <a:pPr algn="l">
+              <a:spcAft>
+                <a:spcPts val="500"/>
+              </a:spcAft>
+            </a:pPr>
+            <a:r>
+              <a:rPr sz="1200" b="0">
+                <a:solidFill>
+                  <a:srgbClr val="2B2B2B"/>
+                </a:solidFill>
+                <a:latin typeface="맑은 고딕"/>
+              </a:rPr>
+              <a:t>→ 각 서류는 정상. 대조해야 위반</a:t>
+            </a:r>
+          </a:p>
+          <a:p>
+            <a:pPr algn="l">
+              <a:spcAft>
+                <a:spcPts val="500"/>
+              </a:spcAft>
+            </a:pPr>
+            <a:r>
+              <a:rPr sz="1200" b="0">
+                <a:solidFill>
+                  <a:srgbClr val="2B2B2B"/>
+                </a:solidFill>
+                <a:latin typeface="맑은 고딕"/>
+              </a:rPr>
+              <a:t>금소법 17조 적합성원칙 위반 소지</a:t>
+            </a:r>
+          </a:p>
+        </p:txBody>
+      </p:sp>
+      <p:sp>
+        <p:nvSpPr>
+          <p:cNvPr id="8" name="Rounded Rectangle 7"/>
+          <p:cNvSpPr/>
+          <p:nvPr/>
+        </p:nvSpPr>
+        <p:spPr>
+          <a:xfrm>
+            <a:off x="4315968" y="1463040"/>
+            <a:ext cx="3520440" cy="2148840"/>
+          </a:xfrm>
+          <a:prstGeom prst="roundRect">
+            <a:avLst/>
+          </a:prstGeom>
+          <a:solidFill>
+            <a:srgbClr val="FFFFFF"/>
+          </a:solidFill>
+          <a:ln>
+            <a:solidFill>
+              <a:srgbClr val="E6E0D4"/>
+            </a:solidFill>
+          </a:ln>
+        </p:spPr>
+        <p:style>
+          <a:lnRef idx="1">
+            <a:schemeClr val="accent1"/>
+          </a:lnRef>
+          <a:fillRef idx="3">
+            <a:schemeClr val="accent1"/>
+          </a:fillRef>
+          <a:effectRef idx="2">
+            <a:schemeClr val="accent1"/>
+          </a:effectRef>
+          <a:fontRef idx="minor">
+            <a:schemeClr val="lt1"/>
+          </a:fontRef>
+        </p:style>
+        <p:txBody>
+          <a:bodyPr rtlCol="0" anchor="ctr"/>
+          <a:lstStyle/>
+          <a:p>
+            <a:pPr algn="ctr"/>
+          </a:p>
+        </p:txBody>
+      </p:sp>
+      <p:sp>
+        <p:nvSpPr>
+          <p:cNvPr id="9" name="Rectangle 8"/>
+          <p:cNvSpPr/>
+          <p:nvPr/>
+        </p:nvSpPr>
+        <p:spPr>
+          <a:xfrm>
+            <a:off x="4315968" y="1463040"/>
+            <a:ext cx="54864" cy="2148840"/>
+          </a:xfrm>
+          <a:prstGeom prst="rect">
+            <a:avLst/>
+          </a:prstGeom>
+          <a:solidFill>
+            <a:srgbClr val="FCAF17"/>
+          </a:solidFill>
+          <a:ln>
+            <a:noFill/>
+          </a:ln>
+        </p:spPr>
+        <p:style>
+          <a:lnRef idx="1">
+            <a:schemeClr val="accent1"/>
+          </a:lnRef>
+          <a:fillRef idx="3">
+            <a:schemeClr val="accent1"/>
+          </a:fillRef>
+          <a:effectRef idx="2">
+            <a:schemeClr val="accent1"/>
+          </a:effectRef>
+          <a:fontRef idx="minor">
+            <a:schemeClr val="lt1"/>
+          </a:fontRef>
+        </p:style>
+        <p:txBody>
+          <a:bodyPr rtlCol="0" anchor="ctr"/>
+          <a:lstStyle/>
+          <a:p>
+            <a:pPr algn="ctr"/>
+          </a:p>
+        </p:txBody>
+      </p:sp>
+      <p:sp>
+        <p:nvSpPr>
+          <p:cNvPr id="10" name="TextBox 9"/>
+          <p:cNvSpPr txBox="1"/>
+          <p:nvPr/>
+        </p:nvSpPr>
+        <p:spPr>
+          <a:xfrm>
+            <a:off x="4572000" y="1609344"/>
+            <a:ext cx="3063240" cy="1874520"/>
+          </a:xfrm>
+          <a:prstGeom prst="rect">
+            <a:avLst/>
+          </a:prstGeom>
+          <a:noFill/>
+        </p:spPr>
+        <p:txBody>
+          <a:bodyPr wrap="square">
+            <a:spAutoFit/>
+          </a:bodyPr>
+          <a:lstStyle/>
+          <a:p>
+            <a:pPr algn="l">
+              <a:spcAft>
+                <a:spcPts val="700"/>
+              </a:spcAft>
+            </a:pPr>
+            <a:r>
+              <a:rPr sz="1500" b="1">
+                <a:solidFill>
+                  <a:srgbClr val="645B4C"/>
+                </a:solidFill>
+                <a:latin typeface="맑은 고딕"/>
+              </a:rPr>
+              <a:t>② 사람이 눈으로 대조한다</a:t>
+            </a:r>
+          </a:p>
+          <a:p>
+            <a:pPr algn="l">
+              <a:spcAft>
+                <a:spcPts val="500"/>
+              </a:spcAft>
+            </a:pPr>
+            <a:r>
+              <a:rPr sz="1200" b="0">
+                <a:solidFill>
+                  <a:srgbClr val="2B2B2B"/>
+                </a:solidFill>
+                <a:latin typeface="맑은 고딕"/>
+              </a:rPr>
+              <a:t>판매 1건 = 서류 4종 교차 확인</a:t>
+            </a:r>
+          </a:p>
+          <a:p>
+            <a:pPr algn="l">
+              <a:spcAft>
+                <a:spcPts val="500"/>
+              </a:spcAft>
+            </a:pPr>
+            <a:r>
+              <a:rPr sz="1200" b="0">
+                <a:solidFill>
+                  <a:srgbClr val="2B2B2B"/>
+                </a:solidFill>
+                <a:latin typeface="맑은 고딕"/>
+              </a:rPr>
+              <a:t>고객 성향·상품 등급·설명일·계약일·서명</a:t>
+            </a:r>
+          </a:p>
+          <a:p>
+            <a:pPr algn="l">
+              <a:spcAft>
+                <a:spcPts val="500"/>
+              </a:spcAft>
+            </a:pPr>
+            <a:r>
+              <a:rPr sz="1200" b="0">
+                <a:solidFill>
+                  <a:srgbClr val="2B2B2B"/>
+                </a:solidFill>
+                <a:latin typeface="맑은 고딕"/>
+              </a:rPr>
+              <a:t>건수가 쌓이면 누락이 발생</a:t>
+            </a:r>
+          </a:p>
+          <a:p>
+            <a:pPr algn="l">
+              <a:spcAft>
+                <a:spcPts val="500"/>
+              </a:spcAft>
+            </a:pPr>
+            <a:r>
+              <a:rPr sz="1200" b="0">
+                <a:solidFill>
+                  <a:srgbClr val="2B2B2B"/>
+                </a:solidFill>
+                <a:latin typeface="맑은 고딕"/>
+              </a:rPr>
+              <a:t>사후 분쟁 시 입증 부담은 판매사</a:t>
+            </a:r>
+          </a:p>
+        </p:txBody>
+      </p:sp>
+      <p:sp>
+        <p:nvSpPr>
+          <p:cNvPr id="11" name="Rounded Rectangle 10"/>
+          <p:cNvSpPr/>
+          <p:nvPr/>
+        </p:nvSpPr>
+        <p:spPr>
+          <a:xfrm>
+            <a:off x="8065008" y="1463040"/>
+            <a:ext cx="3566160" cy="2148840"/>
+          </a:xfrm>
+          <a:prstGeom prst="roundRect">
+            <a:avLst/>
+          </a:prstGeom>
+          <a:solidFill>
+            <a:srgbClr val="FFFFFF"/>
+          </a:solidFill>
+          <a:ln>
+            <a:solidFill>
+              <a:srgbClr val="E6E0D4"/>
+            </a:solidFill>
+          </a:ln>
+        </p:spPr>
+        <p:style>
+          <a:lnRef idx="1">
+            <a:schemeClr val="accent1"/>
+          </a:lnRef>
+          <a:fillRef idx="3">
+            <a:schemeClr val="accent1"/>
+          </a:fillRef>
+          <a:effectRef idx="2">
+            <a:schemeClr val="accent1"/>
+          </a:effectRef>
+          <a:fontRef idx="minor">
+            <a:schemeClr val="lt1"/>
+          </a:fontRef>
+        </p:style>
+        <p:txBody>
+          <a:bodyPr rtlCol="0" anchor="ctr"/>
+          <a:lstStyle/>
+          <a:p>
+            <a:pPr algn="ctr"/>
+          </a:p>
+        </p:txBody>
+      </p:sp>
+      <p:sp>
+        <p:nvSpPr>
+          <p:cNvPr id="12" name="Rectangle 11"/>
+          <p:cNvSpPr/>
+          <p:nvPr/>
+        </p:nvSpPr>
+        <p:spPr>
+          <a:xfrm>
+            <a:off x="8065008" y="1463040"/>
+            <a:ext cx="54864" cy="2148840"/>
+          </a:xfrm>
+          <a:prstGeom prst="rect">
+            <a:avLst/>
+          </a:prstGeom>
+          <a:solidFill>
+            <a:srgbClr val="FCAF17"/>
+          </a:solidFill>
+          <a:ln>
+            <a:noFill/>
+          </a:ln>
+        </p:spPr>
+        <p:style>
+          <a:lnRef idx="1">
+            <a:schemeClr val="accent1"/>
+          </a:lnRef>
+          <a:fillRef idx="3">
+            <a:schemeClr val="accent1"/>
+          </a:fillRef>
+          <a:effectRef idx="2">
+            <a:schemeClr val="accent1"/>
+          </a:effectRef>
+          <a:fontRef idx="minor">
+            <a:schemeClr val="lt1"/>
+          </a:fontRef>
+        </p:style>
+        <p:txBody>
+          <a:bodyPr rtlCol="0" anchor="ctr"/>
+          <a:lstStyle/>
+          <a:p>
+            <a:pPr algn="ctr"/>
+          </a:p>
+        </p:txBody>
+      </p:sp>
+      <p:sp>
+        <p:nvSpPr>
+          <p:cNvPr id="13" name="TextBox 12"/>
+          <p:cNvSpPr txBox="1"/>
+          <p:nvPr/>
+        </p:nvSpPr>
+        <p:spPr>
+          <a:xfrm>
+            <a:off x="8321040" y="1609344"/>
+            <a:ext cx="3108960" cy="1874520"/>
+          </a:xfrm>
+          <a:prstGeom prst="rect">
+            <a:avLst/>
+          </a:prstGeom>
+          <a:noFill/>
+        </p:spPr>
+        <p:txBody>
+          <a:bodyPr wrap="square">
+            <a:spAutoFit/>
+          </a:bodyPr>
+          <a:lstStyle/>
+          <a:p>
+            <a:pPr algn="l">
+              <a:spcAft>
+                <a:spcPts val="700"/>
+              </a:spcAft>
+            </a:pPr>
+            <a:r>
+              <a:rPr sz="1500" b="1">
+                <a:solidFill>
+                  <a:srgbClr val="645B4C"/>
+                </a:solidFill>
+                <a:latin typeface="맑은 고딕"/>
+              </a:rPr>
+              <a:t>③ 서류 형태가 제각각</a:t>
+            </a:r>
+          </a:p>
+          <a:p>
+            <a:pPr algn="l">
+              <a:spcAft>
+                <a:spcPts val="500"/>
+              </a:spcAft>
+            </a:pPr>
+            <a:r>
+              <a:rPr sz="1200" b="0">
+                <a:solidFill>
+                  <a:srgbClr val="2B2B2B"/>
+                </a:solidFill>
+                <a:latin typeface="맑은 고딕"/>
+              </a:rPr>
+              <a:t>전자 PDF · 스캔본 · 모바일 스크린샷</a:t>
+            </a:r>
+          </a:p>
+          <a:p>
+            <a:pPr algn="l">
+              <a:spcAft>
+                <a:spcPts val="500"/>
+              </a:spcAft>
+            </a:pPr>
+            <a:r>
+              <a:rPr sz="1200" b="0">
+                <a:solidFill>
+                  <a:srgbClr val="2B2B2B"/>
+                </a:solidFill>
+                <a:latin typeface="맑은 고딕"/>
+              </a:rPr>
+              <a:t>비대면은 확인서가 계약서에 통합</a:t>
+            </a:r>
+          </a:p>
+          <a:p>
+            <a:pPr algn="l">
+              <a:spcAft>
+                <a:spcPts val="500"/>
+              </a:spcAft>
+            </a:pPr>
+            <a:r>
+              <a:rPr sz="1200" b="0">
+                <a:solidFill>
+                  <a:srgbClr val="2B2B2B"/>
+                </a:solidFill>
+                <a:latin typeface="맑은 고딕"/>
+              </a:rPr>
+              <a:t>위험등급이 표 안 체크(✓)로만 표시</a:t>
+            </a:r>
+          </a:p>
+          <a:p>
+            <a:pPr algn="l">
+              <a:spcAft>
+                <a:spcPts val="500"/>
+              </a:spcAft>
+            </a:pPr>
+            <a:r>
+              <a:rPr sz="1200" b="0">
+                <a:solidFill>
+                  <a:srgbClr val="2B2B2B"/>
+                </a:solidFill>
+                <a:latin typeface="맑은 고딕"/>
+              </a:rPr>
+              <a:t>→ 텍스트 추출만으로는 못 읽는다</a:t>
+            </a:r>
+          </a:p>
+        </p:txBody>
+      </p:sp>
+      <p:sp>
+        <p:nvSpPr>
+          <p:cNvPr id="14" name="TextBox 13"/>
+          <p:cNvSpPr txBox="1"/>
+          <p:nvPr/>
+        </p:nvSpPr>
+        <p:spPr>
+          <a:xfrm>
+            <a:off x="566928" y="3886200"/>
+            <a:ext cx="11064240" cy="2194560"/>
+          </a:xfrm>
+          <a:prstGeom prst="rect">
+            <a:avLst/>
+          </a:prstGeom>
+          <a:noFill/>
+        </p:spPr>
+        <p:txBody>
+          <a:bodyPr wrap="square">
+            <a:spAutoFit/>
+          </a:bodyPr>
+          <a:lstStyle/>
+          <a:p>
+            <a:pPr algn="l">
+              <a:spcAft>
+                <a:spcPts val="1000"/>
+              </a:spcAft>
+            </a:pPr>
+            <a:r>
+              <a:rPr sz="1500" b="1">
+                <a:solidFill>
+                  <a:srgbClr val="645B4C"/>
+                </a:solidFill>
+                <a:latin typeface="맑은 고딕"/>
+              </a:rPr>
+              <a:t>불완전판매가 성립하면 판매사는 배상·제재를 부담합니다. 그런데 위반의 상당수는 '서류 간 불일치'라, 서류를 한 장씩 검토하는 방식으로는 구조적으로 놓칩니다.</a:t>
+            </a:r>
+          </a:p>
+          <a:p>
+            <a:pPr algn="l">
+              <a:spcAft>
+                <a:spcPts val="600"/>
+              </a:spcAft>
+            </a:pPr>
+            <a:r>
+              <a:rPr sz="1300" b="0">
+                <a:solidFill>
+                  <a:srgbClr val="2B2B2B"/>
+                </a:solidFill>
+                <a:latin typeface="맑은 고딕"/>
+              </a:rPr>
+              <a:t>· 금융소비자보호법(2021 시행)은 적합성·설명의무 등 6대 판매원칙과 입증책임을 판매사에 부과합니다.</a:t>
+            </a:r>
+          </a:p>
+          <a:p>
+            <a:pPr algn="l">
+              <a:spcAft>
+                <a:spcPts val="600"/>
+              </a:spcAft>
+            </a:pPr>
+            <a:r>
+              <a:rPr sz="1300" b="0">
+                <a:solidFill>
+                  <a:srgbClr val="2B2B2B"/>
+                </a:solidFill>
+                <a:latin typeface="맑은 고딕"/>
+              </a:rPr>
+              <a:t>· 비대면 채널이 늘며 서류가 전자·통합 양식으로 다양해져, 사람이 형태별로 확인하는 부담이 커졌습니다.</a:t>
+            </a:r>
+          </a:p>
+        </p:txBody>
+      </p:sp>
+    </p:spTree>
+  </p:cSld>
+  <p:clrMapOvr>
+    <a:masterClrMapping/>
+  </p:clrMapOvr>
+</p:sld>
+</file>
+
+<file path=ppt/slides/slide20.xml><?xml version="1.0" encoding="utf-8"?>
 <p:sld xmlns:a="http://schemas.openxmlformats.org/drawingml/2006/main" xmlns:p="http://schemas.openxmlformats.org/presentationml/2006/main" xmlns:r="http://schemas.openxmlformats.org/officeDocument/2006/relationships">
   <p:cSld>
     <p:spTree>
@@ -14443,825 +15753,7 @@
 </p:sld>
 </file>
 
-<file path=ppt/slides/slide2.xml><?xml version="1.0" encoding="utf-8"?>
-<p:sld xmlns:a="http://schemas.openxmlformats.org/drawingml/2006/main" xmlns:p="http://schemas.openxmlformats.org/presentationml/2006/main" xmlns:r="http://schemas.openxmlformats.org/officeDocument/2006/relationships">
-  <p:cSld>
-    <p:spTree>
-      <p:nvGrpSpPr>
-        <p:cNvPr id="1" name=""/>
-        <p:cNvGrpSpPr/>
-        <p:nvPr/>
-      </p:nvGrpSpPr>
-      <p:grpSpPr/>
-      <p:sp>
-        <p:nvSpPr>
-          <p:cNvPr id="2" name="Rectangle 1"/>
-          <p:cNvSpPr/>
-          <p:nvPr/>
-        </p:nvSpPr>
-        <p:spPr>
-          <a:xfrm>
-            <a:off x="0" y="0"/>
-            <a:ext cx="12191695" cy="82296"/>
-          </a:xfrm>
-          <a:prstGeom prst="rect">
-            <a:avLst/>
-          </a:prstGeom>
-          <a:solidFill>
-            <a:srgbClr val="FCAF17"/>
-          </a:solidFill>
-          <a:ln>
-            <a:noFill/>
-          </a:ln>
-        </p:spPr>
-        <p:style>
-          <a:lnRef idx="1">
-            <a:schemeClr val="accent1"/>
-          </a:lnRef>
-          <a:fillRef idx="3">
-            <a:schemeClr val="accent1"/>
-          </a:fillRef>
-          <a:effectRef idx="2">
-            <a:schemeClr val="accent1"/>
-          </a:effectRef>
-          <a:fontRef idx="minor">
-            <a:schemeClr val="lt1"/>
-          </a:fontRef>
-        </p:style>
-        <p:txBody>
-          <a:bodyPr rtlCol="0" anchor="ctr"/>
-          <a:lstStyle/>
-          <a:p>
-            <a:pPr algn="ctr"/>
-          </a:p>
-        </p:txBody>
-      </p:sp>
-      <p:sp>
-        <p:nvSpPr>
-          <p:cNvPr id="3" name="TextBox 2"/>
-          <p:cNvSpPr txBox="1"/>
-          <p:nvPr/>
-        </p:nvSpPr>
-        <p:spPr>
-          <a:xfrm>
-            <a:off x="566928" y="310896"/>
-            <a:ext cx="10424160" cy="914400"/>
-          </a:xfrm>
-          <a:prstGeom prst="rect">
-            <a:avLst/>
-          </a:prstGeom>
-          <a:noFill/>
-        </p:spPr>
-        <p:txBody>
-          <a:bodyPr wrap="square">
-            <a:spAutoFit/>
-          </a:bodyPr>
-          <a:lstStyle/>
-          <a:p>
-            <a:pPr algn="l">
-              <a:spcAft>
-                <a:spcPts val="200"/>
-              </a:spcAft>
-            </a:pPr>
-            <a:r>
-              <a:rPr sz="3000" b="1">
-                <a:solidFill>
-                  <a:srgbClr val="645B4C"/>
-                </a:solidFill>
-                <a:latin typeface="맑은 고딕"/>
-              </a:rPr>
-              <a:t>문제 정의</a:t>
-            </a:r>
-          </a:p>
-          <a:p>
-            <a:pPr algn="l">
-              <a:spcAft>
-                <a:spcPts val="600"/>
-              </a:spcAft>
-            </a:pPr>
-            <a:r>
-              <a:rPr sz="1400" b="0">
-                <a:solidFill>
-                  <a:srgbClr val="6B6B6B"/>
-                </a:solidFill>
-                <a:latin typeface="맑은 고딕"/>
-              </a:rPr>
-              <a:t>서류 하나만 보면 원리적으로 잡을 수 없는 위반이 있다</a:t>
-            </a:r>
-          </a:p>
-        </p:txBody>
-      </p:sp>
-      <p:sp>
-        <p:nvSpPr>
-          <p:cNvPr id="4" name="Rounded Rectangle 3"/>
-          <p:cNvSpPr/>
-          <p:nvPr/>
-        </p:nvSpPr>
-        <p:spPr>
-          <a:xfrm>
-            <a:off x="9646920" y="329184"/>
-            <a:ext cx="1965960" cy="384048"/>
-          </a:xfrm>
-          <a:prstGeom prst="roundRect">
-            <a:avLst/>
-          </a:prstGeom>
-          <a:solidFill>
-            <a:srgbClr val="FFF8DF"/>
-          </a:solidFill>
-          <a:ln>
-            <a:solidFill>
-              <a:srgbClr val="FCAF17"/>
-            </a:solidFill>
-          </a:ln>
-        </p:spPr>
-        <p:style>
-          <a:lnRef idx="1">
-            <a:schemeClr val="accent1"/>
-          </a:lnRef>
-          <a:fillRef idx="3">
-            <a:schemeClr val="accent1"/>
-          </a:fillRef>
-          <a:effectRef idx="2">
-            <a:schemeClr val="accent1"/>
-          </a:effectRef>
-          <a:fontRef idx="minor">
-            <a:schemeClr val="lt1"/>
-          </a:fontRef>
-        </p:style>
-        <p:txBody>
-          <a:bodyPr rtlCol="0" anchor="ctr" wrap="square"/>
-          <a:lstStyle/>
-          <a:p>
-            <a:pPr algn="ctr">
-              <a:spcAft>
-                <a:spcPts val="0"/>
-              </a:spcAft>
-            </a:pPr>
-            <a:r>
-              <a:rPr sz="1100" b="1">
-                <a:solidFill>
-                  <a:srgbClr val="645B4C"/>
-                </a:solidFill>
-                <a:latin typeface="맑은 고딕"/>
-              </a:rPr>
-              <a:t>문제 정의·필요성</a:t>
-            </a:r>
-          </a:p>
-        </p:txBody>
-      </p:sp>
-      <p:sp>
-        <p:nvSpPr>
-          <p:cNvPr id="5" name="Rounded Rectangle 4"/>
-          <p:cNvSpPr/>
-          <p:nvPr/>
-        </p:nvSpPr>
-        <p:spPr>
-          <a:xfrm>
-            <a:off x="566928" y="1463040"/>
-            <a:ext cx="3520440" cy="2148840"/>
-          </a:xfrm>
-          <a:prstGeom prst="roundRect">
-            <a:avLst/>
-          </a:prstGeom>
-          <a:solidFill>
-            <a:srgbClr val="FFFFFF"/>
-          </a:solidFill>
-          <a:ln>
-            <a:solidFill>
-              <a:srgbClr val="E6E0D4"/>
-            </a:solidFill>
-          </a:ln>
-        </p:spPr>
-        <p:style>
-          <a:lnRef idx="1">
-            <a:schemeClr val="accent1"/>
-          </a:lnRef>
-          <a:fillRef idx="3">
-            <a:schemeClr val="accent1"/>
-          </a:fillRef>
-          <a:effectRef idx="2">
-            <a:schemeClr val="accent1"/>
-          </a:effectRef>
-          <a:fontRef idx="minor">
-            <a:schemeClr val="lt1"/>
-          </a:fontRef>
-        </p:style>
-        <p:txBody>
-          <a:bodyPr rtlCol="0" anchor="ctr"/>
-          <a:lstStyle/>
-          <a:p>
-            <a:pPr algn="ctr"/>
-          </a:p>
-        </p:txBody>
-      </p:sp>
-      <p:sp>
-        <p:nvSpPr>
-          <p:cNvPr id="6" name="Rectangle 5"/>
-          <p:cNvSpPr/>
-          <p:nvPr/>
-        </p:nvSpPr>
-        <p:spPr>
-          <a:xfrm>
-            <a:off x="566928" y="1463040"/>
-            <a:ext cx="54864" cy="2148840"/>
-          </a:xfrm>
-          <a:prstGeom prst="rect">
-            <a:avLst/>
-          </a:prstGeom>
-          <a:solidFill>
-            <a:srgbClr val="C62828"/>
-          </a:solidFill>
-          <a:ln>
-            <a:noFill/>
-          </a:ln>
-        </p:spPr>
-        <p:style>
-          <a:lnRef idx="1">
-            <a:schemeClr val="accent1"/>
-          </a:lnRef>
-          <a:fillRef idx="3">
-            <a:schemeClr val="accent1"/>
-          </a:fillRef>
-          <a:effectRef idx="2">
-            <a:schemeClr val="accent1"/>
-          </a:effectRef>
-          <a:fontRef idx="minor">
-            <a:schemeClr val="lt1"/>
-          </a:fontRef>
-        </p:style>
-        <p:txBody>
-          <a:bodyPr rtlCol="0" anchor="ctr"/>
-          <a:lstStyle/>
-          <a:p>
-            <a:pPr algn="ctr"/>
-          </a:p>
-        </p:txBody>
-      </p:sp>
-      <p:sp>
-        <p:nvSpPr>
-          <p:cNvPr id="7" name="TextBox 6"/>
-          <p:cNvSpPr txBox="1"/>
-          <p:nvPr/>
-        </p:nvSpPr>
-        <p:spPr>
-          <a:xfrm>
-            <a:off x="822960" y="1609344"/>
-            <a:ext cx="3063240" cy="1874520"/>
-          </a:xfrm>
-          <a:prstGeom prst="rect">
-            <a:avLst/>
-          </a:prstGeom>
-          <a:noFill/>
-        </p:spPr>
-        <p:txBody>
-          <a:bodyPr wrap="square">
-            <a:spAutoFit/>
-          </a:bodyPr>
-          <a:lstStyle/>
-          <a:p>
-            <a:pPr algn="l">
-              <a:spcAft>
-                <a:spcPts val="700"/>
-              </a:spcAft>
-            </a:pPr>
-            <a:r>
-              <a:rPr sz="1500" b="1">
-                <a:solidFill>
-                  <a:srgbClr val="645B4C"/>
-                </a:solidFill>
-                <a:latin typeface="맑은 고딕"/>
-              </a:rPr>
-              <a:t>① 위반은 서류 사이에 있다</a:t>
-            </a:r>
-          </a:p>
-          <a:p>
-            <a:pPr algn="l">
-              <a:spcAft>
-                <a:spcPts val="500"/>
-              </a:spcAft>
-            </a:pPr>
-            <a:r>
-              <a:rPr sz="1200" b="0">
-                <a:solidFill>
-                  <a:srgbClr val="2B2B2B"/>
-                </a:solidFill>
-                <a:latin typeface="맑은 고딕"/>
-              </a:rPr>
-              <a:t>진단표: 고객 투자성향 '안정형'</a:t>
-            </a:r>
-          </a:p>
-          <a:p>
-            <a:pPr algn="l">
-              <a:spcAft>
-                <a:spcPts val="500"/>
-              </a:spcAft>
-            </a:pPr>
-            <a:r>
-              <a:rPr sz="1200" b="0">
-                <a:solidFill>
-                  <a:srgbClr val="2B2B2B"/>
-                </a:solidFill>
-                <a:latin typeface="맑은 고딕"/>
-              </a:rPr>
-              <a:t>상품설명서: 위험등급 '1등급'</a:t>
-            </a:r>
-          </a:p>
-          <a:p>
-            <a:pPr algn="l">
-              <a:spcAft>
-                <a:spcPts val="500"/>
-              </a:spcAft>
-            </a:pPr>
-            <a:r>
-              <a:rPr sz="1200" b="0">
-                <a:solidFill>
-                  <a:srgbClr val="2B2B2B"/>
-                </a:solidFill>
-                <a:latin typeface="맑은 고딕"/>
-              </a:rPr>
-              <a:t>→ 각 서류는 정상. 대조해야 위반</a:t>
-            </a:r>
-          </a:p>
-          <a:p>
-            <a:pPr algn="l">
-              <a:spcAft>
-                <a:spcPts val="500"/>
-              </a:spcAft>
-            </a:pPr>
-            <a:r>
-              <a:rPr sz="1200" b="0">
-                <a:solidFill>
-                  <a:srgbClr val="2B2B2B"/>
-                </a:solidFill>
-                <a:latin typeface="맑은 고딕"/>
-              </a:rPr>
-              <a:t>금소법 17조 적합성원칙 위반 소지</a:t>
-            </a:r>
-          </a:p>
-        </p:txBody>
-      </p:sp>
-      <p:sp>
-        <p:nvSpPr>
-          <p:cNvPr id="8" name="Rounded Rectangle 7"/>
-          <p:cNvSpPr/>
-          <p:nvPr/>
-        </p:nvSpPr>
-        <p:spPr>
-          <a:xfrm>
-            <a:off x="4315968" y="1463040"/>
-            <a:ext cx="3520440" cy="2148840"/>
-          </a:xfrm>
-          <a:prstGeom prst="roundRect">
-            <a:avLst/>
-          </a:prstGeom>
-          <a:solidFill>
-            <a:srgbClr val="FFFFFF"/>
-          </a:solidFill>
-          <a:ln>
-            <a:solidFill>
-              <a:srgbClr val="E6E0D4"/>
-            </a:solidFill>
-          </a:ln>
-        </p:spPr>
-        <p:style>
-          <a:lnRef idx="1">
-            <a:schemeClr val="accent1"/>
-          </a:lnRef>
-          <a:fillRef idx="3">
-            <a:schemeClr val="accent1"/>
-          </a:fillRef>
-          <a:effectRef idx="2">
-            <a:schemeClr val="accent1"/>
-          </a:effectRef>
-          <a:fontRef idx="minor">
-            <a:schemeClr val="lt1"/>
-          </a:fontRef>
-        </p:style>
-        <p:txBody>
-          <a:bodyPr rtlCol="0" anchor="ctr"/>
-          <a:lstStyle/>
-          <a:p>
-            <a:pPr algn="ctr"/>
-          </a:p>
-        </p:txBody>
-      </p:sp>
-      <p:sp>
-        <p:nvSpPr>
-          <p:cNvPr id="9" name="Rectangle 8"/>
-          <p:cNvSpPr/>
-          <p:nvPr/>
-        </p:nvSpPr>
-        <p:spPr>
-          <a:xfrm>
-            <a:off x="4315968" y="1463040"/>
-            <a:ext cx="54864" cy="2148840"/>
-          </a:xfrm>
-          <a:prstGeom prst="rect">
-            <a:avLst/>
-          </a:prstGeom>
-          <a:solidFill>
-            <a:srgbClr val="FCAF17"/>
-          </a:solidFill>
-          <a:ln>
-            <a:noFill/>
-          </a:ln>
-        </p:spPr>
-        <p:style>
-          <a:lnRef idx="1">
-            <a:schemeClr val="accent1"/>
-          </a:lnRef>
-          <a:fillRef idx="3">
-            <a:schemeClr val="accent1"/>
-          </a:fillRef>
-          <a:effectRef idx="2">
-            <a:schemeClr val="accent1"/>
-          </a:effectRef>
-          <a:fontRef idx="minor">
-            <a:schemeClr val="lt1"/>
-          </a:fontRef>
-        </p:style>
-        <p:txBody>
-          <a:bodyPr rtlCol="0" anchor="ctr"/>
-          <a:lstStyle/>
-          <a:p>
-            <a:pPr algn="ctr"/>
-          </a:p>
-        </p:txBody>
-      </p:sp>
-      <p:sp>
-        <p:nvSpPr>
-          <p:cNvPr id="10" name="TextBox 9"/>
-          <p:cNvSpPr txBox="1"/>
-          <p:nvPr/>
-        </p:nvSpPr>
-        <p:spPr>
-          <a:xfrm>
-            <a:off x="4572000" y="1609344"/>
-            <a:ext cx="3063240" cy="1874520"/>
-          </a:xfrm>
-          <a:prstGeom prst="rect">
-            <a:avLst/>
-          </a:prstGeom>
-          <a:noFill/>
-        </p:spPr>
-        <p:txBody>
-          <a:bodyPr wrap="square">
-            <a:spAutoFit/>
-          </a:bodyPr>
-          <a:lstStyle/>
-          <a:p>
-            <a:pPr algn="l">
-              <a:spcAft>
-                <a:spcPts val="700"/>
-              </a:spcAft>
-            </a:pPr>
-            <a:r>
-              <a:rPr sz="1500" b="1">
-                <a:solidFill>
-                  <a:srgbClr val="645B4C"/>
-                </a:solidFill>
-                <a:latin typeface="맑은 고딕"/>
-              </a:rPr>
-              <a:t>② 사람이 눈으로 대조한다</a:t>
-            </a:r>
-          </a:p>
-          <a:p>
-            <a:pPr algn="l">
-              <a:spcAft>
-                <a:spcPts val="500"/>
-              </a:spcAft>
-            </a:pPr>
-            <a:r>
-              <a:rPr sz="1200" b="0">
-                <a:solidFill>
-                  <a:srgbClr val="2B2B2B"/>
-                </a:solidFill>
-                <a:latin typeface="맑은 고딕"/>
-              </a:rPr>
-              <a:t>판매 1건 = 서류 4종 교차 확인</a:t>
-            </a:r>
-          </a:p>
-          <a:p>
-            <a:pPr algn="l">
-              <a:spcAft>
-                <a:spcPts val="500"/>
-              </a:spcAft>
-            </a:pPr>
-            <a:r>
-              <a:rPr sz="1200" b="0">
-                <a:solidFill>
-                  <a:srgbClr val="2B2B2B"/>
-                </a:solidFill>
-                <a:latin typeface="맑은 고딕"/>
-              </a:rPr>
-              <a:t>고객 성향·상품 등급·설명일·계약일·서명</a:t>
-            </a:r>
-          </a:p>
-          <a:p>
-            <a:pPr algn="l">
-              <a:spcAft>
-                <a:spcPts val="500"/>
-              </a:spcAft>
-            </a:pPr>
-            <a:r>
-              <a:rPr sz="1200" b="0">
-                <a:solidFill>
-                  <a:srgbClr val="2B2B2B"/>
-                </a:solidFill>
-                <a:latin typeface="맑은 고딕"/>
-              </a:rPr>
-              <a:t>건수가 쌓이면 누락이 발생</a:t>
-            </a:r>
-          </a:p>
-          <a:p>
-            <a:pPr algn="l">
-              <a:spcAft>
-                <a:spcPts val="500"/>
-              </a:spcAft>
-            </a:pPr>
-            <a:r>
-              <a:rPr sz="1200" b="0">
-                <a:solidFill>
-                  <a:srgbClr val="2B2B2B"/>
-                </a:solidFill>
-                <a:latin typeface="맑은 고딕"/>
-              </a:rPr>
-              <a:t>사후 분쟁 시 입증 부담은 판매사</a:t>
-            </a:r>
-          </a:p>
-        </p:txBody>
-      </p:sp>
-      <p:sp>
-        <p:nvSpPr>
-          <p:cNvPr id="11" name="Rounded Rectangle 10"/>
-          <p:cNvSpPr/>
-          <p:nvPr/>
-        </p:nvSpPr>
-        <p:spPr>
-          <a:xfrm>
-            <a:off x="8065008" y="1463040"/>
-            <a:ext cx="3566160" cy="2148840"/>
-          </a:xfrm>
-          <a:prstGeom prst="roundRect">
-            <a:avLst/>
-          </a:prstGeom>
-          <a:solidFill>
-            <a:srgbClr val="FFFFFF"/>
-          </a:solidFill>
-          <a:ln>
-            <a:solidFill>
-              <a:srgbClr val="E6E0D4"/>
-            </a:solidFill>
-          </a:ln>
-        </p:spPr>
-        <p:style>
-          <a:lnRef idx="1">
-            <a:schemeClr val="accent1"/>
-          </a:lnRef>
-          <a:fillRef idx="3">
-            <a:schemeClr val="accent1"/>
-          </a:fillRef>
-          <a:effectRef idx="2">
-            <a:schemeClr val="accent1"/>
-          </a:effectRef>
-          <a:fontRef idx="minor">
-            <a:schemeClr val="lt1"/>
-          </a:fontRef>
-        </p:style>
-        <p:txBody>
-          <a:bodyPr rtlCol="0" anchor="ctr"/>
-          <a:lstStyle/>
-          <a:p>
-            <a:pPr algn="ctr"/>
-          </a:p>
-        </p:txBody>
-      </p:sp>
-      <p:sp>
-        <p:nvSpPr>
-          <p:cNvPr id="12" name="Rectangle 11"/>
-          <p:cNvSpPr/>
-          <p:nvPr/>
-        </p:nvSpPr>
-        <p:spPr>
-          <a:xfrm>
-            <a:off x="8065008" y="1463040"/>
-            <a:ext cx="54864" cy="2148840"/>
-          </a:xfrm>
-          <a:prstGeom prst="rect">
-            <a:avLst/>
-          </a:prstGeom>
-          <a:solidFill>
-            <a:srgbClr val="FCAF17"/>
-          </a:solidFill>
-          <a:ln>
-            <a:noFill/>
-          </a:ln>
-        </p:spPr>
-        <p:style>
-          <a:lnRef idx="1">
-            <a:schemeClr val="accent1"/>
-          </a:lnRef>
-          <a:fillRef idx="3">
-            <a:schemeClr val="accent1"/>
-          </a:fillRef>
-          <a:effectRef idx="2">
-            <a:schemeClr val="accent1"/>
-          </a:effectRef>
-          <a:fontRef idx="minor">
-            <a:schemeClr val="lt1"/>
-          </a:fontRef>
-        </p:style>
-        <p:txBody>
-          <a:bodyPr rtlCol="0" anchor="ctr"/>
-          <a:lstStyle/>
-          <a:p>
-            <a:pPr algn="ctr"/>
-          </a:p>
-        </p:txBody>
-      </p:sp>
-      <p:sp>
-        <p:nvSpPr>
-          <p:cNvPr id="13" name="TextBox 12"/>
-          <p:cNvSpPr txBox="1"/>
-          <p:nvPr/>
-        </p:nvSpPr>
-        <p:spPr>
-          <a:xfrm>
-            <a:off x="8321040" y="1609344"/>
-            <a:ext cx="3108960" cy="1874520"/>
-          </a:xfrm>
-          <a:prstGeom prst="rect">
-            <a:avLst/>
-          </a:prstGeom>
-          <a:noFill/>
-        </p:spPr>
-        <p:txBody>
-          <a:bodyPr wrap="square">
-            <a:spAutoFit/>
-          </a:bodyPr>
-          <a:lstStyle/>
-          <a:p>
-            <a:pPr algn="l">
-              <a:spcAft>
-                <a:spcPts val="700"/>
-              </a:spcAft>
-            </a:pPr>
-            <a:r>
-              <a:rPr sz="1500" b="1">
-                <a:solidFill>
-                  <a:srgbClr val="645B4C"/>
-                </a:solidFill>
-                <a:latin typeface="맑은 고딕"/>
-              </a:rPr>
-              <a:t>③ 서류 형태가 제각각</a:t>
-            </a:r>
-          </a:p>
-          <a:p>
-            <a:pPr algn="l">
-              <a:spcAft>
-                <a:spcPts val="500"/>
-              </a:spcAft>
-            </a:pPr>
-            <a:r>
-              <a:rPr sz="1200" b="0">
-                <a:solidFill>
-                  <a:srgbClr val="2B2B2B"/>
-                </a:solidFill>
-                <a:latin typeface="맑은 고딕"/>
-              </a:rPr>
-              <a:t>전자 PDF · 스캔본 · 모바일 스크린샷</a:t>
-            </a:r>
-          </a:p>
-          <a:p>
-            <a:pPr algn="l">
-              <a:spcAft>
-                <a:spcPts val="500"/>
-              </a:spcAft>
-            </a:pPr>
-            <a:r>
-              <a:rPr sz="1200" b="0">
-                <a:solidFill>
-                  <a:srgbClr val="2B2B2B"/>
-                </a:solidFill>
-                <a:latin typeface="맑은 고딕"/>
-              </a:rPr>
-              <a:t>비대면은 확인서가 계약서에 통합</a:t>
-            </a:r>
-          </a:p>
-          <a:p>
-            <a:pPr algn="l">
-              <a:spcAft>
-                <a:spcPts val="500"/>
-              </a:spcAft>
-            </a:pPr>
-            <a:r>
-              <a:rPr sz="1200" b="0">
-                <a:solidFill>
-                  <a:srgbClr val="2B2B2B"/>
-                </a:solidFill>
-                <a:latin typeface="맑은 고딕"/>
-              </a:rPr>
-              <a:t>위험등급이 표 안 체크(✓)로만 표시</a:t>
-            </a:r>
-          </a:p>
-          <a:p>
-            <a:pPr algn="l">
-              <a:spcAft>
-                <a:spcPts val="500"/>
-              </a:spcAft>
-            </a:pPr>
-            <a:r>
-              <a:rPr sz="1200" b="0">
-                <a:solidFill>
-                  <a:srgbClr val="2B2B2B"/>
-                </a:solidFill>
-                <a:latin typeface="맑은 고딕"/>
-              </a:rPr>
-              <a:t>→ 텍스트 추출만으로는 못 읽는다</a:t>
-            </a:r>
-          </a:p>
-        </p:txBody>
-      </p:sp>
-      <p:sp>
-        <p:nvSpPr>
-          <p:cNvPr id="14" name="TextBox 13"/>
-          <p:cNvSpPr txBox="1"/>
-          <p:nvPr/>
-        </p:nvSpPr>
-        <p:spPr>
-          <a:xfrm>
-            <a:off x="566928" y="3886200"/>
-            <a:ext cx="11064240" cy="2194560"/>
-          </a:xfrm>
-          <a:prstGeom prst="rect">
-            <a:avLst/>
-          </a:prstGeom>
-          <a:noFill/>
-        </p:spPr>
-        <p:txBody>
-          <a:bodyPr wrap="square">
-            <a:spAutoFit/>
-          </a:bodyPr>
-          <a:lstStyle/>
-          <a:p>
-            <a:pPr algn="l">
-              <a:spcAft>
-                <a:spcPts val="1000"/>
-              </a:spcAft>
-            </a:pPr>
-            <a:r>
-              <a:rPr sz="1500" b="1">
-                <a:solidFill>
-                  <a:srgbClr val="645B4C"/>
-                </a:solidFill>
-                <a:latin typeface="맑은 고딕"/>
-              </a:rPr>
-              <a:t>불완전판매가 성립하면 판매사는 배상·제재를 부담합니다. 그런데 위반의 상당수는 '서류 간 불일치'라, 서류를 한 장씩 검토하는 방식으로는 구조적으로 놓칩니다.</a:t>
-            </a:r>
-          </a:p>
-          <a:p>
-            <a:pPr algn="l">
-              <a:spcAft>
-                <a:spcPts val="600"/>
-              </a:spcAft>
-            </a:pPr>
-            <a:r>
-              <a:rPr sz="1300" b="0">
-                <a:solidFill>
-                  <a:srgbClr val="2B2B2B"/>
-                </a:solidFill>
-                <a:latin typeface="맑은 고딕"/>
-              </a:rPr>
-              <a:t>· 금융소비자보호법(2021 시행)은 적합성·설명의무 등 6대 판매원칙과 입증책임을 판매사에 부과합니다.</a:t>
-            </a:r>
-          </a:p>
-          <a:p>
-            <a:pPr algn="l">
-              <a:spcAft>
-                <a:spcPts val="600"/>
-              </a:spcAft>
-            </a:pPr>
-            <a:r>
-              <a:rPr sz="1300" b="0">
-                <a:solidFill>
-                  <a:srgbClr val="2B2B2B"/>
-                </a:solidFill>
-                <a:latin typeface="맑은 고딕"/>
-              </a:rPr>
-              <a:t>· 비대면 채널이 늘며 서류가 전자·통합 양식으로 다양해져, 사람이 형태별로 확인하는 부담이 커졌습니다.</a:t>
-            </a:r>
-          </a:p>
-        </p:txBody>
-      </p:sp>
-    </p:spTree>
-  </p:cSld>
-  <p:clrMapOvr>
-    <a:masterClrMapping/>
-  </p:clrMapOvr>
-</p:sld>
-</file>
-
-<file path=ppt/slides/slide20.xml><?xml version="1.0" encoding="utf-8"?>
+<file path=ppt/slides/slide21.xml><?xml version="1.0" encoding="utf-8"?>
 <p:sld xmlns:a="http://schemas.openxmlformats.org/drawingml/2006/main" xmlns:p="http://schemas.openxmlformats.org/presentationml/2006/main" xmlns:r="http://schemas.openxmlformats.org/officeDocument/2006/relationships">
   <p:cSld>
     <p:spTree>

--- a/docs/기술설명서_초안.pptx
+++ b/docs/기술설명서_초안.pptx
@@ -3461,7 +3461,7 @@
         </p:nvGraphicFramePr>
         <p:xfrm>
           <a:off x="566928" y="1417320"/>
-          <a:ext cx="11064240" cy="1645920"/>
+          <a:ext cx="11064240" cy="1975104"/>
         </p:xfrm>
         <a:graphic>
           <a:graphicData uri="http://schemas.openxmlformats.org/drawingml/2006/table">
@@ -4015,6 +4015,116 @@
                           <a:latin typeface="맑은 고딕"/>
                         </a:rPr>
                         <a:t>미서명 적발 가능</a:t>
+                      </a:r>
+                    </a:p>
+                  </a:txBody>
+                  <a:tcPr>
+                    <a:solidFill>
+                      <a:srgbClr val="FFFFFF"/>
+                    </a:solidFill>
+                  </a:tcPr>
+                </a:tc>
+              </a:tr>
+              <a:tr h="329184">
+                <a:tc>
+                  <a:txBody>
+                    <a:bodyPr wrap="square"/>
+                    <a:lstStyle/>
+                    <a:p>
+                      <a:pPr algn="l">
+                        <a:spcAft>
+                          <a:spcPts val="0"/>
+                        </a:spcAft>
+                      </a:pPr>
+                      <a:r>
+                        <a:rPr sz="1100" b="0">
+                          <a:solidFill>
+                            <a:srgbClr val="2B2B2B"/>
+                          </a:solidFill>
+                          <a:latin typeface="맑은 고딕"/>
+                        </a:rPr>
+                        <a:t>진단표의 진단일을 설명일로 오인</a:t>
+                      </a:r>
+                    </a:p>
+                  </a:txBody>
+                  <a:tcPr>
+                    <a:solidFill>
+                      <a:srgbClr val="FFFFFF"/>
+                    </a:solidFill>
+                  </a:tcPr>
+                </a:tc>
+                <a:tc>
+                  <a:txBody>
+                    <a:bodyPr wrap="square"/>
+                    <a:lstStyle/>
+                    <a:p>
+                      <a:pPr algn="l">
+                        <a:spcAft>
+                          <a:spcPts val="0"/>
+                        </a:spcAft>
+                      </a:pPr>
+                      <a:r>
+                        <a:rPr sz="1100" b="0">
+                          <a:solidFill>
+                            <a:srgbClr val="2B2B2B"/>
+                          </a:solidFill>
+                          <a:latin typeface="맑은 고딕"/>
+                        </a:rPr>
+                        <a:t>'투자성향 2026-07-24 기준'</a:t>
+                      </a:r>
+                    </a:p>
+                  </a:txBody>
+                  <a:tcPr>
+                    <a:solidFill>
+                      <a:srgbClr val="FFFFFF"/>
+                    </a:solidFill>
+                  </a:tcPr>
+                </a:tc>
+                <a:tc>
+                  <a:txBody>
+                    <a:bodyPr wrap="square"/>
+                    <a:lstStyle/>
+                    <a:p>
+                      <a:pPr algn="l">
+                        <a:spcAft>
+                          <a:spcPts val="0"/>
+                        </a:spcAft>
+                      </a:pPr>
+                      <a:r>
+                        <a:rPr sz="1100" b="0">
+                          <a:solidFill>
+                            <a:srgbClr val="2B2B2B"/>
+                          </a:solidFill>
+                          <a:latin typeface="맑은 고딕"/>
+                        </a:rPr>
+                        <a:t>유형별 고정 스키마에서 설명일 제외</a:t>
+                      </a:r>
+                    </a:p>
+                  </a:txBody>
+                  <a:tcPr>
+                    <a:solidFill>
+                      <a:srgbClr val="FFFFFF"/>
+                    </a:solidFill>
+                  </a:tcPr>
+                </a:tc>
+                <a:tc>
+                  <a:txBody>
+                    <a:bodyPr wrap="square"/>
+                    <a:lstStyle/>
+                    <a:p>
+                      <a:pPr algn="l">
+                        <a:spcAft>
+                          <a:spcPts val="0"/>
+                        </a:spcAft>
+                      </a:pPr>
+                      <a:r>
+                        <a:rPr sz="1100" b="0">
+                          <a:solidFill>
+                            <a:srgbClr val="2B2B2B"/>
+                          </a:solidFill>
+                          <a:latin typeface="맑은 고딕"/>
+                        </a:rPr>
+                        <a:t>회차 간 판정 흔들림 제거</a:t>
                       </a:r>
                     </a:p>
                   </a:txBody>
@@ -4533,7 +4643,7 @@
                 </a:solidFill>
                 <a:latin typeface="맑은 고딕"/>
               </a:rPr>
-              <a:t>못 찾은 값은 '미확인'으로 노출</a:t>
+              <a:t>판독 회차마다 값이 달라질 수 있는 필드는 서류 유형별 고정 스키마로 차단</a:t>
             </a:r>
           </a:p>
           <a:p>
@@ -4549,7 +4659,7 @@
                 </a:solidFill>
                 <a:latin typeface="맑은 고딕"/>
               </a:rPr>
-              <a:t>값의 유무가 모델 변덕에 좌우되지 않음</a:t>
+              <a:t>실측: 캐시 없이 3회 재판독 → 회차 간 불일치 0건</a:t>
             </a:r>
           </a:p>
         </p:txBody>

--- a/docs/기술설명서_초안.pptx
+++ b/docs/기술설명서_초안.pptx
@@ -3461,7 +3461,7 @@
         </p:nvGraphicFramePr>
         <p:xfrm>
           <a:off x="566928" y="1417320"/>
-          <a:ext cx="11064240" cy="1975104"/>
+          <a:ext cx="11064240" cy="2633472"/>
         </p:xfrm>
         <a:graphic>
           <a:graphicData uri="http://schemas.openxmlformats.org/drawingml/2006/table">
@@ -3597,7 +3597,7 @@
                         </a:spcAft>
                       </a:pPr>
                       <a:r>
-                        <a:rPr sz="1100" b="0">
+                        <a:rPr sz="1000" b="0">
                           <a:solidFill>
                             <a:srgbClr val="2B2B2B"/>
                           </a:solidFill>
@@ -3624,7 +3624,7 @@
                         </a:spcAft>
                       </a:pPr>
                       <a:r>
-                        <a:rPr sz="1100" b="0">
+                        <a:rPr sz="1000" b="0">
                           <a:solidFill>
                             <a:srgbClr val="2B2B2B"/>
                           </a:solidFill>
@@ -3651,7 +3651,7 @@
                         </a:spcAft>
                       </a:pPr>
                       <a:r>
-                        <a:rPr sz="1100" b="0">
+                        <a:rPr sz="1000" b="0">
                           <a:solidFill>
                             <a:srgbClr val="2B2B2B"/>
                           </a:solidFill>
@@ -3678,7 +3678,7 @@
                         </a:spcAft>
                       </a:pPr>
                       <a:r>
-                        <a:rPr sz="1100" b="0">
+                        <a:rPr sz="1000" b="0">
                           <a:solidFill>
                             <a:srgbClr val="2B2B2B"/>
                           </a:solidFill>
@@ -3707,7 +3707,7 @@
                         </a:spcAft>
                       </a:pPr>
                       <a:r>
-                        <a:rPr sz="1100" b="0">
+                        <a:rPr sz="1000" b="0">
                           <a:solidFill>
                             <a:srgbClr val="2B2B2B"/>
                           </a:solidFill>
@@ -3734,7 +3734,7 @@
                         </a:spcAft>
                       </a:pPr>
                       <a:r>
-                        <a:rPr sz="1100" b="0">
+                        <a:rPr sz="1000" b="0">
                           <a:solidFill>
                             <a:srgbClr val="2B2B2B"/>
                           </a:solidFill>
@@ -3761,7 +3761,7 @@
                         </a:spcAft>
                       </a:pPr>
                       <a:r>
-                        <a:rPr sz="1100" b="0">
+                        <a:rPr sz="1000" b="0">
                           <a:solidFill>
                             <a:srgbClr val="2B2B2B"/>
                           </a:solidFill>
@@ -3788,7 +3788,7 @@
                         </a:spcAft>
                       </a:pPr>
                       <a:r>
-                        <a:rPr sz="1100" b="0">
+                        <a:rPr sz="1000" b="0">
                           <a:solidFill>
                             <a:srgbClr val="2B2B2B"/>
                           </a:solidFill>
@@ -3817,7 +3817,7 @@
                         </a:spcAft>
                       </a:pPr>
                       <a:r>
-                        <a:rPr sz="1100" b="0">
+                        <a:rPr sz="1000" b="0">
                           <a:solidFill>
                             <a:srgbClr val="2B2B2B"/>
                           </a:solidFill>
@@ -3844,7 +3844,7 @@
                         </a:spcAft>
                       </a:pPr>
                       <a:r>
-                        <a:rPr sz="1100" b="0">
+                        <a:rPr sz="1000" b="0">
                           <a:solidFill>
                             <a:srgbClr val="2B2B2B"/>
                           </a:solidFill>
@@ -3871,7 +3871,7 @@
                         </a:spcAft>
                       </a:pPr>
                       <a:r>
-                        <a:rPr sz="1100" b="0">
+                        <a:rPr sz="1000" b="0">
                           <a:solidFill>
                             <a:srgbClr val="2B2B2B"/>
                           </a:solidFill>
@@ -3898,7 +3898,7 @@
                         </a:spcAft>
                       </a:pPr>
                       <a:r>
-                        <a:rPr sz="1100" b="0">
+                        <a:rPr sz="1000" b="0">
                           <a:solidFill>
                             <a:srgbClr val="2B2B2B"/>
                           </a:solidFill>
@@ -3927,7 +3927,7 @@
                         </a:spcAft>
                       </a:pPr>
                       <a:r>
-                        <a:rPr sz="1100" b="0">
+                        <a:rPr sz="1000" b="0">
                           <a:solidFill>
                             <a:srgbClr val="2B2B2B"/>
                           </a:solidFill>
@@ -3954,7 +3954,7 @@
                         </a:spcAft>
                       </a:pPr>
                       <a:r>
-                        <a:rPr sz="1100" b="0">
+                        <a:rPr sz="1000" b="0">
                           <a:solidFill>
                             <a:srgbClr val="2B2B2B"/>
                           </a:solidFill>
@@ -3981,7 +3981,7 @@
                         </a:spcAft>
                       </a:pPr>
                       <a:r>
-                        <a:rPr sz="1100" b="0">
+                        <a:rPr sz="1000" b="0">
                           <a:solidFill>
                             <a:srgbClr val="2B2B2B"/>
                           </a:solidFill>
@@ -4008,7 +4008,7 @@
                         </a:spcAft>
                       </a:pPr>
                       <a:r>
-                        <a:rPr sz="1100" b="0">
+                        <a:rPr sz="1000" b="0">
                           <a:solidFill>
                             <a:srgbClr val="2B2B2B"/>
                           </a:solidFill>
@@ -4037,7 +4037,7 @@
                         </a:spcAft>
                       </a:pPr>
                       <a:r>
-                        <a:rPr sz="1100" b="0">
+                        <a:rPr sz="1000" b="0">
                           <a:solidFill>
                             <a:srgbClr val="2B2B2B"/>
                           </a:solidFill>
@@ -4064,7 +4064,7 @@
                         </a:spcAft>
                       </a:pPr>
                       <a:r>
-                        <a:rPr sz="1100" b="0">
+                        <a:rPr sz="1000" b="0">
                           <a:solidFill>
                             <a:srgbClr val="2B2B2B"/>
                           </a:solidFill>
@@ -4091,7 +4091,7 @@
                         </a:spcAft>
                       </a:pPr>
                       <a:r>
-                        <a:rPr sz="1100" b="0">
+                        <a:rPr sz="1000" b="0">
                           <a:solidFill>
                             <a:srgbClr val="2B2B2B"/>
                           </a:solidFill>
@@ -4118,13 +4118,233 @@
                         </a:spcAft>
                       </a:pPr>
                       <a:r>
-                        <a:rPr sz="1100" b="0">
+                        <a:rPr sz="1000" b="0">
                           <a:solidFill>
                             <a:srgbClr val="2B2B2B"/>
                           </a:solidFill>
                           <a:latin typeface="맑은 고딕"/>
                         </a:rPr>
                         <a:t>회차 간 판정 흔들림 제거</a:t>
+                      </a:r>
+                    </a:p>
+                  </a:txBody>
+                  <a:tcPr>
+                    <a:solidFill>
+                      <a:srgbClr val="FFFFFF"/>
+                    </a:solidFill>
+                  </a:tcPr>
+                </a:tc>
+              </a:tr>
+              <a:tr h="329184">
+                <a:tc>
+                  <a:txBody>
+                    <a:bodyPr wrap="square"/>
+                    <a:lstStyle/>
+                    <a:p>
+                      <a:pPr algn="l">
+                        <a:spcAft>
+                          <a:spcPts val="0"/>
+                        </a:spcAft>
+                      </a:pPr>
+                      <a:r>
+                        <a:rPr sz="1000" b="0">
+                          <a:solidFill>
+                            <a:srgbClr val="2B2B2B"/>
+                          </a:solidFill>
+                          <a:latin typeface="맑은 고딕"/>
+                        </a:rPr>
+                        <a:t>비전이 '등급 못 찾음'을 등급으로 읽음</a:t>
+                      </a:r>
+                    </a:p>
+                  </a:txBody>
+                  <a:tcPr>
+                    <a:solidFill>
+                      <a:srgbClr val="FFFFFF"/>
+                    </a:solidFill>
+                  </a:tcPr>
+                </a:tc>
+                <a:tc>
+                  <a:txBody>
+                    <a:bodyPr wrap="square"/>
+                    <a:lstStyle/>
+                    <a:p>
+                      <a:pPr algn="l">
+                        <a:spcAft>
+                          <a:spcPts val="0"/>
+                        </a:spcAft>
+                      </a:pPr>
+                      <a:r>
+                        <a:rPr sz="1000" b="0">
+                          <a:solidFill>
+                            <a:srgbClr val="2B2B2B"/>
+                          </a:solidFill>
+                          <a:latin typeface="맑은 고딕"/>
+                        </a:rPr>
+                        <a:t>'표시 없음(1~6 중 판단 불가)'</a:t>
+                      </a:r>
+                    </a:p>
+                  </a:txBody>
+                  <a:tcPr>
+                    <a:solidFill>
+                      <a:srgbClr val="FFFFFF"/>
+                    </a:solidFill>
+                  </a:tcPr>
+                </a:tc>
+                <a:tc>
+                  <a:txBody>
+                    <a:bodyPr wrap="square"/>
+                    <a:lstStyle/>
+                    <a:p>
+                      <a:pPr algn="l">
+                        <a:spcAft>
+                          <a:spcPts val="0"/>
+                        </a:spcAft>
+                      </a:pPr>
+                      <a:r>
+                        <a:rPr sz="1000" b="0">
+                          <a:solidFill>
+                            <a:srgbClr val="2B2B2B"/>
+                          </a:solidFill>
+                          <a:latin typeface="맑은 고딕"/>
+                        </a:rPr>
+                        <a:t>답변이 등급 하나일 때만 채택</a:t>
+                      </a:r>
+                    </a:p>
+                  </a:txBody>
+                  <a:tcPr>
+                    <a:solidFill>
+                      <a:srgbClr val="FFFFFF"/>
+                    </a:solidFill>
+                  </a:tcPr>
+                </a:tc>
+                <a:tc>
+                  <a:txBody>
+                    <a:bodyPr wrap="square"/>
+                    <a:lstStyle/>
+                    <a:p>
+                      <a:pPr algn="l">
+                        <a:spcAft>
+                          <a:spcPts val="0"/>
+                        </a:spcAft>
+                      </a:pPr>
+                      <a:r>
+                        <a:rPr sz="1000" b="0">
+                          <a:solidFill>
+                            <a:srgbClr val="2B2B2B"/>
+                          </a:solidFill>
+                          <a:latin typeface="맑은 고딕"/>
+                        </a:rPr>
+                        <a:t>1등급 오판 차단</a:t>
+                      </a:r>
+                    </a:p>
+                  </a:txBody>
+                  <a:tcPr>
+                    <a:solidFill>
+                      <a:srgbClr val="FFFFFF"/>
+                    </a:solidFill>
+                  </a:tcPr>
+                </a:tc>
+              </a:tr>
+              <a:tr h="329184">
+                <a:tc>
+                  <a:txBody>
+                    <a:bodyPr wrap="square"/>
+                    <a:lstStyle/>
+                    <a:p>
+                      <a:pPr algn="l">
+                        <a:spcAft>
+                          <a:spcPts val="0"/>
+                        </a:spcAft>
+                      </a:pPr>
+                      <a:r>
+                        <a:rPr sz="1000" b="0">
+                          <a:solidFill>
+                            <a:srgbClr val="2B2B2B"/>
+                          </a:solidFill>
+                          <a:latin typeface="맑은 고딕"/>
+                        </a:rPr>
+                        <a:t>두 자리 연도를 서기 26년으로 읽음</a:t>
+                      </a:r>
+                    </a:p>
+                  </a:txBody>
+                  <a:tcPr>
+                    <a:solidFill>
+                      <a:srgbClr val="FFFFFF"/>
+                    </a:solidFill>
+                  </a:tcPr>
+                </a:tc>
+                <a:tc>
+                  <a:txBody>
+                    <a:bodyPr wrap="square"/>
+                    <a:lstStyle/>
+                    <a:p>
+                      <a:pPr algn="l">
+                        <a:spcAft>
+                          <a:spcPts val="0"/>
+                        </a:spcAft>
+                      </a:pPr>
+                      <a:r>
+                        <a:rPr sz="1000" b="0">
+                          <a:solidFill>
+                            <a:srgbClr val="2B2B2B"/>
+                          </a:solidFill>
+                          <a:latin typeface="맑은 고딕"/>
+                        </a:rPr>
+                        <a:t>'26.07.15'</a:t>
+                      </a:r>
+                    </a:p>
+                  </a:txBody>
+                  <a:tcPr>
+                    <a:solidFill>
+                      <a:srgbClr val="FFFFFF"/>
+                    </a:solidFill>
+                  </a:tcPr>
+                </a:tc>
+                <a:tc>
+                  <a:txBody>
+                    <a:bodyPr wrap="square"/>
+                    <a:lstStyle/>
+                    <a:p>
+                      <a:pPr algn="l">
+                        <a:spcAft>
+                          <a:spcPts val="0"/>
+                        </a:spcAft>
+                      </a:pPr>
+                      <a:r>
+                        <a:rPr sz="1000" b="0">
+                          <a:solidFill>
+                            <a:srgbClr val="2B2B2B"/>
+                          </a:solidFill>
+                          <a:latin typeface="맑은 고딕"/>
+                        </a:rPr>
+                        <a:t>세기를 지어내지 않고 형식 경고로 남김</a:t>
+                      </a:r>
+                    </a:p>
+                  </a:txBody>
+                  <a:tcPr>
+                    <a:solidFill>
+                      <a:srgbClr val="FFFFFF"/>
+                    </a:solidFill>
+                  </a:tcPr>
+                </a:tc>
+                <a:tc>
+                  <a:txBody>
+                    <a:bodyPr wrap="square"/>
+                    <a:lstStyle/>
+                    <a:p>
+                      <a:pPr algn="l">
+                        <a:spcAft>
+                          <a:spcPts val="0"/>
+                        </a:spcAft>
+                      </a:pPr>
+                      <a:r>
+                        <a:rPr sz="1000" b="0">
+                          <a:solidFill>
+                            <a:srgbClr val="2B2B2B"/>
+                          </a:solidFill>
+                          <a:latin typeface="맑은 고딕"/>
+                        </a:rPr>
+                        <a:t>계약 이후 설명 적발</a:t>
                       </a:r>
                     </a:p>
                   </a:txBody>
@@ -8880,7 +9100,7 @@
                 </a:solidFill>
                 <a:latin typeface="맑은 고딕"/>
               </a:rPr>
-              <a:t>45건</a:t>
+              <a:t>83건</a:t>
             </a:r>
           </a:p>
           <a:p>
@@ -9107,7 +9327,7 @@
         </p:nvGraphicFramePr>
         <p:xfrm>
           <a:off x="566928" y="3200400"/>
-          <a:ext cx="11064240" cy="1645920"/>
+          <a:ext cx="11064240" cy="2633472"/>
         </p:xfrm>
         <a:graphic>
           <a:graphicData uri="http://schemas.openxmlformats.org/drawingml/2006/table">
@@ -9215,7 +9435,7 @@
                         </a:spcAft>
                       </a:pPr>
                       <a:r>
-                        <a:rPr sz="1000" b="0">
+                        <a:rPr sz="900" b="0">
                           <a:solidFill>
                             <a:srgbClr val="2B2B2B"/>
                           </a:solidFill>
@@ -9242,7 +9462,7 @@
                         </a:spcAft>
                       </a:pPr>
                       <a:r>
-                        <a:rPr sz="1000" b="0">
+                        <a:rPr sz="900" b="0">
                           <a:solidFill>
                             <a:srgbClr val="2B2B2B"/>
                           </a:solidFill>
@@ -9269,7 +9489,7 @@
                         </a:spcAft>
                       </a:pPr>
                       <a:r>
-                        <a:rPr sz="1000" b="0">
+                        <a:rPr sz="900" b="0">
                           <a:solidFill>
                             <a:srgbClr val="2B2B2B"/>
                           </a:solidFill>
@@ -9298,7 +9518,7 @@
                         </a:spcAft>
                       </a:pPr>
                       <a:r>
-                        <a:rPr sz="1000" b="0">
+                        <a:rPr sz="900" b="0">
                           <a:solidFill>
                             <a:srgbClr val="2B2B2B"/>
                           </a:solidFill>
@@ -9325,7 +9545,7 @@
                         </a:spcAft>
                       </a:pPr>
                       <a:r>
-                        <a:rPr sz="1000" b="0">
+                        <a:rPr sz="900" b="0">
                           <a:solidFill>
                             <a:srgbClr val="2B2B2B"/>
                           </a:solidFill>
@@ -9352,7 +9572,7 @@
                         </a:spcAft>
                       </a:pPr>
                       <a:r>
-                        <a:rPr sz="1000" b="0">
+                        <a:rPr sz="900" b="0">
                           <a:solidFill>
                             <a:srgbClr val="2B2B2B"/>
                           </a:solidFill>
@@ -9381,67 +9601,67 @@
                         </a:spcAft>
                       </a:pPr>
                       <a:r>
-                        <a:rPr sz="1000" b="0">
-                          <a:solidFill>
-                            <a:srgbClr val="2B2B2B"/>
-                          </a:solidFill>
-                          <a:latin typeface="맑은 고딕"/>
-                        </a:rPr>
-                        <a:t>모델 의존성</a:t>
-                      </a:r>
-                    </a:p>
-                  </a:txBody>
-                  <a:tcPr>
-                    <a:solidFill>
-                      <a:srgbClr val="FFFFFF"/>
-                    </a:solidFill>
-                  </a:tcPr>
-                </a:tc>
-                <a:tc>
-                  <a:txBody>
-                    <a:bodyPr wrap="square"/>
-                    <a:lstStyle/>
-                    <a:p>
-                      <a:pPr algn="l">
-                        <a:spcAft>
-                          <a:spcPts val="0"/>
-                        </a:spcAft>
-                      </a:pPr>
-                      <a:r>
-                        <a:rPr sz="1000" b="0">
-                          <a:solidFill>
-                            <a:srgbClr val="2B2B2B"/>
-                          </a:solidFill>
-                          <a:latin typeface="맑은 고딕"/>
-                        </a:rPr>
-                        <a:t>haiku · sonnet 교차 실행 후 판정 임계 필드 비교</a:t>
-                      </a:r>
-                    </a:p>
-                  </a:txBody>
-                  <a:tcPr>
-                    <a:solidFill>
-                      <a:srgbClr val="FFFFFF"/>
-                    </a:solidFill>
-                  </a:tcPr>
-                </a:tc>
-                <a:tc>
-                  <a:txBody>
-                    <a:bodyPr wrap="square"/>
-                    <a:lstStyle/>
-                    <a:p>
-                      <a:pPr algn="l">
-                        <a:spcAft>
-                          <a:spcPts val="0"/>
-                        </a:spcAft>
-                      </a:pPr>
-                      <a:r>
-                        <a:rPr sz="1000" b="0">
-                          <a:solidFill>
-                            <a:srgbClr val="2B2B2B"/>
-                          </a:solidFill>
-                          <a:latin typeface="맑은 고딕"/>
-                        </a:rPr>
-                        <a:t>불일치 0건 (저가 모델로 충분)</a:t>
+                        <a:rPr sz="900" b="0">
+                          <a:solidFill>
+                            <a:srgbClr val="2B2B2B"/>
+                          </a:solidFill>
+                          <a:latin typeface="맑은 고딕"/>
+                        </a:rPr>
+                        <a:t>판독 재현성</a:t>
+                      </a:r>
+                    </a:p>
+                  </a:txBody>
+                  <a:tcPr>
+                    <a:solidFill>
+                      <a:srgbClr val="FFFFFF"/>
+                    </a:solidFill>
+                  </a:tcPr>
+                </a:tc>
+                <a:tc>
+                  <a:txBody>
+                    <a:bodyPr wrap="square"/>
+                    <a:lstStyle/>
+                    <a:p>
+                      <a:pPr algn="l">
+                        <a:spcAft>
+                          <a:spcPts val="0"/>
+                        </a:spcAft>
+                      </a:pPr>
+                      <a:r>
+                        <a:rPr sz="900" b="0">
+                          <a:solidFill>
+                            <a:srgbClr val="2B2B2B"/>
+                          </a:solidFill>
+                          <a:latin typeface="맑은 고딕"/>
+                        </a:rPr>
+                        <a:t>캐시를 끄고 실물 서류를 3회 재판독해 필드 비교</a:t>
+                      </a:r>
+                    </a:p>
+                  </a:txBody>
+                  <a:tcPr>
+                    <a:solidFill>
+                      <a:srgbClr val="FFFFFF"/>
+                    </a:solidFill>
+                  </a:tcPr>
+                </a:tc>
+                <a:tc>
+                  <a:txBody>
+                    <a:bodyPr wrap="square"/>
+                    <a:lstStyle/>
+                    <a:p>
+                      <a:pPr algn="l">
+                        <a:spcAft>
+                          <a:spcPts val="0"/>
+                        </a:spcAft>
+                      </a:pPr>
+                      <a:r>
+                        <a:rPr sz="900" b="0">
+                          <a:solidFill>
+                            <a:srgbClr val="2B2B2B"/>
+                          </a:solidFill>
+                          <a:latin typeface="맑은 고딕"/>
+                        </a:rPr>
+                        <a:t>회차 간 불일치 0건</a:t>
                       </a:r>
                     </a:p>
                   </a:txBody>
@@ -9464,7 +9684,256 @@
                         </a:spcAft>
                       </a:pPr>
                       <a:r>
-                        <a:rPr sz="1000" b="0">
+                        <a:rPr sz="900" b="0">
+                          <a:solidFill>
+                            <a:srgbClr val="2B2B2B"/>
+                          </a:solidFill>
+                          <a:latin typeface="맑은 고딕"/>
+                        </a:rPr>
+                        <a:t>점검에 쓰지 않은 자료</a:t>
+                      </a:r>
+                    </a:p>
+                  </a:txBody>
+                  <a:tcPr>
+                    <a:solidFill>
+                      <a:srgbClr val="FFFFFF"/>
+                    </a:solidFill>
+                  </a:tcPr>
+                </a:tc>
+                <a:tc>
+                  <a:txBody>
+                    <a:bodyPr wrap="square"/>
+                    <a:lstStyle/>
+                    <a:p>
+                      <a:pPr algn="l">
+                        <a:spcAft>
+                          <a:spcPts val="0"/>
+                        </a:spcAft>
+                      </a:pPr>
+                      <a:r>
+                        <a:rPr sz="900" b="0">
+                          <a:solidFill>
+                            <a:srgbClr val="2B2B2B"/>
+                          </a:solidFill>
+                          <a:latin typeface="맑은 고딕"/>
+                        </a:rPr>
+                        <a:t>KB·삼성·미래에셋·신한·대우 실물 23건으로 재검증</a:t>
+                      </a:r>
+                    </a:p>
+                  </a:txBody>
+                  <a:tcPr>
+                    <a:solidFill>
+                      <a:srgbClr val="FFFFFF"/>
+                    </a:solidFill>
+                  </a:tcPr>
+                </a:tc>
+                <a:tc>
+                  <a:txBody>
+                    <a:bodyPr wrap="square"/>
+                    <a:lstStyle/>
+                    <a:p>
+                      <a:pPr algn="l">
+                        <a:spcAft>
+                          <a:spcPts val="0"/>
+                        </a:spcAft>
+                      </a:pPr>
+                      <a:r>
+                        <a:rPr sz="900" b="0">
+                          <a:solidFill>
+                            <a:srgbClr val="2B2B2B"/>
+                          </a:solidFill>
+                          <a:latin typeface="맑은 고딕"/>
+                        </a:rPr>
+                        <a:t>위험등급 10/10 일치 · 부당권유 오탐 0건</a:t>
+                      </a:r>
+                    </a:p>
+                  </a:txBody>
+                  <a:tcPr>
+                    <a:solidFill>
+                      <a:srgbClr val="FFFFFF"/>
+                    </a:solidFill>
+                  </a:tcPr>
+                </a:tc>
+              </a:tr>
+              <a:tr h="329184">
+                <a:tc>
+                  <a:txBody>
+                    <a:bodyPr wrap="square"/>
+                    <a:lstStyle/>
+                    <a:p>
+                      <a:pPr algn="l">
+                        <a:spcAft>
+                          <a:spcPts val="0"/>
+                        </a:spcAft>
+                      </a:pPr>
+                      <a:r>
+                        <a:rPr sz="900" b="0">
+                          <a:solidFill>
+                            <a:srgbClr val="2B2B2B"/>
+                          </a:solidFill>
+                          <a:latin typeface="맑은 고딕"/>
+                        </a:rPr>
+                        <a:t>근거 조문 안정성</a:t>
+                      </a:r>
+                    </a:p>
+                  </a:txBody>
+                  <a:tcPr>
+                    <a:solidFill>
+                      <a:srgbClr val="FFFFFF"/>
+                    </a:solidFill>
+                  </a:tcPr>
+                </a:tc>
+                <a:tc>
+                  <a:txBody>
+                    <a:bodyPr wrap="square"/>
+                    <a:lstStyle/>
+                    <a:p>
+                      <a:pPr algn="l">
+                        <a:spcAft>
+                          <a:spcPts val="0"/>
+                        </a:spcAft>
+                      </a:pPr>
+                      <a:r>
+                        <a:rPr sz="900" b="0">
+                          <a:solidFill>
+                            <a:srgbClr val="2B2B2B"/>
+                          </a:solidFill>
+                          <a:latin typeface="맑은 고딕"/>
+                        </a:rPr>
+                        <a:t>규칙마다 검색어를 바꿔 근거 조문 비교</a:t>
+                      </a:r>
+                    </a:p>
+                  </a:txBody>
+                  <a:tcPr>
+                    <a:solidFill>
+                      <a:srgbClr val="FFFFFF"/>
+                    </a:solidFill>
+                  </a:tcPr>
+                </a:tc>
+                <a:tc>
+                  <a:txBody>
+                    <a:bodyPr wrap="square"/>
+                    <a:lstStyle/>
+                    <a:p>
+                      <a:pPr algn="l">
+                        <a:spcAft>
+                          <a:spcPts val="0"/>
+                        </a:spcAft>
+                      </a:pPr>
+                      <a:r>
+                        <a:rPr sz="900" b="0">
+                          <a:solidFill>
+                            <a:srgbClr val="2B2B2B"/>
+                          </a:solidFill>
+                          <a:latin typeface="맑은 고딕"/>
+                        </a:rPr>
+                        <a:t>8종 전부 불변(확정 선언)</a:t>
+                      </a:r>
+                    </a:p>
+                  </a:txBody>
+                  <a:tcPr>
+                    <a:solidFill>
+                      <a:srgbClr val="FFFFFF"/>
+                    </a:solidFill>
+                  </a:tcPr>
+                </a:tc>
+              </a:tr>
+              <a:tr h="329184">
+                <a:tc>
+                  <a:txBody>
+                    <a:bodyPr wrap="square"/>
+                    <a:lstStyle/>
+                    <a:p>
+                      <a:pPr algn="l">
+                        <a:spcAft>
+                          <a:spcPts val="0"/>
+                        </a:spcAft>
+                      </a:pPr>
+                      <a:r>
+                        <a:rPr sz="900" b="0">
+                          <a:solidFill>
+                            <a:srgbClr val="2B2B2B"/>
+                          </a:solidFill>
+                          <a:latin typeface="맑은 고딕"/>
+                        </a:rPr>
+                        <a:t>모델 의존성</a:t>
+                      </a:r>
+                    </a:p>
+                  </a:txBody>
+                  <a:tcPr>
+                    <a:solidFill>
+                      <a:srgbClr val="FFFFFF"/>
+                    </a:solidFill>
+                  </a:tcPr>
+                </a:tc>
+                <a:tc>
+                  <a:txBody>
+                    <a:bodyPr wrap="square"/>
+                    <a:lstStyle/>
+                    <a:p>
+                      <a:pPr algn="l">
+                        <a:spcAft>
+                          <a:spcPts val="0"/>
+                        </a:spcAft>
+                      </a:pPr>
+                      <a:r>
+                        <a:rPr sz="900" b="0">
+                          <a:solidFill>
+                            <a:srgbClr val="2B2B2B"/>
+                          </a:solidFill>
+                          <a:latin typeface="맑은 고딕"/>
+                        </a:rPr>
+                        <a:t>haiku · sonnet 교차 실행 후 판정 임계 필드 비교</a:t>
+                      </a:r>
+                    </a:p>
+                  </a:txBody>
+                  <a:tcPr>
+                    <a:solidFill>
+                      <a:srgbClr val="FFFFFF"/>
+                    </a:solidFill>
+                  </a:tcPr>
+                </a:tc>
+                <a:tc>
+                  <a:txBody>
+                    <a:bodyPr wrap="square"/>
+                    <a:lstStyle/>
+                    <a:p>
+                      <a:pPr algn="l">
+                        <a:spcAft>
+                          <a:spcPts val="0"/>
+                        </a:spcAft>
+                      </a:pPr>
+                      <a:r>
+                        <a:rPr sz="900" b="0">
+                          <a:solidFill>
+                            <a:srgbClr val="2B2B2B"/>
+                          </a:solidFill>
+                          <a:latin typeface="맑은 고딕"/>
+                        </a:rPr>
+                        <a:t>불일치 0건 (저가 모델로 충분)</a:t>
+                      </a:r>
+                    </a:p>
+                  </a:txBody>
+                  <a:tcPr>
+                    <a:solidFill>
+                      <a:srgbClr val="FFFFFF"/>
+                    </a:solidFill>
+                  </a:tcPr>
+                </a:tc>
+              </a:tr>
+              <a:tr h="329184">
+                <a:tc>
+                  <a:txBody>
+                    <a:bodyPr wrap="square"/>
+                    <a:lstStyle/>
+                    <a:p>
+                      <a:pPr algn="l">
+                        <a:spcAft>
+                          <a:spcPts val="0"/>
+                        </a:spcAft>
+                      </a:pPr>
+                      <a:r>
+                        <a:rPr sz="900" b="0">
                           <a:solidFill>
                             <a:srgbClr val="2B2B2B"/>
                           </a:solidFill>
@@ -9491,7 +9960,7 @@
                         </a:spcAft>
                       </a:pPr>
                       <a:r>
-                        <a:rPr sz="1000" b="0">
+                        <a:rPr sz="900" b="0">
                           <a:solidFill>
                             <a:srgbClr val="2B2B2B"/>
                           </a:solidFill>
@@ -9518,7 +9987,7 @@
                         </a:spcAft>
                       </a:pPr>
                       <a:r>
-                        <a:rPr sz="1000" b="0">
+                        <a:rPr sz="900" b="0">
                           <a:solidFill>
                             <a:srgbClr val="2B2B2B"/>
                           </a:solidFill>
@@ -9919,7 +10388,7 @@
                           </a:solidFill>
                           <a:latin typeface="맑은 고딕"/>
                         </a:rPr>
-                        <a:t>약 10초</a:t>
+                        <a:t>약 50초</a:t>
                       </a:r>
                     </a:p>
                   </a:txBody>
@@ -9946,7 +10415,7 @@
                           </a:solidFill>
                           <a:latin typeface="맑은 고딕"/>
                         </a:rPr>
-                        <a:t>첫 처리 실측</a:t>
+                        <a:t>첫 처리 실측 (LLM 판독 + 법령 API 포함)</a:t>
                       </a:r>
                     </a:p>
                   </a:txBody>
@@ -11757,7 +12226,7 @@
                 </a:solidFill>
                 <a:latin typeface="맑은 고딕"/>
               </a:rPr>
-              <a:t>실제 화면 — 판정마다 법령 원문이 따라붙는다</a:t>
+              <a:t>실제 화면 — 조문에서 걸리는 부분까지 짚는다</a:t>
             </a:r>
           </a:p>
           <a:p>
@@ -11773,7 +12242,7 @@
                 </a:solidFill>
                 <a:latin typeface="맑은 고딕"/>
               </a:rPr>
-              <a:t>판정만 주는 도구는 담당자가 다시 규정을 찾아봐야 한다</a:t>
+              <a:t>조문 전체를 던지면 '그래서 어디가 문제냐'에 답하지 못한다</a:t>
             </a:r>
           </a:p>
         </p:txBody>
@@ -12042,7 +12511,7 @@
                 </a:solidFill>
                 <a:latin typeface="맑은 고딕"/>
               </a:rPr>
-              <a:t>규칙마다 근거 조문을 미리 지정 — 검색 점수가 높다고 엉뚱한 조문이 앞서지 않는다</a:t>
+              <a:t>규칙마다 근거 조문을 확정 선언 — 검색어가 바뀌어도 근거가 흔들리지 않는다</a:t>
             </a:r>
           </a:p>
           <a:p>
@@ -12058,7 +12527,7 @@
                 </a:solidFill>
                 <a:latin typeface="맑은 고딕"/>
               </a:rPr>
-              <a:t>조문 원문을 그 자리에서 펼쳐 확인</a:t>
+              <a:t>조문에서 규칙이 걸리는 항만 뽑아 문구를 형광 표시 (조문 전체의 6~30%)</a:t>
             </a:r>
           </a:p>
           <a:p>
@@ -12074,7 +12543,7 @@
                 </a:solidFill>
                 <a:latin typeface="맑은 고딕"/>
               </a:rPr>
-              <a:t>출처 표기(local · law.go.kr)로 최신 원문 보강 여부를 구분</a:t>
+              <a:t>법률 조문과 그 위임을 받은 감독규정을 함께 제시</a:t>
             </a:r>
           </a:p>
           <a:p>
@@ -12090,7 +12559,7 @@
                 </a:solidFill>
                 <a:latin typeface="맑은 고딕"/>
               </a:rPr>
-              <a:t>이 결과가 내보내기 파일에도 같이 담긴다</a:t>
+              <a:t>적용 조항이 내보내기 파일에도 같이 담긴다</a:t>
             </a:r>
           </a:p>
         </p:txBody>
@@ -12129,7 +12598,7 @@
                 </a:solidFill>
                 <a:latin typeface="맑은 고딕"/>
               </a:rPr>
-              <a:t>녹취 의무(REC-001) 판정에 금융소비자보호법 제28조(자료의 기록 및 유지·관리)가 최우선 근거로 붙습니다 — 담당자는 화면을 벗어나지 않고 조문을 확인합니다.</a:t>
+              <a:t>녹취 의무(REC-001) 판정에 금소법 제28조와 감독규정 제25조가 함께 붙고, 각 조문에서 '자료를 기록'·'멸실 또는 위조'·'고시하는 기간(5년)'이 형광으로 표시됩니다 — 담당자는 화면을 벗어나지 않고 무엇을 확인해야 하는지 압니다.</a:t>
             </a:r>
           </a:p>
         </p:txBody>
@@ -13458,7 +13927,7 @@
                           </a:solidFill>
                           <a:latin typeface="맑은 고딕"/>
                         </a:rPr>
-                        <a:t>실물 25건 · 테스트 45건</a:t>
+                        <a:t>실물 25건 + 미사용 23건 · 테스트 83건</a:t>
                       </a:r>
                     </a:p>
                   </a:txBody>
@@ -15512,7 +15981,7 @@
                 </a:solidFill>
                 <a:latin typeface="맑은 고딕"/>
               </a:rPr>
-              <a:t>BM25 조문 검색 (한국어 토크나이저)</a:t>
+              <a:t>규칙별 확정 근거 조문 + BM25 폴백</a:t>
             </a:r>
           </a:p>
           <a:p>
@@ -15728,7 +16197,7 @@
                           </a:solidFill>
                           <a:latin typeface="맑은 고딕"/>
                         </a:rPr>
-                        <a:t>완료 · 회귀 테스트 45건</a:t>
+                        <a:t>완료 · 회귀 테스트 83건</a:t>
                       </a:r>
                     </a:p>
                   </a:txBody>
@@ -21588,7 +22057,7 @@
                 </a:solidFill>
                 <a:latin typeface="맑은 고딕"/>
               </a:rPr>
-              <a:t>자동 검증 (약 10초)</a:t>
+              <a:t>자동 검증 (약 50초)</a:t>
             </a:r>
           </a:p>
         </p:txBody>
@@ -23006,7 +23475,7 @@
                           </a:solidFill>
                           <a:latin typeface="맑은 고딕"/>
                         </a:rPr>
-                        <a:t>검색어 생성만</a:t>
+                        <a:t>쟁점 설명만</a:t>
                       </a:r>
                     </a:p>
                   </a:txBody>
@@ -23033,7 +23502,7 @@
                           </a:solidFill>
                           <a:latin typeface="맑은 고딕"/>
                         </a:rPr>
-                        <a:t>국가법령정보 API · BM25 · 좌표 하이라이트</a:t>
+                        <a:t>규칙별 확정 근거 조문 · 적용 조항 형광 표시</a:t>
                       </a:r>
                     </a:p>
                   </a:txBody>

--- a/docs/기술설명서_초안.pptx
+++ b/docs/기술설명서_초안.pptx
@@ -3272,7 +3272,7 @@
                 </a:solidFill>
                 <a:latin typeface="맑은 고딕"/>
               </a:rPr>
-              <a:t>제8회 KB Future Finance A.I. Challenge  |  팀명: (참가신청서 기재)</a:t>
+              <a:t>제8회 KB Future Finance A.I. Challenge  |  팀명: 주식손절못함</a:t>
             </a:r>
           </a:p>
         </p:txBody>

--- a/docs/기술설명서_초안.pptx
+++ b/docs/기술설명서_초안.pptx
@@ -26,6 +26,7 @@
     <p:sldId id="274" r:id="rId25"/>
     <p:sldId id="275" r:id="rId26"/>
     <p:sldId id="276" r:id="rId27"/>
+    <p:sldId id="277" r:id="rId28"/>
   </p:sldIdLst>
   <p:sldSz cx="12191695" cy="6858000" type="screen4x3"/>
   <p:notesSz cx="6858000" cy="9144000"/>
@@ -13956,7 +13957,8 @@
                           </a:solidFill>
                           <a:latin typeface="맑은 고딕"/>
                         </a:rPr>
-                        <a:t>본선 1단계</a:t>
+                        <a:t>본선 1단계
+진출 후 ~2주</a:t>
                       </a:r>
                     </a:p>
                   </a:txBody>
@@ -14066,7 +14068,8 @@
                           </a:solidFill>
                           <a:latin typeface="맑은 고딕"/>
                         </a:rPr>
-                        <a:t>본선 2단계</a:t>
+                        <a:t>본선 2단계
+~4주</a:t>
                       </a:r>
                     </a:p>
                   </a:txBody>
@@ -14176,7 +14179,8 @@
                           </a:solidFill>
                           <a:latin typeface="맑은 고딕"/>
                         </a:rPr>
-                        <a:t>본선 3단계</a:t>
+                        <a:t>본선 3단계
+~6주</a:t>
                       </a:r>
                     </a:p>
                   </a:txBody>
@@ -14286,7 +14290,8 @@
                           </a:solidFill>
                           <a:latin typeface="맑은 고딕"/>
                         </a:rPr>
-                        <a:t>도입 준비</a:t>
+                        <a:t>도입 준비
+PoC 협의 시</a:t>
                       </a:r>
                     </a:p>
                   </a:txBody>
@@ -15280,6 +15285,1291 @@
 </file>
 
 <file path=ppt/slides/slide20.xml><?xml version="1.0" encoding="utf-8"?>
+<p:sld xmlns:a="http://schemas.openxmlformats.org/drawingml/2006/main" xmlns:p="http://schemas.openxmlformats.org/presentationml/2006/main" xmlns:r="http://schemas.openxmlformats.org/officeDocument/2006/relationships">
+  <p:cSld>
+    <p:spTree>
+      <p:nvGrpSpPr>
+        <p:cNvPr id="1" name=""/>
+        <p:cNvGrpSpPr/>
+        <p:nvPr/>
+      </p:nvGrpSpPr>
+      <p:grpSpPr/>
+      <p:sp>
+        <p:nvSpPr>
+          <p:cNvPr id="2" name="Rectangle 1"/>
+          <p:cNvSpPr/>
+          <p:nvPr/>
+        </p:nvSpPr>
+        <p:spPr>
+          <a:xfrm>
+            <a:off x="0" y="0"/>
+            <a:ext cx="12191695" cy="82296"/>
+          </a:xfrm>
+          <a:prstGeom prst="rect">
+            <a:avLst/>
+          </a:prstGeom>
+          <a:solidFill>
+            <a:srgbClr val="FCAF17"/>
+          </a:solidFill>
+          <a:ln>
+            <a:noFill/>
+          </a:ln>
+        </p:spPr>
+        <p:style>
+          <a:lnRef idx="1">
+            <a:schemeClr val="accent1"/>
+          </a:lnRef>
+          <a:fillRef idx="3">
+            <a:schemeClr val="accent1"/>
+          </a:fillRef>
+          <a:effectRef idx="2">
+            <a:schemeClr val="accent1"/>
+          </a:effectRef>
+          <a:fontRef idx="minor">
+            <a:schemeClr val="lt1"/>
+          </a:fontRef>
+        </p:style>
+        <p:txBody>
+          <a:bodyPr rtlCol="0" anchor="ctr"/>
+          <a:lstStyle/>
+          <a:p>
+            <a:pPr algn="ctr"/>
+          </a:p>
+        </p:txBody>
+      </p:sp>
+      <p:sp>
+        <p:nvSpPr>
+          <p:cNvPr id="3" name="TextBox 2"/>
+          <p:cNvSpPr txBox="1"/>
+          <p:nvPr/>
+        </p:nvSpPr>
+        <p:spPr>
+          <a:xfrm>
+            <a:off x="566928" y="310896"/>
+            <a:ext cx="10424160" cy="914400"/>
+          </a:xfrm>
+          <a:prstGeom prst="rect">
+            <a:avLst/>
+          </a:prstGeom>
+          <a:noFill/>
+        </p:spPr>
+        <p:txBody>
+          <a:bodyPr wrap="square">
+            <a:spAutoFit/>
+          </a:bodyPr>
+          <a:lstStyle/>
+          <a:p>
+            <a:pPr algn="l">
+              <a:spcAft>
+                <a:spcPts val="200"/>
+              </a:spcAft>
+            </a:pPr>
+            <a:r>
+              <a:rPr sz="3000" b="1">
+                <a:solidFill>
+                  <a:srgbClr val="645B4C"/>
+                </a:solidFill>
+                <a:latin typeface="맑은 고딕"/>
+              </a:rPr>
+              <a:t>개발 체계 · 필요 자원 · 리스크</a:t>
+            </a:r>
+          </a:p>
+          <a:p>
+            <a:pPr algn="l">
+              <a:spcAft>
+                <a:spcPts val="600"/>
+              </a:spcAft>
+            </a:pPr>
+            <a:r>
+              <a:rPr sz="1400" b="0">
+                <a:solidFill>
+                  <a:srgbClr val="6B6B6B"/>
+                </a:solidFill>
+                <a:latin typeface="맑은 고딕"/>
+              </a:rPr>
+              <a:t>누가 무엇을 맡고, 도입에 무엇이 필요하며, 무엇이 틀어질 수 있는지</a:t>
+            </a:r>
+          </a:p>
+        </p:txBody>
+      </p:sp>
+      <p:sp>
+        <p:nvSpPr>
+          <p:cNvPr id="4" name="Rounded Rectangle 3"/>
+          <p:cNvSpPr/>
+          <p:nvPr/>
+        </p:nvSpPr>
+        <p:spPr>
+          <a:xfrm>
+            <a:off x="9646920" y="329184"/>
+            <a:ext cx="1965960" cy="384048"/>
+          </a:xfrm>
+          <a:prstGeom prst="roundRect">
+            <a:avLst/>
+          </a:prstGeom>
+          <a:solidFill>
+            <a:srgbClr val="FFF8DF"/>
+          </a:solidFill>
+          <a:ln>
+            <a:solidFill>
+              <a:srgbClr val="FCAF17"/>
+            </a:solidFill>
+          </a:ln>
+        </p:spPr>
+        <p:style>
+          <a:lnRef idx="1">
+            <a:schemeClr val="accent1"/>
+          </a:lnRef>
+          <a:fillRef idx="3">
+            <a:schemeClr val="accent1"/>
+          </a:fillRef>
+          <a:effectRef idx="2">
+            <a:schemeClr val="accent1"/>
+          </a:effectRef>
+          <a:fontRef idx="minor">
+            <a:schemeClr val="lt1"/>
+          </a:fontRef>
+        </p:style>
+        <p:txBody>
+          <a:bodyPr rtlCol="0" anchor="ctr" wrap="square"/>
+          <a:lstStyle/>
+          <a:p>
+            <a:pPr algn="ctr">
+              <a:spcAft>
+                <a:spcPts val="0"/>
+              </a:spcAft>
+            </a:pPr>
+            <a:r>
+              <a:rPr sz="1100" b="1">
+                <a:solidFill>
+                  <a:srgbClr val="645B4C"/>
+                </a:solidFill>
+                <a:latin typeface="맑은 고딕"/>
+              </a:rPr>
+              <a:t>개발 계획의 구체성</a:t>
+            </a:r>
+          </a:p>
+        </p:txBody>
+      </p:sp>
+      <p:sp>
+        <p:nvSpPr>
+          <p:cNvPr id="5" name="Rounded Rectangle 4"/>
+          <p:cNvSpPr/>
+          <p:nvPr/>
+        </p:nvSpPr>
+        <p:spPr>
+          <a:xfrm>
+            <a:off x="566928" y="1371600"/>
+            <a:ext cx="3520440" cy="2468880"/>
+          </a:xfrm>
+          <a:prstGeom prst="roundRect">
+            <a:avLst/>
+          </a:prstGeom>
+          <a:solidFill>
+            <a:srgbClr val="FFFFFF"/>
+          </a:solidFill>
+          <a:ln>
+            <a:solidFill>
+              <a:srgbClr val="E6E0D4"/>
+            </a:solidFill>
+          </a:ln>
+        </p:spPr>
+        <p:style>
+          <a:lnRef idx="1">
+            <a:schemeClr val="accent1"/>
+          </a:lnRef>
+          <a:fillRef idx="3">
+            <a:schemeClr val="accent1"/>
+          </a:fillRef>
+          <a:effectRef idx="2">
+            <a:schemeClr val="accent1"/>
+          </a:effectRef>
+          <a:fontRef idx="minor">
+            <a:schemeClr val="lt1"/>
+          </a:fontRef>
+        </p:style>
+        <p:txBody>
+          <a:bodyPr rtlCol="0" anchor="ctr"/>
+          <a:lstStyle/>
+          <a:p>
+            <a:pPr algn="ctr"/>
+          </a:p>
+        </p:txBody>
+      </p:sp>
+      <p:sp>
+        <p:nvSpPr>
+          <p:cNvPr id="6" name="Rectangle 5"/>
+          <p:cNvSpPr/>
+          <p:nvPr/>
+        </p:nvSpPr>
+        <p:spPr>
+          <a:xfrm>
+            <a:off x="566928" y="1371600"/>
+            <a:ext cx="54864" cy="2468880"/>
+          </a:xfrm>
+          <a:prstGeom prst="rect">
+            <a:avLst/>
+          </a:prstGeom>
+          <a:solidFill>
+            <a:srgbClr val="FCAF17"/>
+          </a:solidFill>
+          <a:ln>
+            <a:noFill/>
+          </a:ln>
+        </p:spPr>
+        <p:style>
+          <a:lnRef idx="1">
+            <a:schemeClr val="accent1"/>
+          </a:lnRef>
+          <a:fillRef idx="3">
+            <a:schemeClr val="accent1"/>
+          </a:fillRef>
+          <a:effectRef idx="2">
+            <a:schemeClr val="accent1"/>
+          </a:effectRef>
+          <a:fontRef idx="minor">
+            <a:schemeClr val="lt1"/>
+          </a:fontRef>
+        </p:style>
+        <p:txBody>
+          <a:bodyPr rtlCol="0" anchor="ctr"/>
+          <a:lstStyle/>
+          <a:p>
+            <a:pPr algn="ctr"/>
+          </a:p>
+        </p:txBody>
+      </p:sp>
+      <p:sp>
+        <p:nvSpPr>
+          <p:cNvPr id="7" name="TextBox 6"/>
+          <p:cNvSpPr txBox="1"/>
+          <p:nvPr/>
+        </p:nvSpPr>
+        <p:spPr>
+          <a:xfrm>
+            <a:off x="822960" y="1517904"/>
+            <a:ext cx="3063240" cy="2194560"/>
+          </a:xfrm>
+          <a:prstGeom prst="rect">
+            <a:avLst/>
+          </a:prstGeom>
+          <a:noFill/>
+        </p:spPr>
+        <p:txBody>
+          <a:bodyPr wrap="square">
+            <a:spAutoFit/>
+          </a:bodyPr>
+          <a:lstStyle/>
+          <a:p>
+            <a:pPr algn="l">
+              <a:spcAft>
+                <a:spcPts val="700"/>
+              </a:spcAft>
+            </a:pPr>
+            <a:r>
+              <a:rPr sz="1500" b="1">
+                <a:solidFill>
+                  <a:srgbClr val="645B4C"/>
+                </a:solidFill>
+                <a:latin typeface="맑은 고딕"/>
+              </a:rPr>
+              <a:t>역할 분담 (2인)</a:t>
+            </a:r>
+          </a:p>
+          <a:p>
+            <a:pPr algn="l">
+              <a:spcAft>
+                <a:spcPts val="500"/>
+              </a:spcAft>
+            </a:pPr>
+            <a:r>
+              <a:rPr sz="1200" b="0">
+                <a:solidFill>
+                  <a:srgbClr val="2B2B2B"/>
+                </a:solidFill>
+                <a:latin typeface="맑은 고딕"/>
+              </a:rPr>
+              <a:t>Track A — src/ingest · src/verify</a:t>
+            </a:r>
+          </a:p>
+          <a:p>
+            <a:pPr algn="l">
+              <a:spcAft>
+                <a:spcPts val="500"/>
+              </a:spcAft>
+            </a:pPr>
+            <a:r>
+              <a:rPr sz="1200" b="0">
+                <a:solidFill>
+                  <a:srgbClr val="2B2B2B"/>
+                </a:solidFill>
+                <a:latin typeface="맑은 고딕"/>
+              </a:rPr>
+              <a:t>   법령 수집 · 판정 규칙 · 근거 조문</a:t>
+            </a:r>
+          </a:p>
+          <a:p>
+            <a:pPr algn="l">
+              <a:spcAft>
+                <a:spcPts val="500"/>
+              </a:spcAft>
+            </a:pPr>
+            <a:r>
+              <a:rPr sz="1200" b="0">
+                <a:solidFill>
+                  <a:srgbClr val="2B2B2B"/>
+                </a:solidFill>
+                <a:latin typeface="맑은 고딕"/>
+              </a:rPr>
+              <a:t>Track B — src/parser · app</a:t>
+            </a:r>
+          </a:p>
+          <a:p>
+            <a:pPr algn="l">
+              <a:spcAft>
+                <a:spcPts val="500"/>
+              </a:spcAft>
+            </a:pPr>
+            <a:r>
+              <a:rPr sz="1200" b="0">
+                <a:solidFill>
+                  <a:srgbClr val="2B2B2B"/>
+                </a:solidFill>
+                <a:latin typeface="맑은 고딕"/>
+              </a:rPr>
+              <a:t>   서류 판독 · 검증 화면</a:t>
+            </a:r>
+          </a:p>
+          <a:p>
+            <a:pPr algn="l">
+              <a:spcAft>
+                <a:spcPts val="500"/>
+              </a:spcAft>
+            </a:pPr>
+            <a:r>
+              <a:rPr sz="1200" b="0">
+                <a:solidFill>
+                  <a:srgbClr val="2B2B2B"/>
+                </a:solidFill>
+                <a:latin typeface="맑은 고딕"/>
+              </a:rPr>
+              <a:t>공용 — schemas.py (변경 시 단독 PR)</a:t>
+            </a:r>
+          </a:p>
+          <a:p>
+            <a:pPr algn="l">
+              <a:spcAft>
+                <a:spcPts val="500"/>
+              </a:spcAft>
+            </a:pPr>
+            <a:r>
+              <a:rPr sz="1200" b="0">
+                <a:solidFill>
+                  <a:srgbClr val="2B2B2B"/>
+                </a:solidFill>
+                <a:latin typeface="맑은 고딕"/>
+              </a:rPr>
+              <a:t>상대 모듈은 Issue로 요청</a:t>
+            </a:r>
+          </a:p>
+        </p:txBody>
+      </p:sp>
+      <p:sp>
+        <p:nvSpPr>
+          <p:cNvPr id="8" name="Rounded Rectangle 7"/>
+          <p:cNvSpPr/>
+          <p:nvPr/>
+        </p:nvSpPr>
+        <p:spPr>
+          <a:xfrm>
+            <a:off x="4315968" y="1371600"/>
+            <a:ext cx="3520440" cy="2468880"/>
+          </a:xfrm>
+          <a:prstGeom prst="roundRect">
+            <a:avLst/>
+          </a:prstGeom>
+          <a:solidFill>
+            <a:srgbClr val="FFFFFF"/>
+          </a:solidFill>
+          <a:ln>
+            <a:solidFill>
+              <a:srgbClr val="E6E0D4"/>
+            </a:solidFill>
+          </a:ln>
+        </p:spPr>
+        <p:style>
+          <a:lnRef idx="1">
+            <a:schemeClr val="accent1"/>
+          </a:lnRef>
+          <a:fillRef idx="3">
+            <a:schemeClr val="accent1"/>
+          </a:fillRef>
+          <a:effectRef idx="2">
+            <a:schemeClr val="accent1"/>
+          </a:effectRef>
+          <a:fontRef idx="minor">
+            <a:schemeClr val="lt1"/>
+          </a:fontRef>
+        </p:style>
+        <p:txBody>
+          <a:bodyPr rtlCol="0" anchor="ctr"/>
+          <a:lstStyle/>
+          <a:p>
+            <a:pPr algn="ctr"/>
+          </a:p>
+        </p:txBody>
+      </p:sp>
+      <p:sp>
+        <p:nvSpPr>
+          <p:cNvPr id="9" name="Rectangle 8"/>
+          <p:cNvSpPr/>
+          <p:nvPr/>
+        </p:nvSpPr>
+        <p:spPr>
+          <a:xfrm>
+            <a:off x="4315968" y="1371600"/>
+            <a:ext cx="54864" cy="2468880"/>
+          </a:xfrm>
+          <a:prstGeom prst="rect">
+            <a:avLst/>
+          </a:prstGeom>
+          <a:solidFill>
+            <a:srgbClr val="FCAF17"/>
+          </a:solidFill>
+          <a:ln>
+            <a:noFill/>
+          </a:ln>
+        </p:spPr>
+        <p:style>
+          <a:lnRef idx="1">
+            <a:schemeClr val="accent1"/>
+          </a:lnRef>
+          <a:fillRef idx="3">
+            <a:schemeClr val="accent1"/>
+          </a:fillRef>
+          <a:effectRef idx="2">
+            <a:schemeClr val="accent1"/>
+          </a:effectRef>
+          <a:fontRef idx="minor">
+            <a:schemeClr val="lt1"/>
+          </a:fontRef>
+        </p:style>
+        <p:txBody>
+          <a:bodyPr rtlCol="0" anchor="ctr"/>
+          <a:lstStyle/>
+          <a:p>
+            <a:pPr algn="ctr"/>
+          </a:p>
+        </p:txBody>
+      </p:sp>
+      <p:sp>
+        <p:nvSpPr>
+          <p:cNvPr id="10" name="TextBox 9"/>
+          <p:cNvSpPr txBox="1"/>
+          <p:nvPr/>
+        </p:nvSpPr>
+        <p:spPr>
+          <a:xfrm>
+            <a:off x="4572000" y="1517904"/>
+            <a:ext cx="3063240" cy="2194560"/>
+          </a:xfrm>
+          <a:prstGeom prst="rect">
+            <a:avLst/>
+          </a:prstGeom>
+          <a:noFill/>
+        </p:spPr>
+        <p:txBody>
+          <a:bodyPr wrap="square">
+            <a:spAutoFit/>
+          </a:bodyPr>
+          <a:lstStyle/>
+          <a:p>
+            <a:pPr algn="l">
+              <a:spcAft>
+                <a:spcPts val="700"/>
+              </a:spcAft>
+            </a:pPr>
+            <a:r>
+              <a:rPr sz="1500" b="1">
+                <a:solidFill>
+                  <a:srgbClr val="645B4C"/>
+                </a:solidFill>
+                <a:latin typeface="맑은 고딕"/>
+              </a:rPr>
+              <a:t>품질을 고정하는 방식</a:t>
+            </a:r>
+          </a:p>
+          <a:p>
+            <a:pPr algn="l">
+              <a:spcAft>
+                <a:spcPts val="500"/>
+              </a:spcAft>
+            </a:pPr>
+            <a:r>
+              <a:rPr sz="1200" b="0">
+                <a:solidFill>
+                  <a:srgbClr val="2B2B2B"/>
+                </a:solidFill>
+                <a:latin typeface="맑은 고딕"/>
+              </a:rPr>
+              <a:t>인터페이스 계약 1곳 → 병렬 개발</a:t>
+            </a:r>
+          </a:p>
+          <a:p>
+            <a:pPr algn="l">
+              <a:spcAft>
+                <a:spcPts val="500"/>
+              </a:spcAft>
+            </a:pPr>
+            <a:r>
+              <a:rPr sz="1200" b="0">
+                <a:solidFill>
+                  <a:srgbClr val="2B2B2B"/>
+                </a:solidFill>
+                <a:latin typeface="맑은 고딕"/>
+              </a:rPr>
+              <a:t>규칙 1개 = 함수 1개 · 작은 PR</a:t>
+            </a:r>
+          </a:p>
+          <a:p>
+            <a:pPr algn="l">
+              <a:spcAft>
+                <a:spcPts val="500"/>
+              </a:spcAft>
+            </a:pPr>
+            <a:r>
+              <a:rPr sz="1200" b="0">
+                <a:solidFill>
+                  <a:srgbClr val="2B2B2B"/>
+                </a:solidFill>
+                <a:latin typeface="맑은 고딕"/>
+              </a:rPr>
+              <a:t>발견한 오류는 회귀 테스트로 고정</a:t>
+            </a:r>
+          </a:p>
+          <a:p>
+            <a:pPr algn="l">
+              <a:spcAft>
+                <a:spcPts val="500"/>
+              </a:spcAft>
+            </a:pPr>
+            <a:r>
+              <a:rPr sz="1200" b="0">
+                <a:solidFill>
+                  <a:srgbClr val="2B2B2B"/>
+                </a:solidFill>
+                <a:latin typeface="맑은 고딕"/>
+              </a:rPr>
+              <a:t>   테스트 45건 → 83건</a:t>
+            </a:r>
+          </a:p>
+          <a:p>
+            <a:pPr algn="l">
+              <a:spcAft>
+                <a:spcPts val="500"/>
+              </a:spcAft>
+            </a:pPr>
+            <a:r>
+              <a:rPr sz="1200" b="0">
+                <a:solidFill>
+                  <a:srgbClr val="2B2B2B"/>
+                </a:solidFill>
+                <a:latin typeface="맑은 고딕"/>
+              </a:rPr>
+              <a:t>실물 서류 전수 감사로 회귀 확인</a:t>
+            </a:r>
+          </a:p>
+          <a:p>
+            <a:pPr algn="l">
+              <a:spcAft>
+                <a:spcPts val="500"/>
+              </a:spcAft>
+            </a:pPr>
+            <a:r>
+              <a:rPr sz="1200" b="0">
+                <a:solidFill>
+                  <a:srgbClr val="2B2B2B"/>
+                </a:solidFill>
+                <a:latin typeface="맑은 고딕"/>
+              </a:rPr>
+              <a:t>재현성: 순서·회차·모델 교차 측정</a:t>
+            </a:r>
+          </a:p>
+        </p:txBody>
+      </p:sp>
+      <p:sp>
+        <p:nvSpPr>
+          <p:cNvPr id="11" name="Rounded Rectangle 10"/>
+          <p:cNvSpPr/>
+          <p:nvPr/>
+        </p:nvSpPr>
+        <p:spPr>
+          <a:xfrm>
+            <a:off x="8065008" y="1371600"/>
+            <a:ext cx="3566160" cy="2468880"/>
+          </a:xfrm>
+          <a:prstGeom prst="roundRect">
+            <a:avLst/>
+          </a:prstGeom>
+          <a:solidFill>
+            <a:srgbClr val="FFFFFF"/>
+          </a:solidFill>
+          <a:ln>
+            <a:solidFill>
+              <a:srgbClr val="E6E0D4"/>
+            </a:solidFill>
+          </a:ln>
+        </p:spPr>
+        <p:style>
+          <a:lnRef idx="1">
+            <a:schemeClr val="accent1"/>
+          </a:lnRef>
+          <a:fillRef idx="3">
+            <a:schemeClr val="accent1"/>
+          </a:fillRef>
+          <a:effectRef idx="2">
+            <a:schemeClr val="accent1"/>
+          </a:effectRef>
+          <a:fontRef idx="minor">
+            <a:schemeClr val="lt1"/>
+          </a:fontRef>
+        </p:style>
+        <p:txBody>
+          <a:bodyPr rtlCol="0" anchor="ctr"/>
+          <a:lstStyle/>
+          <a:p>
+            <a:pPr algn="ctr"/>
+          </a:p>
+        </p:txBody>
+      </p:sp>
+      <p:sp>
+        <p:nvSpPr>
+          <p:cNvPr id="12" name="Rectangle 11"/>
+          <p:cNvSpPr/>
+          <p:nvPr/>
+        </p:nvSpPr>
+        <p:spPr>
+          <a:xfrm>
+            <a:off x="8065008" y="1371600"/>
+            <a:ext cx="54864" cy="2468880"/>
+          </a:xfrm>
+          <a:prstGeom prst="rect">
+            <a:avLst/>
+          </a:prstGeom>
+          <a:solidFill>
+            <a:srgbClr val="FCAF17"/>
+          </a:solidFill>
+          <a:ln>
+            <a:noFill/>
+          </a:ln>
+        </p:spPr>
+        <p:style>
+          <a:lnRef idx="1">
+            <a:schemeClr val="accent1"/>
+          </a:lnRef>
+          <a:fillRef idx="3">
+            <a:schemeClr val="accent1"/>
+          </a:fillRef>
+          <a:effectRef idx="2">
+            <a:schemeClr val="accent1"/>
+          </a:effectRef>
+          <a:fontRef idx="minor">
+            <a:schemeClr val="lt1"/>
+          </a:fontRef>
+        </p:style>
+        <p:txBody>
+          <a:bodyPr rtlCol="0" anchor="ctr"/>
+          <a:lstStyle/>
+          <a:p>
+            <a:pPr algn="ctr"/>
+          </a:p>
+        </p:txBody>
+      </p:sp>
+      <p:sp>
+        <p:nvSpPr>
+          <p:cNvPr id="13" name="TextBox 12"/>
+          <p:cNvSpPr txBox="1"/>
+          <p:nvPr/>
+        </p:nvSpPr>
+        <p:spPr>
+          <a:xfrm>
+            <a:off x="8321040" y="1517904"/>
+            <a:ext cx="3108960" cy="2194560"/>
+          </a:xfrm>
+          <a:prstGeom prst="rect">
+            <a:avLst/>
+          </a:prstGeom>
+          <a:noFill/>
+        </p:spPr>
+        <p:txBody>
+          <a:bodyPr wrap="square">
+            <a:spAutoFit/>
+          </a:bodyPr>
+          <a:lstStyle/>
+          <a:p>
+            <a:pPr algn="l">
+              <a:spcAft>
+                <a:spcPts val="700"/>
+              </a:spcAft>
+            </a:pPr>
+            <a:r>
+              <a:rPr sz="1500" b="1">
+                <a:solidFill>
+                  <a:srgbClr val="645B4C"/>
+                </a:solidFill>
+                <a:latin typeface="맑은 고딕"/>
+              </a:rPr>
+              <a:t>도입에 필요한 것 (KB 협조)</a:t>
+            </a:r>
+          </a:p>
+          <a:p>
+            <a:pPr algn="l">
+              <a:spcAft>
+                <a:spcPts val="500"/>
+              </a:spcAft>
+            </a:pPr>
+            <a:r>
+              <a:rPr sz="1200" b="0">
+                <a:solidFill>
+                  <a:srgbClr val="2B2B2B"/>
+                </a:solidFill>
+                <a:latin typeface="맑은 고딕"/>
+              </a:rPr>
+              <a:t>판매채널·거래이력 연계</a:t>
+            </a:r>
+          </a:p>
+          <a:p>
+            <a:pPr algn="l">
+              <a:spcAft>
+                <a:spcPts val="500"/>
+              </a:spcAft>
+            </a:pPr>
+            <a:r>
+              <a:rPr sz="1200" b="0">
+                <a:solidFill>
+                  <a:srgbClr val="2B2B2B"/>
+                </a:solidFill>
+                <a:latin typeface="맑은 고딕"/>
+              </a:rPr>
+              <a:t>   18조·20조 검사의 전제</a:t>
+            </a:r>
+          </a:p>
+          <a:p>
+            <a:pPr algn="l">
+              <a:spcAft>
+                <a:spcPts val="500"/>
+              </a:spcAft>
+            </a:pPr>
+            <a:r>
+              <a:rPr sz="1200" b="0">
+                <a:solidFill>
+                  <a:srgbClr val="2B2B2B"/>
+                </a:solidFill>
+                <a:latin typeface="맑은 고딕"/>
+              </a:rPr>
+              <a:t>상품 등급 ↔ 고객 성향 내부 매트릭스</a:t>
+            </a:r>
+          </a:p>
+          <a:p>
+            <a:pPr algn="l">
+              <a:spcAft>
+                <a:spcPts val="500"/>
+              </a:spcAft>
+            </a:pPr>
+            <a:r>
+              <a:rPr sz="1200" b="0">
+                <a:solidFill>
+                  <a:srgbClr val="2B2B2B"/>
+                </a:solidFill>
+                <a:latin typeface="맑은 고딕"/>
+              </a:rPr>
+              <a:t>사내 LLM 또는 폐쇄망 추론 환경</a:t>
+            </a:r>
+          </a:p>
+          <a:p>
+            <a:pPr algn="l">
+              <a:spcAft>
+                <a:spcPts val="500"/>
+              </a:spcAft>
+            </a:pPr>
+            <a:r>
+              <a:rPr sz="1200" b="0">
+                <a:solidFill>
+                  <a:srgbClr val="2B2B2B"/>
+                </a:solidFill>
+                <a:latin typeface="맑은 고딕"/>
+              </a:rPr>
+              <a:t>은행 고유 판매서류 양식 샘플</a:t>
+            </a:r>
+          </a:p>
+          <a:p>
+            <a:pPr algn="l">
+              <a:spcAft>
+                <a:spcPts val="500"/>
+              </a:spcAft>
+            </a:pPr>
+            <a:r>
+              <a:rPr sz="1200" b="0">
+                <a:solidFill>
+                  <a:srgbClr val="2B2B2B"/>
+                </a:solidFill>
+                <a:latin typeface="맑은 고딕"/>
+              </a:rPr>
+              <a:t>→ 없어도 현재 8개 항목은 그대로 동작</a:t>
+            </a:r>
+          </a:p>
+        </p:txBody>
+      </p:sp>
+      <p:graphicFrame>
+        <p:nvGraphicFramePr>
+          <p:cNvPr id="14" name="Table 13"/>
+          <p:cNvGraphicFramePr>
+            <a:graphicFrameLocks noGrp="1"/>
+          </p:cNvGraphicFramePr>
+          <p:nvPr/>
+        </p:nvGraphicFramePr>
+        <p:xfrm>
+          <a:off x="566928" y="4114800"/>
+          <a:ext cx="11064240" cy="1645920"/>
+        </p:xfrm>
+        <a:graphic>
+          <a:graphicData uri="http://schemas.openxmlformats.org/drawingml/2006/table">
+            <a:tbl>
+              <a:tblPr firstRow="1" bandRow="1">
+                <a:tableStyleId>{5C22544A-7EE6-4342-B048-85BDC9FD1C3A}</a:tableStyleId>
+              </a:tblPr>
+              <a:tblGrid>
+                <a:gridCol w="3017520"/>
+                <a:gridCol w="2011680"/>
+                <a:gridCol w="6035040"/>
+              </a:tblGrid>
+              <a:tr h="329184">
+                <a:tc>
+                  <a:txBody>
+                    <a:bodyPr wrap="square"/>
+                    <a:lstStyle/>
+                    <a:p>
+                      <a:pPr algn="l">
+                        <a:spcAft>
+                          <a:spcPts val="0"/>
+                        </a:spcAft>
+                      </a:pPr>
+                      <a:r>
+                        <a:rPr sz="1200" b="1">
+                          <a:solidFill>
+                            <a:srgbClr val="645B4C"/>
+                          </a:solidFill>
+                          <a:latin typeface="맑은 고딕"/>
+                        </a:rPr>
+                        <a:t>리스크</a:t>
+                      </a:r>
+                    </a:p>
+                  </a:txBody>
+                  <a:tcPr>
+                    <a:solidFill>
+                      <a:srgbClr val="FFF8DF"/>
+                    </a:solidFill>
+                  </a:tcPr>
+                </a:tc>
+                <a:tc>
+                  <a:txBody>
+                    <a:bodyPr wrap="square"/>
+                    <a:lstStyle/>
+                    <a:p>
+                      <a:pPr algn="l">
+                        <a:spcAft>
+                          <a:spcPts val="0"/>
+                        </a:spcAft>
+                      </a:pPr>
+                      <a:r>
+                        <a:rPr sz="1200" b="1">
+                          <a:solidFill>
+                            <a:srgbClr val="645B4C"/>
+                          </a:solidFill>
+                          <a:latin typeface="맑은 고딕"/>
+                        </a:rPr>
+                        <a:t>영향</a:t>
+                      </a:r>
+                    </a:p>
+                  </a:txBody>
+                  <a:tcPr>
+                    <a:solidFill>
+                      <a:srgbClr val="FFF8DF"/>
+                    </a:solidFill>
+                  </a:tcPr>
+                </a:tc>
+                <a:tc>
+                  <a:txBody>
+                    <a:bodyPr wrap="square"/>
+                    <a:lstStyle/>
+                    <a:p>
+                      <a:pPr algn="l">
+                        <a:spcAft>
+                          <a:spcPts val="0"/>
+                        </a:spcAft>
+                      </a:pPr>
+                      <a:r>
+                        <a:rPr sz="1200" b="1">
+                          <a:solidFill>
+                            <a:srgbClr val="645B4C"/>
+                          </a:solidFill>
+                          <a:latin typeface="맑은 고딕"/>
+                        </a:rPr>
+                        <a:t>대응</a:t>
+                      </a:r>
+                    </a:p>
+                  </a:txBody>
+                  <a:tcPr>
+                    <a:solidFill>
+                      <a:srgbClr val="FFF8DF"/>
+                    </a:solidFill>
+                  </a:tcPr>
+                </a:tc>
+              </a:tr>
+              <a:tr h="329184">
+                <a:tc>
+                  <a:txBody>
+                    <a:bodyPr wrap="square"/>
+                    <a:lstStyle/>
+                    <a:p>
+                      <a:pPr algn="l">
+                        <a:spcAft>
+                          <a:spcPts val="0"/>
+                        </a:spcAft>
+                      </a:pPr>
+                      <a:r>
+                        <a:rPr sz="1000" b="0">
+                          <a:solidFill>
+                            <a:srgbClr val="2B2B2B"/>
+                          </a:solidFill>
+                          <a:latin typeface="맑은 고딕"/>
+                        </a:rPr>
+                        <a:t>은행 고유 양식이 판독 학습 범위 밖</a:t>
+                      </a:r>
+                    </a:p>
+                  </a:txBody>
+                  <a:tcPr>
+                    <a:solidFill>
+                      <a:srgbClr val="FFFFFF"/>
+                    </a:solidFill>
+                  </a:tcPr>
+                </a:tc>
+                <a:tc>
+                  <a:txBody>
+                    <a:bodyPr wrap="square"/>
+                    <a:lstStyle/>
+                    <a:p>
+                      <a:pPr algn="l">
+                        <a:spcAft>
+                          <a:spcPts val="0"/>
+                        </a:spcAft>
+                      </a:pPr>
+                      <a:r>
+                        <a:rPr sz="1000" b="0">
+                          <a:solidFill>
+                            <a:srgbClr val="2B2B2B"/>
+                          </a:solidFill>
+                          <a:latin typeface="맑은 고딕"/>
+                        </a:rPr>
+                        <a:t>필드 추출 실패</a:t>
+                      </a:r>
+                    </a:p>
+                  </a:txBody>
+                  <a:tcPr>
+                    <a:solidFill>
+                      <a:srgbClr val="FFFFFF"/>
+                    </a:solidFill>
+                  </a:tcPr>
+                </a:tc>
+                <a:tc>
+                  <a:txBody>
+                    <a:bodyPr wrap="square"/>
+                    <a:lstStyle/>
+                    <a:p>
+                      <a:pPr algn="l">
+                        <a:spcAft>
+                          <a:spcPts val="0"/>
+                        </a:spcAft>
+                      </a:pPr>
+                      <a:r>
+                        <a:rPr sz="1000" b="0">
+                          <a:solidFill>
+                            <a:srgbClr val="2B2B2B"/>
+                          </a:solidFill>
+                          <a:latin typeface="맑은 고딕"/>
+                        </a:rPr>
+                        <a:t>문서유형 스키마 추가로 흡수 · 실패해도 '미확인'으로 드러나 오판이 되지 않음</a:t>
+                      </a:r>
+                    </a:p>
+                  </a:txBody>
+                  <a:tcPr>
+                    <a:solidFill>
+                      <a:srgbClr val="FFFFFF"/>
+                    </a:solidFill>
+                  </a:tcPr>
+                </a:tc>
+              </a:tr>
+              <a:tr h="329184">
+                <a:tc>
+                  <a:txBody>
+                    <a:bodyPr wrap="square"/>
+                    <a:lstStyle/>
+                    <a:p>
+                      <a:pPr algn="l">
+                        <a:spcAft>
+                          <a:spcPts val="0"/>
+                        </a:spcAft>
+                      </a:pPr>
+                      <a:r>
+                        <a:rPr sz="1000" b="0">
+                          <a:solidFill>
+                            <a:srgbClr val="2B2B2B"/>
+                          </a:solidFill>
+                          <a:latin typeface="맑은 고딕"/>
+                        </a:rPr>
+                        <a:t>사내 LLM 으로 교체 시 판독 품질 차이</a:t>
+                      </a:r>
+                    </a:p>
+                  </a:txBody>
+                  <a:tcPr>
+                    <a:solidFill>
+                      <a:srgbClr val="FFFFFF"/>
+                    </a:solidFill>
+                  </a:tcPr>
+                </a:tc>
+                <a:tc>
+                  <a:txBody>
+                    <a:bodyPr wrap="square"/>
+                    <a:lstStyle/>
+                    <a:p>
+                      <a:pPr algn="l">
+                        <a:spcAft>
+                          <a:spcPts val="0"/>
+                        </a:spcAft>
+                      </a:pPr>
+                      <a:r>
+                        <a:rPr sz="1000" b="0">
+                          <a:solidFill>
+                            <a:srgbClr val="2B2B2B"/>
+                          </a:solidFill>
+                          <a:latin typeface="맑은 고딕"/>
+                        </a:rPr>
+                        <a:t>추출 정확도 저하</a:t>
+                      </a:r>
+                    </a:p>
+                  </a:txBody>
+                  <a:tcPr>
+                    <a:solidFill>
+                      <a:srgbClr val="FFFFFF"/>
+                    </a:solidFill>
+                  </a:tcPr>
+                </a:tc>
+                <a:tc>
+                  <a:txBody>
+                    <a:bodyPr wrap="square"/>
+                    <a:lstStyle/>
+                    <a:p>
+                      <a:pPr algn="l">
+                        <a:spcAft>
+                          <a:spcPts val="0"/>
+                        </a:spcAft>
+                      </a:pPr>
+                      <a:r>
+                        <a:rPr sz="1000" b="0">
+                          <a:solidFill>
+                            <a:srgbClr val="2B2B2B"/>
+                          </a:solidFill>
+                          <a:latin typeface="맑은 고딕"/>
+                        </a:rPr>
+                        <a:t>모델 교체 가능한 구조 · haiku↔sonnet 교차 검증에서 판정 불일치 0건 (모델 의존 낮음)</a:t>
+                      </a:r>
+                    </a:p>
+                  </a:txBody>
+                  <a:tcPr>
+                    <a:solidFill>
+                      <a:srgbClr val="FFFFFF"/>
+                    </a:solidFill>
+                  </a:tcPr>
+                </a:tc>
+              </a:tr>
+              <a:tr h="329184">
+                <a:tc>
+                  <a:txBody>
+                    <a:bodyPr wrap="square"/>
+                    <a:lstStyle/>
+                    <a:p>
+                      <a:pPr algn="l">
+                        <a:spcAft>
+                          <a:spcPts val="0"/>
+                        </a:spcAft>
+                      </a:pPr>
+                      <a:r>
+                        <a:rPr sz="1000" b="0">
+                          <a:solidFill>
+                            <a:srgbClr val="2B2B2B"/>
+                          </a:solidFill>
+                          <a:latin typeface="맑은 고딕"/>
+                        </a:rPr>
+                        <a:t>법령·감독규정 개정</a:t>
+                      </a:r>
+                    </a:p>
+                  </a:txBody>
+                  <a:tcPr>
+                    <a:solidFill>
+                      <a:srgbClr val="FFFFFF"/>
+                    </a:solidFill>
+                  </a:tcPr>
+                </a:tc>
+                <a:tc>
+                  <a:txBody>
+                    <a:bodyPr wrap="square"/>
+                    <a:lstStyle/>
+                    <a:p>
+                      <a:pPr algn="l">
+                        <a:spcAft>
+                          <a:spcPts val="0"/>
+                        </a:spcAft>
+                      </a:pPr>
+                      <a:r>
+                        <a:rPr sz="1000" b="0">
+                          <a:solidFill>
+                            <a:srgbClr val="2B2B2B"/>
+                          </a:solidFill>
+                          <a:latin typeface="맑은 고딕"/>
+                        </a:rPr>
+                        <a:t>근거 조문 무효화</a:t>
+                      </a:r>
+                    </a:p>
+                  </a:txBody>
+                  <a:tcPr>
+                    <a:solidFill>
+                      <a:srgbClr val="FFFFFF"/>
+                    </a:solidFill>
+                  </a:tcPr>
+                </a:tc>
+                <a:tc>
+                  <a:txBody>
+                    <a:bodyPr wrap="square"/>
+                    <a:lstStyle/>
+                    <a:p>
+                      <a:pPr algn="l">
+                        <a:spcAft>
+                          <a:spcPts val="0"/>
+                        </a:spcAft>
+                      </a:pPr>
+                      <a:r>
+                        <a:rPr sz="1000" b="0">
+                          <a:solidFill>
+                            <a:srgbClr val="2B2B2B"/>
+                          </a:solidFill>
+                          <a:latin typeface="맑은 고딕"/>
+                        </a:rPr>
+                        <a:t>국가법령정보 API 재수집 · 규칙별 조문을 확정 선언해 두어 영향 범위를 즉시 특정</a:t>
+                      </a:r>
+                    </a:p>
+                  </a:txBody>
+                  <a:tcPr>
+                    <a:solidFill>
+                      <a:srgbClr val="FFFFFF"/>
+                    </a:solidFill>
+                  </a:tcPr>
+                </a:tc>
+              </a:tr>
+              <a:tr h="329184">
+                <a:tc>
+                  <a:txBody>
+                    <a:bodyPr wrap="square"/>
+                    <a:lstStyle/>
+                    <a:p>
+                      <a:pPr algn="l">
+                        <a:spcAft>
+                          <a:spcPts val="0"/>
+                        </a:spcAft>
+                      </a:pPr>
+                      <a:r>
+                        <a:rPr sz="1000" b="0">
+                          <a:solidFill>
+                            <a:srgbClr val="2B2B2B"/>
+                          </a:solidFill>
+                          <a:latin typeface="맑은 고딕"/>
+                        </a:rPr>
+                        <a:t>개인정보 우려로 도입 지연</a:t>
+                      </a:r>
+                    </a:p>
+                  </a:txBody>
+                  <a:tcPr>
+                    <a:solidFill>
+                      <a:srgbClr val="FFFFFF"/>
+                    </a:solidFill>
+                  </a:tcPr>
+                </a:tc>
+                <a:tc>
+                  <a:txBody>
+                    <a:bodyPr wrap="square"/>
+                    <a:lstStyle/>
+                    <a:p>
+                      <a:pPr algn="l">
+                        <a:spcAft>
+                          <a:spcPts val="0"/>
+                        </a:spcAft>
+                      </a:pPr>
+                      <a:r>
+                        <a:rPr sz="1000" b="0">
+                          <a:solidFill>
+                            <a:srgbClr val="2B2B2B"/>
+                          </a:solidFill>
+                          <a:latin typeface="맑은 고딕"/>
+                        </a:rPr>
+                        <a:t>현장 적용 차단</a:t>
+                      </a:r>
+                    </a:p>
+                  </a:txBody>
+                  <a:tcPr>
+                    <a:solidFill>
+                      <a:srgbClr val="FFFFFF"/>
+                    </a:solidFill>
+                  </a:tcPr>
+                </a:tc>
+                <a:tc>
+                  <a:txBody>
+                    <a:bodyPr wrap="square"/>
+                    <a:lstStyle/>
+                    <a:p>
+                      <a:pPr algn="l">
+                        <a:spcAft>
+                          <a:spcPts val="0"/>
+                        </a:spcAft>
+                      </a:pPr>
+                      <a:r>
+                        <a:rPr sz="1000" b="0">
+                          <a:solidFill>
+                            <a:srgbClr val="2B2B2B"/>
+                          </a:solidFill>
+                          <a:latin typeface="맑은 고딕"/>
+                        </a:rPr>
+                        <a:t>생년월일·계좌번호 미추출 · 원본 미저장 · 캐시 삭제 제공 · 마스킹 후 재현성 검증</a:t>
+                      </a:r>
+                    </a:p>
+                  </a:txBody>
+                  <a:tcPr>
+                    <a:solidFill>
+                      <a:srgbClr val="FFFFFF"/>
+                    </a:solidFill>
+                  </a:tcPr>
+                </a:tc>
+              </a:tr>
+            </a:tbl>
+          </a:graphicData>
+        </a:graphic>
+      </p:graphicFrame>
+    </p:spTree>
+  </p:cSld>
+  <p:clrMapOvr>
+    <a:masterClrMapping/>
+  </p:clrMapOvr>
+</p:sld>
+</file>
+
+<file path=ppt/slides/slide21.xml><?xml version="1.0" encoding="utf-8"?>
 <p:sld xmlns:a="http://schemas.openxmlformats.org/drawingml/2006/main" xmlns:p="http://schemas.openxmlformats.org/presentationml/2006/main" xmlns:r="http://schemas.openxmlformats.org/officeDocument/2006/relationships">
   <p:cSld>
     <p:spTree>
@@ -16332,7 +17622,7 @@
 </p:sld>
 </file>
 
-<file path=ppt/slides/slide21.xml><?xml version="1.0" encoding="utf-8"?>
+<file path=ppt/slides/slide22.xml><?xml version="1.0" encoding="utf-8"?>
 <p:sld xmlns:a="http://schemas.openxmlformats.org/drawingml/2006/main" xmlns:p="http://schemas.openxmlformats.org/presentationml/2006/main" xmlns:r="http://schemas.openxmlformats.org/officeDocument/2006/relationships">
   <p:cSld>
     <p:spTree>

--- a/docs/기술설명서_초안.pptx
+++ b/docs/기술설명서_초안.pptx
@@ -23134,7 +23134,7 @@
                 </a:solidFill>
                 <a:latin typeface="맑은 고딕"/>
               </a:rPr>
-              <a:t>· 건수가 쌓이면 육안 대조에서 누락이 생깁니다   · 컴플라이언스는 표본만 봅니다 — 전건 확인이 불가능합니다   · 문제를 발견해도 이미 계약이 끝난 뒤입니다</a:t>
+              <a:t>· 건수가 쌓이면 육안 대조에서 누락이 생깁니다   · 컴플라이언스는 표본만 봅니다   · 발견해도 이미 계약이 끝난 뒤입니다</a:t>
             </a:r>
           </a:p>
         </p:txBody>
@@ -23606,7 +23606,7 @@
                 </a:solidFill>
                 <a:latin typeface="맑은 고딕"/>
               </a:rPr>
-              <a:t>사람이 못 보던 건까지 기계가 일관되게 확인</a:t>
+              <a:t>사람이 놓치던 건까지 일관되게 확인</a:t>
             </a:r>
           </a:p>
           <a:p>

--- a/docs/기술설명서_초안.pptx
+++ b/docs/기술설명서_초안.pptx
@@ -27,6 +27,7 @@
     <p:sldId id="275" r:id="rId26"/>
     <p:sldId id="276" r:id="rId27"/>
     <p:sldId id="277" r:id="rId28"/>
+    <p:sldId id="278" r:id="rId29"/>
   </p:sldIdLst>
   <p:sldSz cx="12191695" cy="6858000" type="screen4x3"/>
   <p:notesSz cx="6858000" cy="9144000"/>
@@ -8879,7 +8880,7 @@
                 </a:solidFill>
                 <a:latin typeface="맑은 고딕"/>
               </a:rPr>
-              <a:t>검증 결과</a:t>
+              <a:t>서류에 없는 맥락 — 대면·비대면과 고령투자자</a:t>
             </a:r>
           </a:p>
           <a:p>
@@ -8895,7 +8896,7 @@
                 </a:solidFill>
                 <a:latin typeface="맑은 고딕"/>
               </a:rPr>
-              <a:t>실제 금융사 서류로 검증했고, 회귀 테스트로 고정했다</a:t>
+              <a:t>같은 서류 구성이라도 판매 채널과 고객 조건에 따라 판정이 달라야 한다</a:t>
             </a:r>
           </a:p>
         </p:txBody>
@@ -8953,6 +8954,1151 @@
                 </a:solidFill>
                 <a:latin typeface="맑은 고딕"/>
               </a:rPr>
+              <a:t>창의성·효과</a:t>
+            </a:r>
+          </a:p>
+        </p:txBody>
+      </p:sp>
+      <p:graphicFrame>
+        <p:nvGraphicFramePr>
+          <p:cNvPr id="5" name="Table 4"/>
+          <p:cNvGraphicFramePr>
+            <a:graphicFrameLocks noGrp="1"/>
+          </p:cNvGraphicFramePr>
+          <p:nvPr/>
+        </p:nvGraphicFramePr>
+        <p:xfrm>
+          <a:off x="566928" y="1371600"/>
+          <a:ext cx="11064240" cy="1316736"/>
+        </p:xfrm>
+        <a:graphic>
+          <a:graphicData uri="http://schemas.openxmlformats.org/drawingml/2006/table">
+            <a:tbl>
+              <a:tblPr firstRow="1" bandRow="1">
+                <a:tableStyleId>{5C22544A-7EE6-4342-B048-85BDC9FD1C3A}</a:tableStyleId>
+              </a:tblPr>
+              <a:tblGrid>
+                <a:gridCol w="2103120"/>
+                <a:gridCol w="4206240"/>
+                <a:gridCol w="4754880"/>
+              </a:tblGrid>
+              <a:tr h="329184">
+                <a:tc>
+                  <a:txBody>
+                    <a:bodyPr wrap="square"/>
+                    <a:lstStyle/>
+                    <a:p>
+                      <a:pPr algn="l">
+                        <a:spcAft>
+                          <a:spcPts val="0"/>
+                        </a:spcAft>
+                      </a:pPr>
+                      <a:r>
+                        <a:rPr sz="1200" b="1">
+                          <a:solidFill>
+                            <a:srgbClr val="645B4C"/>
+                          </a:solidFill>
+                          <a:latin typeface="맑은 고딕"/>
+                        </a:rPr>
+                        <a:t>구분</a:t>
+                      </a:r>
+                    </a:p>
+                  </a:txBody>
+                  <a:tcPr>
+                    <a:solidFill>
+                      <a:srgbClr val="FFF8DF"/>
+                    </a:solidFill>
+                  </a:tcPr>
+                </a:tc>
+                <a:tc>
+                  <a:txBody>
+                    <a:bodyPr wrap="square"/>
+                    <a:lstStyle/>
+                    <a:p>
+                      <a:pPr algn="l">
+                        <a:spcAft>
+                          <a:spcPts val="0"/>
+                        </a:spcAft>
+                      </a:pPr>
+                      <a:r>
+                        <a:rPr sz="1200" b="1">
+                          <a:solidFill>
+                            <a:srgbClr val="645B4C"/>
+                          </a:solidFill>
+                          <a:latin typeface="맑은 고딕"/>
+                        </a:rPr>
+                        <a:t>대면 (영업점 창구)</a:t>
+                      </a:r>
+                    </a:p>
+                  </a:txBody>
+                  <a:tcPr>
+                    <a:solidFill>
+                      <a:srgbClr val="FFF8DF"/>
+                    </a:solidFill>
+                  </a:tcPr>
+                </a:tc>
+                <a:tc>
+                  <a:txBody>
+                    <a:bodyPr wrap="square"/>
+                    <a:lstStyle/>
+                    <a:p>
+                      <a:pPr algn="l">
+                        <a:spcAft>
+                          <a:spcPts val="0"/>
+                        </a:spcAft>
+                      </a:pPr>
+                      <a:r>
+                        <a:rPr sz="1200" b="1">
+                          <a:solidFill>
+                            <a:srgbClr val="645B4C"/>
+                          </a:solidFill>
+                          <a:latin typeface="맑은 고딕"/>
+                        </a:rPr>
+                        <a:t>비대면 (모바일·인터넷)</a:t>
+                      </a:r>
+                    </a:p>
+                  </a:txBody>
+                  <a:tcPr>
+                    <a:solidFill>
+                      <a:srgbClr val="FFF8DF"/>
+                    </a:solidFill>
+                  </a:tcPr>
+                </a:tc>
+              </a:tr>
+              <a:tr h="329184">
+                <a:tc>
+                  <a:txBody>
+                    <a:bodyPr wrap="square"/>
+                    <a:lstStyle/>
+                    <a:p>
+                      <a:pPr algn="l">
+                        <a:spcAft>
+                          <a:spcPts val="0"/>
+                        </a:spcAft>
+                      </a:pPr>
+                      <a:r>
+                        <a:rPr sz="1100" b="0">
+                          <a:solidFill>
+                            <a:srgbClr val="2B2B2B"/>
+                          </a:solidFill>
+                          <a:latin typeface="맑은 고딕"/>
+                        </a:rPr>
+                        <a:t>설명확인서</a:t>
+                      </a:r>
+                    </a:p>
+                  </a:txBody>
+                  <a:tcPr>
+                    <a:solidFill>
+                      <a:srgbClr val="FFFFFF"/>
+                    </a:solidFill>
+                  </a:tcPr>
+                </a:tc>
+                <a:tc>
+                  <a:txBody>
+                    <a:bodyPr wrap="square"/>
+                    <a:lstStyle/>
+                    <a:p>
+                      <a:pPr algn="l">
+                        <a:spcAft>
+                          <a:spcPts val="0"/>
+                        </a:spcAft>
+                      </a:pPr>
+                      <a:r>
+                        <a:rPr sz="1100" b="0">
+                          <a:solidFill>
+                            <a:srgbClr val="2B2B2B"/>
+                          </a:solidFill>
+                          <a:latin typeface="맑은 고딕"/>
+                        </a:rPr>
+                        <a:t>별도 서류로 받아 보관한다</a:t>
+                      </a:r>
+                    </a:p>
+                  </a:txBody>
+                  <a:tcPr>
+                    <a:solidFill>
+                      <a:srgbClr val="FFFFFF"/>
+                    </a:solidFill>
+                  </a:tcPr>
+                </a:tc>
+                <a:tc>
+                  <a:txBody>
+                    <a:bodyPr wrap="square"/>
+                    <a:lstStyle/>
+                    <a:p>
+                      <a:pPr algn="l">
+                        <a:spcAft>
+                          <a:spcPts val="0"/>
+                        </a:spcAft>
+                      </a:pPr>
+                      <a:r>
+                        <a:rPr sz="1100" b="0">
+                          <a:solidFill>
+                            <a:srgbClr val="2B2B2B"/>
+                          </a:solidFill>
+                          <a:latin typeface="맑은 고딕"/>
+                        </a:rPr>
+                        <a:t>계약서의 확인 문구 + 전자서명으로 통합된다</a:t>
+                      </a:r>
+                    </a:p>
+                  </a:txBody>
+                  <a:tcPr>
+                    <a:solidFill>
+                      <a:srgbClr val="FFFFFF"/>
+                    </a:solidFill>
+                  </a:tcPr>
+                </a:tc>
+              </a:tr>
+              <a:tr h="329184">
+                <a:tc>
+                  <a:txBody>
+                    <a:bodyPr wrap="square"/>
+                    <a:lstStyle/>
+                    <a:p>
+                      <a:pPr algn="l">
+                        <a:spcAft>
+                          <a:spcPts val="0"/>
+                        </a:spcAft>
+                      </a:pPr>
+                      <a:r>
+                        <a:rPr sz="1100" b="0">
+                          <a:solidFill>
+                            <a:srgbClr val="2B2B2B"/>
+                          </a:solidFill>
+                          <a:latin typeface="맑은 고딕"/>
+                        </a:rPr>
+                        <a:t>그 서류가 없으면</a:t>
+                      </a:r>
+                    </a:p>
+                  </a:txBody>
+                  <a:tcPr>
+                    <a:solidFill>
+                      <a:srgbClr val="FFFFFF"/>
+                    </a:solidFill>
+                  </a:tcPr>
+                </a:tc>
+                <a:tc>
+                  <a:txBody>
+                    <a:bodyPr wrap="square"/>
+                    <a:lstStyle/>
+                    <a:p>
+                      <a:pPr algn="l">
+                        <a:spcAft>
+                          <a:spcPts val="0"/>
+                        </a:spcAft>
+                      </a:pPr>
+                      <a:r>
+                        <a:rPr sz="1100" b="0">
+                          <a:solidFill>
+                            <a:srgbClr val="2B2B2B"/>
+                          </a:solidFill>
+                          <a:latin typeface="맑은 고딕"/>
+                        </a:rPr>
+                        <a:t>DOC-001 누락 — 영업점에서 실제로 빠뜨린 것</a:t>
+                      </a:r>
+                    </a:p>
+                  </a:txBody>
+                  <a:tcPr>
+                    <a:solidFill>
+                      <a:srgbClr val="FFFFFF"/>
+                    </a:solidFill>
+                  </a:tcPr>
+                </a:tc>
+                <a:tc>
+                  <a:txBody>
+                    <a:bodyPr wrap="square"/>
+                    <a:lstStyle/>
+                    <a:p>
+                      <a:pPr algn="l">
+                        <a:spcAft>
+                          <a:spcPts val="0"/>
+                        </a:spcAft>
+                      </a:pPr>
+                      <a:r>
+                        <a:rPr sz="1100" b="0">
+                          <a:solidFill>
+                            <a:srgbClr val="2B2B2B"/>
+                          </a:solidFill>
+                          <a:latin typeface="맑은 고딕"/>
+                        </a:rPr>
+                        <a:t>DOC-001 주의 — 정상 형태. 전자문서함 보관 기록 확인 안내</a:t>
+                      </a:r>
+                    </a:p>
+                  </a:txBody>
+                  <a:tcPr>
+                    <a:solidFill>
+                      <a:srgbClr val="FFFFFF"/>
+                    </a:solidFill>
+                  </a:tcPr>
+                </a:tc>
+              </a:tr>
+              <a:tr h="329184">
+                <a:tc>
+                  <a:txBody>
+                    <a:bodyPr wrap="square"/>
+                    <a:lstStyle/>
+                    <a:p>
+                      <a:pPr algn="l">
+                        <a:spcAft>
+                          <a:spcPts val="0"/>
+                        </a:spcAft>
+                      </a:pPr>
+                      <a:r>
+                        <a:rPr sz="1100" b="0">
+                          <a:solidFill>
+                            <a:srgbClr val="2B2B2B"/>
+                          </a:solidFill>
+                          <a:latin typeface="맑은 고딕"/>
+                        </a:rPr>
+                        <a:t>같은 근거 조문</a:t>
+                      </a:r>
+                    </a:p>
+                  </a:txBody>
+                  <a:tcPr>
+                    <a:solidFill>
+                      <a:srgbClr val="FFFFFF"/>
+                    </a:solidFill>
+                  </a:tcPr>
+                </a:tc>
+                <a:tc>
+                  <a:txBody>
+                    <a:bodyPr wrap="square"/>
+                    <a:lstStyle/>
+                    <a:p>
+                      <a:pPr algn="l">
+                        <a:spcAft>
+                          <a:spcPts val="0"/>
+                        </a:spcAft>
+                      </a:pPr>
+                      <a:r>
+                        <a:rPr sz="1100" b="0">
+                          <a:solidFill>
+                            <a:srgbClr val="2B2B2B"/>
+                          </a:solidFill>
+                          <a:latin typeface="맑은 고딕"/>
+                        </a:rPr>
+                        <a:t>금소법 23조 계약서류 제공 의무</a:t>
+                      </a:r>
+                    </a:p>
+                  </a:txBody>
+                  <a:tcPr>
+                    <a:solidFill>
+                      <a:srgbClr val="FFFFFF"/>
+                    </a:solidFill>
+                  </a:tcPr>
+                </a:tc>
+                <a:tc>
+                  <a:txBody>
+                    <a:bodyPr wrap="square"/>
+                    <a:lstStyle/>
+                    <a:p>
+                      <a:pPr algn="l">
+                        <a:spcAft>
+                          <a:spcPts val="0"/>
+                        </a:spcAft>
+                      </a:pPr>
+                      <a:r>
+                        <a:rPr sz="1100" b="0">
+                          <a:solidFill>
+                            <a:srgbClr val="2B2B2B"/>
+                          </a:solidFill>
+                          <a:latin typeface="맑은 고딕"/>
+                        </a:rPr>
+                        <a:t>금소법 23조 계약서류 제공 의무</a:t>
+                      </a:r>
+                    </a:p>
+                  </a:txBody>
+                  <a:tcPr>
+                    <a:solidFill>
+                      <a:srgbClr val="FFFFFF"/>
+                    </a:solidFill>
+                  </a:tcPr>
+                </a:tc>
+              </a:tr>
+            </a:tbl>
+          </a:graphicData>
+        </a:graphic>
+      </p:graphicFrame>
+      <p:sp>
+        <p:nvSpPr>
+          <p:cNvPr id="6" name="Rounded Rectangle 5"/>
+          <p:cNvSpPr/>
+          <p:nvPr/>
+        </p:nvSpPr>
+        <p:spPr>
+          <a:xfrm>
+            <a:off x="566928" y="3108960"/>
+            <a:ext cx="3520440" cy="1874519"/>
+          </a:xfrm>
+          <a:prstGeom prst="roundRect">
+            <a:avLst/>
+          </a:prstGeom>
+          <a:solidFill>
+            <a:srgbClr val="FFFFFF"/>
+          </a:solidFill>
+          <a:ln>
+            <a:solidFill>
+              <a:srgbClr val="E6E0D4"/>
+            </a:solidFill>
+          </a:ln>
+        </p:spPr>
+        <p:style>
+          <a:lnRef idx="1">
+            <a:schemeClr val="accent1"/>
+          </a:lnRef>
+          <a:fillRef idx="3">
+            <a:schemeClr val="accent1"/>
+          </a:fillRef>
+          <a:effectRef idx="2">
+            <a:schemeClr val="accent1"/>
+          </a:effectRef>
+          <a:fontRef idx="minor">
+            <a:schemeClr val="lt1"/>
+          </a:fontRef>
+        </p:style>
+        <p:txBody>
+          <a:bodyPr rtlCol="0" anchor="ctr"/>
+          <a:lstStyle/>
+          <a:p>
+            <a:pPr algn="ctr"/>
+          </a:p>
+        </p:txBody>
+      </p:sp>
+      <p:sp>
+        <p:nvSpPr>
+          <p:cNvPr id="7" name="Rectangle 6"/>
+          <p:cNvSpPr/>
+          <p:nvPr/>
+        </p:nvSpPr>
+        <p:spPr>
+          <a:xfrm>
+            <a:off x="566928" y="3108960"/>
+            <a:ext cx="54864" cy="1874519"/>
+          </a:xfrm>
+          <a:prstGeom prst="rect">
+            <a:avLst/>
+          </a:prstGeom>
+          <a:solidFill>
+            <a:srgbClr val="FCAF17"/>
+          </a:solidFill>
+          <a:ln>
+            <a:noFill/>
+          </a:ln>
+        </p:spPr>
+        <p:style>
+          <a:lnRef idx="1">
+            <a:schemeClr val="accent1"/>
+          </a:lnRef>
+          <a:fillRef idx="3">
+            <a:schemeClr val="accent1"/>
+          </a:fillRef>
+          <a:effectRef idx="2">
+            <a:schemeClr val="accent1"/>
+          </a:effectRef>
+          <a:fontRef idx="minor">
+            <a:schemeClr val="lt1"/>
+          </a:fontRef>
+        </p:style>
+        <p:txBody>
+          <a:bodyPr rtlCol="0" anchor="ctr"/>
+          <a:lstStyle/>
+          <a:p>
+            <a:pPr algn="ctr"/>
+          </a:p>
+        </p:txBody>
+      </p:sp>
+      <p:sp>
+        <p:nvSpPr>
+          <p:cNvPr id="8" name="TextBox 7"/>
+          <p:cNvSpPr txBox="1"/>
+          <p:nvPr/>
+        </p:nvSpPr>
+        <p:spPr>
+          <a:xfrm>
+            <a:off x="822960" y="3255264"/>
+            <a:ext cx="3063240" cy="1600199"/>
+          </a:xfrm>
+          <a:prstGeom prst="rect">
+            <a:avLst/>
+          </a:prstGeom>
+          <a:noFill/>
+        </p:spPr>
+        <p:txBody>
+          <a:bodyPr wrap="square">
+            <a:spAutoFit/>
+          </a:bodyPr>
+          <a:lstStyle/>
+          <a:p>
+            <a:pPr algn="l">
+              <a:spcAft>
+                <a:spcPts val="700"/>
+              </a:spcAft>
+            </a:pPr>
+            <a:r>
+              <a:rPr sz="1500" b="1">
+                <a:solidFill>
+                  <a:srgbClr val="645B4C"/>
+                </a:solidFill>
+                <a:latin typeface="맑은 고딕"/>
+              </a:rPr>
+              <a:t>채널은 서류에 없다</a:t>
+            </a:r>
+          </a:p>
+          <a:p>
+            <a:pPr algn="l">
+              <a:spcAft>
+                <a:spcPts val="500"/>
+              </a:spcAft>
+            </a:pPr>
+            <a:r>
+              <a:rPr sz="1200" b="0">
+                <a:solidFill>
+                  <a:srgbClr val="2B2B2B"/>
+                </a:solidFill>
+                <a:latin typeface="맑은 고딕"/>
+              </a:rPr>
+              <a:t>'비대면'이라 적힌 서류는 없습니다.</a:t>
+            </a:r>
+          </a:p>
+          <a:p>
+            <a:pPr algn="l">
+              <a:spcAft>
+                <a:spcPts val="500"/>
+              </a:spcAft>
+            </a:pPr>
+            <a:r>
+              <a:rPr sz="1200" b="0">
+                <a:solidFill>
+                  <a:srgbClr val="2B2B2B"/>
+                </a:solidFill>
+                <a:latin typeface="맑은 고딕"/>
+              </a:rPr>
+              <a:t>없는 것을 추측하면 곧 환각입니다.</a:t>
+            </a:r>
+          </a:p>
+          <a:p>
+            <a:pPr algn="l">
+              <a:spcAft>
+                <a:spcPts val="500"/>
+              </a:spcAft>
+            </a:pPr>
+            <a:r>
+              <a:rPr sz="1200" b="0">
+                <a:solidFill>
+                  <a:srgbClr val="2B2B2B"/>
+                </a:solidFill>
+                <a:latin typeface="맑은 고딕"/>
+              </a:rPr>
+              <a:t>담당자가 건마다 체크로 표시하고,</a:t>
+            </a:r>
+          </a:p>
+          <a:p>
+            <a:pPr algn="l">
+              <a:spcAft>
+                <a:spcPts val="500"/>
+              </a:spcAft>
+            </a:pPr>
+            <a:r>
+              <a:rPr sz="1200" b="0">
+                <a:solidFill>
+                  <a:srgbClr val="2B2B2B"/>
+                </a:solidFill>
+                <a:latin typeface="맑은 고딕"/>
+              </a:rPr>
+              <a:t>규칙은 그 조건으로 판정합니다.</a:t>
+            </a:r>
+          </a:p>
+        </p:txBody>
+      </p:sp>
+      <p:sp>
+        <p:nvSpPr>
+          <p:cNvPr id="9" name="Rounded Rectangle 8"/>
+          <p:cNvSpPr/>
+          <p:nvPr/>
+        </p:nvSpPr>
+        <p:spPr>
+          <a:xfrm>
+            <a:off x="4315968" y="3108960"/>
+            <a:ext cx="3520440" cy="1874519"/>
+          </a:xfrm>
+          <a:prstGeom prst="roundRect">
+            <a:avLst/>
+          </a:prstGeom>
+          <a:solidFill>
+            <a:srgbClr val="FFFFFF"/>
+          </a:solidFill>
+          <a:ln>
+            <a:solidFill>
+              <a:srgbClr val="E6E0D4"/>
+            </a:solidFill>
+          </a:ln>
+        </p:spPr>
+        <p:style>
+          <a:lnRef idx="1">
+            <a:schemeClr val="accent1"/>
+          </a:lnRef>
+          <a:fillRef idx="3">
+            <a:schemeClr val="accent1"/>
+          </a:fillRef>
+          <a:effectRef idx="2">
+            <a:schemeClr val="accent1"/>
+          </a:effectRef>
+          <a:fontRef idx="minor">
+            <a:schemeClr val="lt1"/>
+          </a:fontRef>
+        </p:style>
+        <p:txBody>
+          <a:bodyPr rtlCol="0" anchor="ctr"/>
+          <a:lstStyle/>
+          <a:p>
+            <a:pPr algn="ctr"/>
+          </a:p>
+        </p:txBody>
+      </p:sp>
+      <p:sp>
+        <p:nvSpPr>
+          <p:cNvPr id="10" name="Rectangle 9"/>
+          <p:cNvSpPr/>
+          <p:nvPr/>
+        </p:nvSpPr>
+        <p:spPr>
+          <a:xfrm>
+            <a:off x="4315968" y="3108960"/>
+            <a:ext cx="54864" cy="1874519"/>
+          </a:xfrm>
+          <a:prstGeom prst="rect">
+            <a:avLst/>
+          </a:prstGeom>
+          <a:solidFill>
+            <a:srgbClr val="2E7D32"/>
+          </a:solidFill>
+          <a:ln>
+            <a:noFill/>
+          </a:ln>
+        </p:spPr>
+        <p:style>
+          <a:lnRef idx="1">
+            <a:schemeClr val="accent1"/>
+          </a:lnRef>
+          <a:fillRef idx="3">
+            <a:schemeClr val="accent1"/>
+          </a:fillRef>
+          <a:effectRef idx="2">
+            <a:schemeClr val="accent1"/>
+          </a:effectRef>
+          <a:fontRef idx="minor">
+            <a:schemeClr val="lt1"/>
+          </a:fontRef>
+        </p:style>
+        <p:txBody>
+          <a:bodyPr rtlCol="0" anchor="ctr"/>
+          <a:lstStyle/>
+          <a:p>
+            <a:pPr algn="ctr"/>
+          </a:p>
+        </p:txBody>
+      </p:sp>
+      <p:sp>
+        <p:nvSpPr>
+          <p:cNvPr id="11" name="TextBox 10"/>
+          <p:cNvSpPr txBox="1"/>
+          <p:nvPr/>
+        </p:nvSpPr>
+        <p:spPr>
+          <a:xfrm>
+            <a:off x="4572000" y="3255264"/>
+            <a:ext cx="3063240" cy="1600199"/>
+          </a:xfrm>
+          <a:prstGeom prst="rect">
+            <a:avLst/>
+          </a:prstGeom>
+          <a:noFill/>
+        </p:spPr>
+        <p:txBody>
+          <a:bodyPr wrap="square">
+            <a:spAutoFit/>
+          </a:bodyPr>
+          <a:lstStyle/>
+          <a:p>
+            <a:pPr algn="l">
+              <a:spcAft>
+                <a:spcPts val="700"/>
+              </a:spcAft>
+            </a:pPr>
+            <a:r>
+              <a:rPr sz="1500" b="1">
+                <a:solidFill>
+                  <a:srgbClr val="645B4C"/>
+                </a:solidFill>
+                <a:latin typeface="맑은 고딕"/>
+              </a:rPr>
+              <a:t>체크만으로 통과시키지 않는다</a:t>
+            </a:r>
+          </a:p>
+          <a:p>
+            <a:pPr algn="l">
+              <a:spcAft>
+                <a:spcPts val="500"/>
+              </a:spcAft>
+            </a:pPr>
+            <a:r>
+              <a:rPr sz="1200" b="0">
+                <a:solidFill>
+                  <a:srgbClr val="2B2B2B"/>
+                </a:solidFill>
+                <a:latin typeface="맑은 고딕"/>
+              </a:rPr>
+              <a:t>표시해도 그냥 넘어가지 않습니다.</a:t>
+            </a:r>
+          </a:p>
+          <a:p>
+            <a:pPr algn="l">
+              <a:spcAft>
+                <a:spcPts val="500"/>
+              </a:spcAft>
+            </a:pPr>
+            <a:r>
+              <a:rPr sz="1200" b="0">
+                <a:solidFill>
+                  <a:srgbClr val="2B2B2B"/>
+                </a:solidFill>
+                <a:latin typeface="맑은 고딕"/>
+              </a:rPr>
+              <a:t>다른 서류에 확인 문구와 고객</a:t>
+            </a:r>
+          </a:p>
+          <a:p>
+            <a:pPr algn="l">
+              <a:spcAft>
+                <a:spcPts val="500"/>
+              </a:spcAft>
+            </a:pPr>
+            <a:r>
+              <a:rPr sz="1200" b="0">
+                <a:solidFill>
+                  <a:srgbClr val="2B2B2B"/>
+                </a:solidFill>
+                <a:latin typeface="맑은 고딕"/>
+              </a:rPr>
+              <a:t>확인값이 있을 때만 완화합니다.</a:t>
+            </a:r>
+          </a:p>
+          <a:p>
+            <a:pPr algn="l">
+              <a:spcAft>
+                <a:spcPts val="500"/>
+              </a:spcAft>
+            </a:pPr>
+            <a:r>
+              <a:rPr sz="1200" b="0">
+                <a:solidFill>
+                  <a:srgbClr val="2B2B2B"/>
+                </a:solidFill>
+                <a:latin typeface="맑은 고딕"/>
+              </a:rPr>
+              <a:t>실측 — 데모 3종은 표시해도 '누락'</a:t>
+            </a:r>
+          </a:p>
+        </p:txBody>
+      </p:sp>
+      <p:sp>
+        <p:nvSpPr>
+          <p:cNvPr id="12" name="Rounded Rectangle 11"/>
+          <p:cNvSpPr/>
+          <p:nvPr/>
+        </p:nvSpPr>
+        <p:spPr>
+          <a:xfrm>
+            <a:off x="8065008" y="3108960"/>
+            <a:ext cx="3566160" cy="1874519"/>
+          </a:xfrm>
+          <a:prstGeom prst="roundRect">
+            <a:avLst/>
+          </a:prstGeom>
+          <a:solidFill>
+            <a:srgbClr val="FFFFFF"/>
+          </a:solidFill>
+          <a:ln>
+            <a:solidFill>
+              <a:srgbClr val="E6E0D4"/>
+            </a:solidFill>
+          </a:ln>
+        </p:spPr>
+        <p:style>
+          <a:lnRef idx="1">
+            <a:schemeClr val="accent1"/>
+          </a:lnRef>
+          <a:fillRef idx="3">
+            <a:schemeClr val="accent1"/>
+          </a:fillRef>
+          <a:effectRef idx="2">
+            <a:schemeClr val="accent1"/>
+          </a:effectRef>
+          <a:fontRef idx="minor">
+            <a:schemeClr val="lt1"/>
+          </a:fontRef>
+        </p:style>
+        <p:txBody>
+          <a:bodyPr rtlCol="0" anchor="ctr"/>
+          <a:lstStyle/>
+          <a:p>
+            <a:pPr algn="ctr"/>
+          </a:p>
+        </p:txBody>
+      </p:sp>
+      <p:sp>
+        <p:nvSpPr>
+          <p:cNvPr id="13" name="Rectangle 12"/>
+          <p:cNvSpPr/>
+          <p:nvPr/>
+        </p:nvSpPr>
+        <p:spPr>
+          <a:xfrm>
+            <a:off x="8065008" y="3108960"/>
+            <a:ext cx="54864" cy="1874519"/>
+          </a:xfrm>
+          <a:prstGeom prst="rect">
+            <a:avLst/>
+          </a:prstGeom>
+          <a:solidFill>
+            <a:srgbClr val="FCAF17"/>
+          </a:solidFill>
+          <a:ln>
+            <a:noFill/>
+          </a:ln>
+        </p:spPr>
+        <p:style>
+          <a:lnRef idx="1">
+            <a:schemeClr val="accent1"/>
+          </a:lnRef>
+          <a:fillRef idx="3">
+            <a:schemeClr val="accent1"/>
+          </a:fillRef>
+          <a:effectRef idx="2">
+            <a:schemeClr val="accent1"/>
+          </a:effectRef>
+          <a:fontRef idx="minor">
+            <a:schemeClr val="lt1"/>
+          </a:fontRef>
+        </p:style>
+        <p:txBody>
+          <a:bodyPr rtlCol="0" anchor="ctr"/>
+          <a:lstStyle/>
+          <a:p>
+            <a:pPr algn="ctr"/>
+          </a:p>
+        </p:txBody>
+      </p:sp>
+      <p:sp>
+        <p:nvSpPr>
+          <p:cNvPr id="14" name="TextBox 13"/>
+          <p:cNvSpPr txBox="1"/>
+          <p:nvPr/>
+        </p:nvSpPr>
+        <p:spPr>
+          <a:xfrm>
+            <a:off x="8321040" y="3255264"/>
+            <a:ext cx="3108960" cy="1600199"/>
+          </a:xfrm>
+          <a:prstGeom prst="rect">
+            <a:avLst/>
+          </a:prstGeom>
+          <a:noFill/>
+        </p:spPr>
+        <p:txBody>
+          <a:bodyPr wrap="square">
+            <a:spAutoFit/>
+          </a:bodyPr>
+          <a:lstStyle/>
+          <a:p>
+            <a:pPr algn="l">
+              <a:spcAft>
+                <a:spcPts val="700"/>
+              </a:spcAft>
+            </a:pPr>
+            <a:r>
+              <a:rPr sz="1500" b="1">
+                <a:solidFill>
+                  <a:srgbClr val="645B4C"/>
+                </a:solidFill>
+                <a:latin typeface="맑은 고딕"/>
+              </a:rPr>
+              <a:t>고령투자자도 같은 구조</a:t>
+            </a:r>
+          </a:p>
+          <a:p>
+            <a:pPr algn="l">
+              <a:spcAft>
+                <a:spcPts val="500"/>
+              </a:spcAft>
+            </a:pPr>
+            <a:r>
+              <a:rPr sz="1200" b="0">
+                <a:solidFill>
+                  <a:srgbClr val="2B2B2B"/>
+                </a:solidFill>
+                <a:latin typeface="맑은 고딕"/>
+              </a:rPr>
+              <a:t>생년월일은 추출하지 않습니다.</a:t>
+            </a:r>
+          </a:p>
+          <a:p>
+            <a:pPr algn="l">
+              <a:spcAft>
+                <a:spcPts val="500"/>
+              </a:spcAft>
+            </a:pPr>
+            <a:r>
+              <a:rPr sz="1200" b="0">
+                <a:solidFill>
+                  <a:srgbClr val="2B2B2B"/>
+                </a:solidFill>
+                <a:latin typeface="맑은 고딕"/>
+              </a:rPr>
+              <a:t>만 65세 이상도 담당자가 표시합니다.</a:t>
+            </a:r>
+          </a:p>
+          <a:p>
+            <a:pPr algn="l">
+              <a:spcAft>
+                <a:spcPts val="500"/>
+              </a:spcAft>
+            </a:pPr>
+            <a:r>
+              <a:rPr sz="1200" b="0">
+                <a:solidFill>
+                  <a:srgbClr val="2B2B2B"/>
+                </a:solidFill>
+                <a:latin typeface="맑은 고딕"/>
+              </a:rPr>
+              <a:t>표시하면 REC-001 녹취 대상이 됩니다.</a:t>
+            </a:r>
+          </a:p>
+          <a:p>
+            <a:pPr algn="l">
+              <a:spcAft>
+                <a:spcPts val="500"/>
+              </a:spcAft>
+            </a:pPr>
+            <a:r>
+              <a:rPr sz="1200" b="0">
+                <a:solidFill>
+                  <a:srgbClr val="2B2B2B"/>
+                </a:solidFill>
+                <a:latin typeface="맑은 고딕"/>
+              </a:rPr>
+              <a:t>사유 — 고위험(1·2등급)·고령·부적합</a:t>
+            </a:r>
+          </a:p>
+        </p:txBody>
+      </p:sp>
+      <p:sp>
+        <p:nvSpPr>
+          <p:cNvPr id="15" name="TextBox 14"/>
+          <p:cNvSpPr txBox="1"/>
+          <p:nvPr/>
+        </p:nvSpPr>
+        <p:spPr>
+          <a:xfrm>
+            <a:off x="566928" y="5193792"/>
+            <a:ext cx="11064240" cy="640080"/>
+          </a:xfrm>
+          <a:prstGeom prst="rect">
+            <a:avLst/>
+          </a:prstGeom>
+          <a:noFill/>
+        </p:spPr>
+        <p:txBody>
+          <a:bodyPr wrap="square">
+            <a:spAutoFit/>
+          </a:bodyPr>
+          <a:lstStyle/>
+          <a:p>
+            <a:pPr algn="l">
+              <a:spcAft>
+                <a:spcPts val="600"/>
+              </a:spcAft>
+            </a:pPr>
+            <a:r>
+              <a:rPr sz="1300" b="1">
+                <a:solidFill>
+                  <a:srgbClr val="645B4C"/>
+                </a:solidFill>
+                <a:latin typeface="맑은 고딕"/>
+              </a:rPr>
+              <a:t>이 구분이 없으면 정상적인 비대면 판매가 전부 '서류 누락'으로 뜹니다. 컴플라이언스 도구에서 오탐은 곧 도입 실패입니다.</a:t>
+            </a:r>
+          </a:p>
+        </p:txBody>
+      </p:sp>
+    </p:spTree>
+  </p:cSld>
+  <p:clrMapOvr>
+    <a:masterClrMapping/>
+  </p:clrMapOvr>
+</p:sld>
+</file>
+
+<file path=ppt/slides/slide15.xml><?xml version="1.0" encoding="utf-8"?>
+<p:sld xmlns:a="http://schemas.openxmlformats.org/drawingml/2006/main" xmlns:p="http://schemas.openxmlformats.org/presentationml/2006/main" xmlns:r="http://schemas.openxmlformats.org/officeDocument/2006/relationships">
+  <p:cSld>
+    <p:spTree>
+      <p:nvGrpSpPr>
+        <p:cNvPr id="1" name=""/>
+        <p:cNvGrpSpPr/>
+        <p:nvPr/>
+      </p:nvGrpSpPr>
+      <p:grpSpPr/>
+      <p:sp>
+        <p:nvSpPr>
+          <p:cNvPr id="2" name="Rectangle 1"/>
+          <p:cNvSpPr/>
+          <p:nvPr/>
+        </p:nvSpPr>
+        <p:spPr>
+          <a:xfrm>
+            <a:off x="0" y="0"/>
+            <a:ext cx="12191695" cy="82296"/>
+          </a:xfrm>
+          <a:prstGeom prst="rect">
+            <a:avLst/>
+          </a:prstGeom>
+          <a:solidFill>
+            <a:srgbClr val="FCAF17"/>
+          </a:solidFill>
+          <a:ln>
+            <a:noFill/>
+          </a:ln>
+        </p:spPr>
+        <p:style>
+          <a:lnRef idx="1">
+            <a:schemeClr val="accent1"/>
+          </a:lnRef>
+          <a:fillRef idx="3">
+            <a:schemeClr val="accent1"/>
+          </a:fillRef>
+          <a:effectRef idx="2">
+            <a:schemeClr val="accent1"/>
+          </a:effectRef>
+          <a:fontRef idx="minor">
+            <a:schemeClr val="lt1"/>
+          </a:fontRef>
+        </p:style>
+        <p:txBody>
+          <a:bodyPr rtlCol="0" anchor="ctr"/>
+          <a:lstStyle/>
+          <a:p>
+            <a:pPr algn="ctr"/>
+          </a:p>
+        </p:txBody>
+      </p:sp>
+      <p:sp>
+        <p:nvSpPr>
+          <p:cNvPr id="3" name="TextBox 2"/>
+          <p:cNvSpPr txBox="1"/>
+          <p:nvPr/>
+        </p:nvSpPr>
+        <p:spPr>
+          <a:xfrm>
+            <a:off x="566928" y="310896"/>
+            <a:ext cx="10424160" cy="914400"/>
+          </a:xfrm>
+          <a:prstGeom prst="rect">
+            <a:avLst/>
+          </a:prstGeom>
+          <a:noFill/>
+        </p:spPr>
+        <p:txBody>
+          <a:bodyPr wrap="square">
+            <a:spAutoFit/>
+          </a:bodyPr>
+          <a:lstStyle/>
+          <a:p>
+            <a:pPr algn="l">
+              <a:spcAft>
+                <a:spcPts val="200"/>
+              </a:spcAft>
+            </a:pPr>
+            <a:r>
+              <a:rPr sz="3000" b="1">
+                <a:solidFill>
+                  <a:srgbClr val="645B4C"/>
+                </a:solidFill>
+                <a:latin typeface="맑은 고딕"/>
+              </a:rPr>
+              <a:t>검증 결과</a:t>
+            </a:r>
+          </a:p>
+          <a:p>
+            <a:pPr algn="l">
+              <a:spcAft>
+                <a:spcPts val="600"/>
+              </a:spcAft>
+            </a:pPr>
+            <a:r>
+              <a:rPr sz="1400" b="0">
+                <a:solidFill>
+                  <a:srgbClr val="6B6B6B"/>
+                </a:solidFill>
+                <a:latin typeface="맑은 고딕"/>
+              </a:rPr>
+              <a:t>실제 금융사 서류로 검증했고, 회귀 테스트로 고정했다</a:t>
+            </a:r>
+          </a:p>
+        </p:txBody>
+      </p:sp>
+      <p:sp>
+        <p:nvSpPr>
+          <p:cNvPr id="4" name="Rounded Rectangle 3"/>
+          <p:cNvSpPr/>
+          <p:nvPr/>
+        </p:nvSpPr>
+        <p:spPr>
+          <a:xfrm>
+            <a:off x="9646920" y="329184"/>
+            <a:ext cx="1965960" cy="384048"/>
+          </a:xfrm>
+          <a:prstGeom prst="roundRect">
+            <a:avLst/>
+          </a:prstGeom>
+          <a:solidFill>
+            <a:srgbClr val="FFF8DF"/>
+          </a:solidFill>
+          <a:ln>
+            <a:solidFill>
+              <a:srgbClr val="FCAF17"/>
+            </a:solidFill>
+          </a:ln>
+        </p:spPr>
+        <p:style>
+          <a:lnRef idx="1">
+            <a:schemeClr val="accent1"/>
+          </a:lnRef>
+          <a:fillRef idx="3">
+            <a:schemeClr val="accent1"/>
+          </a:fillRef>
+          <a:effectRef idx="2">
+            <a:schemeClr val="accent1"/>
+          </a:effectRef>
+          <a:fontRef idx="minor">
+            <a:schemeClr val="lt1"/>
+          </a:fontRef>
+        </p:style>
+        <p:txBody>
+          <a:bodyPr rtlCol="0" anchor="ctr" wrap="square"/>
+          <a:lstStyle/>
+          <a:p>
+            <a:pPr algn="ctr">
+              <a:spcAft>
+                <a:spcPts val="0"/>
+              </a:spcAft>
+            </a:pPr>
+            <a:r>
+              <a:rPr sz="1100" b="1">
+                <a:solidFill>
+                  <a:srgbClr val="645B4C"/>
+                </a:solidFill>
+                <a:latin typeface="맑은 고딕"/>
+              </a:rPr>
               <a:t>기술 실현 가능성</a:t>
             </a:r>
           </a:p>
@@ -9101,7 +10247,7 @@
                 </a:solidFill>
                 <a:latin typeface="맑은 고딕"/>
               </a:rPr>
-              <a:t>83건</a:t>
+              <a:t>86건</a:t>
             </a:r>
           </a:p>
           <a:p>
@@ -10017,7 +11163,7 @@
 </p:sld>
 </file>
 
-<file path=ppt/slides/slide15.xml><?xml version="1.0" encoding="utf-8"?>
+<file path=ppt/slides/slide16.xml><?xml version="1.0" encoding="utf-8"?>
 <p:sld xmlns:a="http://schemas.openxmlformats.org/drawingml/2006/main" xmlns:p="http://schemas.openxmlformats.org/presentationml/2006/main" xmlns:r="http://schemas.openxmlformats.org/officeDocument/2006/relationships">
   <p:cSld>
     <p:spTree>
@@ -11151,7 +12297,7 @@
 </p:sld>
 </file>
 
-<file path=ppt/slides/slide16.xml><?xml version="1.0" encoding="utf-8"?>
+<file path=ppt/slides/slide17.xml><?xml version="1.0" encoding="utf-8"?>
 <p:sld xmlns:a="http://schemas.openxmlformats.org/drawingml/2006/main" xmlns:p="http://schemas.openxmlformats.org/presentationml/2006/main" xmlns:r="http://schemas.openxmlformats.org/officeDocument/2006/relationships">
   <p:cSld>
     <p:spTree>
@@ -12140,7 +13286,7 @@
 </p:sld>
 </file>
 
-<file path=ppt/slides/slide17.xml><?xml version="1.0" encoding="utf-8"?>
+<file path=ppt/slides/slide18.xml><?xml version="1.0" encoding="utf-8"?>
 <p:sld xmlns:a="http://schemas.openxmlformats.org/drawingml/2006/main" xmlns:p="http://schemas.openxmlformats.org/presentationml/2006/main" xmlns:r="http://schemas.openxmlformats.org/officeDocument/2006/relationships">
   <p:cSld>
     <p:spTree>
@@ -12612,7 +13758,7 @@
 </p:sld>
 </file>
 
-<file path=ppt/slides/slide18.xml><?xml version="1.0" encoding="utf-8"?>
+<file path=ppt/slides/slide19.xml><?xml version="1.0" encoding="utf-8"?>
 <p:sld xmlns:a="http://schemas.openxmlformats.org/drawingml/2006/main" xmlns:p="http://schemas.openxmlformats.org/presentationml/2006/main" xmlns:r="http://schemas.openxmlformats.org/officeDocument/2006/relationships">
   <p:cSld>
     <p:spTree>
@@ -13529,7 +14675,825 @@
 </p:sld>
 </file>
 
-<file path=ppt/slides/slide19.xml><?xml version="1.0" encoding="utf-8"?>
+<file path=ppt/slides/slide2.xml><?xml version="1.0" encoding="utf-8"?>
+<p:sld xmlns:a="http://schemas.openxmlformats.org/drawingml/2006/main" xmlns:p="http://schemas.openxmlformats.org/presentationml/2006/main" xmlns:r="http://schemas.openxmlformats.org/officeDocument/2006/relationships">
+  <p:cSld>
+    <p:spTree>
+      <p:nvGrpSpPr>
+        <p:cNvPr id="1" name=""/>
+        <p:cNvGrpSpPr/>
+        <p:nvPr/>
+      </p:nvGrpSpPr>
+      <p:grpSpPr/>
+      <p:sp>
+        <p:nvSpPr>
+          <p:cNvPr id="2" name="Rectangle 1"/>
+          <p:cNvSpPr/>
+          <p:nvPr/>
+        </p:nvSpPr>
+        <p:spPr>
+          <a:xfrm>
+            <a:off x="0" y="0"/>
+            <a:ext cx="12191695" cy="82296"/>
+          </a:xfrm>
+          <a:prstGeom prst="rect">
+            <a:avLst/>
+          </a:prstGeom>
+          <a:solidFill>
+            <a:srgbClr val="FCAF17"/>
+          </a:solidFill>
+          <a:ln>
+            <a:noFill/>
+          </a:ln>
+        </p:spPr>
+        <p:style>
+          <a:lnRef idx="1">
+            <a:schemeClr val="accent1"/>
+          </a:lnRef>
+          <a:fillRef idx="3">
+            <a:schemeClr val="accent1"/>
+          </a:fillRef>
+          <a:effectRef idx="2">
+            <a:schemeClr val="accent1"/>
+          </a:effectRef>
+          <a:fontRef idx="minor">
+            <a:schemeClr val="lt1"/>
+          </a:fontRef>
+        </p:style>
+        <p:txBody>
+          <a:bodyPr rtlCol="0" anchor="ctr"/>
+          <a:lstStyle/>
+          <a:p>
+            <a:pPr algn="ctr"/>
+          </a:p>
+        </p:txBody>
+      </p:sp>
+      <p:sp>
+        <p:nvSpPr>
+          <p:cNvPr id="3" name="TextBox 2"/>
+          <p:cNvSpPr txBox="1"/>
+          <p:nvPr/>
+        </p:nvSpPr>
+        <p:spPr>
+          <a:xfrm>
+            <a:off x="566928" y="310896"/>
+            <a:ext cx="10424160" cy="914400"/>
+          </a:xfrm>
+          <a:prstGeom prst="rect">
+            <a:avLst/>
+          </a:prstGeom>
+          <a:noFill/>
+        </p:spPr>
+        <p:txBody>
+          <a:bodyPr wrap="square">
+            <a:spAutoFit/>
+          </a:bodyPr>
+          <a:lstStyle/>
+          <a:p>
+            <a:pPr algn="l">
+              <a:spcAft>
+                <a:spcPts val="200"/>
+              </a:spcAft>
+            </a:pPr>
+            <a:r>
+              <a:rPr sz="3000" b="1">
+                <a:solidFill>
+                  <a:srgbClr val="645B4C"/>
+                </a:solidFill>
+                <a:latin typeface="맑은 고딕"/>
+              </a:rPr>
+              <a:t>문제 정의</a:t>
+            </a:r>
+          </a:p>
+          <a:p>
+            <a:pPr algn="l">
+              <a:spcAft>
+                <a:spcPts val="600"/>
+              </a:spcAft>
+            </a:pPr>
+            <a:r>
+              <a:rPr sz="1400" b="0">
+                <a:solidFill>
+                  <a:srgbClr val="6B6B6B"/>
+                </a:solidFill>
+                <a:latin typeface="맑은 고딕"/>
+              </a:rPr>
+              <a:t>서류 하나만 보면 원리적으로 잡을 수 없는 위반이 있다</a:t>
+            </a:r>
+          </a:p>
+        </p:txBody>
+      </p:sp>
+      <p:sp>
+        <p:nvSpPr>
+          <p:cNvPr id="4" name="Rounded Rectangle 3"/>
+          <p:cNvSpPr/>
+          <p:nvPr/>
+        </p:nvSpPr>
+        <p:spPr>
+          <a:xfrm>
+            <a:off x="9646920" y="329184"/>
+            <a:ext cx="1965960" cy="384048"/>
+          </a:xfrm>
+          <a:prstGeom prst="roundRect">
+            <a:avLst/>
+          </a:prstGeom>
+          <a:solidFill>
+            <a:srgbClr val="FFF8DF"/>
+          </a:solidFill>
+          <a:ln>
+            <a:solidFill>
+              <a:srgbClr val="FCAF17"/>
+            </a:solidFill>
+          </a:ln>
+        </p:spPr>
+        <p:style>
+          <a:lnRef idx="1">
+            <a:schemeClr val="accent1"/>
+          </a:lnRef>
+          <a:fillRef idx="3">
+            <a:schemeClr val="accent1"/>
+          </a:fillRef>
+          <a:effectRef idx="2">
+            <a:schemeClr val="accent1"/>
+          </a:effectRef>
+          <a:fontRef idx="minor">
+            <a:schemeClr val="lt1"/>
+          </a:fontRef>
+        </p:style>
+        <p:txBody>
+          <a:bodyPr rtlCol="0" anchor="ctr" wrap="square"/>
+          <a:lstStyle/>
+          <a:p>
+            <a:pPr algn="ctr">
+              <a:spcAft>
+                <a:spcPts val="0"/>
+              </a:spcAft>
+            </a:pPr>
+            <a:r>
+              <a:rPr sz="1100" b="1">
+                <a:solidFill>
+                  <a:srgbClr val="645B4C"/>
+                </a:solidFill>
+                <a:latin typeface="맑은 고딕"/>
+              </a:rPr>
+              <a:t>문제 정의·필요성</a:t>
+            </a:r>
+          </a:p>
+        </p:txBody>
+      </p:sp>
+      <p:sp>
+        <p:nvSpPr>
+          <p:cNvPr id="5" name="Rounded Rectangle 4"/>
+          <p:cNvSpPr/>
+          <p:nvPr/>
+        </p:nvSpPr>
+        <p:spPr>
+          <a:xfrm>
+            <a:off x="566928" y="1463040"/>
+            <a:ext cx="3520440" cy="2148840"/>
+          </a:xfrm>
+          <a:prstGeom prst="roundRect">
+            <a:avLst/>
+          </a:prstGeom>
+          <a:solidFill>
+            <a:srgbClr val="FFFFFF"/>
+          </a:solidFill>
+          <a:ln>
+            <a:solidFill>
+              <a:srgbClr val="E6E0D4"/>
+            </a:solidFill>
+          </a:ln>
+        </p:spPr>
+        <p:style>
+          <a:lnRef idx="1">
+            <a:schemeClr val="accent1"/>
+          </a:lnRef>
+          <a:fillRef idx="3">
+            <a:schemeClr val="accent1"/>
+          </a:fillRef>
+          <a:effectRef idx="2">
+            <a:schemeClr val="accent1"/>
+          </a:effectRef>
+          <a:fontRef idx="minor">
+            <a:schemeClr val="lt1"/>
+          </a:fontRef>
+        </p:style>
+        <p:txBody>
+          <a:bodyPr rtlCol="0" anchor="ctr"/>
+          <a:lstStyle/>
+          <a:p>
+            <a:pPr algn="ctr"/>
+          </a:p>
+        </p:txBody>
+      </p:sp>
+      <p:sp>
+        <p:nvSpPr>
+          <p:cNvPr id="6" name="Rectangle 5"/>
+          <p:cNvSpPr/>
+          <p:nvPr/>
+        </p:nvSpPr>
+        <p:spPr>
+          <a:xfrm>
+            <a:off x="566928" y="1463040"/>
+            <a:ext cx="54864" cy="2148840"/>
+          </a:xfrm>
+          <a:prstGeom prst="rect">
+            <a:avLst/>
+          </a:prstGeom>
+          <a:solidFill>
+            <a:srgbClr val="C62828"/>
+          </a:solidFill>
+          <a:ln>
+            <a:noFill/>
+          </a:ln>
+        </p:spPr>
+        <p:style>
+          <a:lnRef idx="1">
+            <a:schemeClr val="accent1"/>
+          </a:lnRef>
+          <a:fillRef idx="3">
+            <a:schemeClr val="accent1"/>
+          </a:fillRef>
+          <a:effectRef idx="2">
+            <a:schemeClr val="accent1"/>
+          </a:effectRef>
+          <a:fontRef idx="minor">
+            <a:schemeClr val="lt1"/>
+          </a:fontRef>
+        </p:style>
+        <p:txBody>
+          <a:bodyPr rtlCol="0" anchor="ctr"/>
+          <a:lstStyle/>
+          <a:p>
+            <a:pPr algn="ctr"/>
+          </a:p>
+        </p:txBody>
+      </p:sp>
+      <p:sp>
+        <p:nvSpPr>
+          <p:cNvPr id="7" name="TextBox 6"/>
+          <p:cNvSpPr txBox="1"/>
+          <p:nvPr/>
+        </p:nvSpPr>
+        <p:spPr>
+          <a:xfrm>
+            <a:off x="822960" y="1609344"/>
+            <a:ext cx="3063240" cy="1874520"/>
+          </a:xfrm>
+          <a:prstGeom prst="rect">
+            <a:avLst/>
+          </a:prstGeom>
+          <a:noFill/>
+        </p:spPr>
+        <p:txBody>
+          <a:bodyPr wrap="square">
+            <a:spAutoFit/>
+          </a:bodyPr>
+          <a:lstStyle/>
+          <a:p>
+            <a:pPr algn="l">
+              <a:spcAft>
+                <a:spcPts val="700"/>
+              </a:spcAft>
+            </a:pPr>
+            <a:r>
+              <a:rPr sz="1500" b="1">
+                <a:solidFill>
+                  <a:srgbClr val="645B4C"/>
+                </a:solidFill>
+                <a:latin typeface="맑은 고딕"/>
+              </a:rPr>
+              <a:t>① 위반은 서류 사이에 있다</a:t>
+            </a:r>
+          </a:p>
+          <a:p>
+            <a:pPr algn="l">
+              <a:spcAft>
+                <a:spcPts val="500"/>
+              </a:spcAft>
+            </a:pPr>
+            <a:r>
+              <a:rPr sz="1200" b="0">
+                <a:solidFill>
+                  <a:srgbClr val="2B2B2B"/>
+                </a:solidFill>
+                <a:latin typeface="맑은 고딕"/>
+              </a:rPr>
+              <a:t>진단표: 고객 투자성향 '안정형'</a:t>
+            </a:r>
+          </a:p>
+          <a:p>
+            <a:pPr algn="l">
+              <a:spcAft>
+                <a:spcPts val="500"/>
+              </a:spcAft>
+            </a:pPr>
+            <a:r>
+              <a:rPr sz="1200" b="0">
+                <a:solidFill>
+                  <a:srgbClr val="2B2B2B"/>
+                </a:solidFill>
+                <a:latin typeface="맑은 고딕"/>
+              </a:rPr>
+              <a:t>상품설명서: 위험등급 '1등급'</a:t>
+            </a:r>
+          </a:p>
+          <a:p>
+            <a:pPr algn="l">
+              <a:spcAft>
+                <a:spcPts val="500"/>
+              </a:spcAft>
+            </a:pPr>
+            <a:r>
+              <a:rPr sz="1200" b="0">
+                <a:solidFill>
+                  <a:srgbClr val="2B2B2B"/>
+                </a:solidFill>
+                <a:latin typeface="맑은 고딕"/>
+              </a:rPr>
+              <a:t>→ 각 서류는 정상. 대조해야 위반</a:t>
+            </a:r>
+          </a:p>
+          <a:p>
+            <a:pPr algn="l">
+              <a:spcAft>
+                <a:spcPts val="500"/>
+              </a:spcAft>
+            </a:pPr>
+            <a:r>
+              <a:rPr sz="1200" b="0">
+                <a:solidFill>
+                  <a:srgbClr val="2B2B2B"/>
+                </a:solidFill>
+                <a:latin typeface="맑은 고딕"/>
+              </a:rPr>
+              <a:t>금소법 17조 적합성원칙 위반 소지</a:t>
+            </a:r>
+          </a:p>
+        </p:txBody>
+      </p:sp>
+      <p:sp>
+        <p:nvSpPr>
+          <p:cNvPr id="8" name="Rounded Rectangle 7"/>
+          <p:cNvSpPr/>
+          <p:nvPr/>
+        </p:nvSpPr>
+        <p:spPr>
+          <a:xfrm>
+            <a:off x="4315968" y="1463040"/>
+            <a:ext cx="3520440" cy="2148840"/>
+          </a:xfrm>
+          <a:prstGeom prst="roundRect">
+            <a:avLst/>
+          </a:prstGeom>
+          <a:solidFill>
+            <a:srgbClr val="FFFFFF"/>
+          </a:solidFill>
+          <a:ln>
+            <a:solidFill>
+              <a:srgbClr val="E6E0D4"/>
+            </a:solidFill>
+          </a:ln>
+        </p:spPr>
+        <p:style>
+          <a:lnRef idx="1">
+            <a:schemeClr val="accent1"/>
+          </a:lnRef>
+          <a:fillRef idx="3">
+            <a:schemeClr val="accent1"/>
+          </a:fillRef>
+          <a:effectRef idx="2">
+            <a:schemeClr val="accent1"/>
+          </a:effectRef>
+          <a:fontRef idx="minor">
+            <a:schemeClr val="lt1"/>
+          </a:fontRef>
+        </p:style>
+        <p:txBody>
+          <a:bodyPr rtlCol="0" anchor="ctr"/>
+          <a:lstStyle/>
+          <a:p>
+            <a:pPr algn="ctr"/>
+          </a:p>
+        </p:txBody>
+      </p:sp>
+      <p:sp>
+        <p:nvSpPr>
+          <p:cNvPr id="9" name="Rectangle 8"/>
+          <p:cNvSpPr/>
+          <p:nvPr/>
+        </p:nvSpPr>
+        <p:spPr>
+          <a:xfrm>
+            <a:off x="4315968" y="1463040"/>
+            <a:ext cx="54864" cy="2148840"/>
+          </a:xfrm>
+          <a:prstGeom prst="rect">
+            <a:avLst/>
+          </a:prstGeom>
+          <a:solidFill>
+            <a:srgbClr val="FCAF17"/>
+          </a:solidFill>
+          <a:ln>
+            <a:noFill/>
+          </a:ln>
+        </p:spPr>
+        <p:style>
+          <a:lnRef idx="1">
+            <a:schemeClr val="accent1"/>
+          </a:lnRef>
+          <a:fillRef idx="3">
+            <a:schemeClr val="accent1"/>
+          </a:fillRef>
+          <a:effectRef idx="2">
+            <a:schemeClr val="accent1"/>
+          </a:effectRef>
+          <a:fontRef idx="minor">
+            <a:schemeClr val="lt1"/>
+          </a:fontRef>
+        </p:style>
+        <p:txBody>
+          <a:bodyPr rtlCol="0" anchor="ctr"/>
+          <a:lstStyle/>
+          <a:p>
+            <a:pPr algn="ctr"/>
+          </a:p>
+        </p:txBody>
+      </p:sp>
+      <p:sp>
+        <p:nvSpPr>
+          <p:cNvPr id="10" name="TextBox 9"/>
+          <p:cNvSpPr txBox="1"/>
+          <p:nvPr/>
+        </p:nvSpPr>
+        <p:spPr>
+          <a:xfrm>
+            <a:off x="4572000" y="1609344"/>
+            <a:ext cx="3063240" cy="1874520"/>
+          </a:xfrm>
+          <a:prstGeom prst="rect">
+            <a:avLst/>
+          </a:prstGeom>
+          <a:noFill/>
+        </p:spPr>
+        <p:txBody>
+          <a:bodyPr wrap="square">
+            <a:spAutoFit/>
+          </a:bodyPr>
+          <a:lstStyle/>
+          <a:p>
+            <a:pPr algn="l">
+              <a:spcAft>
+                <a:spcPts val="700"/>
+              </a:spcAft>
+            </a:pPr>
+            <a:r>
+              <a:rPr sz="1500" b="1">
+                <a:solidFill>
+                  <a:srgbClr val="645B4C"/>
+                </a:solidFill>
+                <a:latin typeface="맑은 고딕"/>
+              </a:rPr>
+              <a:t>② 사람이 눈으로 대조한다</a:t>
+            </a:r>
+          </a:p>
+          <a:p>
+            <a:pPr algn="l">
+              <a:spcAft>
+                <a:spcPts val="500"/>
+              </a:spcAft>
+            </a:pPr>
+            <a:r>
+              <a:rPr sz="1200" b="0">
+                <a:solidFill>
+                  <a:srgbClr val="2B2B2B"/>
+                </a:solidFill>
+                <a:latin typeface="맑은 고딕"/>
+              </a:rPr>
+              <a:t>판매 1건 = 서류 4종 교차 확인</a:t>
+            </a:r>
+          </a:p>
+          <a:p>
+            <a:pPr algn="l">
+              <a:spcAft>
+                <a:spcPts val="500"/>
+              </a:spcAft>
+            </a:pPr>
+            <a:r>
+              <a:rPr sz="1200" b="0">
+                <a:solidFill>
+                  <a:srgbClr val="2B2B2B"/>
+                </a:solidFill>
+                <a:latin typeface="맑은 고딕"/>
+              </a:rPr>
+              <a:t>고객 성향·상품 등급·설명일·계약일·서명</a:t>
+            </a:r>
+          </a:p>
+          <a:p>
+            <a:pPr algn="l">
+              <a:spcAft>
+                <a:spcPts val="500"/>
+              </a:spcAft>
+            </a:pPr>
+            <a:r>
+              <a:rPr sz="1200" b="0">
+                <a:solidFill>
+                  <a:srgbClr val="2B2B2B"/>
+                </a:solidFill>
+                <a:latin typeface="맑은 고딕"/>
+              </a:rPr>
+              <a:t>건수가 쌓이면 누락이 발생</a:t>
+            </a:r>
+          </a:p>
+          <a:p>
+            <a:pPr algn="l">
+              <a:spcAft>
+                <a:spcPts val="500"/>
+              </a:spcAft>
+            </a:pPr>
+            <a:r>
+              <a:rPr sz="1200" b="0">
+                <a:solidFill>
+                  <a:srgbClr val="2B2B2B"/>
+                </a:solidFill>
+                <a:latin typeface="맑은 고딕"/>
+              </a:rPr>
+              <a:t>사후 분쟁 시 입증 부담은 판매사</a:t>
+            </a:r>
+          </a:p>
+        </p:txBody>
+      </p:sp>
+      <p:sp>
+        <p:nvSpPr>
+          <p:cNvPr id="11" name="Rounded Rectangle 10"/>
+          <p:cNvSpPr/>
+          <p:nvPr/>
+        </p:nvSpPr>
+        <p:spPr>
+          <a:xfrm>
+            <a:off x="8065008" y="1463040"/>
+            <a:ext cx="3566160" cy="2148840"/>
+          </a:xfrm>
+          <a:prstGeom prst="roundRect">
+            <a:avLst/>
+          </a:prstGeom>
+          <a:solidFill>
+            <a:srgbClr val="FFFFFF"/>
+          </a:solidFill>
+          <a:ln>
+            <a:solidFill>
+              <a:srgbClr val="E6E0D4"/>
+            </a:solidFill>
+          </a:ln>
+        </p:spPr>
+        <p:style>
+          <a:lnRef idx="1">
+            <a:schemeClr val="accent1"/>
+          </a:lnRef>
+          <a:fillRef idx="3">
+            <a:schemeClr val="accent1"/>
+          </a:fillRef>
+          <a:effectRef idx="2">
+            <a:schemeClr val="accent1"/>
+          </a:effectRef>
+          <a:fontRef idx="minor">
+            <a:schemeClr val="lt1"/>
+          </a:fontRef>
+        </p:style>
+        <p:txBody>
+          <a:bodyPr rtlCol="0" anchor="ctr"/>
+          <a:lstStyle/>
+          <a:p>
+            <a:pPr algn="ctr"/>
+          </a:p>
+        </p:txBody>
+      </p:sp>
+      <p:sp>
+        <p:nvSpPr>
+          <p:cNvPr id="12" name="Rectangle 11"/>
+          <p:cNvSpPr/>
+          <p:nvPr/>
+        </p:nvSpPr>
+        <p:spPr>
+          <a:xfrm>
+            <a:off x="8065008" y="1463040"/>
+            <a:ext cx="54864" cy="2148840"/>
+          </a:xfrm>
+          <a:prstGeom prst="rect">
+            <a:avLst/>
+          </a:prstGeom>
+          <a:solidFill>
+            <a:srgbClr val="FCAF17"/>
+          </a:solidFill>
+          <a:ln>
+            <a:noFill/>
+          </a:ln>
+        </p:spPr>
+        <p:style>
+          <a:lnRef idx="1">
+            <a:schemeClr val="accent1"/>
+          </a:lnRef>
+          <a:fillRef idx="3">
+            <a:schemeClr val="accent1"/>
+          </a:fillRef>
+          <a:effectRef idx="2">
+            <a:schemeClr val="accent1"/>
+          </a:effectRef>
+          <a:fontRef idx="minor">
+            <a:schemeClr val="lt1"/>
+          </a:fontRef>
+        </p:style>
+        <p:txBody>
+          <a:bodyPr rtlCol="0" anchor="ctr"/>
+          <a:lstStyle/>
+          <a:p>
+            <a:pPr algn="ctr"/>
+          </a:p>
+        </p:txBody>
+      </p:sp>
+      <p:sp>
+        <p:nvSpPr>
+          <p:cNvPr id="13" name="TextBox 12"/>
+          <p:cNvSpPr txBox="1"/>
+          <p:nvPr/>
+        </p:nvSpPr>
+        <p:spPr>
+          <a:xfrm>
+            <a:off x="8321040" y="1609344"/>
+            <a:ext cx="3108960" cy="1874520"/>
+          </a:xfrm>
+          <a:prstGeom prst="rect">
+            <a:avLst/>
+          </a:prstGeom>
+          <a:noFill/>
+        </p:spPr>
+        <p:txBody>
+          <a:bodyPr wrap="square">
+            <a:spAutoFit/>
+          </a:bodyPr>
+          <a:lstStyle/>
+          <a:p>
+            <a:pPr algn="l">
+              <a:spcAft>
+                <a:spcPts val="700"/>
+              </a:spcAft>
+            </a:pPr>
+            <a:r>
+              <a:rPr sz="1500" b="1">
+                <a:solidFill>
+                  <a:srgbClr val="645B4C"/>
+                </a:solidFill>
+                <a:latin typeface="맑은 고딕"/>
+              </a:rPr>
+              <a:t>③ 서류 형태가 제각각</a:t>
+            </a:r>
+          </a:p>
+          <a:p>
+            <a:pPr algn="l">
+              <a:spcAft>
+                <a:spcPts val="500"/>
+              </a:spcAft>
+            </a:pPr>
+            <a:r>
+              <a:rPr sz="1200" b="0">
+                <a:solidFill>
+                  <a:srgbClr val="2B2B2B"/>
+                </a:solidFill>
+                <a:latin typeface="맑은 고딕"/>
+              </a:rPr>
+              <a:t>전자 PDF · 스캔본 · 모바일 스크린샷</a:t>
+            </a:r>
+          </a:p>
+          <a:p>
+            <a:pPr algn="l">
+              <a:spcAft>
+                <a:spcPts val="500"/>
+              </a:spcAft>
+            </a:pPr>
+            <a:r>
+              <a:rPr sz="1200" b="0">
+                <a:solidFill>
+                  <a:srgbClr val="2B2B2B"/>
+                </a:solidFill>
+                <a:latin typeface="맑은 고딕"/>
+              </a:rPr>
+              <a:t>비대면은 확인서가 계약서에 통합</a:t>
+            </a:r>
+          </a:p>
+          <a:p>
+            <a:pPr algn="l">
+              <a:spcAft>
+                <a:spcPts val="500"/>
+              </a:spcAft>
+            </a:pPr>
+            <a:r>
+              <a:rPr sz="1200" b="0">
+                <a:solidFill>
+                  <a:srgbClr val="2B2B2B"/>
+                </a:solidFill>
+                <a:latin typeface="맑은 고딕"/>
+              </a:rPr>
+              <a:t>위험등급이 표 안 체크(✓)로만 표시</a:t>
+            </a:r>
+          </a:p>
+          <a:p>
+            <a:pPr algn="l">
+              <a:spcAft>
+                <a:spcPts val="500"/>
+              </a:spcAft>
+            </a:pPr>
+            <a:r>
+              <a:rPr sz="1200" b="0">
+                <a:solidFill>
+                  <a:srgbClr val="2B2B2B"/>
+                </a:solidFill>
+                <a:latin typeface="맑은 고딕"/>
+              </a:rPr>
+              <a:t>→ 텍스트 추출만으로는 못 읽는다</a:t>
+            </a:r>
+          </a:p>
+        </p:txBody>
+      </p:sp>
+      <p:sp>
+        <p:nvSpPr>
+          <p:cNvPr id="14" name="TextBox 13"/>
+          <p:cNvSpPr txBox="1"/>
+          <p:nvPr/>
+        </p:nvSpPr>
+        <p:spPr>
+          <a:xfrm>
+            <a:off x="566928" y="3886200"/>
+            <a:ext cx="11064240" cy="2194560"/>
+          </a:xfrm>
+          <a:prstGeom prst="rect">
+            <a:avLst/>
+          </a:prstGeom>
+          <a:noFill/>
+        </p:spPr>
+        <p:txBody>
+          <a:bodyPr wrap="square">
+            <a:spAutoFit/>
+          </a:bodyPr>
+          <a:lstStyle/>
+          <a:p>
+            <a:pPr algn="l">
+              <a:spcAft>
+                <a:spcPts val="1000"/>
+              </a:spcAft>
+            </a:pPr>
+            <a:r>
+              <a:rPr sz="1500" b="1">
+                <a:solidFill>
+                  <a:srgbClr val="645B4C"/>
+                </a:solidFill>
+                <a:latin typeface="맑은 고딕"/>
+              </a:rPr>
+              <a:t>불완전판매가 성립하면 판매사는 배상·제재를 부담합니다. 그런데 위반의 상당수는 '서류 간 불일치'라, 서류를 한 장씩 검토하는 방식으로는 구조적으로 놓칩니다.</a:t>
+            </a:r>
+          </a:p>
+          <a:p>
+            <a:pPr algn="l">
+              <a:spcAft>
+                <a:spcPts val="600"/>
+              </a:spcAft>
+            </a:pPr>
+            <a:r>
+              <a:rPr sz="1300" b="0">
+                <a:solidFill>
+                  <a:srgbClr val="2B2B2B"/>
+                </a:solidFill>
+                <a:latin typeface="맑은 고딕"/>
+              </a:rPr>
+              <a:t>· 금융소비자보호법(2021 시행)은 적합성·설명의무 등 6대 판매원칙과 입증책임을 판매사에 부과합니다.</a:t>
+            </a:r>
+          </a:p>
+          <a:p>
+            <a:pPr algn="l">
+              <a:spcAft>
+                <a:spcPts val="600"/>
+              </a:spcAft>
+            </a:pPr>
+            <a:r>
+              <a:rPr sz="1300" b="0">
+                <a:solidFill>
+                  <a:srgbClr val="2B2B2B"/>
+                </a:solidFill>
+                <a:latin typeface="맑은 고딕"/>
+              </a:rPr>
+              <a:t>· 비대면 채널이 늘며 서류가 전자·통합 양식으로 다양해져, 사람이 형태별로 확인하는 부담이 커졌습니다.</a:t>
+            </a:r>
+          </a:p>
+        </p:txBody>
+      </p:sp>
+    </p:spTree>
+  </p:cSld>
+  <p:clrMapOvr>
+    <a:masterClrMapping/>
+  </p:clrMapOvr>
+</p:sld>
+</file>
+
+<file path=ppt/slides/slide20.xml><?xml version="1.0" encoding="utf-8"?>
 <p:sld xmlns:a="http://schemas.openxmlformats.org/drawingml/2006/main" xmlns:p="http://schemas.openxmlformats.org/presentationml/2006/main" xmlns:r="http://schemas.openxmlformats.org/officeDocument/2006/relationships">
   <p:cSld>
     <p:spTree>
@@ -13928,7 +15892,7 @@
                           </a:solidFill>
                           <a:latin typeface="맑은 고딕"/>
                         </a:rPr>
-                        <a:t>실물 25건 + 미사용 23건 · 테스트 83건</a:t>
+                        <a:t>실물 25건 + 미사용 23건 · 테스트 86건</a:t>
                       </a:r>
                     </a:p>
                   </a:txBody>
@@ -14466,7 +16430,7 @@
 </p:sld>
 </file>
 
-<file path=ppt/slides/slide2.xml><?xml version="1.0" encoding="utf-8"?>
+<file path=ppt/slides/slide21.xml><?xml version="1.0" encoding="utf-8"?>
 <p:sld xmlns:a="http://schemas.openxmlformats.org/drawingml/2006/main" xmlns:p="http://schemas.openxmlformats.org/presentationml/2006/main" xmlns:r="http://schemas.openxmlformats.org/officeDocument/2006/relationships">
   <p:cSld>
     <p:spTree>
@@ -14553,7 +16517,7 @@
                 </a:solidFill>
                 <a:latin typeface="맑은 고딕"/>
               </a:rPr>
-              <a:t>문제 정의</a:t>
+              <a:t>개발 체계 · 필요 자원 · 리스크</a:t>
             </a:r>
           </a:p>
           <a:p>
@@ -14569,7 +16533,7 @@
                 </a:solidFill>
                 <a:latin typeface="맑은 고딕"/>
               </a:rPr>
-              <a:t>서류 하나만 보면 원리적으로 잡을 수 없는 위반이 있다</a:t>
+              <a:t>누가 무엇을 맡고, 도입에 무엇이 필요하며, 무엇이 틀어질 수 있는지</a:t>
             </a:r>
           </a:p>
         </p:txBody>
@@ -14627,824 +16591,6 @@
                 </a:solidFill>
                 <a:latin typeface="맑은 고딕"/>
               </a:rPr>
-              <a:t>문제 정의·필요성</a:t>
-            </a:r>
-          </a:p>
-        </p:txBody>
-      </p:sp>
-      <p:sp>
-        <p:nvSpPr>
-          <p:cNvPr id="5" name="Rounded Rectangle 4"/>
-          <p:cNvSpPr/>
-          <p:nvPr/>
-        </p:nvSpPr>
-        <p:spPr>
-          <a:xfrm>
-            <a:off x="566928" y="1463040"/>
-            <a:ext cx="3520440" cy="2148840"/>
-          </a:xfrm>
-          <a:prstGeom prst="roundRect">
-            <a:avLst/>
-          </a:prstGeom>
-          <a:solidFill>
-            <a:srgbClr val="FFFFFF"/>
-          </a:solidFill>
-          <a:ln>
-            <a:solidFill>
-              <a:srgbClr val="E6E0D4"/>
-            </a:solidFill>
-          </a:ln>
-        </p:spPr>
-        <p:style>
-          <a:lnRef idx="1">
-            <a:schemeClr val="accent1"/>
-          </a:lnRef>
-          <a:fillRef idx="3">
-            <a:schemeClr val="accent1"/>
-          </a:fillRef>
-          <a:effectRef idx="2">
-            <a:schemeClr val="accent1"/>
-          </a:effectRef>
-          <a:fontRef idx="minor">
-            <a:schemeClr val="lt1"/>
-          </a:fontRef>
-        </p:style>
-        <p:txBody>
-          <a:bodyPr rtlCol="0" anchor="ctr"/>
-          <a:lstStyle/>
-          <a:p>
-            <a:pPr algn="ctr"/>
-          </a:p>
-        </p:txBody>
-      </p:sp>
-      <p:sp>
-        <p:nvSpPr>
-          <p:cNvPr id="6" name="Rectangle 5"/>
-          <p:cNvSpPr/>
-          <p:nvPr/>
-        </p:nvSpPr>
-        <p:spPr>
-          <a:xfrm>
-            <a:off x="566928" y="1463040"/>
-            <a:ext cx="54864" cy="2148840"/>
-          </a:xfrm>
-          <a:prstGeom prst="rect">
-            <a:avLst/>
-          </a:prstGeom>
-          <a:solidFill>
-            <a:srgbClr val="C62828"/>
-          </a:solidFill>
-          <a:ln>
-            <a:noFill/>
-          </a:ln>
-        </p:spPr>
-        <p:style>
-          <a:lnRef idx="1">
-            <a:schemeClr val="accent1"/>
-          </a:lnRef>
-          <a:fillRef idx="3">
-            <a:schemeClr val="accent1"/>
-          </a:fillRef>
-          <a:effectRef idx="2">
-            <a:schemeClr val="accent1"/>
-          </a:effectRef>
-          <a:fontRef idx="minor">
-            <a:schemeClr val="lt1"/>
-          </a:fontRef>
-        </p:style>
-        <p:txBody>
-          <a:bodyPr rtlCol="0" anchor="ctr"/>
-          <a:lstStyle/>
-          <a:p>
-            <a:pPr algn="ctr"/>
-          </a:p>
-        </p:txBody>
-      </p:sp>
-      <p:sp>
-        <p:nvSpPr>
-          <p:cNvPr id="7" name="TextBox 6"/>
-          <p:cNvSpPr txBox="1"/>
-          <p:nvPr/>
-        </p:nvSpPr>
-        <p:spPr>
-          <a:xfrm>
-            <a:off x="822960" y="1609344"/>
-            <a:ext cx="3063240" cy="1874520"/>
-          </a:xfrm>
-          <a:prstGeom prst="rect">
-            <a:avLst/>
-          </a:prstGeom>
-          <a:noFill/>
-        </p:spPr>
-        <p:txBody>
-          <a:bodyPr wrap="square">
-            <a:spAutoFit/>
-          </a:bodyPr>
-          <a:lstStyle/>
-          <a:p>
-            <a:pPr algn="l">
-              <a:spcAft>
-                <a:spcPts val="700"/>
-              </a:spcAft>
-            </a:pPr>
-            <a:r>
-              <a:rPr sz="1500" b="1">
-                <a:solidFill>
-                  <a:srgbClr val="645B4C"/>
-                </a:solidFill>
-                <a:latin typeface="맑은 고딕"/>
-              </a:rPr>
-              <a:t>① 위반은 서류 사이에 있다</a:t>
-            </a:r>
-          </a:p>
-          <a:p>
-            <a:pPr algn="l">
-              <a:spcAft>
-                <a:spcPts val="500"/>
-              </a:spcAft>
-            </a:pPr>
-            <a:r>
-              <a:rPr sz="1200" b="0">
-                <a:solidFill>
-                  <a:srgbClr val="2B2B2B"/>
-                </a:solidFill>
-                <a:latin typeface="맑은 고딕"/>
-              </a:rPr>
-              <a:t>진단표: 고객 투자성향 '안정형'</a:t>
-            </a:r>
-          </a:p>
-          <a:p>
-            <a:pPr algn="l">
-              <a:spcAft>
-                <a:spcPts val="500"/>
-              </a:spcAft>
-            </a:pPr>
-            <a:r>
-              <a:rPr sz="1200" b="0">
-                <a:solidFill>
-                  <a:srgbClr val="2B2B2B"/>
-                </a:solidFill>
-                <a:latin typeface="맑은 고딕"/>
-              </a:rPr>
-              <a:t>상품설명서: 위험등급 '1등급'</a:t>
-            </a:r>
-          </a:p>
-          <a:p>
-            <a:pPr algn="l">
-              <a:spcAft>
-                <a:spcPts val="500"/>
-              </a:spcAft>
-            </a:pPr>
-            <a:r>
-              <a:rPr sz="1200" b="0">
-                <a:solidFill>
-                  <a:srgbClr val="2B2B2B"/>
-                </a:solidFill>
-                <a:latin typeface="맑은 고딕"/>
-              </a:rPr>
-              <a:t>→ 각 서류는 정상. 대조해야 위반</a:t>
-            </a:r>
-          </a:p>
-          <a:p>
-            <a:pPr algn="l">
-              <a:spcAft>
-                <a:spcPts val="500"/>
-              </a:spcAft>
-            </a:pPr>
-            <a:r>
-              <a:rPr sz="1200" b="0">
-                <a:solidFill>
-                  <a:srgbClr val="2B2B2B"/>
-                </a:solidFill>
-                <a:latin typeface="맑은 고딕"/>
-              </a:rPr>
-              <a:t>금소법 17조 적합성원칙 위반 소지</a:t>
-            </a:r>
-          </a:p>
-        </p:txBody>
-      </p:sp>
-      <p:sp>
-        <p:nvSpPr>
-          <p:cNvPr id="8" name="Rounded Rectangle 7"/>
-          <p:cNvSpPr/>
-          <p:nvPr/>
-        </p:nvSpPr>
-        <p:spPr>
-          <a:xfrm>
-            <a:off x="4315968" y="1463040"/>
-            <a:ext cx="3520440" cy="2148840"/>
-          </a:xfrm>
-          <a:prstGeom prst="roundRect">
-            <a:avLst/>
-          </a:prstGeom>
-          <a:solidFill>
-            <a:srgbClr val="FFFFFF"/>
-          </a:solidFill>
-          <a:ln>
-            <a:solidFill>
-              <a:srgbClr val="E6E0D4"/>
-            </a:solidFill>
-          </a:ln>
-        </p:spPr>
-        <p:style>
-          <a:lnRef idx="1">
-            <a:schemeClr val="accent1"/>
-          </a:lnRef>
-          <a:fillRef idx="3">
-            <a:schemeClr val="accent1"/>
-          </a:fillRef>
-          <a:effectRef idx="2">
-            <a:schemeClr val="accent1"/>
-          </a:effectRef>
-          <a:fontRef idx="minor">
-            <a:schemeClr val="lt1"/>
-          </a:fontRef>
-        </p:style>
-        <p:txBody>
-          <a:bodyPr rtlCol="0" anchor="ctr"/>
-          <a:lstStyle/>
-          <a:p>
-            <a:pPr algn="ctr"/>
-          </a:p>
-        </p:txBody>
-      </p:sp>
-      <p:sp>
-        <p:nvSpPr>
-          <p:cNvPr id="9" name="Rectangle 8"/>
-          <p:cNvSpPr/>
-          <p:nvPr/>
-        </p:nvSpPr>
-        <p:spPr>
-          <a:xfrm>
-            <a:off x="4315968" y="1463040"/>
-            <a:ext cx="54864" cy="2148840"/>
-          </a:xfrm>
-          <a:prstGeom prst="rect">
-            <a:avLst/>
-          </a:prstGeom>
-          <a:solidFill>
-            <a:srgbClr val="FCAF17"/>
-          </a:solidFill>
-          <a:ln>
-            <a:noFill/>
-          </a:ln>
-        </p:spPr>
-        <p:style>
-          <a:lnRef idx="1">
-            <a:schemeClr val="accent1"/>
-          </a:lnRef>
-          <a:fillRef idx="3">
-            <a:schemeClr val="accent1"/>
-          </a:fillRef>
-          <a:effectRef idx="2">
-            <a:schemeClr val="accent1"/>
-          </a:effectRef>
-          <a:fontRef idx="minor">
-            <a:schemeClr val="lt1"/>
-          </a:fontRef>
-        </p:style>
-        <p:txBody>
-          <a:bodyPr rtlCol="0" anchor="ctr"/>
-          <a:lstStyle/>
-          <a:p>
-            <a:pPr algn="ctr"/>
-          </a:p>
-        </p:txBody>
-      </p:sp>
-      <p:sp>
-        <p:nvSpPr>
-          <p:cNvPr id="10" name="TextBox 9"/>
-          <p:cNvSpPr txBox="1"/>
-          <p:nvPr/>
-        </p:nvSpPr>
-        <p:spPr>
-          <a:xfrm>
-            <a:off x="4572000" y="1609344"/>
-            <a:ext cx="3063240" cy="1874520"/>
-          </a:xfrm>
-          <a:prstGeom prst="rect">
-            <a:avLst/>
-          </a:prstGeom>
-          <a:noFill/>
-        </p:spPr>
-        <p:txBody>
-          <a:bodyPr wrap="square">
-            <a:spAutoFit/>
-          </a:bodyPr>
-          <a:lstStyle/>
-          <a:p>
-            <a:pPr algn="l">
-              <a:spcAft>
-                <a:spcPts val="700"/>
-              </a:spcAft>
-            </a:pPr>
-            <a:r>
-              <a:rPr sz="1500" b="1">
-                <a:solidFill>
-                  <a:srgbClr val="645B4C"/>
-                </a:solidFill>
-                <a:latin typeface="맑은 고딕"/>
-              </a:rPr>
-              <a:t>② 사람이 눈으로 대조한다</a:t>
-            </a:r>
-          </a:p>
-          <a:p>
-            <a:pPr algn="l">
-              <a:spcAft>
-                <a:spcPts val="500"/>
-              </a:spcAft>
-            </a:pPr>
-            <a:r>
-              <a:rPr sz="1200" b="0">
-                <a:solidFill>
-                  <a:srgbClr val="2B2B2B"/>
-                </a:solidFill>
-                <a:latin typeface="맑은 고딕"/>
-              </a:rPr>
-              <a:t>판매 1건 = 서류 4종 교차 확인</a:t>
-            </a:r>
-          </a:p>
-          <a:p>
-            <a:pPr algn="l">
-              <a:spcAft>
-                <a:spcPts val="500"/>
-              </a:spcAft>
-            </a:pPr>
-            <a:r>
-              <a:rPr sz="1200" b="0">
-                <a:solidFill>
-                  <a:srgbClr val="2B2B2B"/>
-                </a:solidFill>
-                <a:latin typeface="맑은 고딕"/>
-              </a:rPr>
-              <a:t>고객 성향·상품 등급·설명일·계약일·서명</a:t>
-            </a:r>
-          </a:p>
-          <a:p>
-            <a:pPr algn="l">
-              <a:spcAft>
-                <a:spcPts val="500"/>
-              </a:spcAft>
-            </a:pPr>
-            <a:r>
-              <a:rPr sz="1200" b="0">
-                <a:solidFill>
-                  <a:srgbClr val="2B2B2B"/>
-                </a:solidFill>
-                <a:latin typeface="맑은 고딕"/>
-              </a:rPr>
-              <a:t>건수가 쌓이면 누락이 발생</a:t>
-            </a:r>
-          </a:p>
-          <a:p>
-            <a:pPr algn="l">
-              <a:spcAft>
-                <a:spcPts val="500"/>
-              </a:spcAft>
-            </a:pPr>
-            <a:r>
-              <a:rPr sz="1200" b="0">
-                <a:solidFill>
-                  <a:srgbClr val="2B2B2B"/>
-                </a:solidFill>
-                <a:latin typeface="맑은 고딕"/>
-              </a:rPr>
-              <a:t>사후 분쟁 시 입증 부담은 판매사</a:t>
-            </a:r>
-          </a:p>
-        </p:txBody>
-      </p:sp>
-      <p:sp>
-        <p:nvSpPr>
-          <p:cNvPr id="11" name="Rounded Rectangle 10"/>
-          <p:cNvSpPr/>
-          <p:nvPr/>
-        </p:nvSpPr>
-        <p:spPr>
-          <a:xfrm>
-            <a:off x="8065008" y="1463040"/>
-            <a:ext cx="3566160" cy="2148840"/>
-          </a:xfrm>
-          <a:prstGeom prst="roundRect">
-            <a:avLst/>
-          </a:prstGeom>
-          <a:solidFill>
-            <a:srgbClr val="FFFFFF"/>
-          </a:solidFill>
-          <a:ln>
-            <a:solidFill>
-              <a:srgbClr val="E6E0D4"/>
-            </a:solidFill>
-          </a:ln>
-        </p:spPr>
-        <p:style>
-          <a:lnRef idx="1">
-            <a:schemeClr val="accent1"/>
-          </a:lnRef>
-          <a:fillRef idx="3">
-            <a:schemeClr val="accent1"/>
-          </a:fillRef>
-          <a:effectRef idx="2">
-            <a:schemeClr val="accent1"/>
-          </a:effectRef>
-          <a:fontRef idx="minor">
-            <a:schemeClr val="lt1"/>
-          </a:fontRef>
-        </p:style>
-        <p:txBody>
-          <a:bodyPr rtlCol="0" anchor="ctr"/>
-          <a:lstStyle/>
-          <a:p>
-            <a:pPr algn="ctr"/>
-          </a:p>
-        </p:txBody>
-      </p:sp>
-      <p:sp>
-        <p:nvSpPr>
-          <p:cNvPr id="12" name="Rectangle 11"/>
-          <p:cNvSpPr/>
-          <p:nvPr/>
-        </p:nvSpPr>
-        <p:spPr>
-          <a:xfrm>
-            <a:off x="8065008" y="1463040"/>
-            <a:ext cx="54864" cy="2148840"/>
-          </a:xfrm>
-          <a:prstGeom prst="rect">
-            <a:avLst/>
-          </a:prstGeom>
-          <a:solidFill>
-            <a:srgbClr val="FCAF17"/>
-          </a:solidFill>
-          <a:ln>
-            <a:noFill/>
-          </a:ln>
-        </p:spPr>
-        <p:style>
-          <a:lnRef idx="1">
-            <a:schemeClr val="accent1"/>
-          </a:lnRef>
-          <a:fillRef idx="3">
-            <a:schemeClr val="accent1"/>
-          </a:fillRef>
-          <a:effectRef idx="2">
-            <a:schemeClr val="accent1"/>
-          </a:effectRef>
-          <a:fontRef idx="minor">
-            <a:schemeClr val="lt1"/>
-          </a:fontRef>
-        </p:style>
-        <p:txBody>
-          <a:bodyPr rtlCol="0" anchor="ctr"/>
-          <a:lstStyle/>
-          <a:p>
-            <a:pPr algn="ctr"/>
-          </a:p>
-        </p:txBody>
-      </p:sp>
-      <p:sp>
-        <p:nvSpPr>
-          <p:cNvPr id="13" name="TextBox 12"/>
-          <p:cNvSpPr txBox="1"/>
-          <p:nvPr/>
-        </p:nvSpPr>
-        <p:spPr>
-          <a:xfrm>
-            <a:off x="8321040" y="1609344"/>
-            <a:ext cx="3108960" cy="1874520"/>
-          </a:xfrm>
-          <a:prstGeom prst="rect">
-            <a:avLst/>
-          </a:prstGeom>
-          <a:noFill/>
-        </p:spPr>
-        <p:txBody>
-          <a:bodyPr wrap="square">
-            <a:spAutoFit/>
-          </a:bodyPr>
-          <a:lstStyle/>
-          <a:p>
-            <a:pPr algn="l">
-              <a:spcAft>
-                <a:spcPts val="700"/>
-              </a:spcAft>
-            </a:pPr>
-            <a:r>
-              <a:rPr sz="1500" b="1">
-                <a:solidFill>
-                  <a:srgbClr val="645B4C"/>
-                </a:solidFill>
-                <a:latin typeface="맑은 고딕"/>
-              </a:rPr>
-              <a:t>③ 서류 형태가 제각각</a:t>
-            </a:r>
-          </a:p>
-          <a:p>
-            <a:pPr algn="l">
-              <a:spcAft>
-                <a:spcPts val="500"/>
-              </a:spcAft>
-            </a:pPr>
-            <a:r>
-              <a:rPr sz="1200" b="0">
-                <a:solidFill>
-                  <a:srgbClr val="2B2B2B"/>
-                </a:solidFill>
-                <a:latin typeface="맑은 고딕"/>
-              </a:rPr>
-              <a:t>전자 PDF · 스캔본 · 모바일 스크린샷</a:t>
-            </a:r>
-          </a:p>
-          <a:p>
-            <a:pPr algn="l">
-              <a:spcAft>
-                <a:spcPts val="500"/>
-              </a:spcAft>
-            </a:pPr>
-            <a:r>
-              <a:rPr sz="1200" b="0">
-                <a:solidFill>
-                  <a:srgbClr val="2B2B2B"/>
-                </a:solidFill>
-                <a:latin typeface="맑은 고딕"/>
-              </a:rPr>
-              <a:t>비대면은 확인서가 계약서에 통합</a:t>
-            </a:r>
-          </a:p>
-          <a:p>
-            <a:pPr algn="l">
-              <a:spcAft>
-                <a:spcPts val="500"/>
-              </a:spcAft>
-            </a:pPr>
-            <a:r>
-              <a:rPr sz="1200" b="0">
-                <a:solidFill>
-                  <a:srgbClr val="2B2B2B"/>
-                </a:solidFill>
-                <a:latin typeface="맑은 고딕"/>
-              </a:rPr>
-              <a:t>위험등급이 표 안 체크(✓)로만 표시</a:t>
-            </a:r>
-          </a:p>
-          <a:p>
-            <a:pPr algn="l">
-              <a:spcAft>
-                <a:spcPts val="500"/>
-              </a:spcAft>
-            </a:pPr>
-            <a:r>
-              <a:rPr sz="1200" b="0">
-                <a:solidFill>
-                  <a:srgbClr val="2B2B2B"/>
-                </a:solidFill>
-                <a:latin typeface="맑은 고딕"/>
-              </a:rPr>
-              <a:t>→ 텍스트 추출만으로는 못 읽는다</a:t>
-            </a:r>
-          </a:p>
-        </p:txBody>
-      </p:sp>
-      <p:sp>
-        <p:nvSpPr>
-          <p:cNvPr id="14" name="TextBox 13"/>
-          <p:cNvSpPr txBox="1"/>
-          <p:nvPr/>
-        </p:nvSpPr>
-        <p:spPr>
-          <a:xfrm>
-            <a:off x="566928" y="3886200"/>
-            <a:ext cx="11064240" cy="2194560"/>
-          </a:xfrm>
-          <a:prstGeom prst="rect">
-            <a:avLst/>
-          </a:prstGeom>
-          <a:noFill/>
-        </p:spPr>
-        <p:txBody>
-          <a:bodyPr wrap="square">
-            <a:spAutoFit/>
-          </a:bodyPr>
-          <a:lstStyle/>
-          <a:p>
-            <a:pPr algn="l">
-              <a:spcAft>
-                <a:spcPts val="1000"/>
-              </a:spcAft>
-            </a:pPr>
-            <a:r>
-              <a:rPr sz="1500" b="1">
-                <a:solidFill>
-                  <a:srgbClr val="645B4C"/>
-                </a:solidFill>
-                <a:latin typeface="맑은 고딕"/>
-              </a:rPr>
-              <a:t>불완전판매가 성립하면 판매사는 배상·제재를 부담합니다. 그런데 위반의 상당수는 '서류 간 불일치'라, 서류를 한 장씩 검토하는 방식으로는 구조적으로 놓칩니다.</a:t>
-            </a:r>
-          </a:p>
-          <a:p>
-            <a:pPr algn="l">
-              <a:spcAft>
-                <a:spcPts val="600"/>
-              </a:spcAft>
-            </a:pPr>
-            <a:r>
-              <a:rPr sz="1300" b="0">
-                <a:solidFill>
-                  <a:srgbClr val="2B2B2B"/>
-                </a:solidFill>
-                <a:latin typeface="맑은 고딕"/>
-              </a:rPr>
-              <a:t>· 금융소비자보호법(2021 시행)은 적합성·설명의무 등 6대 판매원칙과 입증책임을 판매사에 부과합니다.</a:t>
-            </a:r>
-          </a:p>
-          <a:p>
-            <a:pPr algn="l">
-              <a:spcAft>
-                <a:spcPts val="600"/>
-              </a:spcAft>
-            </a:pPr>
-            <a:r>
-              <a:rPr sz="1300" b="0">
-                <a:solidFill>
-                  <a:srgbClr val="2B2B2B"/>
-                </a:solidFill>
-                <a:latin typeface="맑은 고딕"/>
-              </a:rPr>
-              <a:t>· 비대면 채널이 늘며 서류가 전자·통합 양식으로 다양해져, 사람이 형태별로 확인하는 부담이 커졌습니다.</a:t>
-            </a:r>
-          </a:p>
-        </p:txBody>
-      </p:sp>
-    </p:spTree>
-  </p:cSld>
-  <p:clrMapOvr>
-    <a:masterClrMapping/>
-  </p:clrMapOvr>
-</p:sld>
-</file>
-
-<file path=ppt/slides/slide20.xml><?xml version="1.0" encoding="utf-8"?>
-<p:sld xmlns:a="http://schemas.openxmlformats.org/drawingml/2006/main" xmlns:p="http://schemas.openxmlformats.org/presentationml/2006/main" xmlns:r="http://schemas.openxmlformats.org/officeDocument/2006/relationships">
-  <p:cSld>
-    <p:spTree>
-      <p:nvGrpSpPr>
-        <p:cNvPr id="1" name=""/>
-        <p:cNvGrpSpPr/>
-        <p:nvPr/>
-      </p:nvGrpSpPr>
-      <p:grpSpPr/>
-      <p:sp>
-        <p:nvSpPr>
-          <p:cNvPr id="2" name="Rectangle 1"/>
-          <p:cNvSpPr/>
-          <p:nvPr/>
-        </p:nvSpPr>
-        <p:spPr>
-          <a:xfrm>
-            <a:off x="0" y="0"/>
-            <a:ext cx="12191695" cy="82296"/>
-          </a:xfrm>
-          <a:prstGeom prst="rect">
-            <a:avLst/>
-          </a:prstGeom>
-          <a:solidFill>
-            <a:srgbClr val="FCAF17"/>
-          </a:solidFill>
-          <a:ln>
-            <a:noFill/>
-          </a:ln>
-        </p:spPr>
-        <p:style>
-          <a:lnRef idx="1">
-            <a:schemeClr val="accent1"/>
-          </a:lnRef>
-          <a:fillRef idx="3">
-            <a:schemeClr val="accent1"/>
-          </a:fillRef>
-          <a:effectRef idx="2">
-            <a:schemeClr val="accent1"/>
-          </a:effectRef>
-          <a:fontRef idx="minor">
-            <a:schemeClr val="lt1"/>
-          </a:fontRef>
-        </p:style>
-        <p:txBody>
-          <a:bodyPr rtlCol="0" anchor="ctr"/>
-          <a:lstStyle/>
-          <a:p>
-            <a:pPr algn="ctr"/>
-          </a:p>
-        </p:txBody>
-      </p:sp>
-      <p:sp>
-        <p:nvSpPr>
-          <p:cNvPr id="3" name="TextBox 2"/>
-          <p:cNvSpPr txBox="1"/>
-          <p:nvPr/>
-        </p:nvSpPr>
-        <p:spPr>
-          <a:xfrm>
-            <a:off x="566928" y="310896"/>
-            <a:ext cx="10424160" cy="914400"/>
-          </a:xfrm>
-          <a:prstGeom prst="rect">
-            <a:avLst/>
-          </a:prstGeom>
-          <a:noFill/>
-        </p:spPr>
-        <p:txBody>
-          <a:bodyPr wrap="square">
-            <a:spAutoFit/>
-          </a:bodyPr>
-          <a:lstStyle/>
-          <a:p>
-            <a:pPr algn="l">
-              <a:spcAft>
-                <a:spcPts val="200"/>
-              </a:spcAft>
-            </a:pPr>
-            <a:r>
-              <a:rPr sz="3000" b="1">
-                <a:solidFill>
-                  <a:srgbClr val="645B4C"/>
-                </a:solidFill>
-                <a:latin typeface="맑은 고딕"/>
-              </a:rPr>
-              <a:t>개발 체계 · 필요 자원 · 리스크</a:t>
-            </a:r>
-          </a:p>
-          <a:p>
-            <a:pPr algn="l">
-              <a:spcAft>
-                <a:spcPts val="600"/>
-              </a:spcAft>
-            </a:pPr>
-            <a:r>
-              <a:rPr sz="1400" b="0">
-                <a:solidFill>
-                  <a:srgbClr val="6B6B6B"/>
-                </a:solidFill>
-                <a:latin typeface="맑은 고딕"/>
-              </a:rPr>
-              <a:t>누가 무엇을 맡고, 도입에 무엇이 필요하며, 무엇이 틀어질 수 있는지</a:t>
-            </a:r>
-          </a:p>
-        </p:txBody>
-      </p:sp>
-      <p:sp>
-        <p:nvSpPr>
-          <p:cNvPr id="4" name="Rounded Rectangle 3"/>
-          <p:cNvSpPr/>
-          <p:nvPr/>
-        </p:nvSpPr>
-        <p:spPr>
-          <a:xfrm>
-            <a:off x="9646920" y="329184"/>
-            <a:ext cx="1965960" cy="384048"/>
-          </a:xfrm>
-          <a:prstGeom prst="roundRect">
-            <a:avLst/>
-          </a:prstGeom>
-          <a:solidFill>
-            <a:srgbClr val="FFF8DF"/>
-          </a:solidFill>
-          <a:ln>
-            <a:solidFill>
-              <a:srgbClr val="FCAF17"/>
-            </a:solidFill>
-          </a:ln>
-        </p:spPr>
-        <p:style>
-          <a:lnRef idx="1">
-            <a:schemeClr val="accent1"/>
-          </a:lnRef>
-          <a:fillRef idx="3">
-            <a:schemeClr val="accent1"/>
-          </a:fillRef>
-          <a:effectRef idx="2">
-            <a:schemeClr val="accent1"/>
-          </a:effectRef>
-          <a:fontRef idx="minor">
-            <a:schemeClr val="lt1"/>
-          </a:fontRef>
-        </p:style>
-        <p:txBody>
-          <a:bodyPr rtlCol="0" anchor="ctr" wrap="square"/>
-          <a:lstStyle/>
-          <a:p>
-            <a:pPr algn="ctr">
-              <a:spcAft>
-                <a:spcPts val="0"/>
-              </a:spcAft>
-            </a:pPr>
-            <a:r>
-              <a:rPr sz="1100" b="1">
-                <a:solidFill>
-                  <a:srgbClr val="645B4C"/>
-                </a:solidFill>
-                <a:latin typeface="맑은 고딕"/>
-              </a:rPr>
               <a:t>개발 계획의 구체성</a:t>
             </a:r>
           </a:p>
@@ -15859,7 +17005,7 @@
                 </a:solidFill>
                 <a:latin typeface="맑은 고딕"/>
               </a:rPr>
-              <a:t>   테스트 45건 → 83건</a:t>
+              <a:t>   테스트 45건 → 86건</a:t>
             </a:r>
           </a:p>
           <a:p>
@@ -16569,7 +17715,7 @@
 </p:sld>
 </file>
 
-<file path=ppt/slides/slide21.xml><?xml version="1.0" encoding="utf-8"?>
+<file path=ppt/slides/slide22.xml><?xml version="1.0" encoding="utf-8"?>
 <p:sld xmlns:a="http://schemas.openxmlformats.org/drawingml/2006/main" xmlns:p="http://schemas.openxmlformats.org/presentationml/2006/main" xmlns:r="http://schemas.openxmlformats.org/officeDocument/2006/relationships">
   <p:cSld>
     <p:spTree>
@@ -17487,7 +18633,7 @@
                           </a:solidFill>
                           <a:latin typeface="맑은 고딕"/>
                         </a:rPr>
-                        <a:t>완료 · 회귀 테스트 83건</a:t>
+                        <a:t>완료 · 회귀 테스트 86건</a:t>
                       </a:r>
                     </a:p>
                   </a:txBody>
@@ -17622,7 +18768,7 @@
 </p:sld>
 </file>
 
-<file path=ppt/slides/slide22.xml><?xml version="1.0" encoding="utf-8"?>
+<file path=ppt/slides/slide23.xml><?xml version="1.0" encoding="utf-8"?>
 <p:sld xmlns:a="http://schemas.openxmlformats.org/drawingml/2006/main" xmlns:p="http://schemas.openxmlformats.org/presentationml/2006/main" xmlns:r="http://schemas.openxmlformats.org/officeDocument/2006/relationships">
   <p:cSld>
     <p:spTree>

--- a/docs/기술설명서_초안.pptx
+++ b/docs/기술설명서_초안.pptx
@@ -10642,7 +10642,7 @@
                           </a:solidFill>
                           <a:latin typeface="맑은 고딕"/>
                         </a:rPr>
-                        <a:t>25건 전수 감사, 이상 징후 0건</a:t>
+                        <a:t>전수 감사 25건 — 이상 징후 0건</a:t>
                       </a:r>
                     </a:p>
                   </a:txBody>
@@ -10864,7 +10864,7 @@
                           </a:solidFill>
                           <a:latin typeface="맑은 고딕"/>
                         </a:rPr>
-                        <a:t>KB·삼성·미래에셋·신한·대우 실물 23건으로 재검증</a:t>
+                        <a:t>감사에 쓰지 않은 실물 23건(KB·삼성·미래에셋·신한·대우)으로 재검증</a:t>
                       </a:r>
                     </a:p>
                   </a:txBody>
@@ -15892,7 +15892,7 @@
                           </a:solidFill>
                           <a:latin typeface="맑은 고딕"/>
                         </a:rPr>
-                        <a:t>실물 25건 + 미사용 23건 · 테스트 86건</a:t>
+                        <a:t>전수 감사 25건 + 미사용 23건 · 테스트 86건</a:t>
                       </a:r>
                     </a:p>
                   </a:txBody>
@@ -26882,7 +26882,7 @@
                           </a:solidFill>
                           <a:latin typeface="맑은 고딕"/>
                         </a:rPr>
-                        <a:t>비정형 서류에서 문서유형·필드를 읽지 못함</a:t>
+                        <a:t>문서유형은 제목으로 가르지만, 비정형 서류에서 필드를 읽지 못함</a:t>
                       </a:r>
                     </a:p>
                   </a:txBody>
@@ -26909,7 +26909,7 @@
                           </a:solidFill>
                           <a:latin typeface="맑은 고딕"/>
                         </a:rPr>
-                        <a:t>실측 — 실물 22건에서 규칙 분류가 전부 확신 실패</a:t>
+                        <a:t>실측(규칙 단독, 실물 15건) — 유형 판정 15/15, 필드는 자리 165개 중 63개(38%)만 채움</a:t>
                       </a:r>
                     </a:p>
                   </a:txBody>
@@ -26992,7 +26992,7 @@
                           </a:solidFill>
                           <a:latin typeface="맑은 고딕"/>
                         </a:rPr>
-                        <a:t>실물 25건 전수 감사 이상 0건</a:t>
+                        <a:t>실측(전수 감사, 실물 25건) — 이상 0건</a:t>
                       </a:r>
                     </a:p>
                   </a:txBody>

--- a/docs/기술설명서_초안.pptx
+++ b/docs/기술설명서_초안.pptx
@@ -10247,7 +10247,7 @@
                 </a:solidFill>
                 <a:latin typeface="맑은 고딕"/>
               </a:rPr>
-              <a:t>86건</a:t>
+              <a:t>97건</a:t>
             </a:r>
           </a:p>
           <a:p>
@@ -15892,7 +15892,7 @@
                           </a:solidFill>
                           <a:latin typeface="맑은 고딕"/>
                         </a:rPr>
-                        <a:t>전수 감사 25건 + 미사용 23건 · 테스트 86건</a:t>
+                        <a:t>전수 감사 25건 + 미사용 23건 · 테스트 97건</a:t>
                       </a:r>
                     </a:p>
                   </a:txBody>
@@ -17005,7 +17005,7 @@
                 </a:solidFill>
                 <a:latin typeface="맑은 고딕"/>
               </a:rPr>
-              <a:t>   테스트 45건 → 86건</a:t>
+              <a:t>   테스트 45건 → 97건</a:t>
             </a:r>
           </a:p>
           <a:p>
@@ -18633,7 +18633,7 @@
                           </a:solidFill>
                           <a:latin typeface="맑은 고딕"/>
                         </a:rPr>
-                        <a:t>완료 · 회귀 테스트 86건</a:t>
+                        <a:t>완료 · 회귀 테스트 97건</a:t>
                       </a:r>
                     </a:p>
                   </a:txBody>

--- a/docs/기술설명서_초안.pptx
+++ b/docs/기술설명서_초안.pptx
@@ -8969,7 +8969,7 @@
         </p:nvGraphicFramePr>
         <p:xfrm>
           <a:off x="566928" y="1371600"/>
-          <a:ext cx="11064240" cy="1316736"/>
+          <a:ext cx="11064240" cy="1645920"/>
         </p:xfrm>
         <a:graphic>
           <a:graphicData uri="http://schemas.openxmlformats.org/drawingml/2006/table">
@@ -9249,6 +9249,89 @@
                           </a:solidFill>
                           <a:latin typeface="맑은 고딕"/>
                         </a:rPr>
+                        <a:t>설명 담당자</a:t>
+                      </a:r>
+                    </a:p>
+                  </a:txBody>
+                  <a:tcPr>
+                    <a:solidFill>
+                      <a:srgbClr val="FFFFFF"/>
+                    </a:solidFill>
+                  </a:tcPr>
+                </a:tc>
+                <a:tc>
+                  <a:txBody>
+                    <a:bodyPr wrap="square"/>
+                    <a:lstStyle/>
+                    <a:p>
+                      <a:pPr algn="l">
+                        <a:spcAft>
+                          <a:spcPts val="0"/>
+                        </a:spcAft>
+                      </a:pPr>
+                      <a:r>
+                        <a:rPr sz="1100" b="0">
+                          <a:solidFill>
+                            <a:srgbClr val="2B2B2B"/>
+                          </a:solidFill>
+                          <a:latin typeface="맑은 고딕"/>
+                        </a:rPr>
+                        <a:t>서류에 남아야 한다 — 없으면 주의</a:t>
+                      </a:r>
+                    </a:p>
+                  </a:txBody>
+                  <a:tcPr>
+                    <a:solidFill>
+                      <a:srgbClr val="FFFFFF"/>
+                    </a:solidFill>
+                  </a:tcPr>
+                </a:tc>
+                <a:tc>
+                  <a:txBody>
+                    <a:bodyPr wrap="square"/>
+                    <a:lstStyle/>
+                    <a:p>
+                      <a:pPr algn="l">
+                        <a:spcAft>
+                          <a:spcPts val="0"/>
+                        </a:spcAft>
+                      </a:pPr>
+                      <a:r>
+                        <a:rPr sz="1100" b="0">
+                          <a:solidFill>
+                            <a:srgbClr val="2B2B2B"/>
+                          </a:solidFill>
+                          <a:latin typeface="맑은 고딕"/>
+                        </a:rPr>
+                        <a:t>사람 담당자 없이 진행되는 것이 정상 — 없어도 통과</a:t>
+                      </a:r>
+                    </a:p>
+                  </a:txBody>
+                  <a:tcPr>
+                    <a:solidFill>
+                      <a:srgbClr val="FFFFFF"/>
+                    </a:solidFill>
+                  </a:tcPr>
+                </a:tc>
+              </a:tr>
+              <a:tr h="329184">
+                <a:tc>
+                  <a:txBody>
+                    <a:bodyPr wrap="square"/>
+                    <a:lstStyle/>
+                    <a:p>
+                      <a:pPr algn="l">
+                        <a:spcAft>
+                          <a:spcPts val="0"/>
+                        </a:spcAft>
+                      </a:pPr>
+                      <a:r>
+                        <a:rPr sz="1100" b="0">
+                          <a:solidFill>
+                            <a:srgbClr val="2B2B2B"/>
+                          </a:solidFill>
+                          <a:latin typeface="맑은 고딕"/>
+                        </a:rPr>
                         <a:t>같은 근거 조문</a:t>
                       </a:r>
                     </a:p>
@@ -9326,8 +9409,8 @@
         </p:nvSpPr>
         <p:spPr>
           <a:xfrm>
-            <a:off x="566928" y="3108960"/>
-            <a:ext cx="3520440" cy="1874519"/>
+            <a:off x="566928" y="3246120"/>
+            <a:ext cx="3520440" cy="2286000"/>
           </a:xfrm>
           <a:prstGeom prst="roundRect">
             <a:avLst/>
@@ -9371,8 +9454,8 @@
         </p:nvSpPr>
         <p:spPr>
           <a:xfrm>
-            <a:off x="566928" y="3108960"/>
-            <a:ext cx="54864" cy="1874519"/>
+            <a:off x="566928" y="3246120"/>
+            <a:ext cx="54864" cy="2286000"/>
           </a:xfrm>
           <a:prstGeom prst="rect">
             <a:avLst/>
@@ -9414,8 +9497,8 @@
         </p:nvSpPr>
         <p:spPr>
           <a:xfrm>
-            <a:off x="822960" y="3255264"/>
-            <a:ext cx="3063240" cy="1600199"/>
+            <a:off x="822960" y="3392424"/>
+            <a:ext cx="3063240" cy="2011680"/>
           </a:xfrm>
           <a:prstGeom prst="rect">
             <a:avLst/>
@@ -9517,8 +9600,8 @@
         </p:nvSpPr>
         <p:spPr>
           <a:xfrm>
-            <a:off x="4315968" y="3108960"/>
-            <a:ext cx="3520440" cy="1874519"/>
+            <a:off x="4315968" y="3246120"/>
+            <a:ext cx="3520440" cy="2286000"/>
           </a:xfrm>
           <a:prstGeom prst="roundRect">
             <a:avLst/>
@@ -9562,8 +9645,8 @@
         </p:nvSpPr>
         <p:spPr>
           <a:xfrm>
-            <a:off x="4315968" y="3108960"/>
-            <a:ext cx="54864" cy="1874519"/>
+            <a:off x="4315968" y="3246120"/>
+            <a:ext cx="54864" cy="2286000"/>
           </a:xfrm>
           <a:prstGeom prst="rect">
             <a:avLst/>
@@ -9605,8 +9688,8 @@
         </p:nvSpPr>
         <p:spPr>
           <a:xfrm>
-            <a:off x="4572000" y="3255264"/>
-            <a:ext cx="3063240" cy="1600199"/>
+            <a:off x="4572000" y="3392424"/>
+            <a:ext cx="3063240" cy="2011680"/>
           </a:xfrm>
           <a:prstGeom prst="rect">
             <a:avLst/>
@@ -9708,8 +9791,8 @@
         </p:nvSpPr>
         <p:spPr>
           <a:xfrm>
-            <a:off x="8065008" y="3108960"/>
-            <a:ext cx="3566160" cy="1874519"/>
+            <a:off x="8065008" y="3246120"/>
+            <a:ext cx="3566160" cy="2286000"/>
           </a:xfrm>
           <a:prstGeom prst="roundRect">
             <a:avLst/>
@@ -9753,8 +9836,8 @@
         </p:nvSpPr>
         <p:spPr>
           <a:xfrm>
-            <a:off x="8065008" y="3108960"/>
-            <a:ext cx="54864" cy="1874519"/>
+            <a:off x="8065008" y="3246120"/>
+            <a:ext cx="54864" cy="2286000"/>
           </a:xfrm>
           <a:prstGeom prst="rect">
             <a:avLst/>
@@ -9796,8 +9879,8 @@
         </p:nvSpPr>
         <p:spPr>
           <a:xfrm>
-            <a:off x="8321040" y="3255264"/>
-            <a:ext cx="3108960" cy="1600199"/>
+            <a:off x="8321040" y="3392424"/>
+            <a:ext cx="3108960" cy="2011680"/>
           </a:xfrm>
           <a:prstGeom prst="rect">
             <a:avLst/>
@@ -9822,7 +9905,7 @@
                 </a:solidFill>
                 <a:latin typeface="맑은 고딕"/>
               </a:rPr>
-              <a:t>고령투자자도 같은 구조</a:t>
+              <a:t>고령투자자·담당자도 같은 구조</a:t>
             </a:r>
           </a:p>
           <a:p>
@@ -9854,7 +9937,7 @@
                 </a:solidFill>
                 <a:latin typeface="맑은 고딕"/>
               </a:rPr>
-              <a:t>만 65세 이상도 담당자가 표시합니다.</a:t>
+              <a:t>만 65세 이상은 담당자가 표시하고,</a:t>
             </a:r>
           </a:p>
           <a:p>
@@ -9886,7 +9969,23 @@
                 </a:solidFill>
                 <a:latin typeface="맑은 고딕"/>
               </a:rPr>
-              <a:t>사유 — 고위험(1·2등급)·고령·부적합</a:t>
+              <a:t>설명 담당자는 서류에서 뽑아 판매</a:t>
+            </a:r>
+          </a:p>
+          <a:p>
+            <a:pPr algn="l">
+              <a:spcAft>
+                <a:spcPts val="500"/>
+              </a:spcAft>
+            </a:pPr>
+            <a:r>
+              <a:rPr sz="1200" b="0">
+                <a:solidFill>
+                  <a:srgbClr val="2B2B2B"/>
+                </a:solidFill>
+                <a:latin typeface="맑은 고딕"/>
+              </a:rPr>
+              <a:t>건마다 표시 — 책임 소재의 근거입니다.</a:t>
             </a:r>
           </a:p>
         </p:txBody>
@@ -9899,7 +9998,7 @@
         </p:nvSpPr>
         <p:spPr>
           <a:xfrm>
-            <a:off x="566928" y="5193792"/>
+            <a:off x="566928" y="5669280"/>
             <a:ext cx="11064240" cy="640080"/>
           </a:xfrm>
           <a:prstGeom prst="rect">
@@ -13706,7 +13805,39 @@
                 </a:solidFill>
                 <a:latin typeface="맑은 고딕"/>
               </a:rPr>
-              <a:t>적용 조항이 내보내기 파일에도 같이 담긴다</a:t>
+              <a:t>판정 근거는 문서·필드 단위로 남기고, '원문 근거 보기'로 그 값이</a:t>
+            </a:r>
+          </a:p>
+          <a:p>
+            <a:pPr algn="l">
+              <a:spcAft>
+                <a:spcPts val="500"/>
+              </a:spcAft>
+            </a:pPr>
+            <a:r>
+              <a:rPr sz="1200" b="0">
+                <a:solidFill>
+                  <a:srgbClr val="2B2B2B"/>
+                </a:solidFill>
+                <a:latin typeface="맑은 고딕"/>
+              </a:rPr>
+              <a:t>   실제로 있는 PDF 위치를 좌표째 펼쳐 준다</a:t>
+            </a:r>
+          </a:p>
+          <a:p>
+            <a:pPr algn="l">
+              <a:spcAft>
+                <a:spcPts val="500"/>
+              </a:spcAft>
+            </a:pPr>
+            <a:r>
+              <a:rPr sz="1200" b="0">
+                <a:solidFill>
+                  <a:srgbClr val="2B2B2B"/>
+                </a:solidFill>
+                <a:latin typeface="맑은 고딕"/>
+              </a:rPr>
+              <a:t>적용 조항과 근거가 내보내기 파일에도 같이 담긴다</a:t>
             </a:r>
           </a:p>
         </p:txBody>
@@ -25275,7 +25406,7 @@
         </p:nvGraphicFramePr>
         <p:xfrm>
           <a:off x="566928" y="1371600"/>
-          <a:ext cx="11064240" cy="1975104"/>
+          <a:ext cx="11064240" cy="2304288"/>
         </p:xfrm>
         <a:graphic>
           <a:graphicData uri="http://schemas.openxmlformats.org/drawingml/2006/table">
@@ -25938,7 +26069,117 @@
                           </a:solidFill>
                           <a:latin typeface="맑은 고딕"/>
                         </a:rPr>
-                        <a:t>규칙별 확정 근거 조문 · 적용 조항 형광 표시</a:t>
+                        <a:t>규칙별 확정 근거 조문 · 판정 근거를 PDF 좌표까지 연결</a:t>
+                      </a:r>
+                    </a:p>
+                  </a:txBody>
+                  <a:tcPr>
+                    <a:solidFill>
+                      <a:srgbClr val="FFFFFF"/>
+                    </a:solidFill>
+                  </a:tcPr>
+                </a:tc>
+              </a:tr>
+              <a:tr h="329184">
+                <a:tc>
+                  <a:txBody>
+                    <a:bodyPr wrap="square"/>
+                    <a:lstStyle/>
+                    <a:p>
+                      <a:pPr algn="l">
+                        <a:spcAft>
+                          <a:spcPts val="0"/>
+                        </a:spcAft>
+                      </a:pPr>
+                      <a:r>
+                        <a:rPr sz="1100" b="0">
+                          <a:solidFill>
+                            <a:srgbClr val="2B2B2B"/>
+                          </a:solidFill>
+                          <a:latin typeface="맑은 고딕"/>
+                        </a:rPr>
+                        <a:t>⑥ 조치</a:t>
+                      </a:r>
+                    </a:p>
+                  </a:txBody>
+                  <a:tcPr>
+                    <a:solidFill>
+                      <a:srgbClr val="FFFFFF"/>
+                    </a:solidFill>
+                  </a:tcPr>
+                </a:tc>
+                <a:tc>
+                  <a:txBody>
+                    <a:bodyPr wrap="square"/>
+                    <a:lstStyle/>
+                    <a:p>
+                      <a:pPr algn="l">
+                        <a:spcAft>
+                          <a:spcPts val="0"/>
+                        </a:spcAft>
+                      </a:pPr>
+                      <a:r>
+                        <a:rPr sz="1100" b="0">
+                          <a:solidFill>
+                            <a:srgbClr val="2B2B2B"/>
+                          </a:solidFill>
+                          <a:latin typeface="맑은 고딕"/>
+                        </a:rPr>
+                        <a:t>담당자·판매 차단·완료 기준 결정</a:t>
+                      </a:r>
+                    </a:p>
+                  </a:txBody>
+                  <a:tcPr>
+                    <a:solidFill>
+                      <a:srgbClr val="FFFFFF"/>
+                    </a:solidFill>
+                  </a:tcPr>
+                </a:tc>
+                <a:tc>
+                  <a:txBody>
+                    <a:bodyPr wrap="square"/>
+                    <a:lstStyle/>
+                    <a:p>
+                      <a:pPr algn="l">
+                        <a:spcAft>
+                          <a:spcPts val="0"/>
+                        </a:spcAft>
+                      </a:pPr>
+                      <a:r>
+                        <a:rPr sz="1100" b="0">
+                          <a:solidFill>
+                            <a:srgbClr val="2B2B2B"/>
+                          </a:solidFill>
+                          <a:latin typeface="맑은 고딕"/>
+                        </a:rPr>
+                        <a:t>없음</a:t>
+                      </a:r>
+                    </a:p>
+                  </a:txBody>
+                  <a:tcPr>
+                    <a:solidFill>
+                      <a:srgbClr val="FFFFFF"/>
+                    </a:solidFill>
+                  </a:tcPr>
+                </a:tc>
+                <a:tc>
+                  <a:txBody>
+                    <a:bodyPr wrap="square"/>
+                    <a:lstStyle/>
+                    <a:p>
+                      <a:pPr algn="l">
+                        <a:spcAft>
+                          <a:spcPts val="0"/>
+                        </a:spcAft>
+                      </a:pPr>
+                      <a:r>
+                        <a:rPr sz="1100" b="0">
+                          <a:solidFill>
+                            <a:srgbClr val="2B2B2B"/>
+                          </a:solidFill>
+                          <a:latin typeface="맑은 고딕"/>
+                        </a:rPr>
+                        <a:t>규칙이 소유. LLM은 '이 건에서 확인할 것'만 좁혀 준다</a:t>
                       </a:r>
                     </a:p>
                   </a:txBody>
@@ -26075,7 +26316,7 @@
                 </a:solidFill>
                 <a:latin typeface="맑은 고딕"/>
               </a:rPr>
-              <a:t>LLM은 판정을 바꿀 수 없다 — 구조적으로</a:t>
+              <a:t>LLM은 판정도 조치도 바꿀 수 없다</a:t>
             </a:r>
           </a:p>
           <a:p>
@@ -26124,6 +26365,22 @@
                 <a:latin typeface="맑은 고딕"/>
               </a:rPr>
               <a:t>LLM이 만드는 객체에 '판정' 필드가 없음</a:t>
+            </a:r>
+          </a:p>
+          <a:p>
+            <a:pPr algn="l">
+              <a:spcAft>
+                <a:spcPts val="500"/>
+              </a:spcAft>
+            </a:pPr>
+            <a:r>
+              <a:rPr sz="1200" b="0">
+                <a:solidFill>
+                  <a:srgbClr val="2B2B2B"/>
+                </a:solidFill>
+                <a:latin typeface="맑은 고딕"/>
+              </a:rPr>
+              <a:t>담당자·판매 차단·완료 기준도 규칙이 정한다</a:t>
             </a:r>
           </a:p>
           <a:p>

--- a/docs/기술설명서_초안.pptx
+++ b/docs/기술설명서_초안.pptx
@@ -9409,8 +9409,8 @@
         </p:nvSpPr>
         <p:spPr>
           <a:xfrm>
-            <a:off x="566928" y="3246120"/>
-            <a:ext cx="3520440" cy="2286000"/>
+            <a:off x="566928" y="3108960"/>
+            <a:ext cx="3520440" cy="2194560"/>
           </a:xfrm>
           <a:prstGeom prst="roundRect">
             <a:avLst/>
@@ -9454,8 +9454,8 @@
         </p:nvSpPr>
         <p:spPr>
           <a:xfrm>
-            <a:off x="566928" y="3246120"/>
-            <a:ext cx="54864" cy="2286000"/>
+            <a:off x="566928" y="3108960"/>
+            <a:ext cx="54864" cy="2194560"/>
           </a:xfrm>
           <a:prstGeom prst="rect">
             <a:avLst/>
@@ -9497,8 +9497,8 @@
         </p:nvSpPr>
         <p:spPr>
           <a:xfrm>
-            <a:off x="822960" y="3392424"/>
-            <a:ext cx="3063240" cy="2011680"/>
+            <a:off x="822960" y="3255264"/>
+            <a:ext cx="3063240" cy="1920240"/>
           </a:xfrm>
           <a:prstGeom prst="rect">
             <a:avLst/>
@@ -9600,8 +9600,8 @@
         </p:nvSpPr>
         <p:spPr>
           <a:xfrm>
-            <a:off x="4315968" y="3246120"/>
-            <a:ext cx="3520440" cy="2286000"/>
+            <a:off x="4315968" y="3108960"/>
+            <a:ext cx="3520440" cy="2194560"/>
           </a:xfrm>
           <a:prstGeom prst="roundRect">
             <a:avLst/>
@@ -9645,8 +9645,8 @@
         </p:nvSpPr>
         <p:spPr>
           <a:xfrm>
-            <a:off x="4315968" y="3246120"/>
-            <a:ext cx="54864" cy="2286000"/>
+            <a:off x="4315968" y="3108960"/>
+            <a:ext cx="54864" cy="2194560"/>
           </a:xfrm>
           <a:prstGeom prst="rect">
             <a:avLst/>
@@ -9688,8 +9688,8 @@
         </p:nvSpPr>
         <p:spPr>
           <a:xfrm>
-            <a:off x="4572000" y="3392424"/>
-            <a:ext cx="3063240" cy="2011680"/>
+            <a:off x="4572000" y="3255264"/>
+            <a:ext cx="3063240" cy="1920240"/>
           </a:xfrm>
           <a:prstGeom prst="rect">
             <a:avLst/>
@@ -9791,8 +9791,8 @@
         </p:nvSpPr>
         <p:spPr>
           <a:xfrm>
-            <a:off x="8065008" y="3246120"/>
-            <a:ext cx="3566160" cy="2286000"/>
+            <a:off x="8065008" y="3108960"/>
+            <a:ext cx="3566160" cy="2194560"/>
           </a:xfrm>
           <a:prstGeom prst="roundRect">
             <a:avLst/>
@@ -9836,8 +9836,8 @@
         </p:nvSpPr>
         <p:spPr>
           <a:xfrm>
-            <a:off x="8065008" y="3246120"/>
-            <a:ext cx="54864" cy="2286000"/>
+            <a:off x="8065008" y="3108960"/>
+            <a:ext cx="54864" cy="2194560"/>
           </a:xfrm>
           <a:prstGeom prst="rect">
             <a:avLst/>
@@ -9879,8 +9879,8 @@
         </p:nvSpPr>
         <p:spPr>
           <a:xfrm>
-            <a:off x="8321040" y="3392424"/>
-            <a:ext cx="3108960" cy="2011680"/>
+            <a:off x="8321040" y="3255264"/>
+            <a:ext cx="3108960" cy="1920240"/>
           </a:xfrm>
           <a:prstGeom prst="rect">
             <a:avLst/>
@@ -9998,8 +9998,8 @@
         </p:nvSpPr>
         <p:spPr>
           <a:xfrm>
-            <a:off x="566928" y="5669280"/>
-            <a:ext cx="11064240" cy="640080"/>
+            <a:off x="566928" y="5349240"/>
+            <a:ext cx="11064240" cy="365760"/>
           </a:xfrm>
           <a:prstGeom prst="rect">
             <a:avLst/>
@@ -10026,6 +10026,74 @@
               </a:rPr>
               <a:t>이 구분이 없으면 정상적인 비대면 판매가 전부 '서류 누락'으로 뜹니다. 컴플라이언스 도구에서 오탐은 곧 도입 실패입니다.</a:t>
             </a:r>
+          </a:p>
+        </p:txBody>
+      </p:sp>
+      <p:pic>
+        <p:nvPicPr>
+          <p:cNvPr id="16" name="Picture 15" descr="06_판매건요약.png"/>
+          <p:cNvPicPr>
+            <a:picLocks noChangeAspect="1"/>
+          </p:cNvPicPr>
+          <p:nvPr/>
+        </p:nvPicPr>
+        <p:blipFill>
+          <a:blip r:embed="rId2"/>
+          <a:srcRect/>
+          <a:stretch>
+            <a:fillRect/>
+          </a:stretch>
+        </p:blipFill>
+        <p:spPr>
+          <a:xfrm>
+            <a:off x="566928" y="5760720"/>
+            <a:ext cx="11064240" cy="1051560"/>
+          </a:xfrm>
+          <a:prstGeom prst="rect">
+            <a:avLst/>
+          </a:prstGeom>
+        </p:spPr>
+      </p:pic>
+      <p:sp>
+        <p:nvSpPr>
+          <p:cNvPr id="17" name="Rounded Rectangle 16"/>
+          <p:cNvSpPr/>
+          <p:nvPr/>
+        </p:nvSpPr>
+        <p:spPr>
+          <a:xfrm>
+            <a:off x="566928" y="5760720"/>
+            <a:ext cx="11064240" cy="1051560"/>
+          </a:xfrm>
+          <a:prstGeom prst="roundRect">
+            <a:avLst/>
+          </a:prstGeom>
+          <a:noFill/>
+          <a:ln>
+            <a:solidFill>
+              <a:srgbClr val="E6E0D4"/>
+            </a:solidFill>
+          </a:ln>
+        </p:spPr>
+        <p:style>
+          <a:lnRef idx="1">
+            <a:schemeClr val="accent1"/>
+          </a:lnRef>
+          <a:fillRef idx="3">
+            <a:schemeClr val="accent1"/>
+          </a:fillRef>
+          <a:effectRef idx="2">
+            <a:schemeClr val="accent1"/>
+          </a:effectRef>
+          <a:fontRef idx="minor">
+            <a:schemeClr val="lt1"/>
+          </a:fontRef>
+        </p:style>
+        <p:txBody>
+          <a:bodyPr rtlCol="0" anchor="ctr"/>
+          <a:lstStyle/>
+          <a:p>
+            <a:pPr algn="ctr"/>
           </a:p>
         </p:txBody>
       </p:sp>
@@ -11634,7 +11702,7 @@
                           </a:solidFill>
                           <a:latin typeface="맑은 고딕"/>
                         </a:rPr>
-                        <a:t>약 50초</a:t>
+                        <a:t>약 30~50초</a:t>
                       </a:r>
                     </a:p>
                   </a:txBody>
@@ -12014,8 +12082,8 @@
         </p:nvSpPr>
         <p:spPr>
           <a:xfrm>
-            <a:off x="566928" y="3749039"/>
-            <a:ext cx="5394960" cy="2331720"/>
+            <a:off x="566928" y="3200400"/>
+            <a:ext cx="5394960" cy="1755648"/>
           </a:xfrm>
           <a:prstGeom prst="roundRect">
             <a:avLst/>
@@ -12059,8 +12127,8 @@
         </p:nvSpPr>
         <p:spPr>
           <a:xfrm>
-            <a:off x="566928" y="3749039"/>
-            <a:ext cx="54864" cy="2331720"/>
+            <a:off x="566928" y="3200400"/>
+            <a:ext cx="54864" cy="1755648"/>
           </a:xfrm>
           <a:prstGeom prst="rect">
             <a:avLst/>
@@ -12102,8 +12170,8 @@
         </p:nvSpPr>
         <p:spPr>
           <a:xfrm>
-            <a:off x="822960" y="3895343"/>
-            <a:ext cx="4937760" cy="2057400"/>
+            <a:off x="822960" y="3346704"/>
+            <a:ext cx="4937760" cy="1481328"/>
           </a:xfrm>
           <a:prstGeom prst="rect">
             <a:avLst/>
@@ -12176,7 +12244,7 @@
                 </a:solidFill>
                 <a:latin typeface="맑은 고딕"/>
               </a:rPr>
-              <a:t>모델 승격(고가 모델) 발동 0회 — 저가 모델로 충분함을 교차 검증</a:t>
+              <a:t>모델 승격 발동 0회 — 저가 모델로 충분(교차 검증)</a:t>
             </a:r>
           </a:p>
           <a:p>
@@ -12205,8 +12273,8 @@
         </p:nvSpPr>
         <p:spPr>
           <a:xfrm>
-            <a:off x="6172200" y="3749039"/>
-            <a:ext cx="5458968" cy="2331720"/>
+            <a:off x="6172200" y="3200400"/>
+            <a:ext cx="5458968" cy="1755648"/>
           </a:xfrm>
           <a:prstGeom prst="roundRect">
             <a:avLst/>
@@ -12250,8 +12318,8 @@
         </p:nvSpPr>
         <p:spPr>
           <a:xfrm>
-            <a:off x="6172200" y="3749039"/>
-            <a:ext cx="54864" cy="2331720"/>
+            <a:off x="6172200" y="3200400"/>
+            <a:ext cx="54864" cy="1755648"/>
           </a:xfrm>
           <a:prstGeom prst="rect">
             <a:avLst/>
@@ -12293,8 +12361,8 @@
         </p:nvSpPr>
         <p:spPr>
           <a:xfrm>
-            <a:off x="6428232" y="3895343"/>
-            <a:ext cx="5001768" cy="2057400"/>
+            <a:off x="6428232" y="3346704"/>
+            <a:ext cx="5001768" cy="1481328"/>
           </a:xfrm>
           <a:prstGeom prst="rect">
             <a:avLst/>
@@ -12385,6 +12453,74 @@
               </a:rPr>
               <a:t>검사 범위를 명시해 과신을 방지</a:t>
             </a:r>
+          </a:p>
+        </p:txBody>
+      </p:sp>
+      <p:pic>
+        <p:nvPicPr>
+          <p:cNvPr id="12" name="Picture 11" descr="07_정량지표스트립.png"/>
+          <p:cNvPicPr>
+            <a:picLocks noChangeAspect="1"/>
+          </p:cNvPicPr>
+          <p:nvPr/>
+        </p:nvPicPr>
+        <p:blipFill>
+          <a:blip r:embed="rId2"/>
+          <a:srcRect b="119"/>
+          <a:stretch>
+            <a:fillRect/>
+          </a:stretch>
+        </p:blipFill>
+        <p:spPr>
+          <a:xfrm>
+            <a:off x="566928" y="5029200"/>
+            <a:ext cx="11064240" cy="1819656"/>
+          </a:xfrm>
+          <a:prstGeom prst="rect">
+            <a:avLst/>
+          </a:prstGeom>
+        </p:spPr>
+      </p:pic>
+      <p:sp>
+        <p:nvSpPr>
+          <p:cNvPr id="13" name="Rounded Rectangle 12"/>
+          <p:cNvSpPr/>
+          <p:nvPr/>
+        </p:nvSpPr>
+        <p:spPr>
+          <a:xfrm>
+            <a:off x="566928" y="5029200"/>
+            <a:ext cx="11064240" cy="1819656"/>
+          </a:xfrm>
+          <a:prstGeom prst="roundRect">
+            <a:avLst/>
+          </a:prstGeom>
+          <a:noFill/>
+          <a:ln>
+            <a:solidFill>
+              <a:srgbClr val="E6E0D4"/>
+            </a:solidFill>
+          </a:ln>
+        </p:spPr>
+        <p:style>
+          <a:lnRef idx="1">
+            <a:schemeClr val="accent1"/>
+          </a:lnRef>
+          <a:fillRef idx="3">
+            <a:schemeClr val="accent1"/>
+          </a:fillRef>
+          <a:effectRef idx="2">
+            <a:schemeClr val="accent1"/>
+          </a:effectRef>
+          <a:fontRef idx="minor">
+            <a:schemeClr val="lt1"/>
+          </a:fontRef>
+        </p:style>
+        <p:txBody>
+          <a:bodyPr rtlCol="0" anchor="ctr"/>
+          <a:lstStyle/>
+          <a:p>
+            <a:pPr algn="ctr"/>
           </a:p>
         </p:txBody>
       </p:sp>
@@ -24624,7 +24760,7 @@
                 </a:solidFill>
                 <a:latin typeface="맑은 고딕"/>
               </a:rPr>
-              <a:t>자동 검증 (약 50초)</a:t>
+              <a:t>자동 검증 (약 30~50초)</a:t>
             </a:r>
           </a:p>
         </p:txBody>
